--- a/NCT_Water_Nexus_Report_and_Pricing.pptx
+++ b/NCT_Water_Nexus_Report_and_Pricing.pptx
@@ -13,8 +13,6 @@
     <p:sldId id="261" r:id="rId12"/>
     <p:sldId id="262" r:id="rId13"/>
     <p:sldId id="263" r:id="rId14"/>
-    <p:sldId id="264" r:id="rId15"/>
-    <p:sldId id="265" r:id="rId16"/>
   </p:sldIdLst>
   <p:sldSz cx="12191695" cy="6858000" type="screen4x3"/>
   <p:notesSz cx="6858000" cy="9144000"/>
@@ -3158,172 +3156,6 @@
         </p:nvSpPr>
         <p:spPr>
           <a:xfrm>
-            <a:off x="1280160" y="1280160"/>
-            <a:ext cx="9601200" cy="4114800"/>
-          </a:xfrm>
-          <a:prstGeom prst="rect">
-            <a:avLst/>
-          </a:prstGeom>
-          <a:noFill/>
-        </p:spPr>
-        <p:txBody>
-          <a:bodyPr wrap="square">
-            <a:spAutoFit/>
-          </a:bodyPr>
-          <a:lstStyle/>
-          <a:p>
-            <a:pPr>
-              <a:spcAft>
-                <a:spcPts val="1200"/>
-              </a:spcAft>
-              <a:defRPr sz="1300" b="1">
-                <a:solidFill>
-                  <a:srgbClr val="2DD4BF"/>
-                </a:solidFill>
-              </a:defRPr>
-            </a:pPr>
-            <a:r>
-              <a:t>💧 INDUSTRIAL IOT &amp; SCADA WATER MONITORING</a:t>
-            </a:r>
-          </a:p>
-          <a:p>
-            <a:pPr>
-              <a:spcAft>
-                <a:spcPts val="800"/>
-              </a:spcAft>
-              <a:defRPr sz="3800" b="1">
-                <a:solidFill>
-                  <a:srgbClr val="FFFFFF"/>
-                </a:solidFill>
-              </a:defRPr>
-            </a:pPr>
-            <a:r>
-              <a:t>NCT WATER NEXUS PRO</a:t>
-            </a:r>
-          </a:p>
-          <a:p>
-            <a:pPr>
-              <a:spcAft>
-                <a:spcPts val="2400"/>
-              </a:spcAft>
-              <a:defRPr sz="1800">
-                <a:solidFill>
-                  <a:srgbClr val="CBD5E1"/>
-                </a:solidFill>
-              </a:defRPr>
-            </a:pPr>
-            <a:r>
-              <a:t>Smart Water Quality Intelligence, Real-Time IoT Telemetry &amp; Analytics Platform</a:t>
-            </a:r>
-          </a:p>
-          <a:p>
-            <a:pPr>
-              <a:spcAft>
-                <a:spcPts val="3600"/>
-              </a:spcAft>
-              <a:defRPr sz="1300">
-                <a:solidFill>
-                  <a:srgbClr val="94A3B8"/>
-                </a:solidFill>
-              </a:defRPr>
-            </a:pPr>
-            <a:r>
-              <a:t>ระบบตรวจวัดและติดตามคุณภาพน้ำแบบ Real-Time ตลอด 24 ชม. | แดชบอร์ด SCADA &amp; Mobile App | รายงานข้อเสนอราคาและแพ็กเกจการติดตั้ง (Commercial Proposal)</a:t>
-            </a:r>
-          </a:p>
-          <a:p>
-            <a:pPr>
-              <a:defRPr sz="1100">
-                <a:solidFill>
-                  <a:srgbClr val="2DD4BF"/>
-                </a:solidFill>
-              </a:defRPr>
-            </a:pPr>
-            <a:r>
-              <a:t>NCT Water Solutions  •  System Version 2.5 Pro  •  August 2026</a:t>
-            </a:r>
-          </a:p>
-        </p:txBody>
-      </p:sp>
-    </p:spTree>
-  </p:cSld>
-  <p:clrMapOvr>
-    <a:masterClrMapping/>
-  </p:clrMapOvr>
-</p:sld>
-</file>
-
-<file path=ppt/slides/slide10.xml><?xml version="1.0" encoding="utf-8"?>
-<p:sld xmlns:a="http://schemas.openxmlformats.org/drawingml/2006/main" xmlns:p="http://schemas.openxmlformats.org/presentationml/2006/main" xmlns:r="http://schemas.openxmlformats.org/officeDocument/2006/relationships">
-  <p:cSld>
-    <p:bg>
-      <p:bgPr>
-        <a:solidFill>
-          <a:srgbClr val="0F172A"/>
-        </a:solidFill>
-        <a:effectLst/>
-      </p:bgPr>
-    </p:bg>
-    <p:spTree>
-      <p:nvGrpSpPr>
-        <p:cNvPr id="1" name=""/>
-        <p:cNvGrpSpPr/>
-        <p:nvPr/>
-      </p:nvGrpSpPr>
-      <p:grpSpPr/>
-      <p:sp>
-        <p:nvSpPr>
-          <p:cNvPr id="2" name="Rounded Rectangle 1"/>
-          <p:cNvSpPr/>
-          <p:nvPr/>
-        </p:nvSpPr>
-        <p:spPr>
-          <a:xfrm>
-            <a:off x="731520" y="731520"/>
-            <a:ext cx="10728655" cy="5394960"/>
-          </a:xfrm>
-          <a:prstGeom prst="roundRect">
-            <a:avLst/>
-          </a:prstGeom>
-          <a:solidFill>
-            <a:srgbClr val="1E293B"/>
-          </a:solidFill>
-          <a:ln w="19050">
-            <a:solidFill>
-              <a:srgbClr val="0284C7"/>
-            </a:solidFill>
-          </a:ln>
-        </p:spPr>
-        <p:style>
-          <a:lnRef idx="1">
-            <a:schemeClr val="accent1"/>
-          </a:lnRef>
-          <a:fillRef idx="3">
-            <a:schemeClr val="accent1"/>
-          </a:fillRef>
-          <a:effectRef idx="2">
-            <a:schemeClr val="accent1"/>
-          </a:effectRef>
-          <a:fontRef idx="minor">
-            <a:schemeClr val="lt1"/>
-          </a:fontRef>
-        </p:style>
-        <p:txBody>
-          <a:bodyPr rtlCol="0" anchor="ctr"/>
-          <a:lstStyle/>
-          <a:p>
-            <a:pPr algn="ctr"/>
-          </a:p>
-        </p:txBody>
-      </p:sp>
-      <p:sp>
-        <p:nvSpPr>
-          <p:cNvPr id="3" name="TextBox 2"/>
-          <p:cNvSpPr txBox="1"/>
-          <p:nvPr/>
-        </p:nvSpPr>
-        <p:spPr>
-          <a:xfrm>
             <a:off x="1280160" y="1188720"/>
             <a:ext cx="9601200" cy="4389120"/>
           </a:xfrm>
@@ -3340,24 +3172,24 @@
           <a:p>
             <a:pPr>
               <a:spcAft>
-                <a:spcPts val="800"/>
+                <a:spcPts val="1000"/>
               </a:spcAft>
-              <a:defRPr sz="1400" b="1">
+              <a:defRPr sz="1300" b="1">
                 <a:solidFill>
                   <a:srgbClr val="2DD4BF"/>
                 </a:solidFill>
               </a:defRPr>
             </a:pPr>
             <a:r>
-              <a:t>💧 ยกระดับระบบตรวจวัดและบริหารจัดการคุณภาพน้ำสู่อนาคต</a:t>
+              <a:t>💧 ONLINE SMART WATER MONITORING &amp; TELEMETRY</a:t>
             </a:r>
           </a:p>
           <a:p>
             <a:pPr>
               <a:spcAft>
-                <a:spcPts val="800"/>
+                <a:spcPts val="600"/>
               </a:spcAft>
-              <a:defRPr sz="3200" b="1">
+              <a:defRPr sz="3600" b="1">
                 <a:solidFill>
                   <a:srgbClr val="FFFFFF"/>
                 </a:solidFill>
@@ -3370,67 +3202,47 @@
           <a:p>
             <a:pPr>
               <a:spcAft>
-                <a:spcPts val="2400"/>
+                <a:spcPts val="1800"/>
               </a:spcAft>
-              <a:defRPr sz="1400">
+              <a:defRPr sz="1800">
                 <a:solidFill>
                   <a:srgbClr val="CBD5E1"/>
                 </a:solidFill>
               </a:defRPr>
             </a:pPr>
             <a:r>
-              <a:t>พร้อมให้คำปรึกษา ออกแบบระบบ และสาธิตการทำงานจริง (Live Demo) โดยทีมวิศวกรผู้เชี่ยวชาญ</a:t>
-            </a:r>
-          </a:p>
-          <a:p>
-            <a:pPr>
-              <a:defRPr b="1" sz="1300">
-                <a:solidFill>
-                  <a:srgbClr val="FFFFFF"/>
-                </a:solidFill>
-              </a:defRPr>
-            </a:pPr>
-            <a:r>
-              <a:t>✨ จุดเด่นที่ได้รับทันที:</a:t>
+              <a:t>Smart Water Quality Intelligence &amp; Real-Time Telemetry Platform</a:t>
             </a:r>
           </a:p>
           <a:p>
             <a:pPr>
               <a:spcAft>
-                <a:spcPts val="2800"/>
+                <a:spcPts val="3000"/>
               </a:spcAft>
-              <a:defRPr sz="1150">
-                <a:solidFill>
-                  <a:srgbClr val="E2E8F0"/>
-                </a:solidFill>
-              </a:defRPr>
-            </a:pPr>
-            <a:r>
-              <a:t>1. ระบบตรวจวัดคุณภาพน้ำ Real-Time 24 ชม. ครบวงจร ทั้งฮาร์ดแวร์ + แดชบอร์ด SCADA + Mobile App</a:t>
+              <a:defRPr sz="1250">
+                <a:solidFill>
+                  <a:srgbClr val="94A3B8"/>
+                </a:solidFill>
+              </a:defRPr>
+            </a:pPr>
+            <a:r>
+              <a:t>ข้อเสนอราคาและโมเดลการลงทุน: 【 ซื้อขาด (One-Time) 】 vs 【 เช่าใช้รายปี (Annual Subscription) 】</a:t>
             </a:r>
             <a:br/>
             <a:r>
-              <a:t>2. ติดตั้งง่าย ไม่ต้องหยุดระบบการผลิต (Non-Intrusive Installation)</a:t>
-            </a:r>
-            <a:br/>
-            <a:r>
-              <a:t>3. คืนทุนไวภายใน 3-5 เดือน พร้อมทีมดูแลและรับประกันสูงสุด 3 ปี</a:t>
-            </a:r>
-          </a:p>
-          <a:p>
-            <a:pPr>
-              <a:defRPr sz="1200" b="1">
+              <a:t>แยกตามจำนวนสั่งซื้อ: 【 น้อยกว่า 100 ชุด (&lt;100) 】 และ 【 มากกว่า 100 ชุดขึ้นไป (≥100 Bulk Discount) 】</a:t>
+            </a:r>
+          </a:p>
+          <a:p>
+            <a:pPr>
+              <a:defRPr sz="1100">
                 <a:solidFill>
                   <a:srgbClr val="2DD4BF"/>
                 </a:solidFill>
               </a:defRPr>
             </a:pPr>
             <a:r>
-              <a:t>📞 สนใจสอบถามข้อมูลเพิ่มเติมและขอใบเสนอราคา (Request for Quotation):</a:t>
-            </a:r>
-            <a:br/>
-            <a:r>
-              <a:t>• Email: sales@nct-water.com  |  Tel: 02-XXX-XXXX, 08X-XXX-XXXX  |  Line: @nctwater</a:t>
+              <a:t>NCT Water Solutions  •  System Version 2.5 Pro  •  August 2026</a:t>
             </a:r>
           </a:p>
         </p:txBody>
@@ -3494,19 +3306,2159 @@
               </a:defRPr>
             </a:pPr>
             <a:r>
-              <a:t>NCT WATER NEXUS PRO | SMART WATER MONITORING</a:t>
-            </a:r>
-          </a:p>
-          <a:p>
-            <a:pPr>
-              <a:defRPr sz="2400" b="1">
+              <a:t>NCT WATER NEXUS PRO | COMMERCIAL PROPOSAL</a:t>
+            </a:r>
+          </a:p>
+          <a:p>
+            <a:pPr>
+              <a:defRPr sz="2300" b="1">
                 <a:solidFill>
                   <a:srgbClr val="0F172A"/>
                 </a:solidFill>
               </a:defRPr>
             </a:pPr>
             <a:r>
-              <a:t>ภาพรวมระบบและปัญหาที่แก้ไข (Executive Summary &amp; Key Challenges)</a:t>
+              <a:t>สรุปภาพรวมโครงสร้างราคา 2 รูปแบบ x 2 กลุ่มจำนวน (Pricing Structure)</a:t>
+            </a:r>
+          </a:p>
+        </p:txBody>
+      </p:sp>
+      <p:sp>
+        <p:nvSpPr>
+          <p:cNvPr id="3" name="Rounded Rectangle 2"/>
+          <p:cNvSpPr/>
+          <p:nvPr/>
+        </p:nvSpPr>
+        <p:spPr>
+          <a:xfrm>
+            <a:off x="731520" y="1463040"/>
+            <a:ext cx="5120640" cy="4754880"/>
+          </a:xfrm>
+          <a:prstGeom prst="roundRect">
+            <a:avLst/>
+          </a:prstGeom>
+          <a:solidFill>
+            <a:srgbClr val="FFFFFF"/>
+          </a:solidFill>
+          <a:ln w="19050">
+            <a:solidFill>
+              <a:srgbClr val="0284C7"/>
+            </a:solidFill>
+          </a:ln>
+        </p:spPr>
+        <p:style>
+          <a:lnRef idx="1">
+            <a:schemeClr val="accent1"/>
+          </a:lnRef>
+          <a:fillRef idx="3">
+            <a:schemeClr val="accent1"/>
+          </a:fillRef>
+          <a:effectRef idx="2">
+            <a:schemeClr val="accent1"/>
+          </a:effectRef>
+          <a:fontRef idx="minor">
+            <a:schemeClr val="lt1"/>
+          </a:fontRef>
+        </p:style>
+        <p:txBody>
+          <a:bodyPr rtlCol="0" anchor="ctr"/>
+          <a:lstStyle/>
+          <a:p>
+            <a:pPr algn="ctr"/>
+          </a:p>
+        </p:txBody>
+      </p:sp>
+      <p:sp>
+        <p:nvSpPr>
+          <p:cNvPr id="4" name="TextBox 3"/>
+          <p:cNvSpPr txBox="1"/>
+          <p:nvPr/>
+        </p:nvSpPr>
+        <p:spPr>
+          <a:xfrm>
+            <a:off x="1005840" y="1691640"/>
+            <a:ext cx="4572000" cy="4297680"/>
+          </a:xfrm>
+          <a:prstGeom prst="rect">
+            <a:avLst/>
+          </a:prstGeom>
+          <a:noFill/>
+        </p:spPr>
+        <p:txBody>
+          <a:bodyPr wrap="square">
+            <a:spAutoFit/>
+          </a:bodyPr>
+          <a:lstStyle/>
+          <a:p>
+            <a:pPr>
+              <a:spcAft>
+                <a:spcPts val="1200"/>
+              </a:spcAft>
+              <a:defRPr sz="1400" b="1">
+                <a:solidFill>
+                  <a:srgbClr val="0284C7"/>
+                </a:solidFill>
+              </a:defRPr>
+            </a:pPr>
+            <a:r>
+              <a:t>📦 กลุ่มที่ 1: จำนวนน้อยกว่า 100 ชุด (&lt; 100 Sets)</a:t>
+            </a:r>
+          </a:p>
+          <a:p>
+            <a:pPr>
+              <a:defRPr b="1" sz="1150">
+                <a:solidFill>
+                  <a:srgbClr val="0F172A"/>
+                </a:solidFill>
+              </a:defRPr>
+            </a:pPr>
+            <a:r>
+              <a:t>1. แบบซื้อขาด (Outright Purchase):</a:t>
+            </a:r>
+          </a:p>
+          <a:p>
+            <a:pPr>
+              <a:spcAft>
+                <a:spcPts val="800"/>
+              </a:spcAft>
+              <a:defRPr sz="1000">
+                <a:solidFill>
+                  <a:srgbClr val="64748B"/>
+                </a:solidFill>
+              </a:defRPr>
+            </a:pPr>
+            <a:r>
+              <a:t>• Standard (pH + Temp): ฿24,900 / ชุด</a:t>
+            </a:r>
+            <a:br/>
+            <a:r>
+              <a:t>• Pro 4-in-1 (pH + Temp + TDS + Cl): ฿49,000 / ชุด (ยอดนิยม)</a:t>
+            </a:r>
+            <a:br/>
+            <a:r>
+              <a:t>• Enterprise 5-in-1 (+ ORP): ฿79,000 / ชุด</a:t>
+            </a:r>
+            <a:br/>
+            <a:r>
+              <a:t>  (ฟรี Cloud Dashboard 1-2 ปีแรก, ประกัน 1-2 ปี)</a:t>
+            </a:r>
+          </a:p>
+          <a:p>
+            <a:pPr>
+              <a:defRPr b="1" sz="1150">
+                <a:solidFill>
+                  <a:srgbClr val="0F172A"/>
+                </a:solidFill>
+              </a:defRPr>
+            </a:pPr>
+            <a:r>
+              <a:t>2. แบบเช่าใช้รายปี (Annual Subscription):</a:t>
+            </a:r>
+          </a:p>
+          <a:p>
+            <a:pPr>
+              <a:spcAft>
+                <a:spcPts val="800"/>
+              </a:spcAft>
+              <a:defRPr sz="1000">
+                <a:solidFill>
+                  <a:srgbClr val="64748B"/>
+                </a:solidFill>
+              </a:defRPr>
+            </a:pPr>
+            <a:r>
+              <a:t>• Standard Care: ฿12,000 / ชุด / ปี (~฿1,000/ด.)</a:t>
+            </a:r>
+            <a:br/>
+            <a:r>
+              <a:t>• Pro Care (4-in-1): ฿24,000 / ชุด / ปี (~฿2,000/ด.)</a:t>
+            </a:r>
+            <a:br/>
+            <a:r>
+              <a:t>• Enterprise Care: ฿39,000 / ชุด / ปี (~฿3,250/ด.)</a:t>
+            </a:r>
+            <a:br/>
+            <a:r>
+              <a:t>  (ฟรีเครื่อง + เซนเซอร์ + ซิม + Cloud + เปลี่ยนหัววัดฟรีตลอดสัญญา)</a:t>
+            </a:r>
+          </a:p>
+        </p:txBody>
+      </p:sp>
+      <p:sp>
+        <p:nvSpPr>
+          <p:cNvPr id="5" name="Rounded Rectangle 4"/>
+          <p:cNvSpPr/>
+          <p:nvPr/>
+        </p:nvSpPr>
+        <p:spPr>
+          <a:xfrm>
+            <a:off x="6309360" y="1463040"/>
+            <a:ext cx="5120640" cy="4754880"/>
+          </a:xfrm>
+          <a:prstGeom prst="roundRect">
+            <a:avLst/>
+          </a:prstGeom>
+          <a:solidFill>
+            <a:srgbClr val="FFFFFF"/>
+          </a:solidFill>
+          <a:ln w="19050">
+            <a:solidFill>
+              <a:srgbClr val="059669"/>
+            </a:solidFill>
+          </a:ln>
+        </p:spPr>
+        <p:style>
+          <a:lnRef idx="1">
+            <a:schemeClr val="accent1"/>
+          </a:lnRef>
+          <a:fillRef idx="3">
+            <a:schemeClr val="accent1"/>
+          </a:fillRef>
+          <a:effectRef idx="2">
+            <a:schemeClr val="accent1"/>
+          </a:effectRef>
+          <a:fontRef idx="minor">
+            <a:schemeClr val="lt1"/>
+          </a:fontRef>
+        </p:style>
+        <p:txBody>
+          <a:bodyPr rtlCol="0" anchor="ctr"/>
+          <a:lstStyle/>
+          <a:p>
+            <a:pPr algn="ctr"/>
+          </a:p>
+        </p:txBody>
+      </p:sp>
+      <p:sp>
+        <p:nvSpPr>
+          <p:cNvPr id="6" name="TextBox 5"/>
+          <p:cNvSpPr txBox="1"/>
+          <p:nvPr/>
+        </p:nvSpPr>
+        <p:spPr>
+          <a:xfrm>
+            <a:off x="6583680" y="1691640"/>
+            <a:ext cx="4572000" cy="4297680"/>
+          </a:xfrm>
+          <a:prstGeom prst="rect">
+            <a:avLst/>
+          </a:prstGeom>
+          <a:noFill/>
+        </p:spPr>
+        <p:txBody>
+          <a:bodyPr wrap="square">
+            <a:spAutoFit/>
+          </a:bodyPr>
+          <a:lstStyle/>
+          <a:p>
+            <a:pPr>
+              <a:spcAft>
+                <a:spcPts val="1200"/>
+              </a:spcAft>
+              <a:defRPr sz="1400" b="1">
+                <a:solidFill>
+                  <a:srgbClr val="059669"/>
+                </a:solidFill>
+              </a:defRPr>
+            </a:pPr>
+            <a:r>
+              <a:t>🏢 กลุ่มที่ 2: จำนวน 100 ชุดขึ้นไป (≥ 100 Sets Bulk Discount)</a:t>
+            </a:r>
+          </a:p>
+          <a:p>
+            <a:pPr>
+              <a:defRPr b="1" sz="1150">
+                <a:solidFill>
+                  <a:srgbClr val="0F172A"/>
+                </a:solidFill>
+              </a:defRPr>
+            </a:pPr>
+            <a:r>
+              <a:t>1. แบบซื้อขาดราคาส่ง (Bulk Outright - ส่วนลด ~30%):</a:t>
+            </a:r>
+          </a:p>
+          <a:p>
+            <a:pPr>
+              <a:spcAft>
+                <a:spcPts val="600"/>
+              </a:spcAft>
+              <a:defRPr sz="1000">
+                <a:solidFill>
+                  <a:srgbClr val="64748B"/>
+                </a:solidFill>
+              </a:defRPr>
+            </a:pPr>
+            <a:r>
+              <a:t>• Standard (pH + Temp): ฿16,900 / ชุด</a:t>
+            </a:r>
+            <a:br/>
+            <a:r>
+              <a:t>• Pro 4-in-1 (pH + Temp + TDS + Cl): ฿34,500 / ชุด (ประหยัด ฿1.45 ล้าน/100ชุด)</a:t>
+            </a:r>
+            <a:br/>
+            <a:r>
+              <a:t>• Enterprise 5-in-1 (+ ORP): ฿55,000 / ชุด</a:t>
+            </a:r>
+          </a:p>
+          <a:p>
+            <a:pPr>
+              <a:defRPr b="1" sz="1150">
+                <a:solidFill>
+                  <a:srgbClr val="0F172A"/>
+                </a:solidFill>
+              </a:defRPr>
+            </a:pPr>
+            <a:r>
+              <a:t>2. แบบเช่าใช้รายปีราคาส่ง (Bulk Annual - ส่วนลด ~30%):</a:t>
+            </a:r>
+          </a:p>
+          <a:p>
+            <a:pPr>
+              <a:spcAft>
+                <a:spcPts val="600"/>
+              </a:spcAft>
+              <a:defRPr sz="1000">
+                <a:solidFill>
+                  <a:srgbClr val="64748B"/>
+                </a:solidFill>
+              </a:defRPr>
+            </a:pPr>
+            <a:r>
+              <a:t>• Standard Care: ฿8,400 / ชุด / ปี (~฿700/ด.)</a:t>
+            </a:r>
+            <a:br/>
+            <a:r>
+              <a:t>• Pro Care (4-in-1): ฿16,800 / ชุด / ปี (~฿1,400/ด.)</a:t>
+            </a:r>
+            <a:br/>
+            <a:r>
+              <a:t>• Enterprise Care: ฿27,000 / ชุด / ปี (~฿2,250/ด.)</a:t>
+            </a:r>
+          </a:p>
+          <a:p>
+            <a:pPr>
+              <a:defRPr b="1" sz="1150">
+                <a:solidFill>
+                  <a:srgbClr val="0F172A"/>
+                </a:solidFill>
+              </a:defRPr>
+            </a:pPr>
+            <a:r>
+              <a:t>🌟 สิทธิพิเศษสำหรับยอดสั่งซื้อ 100+ ชุด:</a:t>
+            </a:r>
+          </a:p>
+          <a:p>
+            <a:pPr>
+              <a:spcAft>
+                <a:spcPts val="600"/>
+              </a:spcAft>
+              <a:defRPr sz="1000">
+                <a:solidFill>
+                  <a:srgbClr val="64748B"/>
+                </a:solidFill>
+              </a:defRPr>
+            </a:pPr>
+            <a:r>
+              <a:t>• ฟรี Private Cloud Server &amp; Custom Domain</a:t>
+            </a:r>
+            <a:br/>
+            <a:r>
+              <a:t>• ฟรีสกรีนโลโก้แบรนด์ลูกค้าบนเครื่อง &amp; Dashboard (White-label)</a:t>
+            </a:r>
+            <a:br/>
+            <a:r>
+              <a:t>• ฟรีเครื่องสำรอง Spare Units ประจำไซต์ 5% ทันที</a:t>
+            </a:r>
+          </a:p>
+        </p:txBody>
+      </p:sp>
+    </p:spTree>
+  </p:cSld>
+  <p:clrMapOvr>
+    <a:masterClrMapping/>
+  </p:clrMapOvr>
+</p:sld>
+</file>
+
+<file path=ppt/slides/slide3.xml><?xml version="1.0" encoding="utf-8"?>
+<p:sld xmlns:a="http://schemas.openxmlformats.org/drawingml/2006/main" xmlns:p="http://schemas.openxmlformats.org/presentationml/2006/main" xmlns:r="http://schemas.openxmlformats.org/officeDocument/2006/relationships">
+  <p:cSld>
+    <p:bg>
+      <p:bgPr>
+        <a:solidFill>
+          <a:srgbClr val="F1F6FB"/>
+        </a:solidFill>
+        <a:effectLst/>
+      </p:bgPr>
+    </p:bg>
+    <p:spTree>
+      <p:nvGrpSpPr>
+        <p:cNvPr id="1" name=""/>
+        <p:cNvGrpSpPr/>
+        <p:nvPr/>
+      </p:nvGrpSpPr>
+      <p:grpSpPr/>
+      <p:sp>
+        <p:nvSpPr>
+          <p:cNvPr id="2" name="TextBox 1"/>
+          <p:cNvSpPr txBox="1"/>
+          <p:nvPr/>
+        </p:nvSpPr>
+        <p:spPr>
+          <a:xfrm>
+            <a:off x="731520" y="365760"/>
+            <a:ext cx="10728655" cy="1005840"/>
+          </a:xfrm>
+          <a:prstGeom prst="rect">
+            <a:avLst/>
+          </a:prstGeom>
+          <a:noFill/>
+        </p:spPr>
+        <p:txBody>
+          <a:bodyPr wrap="square" lIns="0" tIns="0" rIns="0" bIns="0">
+            <a:spAutoFit/>
+          </a:bodyPr>
+          <a:lstStyle/>
+          <a:p>
+            <a:pPr>
+              <a:spcAft>
+                <a:spcPts val="200"/>
+              </a:spcAft>
+              <a:defRPr sz="1100" b="1">
+                <a:solidFill>
+                  <a:srgbClr val="0284C7"/>
+                </a:solidFill>
+              </a:defRPr>
+            </a:pPr>
+            <a:r>
+              <a:t>NCT WATER NEXUS PRO | COMMERCIAL PROPOSAL</a:t>
+            </a:r>
+          </a:p>
+          <a:p>
+            <a:pPr>
+              <a:defRPr sz="2300" b="1">
+                <a:solidFill>
+                  <a:srgbClr val="0F172A"/>
+                </a:solidFill>
+              </a:defRPr>
+            </a:pPr>
+            <a:r>
+              <a:t>ตารางเปรียบเทียบราคาขาย: ซื้อขาด vs รายปี (&lt;100 ชุด และ ≥100 ชุด)</a:t>
+            </a:r>
+          </a:p>
+        </p:txBody>
+      </p:sp>
+      <p:graphicFrame>
+        <p:nvGraphicFramePr>
+          <p:cNvPr id="3" name="Table 2"/>
+          <p:cNvGraphicFramePr>
+            <a:graphicFrameLocks noGrp="1"/>
+          </p:cNvGraphicFramePr>
+          <p:nvPr/>
+        </p:nvGraphicFramePr>
+        <p:xfrm>
+          <a:off x="731520" y="1463040"/>
+          <a:ext cx="10728655" cy="3931920"/>
+        </p:xfrm>
+        <a:graphic>
+          <a:graphicData uri="http://schemas.openxmlformats.org/drawingml/2006/table">
+            <a:tbl>
+              <a:tblPr firstRow="1" bandRow="1">
+                <a:tableStyleId>{5C22544A-7EE6-4342-B048-85BDC9FD1C3A}</a:tableStyleId>
+              </a:tblPr>
+              <a:tblGrid>
+                <a:gridCol w="2499055"/>
+                <a:gridCol w="2057400"/>
+                <a:gridCol w="2057400"/>
+                <a:gridCol w="2057400"/>
+                <a:gridCol w="2057400"/>
+              </a:tblGrid>
+              <a:tr h="561702">
+                <a:tc>
+                  <a:txBody>
+                    <a:bodyPr/>
+                    <a:lstStyle/>
+                    <a:p>
+                      <a:pPr algn="ctr">
+                        <a:defRPr b="1" sz="1100">
+                          <a:solidFill>
+                            <a:srgbClr val="FFFFFF"/>
+                          </a:solidFill>
+                        </a:defRPr>
+                      </a:pPr>
+                      <a:r>
+                        <a:t>ระดับแพ็กเกจ (Package Tier)</a:t>
+                      </a:r>
+                    </a:p>
+                  </a:txBody>
+                  <a:tcPr>
+                    <a:solidFill>
+                      <a:srgbClr val="0F172A"/>
+                    </a:solidFill>
+                  </a:tcPr>
+                </a:tc>
+                <a:tc>
+                  <a:txBody>
+                    <a:bodyPr/>
+                    <a:lstStyle/>
+                    <a:p>
+                      <a:pPr algn="ctr">
+                        <a:defRPr b="1" sz="1100">
+                          <a:solidFill>
+                            <a:srgbClr val="FFFFFF"/>
+                          </a:solidFill>
+                        </a:defRPr>
+                      </a:pPr>
+                      <a:r>
+                        <a:t>ซื้อขาด (&lt;100 ชุด)</a:t>
+                      </a:r>
+                    </a:p>
+                  </a:txBody>
+                  <a:tcPr>
+                    <a:solidFill>
+                      <a:srgbClr val="0F172A"/>
+                    </a:solidFill>
+                  </a:tcPr>
+                </a:tc>
+                <a:tc>
+                  <a:txBody>
+                    <a:bodyPr/>
+                    <a:lstStyle/>
+                    <a:p>
+                      <a:pPr algn="ctr">
+                        <a:defRPr b="1" sz="1100">
+                          <a:solidFill>
+                            <a:srgbClr val="FFFFFF"/>
+                          </a:solidFill>
+                        </a:defRPr>
+                      </a:pPr>
+                      <a:r>
+                        <a:t>ซื้อขาด (≥100 ชุด)</a:t>
+                      </a:r>
+                    </a:p>
+                  </a:txBody>
+                  <a:tcPr>
+                    <a:solidFill>
+                      <a:srgbClr val="0F172A"/>
+                    </a:solidFill>
+                  </a:tcPr>
+                </a:tc>
+                <a:tc>
+                  <a:txBody>
+                    <a:bodyPr/>
+                    <a:lstStyle/>
+                    <a:p>
+                      <a:pPr algn="ctr">
+                        <a:defRPr b="1" sz="1100">
+                          <a:solidFill>
+                            <a:srgbClr val="FFFFFF"/>
+                          </a:solidFill>
+                        </a:defRPr>
+                      </a:pPr>
+                      <a:r>
+                        <a:t>รายปี (&lt;100 ชุด)</a:t>
+                      </a:r>
+                    </a:p>
+                  </a:txBody>
+                  <a:tcPr>
+                    <a:solidFill>
+                      <a:srgbClr val="0F172A"/>
+                    </a:solidFill>
+                  </a:tcPr>
+                </a:tc>
+                <a:tc>
+                  <a:txBody>
+                    <a:bodyPr/>
+                    <a:lstStyle/>
+                    <a:p>
+                      <a:pPr algn="ctr">
+                        <a:defRPr b="1" sz="1100">
+                          <a:solidFill>
+                            <a:srgbClr val="FFFFFF"/>
+                          </a:solidFill>
+                        </a:defRPr>
+                      </a:pPr>
+                      <a:r>
+                        <a:t>รายปี (≥100 ชุด)</a:t>
+                      </a:r>
+                    </a:p>
+                  </a:txBody>
+                  <a:tcPr>
+                    <a:solidFill>
+                      <a:srgbClr val="0F172A"/>
+                    </a:solidFill>
+                  </a:tcPr>
+                </a:tc>
+              </a:tr>
+              <a:tr h="561702">
+                <a:tc>
+                  <a:txBody>
+                    <a:bodyPr/>
+                    <a:lstStyle/>
+                    <a:p>
+                      <a:pPr>
+                        <a:defRPr sz="1000">
+                          <a:solidFill>
+                            <a:srgbClr val="0F172A"/>
+                          </a:solidFill>
+                        </a:defRPr>
+                      </a:pPr>
+                      <a:r>
+                        <a:t>1. Standard (pH + Temp PT1000)</a:t>
+                      </a:r>
+                    </a:p>
+                  </a:txBody>
+                  <a:tcPr>
+                    <a:solidFill>
+                      <a:srgbClr val="FFFFFF"/>
+                    </a:solidFill>
+                  </a:tcPr>
+                </a:tc>
+                <a:tc>
+                  <a:txBody>
+                    <a:bodyPr/>
+                    <a:lstStyle/>
+                    <a:p>
+                      <a:pPr algn="ctr">
+                        <a:defRPr sz="1000" b="1">
+                          <a:solidFill>
+                            <a:srgbClr val="0284C7"/>
+                          </a:solidFill>
+                        </a:defRPr>
+                      </a:pPr>
+                      <a:r>
+                        <a:t>฿24,900 / ชุด</a:t>
+                      </a:r>
+                    </a:p>
+                  </a:txBody>
+                  <a:tcPr>
+                    <a:solidFill>
+                      <a:srgbClr val="FFFFFF"/>
+                    </a:solidFill>
+                  </a:tcPr>
+                </a:tc>
+                <a:tc>
+                  <a:txBody>
+                    <a:bodyPr/>
+                    <a:lstStyle/>
+                    <a:p>
+                      <a:pPr algn="ctr">
+                        <a:defRPr sz="1000" b="1">
+                          <a:solidFill>
+                            <a:srgbClr val="0284C7"/>
+                          </a:solidFill>
+                        </a:defRPr>
+                      </a:pPr>
+                      <a:r>
+                        <a:t>฿16,900 / ชุด</a:t>
+                      </a:r>
+                    </a:p>
+                  </a:txBody>
+                  <a:tcPr>
+                    <a:solidFill>
+                      <a:srgbClr val="FFFFFF"/>
+                    </a:solidFill>
+                  </a:tcPr>
+                </a:tc>
+                <a:tc>
+                  <a:txBody>
+                    <a:bodyPr/>
+                    <a:lstStyle/>
+                    <a:p>
+                      <a:pPr algn="ctr">
+                        <a:defRPr sz="1000" b="1">
+                          <a:solidFill>
+                            <a:srgbClr val="059669"/>
+                          </a:solidFill>
+                        </a:defRPr>
+                      </a:pPr>
+                      <a:r>
+                        <a:t>฿12,000 / ปี</a:t>
+                      </a:r>
+                    </a:p>
+                  </a:txBody>
+                  <a:tcPr>
+                    <a:solidFill>
+                      <a:srgbClr val="FFFFFF"/>
+                    </a:solidFill>
+                  </a:tcPr>
+                </a:tc>
+                <a:tc>
+                  <a:txBody>
+                    <a:bodyPr/>
+                    <a:lstStyle/>
+                    <a:p>
+                      <a:pPr algn="ctr">
+                        <a:defRPr sz="1000" b="1">
+                          <a:solidFill>
+                            <a:srgbClr val="059669"/>
+                          </a:solidFill>
+                        </a:defRPr>
+                      </a:pPr>
+                      <a:r>
+                        <a:t>฿8,400 / ปี (~฿700/ด.)</a:t>
+                      </a:r>
+                    </a:p>
+                  </a:txBody>
+                  <a:tcPr>
+                    <a:solidFill>
+                      <a:srgbClr val="FFFFFF"/>
+                    </a:solidFill>
+                  </a:tcPr>
+                </a:tc>
+              </a:tr>
+              <a:tr h="561702">
+                <a:tc>
+                  <a:txBody>
+                    <a:bodyPr/>
+                    <a:lstStyle/>
+                    <a:p>
+                      <a:pPr>
+                        <a:defRPr sz="1000">
+                          <a:solidFill>
+                            <a:srgbClr val="0F172A"/>
+                          </a:solidFill>
+                        </a:defRPr>
+                      </a:pPr>
+                      <a:r>
+                        <a:t>2. Pro 4-in-1 (pH, Temp, TDS, Cl)</a:t>
+                      </a:r>
+                    </a:p>
+                  </a:txBody>
+                  <a:tcPr>
+                    <a:solidFill>
+                      <a:srgbClr val="F8FAFC"/>
+                    </a:solidFill>
+                  </a:tcPr>
+                </a:tc>
+                <a:tc>
+                  <a:txBody>
+                    <a:bodyPr/>
+                    <a:lstStyle/>
+                    <a:p>
+                      <a:pPr algn="ctr">
+                        <a:defRPr sz="1000" b="1">
+                          <a:solidFill>
+                            <a:srgbClr val="0284C7"/>
+                          </a:solidFill>
+                        </a:defRPr>
+                      </a:pPr>
+                      <a:r>
+                        <a:t>฿49,000 / ชุด</a:t>
+                      </a:r>
+                    </a:p>
+                  </a:txBody>
+                  <a:tcPr>
+                    <a:solidFill>
+                      <a:srgbClr val="F8FAFC"/>
+                    </a:solidFill>
+                  </a:tcPr>
+                </a:tc>
+                <a:tc>
+                  <a:txBody>
+                    <a:bodyPr/>
+                    <a:lstStyle/>
+                    <a:p>
+                      <a:pPr algn="ctr">
+                        <a:defRPr sz="1000" b="1">
+                          <a:solidFill>
+                            <a:srgbClr val="0284C7"/>
+                          </a:solidFill>
+                        </a:defRPr>
+                      </a:pPr>
+                      <a:r>
+                        <a:t>฿34,500 / ชุด</a:t>
+                      </a:r>
+                    </a:p>
+                  </a:txBody>
+                  <a:tcPr>
+                    <a:solidFill>
+                      <a:srgbClr val="F8FAFC"/>
+                    </a:solidFill>
+                  </a:tcPr>
+                </a:tc>
+                <a:tc>
+                  <a:txBody>
+                    <a:bodyPr/>
+                    <a:lstStyle/>
+                    <a:p>
+                      <a:pPr algn="ctr">
+                        <a:defRPr sz="1000" b="1">
+                          <a:solidFill>
+                            <a:srgbClr val="059669"/>
+                          </a:solidFill>
+                        </a:defRPr>
+                      </a:pPr>
+                      <a:r>
+                        <a:t>฿24,000 / ปี</a:t>
+                      </a:r>
+                    </a:p>
+                  </a:txBody>
+                  <a:tcPr>
+                    <a:solidFill>
+                      <a:srgbClr val="F8FAFC"/>
+                    </a:solidFill>
+                  </a:tcPr>
+                </a:tc>
+                <a:tc>
+                  <a:txBody>
+                    <a:bodyPr/>
+                    <a:lstStyle/>
+                    <a:p>
+                      <a:pPr algn="ctr">
+                        <a:defRPr sz="1000" b="1">
+                          <a:solidFill>
+                            <a:srgbClr val="059669"/>
+                          </a:solidFill>
+                        </a:defRPr>
+                      </a:pPr>
+                      <a:r>
+                        <a:t>฿16,800 / ปี (~฿1,400/ด.)</a:t>
+                      </a:r>
+                    </a:p>
+                  </a:txBody>
+                  <a:tcPr>
+                    <a:solidFill>
+                      <a:srgbClr val="F8FAFC"/>
+                    </a:solidFill>
+                  </a:tcPr>
+                </a:tc>
+              </a:tr>
+              <a:tr h="561702">
+                <a:tc>
+                  <a:txBody>
+                    <a:bodyPr/>
+                    <a:lstStyle/>
+                    <a:p>
+                      <a:pPr>
+                        <a:defRPr sz="1000">
+                          <a:solidFill>
+                            <a:srgbClr val="0F172A"/>
+                          </a:solidFill>
+                        </a:defRPr>
+                      </a:pPr>
+                      <a:r>
+                        <a:t>3. Enterprise 5-in-1 (+ ORP)</a:t>
+                      </a:r>
+                    </a:p>
+                  </a:txBody>
+                  <a:tcPr>
+                    <a:solidFill>
+                      <a:srgbClr val="FFFFFF"/>
+                    </a:solidFill>
+                  </a:tcPr>
+                </a:tc>
+                <a:tc>
+                  <a:txBody>
+                    <a:bodyPr/>
+                    <a:lstStyle/>
+                    <a:p>
+                      <a:pPr algn="ctr">
+                        <a:defRPr sz="1000" b="1">
+                          <a:solidFill>
+                            <a:srgbClr val="0284C7"/>
+                          </a:solidFill>
+                        </a:defRPr>
+                      </a:pPr>
+                      <a:r>
+                        <a:t>฿79,000 / ชุด</a:t>
+                      </a:r>
+                    </a:p>
+                  </a:txBody>
+                  <a:tcPr>
+                    <a:solidFill>
+                      <a:srgbClr val="FFFFFF"/>
+                    </a:solidFill>
+                  </a:tcPr>
+                </a:tc>
+                <a:tc>
+                  <a:txBody>
+                    <a:bodyPr/>
+                    <a:lstStyle/>
+                    <a:p>
+                      <a:pPr algn="ctr">
+                        <a:defRPr sz="1000" b="1">
+                          <a:solidFill>
+                            <a:srgbClr val="0284C7"/>
+                          </a:solidFill>
+                        </a:defRPr>
+                      </a:pPr>
+                      <a:r>
+                        <a:t>฿55,000 / ชุด</a:t>
+                      </a:r>
+                    </a:p>
+                  </a:txBody>
+                  <a:tcPr>
+                    <a:solidFill>
+                      <a:srgbClr val="FFFFFF"/>
+                    </a:solidFill>
+                  </a:tcPr>
+                </a:tc>
+                <a:tc>
+                  <a:txBody>
+                    <a:bodyPr/>
+                    <a:lstStyle/>
+                    <a:p>
+                      <a:pPr algn="ctr">
+                        <a:defRPr sz="1000" b="1">
+                          <a:solidFill>
+                            <a:srgbClr val="059669"/>
+                          </a:solidFill>
+                        </a:defRPr>
+                      </a:pPr>
+                      <a:r>
+                        <a:t>฿39,000 / ปี</a:t>
+                      </a:r>
+                    </a:p>
+                  </a:txBody>
+                  <a:tcPr>
+                    <a:solidFill>
+                      <a:srgbClr val="FFFFFF"/>
+                    </a:solidFill>
+                  </a:tcPr>
+                </a:tc>
+                <a:tc>
+                  <a:txBody>
+                    <a:bodyPr/>
+                    <a:lstStyle/>
+                    <a:p>
+                      <a:pPr algn="ctr">
+                        <a:defRPr sz="1000" b="1">
+                          <a:solidFill>
+                            <a:srgbClr val="059669"/>
+                          </a:solidFill>
+                        </a:defRPr>
+                      </a:pPr>
+                      <a:r>
+                        <a:t>฿27,000 / ปี (~฿2,250/ด.)</a:t>
+                      </a:r>
+                    </a:p>
+                  </a:txBody>
+                  <a:tcPr>
+                    <a:solidFill>
+                      <a:srgbClr val="FFFFFF"/>
+                    </a:solidFill>
+                  </a:tcPr>
+                </a:tc>
+              </a:tr>
+              <a:tr h="561702">
+                <a:tc>
+                  <a:txBody>
+                    <a:bodyPr/>
+                    <a:lstStyle/>
+                    <a:p>
+                      <a:pPr>
+                        <a:defRPr sz="1000">
+                          <a:solidFill>
+                            <a:srgbClr val="0F172A"/>
+                          </a:solidFill>
+                        </a:defRPr>
+                      </a:pPr>
+                      <a:r>
+                        <a:t>กรรมสิทธิ์อุปกรณ์ (Hardware)</a:t>
+                      </a:r>
+                    </a:p>
+                  </a:txBody>
+                  <a:tcPr>
+                    <a:solidFill>
+                      <a:srgbClr val="F8FAFC"/>
+                    </a:solidFill>
+                  </a:tcPr>
+                </a:tc>
+                <a:tc>
+                  <a:txBody>
+                    <a:bodyPr/>
+                    <a:lstStyle/>
+                    <a:p>
+                      <a:pPr algn="ctr">
+                        <a:defRPr sz="1000" b="1">
+                          <a:solidFill>
+                            <a:srgbClr val="0284C7"/>
+                          </a:solidFill>
+                        </a:defRPr>
+                      </a:pPr>
+                      <a:r>
+                        <a:t>เป็นของลูกค้า 100%</a:t>
+                      </a:r>
+                    </a:p>
+                  </a:txBody>
+                  <a:tcPr>
+                    <a:solidFill>
+                      <a:srgbClr val="F8FAFC"/>
+                    </a:solidFill>
+                  </a:tcPr>
+                </a:tc>
+                <a:tc>
+                  <a:txBody>
+                    <a:bodyPr/>
+                    <a:lstStyle/>
+                    <a:p>
+                      <a:pPr algn="ctr">
+                        <a:defRPr sz="1000" b="1">
+                          <a:solidFill>
+                            <a:srgbClr val="0284C7"/>
+                          </a:solidFill>
+                        </a:defRPr>
+                      </a:pPr>
+                      <a:r>
+                        <a:t>เป็นของลูกค้า 100%</a:t>
+                      </a:r>
+                    </a:p>
+                  </a:txBody>
+                  <a:tcPr>
+                    <a:solidFill>
+                      <a:srgbClr val="F8FAFC"/>
+                    </a:solidFill>
+                  </a:tcPr>
+                </a:tc>
+                <a:tc>
+                  <a:txBody>
+                    <a:bodyPr/>
+                    <a:lstStyle/>
+                    <a:p>
+                      <a:pPr algn="ctr">
+                        <a:defRPr sz="1000" b="1">
+                          <a:solidFill>
+                            <a:srgbClr val="059669"/>
+                          </a:solidFill>
+                        </a:defRPr>
+                      </a:pPr>
+                      <a:r>
+                        <a:t>ให้ยืมเครื่องฟรีตลอดสัญญา</a:t>
+                      </a:r>
+                    </a:p>
+                  </a:txBody>
+                  <a:tcPr>
+                    <a:solidFill>
+                      <a:srgbClr val="F8FAFC"/>
+                    </a:solidFill>
+                  </a:tcPr>
+                </a:tc>
+                <a:tc>
+                  <a:txBody>
+                    <a:bodyPr/>
+                    <a:lstStyle/>
+                    <a:p>
+                      <a:pPr algn="ctr">
+                        <a:defRPr sz="1000" b="1">
+                          <a:solidFill>
+                            <a:srgbClr val="059669"/>
+                          </a:solidFill>
+                        </a:defRPr>
+                      </a:pPr>
+                      <a:r>
+                        <a:t>ให้ยืมเครื่องฟรีตลอดสัญญา</a:t>
+                      </a:r>
+                    </a:p>
+                  </a:txBody>
+                  <a:tcPr>
+                    <a:solidFill>
+                      <a:srgbClr val="F8FAFC"/>
+                    </a:solidFill>
+                  </a:tcPr>
+                </a:tc>
+              </a:tr>
+              <a:tr h="561702">
+                <a:tc>
+                  <a:txBody>
+                    <a:bodyPr/>
+                    <a:lstStyle/>
+                    <a:p>
+                      <a:pPr>
+                        <a:defRPr sz="1000">
+                          <a:solidFill>
+                            <a:srgbClr val="0F172A"/>
+                          </a:solidFill>
+                        </a:defRPr>
+                      </a:pPr>
+                      <a:r>
+                        <a:t>การเปลี่ยนหัววัด/อะไหล่เสื่อม</a:t>
+                      </a:r>
+                    </a:p>
+                  </a:txBody>
+                  <a:tcPr>
+                    <a:solidFill>
+                      <a:srgbClr val="FFFFFF"/>
+                    </a:solidFill>
+                  </a:tcPr>
+                </a:tc>
+                <a:tc>
+                  <a:txBody>
+                    <a:bodyPr/>
+                    <a:lstStyle/>
+                    <a:p>
+                      <a:pPr algn="ctr">
+                        <a:defRPr sz="1000" b="1">
+                          <a:solidFill>
+                            <a:srgbClr val="0284C7"/>
+                          </a:solidFill>
+                        </a:defRPr>
+                      </a:pPr>
+                      <a:r>
+                        <a:t>ฟรีตามระยะประกัน</a:t>
+                      </a:r>
+                    </a:p>
+                  </a:txBody>
+                  <a:tcPr>
+                    <a:solidFill>
+                      <a:srgbClr val="FFFFFF"/>
+                    </a:solidFill>
+                  </a:tcPr>
+                </a:tc>
+                <a:tc>
+                  <a:txBody>
+                    <a:bodyPr/>
+                    <a:lstStyle/>
+                    <a:p>
+                      <a:pPr algn="ctr">
+                        <a:defRPr sz="1000" b="1">
+                          <a:solidFill>
+                            <a:srgbClr val="0284C7"/>
+                          </a:solidFill>
+                        </a:defRPr>
+                      </a:pPr>
+                      <a:r>
+                        <a:t>ฟรีตามระยะประกัน</a:t>
+                      </a:r>
+                    </a:p>
+                  </a:txBody>
+                  <a:tcPr>
+                    <a:solidFill>
+                      <a:srgbClr val="FFFFFF"/>
+                    </a:solidFill>
+                  </a:tcPr>
+                </a:tc>
+                <a:tc>
+                  <a:txBody>
+                    <a:bodyPr/>
+                    <a:lstStyle/>
+                    <a:p>
+                      <a:pPr algn="ctr">
+                        <a:defRPr sz="1000" b="1">
+                          <a:solidFill>
+                            <a:srgbClr val="059669"/>
+                          </a:solidFill>
+                        </a:defRPr>
+                      </a:pPr>
+                      <a:r>
+                        <a:t>ฟรี 100% ตลอดสัญญา</a:t>
+                      </a:r>
+                    </a:p>
+                  </a:txBody>
+                  <a:tcPr>
+                    <a:solidFill>
+                      <a:srgbClr val="FFFFFF"/>
+                    </a:solidFill>
+                  </a:tcPr>
+                </a:tc>
+                <a:tc>
+                  <a:txBody>
+                    <a:bodyPr/>
+                    <a:lstStyle/>
+                    <a:p>
+                      <a:pPr algn="ctr">
+                        <a:defRPr sz="1000" b="1">
+                          <a:solidFill>
+                            <a:srgbClr val="059669"/>
+                          </a:solidFill>
+                        </a:defRPr>
+                      </a:pPr>
+                      <a:r>
+                        <a:t>ฟรี 100% + อะไหล่สำรอง 5%</a:t>
+                      </a:r>
+                    </a:p>
+                  </a:txBody>
+                  <a:tcPr>
+                    <a:solidFill>
+                      <a:srgbClr val="FFFFFF"/>
+                    </a:solidFill>
+                  </a:tcPr>
+                </a:tc>
+              </a:tr>
+              <a:tr h="561708">
+                <a:tc>
+                  <a:txBody>
+                    <a:bodyPr/>
+                    <a:lstStyle/>
+                    <a:p>
+                      <a:pPr>
+                        <a:defRPr sz="1000">
+                          <a:solidFill>
+                            <a:srgbClr val="0F172A"/>
+                          </a:solidFill>
+                        </a:defRPr>
+                      </a:pPr>
+                      <a:r>
+                        <a:t>Cloud &amp; ซิม 4G Telemetry</a:t>
+                      </a:r>
+                    </a:p>
+                  </a:txBody>
+                  <a:tcPr>
+                    <a:solidFill>
+                      <a:srgbClr val="F8FAFC"/>
+                    </a:solidFill>
+                  </a:tcPr>
+                </a:tc>
+                <a:tc>
+                  <a:txBody>
+                    <a:bodyPr/>
+                    <a:lstStyle/>
+                    <a:p>
+                      <a:pPr algn="ctr">
+                        <a:defRPr sz="1000" b="1">
+                          <a:solidFill>
+                            <a:srgbClr val="0284C7"/>
+                          </a:solidFill>
+                        </a:defRPr>
+                      </a:pPr>
+                      <a:r>
+                        <a:t>ฟรี 1-2 ปีแรก</a:t>
+                      </a:r>
+                    </a:p>
+                  </a:txBody>
+                  <a:tcPr>
+                    <a:solidFill>
+                      <a:srgbClr val="F8FAFC"/>
+                    </a:solidFill>
+                  </a:tcPr>
+                </a:tc>
+                <a:tc>
+                  <a:txBody>
+                    <a:bodyPr/>
+                    <a:lstStyle/>
+                    <a:p>
+                      <a:pPr algn="ctr">
+                        <a:defRPr sz="1000" b="1">
+                          <a:solidFill>
+                            <a:srgbClr val="0284C7"/>
+                          </a:solidFill>
+                        </a:defRPr>
+                      </a:pPr>
+                      <a:r>
+                        <a:t>ฟรี 2 ปีแรก</a:t>
+                      </a:r>
+                    </a:p>
+                  </a:txBody>
+                  <a:tcPr>
+                    <a:solidFill>
+                      <a:srgbClr val="F8FAFC"/>
+                    </a:solidFill>
+                  </a:tcPr>
+                </a:tc>
+                <a:tc>
+                  <a:txBody>
+                    <a:bodyPr/>
+                    <a:lstStyle/>
+                    <a:p>
+                      <a:pPr algn="ctr">
+                        <a:defRPr sz="1000" b="1">
+                          <a:solidFill>
+                            <a:srgbClr val="059669"/>
+                          </a:solidFill>
+                        </a:defRPr>
+                      </a:pPr>
+                      <a:r>
+                        <a:t>รวมอยู่ในค่าบริการแล้ว</a:t>
+                      </a:r>
+                    </a:p>
+                  </a:txBody>
+                  <a:tcPr>
+                    <a:solidFill>
+                      <a:srgbClr val="F8FAFC"/>
+                    </a:solidFill>
+                  </a:tcPr>
+                </a:tc>
+                <a:tc>
+                  <a:txBody>
+                    <a:bodyPr/>
+                    <a:lstStyle/>
+                    <a:p>
+                      <a:pPr algn="ctr">
+                        <a:defRPr sz="1000" b="1">
+                          <a:solidFill>
+                            <a:srgbClr val="059669"/>
+                          </a:solidFill>
+                        </a:defRPr>
+                      </a:pPr>
+                      <a:r>
+                        <a:t>รวมอยู่ในค่าบริการแล้ว</a:t>
+                      </a:r>
+                    </a:p>
+                  </a:txBody>
+                  <a:tcPr>
+                    <a:solidFill>
+                      <a:srgbClr val="F8FAFC"/>
+                    </a:solidFill>
+                  </a:tcPr>
+                </a:tc>
+              </a:tr>
+            </a:tbl>
+          </a:graphicData>
+        </a:graphic>
+      </p:graphicFrame>
+      <p:sp>
+        <p:nvSpPr>
+          <p:cNvPr id="4" name="Rounded Rectangle 3"/>
+          <p:cNvSpPr/>
+          <p:nvPr/>
+        </p:nvSpPr>
+        <p:spPr>
+          <a:xfrm>
+            <a:off x="731520" y="5577840"/>
+            <a:ext cx="10728655" cy="822960"/>
+          </a:xfrm>
+          <a:prstGeom prst="roundRect">
+            <a:avLst/>
+          </a:prstGeom>
+          <a:solidFill>
+            <a:srgbClr val="FFFFFF"/>
+          </a:solidFill>
+          <a:ln w="19050">
+            <a:solidFill>
+              <a:srgbClr val="0284C7"/>
+            </a:solidFill>
+          </a:ln>
+        </p:spPr>
+        <p:style>
+          <a:lnRef idx="1">
+            <a:schemeClr val="accent1"/>
+          </a:lnRef>
+          <a:fillRef idx="3">
+            <a:schemeClr val="accent1"/>
+          </a:fillRef>
+          <a:effectRef idx="2">
+            <a:schemeClr val="accent1"/>
+          </a:effectRef>
+          <a:fontRef idx="minor">
+            <a:schemeClr val="lt1"/>
+          </a:fontRef>
+        </p:style>
+        <p:txBody>
+          <a:bodyPr rtlCol="0" anchor="ctr"/>
+          <a:lstStyle/>
+          <a:p>
+            <a:pPr algn="ctr"/>
+          </a:p>
+        </p:txBody>
+      </p:sp>
+      <p:sp>
+        <p:nvSpPr>
+          <p:cNvPr id="5" name="TextBox 4"/>
+          <p:cNvSpPr txBox="1"/>
+          <p:nvPr/>
+        </p:nvSpPr>
+        <p:spPr>
+          <a:xfrm>
+            <a:off x="914400" y="5623560"/>
+            <a:ext cx="10332720" cy="731520"/>
+          </a:xfrm>
+          <a:prstGeom prst="rect">
+            <a:avLst/>
+          </a:prstGeom>
+          <a:noFill/>
+        </p:spPr>
+        <p:txBody>
+          <a:bodyPr wrap="square">
+            <a:spAutoFit/>
+          </a:bodyPr>
+          <a:lstStyle/>
+          <a:p>
+            <a:pPr>
+              <a:defRPr sz="1050" b="1">
+                <a:solidFill>
+                  <a:srgbClr val="0F172A"/>
+                </a:solidFill>
+              </a:defRPr>
+            </a:pPr>
+            <a:r>
+              <a:t>💡 สำหรับโครงการระดับ 100 ชุดขึ้นไป: มีระบบ White-Label ติดแบรนด์ของลูกค้า, Private Server และจัดทีมอบรมช่างเทคนิคประจำไซต์งานฟรี</a:t>
+            </a:r>
+          </a:p>
+        </p:txBody>
+      </p:sp>
+    </p:spTree>
+  </p:cSld>
+  <p:clrMapOvr>
+    <a:masterClrMapping/>
+  </p:clrMapOvr>
+</p:sld>
+</file>
+
+<file path=ppt/slides/slide4.xml><?xml version="1.0" encoding="utf-8"?>
+<p:sld xmlns:a="http://schemas.openxmlformats.org/drawingml/2006/main" xmlns:p="http://schemas.openxmlformats.org/presentationml/2006/main" xmlns:r="http://schemas.openxmlformats.org/officeDocument/2006/relationships">
+  <p:cSld>
+    <p:bg>
+      <p:bgPr>
+        <a:solidFill>
+          <a:srgbClr val="F1F6FB"/>
+        </a:solidFill>
+        <a:effectLst/>
+      </p:bgPr>
+    </p:bg>
+    <p:spTree>
+      <p:nvGrpSpPr>
+        <p:cNvPr id="1" name=""/>
+        <p:cNvGrpSpPr/>
+        <p:nvPr/>
+      </p:nvGrpSpPr>
+      <p:grpSpPr/>
+      <p:sp>
+        <p:nvSpPr>
+          <p:cNvPr id="2" name="TextBox 1"/>
+          <p:cNvSpPr txBox="1"/>
+          <p:nvPr/>
+        </p:nvSpPr>
+        <p:spPr>
+          <a:xfrm>
+            <a:off x="731520" y="365760"/>
+            <a:ext cx="10728655" cy="1005840"/>
+          </a:xfrm>
+          <a:prstGeom prst="rect">
+            <a:avLst/>
+          </a:prstGeom>
+          <a:noFill/>
+        </p:spPr>
+        <p:txBody>
+          <a:bodyPr wrap="square" lIns="0" tIns="0" rIns="0" bIns="0">
+            <a:spAutoFit/>
+          </a:bodyPr>
+          <a:lstStyle/>
+          <a:p>
+            <a:pPr>
+              <a:spcAft>
+                <a:spcPts val="200"/>
+              </a:spcAft>
+              <a:defRPr sz="1100" b="1">
+                <a:solidFill>
+                  <a:srgbClr val="0284C7"/>
+                </a:solidFill>
+              </a:defRPr>
+            </a:pPr>
+            <a:r>
+              <a:t>NCT WATER NEXUS PRO | COMMERCIAL PROPOSAL</a:t>
+            </a:r>
+          </a:p>
+          <a:p>
+            <a:pPr>
+              <a:defRPr sz="2300" b="1">
+                <a:solidFill>
+                  <a:srgbClr val="0F172A"/>
+                </a:solidFill>
+              </a:defRPr>
+            </a:pPr>
+            <a:r>
+              <a:t>สเปกเซนเซอร์ตรวจวัดคุณภาพน้ำ (High-Precision Sensor Probes)</a:t>
+            </a:r>
+          </a:p>
+        </p:txBody>
+      </p:sp>
+      <p:sp>
+        <p:nvSpPr>
+          <p:cNvPr id="3" name="Rounded Rectangle 2"/>
+          <p:cNvSpPr/>
+          <p:nvPr/>
+        </p:nvSpPr>
+        <p:spPr>
+          <a:xfrm>
+            <a:off x="731520" y="1463040"/>
+            <a:ext cx="2468880" cy="2926080"/>
+          </a:xfrm>
+          <a:prstGeom prst="roundRect">
+            <a:avLst/>
+          </a:prstGeom>
+          <a:solidFill>
+            <a:srgbClr val="FFFFFF"/>
+          </a:solidFill>
+          <a:ln w="19050">
+            <a:solidFill>
+              <a:srgbClr val="D97706"/>
+            </a:solidFill>
+          </a:ln>
+        </p:spPr>
+        <p:style>
+          <a:lnRef idx="1">
+            <a:schemeClr val="accent1"/>
+          </a:lnRef>
+          <a:fillRef idx="3">
+            <a:schemeClr val="accent1"/>
+          </a:fillRef>
+          <a:effectRef idx="2">
+            <a:schemeClr val="accent1"/>
+          </a:effectRef>
+          <a:fontRef idx="minor">
+            <a:schemeClr val="lt1"/>
+          </a:fontRef>
+        </p:style>
+        <p:txBody>
+          <a:bodyPr rtlCol="0" anchor="ctr"/>
+          <a:lstStyle/>
+          <a:p>
+            <a:pPr algn="ctr"/>
+          </a:p>
+        </p:txBody>
+      </p:sp>
+      <p:sp>
+        <p:nvSpPr>
+          <p:cNvPr id="4" name="TextBox 3"/>
+          <p:cNvSpPr txBox="1"/>
+          <p:nvPr/>
+        </p:nvSpPr>
+        <p:spPr>
+          <a:xfrm>
+            <a:off x="868680" y="1600200"/>
+            <a:ext cx="2194560" cy="2651760"/>
+          </a:xfrm>
+          <a:prstGeom prst="rect">
+            <a:avLst/>
+          </a:prstGeom>
+          <a:noFill/>
+        </p:spPr>
+        <p:txBody>
+          <a:bodyPr wrap="square">
+            <a:spAutoFit/>
+          </a:bodyPr>
+          <a:lstStyle/>
+          <a:p>
+            <a:pPr>
+              <a:defRPr sz="1000" b="1">
+                <a:solidFill>
+                  <a:srgbClr val="D97706"/>
+                </a:solidFill>
+              </a:defRPr>
+            </a:pPr>
+            <a:r>
+              <a:t>SENSOR 01</a:t>
+            </a:r>
+          </a:p>
+          <a:p>
+            <a:pPr>
+              <a:spcAft>
+                <a:spcPts val="400"/>
+              </a:spcAft>
+              <a:defRPr sz="1300" b="1">
+                <a:solidFill>
+                  <a:srgbClr val="0F172A"/>
+                </a:solidFill>
+              </a:defRPr>
+            </a:pPr>
+            <a:r>
+              <a:t>อุณหภูมิน้ำ (Water Temp)</a:t>
+            </a:r>
+          </a:p>
+          <a:p>
+            <a:pPr>
+              <a:spcAft>
+                <a:spcPts val="600"/>
+              </a:spcAft>
+              <a:defRPr sz="1050" b="1">
+                <a:solidFill>
+                  <a:srgbClr val="D97706"/>
+                </a:solidFill>
+              </a:defRPr>
+            </a:pPr>
+            <a:r>
+              <a:t>หัววัด: PT1000 Platinum RTD</a:t>
+            </a:r>
+          </a:p>
+          <a:p>
+            <a:pPr>
+              <a:defRPr sz="950">
+                <a:solidFill>
+                  <a:srgbClr val="64748B"/>
+                </a:solidFill>
+              </a:defRPr>
+            </a:pPr>
+            <a:r>
+              <a:t>ช่วงวัด: 0.0 - 50.0°C</a:t>
+            </a:r>
+            <a:br/>
+            <a:r>
+              <a:t>ความละเอียด: ±0.1°C</a:t>
+            </a:r>
+            <a:br/>
+            <a:r>
+              <a:t>ฟังก์ชัน: ระบบชดเชยอุณหภูมิอัตโนมัติ (ATC Compensation) เพื่อความเที่ยงตรงสูงสุดของค่า pH &amp; TDS</a:t>
+            </a:r>
+          </a:p>
+        </p:txBody>
+      </p:sp>
+      <p:sp>
+        <p:nvSpPr>
+          <p:cNvPr id="5" name="Rounded Rectangle 4"/>
+          <p:cNvSpPr/>
+          <p:nvPr/>
+        </p:nvSpPr>
+        <p:spPr>
+          <a:xfrm>
+            <a:off x="3474720" y="1463040"/>
+            <a:ext cx="2468880" cy="2926080"/>
+          </a:xfrm>
+          <a:prstGeom prst="roundRect">
+            <a:avLst/>
+          </a:prstGeom>
+          <a:solidFill>
+            <a:srgbClr val="FFFFFF"/>
+          </a:solidFill>
+          <a:ln w="19050">
+            <a:solidFill>
+              <a:srgbClr val="0284C7"/>
+            </a:solidFill>
+          </a:ln>
+        </p:spPr>
+        <p:style>
+          <a:lnRef idx="1">
+            <a:schemeClr val="accent1"/>
+          </a:lnRef>
+          <a:fillRef idx="3">
+            <a:schemeClr val="accent1"/>
+          </a:fillRef>
+          <a:effectRef idx="2">
+            <a:schemeClr val="accent1"/>
+          </a:effectRef>
+          <a:fontRef idx="minor">
+            <a:schemeClr val="lt1"/>
+          </a:fontRef>
+        </p:style>
+        <p:txBody>
+          <a:bodyPr rtlCol="0" anchor="ctr"/>
+          <a:lstStyle/>
+          <a:p>
+            <a:pPr algn="ctr"/>
+          </a:p>
+        </p:txBody>
+      </p:sp>
+      <p:sp>
+        <p:nvSpPr>
+          <p:cNvPr id="6" name="TextBox 5"/>
+          <p:cNvSpPr txBox="1"/>
+          <p:nvPr/>
+        </p:nvSpPr>
+        <p:spPr>
+          <a:xfrm>
+            <a:off x="3611880" y="1600200"/>
+            <a:ext cx="2194560" cy="2651760"/>
+          </a:xfrm>
+          <a:prstGeom prst="rect">
+            <a:avLst/>
+          </a:prstGeom>
+          <a:noFill/>
+        </p:spPr>
+        <p:txBody>
+          <a:bodyPr wrap="square">
+            <a:spAutoFit/>
+          </a:bodyPr>
+          <a:lstStyle/>
+          <a:p>
+            <a:pPr>
+              <a:defRPr sz="1000" b="1">
+                <a:solidFill>
+                  <a:srgbClr val="0284C7"/>
+                </a:solidFill>
+              </a:defRPr>
+            </a:pPr>
+            <a:r>
+              <a:t>SENSOR 02</a:t>
+            </a:r>
+          </a:p>
+          <a:p>
+            <a:pPr>
+              <a:spcAft>
+                <a:spcPts val="400"/>
+              </a:spcAft>
+              <a:defRPr sz="1300" b="1">
+                <a:solidFill>
+                  <a:srgbClr val="0F172A"/>
+                </a:solidFill>
+              </a:defRPr>
+            </a:pPr>
+            <a:r>
+              <a:t>ความเป็นกรด-ด่าง (pH)</a:t>
+            </a:r>
+          </a:p>
+          <a:p>
+            <a:pPr>
+              <a:spcAft>
+                <a:spcPts val="600"/>
+              </a:spcAft>
+              <a:defRPr sz="1050" b="1">
+                <a:solidFill>
+                  <a:srgbClr val="0284C7"/>
+                </a:solidFill>
+              </a:defRPr>
+            </a:pPr>
+            <a:r>
+              <a:t>หัววัด: Industrial Glass Electrode</a:t>
+            </a:r>
+          </a:p>
+          <a:p>
+            <a:pPr>
+              <a:defRPr sz="950">
+                <a:solidFill>
+                  <a:srgbClr val="64748B"/>
+                </a:solidFill>
+              </a:defRPr>
+            </a:pPr>
+            <a:r>
+              <a:t>ช่วงวัด: 0.00 - 14.00 pH</a:t>
+            </a:r>
+            <a:br/>
+            <a:r>
+              <a:t>ความแม่นยำ: ±0.01 pH</a:t>
+            </a:r>
+            <a:br/>
+            <a:r>
+              <a:t>เกณฑ์มาตรฐาน: 6.50 - 8.50 pH</a:t>
+            </a:r>
+            <a:br/>
+            <a:r>
+              <a:t>รองรับการสอบเทียบดิจิทัล (Buffer 4.01, 7.00, 10.01)</a:t>
+            </a:r>
+          </a:p>
+        </p:txBody>
+      </p:sp>
+      <p:sp>
+        <p:nvSpPr>
+          <p:cNvPr id="7" name="Rounded Rectangle 6"/>
+          <p:cNvSpPr/>
+          <p:nvPr/>
+        </p:nvSpPr>
+        <p:spPr>
+          <a:xfrm>
+            <a:off x="6217920" y="1463040"/>
+            <a:ext cx="2468880" cy="2926080"/>
+          </a:xfrm>
+          <a:prstGeom prst="roundRect">
+            <a:avLst/>
+          </a:prstGeom>
+          <a:solidFill>
+            <a:srgbClr val="FFFFFF"/>
+          </a:solidFill>
+          <a:ln w="19050">
+            <a:solidFill>
+              <a:srgbClr val="059669"/>
+            </a:solidFill>
+          </a:ln>
+        </p:spPr>
+        <p:style>
+          <a:lnRef idx="1">
+            <a:schemeClr val="accent1"/>
+          </a:lnRef>
+          <a:fillRef idx="3">
+            <a:schemeClr val="accent1"/>
+          </a:fillRef>
+          <a:effectRef idx="2">
+            <a:schemeClr val="accent1"/>
+          </a:effectRef>
+          <a:fontRef idx="minor">
+            <a:schemeClr val="lt1"/>
+          </a:fontRef>
+        </p:style>
+        <p:txBody>
+          <a:bodyPr rtlCol="0" anchor="ctr"/>
+          <a:lstStyle/>
+          <a:p>
+            <a:pPr algn="ctr"/>
+          </a:p>
+        </p:txBody>
+      </p:sp>
+      <p:sp>
+        <p:nvSpPr>
+          <p:cNvPr id="8" name="TextBox 7"/>
+          <p:cNvSpPr txBox="1"/>
+          <p:nvPr/>
+        </p:nvSpPr>
+        <p:spPr>
+          <a:xfrm>
+            <a:off x="6355080" y="1600200"/>
+            <a:ext cx="2194560" cy="2651760"/>
+          </a:xfrm>
+          <a:prstGeom prst="rect">
+            <a:avLst/>
+          </a:prstGeom>
+          <a:noFill/>
+        </p:spPr>
+        <p:txBody>
+          <a:bodyPr wrap="square">
+            <a:spAutoFit/>
+          </a:bodyPr>
+          <a:lstStyle/>
+          <a:p>
+            <a:pPr>
+              <a:defRPr sz="1000" b="1">
+                <a:solidFill>
+                  <a:srgbClr val="059669"/>
+                </a:solidFill>
+              </a:defRPr>
+            </a:pPr>
+            <a:r>
+              <a:t>SENSOR 03</a:t>
+            </a:r>
+          </a:p>
+          <a:p>
+            <a:pPr>
+              <a:spcAft>
+                <a:spcPts val="400"/>
+              </a:spcAft>
+              <a:defRPr sz="1300" b="1">
+                <a:solidFill>
+                  <a:srgbClr val="0F172A"/>
+                </a:solidFill>
+              </a:defRPr>
+            </a:pPr>
+            <a:r>
+              <a:t>สารละลายรวม (TDS / EC)</a:t>
+            </a:r>
+          </a:p>
+          <a:p>
+            <a:pPr>
+              <a:spcAft>
+                <a:spcPts val="600"/>
+              </a:spcAft>
+              <a:defRPr sz="1050" b="1">
+                <a:solidFill>
+                  <a:srgbClr val="059669"/>
+                </a:solidFill>
+              </a:defRPr>
+            </a:pPr>
+            <a:r>
+              <a:t>หัววัด: Titanium Alloy 2-Pole</a:t>
+            </a:r>
+          </a:p>
+          <a:p>
+            <a:pPr>
+              <a:defRPr sz="950">
+                <a:solidFill>
+                  <a:srgbClr val="64748B"/>
+                </a:solidFill>
+              </a:defRPr>
+            </a:pPr>
+            <a:r>
+              <a:t>ช่วงวัด: 0 - 2,000 ppm (mg/L)</a:t>
+            </a:r>
+            <a:br/>
+            <a:r>
+              <a:t>ความแม่นยำ: ±2% F.S.</a:t>
+            </a:r>
+            <a:br/>
+            <a:r>
+              <a:t>เกณฑ์มาตรฐาน: &lt; 500 ppm</a:t>
+            </a:r>
+            <a:br/>
+            <a:r>
+              <a:t>ตรวจจับปริมาณสารแขวนลอยและแร่ธาตุในน้ำ</a:t>
+            </a:r>
+          </a:p>
+        </p:txBody>
+      </p:sp>
+      <p:sp>
+        <p:nvSpPr>
+          <p:cNvPr id="9" name="Rounded Rectangle 8"/>
+          <p:cNvSpPr/>
+          <p:nvPr/>
+        </p:nvSpPr>
+        <p:spPr>
+          <a:xfrm>
+            <a:off x="8961120" y="1463040"/>
+            <a:ext cx="2468880" cy="2926080"/>
+          </a:xfrm>
+          <a:prstGeom prst="roundRect">
+            <a:avLst/>
+          </a:prstGeom>
+          <a:solidFill>
+            <a:srgbClr val="FFFFFF"/>
+          </a:solidFill>
+          <a:ln w="19050">
+            <a:solidFill>
+              <a:srgbClr val="0284C7"/>
+            </a:solidFill>
+          </a:ln>
+        </p:spPr>
+        <p:style>
+          <a:lnRef idx="1">
+            <a:schemeClr val="accent1"/>
+          </a:lnRef>
+          <a:fillRef idx="3">
+            <a:schemeClr val="accent1"/>
+          </a:fillRef>
+          <a:effectRef idx="2">
+            <a:schemeClr val="accent1"/>
+          </a:effectRef>
+          <a:fontRef idx="minor">
+            <a:schemeClr val="lt1"/>
+          </a:fontRef>
+        </p:style>
+        <p:txBody>
+          <a:bodyPr rtlCol="0" anchor="ctr"/>
+          <a:lstStyle/>
+          <a:p>
+            <a:pPr algn="ctr"/>
+          </a:p>
+        </p:txBody>
+      </p:sp>
+      <p:sp>
+        <p:nvSpPr>
+          <p:cNvPr id="10" name="TextBox 9"/>
+          <p:cNvSpPr txBox="1"/>
+          <p:nvPr/>
+        </p:nvSpPr>
+        <p:spPr>
+          <a:xfrm>
+            <a:off x="9098280" y="1600200"/>
+            <a:ext cx="2194560" cy="2651760"/>
+          </a:xfrm>
+          <a:prstGeom prst="rect">
+            <a:avLst/>
+          </a:prstGeom>
+          <a:noFill/>
+        </p:spPr>
+        <p:txBody>
+          <a:bodyPr wrap="square">
+            <a:spAutoFit/>
+          </a:bodyPr>
+          <a:lstStyle/>
+          <a:p>
+            <a:pPr>
+              <a:defRPr sz="1000" b="1">
+                <a:solidFill>
+                  <a:srgbClr val="0284C7"/>
+                </a:solidFill>
+              </a:defRPr>
+            </a:pPr>
+            <a:r>
+              <a:t>SENSOR 04</a:t>
+            </a:r>
+          </a:p>
+          <a:p>
+            <a:pPr>
+              <a:spcAft>
+                <a:spcPts val="400"/>
+              </a:spcAft>
+              <a:defRPr sz="1300" b="1">
+                <a:solidFill>
+                  <a:srgbClr val="0F172A"/>
+                </a:solidFill>
+              </a:defRPr>
+            </a:pPr>
+            <a:r>
+              <a:t>คลอรีนคงเหลือ (Residual Cl)</a:t>
+            </a:r>
+          </a:p>
+          <a:p>
+            <a:pPr>
+              <a:spcAft>
+                <a:spcPts val="600"/>
+              </a:spcAft>
+              <a:defRPr sz="1050" b="1">
+                <a:solidFill>
+                  <a:srgbClr val="0284C7"/>
+                </a:solidFill>
+              </a:defRPr>
+            </a:pPr>
+            <a:r>
+              <a:t>หัววัด: Amperometric Probe</a:t>
+            </a:r>
+          </a:p>
+          <a:p>
+            <a:pPr>
+              <a:defRPr sz="950">
+                <a:solidFill>
+                  <a:srgbClr val="64748B"/>
+                </a:solidFill>
+              </a:defRPr>
+            </a:pPr>
+            <a:r>
+              <a:t>ช่วงวัด: 0.00 - 5.00 mg/L (ppm)</a:t>
+            </a:r>
+            <a:br/>
+            <a:r>
+              <a:t>ความแม่นยำ: ±0.05 mg/L</a:t>
+            </a:r>
+            <a:br/>
+            <a:r>
+              <a:t>เกณฑ์มาตรฐาน: 0.20 - 2.00 mg/L</a:t>
+            </a:r>
+            <a:br/>
+            <a:r>
+              <a:t>ตรวจเช็คประสิทธิภาพการฆ่าเชื้อโรค 100%</a:t>
+            </a:r>
+          </a:p>
+        </p:txBody>
+      </p:sp>
+      <p:sp>
+        <p:nvSpPr>
+          <p:cNvPr id="11" name="Rounded Rectangle 10"/>
+          <p:cNvSpPr/>
+          <p:nvPr/>
+        </p:nvSpPr>
+        <p:spPr>
+          <a:xfrm>
+            <a:off x="731520" y="4663440"/>
+            <a:ext cx="10728655" cy="1645920"/>
+          </a:xfrm>
+          <a:prstGeom prst="roundRect">
+            <a:avLst/>
+          </a:prstGeom>
+          <a:solidFill>
+            <a:srgbClr val="0F172A"/>
+          </a:solidFill>
+          <a:ln w="19050">
+            <a:solidFill>
+              <a:srgbClr val="0284C7"/>
+            </a:solidFill>
+          </a:ln>
+        </p:spPr>
+        <p:style>
+          <a:lnRef idx="1">
+            <a:schemeClr val="accent1"/>
+          </a:lnRef>
+          <a:fillRef idx="3">
+            <a:schemeClr val="accent1"/>
+          </a:fillRef>
+          <a:effectRef idx="2">
+            <a:schemeClr val="accent1"/>
+          </a:effectRef>
+          <a:fontRef idx="minor">
+            <a:schemeClr val="lt1"/>
+          </a:fontRef>
+        </p:style>
+        <p:txBody>
+          <a:bodyPr rtlCol="0" anchor="ctr"/>
+          <a:lstStyle/>
+          <a:p>
+            <a:pPr algn="ctr"/>
+          </a:p>
+        </p:txBody>
+      </p:sp>
+      <p:sp>
+        <p:nvSpPr>
+          <p:cNvPr id="12" name="TextBox 11"/>
+          <p:cNvSpPr txBox="1"/>
+          <p:nvPr/>
+        </p:nvSpPr>
+        <p:spPr>
+          <a:xfrm>
+            <a:off x="1005840" y="4800600"/>
+            <a:ext cx="10149840" cy="1371600"/>
+          </a:xfrm>
+          <a:prstGeom prst="rect">
+            <a:avLst/>
+          </a:prstGeom>
+          <a:noFill/>
+        </p:spPr>
+        <p:txBody>
+          <a:bodyPr wrap="square">
+            <a:spAutoFit/>
+          </a:bodyPr>
+          <a:lstStyle/>
+          <a:p>
+            <a:pPr>
+              <a:spcAft>
+                <a:spcPts val="400"/>
+              </a:spcAft>
+              <a:defRPr sz="1300" b="1">
+                <a:solidFill>
+                  <a:srgbClr val="2DD4BF"/>
+                </a:solidFill>
+              </a:defRPr>
+            </a:pPr>
+            <a:r>
+              <a:t>🎛️ SMART INDUSTRIAL CONTROLLER NODE &amp; TELEMETRY</a:t>
+            </a:r>
+          </a:p>
+          <a:p>
+            <a:pPr>
+              <a:defRPr sz="1050">
+                <a:solidFill>
+                  <a:srgbClr val="E2E8F0"/>
+                </a:solidFill>
+              </a:defRPr>
+            </a:pPr>
+            <a:r>
+              <a:t>• Telemetry Multi-Link: ส่งสัญญาณผ่าน WiFi 2.4GHz, 4G LTE Cellular และ Modbus RS-485 สู่ระบบ Cloud SCADA ตลอด 24 ชม.</a:t>
+            </a:r>
+            <a:br/>
+            <a:r>
+              <a:t>• ระบบสำรองไฟอัจฉริยะ (LiFePO4 Battery Backup): ใช้งานต่อเนื่องแม้ยามไฟดับ พร้อมระบบตรวจสอบระดับแบตเตอรี่ Real-time</a:t>
+            </a:r>
+            <a:br/>
+            <a:r>
+              <a:t>• Alarm Output Relay: พอร์ต Dry Contact สำหรับต่อไซเรนเตือนภัยภายนอก หรือส่งสัญญาณต่อไปยังระบบ SCADA / PLC เดิมของโรงงาน</a:t>
+            </a:r>
+          </a:p>
+        </p:txBody>
+      </p:sp>
+    </p:spTree>
+  </p:cSld>
+  <p:clrMapOvr>
+    <a:masterClrMapping/>
+  </p:clrMapOvr>
+</p:sld>
+</file>
+
+<file path=ppt/slides/slide5.xml><?xml version="1.0" encoding="utf-8"?>
+<p:sld xmlns:a="http://schemas.openxmlformats.org/drawingml/2006/main" xmlns:p="http://schemas.openxmlformats.org/presentationml/2006/main" xmlns:r="http://schemas.openxmlformats.org/officeDocument/2006/relationships">
+  <p:cSld>
+    <p:bg>
+      <p:bgPr>
+        <a:solidFill>
+          <a:srgbClr val="F1F6FB"/>
+        </a:solidFill>
+        <a:effectLst/>
+      </p:bgPr>
+    </p:bg>
+    <p:spTree>
+      <p:nvGrpSpPr>
+        <p:cNvPr id="1" name=""/>
+        <p:cNvGrpSpPr/>
+        <p:nvPr/>
+      </p:nvGrpSpPr>
+      <p:grpSpPr/>
+      <p:sp>
+        <p:nvSpPr>
+          <p:cNvPr id="2" name="TextBox 1"/>
+          <p:cNvSpPr txBox="1"/>
+          <p:nvPr/>
+        </p:nvSpPr>
+        <p:spPr>
+          <a:xfrm>
+            <a:off x="731520" y="365760"/>
+            <a:ext cx="10728655" cy="1005840"/>
+          </a:xfrm>
+          <a:prstGeom prst="rect">
+            <a:avLst/>
+          </a:prstGeom>
+          <a:noFill/>
+        </p:spPr>
+        <p:txBody>
+          <a:bodyPr wrap="square" lIns="0" tIns="0" rIns="0" bIns="0">
+            <a:spAutoFit/>
+          </a:bodyPr>
+          <a:lstStyle/>
+          <a:p>
+            <a:pPr>
+              <a:spcAft>
+                <a:spcPts val="200"/>
+              </a:spcAft>
+              <a:defRPr sz="1100" b="1">
+                <a:solidFill>
+                  <a:srgbClr val="0284C7"/>
+                </a:solidFill>
+              </a:defRPr>
+            </a:pPr>
+            <a:r>
+              <a:t>NCT WATER NEXUS PRO | COMMERCIAL PROPOSAL</a:t>
+            </a:r>
+          </a:p>
+          <a:p>
+            <a:pPr>
+              <a:defRPr sz="2300" b="1">
+                <a:solidFill>
+                  <a:srgbClr val="0F172A"/>
+                </a:solidFill>
+              </a:defRPr>
+            </a:pPr>
+            <a:r>
+              <a:t>ระบบแดชบอร์ด SCADA และ Mobile Companion App (Software Platform)</a:t>
             </a:r>
           </a:p>
         </p:txBody>
@@ -3564,1175 +5516,6 @@
         </p:nvSpPr>
         <p:spPr>
           <a:xfrm>
-            <a:off x="1005840" y="1737360"/>
-            <a:ext cx="4572000" cy="4206240"/>
-          </a:xfrm>
-          <a:prstGeom prst="rect">
-            <a:avLst/>
-          </a:prstGeom>
-          <a:noFill/>
-        </p:spPr>
-        <p:txBody>
-          <a:bodyPr wrap="square">
-            <a:spAutoFit/>
-          </a:bodyPr>
-          <a:lstStyle/>
-          <a:p>
-            <a:pPr>
-              <a:spcAft>
-                <a:spcPts val="1400"/>
-              </a:spcAft>
-              <a:defRPr sz="1500" b="1">
-                <a:solidFill>
-                  <a:srgbClr val="E11D48"/>
-                </a:solidFill>
-              </a:defRPr>
-            </a:pPr>
-            <a:r>
-              <a:t>❌ ปัญหาเดิมในการดูแลระบบน้ำ (Traditional Monitoring)</a:t>
-            </a:r>
-          </a:p>
-          <a:p>
-            <a:pPr>
-              <a:defRPr b="1" sz="1200">
-                <a:solidFill>
-                  <a:srgbClr val="0F172A"/>
-                </a:solidFill>
-              </a:defRPr>
-            </a:pPr>
-            <a:r>
-              <a:t>• ความล่าช้าในการตรวจวัด (Manual Sampling):</a:t>
-            </a:r>
-          </a:p>
-          <a:p>
-            <a:pPr>
-              <a:spcAft>
-                <a:spcPts val="800"/>
-              </a:spcAft>
-              <a:defRPr sz="1100">
-                <a:solidFill>
-                  <a:srgbClr val="64748B"/>
-                </a:solidFill>
-              </a:defRPr>
-            </a:pPr>
-            <a:r>
-              <a:t>  ตรวจแบบเดินตักน้ำเพียง 1-2 ครั้ง/วัน ไม่สามารถตรวจจับสภาวะน้ำหลุดเกณฑ์ที่เกิดขึ้นฉับพลันได้</a:t>
-            </a:r>
-          </a:p>
-          <a:p>
-            <a:pPr>
-              <a:defRPr b="1" sz="1200">
-                <a:solidFill>
-                  <a:srgbClr val="0F172A"/>
-                </a:solidFill>
-              </a:defRPr>
-            </a:pPr>
-            <a:r>
-              <a:t>• ความเสี่ยงต่อคุณภาพสินค้าและกระบวนการผลิต:</a:t>
-            </a:r>
-          </a:p>
-          <a:p>
-            <a:pPr>
-              <a:spcAft>
-                <a:spcPts val="800"/>
-              </a:spcAft>
-              <a:defRPr sz="1100">
-                <a:solidFill>
-                  <a:srgbClr val="64748B"/>
-                </a:solidFill>
-              </a:defRPr>
-            </a:pPr>
-            <a:r>
-              <a:t>  หากค่าน้ำผิดปกติระหว่างรอบตรวจ อาจทำให้เกิดความเสียหายต่อระบบท่อ เครื่องจักร หรือผลิตภัณฑ์</a:t>
-            </a:r>
-          </a:p>
-          <a:p>
-            <a:pPr>
-              <a:defRPr b="1" sz="1200">
-                <a:solidFill>
-                  <a:srgbClr val="0F172A"/>
-                </a:solidFill>
-              </a:defRPr>
-            </a:pPr>
-            <a:r>
-              <a:t>• ขาดข้อมูลบันทึกประวัติแบบต่อเนื่อง (No Real-Time Logs):</a:t>
-            </a:r>
-          </a:p>
-          <a:p>
-            <a:pPr>
-              <a:spcAft>
-                <a:spcPts val="800"/>
-              </a:spcAft>
-              <a:defRPr sz="1100">
-                <a:solidFill>
-                  <a:srgbClr val="64748B"/>
-                </a:solidFill>
-              </a:defRPr>
-            </a:pPr>
-            <a:r>
-              <a:t>  การจดบันทึกลงสมุดกระดาษมีความผิดพลาดง่าย ข้อมูลสูญหาย และไม่สามารถนำมาวิเคราะห์เชิงสถิติได้</a:t>
-            </a:r>
-          </a:p>
-          <a:p>
-            <a:pPr>
-              <a:defRPr b="1" sz="1200">
-                <a:solidFill>
-                  <a:srgbClr val="0F172A"/>
-                </a:solidFill>
-              </a:defRPr>
-            </a:pPr>
-            <a:r>
-              <a:t>• ไม่สามารถแจ้งเตือนเหตุฉุกเฉินได้ทันท่วงที:</a:t>
-            </a:r>
-          </a:p>
-          <a:p>
-            <a:pPr>
-              <a:spcAft>
-                <a:spcPts val="800"/>
-              </a:spcAft>
-              <a:defRPr sz="1100">
-                <a:solidFill>
-                  <a:srgbClr val="64748B"/>
-                </a:solidFill>
-              </a:defRPr>
-            </a:pPr>
-            <a:r>
-              <a:t>  เมื่อเกิดเหตุสารปนเปื้อนหรือค่า pH แกว่งตัวรุนแรง เจ้าหน้าที่ไม่ทราบจนกระทั่งเกิดความเสียหายแล้ว</a:t>
-            </a:r>
-          </a:p>
-        </p:txBody>
-      </p:sp>
-      <p:sp>
-        <p:nvSpPr>
-          <p:cNvPr id="5" name="Rounded Rectangle 4"/>
-          <p:cNvSpPr/>
-          <p:nvPr/>
-        </p:nvSpPr>
-        <p:spPr>
-          <a:xfrm>
-            <a:off x="6309360" y="1463040"/>
-            <a:ext cx="5120640" cy="4754880"/>
-          </a:xfrm>
-          <a:prstGeom prst="roundRect">
-            <a:avLst/>
-          </a:prstGeom>
-          <a:solidFill>
-            <a:srgbClr val="FFFFFF"/>
-          </a:solidFill>
-          <a:ln w="19050">
-            <a:solidFill>
-              <a:srgbClr val="0284C7"/>
-            </a:solidFill>
-          </a:ln>
-        </p:spPr>
-        <p:style>
-          <a:lnRef idx="1">
-            <a:schemeClr val="accent1"/>
-          </a:lnRef>
-          <a:fillRef idx="3">
-            <a:schemeClr val="accent1"/>
-          </a:fillRef>
-          <a:effectRef idx="2">
-            <a:schemeClr val="accent1"/>
-          </a:effectRef>
-          <a:fontRef idx="minor">
-            <a:schemeClr val="lt1"/>
-          </a:fontRef>
-        </p:style>
-        <p:txBody>
-          <a:bodyPr rtlCol="0" anchor="ctr"/>
-          <a:lstStyle/>
-          <a:p>
-            <a:pPr algn="ctr"/>
-          </a:p>
-        </p:txBody>
-      </p:sp>
-      <p:sp>
-        <p:nvSpPr>
-          <p:cNvPr id="6" name="TextBox 5"/>
-          <p:cNvSpPr txBox="1"/>
-          <p:nvPr/>
-        </p:nvSpPr>
-        <p:spPr>
-          <a:xfrm>
-            <a:off x="6583680" y="1737360"/>
-            <a:ext cx="4572000" cy="4206240"/>
-          </a:xfrm>
-          <a:prstGeom prst="rect">
-            <a:avLst/>
-          </a:prstGeom>
-          <a:noFill/>
-        </p:spPr>
-        <p:txBody>
-          <a:bodyPr wrap="square">
-            <a:spAutoFit/>
-          </a:bodyPr>
-          <a:lstStyle/>
-          <a:p>
-            <a:pPr>
-              <a:spcAft>
-                <a:spcPts val="1400"/>
-              </a:spcAft>
-              <a:defRPr sz="1500" b="1">
-                <a:solidFill>
-                  <a:srgbClr val="0284C7"/>
-                </a:solidFill>
-              </a:defRPr>
-            </a:pPr>
-            <a:r>
-              <a:t>✅ โซลูชันอัจฉริยะ NCT WATER NEXUS PRO</a:t>
-            </a:r>
-          </a:p>
-          <a:p>
-            <a:pPr>
-              <a:defRPr b="1" sz="1200">
-                <a:solidFill>
-                  <a:srgbClr val="059669"/>
-                </a:solidFill>
-              </a:defRPr>
-            </a:pPr>
-            <a:r>
-              <a:t>✔ ตรวจวัดแบบ Real-Time 24/7 (Live Polling 1-Sec):</a:t>
-            </a:r>
-          </a:p>
-          <a:p>
-            <a:pPr>
-              <a:spcAft>
-                <a:spcPts val="800"/>
-              </a:spcAft>
-              <a:defRPr sz="1100">
-                <a:solidFill>
-                  <a:srgbClr val="64748B"/>
-                </a:solidFill>
-              </a:defRPr>
-            </a:pPr>
-            <a:r>
-              <a:t>  หัววัดอุตสาหกรรมวัดค่า pH, Temp, TDS, Residual Cl, ORP ส่งข้อมูลขึ้น Cloud ต่อเนื่องแบบวินาทีต่อวินาที</a:t>
-            </a:r>
-          </a:p>
-          <a:p>
-            <a:pPr>
-              <a:defRPr b="1" sz="1200">
-                <a:solidFill>
-                  <a:srgbClr val="059669"/>
-                </a:solidFill>
-              </a:defRPr>
-            </a:pPr>
-            <a:r>
-              <a:t>✔ ระบบแจ้งเตือนอัจฉริยะทันที (Instant Early Warnings):</a:t>
-            </a:r>
-          </a:p>
-          <a:p>
-            <a:pPr>
-              <a:spcAft>
-                <a:spcPts val="800"/>
-              </a:spcAft>
-              <a:defRPr sz="1100">
-                <a:solidFill>
-                  <a:srgbClr val="64748B"/>
-                </a:solidFill>
-              </a:defRPr>
-            </a:pPr>
-            <a:r>
-              <a:t>  แจ้งเตือนอัตโนมัติผ่าน Line Notify, SMS และหน้าจอ Dashboard ทันทีที่ค่าน้ำเริ่มแกว่งตัว</a:t>
-            </a:r>
-          </a:p>
-          <a:p>
-            <a:pPr>
-              <a:defRPr b="1" sz="1200">
-                <a:solidFill>
-                  <a:srgbClr val="059669"/>
-                </a:solidFill>
-              </a:defRPr>
-            </a:pPr>
-            <a:r>
-              <a:t>✔ แดชบอร์ดคู่ Web SCADA + Mobile Companion:</a:t>
-            </a:r>
-          </a:p>
-          <a:p>
-            <a:pPr>
-              <a:spcAft>
-                <a:spcPts val="800"/>
-              </a:spcAft>
-              <a:defRPr sz="1100">
-                <a:solidFill>
-                  <a:srgbClr val="64748B"/>
-                </a:solidFill>
-              </a:defRPr>
-            </a:pPr>
-            <a:r>
-              <a:t>  มอนิเตอร์และดูแนวโน้มได้ทุกที่ ทั้งบนคอมพิวเตอร์ห้องควบคุม (Control Room) และสมาร์ทโฟน</a:t>
-            </a:r>
-          </a:p>
-          <a:p>
-            <a:pPr>
-              <a:defRPr b="1" sz="1200">
-                <a:solidFill>
-                  <a:srgbClr val="059669"/>
-                </a:solidFill>
-              </a:defRPr>
-            </a:pPr>
-            <a:r>
-              <a:t>✔ บันทึกข้อมูลบน Cloud &amp; ออกรายงานอัตโนมัติ:</a:t>
-            </a:r>
-          </a:p>
-          <a:p>
-            <a:pPr>
-              <a:spcAft>
-                <a:spcPts val="800"/>
-              </a:spcAft>
-              <a:defRPr sz="1100">
-                <a:solidFill>
-                  <a:srgbClr val="64748B"/>
-                </a:solidFill>
-              </a:defRPr>
-            </a:pPr>
-            <a:r>
-              <a:t>  จัดเก็บข้อมูลย้อนหลังไม่จำกัด พร้อมส่งออกรายงานรับรองตามมาตรฐานกรมอนามัย/โรงงาน</a:t>
-            </a:r>
-          </a:p>
-        </p:txBody>
-      </p:sp>
-    </p:spTree>
-  </p:cSld>
-  <p:clrMapOvr>
-    <a:masterClrMapping/>
-  </p:clrMapOvr>
-</p:sld>
-</file>
-
-<file path=ppt/slides/slide3.xml><?xml version="1.0" encoding="utf-8"?>
-<p:sld xmlns:a="http://schemas.openxmlformats.org/drawingml/2006/main" xmlns:p="http://schemas.openxmlformats.org/presentationml/2006/main" xmlns:r="http://schemas.openxmlformats.org/officeDocument/2006/relationships">
-  <p:cSld>
-    <p:bg>
-      <p:bgPr>
-        <a:solidFill>
-          <a:srgbClr val="F1F6FB"/>
-        </a:solidFill>
-        <a:effectLst/>
-      </p:bgPr>
-    </p:bg>
-    <p:spTree>
-      <p:nvGrpSpPr>
-        <p:cNvPr id="1" name=""/>
-        <p:cNvGrpSpPr/>
-        <p:nvPr/>
-      </p:nvGrpSpPr>
-      <p:grpSpPr/>
-      <p:sp>
-        <p:nvSpPr>
-          <p:cNvPr id="2" name="TextBox 1"/>
-          <p:cNvSpPr txBox="1"/>
-          <p:nvPr/>
-        </p:nvSpPr>
-        <p:spPr>
-          <a:xfrm>
-            <a:off x="731520" y="365760"/>
-            <a:ext cx="10728655" cy="1005840"/>
-          </a:xfrm>
-          <a:prstGeom prst="rect">
-            <a:avLst/>
-          </a:prstGeom>
-          <a:noFill/>
-        </p:spPr>
-        <p:txBody>
-          <a:bodyPr wrap="square" lIns="0" tIns="0" rIns="0" bIns="0">
-            <a:spAutoFit/>
-          </a:bodyPr>
-          <a:lstStyle/>
-          <a:p>
-            <a:pPr>
-              <a:spcAft>
-                <a:spcPts val="200"/>
-              </a:spcAft>
-              <a:defRPr sz="1100" b="1">
-                <a:solidFill>
-                  <a:srgbClr val="0284C7"/>
-                </a:solidFill>
-              </a:defRPr>
-            </a:pPr>
-            <a:r>
-              <a:t>NCT WATER NEXUS PRO | SMART WATER MONITORING</a:t>
-            </a:r>
-          </a:p>
-          <a:p>
-            <a:pPr>
-              <a:defRPr sz="2400" b="1">
-                <a:solidFill>
-                  <a:srgbClr val="0F172A"/>
-                </a:solidFill>
-              </a:defRPr>
-            </a:pPr>
-            <a:r>
-              <a:t>สเปกเซนเซอร์ตรวจวัดคุณภาพน้ำ (High-Precision Sensor Probes)</a:t>
-            </a:r>
-          </a:p>
-        </p:txBody>
-      </p:sp>
-      <p:sp>
-        <p:nvSpPr>
-          <p:cNvPr id="3" name="Rounded Rectangle 2"/>
-          <p:cNvSpPr/>
-          <p:nvPr/>
-        </p:nvSpPr>
-        <p:spPr>
-          <a:xfrm>
-            <a:off x="731520" y="1463040"/>
-            <a:ext cx="2468880" cy="2926080"/>
-          </a:xfrm>
-          <a:prstGeom prst="roundRect">
-            <a:avLst/>
-          </a:prstGeom>
-          <a:solidFill>
-            <a:srgbClr val="FFFFFF"/>
-          </a:solidFill>
-          <a:ln w="19050">
-            <a:solidFill>
-              <a:srgbClr val="D97706"/>
-            </a:solidFill>
-          </a:ln>
-        </p:spPr>
-        <p:style>
-          <a:lnRef idx="1">
-            <a:schemeClr val="accent1"/>
-          </a:lnRef>
-          <a:fillRef idx="3">
-            <a:schemeClr val="accent1"/>
-          </a:fillRef>
-          <a:effectRef idx="2">
-            <a:schemeClr val="accent1"/>
-          </a:effectRef>
-          <a:fontRef idx="minor">
-            <a:schemeClr val="lt1"/>
-          </a:fontRef>
-        </p:style>
-        <p:txBody>
-          <a:bodyPr rtlCol="0" anchor="ctr"/>
-          <a:lstStyle/>
-          <a:p>
-            <a:pPr algn="ctr"/>
-          </a:p>
-        </p:txBody>
-      </p:sp>
-      <p:sp>
-        <p:nvSpPr>
-          <p:cNvPr id="4" name="TextBox 3"/>
-          <p:cNvSpPr txBox="1"/>
-          <p:nvPr/>
-        </p:nvSpPr>
-        <p:spPr>
-          <a:xfrm>
-            <a:off x="868680" y="1600200"/>
-            <a:ext cx="2194560" cy="2651760"/>
-          </a:xfrm>
-          <a:prstGeom prst="rect">
-            <a:avLst/>
-          </a:prstGeom>
-          <a:noFill/>
-        </p:spPr>
-        <p:txBody>
-          <a:bodyPr wrap="square">
-            <a:spAutoFit/>
-          </a:bodyPr>
-          <a:lstStyle/>
-          <a:p>
-            <a:pPr>
-              <a:defRPr sz="1000" b="1">
-                <a:solidFill>
-                  <a:srgbClr val="D97706"/>
-                </a:solidFill>
-              </a:defRPr>
-            </a:pPr>
-            <a:r>
-              <a:t>SENSOR 01</a:t>
-            </a:r>
-          </a:p>
-          <a:p>
-            <a:pPr>
-              <a:spcAft>
-                <a:spcPts val="400"/>
-              </a:spcAft>
-              <a:defRPr sz="1300" b="1">
-                <a:solidFill>
-                  <a:srgbClr val="0F172A"/>
-                </a:solidFill>
-              </a:defRPr>
-            </a:pPr>
-            <a:r>
-              <a:t>อุณหภูมิน้ำ (Water Temp)</a:t>
-            </a:r>
-          </a:p>
-          <a:p>
-            <a:pPr>
-              <a:spcAft>
-                <a:spcPts val="600"/>
-              </a:spcAft>
-              <a:defRPr sz="1050" b="1">
-                <a:solidFill>
-                  <a:srgbClr val="D97706"/>
-                </a:solidFill>
-              </a:defRPr>
-            </a:pPr>
-            <a:r>
-              <a:t>หัววัด: PT1000 Platinum RTD</a:t>
-            </a:r>
-          </a:p>
-          <a:p>
-            <a:pPr>
-              <a:defRPr sz="950">
-                <a:solidFill>
-                  <a:srgbClr val="64748B"/>
-                </a:solidFill>
-              </a:defRPr>
-            </a:pPr>
-            <a:r>
-              <a:t>ช่วงวัด: 0.0 - 50.0°C</a:t>
-            </a:r>
-            <a:br/>
-            <a:r>
-              <a:t>ความละเอียด: ±0.1°C</a:t>
-            </a:r>
-            <a:br/>
-            <a:r>
-              <a:t>ฟังก์ชัน: ระบบชดเชยอุณหภูมิอัตโนมัติ (ATC Compensation) เพื่อความเที่ยงตรงสูงสุดของค่า pH &amp; TDS</a:t>
-            </a:r>
-          </a:p>
-        </p:txBody>
-      </p:sp>
-      <p:sp>
-        <p:nvSpPr>
-          <p:cNvPr id="5" name="Rounded Rectangle 4"/>
-          <p:cNvSpPr/>
-          <p:nvPr/>
-        </p:nvSpPr>
-        <p:spPr>
-          <a:xfrm>
-            <a:off x="3474720" y="1463040"/>
-            <a:ext cx="2468880" cy="2926080"/>
-          </a:xfrm>
-          <a:prstGeom prst="roundRect">
-            <a:avLst/>
-          </a:prstGeom>
-          <a:solidFill>
-            <a:srgbClr val="FFFFFF"/>
-          </a:solidFill>
-          <a:ln w="19050">
-            <a:solidFill>
-              <a:srgbClr val="0284C7"/>
-            </a:solidFill>
-          </a:ln>
-        </p:spPr>
-        <p:style>
-          <a:lnRef idx="1">
-            <a:schemeClr val="accent1"/>
-          </a:lnRef>
-          <a:fillRef idx="3">
-            <a:schemeClr val="accent1"/>
-          </a:fillRef>
-          <a:effectRef idx="2">
-            <a:schemeClr val="accent1"/>
-          </a:effectRef>
-          <a:fontRef idx="minor">
-            <a:schemeClr val="lt1"/>
-          </a:fontRef>
-        </p:style>
-        <p:txBody>
-          <a:bodyPr rtlCol="0" anchor="ctr"/>
-          <a:lstStyle/>
-          <a:p>
-            <a:pPr algn="ctr"/>
-          </a:p>
-        </p:txBody>
-      </p:sp>
-      <p:sp>
-        <p:nvSpPr>
-          <p:cNvPr id="6" name="TextBox 5"/>
-          <p:cNvSpPr txBox="1"/>
-          <p:nvPr/>
-        </p:nvSpPr>
-        <p:spPr>
-          <a:xfrm>
-            <a:off x="3611880" y="1600200"/>
-            <a:ext cx="2194560" cy="2651760"/>
-          </a:xfrm>
-          <a:prstGeom prst="rect">
-            <a:avLst/>
-          </a:prstGeom>
-          <a:noFill/>
-        </p:spPr>
-        <p:txBody>
-          <a:bodyPr wrap="square">
-            <a:spAutoFit/>
-          </a:bodyPr>
-          <a:lstStyle/>
-          <a:p>
-            <a:pPr>
-              <a:defRPr sz="1000" b="1">
-                <a:solidFill>
-                  <a:srgbClr val="0284C7"/>
-                </a:solidFill>
-              </a:defRPr>
-            </a:pPr>
-            <a:r>
-              <a:t>SENSOR 02</a:t>
-            </a:r>
-          </a:p>
-          <a:p>
-            <a:pPr>
-              <a:spcAft>
-                <a:spcPts val="400"/>
-              </a:spcAft>
-              <a:defRPr sz="1300" b="1">
-                <a:solidFill>
-                  <a:srgbClr val="0F172A"/>
-                </a:solidFill>
-              </a:defRPr>
-            </a:pPr>
-            <a:r>
-              <a:t>ความเป็นกรด-ด่าง (pH)</a:t>
-            </a:r>
-          </a:p>
-          <a:p>
-            <a:pPr>
-              <a:spcAft>
-                <a:spcPts val="600"/>
-              </a:spcAft>
-              <a:defRPr sz="1050" b="1">
-                <a:solidFill>
-                  <a:srgbClr val="0284C7"/>
-                </a:solidFill>
-              </a:defRPr>
-            </a:pPr>
-            <a:r>
-              <a:t>หัววัด: Industrial Glass Electrode</a:t>
-            </a:r>
-          </a:p>
-          <a:p>
-            <a:pPr>
-              <a:defRPr sz="950">
-                <a:solidFill>
-                  <a:srgbClr val="64748B"/>
-                </a:solidFill>
-              </a:defRPr>
-            </a:pPr>
-            <a:r>
-              <a:t>ช่วงวัด: 0.00 - 14.00 pH</a:t>
-            </a:r>
-            <a:br/>
-            <a:r>
-              <a:t>ความแม่นยำ: ±0.01 pH</a:t>
-            </a:r>
-            <a:br/>
-            <a:r>
-              <a:t>เกณฑ์มาตรฐาน: 6.50 - 8.50 pH</a:t>
-            </a:r>
-            <a:br/>
-            <a:r>
-              <a:t>รองรับการสอบเทียบดิจิทัล (Buffer 4.01, 7.00, 10.01)</a:t>
-            </a:r>
-          </a:p>
-        </p:txBody>
-      </p:sp>
-      <p:sp>
-        <p:nvSpPr>
-          <p:cNvPr id="7" name="Rounded Rectangle 6"/>
-          <p:cNvSpPr/>
-          <p:nvPr/>
-        </p:nvSpPr>
-        <p:spPr>
-          <a:xfrm>
-            <a:off x="6217920" y="1463040"/>
-            <a:ext cx="2468880" cy="2926080"/>
-          </a:xfrm>
-          <a:prstGeom prst="roundRect">
-            <a:avLst/>
-          </a:prstGeom>
-          <a:solidFill>
-            <a:srgbClr val="FFFFFF"/>
-          </a:solidFill>
-          <a:ln w="19050">
-            <a:solidFill>
-              <a:srgbClr val="059669"/>
-            </a:solidFill>
-          </a:ln>
-        </p:spPr>
-        <p:style>
-          <a:lnRef idx="1">
-            <a:schemeClr val="accent1"/>
-          </a:lnRef>
-          <a:fillRef idx="3">
-            <a:schemeClr val="accent1"/>
-          </a:fillRef>
-          <a:effectRef idx="2">
-            <a:schemeClr val="accent1"/>
-          </a:effectRef>
-          <a:fontRef idx="minor">
-            <a:schemeClr val="lt1"/>
-          </a:fontRef>
-        </p:style>
-        <p:txBody>
-          <a:bodyPr rtlCol="0" anchor="ctr"/>
-          <a:lstStyle/>
-          <a:p>
-            <a:pPr algn="ctr"/>
-          </a:p>
-        </p:txBody>
-      </p:sp>
-      <p:sp>
-        <p:nvSpPr>
-          <p:cNvPr id="8" name="TextBox 7"/>
-          <p:cNvSpPr txBox="1"/>
-          <p:nvPr/>
-        </p:nvSpPr>
-        <p:spPr>
-          <a:xfrm>
-            <a:off x="6355080" y="1600200"/>
-            <a:ext cx="2194560" cy="2651760"/>
-          </a:xfrm>
-          <a:prstGeom prst="rect">
-            <a:avLst/>
-          </a:prstGeom>
-          <a:noFill/>
-        </p:spPr>
-        <p:txBody>
-          <a:bodyPr wrap="square">
-            <a:spAutoFit/>
-          </a:bodyPr>
-          <a:lstStyle/>
-          <a:p>
-            <a:pPr>
-              <a:defRPr sz="1000" b="1">
-                <a:solidFill>
-                  <a:srgbClr val="059669"/>
-                </a:solidFill>
-              </a:defRPr>
-            </a:pPr>
-            <a:r>
-              <a:t>SENSOR 03</a:t>
-            </a:r>
-          </a:p>
-          <a:p>
-            <a:pPr>
-              <a:spcAft>
-                <a:spcPts val="400"/>
-              </a:spcAft>
-              <a:defRPr sz="1300" b="1">
-                <a:solidFill>
-                  <a:srgbClr val="0F172A"/>
-                </a:solidFill>
-              </a:defRPr>
-            </a:pPr>
-            <a:r>
-              <a:t>สารละลายรวม (TDS / EC)</a:t>
-            </a:r>
-          </a:p>
-          <a:p>
-            <a:pPr>
-              <a:spcAft>
-                <a:spcPts val="600"/>
-              </a:spcAft>
-              <a:defRPr sz="1050" b="1">
-                <a:solidFill>
-                  <a:srgbClr val="059669"/>
-                </a:solidFill>
-              </a:defRPr>
-            </a:pPr>
-            <a:r>
-              <a:t>หัววัด: Titanium Alloy 2-Pole</a:t>
-            </a:r>
-          </a:p>
-          <a:p>
-            <a:pPr>
-              <a:defRPr sz="950">
-                <a:solidFill>
-                  <a:srgbClr val="64748B"/>
-                </a:solidFill>
-              </a:defRPr>
-            </a:pPr>
-            <a:r>
-              <a:t>ช่วงวัด: 0 - 2,000 ppm (mg/L)</a:t>
-            </a:r>
-            <a:br/>
-            <a:r>
-              <a:t>ความแม่นยำ: ±2% F.S.</a:t>
-            </a:r>
-            <a:br/>
-            <a:r>
-              <a:t>เกณฑ์มาตรฐาน: &lt; 500 ppm</a:t>
-            </a:r>
-            <a:br/>
-            <a:r>
-              <a:t>ตรวจจับปริมาณสารแขวนลอยและแร่ธาตุในน้ำ</a:t>
-            </a:r>
-          </a:p>
-        </p:txBody>
-      </p:sp>
-      <p:sp>
-        <p:nvSpPr>
-          <p:cNvPr id="9" name="Rounded Rectangle 8"/>
-          <p:cNvSpPr/>
-          <p:nvPr/>
-        </p:nvSpPr>
-        <p:spPr>
-          <a:xfrm>
-            <a:off x="8961120" y="1463040"/>
-            <a:ext cx="2468880" cy="2926080"/>
-          </a:xfrm>
-          <a:prstGeom prst="roundRect">
-            <a:avLst/>
-          </a:prstGeom>
-          <a:solidFill>
-            <a:srgbClr val="FFFFFF"/>
-          </a:solidFill>
-          <a:ln w="19050">
-            <a:solidFill>
-              <a:srgbClr val="0284C7"/>
-            </a:solidFill>
-          </a:ln>
-        </p:spPr>
-        <p:style>
-          <a:lnRef idx="1">
-            <a:schemeClr val="accent1"/>
-          </a:lnRef>
-          <a:fillRef idx="3">
-            <a:schemeClr val="accent1"/>
-          </a:fillRef>
-          <a:effectRef idx="2">
-            <a:schemeClr val="accent1"/>
-          </a:effectRef>
-          <a:fontRef idx="minor">
-            <a:schemeClr val="lt1"/>
-          </a:fontRef>
-        </p:style>
-        <p:txBody>
-          <a:bodyPr rtlCol="0" anchor="ctr"/>
-          <a:lstStyle/>
-          <a:p>
-            <a:pPr algn="ctr"/>
-          </a:p>
-        </p:txBody>
-      </p:sp>
-      <p:sp>
-        <p:nvSpPr>
-          <p:cNvPr id="10" name="TextBox 9"/>
-          <p:cNvSpPr txBox="1"/>
-          <p:nvPr/>
-        </p:nvSpPr>
-        <p:spPr>
-          <a:xfrm>
-            <a:off x="9098280" y="1600200"/>
-            <a:ext cx="2194560" cy="2651760"/>
-          </a:xfrm>
-          <a:prstGeom prst="rect">
-            <a:avLst/>
-          </a:prstGeom>
-          <a:noFill/>
-        </p:spPr>
-        <p:txBody>
-          <a:bodyPr wrap="square">
-            <a:spAutoFit/>
-          </a:bodyPr>
-          <a:lstStyle/>
-          <a:p>
-            <a:pPr>
-              <a:defRPr sz="1000" b="1">
-                <a:solidFill>
-                  <a:srgbClr val="0284C7"/>
-                </a:solidFill>
-              </a:defRPr>
-            </a:pPr>
-            <a:r>
-              <a:t>SENSOR 04</a:t>
-            </a:r>
-          </a:p>
-          <a:p>
-            <a:pPr>
-              <a:spcAft>
-                <a:spcPts val="400"/>
-              </a:spcAft>
-              <a:defRPr sz="1300" b="1">
-                <a:solidFill>
-                  <a:srgbClr val="0F172A"/>
-                </a:solidFill>
-              </a:defRPr>
-            </a:pPr>
-            <a:r>
-              <a:t>คลอรีนคงเหลือ (Residual Cl)</a:t>
-            </a:r>
-          </a:p>
-          <a:p>
-            <a:pPr>
-              <a:spcAft>
-                <a:spcPts val="600"/>
-              </a:spcAft>
-              <a:defRPr sz="1050" b="1">
-                <a:solidFill>
-                  <a:srgbClr val="0284C7"/>
-                </a:solidFill>
-              </a:defRPr>
-            </a:pPr>
-            <a:r>
-              <a:t>หัววัด: Amperometric Probe</a:t>
-            </a:r>
-          </a:p>
-          <a:p>
-            <a:pPr>
-              <a:defRPr sz="950">
-                <a:solidFill>
-                  <a:srgbClr val="64748B"/>
-                </a:solidFill>
-              </a:defRPr>
-            </a:pPr>
-            <a:r>
-              <a:t>ช่วงวัด: 0.00 - 5.00 mg/L (ppm)</a:t>
-            </a:r>
-            <a:br/>
-            <a:r>
-              <a:t>ความแม่นยำ: ±0.05 mg/L</a:t>
-            </a:r>
-            <a:br/>
-            <a:r>
-              <a:t>เกณฑ์มาตรฐาน: 0.20 - 2.00 mg/L</a:t>
-            </a:r>
-            <a:br/>
-            <a:r>
-              <a:t>ตรวจเช็คประสิทธิภาพการฆ่าเชื้อโรค 100%</a:t>
-            </a:r>
-          </a:p>
-        </p:txBody>
-      </p:sp>
-      <p:sp>
-        <p:nvSpPr>
-          <p:cNvPr id="11" name="Rounded Rectangle 10"/>
-          <p:cNvSpPr/>
-          <p:nvPr/>
-        </p:nvSpPr>
-        <p:spPr>
-          <a:xfrm>
-            <a:off x="731520" y="4663440"/>
-            <a:ext cx="10728655" cy="1645920"/>
-          </a:xfrm>
-          <a:prstGeom prst="roundRect">
-            <a:avLst/>
-          </a:prstGeom>
-          <a:solidFill>
-            <a:srgbClr val="0F172A"/>
-          </a:solidFill>
-          <a:ln w="19050">
-            <a:solidFill>
-              <a:srgbClr val="0284C7"/>
-            </a:solidFill>
-          </a:ln>
-        </p:spPr>
-        <p:style>
-          <a:lnRef idx="1">
-            <a:schemeClr val="accent1"/>
-          </a:lnRef>
-          <a:fillRef idx="3">
-            <a:schemeClr val="accent1"/>
-          </a:fillRef>
-          <a:effectRef idx="2">
-            <a:schemeClr val="accent1"/>
-          </a:effectRef>
-          <a:fontRef idx="minor">
-            <a:schemeClr val="lt1"/>
-          </a:fontRef>
-        </p:style>
-        <p:txBody>
-          <a:bodyPr rtlCol="0" anchor="ctr"/>
-          <a:lstStyle/>
-          <a:p>
-            <a:pPr algn="ctr"/>
-          </a:p>
-        </p:txBody>
-      </p:sp>
-      <p:sp>
-        <p:nvSpPr>
-          <p:cNvPr id="12" name="TextBox 11"/>
-          <p:cNvSpPr txBox="1"/>
-          <p:nvPr/>
-        </p:nvSpPr>
-        <p:spPr>
-          <a:xfrm>
-            <a:off x="1005840" y="4800600"/>
-            <a:ext cx="10149840" cy="1371600"/>
-          </a:xfrm>
-          <a:prstGeom prst="rect">
-            <a:avLst/>
-          </a:prstGeom>
-          <a:noFill/>
-        </p:spPr>
-        <p:txBody>
-          <a:bodyPr wrap="square">
-            <a:spAutoFit/>
-          </a:bodyPr>
-          <a:lstStyle/>
-          <a:p>
-            <a:pPr>
-              <a:spcAft>
-                <a:spcPts val="400"/>
-              </a:spcAft>
-              <a:defRPr sz="1300" b="1">
-                <a:solidFill>
-                  <a:srgbClr val="2DD4BF"/>
-                </a:solidFill>
-              </a:defRPr>
-            </a:pPr>
-            <a:r>
-              <a:t>🎛️ SMART INDUSTRIAL CONTROLLER NODE &amp; TELEMETRY</a:t>
-            </a:r>
-          </a:p>
-          <a:p>
-            <a:pPr>
-              <a:defRPr sz="1050">
-                <a:solidFill>
-                  <a:srgbClr val="E2E8F0"/>
-                </a:solidFill>
-              </a:defRPr>
-            </a:pPr>
-            <a:r>
-              <a:t>• Telemetry Multi-Link: รองรับการส่งสัญญาณผ่าน WiFi 2.4GHz, 4G LTE Cellular และ Modbus RS-485 สู่ระบบ Cloud SCADA</a:t>
-            </a:r>
-            <a:br/>
-            <a:r>
-              <a:t>• ระบบสำรองไฟอัจฉริยะ (LiFePO4 Battery Backup): ใช้งานต่อเนื่องแม้ยามไฟดับ พร้อมระบบตรวจสอบระดับแบตเตอรี่ Real-time</a:t>
-            </a:r>
-            <a:br/>
-            <a:r>
-              <a:t>• Alarm Output Relay: พอร์ต Dry Contact สำหรับต่อไซเรนเตือนภัยภายนอก หรือส่งสัญญาณต่อไปยังระบบ PLC / SCADA เดิมของโรงงาน</a:t>
-            </a:r>
-          </a:p>
-        </p:txBody>
-      </p:sp>
-    </p:spTree>
-  </p:cSld>
-  <p:clrMapOvr>
-    <a:masterClrMapping/>
-  </p:clrMapOvr>
-</p:sld>
-</file>
-
-<file path=ppt/slides/slide4.xml><?xml version="1.0" encoding="utf-8"?>
-<p:sld xmlns:a="http://schemas.openxmlformats.org/drawingml/2006/main" xmlns:p="http://schemas.openxmlformats.org/presentationml/2006/main" xmlns:r="http://schemas.openxmlformats.org/officeDocument/2006/relationships">
-  <p:cSld>
-    <p:bg>
-      <p:bgPr>
-        <a:solidFill>
-          <a:srgbClr val="F1F6FB"/>
-        </a:solidFill>
-        <a:effectLst/>
-      </p:bgPr>
-    </p:bg>
-    <p:spTree>
-      <p:nvGrpSpPr>
-        <p:cNvPr id="1" name=""/>
-        <p:cNvGrpSpPr/>
-        <p:nvPr/>
-      </p:nvGrpSpPr>
-      <p:grpSpPr/>
-      <p:sp>
-        <p:nvSpPr>
-          <p:cNvPr id="2" name="TextBox 1"/>
-          <p:cNvSpPr txBox="1"/>
-          <p:nvPr/>
-        </p:nvSpPr>
-        <p:spPr>
-          <a:xfrm>
-            <a:off x="731520" y="365760"/>
-            <a:ext cx="10728655" cy="1005840"/>
-          </a:xfrm>
-          <a:prstGeom prst="rect">
-            <a:avLst/>
-          </a:prstGeom>
-          <a:noFill/>
-        </p:spPr>
-        <p:txBody>
-          <a:bodyPr wrap="square" lIns="0" tIns="0" rIns="0" bIns="0">
-            <a:spAutoFit/>
-          </a:bodyPr>
-          <a:lstStyle/>
-          <a:p>
-            <a:pPr>
-              <a:spcAft>
-                <a:spcPts val="200"/>
-              </a:spcAft>
-              <a:defRPr sz="1100" b="1">
-                <a:solidFill>
-                  <a:srgbClr val="0284C7"/>
-                </a:solidFill>
-              </a:defRPr>
-            </a:pPr>
-            <a:r>
-              <a:t>NCT WATER NEXUS PRO | SMART WATER MONITORING</a:t>
-            </a:r>
-          </a:p>
-          <a:p>
-            <a:pPr>
-              <a:defRPr sz="2400" b="1">
-                <a:solidFill>
-                  <a:srgbClr val="0F172A"/>
-                </a:solidFill>
-              </a:defRPr>
-            </a:pPr>
-            <a:r>
-              <a:t>ระบบแดชบอร์ด SCADA และ Mobile Companion App (Software Platform)</a:t>
-            </a:r>
-          </a:p>
-        </p:txBody>
-      </p:sp>
-      <p:sp>
-        <p:nvSpPr>
-          <p:cNvPr id="3" name="Rounded Rectangle 2"/>
-          <p:cNvSpPr/>
-          <p:nvPr/>
-        </p:nvSpPr>
-        <p:spPr>
-          <a:xfrm>
-            <a:off x="731520" y="1463040"/>
-            <a:ext cx="5120640" cy="4754880"/>
-          </a:xfrm>
-          <a:prstGeom prst="roundRect">
-            <a:avLst/>
-          </a:prstGeom>
-          <a:solidFill>
-            <a:srgbClr val="FFFFFF"/>
-          </a:solidFill>
-          <a:ln w="19050">
-            <a:solidFill>
-              <a:srgbClr val="CBD5E1"/>
-            </a:solidFill>
-          </a:ln>
-        </p:spPr>
-        <p:style>
-          <a:lnRef idx="1">
-            <a:schemeClr val="accent1"/>
-          </a:lnRef>
-          <a:fillRef idx="3">
-            <a:schemeClr val="accent1"/>
-          </a:fillRef>
-          <a:effectRef idx="2">
-            <a:schemeClr val="accent1"/>
-          </a:effectRef>
-          <a:fontRef idx="minor">
-            <a:schemeClr val="lt1"/>
-          </a:fontRef>
-        </p:style>
-        <p:txBody>
-          <a:bodyPr rtlCol="0" anchor="ctr"/>
-          <a:lstStyle/>
-          <a:p>
-            <a:pPr algn="ctr"/>
-          </a:p>
-        </p:txBody>
-      </p:sp>
-      <p:sp>
-        <p:nvSpPr>
-          <p:cNvPr id="4" name="TextBox 3"/>
-          <p:cNvSpPr txBox="1"/>
-          <p:nvPr/>
-        </p:nvSpPr>
-        <p:spPr>
-          <a:xfrm>
             <a:off x="1005840" y="1691640"/>
             <a:ext cx="4572000" cy="4297680"/>
           </a:xfrm>
@@ -5070,7 +5853,7 @@
 </p:sld>
 </file>
 
-<file path=ppt/slides/slide5.xml><?xml version="1.0" encoding="utf-8"?>
+<file path=ppt/slides/slide6.xml><?xml version="1.0" encoding="utf-8"?>
 <p:sld xmlns:a="http://schemas.openxmlformats.org/drawingml/2006/main" xmlns:p="http://schemas.openxmlformats.org/presentationml/2006/main" xmlns:r="http://schemas.openxmlformats.org/officeDocument/2006/relationships">
   <p:cSld>
     <p:bg>
@@ -5121,12 +5904,12 @@
               </a:defRPr>
             </a:pPr>
             <a:r>
-              <a:t>NCT WATER NEXUS PRO | SMART WATER MONITORING</a:t>
-            </a:r>
-          </a:p>
-          <a:p>
-            <a:pPr>
-              <a:defRPr sz="2400" b="1">
+              <a:t>NCT WATER NEXUS PRO | COMMERCIAL PROPOSAL</a:t>
+            </a:r>
+          </a:p>
+          <a:p>
+            <a:pPr>
+              <a:defRPr sz="2300" b="1">
                 <a:solidFill>
                   <a:srgbClr val="0F172A"/>
                 </a:solidFill>
@@ -5969,982 +6752,6 @@
 </p:sld>
 </file>
 
-<file path=ppt/slides/slide6.xml><?xml version="1.0" encoding="utf-8"?>
-<p:sld xmlns:a="http://schemas.openxmlformats.org/drawingml/2006/main" xmlns:p="http://schemas.openxmlformats.org/presentationml/2006/main" xmlns:r="http://schemas.openxmlformats.org/officeDocument/2006/relationships">
-  <p:cSld>
-    <p:bg>
-      <p:bgPr>
-        <a:solidFill>
-          <a:srgbClr val="F1F6FB"/>
-        </a:solidFill>
-        <a:effectLst/>
-      </p:bgPr>
-    </p:bg>
-    <p:spTree>
-      <p:nvGrpSpPr>
-        <p:cNvPr id="1" name=""/>
-        <p:cNvGrpSpPr/>
-        <p:nvPr/>
-      </p:nvGrpSpPr>
-      <p:grpSpPr/>
-      <p:sp>
-        <p:nvSpPr>
-          <p:cNvPr id="2" name="TextBox 1"/>
-          <p:cNvSpPr txBox="1"/>
-          <p:nvPr/>
-        </p:nvSpPr>
-        <p:spPr>
-          <a:xfrm>
-            <a:off x="731520" y="365760"/>
-            <a:ext cx="10728655" cy="1005840"/>
-          </a:xfrm>
-          <a:prstGeom prst="rect">
-            <a:avLst/>
-          </a:prstGeom>
-          <a:noFill/>
-        </p:spPr>
-        <p:txBody>
-          <a:bodyPr wrap="square" lIns="0" tIns="0" rIns="0" bIns="0">
-            <a:spAutoFit/>
-          </a:bodyPr>
-          <a:lstStyle/>
-          <a:p>
-            <a:pPr>
-              <a:spcAft>
-                <a:spcPts val="200"/>
-              </a:spcAft>
-              <a:defRPr sz="1100" b="1">
-                <a:solidFill>
-                  <a:srgbClr val="0284C7"/>
-                </a:solidFill>
-              </a:defRPr>
-            </a:pPr>
-            <a:r>
-              <a:t>NCT WATER NEXUS PRO | SMART WATER MONITORING</a:t>
-            </a:r>
-          </a:p>
-          <a:p>
-            <a:pPr>
-              <a:defRPr sz="2400" b="1">
-                <a:solidFill>
-                  <a:srgbClr val="0F172A"/>
-                </a:solidFill>
-              </a:defRPr>
-            </a:pPr>
-            <a:r>
-              <a:t>แพ็กเกจราคาขายระบบตรวจวัดและแดชบอร์ด (Commercial Pricing Packages)</a:t>
-            </a:r>
-          </a:p>
-        </p:txBody>
-      </p:sp>
-      <p:sp>
-        <p:nvSpPr>
-          <p:cNvPr id="3" name="Rounded Rectangle 2"/>
-          <p:cNvSpPr/>
-          <p:nvPr/>
-        </p:nvSpPr>
-        <p:spPr>
-          <a:xfrm>
-            <a:off x="731520" y="1463040"/>
-            <a:ext cx="3383280" cy="4754880"/>
-          </a:xfrm>
-          <a:prstGeom prst="roundRect">
-            <a:avLst/>
-          </a:prstGeom>
-          <a:solidFill>
-            <a:srgbClr val="FFFFFF"/>
-          </a:solidFill>
-          <a:ln w="19050">
-            <a:solidFill>
-              <a:srgbClr val="CBD5E1"/>
-            </a:solidFill>
-          </a:ln>
-        </p:spPr>
-        <p:style>
-          <a:lnRef idx="1">
-            <a:schemeClr val="accent1"/>
-          </a:lnRef>
-          <a:fillRef idx="3">
-            <a:schemeClr val="accent1"/>
-          </a:fillRef>
-          <a:effectRef idx="2">
-            <a:schemeClr val="accent1"/>
-          </a:effectRef>
-          <a:fontRef idx="minor">
-            <a:schemeClr val="lt1"/>
-          </a:fontRef>
-        </p:style>
-        <p:txBody>
-          <a:bodyPr rtlCol="0" anchor="ctr"/>
-          <a:lstStyle/>
-          <a:p>
-            <a:pPr algn="ctr"/>
-          </a:p>
-        </p:txBody>
-      </p:sp>
-      <p:sp>
-        <p:nvSpPr>
-          <p:cNvPr id="4" name="Rounded Rectangle 3"/>
-          <p:cNvSpPr/>
-          <p:nvPr/>
-        </p:nvSpPr>
-        <p:spPr>
-          <a:xfrm>
-            <a:off x="731520" y="1463040"/>
-            <a:ext cx="3383280" cy="1188720"/>
-          </a:xfrm>
-          <a:prstGeom prst="roundRect">
-            <a:avLst/>
-          </a:prstGeom>
-          <a:solidFill>
-            <a:srgbClr val="1E293B"/>
-          </a:solidFill>
-          <a:ln>
-            <a:noFill/>
-          </a:ln>
-        </p:spPr>
-        <p:style>
-          <a:lnRef idx="1">
-            <a:schemeClr val="accent1"/>
-          </a:lnRef>
-          <a:fillRef idx="3">
-            <a:schemeClr val="accent1"/>
-          </a:fillRef>
-          <a:effectRef idx="2">
-            <a:schemeClr val="accent1"/>
-          </a:effectRef>
-          <a:fontRef idx="minor">
-            <a:schemeClr val="lt1"/>
-          </a:fontRef>
-        </p:style>
-        <p:txBody>
-          <a:bodyPr rtlCol="0" anchor="ctr"/>
-          <a:lstStyle/>
-          <a:p>
-            <a:pPr algn="ctr"/>
-          </a:p>
-        </p:txBody>
-      </p:sp>
-      <p:sp>
-        <p:nvSpPr>
-          <p:cNvPr id="5" name="TextBox 4"/>
-          <p:cNvSpPr txBox="1"/>
-          <p:nvPr/>
-        </p:nvSpPr>
-        <p:spPr>
-          <a:xfrm>
-            <a:off x="914400" y="1554480"/>
-            <a:ext cx="3017520" cy="1005840"/>
-          </a:xfrm>
-          <a:prstGeom prst="rect">
-            <a:avLst/>
-          </a:prstGeom>
-          <a:noFill/>
-        </p:spPr>
-        <p:txBody>
-          <a:bodyPr wrap="square">
-            <a:spAutoFit/>
-          </a:bodyPr>
-          <a:lstStyle/>
-          <a:p>
-            <a:pPr>
-              <a:defRPr sz="950" b="1">
-                <a:solidFill>
-                  <a:srgbClr val="2DD4BF"/>
-                </a:solidFill>
-              </a:defRPr>
-            </a:pPr>
-            <a:r>
-              <a:t>Basic Monitoring</a:t>
-            </a:r>
-          </a:p>
-          <a:p>
-            <a:pPr>
-              <a:defRPr sz="1500" b="1">
-                <a:solidFill>
-                  <a:srgbClr val="FFFFFF"/>
-                </a:solidFill>
-              </a:defRPr>
-            </a:pPr>
-            <a:r>
-              <a:t>STARTER MONITORING</a:t>
-            </a:r>
-          </a:p>
-          <a:p>
-            <a:pPr>
-              <a:defRPr sz="2200" b="1">
-                <a:solidFill>
-                  <a:srgbClr val="FFFFFF"/>
-                </a:solidFill>
-              </a:defRPr>
-            </a:pPr>
-            <a:r>
-              <a:t>฿24,500</a:t>
-            </a:r>
-          </a:p>
-        </p:txBody>
-      </p:sp>
-      <p:sp>
-        <p:nvSpPr>
-          <p:cNvPr id="6" name="TextBox 5"/>
-          <p:cNvSpPr txBox="1"/>
-          <p:nvPr/>
-        </p:nvSpPr>
-        <p:spPr>
-          <a:xfrm>
-            <a:off x="914400" y="2743200"/>
-            <a:ext cx="3017520" cy="3383280"/>
-          </a:xfrm>
-          <a:prstGeom prst="rect">
-            <a:avLst/>
-          </a:prstGeom>
-          <a:noFill/>
-        </p:spPr>
-        <p:txBody>
-          <a:bodyPr wrap="square">
-            <a:spAutoFit/>
-          </a:bodyPr>
-          <a:lstStyle/>
-          <a:p>
-            <a:pPr>
-              <a:spcAft>
-                <a:spcPts val="1000"/>
-              </a:spcAft>
-              <a:defRPr sz="900">
-                <a:solidFill>
-                  <a:srgbClr val="64748B"/>
-                </a:solidFill>
-              </a:defRPr>
-            </a:pPr>
-            <a:r>
-              <a:t>สำหรับระบบน้ำขนาดเล็ก / คาเฟ่ / อาคาร</a:t>
-            </a:r>
-          </a:p>
-          <a:p>
-            <a:pPr>
-              <a:spcAft>
-                <a:spcPts val="400"/>
-              </a:spcAft>
-              <a:defRPr sz="950">
-                <a:solidFill>
-                  <a:srgbClr val="0F172A"/>
-                </a:solidFill>
-              </a:defRPr>
-            </a:pPr>
-            <a:r>
-              <a:t>✓ 1x NCT Controller Node (WiFi Hub)</a:t>
-            </a:r>
-          </a:p>
-          <a:p>
-            <a:pPr>
-              <a:spcAft>
-                <a:spcPts val="400"/>
-              </a:spcAft>
-              <a:defRPr sz="950">
-                <a:solidFill>
-                  <a:srgbClr val="0F172A"/>
-                </a:solidFill>
-              </a:defRPr>
-            </a:pPr>
-            <a:r>
-              <a:t>✓ 1x Glass pH Sensor (±0.01 pH)</a:t>
-            </a:r>
-          </a:p>
-          <a:p>
-            <a:pPr>
-              <a:spcAft>
-                <a:spcPts val="400"/>
-              </a:spcAft>
-              <a:defRPr sz="950">
-                <a:solidFill>
-                  <a:srgbClr val="0F172A"/>
-                </a:solidFill>
-              </a:defRPr>
-            </a:pPr>
-            <a:r>
-              <a:t>✓ 1x PT1000 Temp Sensor (with ATC)</a:t>
-            </a:r>
-          </a:p>
-          <a:p>
-            <a:pPr>
-              <a:spcAft>
-                <a:spcPts val="400"/>
-              </a:spcAft>
-              <a:defRPr sz="950">
-                <a:solidFill>
-                  <a:srgbClr val="0F172A"/>
-                </a:solidFill>
-              </a:defRPr>
-            </a:pPr>
-            <a:r>
-              <a:t>✓ Web Dashboard &amp; Mobile App Access</a:t>
-            </a:r>
-          </a:p>
-          <a:p>
-            <a:pPr>
-              <a:spcAft>
-                <a:spcPts val="400"/>
-              </a:spcAft>
-              <a:defRPr sz="950">
-                <a:solidFill>
-                  <a:srgbClr val="0F172A"/>
-                </a:solidFill>
-              </a:defRPr>
-            </a:pPr>
-            <a:r>
-              <a:t>✓ Cloud Telemetry Server (ฟรี 1 ปี)</a:t>
-            </a:r>
-          </a:p>
-          <a:p>
-            <a:pPr>
-              <a:spcAft>
-                <a:spcPts val="400"/>
-              </a:spcAft>
-              <a:defRPr sz="950">
-                <a:solidFill>
-                  <a:srgbClr val="0F172A"/>
-                </a:solidFill>
-              </a:defRPr>
-            </a:pPr>
-            <a:r>
-              <a:t>✓ คู่มือการติดตั้งและการใช้งาน</a:t>
-            </a:r>
-          </a:p>
-          <a:p>
-            <a:pPr>
-              <a:spcAft>
-                <a:spcPts val="400"/>
-              </a:spcAft>
-              <a:defRPr sz="950">
-                <a:solidFill>
-                  <a:srgbClr val="0F172A"/>
-                </a:solidFill>
-              </a:defRPr>
-            </a:pPr>
-            <a:r>
-              <a:t>✓ รับประกันอุปกรณ์ฮาร์ดแวร์ 1 ปี</a:t>
-            </a:r>
-          </a:p>
-        </p:txBody>
-      </p:sp>
-      <p:sp>
-        <p:nvSpPr>
-          <p:cNvPr id="7" name="Rounded Rectangle 6"/>
-          <p:cNvSpPr/>
-          <p:nvPr/>
-        </p:nvSpPr>
-        <p:spPr>
-          <a:xfrm>
-            <a:off x="4389120" y="1463040"/>
-            <a:ext cx="3383280" cy="4754880"/>
-          </a:xfrm>
-          <a:prstGeom prst="roundRect">
-            <a:avLst/>
-          </a:prstGeom>
-          <a:solidFill>
-            <a:srgbClr val="FFFFFF"/>
-          </a:solidFill>
-          <a:ln w="19050">
-            <a:solidFill>
-              <a:srgbClr val="0284C7"/>
-            </a:solidFill>
-          </a:ln>
-        </p:spPr>
-        <p:style>
-          <a:lnRef idx="1">
-            <a:schemeClr val="accent1"/>
-          </a:lnRef>
-          <a:fillRef idx="3">
-            <a:schemeClr val="accent1"/>
-          </a:fillRef>
-          <a:effectRef idx="2">
-            <a:schemeClr val="accent1"/>
-          </a:effectRef>
-          <a:fontRef idx="minor">
-            <a:schemeClr val="lt1"/>
-          </a:fontRef>
-        </p:style>
-        <p:txBody>
-          <a:bodyPr rtlCol="0" anchor="ctr"/>
-          <a:lstStyle/>
-          <a:p>
-            <a:pPr algn="ctr"/>
-          </a:p>
-        </p:txBody>
-      </p:sp>
-      <p:sp>
-        <p:nvSpPr>
-          <p:cNvPr id="8" name="Rounded Rectangle 7"/>
-          <p:cNvSpPr/>
-          <p:nvPr/>
-        </p:nvSpPr>
-        <p:spPr>
-          <a:xfrm>
-            <a:off x="4389120" y="1463040"/>
-            <a:ext cx="3383280" cy="1188720"/>
-          </a:xfrm>
-          <a:prstGeom prst="roundRect">
-            <a:avLst/>
-          </a:prstGeom>
-          <a:solidFill>
-            <a:srgbClr val="0284C7"/>
-          </a:solidFill>
-          <a:ln>
-            <a:noFill/>
-          </a:ln>
-        </p:spPr>
-        <p:style>
-          <a:lnRef idx="1">
-            <a:schemeClr val="accent1"/>
-          </a:lnRef>
-          <a:fillRef idx="3">
-            <a:schemeClr val="accent1"/>
-          </a:fillRef>
-          <a:effectRef idx="2">
-            <a:schemeClr val="accent1"/>
-          </a:effectRef>
-          <a:fontRef idx="minor">
-            <a:schemeClr val="lt1"/>
-          </a:fontRef>
-        </p:style>
-        <p:txBody>
-          <a:bodyPr rtlCol="0" anchor="ctr"/>
-          <a:lstStyle/>
-          <a:p>
-            <a:pPr algn="ctr"/>
-          </a:p>
-        </p:txBody>
-      </p:sp>
-      <p:sp>
-        <p:nvSpPr>
-          <p:cNvPr id="9" name="TextBox 8"/>
-          <p:cNvSpPr txBox="1"/>
-          <p:nvPr/>
-        </p:nvSpPr>
-        <p:spPr>
-          <a:xfrm>
-            <a:off x="4572000" y="1554480"/>
-            <a:ext cx="3017520" cy="1005840"/>
-          </a:xfrm>
-          <a:prstGeom prst="rect">
-            <a:avLst/>
-          </a:prstGeom>
-          <a:noFill/>
-        </p:spPr>
-        <p:txBody>
-          <a:bodyPr wrap="square">
-            <a:spAutoFit/>
-          </a:bodyPr>
-          <a:lstStyle/>
-          <a:p>
-            <a:pPr>
-              <a:defRPr sz="950" b="1">
-                <a:solidFill>
-                  <a:srgbClr val="FFFFFF"/>
-                </a:solidFill>
-              </a:defRPr>
-            </a:pPr>
-            <a:r>
-              <a:t>★ MOST POPULAR</a:t>
-            </a:r>
-          </a:p>
-          <a:p>
-            <a:pPr>
-              <a:defRPr sz="1500" b="1">
-                <a:solidFill>
-                  <a:srgbClr val="FFFFFF"/>
-                </a:solidFill>
-              </a:defRPr>
-            </a:pPr>
-            <a:r>
-              <a:t>PROFESSIONAL TELEMETRY</a:t>
-            </a:r>
-          </a:p>
-          <a:p>
-            <a:pPr>
-              <a:defRPr sz="2200" b="1">
-                <a:solidFill>
-                  <a:srgbClr val="FFFFFF"/>
-                </a:solidFill>
-              </a:defRPr>
-            </a:pPr>
-            <a:r>
-              <a:t>฿48,000</a:t>
-            </a:r>
-          </a:p>
-        </p:txBody>
-      </p:sp>
-      <p:sp>
-        <p:nvSpPr>
-          <p:cNvPr id="10" name="TextBox 9"/>
-          <p:cNvSpPr txBox="1"/>
-          <p:nvPr/>
-        </p:nvSpPr>
-        <p:spPr>
-          <a:xfrm>
-            <a:off x="4572000" y="2743200"/>
-            <a:ext cx="3017520" cy="3383280"/>
-          </a:xfrm>
-          <a:prstGeom prst="rect">
-            <a:avLst/>
-          </a:prstGeom>
-          <a:noFill/>
-        </p:spPr>
-        <p:txBody>
-          <a:bodyPr wrap="square">
-            <a:spAutoFit/>
-          </a:bodyPr>
-          <a:lstStyle/>
-          <a:p>
-            <a:pPr>
-              <a:spcAft>
-                <a:spcPts val="1000"/>
-              </a:spcAft>
-              <a:defRPr sz="900">
-                <a:solidFill>
-                  <a:srgbClr val="64748B"/>
-                </a:solidFill>
-              </a:defRPr>
-            </a:pPr>
-            <a:r>
-              <a:t>ยอดนิยม! ตรวจวัดคุณภาพน้ำครบ 4 ค่าหลัก</a:t>
-            </a:r>
-          </a:p>
-          <a:p>
-            <a:pPr>
-              <a:spcAft>
-                <a:spcPts val="400"/>
-              </a:spcAft>
-              <a:defRPr sz="950">
-                <a:solidFill>
-                  <a:srgbClr val="0F172A"/>
-                </a:solidFill>
-              </a:defRPr>
-            </a:pPr>
-            <a:r>
-              <a:t>✓ 1x Heavy-Duty SCADA Node (IP67)</a:t>
-            </a:r>
-          </a:p>
-          <a:p>
-            <a:pPr>
-              <a:spcAft>
-                <a:spcPts val="400"/>
-              </a:spcAft>
-              <a:defRPr sz="950">
-                <a:solidFill>
-                  <a:srgbClr val="0F172A"/>
-                </a:solidFill>
-              </a:defRPr>
-            </a:pPr>
-            <a:r>
-              <a:t>✓ 4x เซนเซอร์ครบชุด (pH, Temp, TDS, Cl)</a:t>
-            </a:r>
-          </a:p>
-          <a:p>
-            <a:pPr>
-              <a:spcAft>
-                <a:spcPts val="400"/>
-              </a:spcAft>
-              <a:defRPr sz="950">
-                <a:solidFill>
-                  <a:srgbClr val="0F172A"/>
-                </a:solidFill>
-              </a:defRPr>
-            </a:pPr>
-            <a:r>
-              <a:t>✓ Dual Telemetry Hub (4G LTE + WiFi)</a:t>
-            </a:r>
-          </a:p>
-          <a:p>
-            <a:pPr>
-              <a:spcAft>
-                <a:spcPts val="400"/>
-              </a:spcAft>
-              <a:defRPr sz="950">
-                <a:solidFill>
-                  <a:srgbClr val="0F172A"/>
-                </a:solidFill>
-              </a:defRPr>
-            </a:pPr>
-            <a:r>
-              <a:t>✓ LiFePO4 Battery Backup ใช้งานยามไฟดับ</a:t>
-            </a:r>
-          </a:p>
-          <a:p>
-            <a:pPr>
-              <a:spcAft>
-                <a:spcPts val="400"/>
-              </a:spcAft>
-              <a:defRPr sz="950">
-                <a:solidFill>
-                  <a:srgbClr val="0F172A"/>
-                </a:solidFill>
-              </a:defRPr>
-            </a:pPr>
-            <a:r>
-              <a:t>✓ Cloud SCADA Web + Mobile Pro (ฟรี 2 ปี)</a:t>
-            </a:r>
-          </a:p>
-          <a:p>
-            <a:pPr>
-              <a:spcAft>
-                <a:spcPts val="400"/>
-              </a:spcAft>
-              <a:defRPr sz="950">
-                <a:solidFill>
-                  <a:srgbClr val="0F172A"/>
-                </a:solidFill>
-              </a:defRPr>
-            </a:pPr>
-            <a:r>
-              <a:t>✓ ระบบแจ้งเตือน Line Alert &amp; SMS 24/7</a:t>
-            </a:r>
-          </a:p>
-          <a:p>
-            <a:pPr>
-              <a:spcAft>
-                <a:spcPts val="400"/>
-              </a:spcAft>
-              <a:defRPr sz="950">
-                <a:solidFill>
-                  <a:srgbClr val="0F172A"/>
-                </a:solidFill>
-              </a:defRPr>
-            </a:pPr>
-            <a:r>
-              <a:t>✓ บริการติดตั้ง ปรับเทียบ และ Setup หน้างาน</a:t>
-            </a:r>
-          </a:p>
-          <a:p>
-            <a:pPr>
-              <a:spcAft>
-                <a:spcPts val="400"/>
-              </a:spcAft>
-              <a:defRPr sz="950">
-                <a:solidFill>
-                  <a:srgbClr val="0F172A"/>
-                </a:solidFill>
-              </a:defRPr>
-            </a:pPr>
-            <a:r>
-              <a:t>✓ รับประกันอุปกรณ์และบริการ 2 ปีเต็ม</a:t>
-            </a:r>
-          </a:p>
-        </p:txBody>
-      </p:sp>
-      <p:sp>
-        <p:nvSpPr>
-          <p:cNvPr id="11" name="Rounded Rectangle 10"/>
-          <p:cNvSpPr/>
-          <p:nvPr/>
-        </p:nvSpPr>
-        <p:spPr>
-          <a:xfrm>
-            <a:off x="8046720" y="1463040"/>
-            <a:ext cx="3383280" cy="4754880"/>
-          </a:xfrm>
-          <a:prstGeom prst="roundRect">
-            <a:avLst/>
-          </a:prstGeom>
-          <a:solidFill>
-            <a:srgbClr val="FFFFFF"/>
-          </a:solidFill>
-          <a:ln w="19050">
-            <a:solidFill>
-              <a:srgbClr val="059669"/>
-            </a:solidFill>
-          </a:ln>
-        </p:spPr>
-        <p:style>
-          <a:lnRef idx="1">
-            <a:schemeClr val="accent1"/>
-          </a:lnRef>
-          <a:fillRef idx="3">
-            <a:schemeClr val="accent1"/>
-          </a:fillRef>
-          <a:effectRef idx="2">
-            <a:schemeClr val="accent1"/>
-          </a:effectRef>
-          <a:fontRef idx="minor">
-            <a:schemeClr val="lt1"/>
-          </a:fontRef>
-        </p:style>
-        <p:txBody>
-          <a:bodyPr rtlCol="0" anchor="ctr"/>
-          <a:lstStyle/>
-          <a:p>
-            <a:pPr algn="ctr"/>
-          </a:p>
-        </p:txBody>
-      </p:sp>
-      <p:sp>
-        <p:nvSpPr>
-          <p:cNvPr id="12" name="Rounded Rectangle 11"/>
-          <p:cNvSpPr/>
-          <p:nvPr/>
-        </p:nvSpPr>
-        <p:spPr>
-          <a:xfrm>
-            <a:off x="8046720" y="1463040"/>
-            <a:ext cx="3383280" cy="1188720"/>
-          </a:xfrm>
-          <a:prstGeom prst="roundRect">
-            <a:avLst/>
-          </a:prstGeom>
-          <a:solidFill>
-            <a:srgbClr val="059669"/>
-          </a:solidFill>
-          <a:ln>
-            <a:noFill/>
-          </a:ln>
-        </p:spPr>
-        <p:style>
-          <a:lnRef idx="1">
-            <a:schemeClr val="accent1"/>
-          </a:lnRef>
-          <a:fillRef idx="3">
-            <a:schemeClr val="accent1"/>
-          </a:fillRef>
-          <a:effectRef idx="2">
-            <a:schemeClr val="accent1"/>
-          </a:effectRef>
-          <a:fontRef idx="minor">
-            <a:schemeClr val="lt1"/>
-          </a:fontRef>
-        </p:style>
-        <p:txBody>
-          <a:bodyPr rtlCol="0" anchor="ctr"/>
-          <a:lstStyle/>
-          <a:p>
-            <a:pPr algn="ctr"/>
-          </a:p>
-        </p:txBody>
-      </p:sp>
-      <p:sp>
-        <p:nvSpPr>
-          <p:cNvPr id="13" name="TextBox 12"/>
-          <p:cNvSpPr txBox="1"/>
-          <p:nvPr/>
-        </p:nvSpPr>
-        <p:spPr>
-          <a:xfrm>
-            <a:off x="8229600" y="1554480"/>
-            <a:ext cx="3017520" cy="1005840"/>
-          </a:xfrm>
-          <a:prstGeom prst="rect">
-            <a:avLst/>
-          </a:prstGeom>
-          <a:noFill/>
-        </p:spPr>
-        <p:txBody>
-          <a:bodyPr wrap="square">
-            <a:spAutoFit/>
-          </a:bodyPr>
-          <a:lstStyle/>
-          <a:p>
-            <a:pPr>
-              <a:defRPr sz="950" b="1">
-                <a:solidFill>
-                  <a:srgbClr val="FFFFFF"/>
-                </a:solidFill>
-              </a:defRPr>
-            </a:pPr>
-            <a:r>
-              <a:t>Lab Grade 5-in-1</a:t>
-            </a:r>
-          </a:p>
-          <a:p>
-            <a:pPr>
-              <a:defRPr sz="1500" b="1">
-                <a:solidFill>
-                  <a:srgbClr val="FFFFFF"/>
-                </a:solidFill>
-              </a:defRPr>
-            </a:pPr>
-            <a:r>
-              <a:t>ENTERPRISE SCADA STATION</a:t>
-            </a:r>
-          </a:p>
-          <a:p>
-            <a:pPr>
-              <a:defRPr sz="2200" b="1">
-                <a:solidFill>
-                  <a:srgbClr val="FFFFFF"/>
-                </a:solidFill>
-              </a:defRPr>
-            </a:pPr>
-            <a:r>
-              <a:t>฿85,000</a:t>
-            </a:r>
-          </a:p>
-        </p:txBody>
-      </p:sp>
-      <p:sp>
-        <p:nvSpPr>
-          <p:cNvPr id="14" name="TextBox 13"/>
-          <p:cNvSpPr txBox="1"/>
-          <p:nvPr/>
-        </p:nvSpPr>
-        <p:spPr>
-          <a:xfrm>
-            <a:off x="8229600" y="2743200"/>
-            <a:ext cx="3017520" cy="3383280"/>
-          </a:xfrm>
-          <a:prstGeom prst="rect">
-            <a:avLst/>
-          </a:prstGeom>
-          <a:noFill/>
-        </p:spPr>
-        <p:txBody>
-          <a:bodyPr wrap="square">
-            <a:spAutoFit/>
-          </a:bodyPr>
-          <a:lstStyle/>
-          <a:p>
-            <a:pPr>
-              <a:spcAft>
-                <a:spcPts val="1000"/>
-              </a:spcAft>
-              <a:defRPr sz="900">
-                <a:solidFill>
-                  <a:srgbClr val="64748B"/>
-                </a:solidFill>
-              </a:defRPr>
-            </a:pPr>
-            <a:r>
-              <a:t>ระบบตรวจวัดระดับห้องแล็บ 5 พารามิเตอร์</a:t>
-            </a:r>
-          </a:p>
-          <a:p>
-            <a:pPr>
-              <a:spcAft>
-                <a:spcPts val="400"/>
-              </a:spcAft>
-              <a:defRPr sz="950">
-                <a:solidFill>
-                  <a:srgbClr val="0F172A"/>
-                </a:solidFill>
-              </a:defRPr>
-            </a:pPr>
-            <a:r>
-              <a:t>✓ 1x Industrial Master SCADA PLC Hub</a:t>
-            </a:r>
-          </a:p>
-          <a:p>
-            <a:pPr>
-              <a:spcAft>
-                <a:spcPts val="400"/>
-              </a:spcAft>
-              <a:defRPr sz="950">
-                <a:solidFill>
-                  <a:srgbClr val="0F172A"/>
-                </a:solidFill>
-              </a:defRPr>
-            </a:pPr>
-            <a:r>
-              <a:t>✓ 5x เซนเซอร์แล็บ (pH, Temp, TDS, Cl, ORP)</a:t>
-            </a:r>
-          </a:p>
-          <a:p>
-            <a:pPr>
-              <a:spcAft>
-                <a:spcPts val="400"/>
-              </a:spcAft>
-              <a:defRPr sz="950">
-                <a:solidFill>
-                  <a:srgbClr val="0F172A"/>
-                </a:solidFill>
-              </a:defRPr>
-            </a:pPr>
-            <a:r>
-              <a:t>✓ ชุดบายพาส Flow Cell Mounting Chamber</a:t>
-            </a:r>
-          </a:p>
-          <a:p>
-            <a:pPr>
-              <a:spcAft>
-                <a:spcPts val="400"/>
-              </a:spcAft>
-              <a:defRPr sz="950">
-                <a:solidFill>
-                  <a:srgbClr val="0F172A"/>
-                </a:solidFill>
-              </a:defRPr>
-            </a:pPr>
-            <a:r>
-              <a:t>✓ Dual Power Supply + LiFePO4 Backup</a:t>
-            </a:r>
-          </a:p>
-          <a:p>
-            <a:pPr>
-              <a:spcAft>
-                <a:spcPts val="400"/>
-              </a:spcAft>
-              <a:defRPr sz="950">
-                <a:solidFill>
-                  <a:srgbClr val="0F172A"/>
-                </a:solidFill>
-              </a:defRPr>
-            </a:pPr>
-            <a:r>
-              <a:t>✓ Cloud Unlimited + Modbus TCP/ERP API</a:t>
-            </a:r>
-          </a:p>
-          <a:p>
-            <a:pPr>
-              <a:spcAft>
-                <a:spcPts val="400"/>
-              </a:spcAft>
-              <a:defRPr sz="950">
-                <a:solidFill>
-                  <a:srgbClr val="0F172A"/>
-                </a:solidFill>
-              </a:defRPr>
-            </a:pPr>
-            <a:r>
-              <a:t>✓ ระบบรายงาน Audit Trail อัตโนมัติ (PDF/Excel)</a:t>
-            </a:r>
-          </a:p>
-          <a:p>
-            <a:pPr>
-              <a:spcAft>
-                <a:spcPts val="400"/>
-              </a:spcAft>
-              <a:defRPr sz="950">
-                <a:solidFill>
-                  <a:srgbClr val="0F172A"/>
-                </a:solidFill>
-              </a:defRPr>
-            </a:pPr>
-            <a:r>
-              <a:t>✓ On-site Calibration &amp; Maintenance 4 ครั้ง/ปี</a:t>
-            </a:r>
-          </a:p>
-          <a:p>
-            <a:pPr>
-              <a:spcAft>
-                <a:spcPts val="400"/>
-              </a:spcAft>
-              <a:defRPr sz="950">
-                <a:solidFill>
-                  <a:srgbClr val="0F172A"/>
-                </a:solidFill>
-              </a:defRPr>
-            </a:pPr>
-            <a:r>
-              <a:t>✓ รับประกันพรีเมียม 3 ปี (24/7 Priority SLA)</a:t>
-            </a:r>
-          </a:p>
-        </p:txBody>
-      </p:sp>
-    </p:spTree>
-  </p:cSld>
-  <p:clrMapOvr>
-    <a:masterClrMapping/>
-  </p:clrMapOvr>
-</p:sld>
-</file>
-
 <file path=ppt/slides/slide7.xml><?xml version="1.0" encoding="utf-8"?>
 <p:sld xmlns:a="http://schemas.openxmlformats.org/drawingml/2006/main" xmlns:p="http://schemas.openxmlformats.org/presentationml/2006/main" xmlns:r="http://schemas.openxmlformats.org/officeDocument/2006/relationships">
   <p:cSld>
@@ -6996,708 +6803,12 @@
               </a:defRPr>
             </a:pPr>
             <a:r>
-              <a:t>NCT WATER NEXUS PRO | SMART WATER MONITORING</a:t>
-            </a:r>
-          </a:p>
-          <a:p>
-            <a:pPr>
-              <a:defRPr sz="2400" b="1">
-                <a:solidFill>
-                  <a:srgbClr val="0F172A"/>
-                </a:solidFill>
-              </a:defRPr>
-            </a:pPr>
-            <a:r>
-              <a:t>อุปกรณ์เสริมและการบริการดูแลรักษารายปี (Add-ons &amp; Service Level Agreement)</a:t>
-            </a:r>
-          </a:p>
-        </p:txBody>
-      </p:sp>
-      <p:sp>
-        <p:nvSpPr>
-          <p:cNvPr id="3" name="Rounded Rectangle 2"/>
-          <p:cNvSpPr/>
-          <p:nvPr/>
-        </p:nvSpPr>
-        <p:spPr>
-          <a:xfrm>
-            <a:off x="731520" y="1463040"/>
-            <a:ext cx="5120640" cy="2194560"/>
-          </a:xfrm>
-          <a:prstGeom prst="roundRect">
-            <a:avLst/>
-          </a:prstGeom>
-          <a:solidFill>
-            <a:srgbClr val="FFFFFF"/>
-          </a:solidFill>
-          <a:ln w="19050">
-            <a:solidFill>
-              <a:srgbClr val="CBD5E1"/>
-            </a:solidFill>
-          </a:ln>
-        </p:spPr>
-        <p:style>
-          <a:lnRef idx="1">
-            <a:schemeClr val="accent1"/>
-          </a:lnRef>
-          <a:fillRef idx="3">
-            <a:schemeClr val="accent1"/>
-          </a:fillRef>
-          <a:effectRef idx="2">
-            <a:schemeClr val="accent1"/>
-          </a:effectRef>
-          <a:fontRef idx="minor">
-            <a:schemeClr val="lt1"/>
-          </a:fontRef>
-        </p:style>
-        <p:txBody>
-          <a:bodyPr rtlCol="0" anchor="ctr"/>
-          <a:lstStyle/>
-          <a:p>
-            <a:pPr algn="ctr"/>
-          </a:p>
-        </p:txBody>
-      </p:sp>
-      <p:sp>
-        <p:nvSpPr>
-          <p:cNvPr id="4" name="TextBox 3"/>
-          <p:cNvSpPr txBox="1"/>
-          <p:nvPr/>
-        </p:nvSpPr>
-        <p:spPr>
-          <a:xfrm>
-            <a:off x="914400" y="1600200"/>
-            <a:ext cx="4754880" cy="1920240"/>
-          </a:xfrm>
-          <a:prstGeom prst="rect">
-            <a:avLst/>
-          </a:prstGeom>
-          <a:noFill/>
-        </p:spPr>
-        <p:txBody>
-          <a:bodyPr wrap="square">
-            <a:spAutoFit/>
-          </a:bodyPr>
-          <a:lstStyle/>
-          <a:p>
-            <a:pPr>
-              <a:defRPr b="1" sz="1250">
-                <a:solidFill>
-                  <a:srgbClr val="0F172A"/>
-                </a:solidFill>
-              </a:defRPr>
-            </a:pPr>
-            <a:r>
-              <a:t>📡 ค่าบริการ Cloud Platform &amp; 4G SIM รายปี</a:t>
-            </a:r>
-          </a:p>
-          <a:p>
-            <a:pPr>
-              <a:spcAft>
-                <a:spcPts val="600"/>
-              </a:spcAft>
-              <a:defRPr b="1" sz="1200">
-                <a:solidFill>
-                  <a:srgbClr val="0284C7"/>
-                </a:solidFill>
-              </a:defRPr>
-            </a:pPr>
-            <a:r>
-              <a:t>ราคา: ฿6,000 - ฿9,600 / ปี</a:t>
-            </a:r>
-          </a:p>
-          <a:p>
-            <a:pPr>
-              <a:spcAft>
-                <a:spcPts val="200"/>
-              </a:spcAft>
-              <a:defRPr sz="950">
-                <a:solidFill>
-                  <a:srgbClr val="64748B"/>
-                </a:solidFill>
-              </a:defRPr>
-            </a:pPr>
-            <a:r>
-              <a:t>• รวมค่าแพ็กเกจ 4G eSIM ส่งข้อมูลสดตลอด 24 ชั่วโมง</a:t>
-            </a:r>
-          </a:p>
-          <a:p>
-            <a:pPr>
-              <a:spcAft>
-                <a:spcPts val="200"/>
-              </a:spcAft>
-              <a:defRPr sz="950">
-                <a:solidFill>
-                  <a:srgbClr val="64748B"/>
-                </a:solidFill>
-              </a:defRPr>
-            </a:pPr>
-            <a:r>
-              <a:t>• พื้นที่จัดเก็บบันทึกข้อมูลคุณภาพน้ำย้อนหลังบน Cloud ไม่จำกัด</a:t>
-            </a:r>
-          </a:p>
-          <a:p>
-            <a:pPr>
-              <a:spcAft>
-                <a:spcPts val="200"/>
-              </a:spcAft>
-              <a:defRPr sz="950">
-                <a:solidFill>
-                  <a:srgbClr val="64748B"/>
-                </a:solidFill>
-              </a:defRPr>
-            </a:pPr>
-            <a:r>
-              <a:t>• อัปเดตซอฟต์แวร์และฟีเจอร์ Dashboard ใหม่ฟรีตลอดอายุสัญญา</a:t>
-            </a:r>
-          </a:p>
-          <a:p>
-            <a:pPr>
-              <a:spcAft>
-                <a:spcPts val="200"/>
-              </a:spcAft>
-              <a:defRPr sz="950">
-                <a:solidFill>
-                  <a:srgbClr val="64748B"/>
-                </a:solidFill>
-              </a:defRPr>
-            </a:pPr>
-            <a:r>
-              <a:t>• ระบบแจ้งเตือน Line Alert &amp; Email Notification อัตโนมัติ</a:t>
-            </a:r>
-          </a:p>
-        </p:txBody>
-      </p:sp>
-      <p:sp>
-        <p:nvSpPr>
-          <p:cNvPr id="5" name="Rounded Rectangle 4"/>
-          <p:cNvSpPr/>
-          <p:nvPr/>
-        </p:nvSpPr>
-        <p:spPr>
-          <a:xfrm>
-            <a:off x="6126480" y="1463040"/>
-            <a:ext cx="5120640" cy="2194560"/>
-          </a:xfrm>
-          <a:prstGeom prst="roundRect">
-            <a:avLst/>
-          </a:prstGeom>
-          <a:solidFill>
-            <a:srgbClr val="FFFFFF"/>
-          </a:solidFill>
-          <a:ln w="19050">
-            <a:solidFill>
-              <a:srgbClr val="CBD5E1"/>
-            </a:solidFill>
-          </a:ln>
-        </p:spPr>
-        <p:style>
-          <a:lnRef idx="1">
-            <a:schemeClr val="accent1"/>
-          </a:lnRef>
-          <a:fillRef idx="3">
-            <a:schemeClr val="accent1"/>
-          </a:fillRef>
-          <a:effectRef idx="2">
-            <a:schemeClr val="accent1"/>
-          </a:effectRef>
-          <a:fontRef idx="minor">
-            <a:schemeClr val="lt1"/>
-          </a:fontRef>
-        </p:style>
-        <p:txBody>
-          <a:bodyPr rtlCol="0" anchor="ctr"/>
-          <a:lstStyle/>
-          <a:p>
-            <a:pPr algn="ctr"/>
-          </a:p>
-        </p:txBody>
-      </p:sp>
-      <p:sp>
-        <p:nvSpPr>
-          <p:cNvPr id="6" name="TextBox 5"/>
-          <p:cNvSpPr txBox="1"/>
-          <p:nvPr/>
-        </p:nvSpPr>
-        <p:spPr>
-          <a:xfrm>
-            <a:off x="6309360" y="1600200"/>
-            <a:ext cx="4754880" cy="1920240"/>
-          </a:xfrm>
-          <a:prstGeom prst="rect">
-            <a:avLst/>
-          </a:prstGeom>
-          <a:noFill/>
-        </p:spPr>
-        <p:txBody>
-          <a:bodyPr wrap="square">
-            <a:spAutoFit/>
-          </a:bodyPr>
-          <a:lstStyle/>
-          <a:p>
-            <a:pPr>
-              <a:defRPr b="1" sz="1250">
-                <a:solidFill>
-                  <a:srgbClr val="0F172A"/>
-                </a:solidFill>
-              </a:defRPr>
-            </a:pPr>
-            <a:r>
-              <a:t>🔧 สัญญาบริการปรับเทียบมาตรฐาน (Annual SLA &amp; Calibration)</a:t>
-            </a:r>
-          </a:p>
-          <a:p>
-            <a:pPr>
-              <a:spcAft>
-                <a:spcPts val="600"/>
-              </a:spcAft>
-              <a:defRPr b="1" sz="1200">
-                <a:solidFill>
-                  <a:srgbClr val="0284C7"/>
-                </a:solidFill>
-              </a:defRPr>
-            </a:pPr>
-            <a:r>
-              <a:t>ราคา: ฿12,000 / ปี</a:t>
-            </a:r>
-          </a:p>
-          <a:p>
-            <a:pPr>
-              <a:spcAft>
-                <a:spcPts val="200"/>
-              </a:spcAft>
-              <a:defRPr sz="950">
-                <a:solidFill>
-                  <a:srgbClr val="64748B"/>
-                </a:solidFill>
-              </a:defRPr>
-            </a:pPr>
-            <a:r>
-              <a:t>• บริการเข้าตรวจสอบและสอบเทียบหัววัดหน้างาน 4 ครั้ง/ปี (ทุกไตรมาส)</a:t>
-            </a:r>
-          </a:p>
-          <a:p>
-            <a:pPr>
-              <a:spcAft>
-                <a:spcPts val="200"/>
-              </a:spcAft>
-              <a:defRPr sz="950">
-                <a:solidFill>
-                  <a:srgbClr val="64748B"/>
-                </a:solidFill>
-              </a:defRPr>
-            </a:pPr>
-            <a:r>
-              <a:t>• พร้อมน้ำยา Buffer มาตรฐาน (Standard Solution pH 4.01, 7.00, 10.01)</a:t>
-            </a:r>
-          </a:p>
-          <a:p>
-            <a:pPr>
-              <a:spcAft>
-                <a:spcPts val="200"/>
-              </a:spcAft>
-              <a:defRPr sz="950">
-                <a:solidFill>
-                  <a:srgbClr val="64748B"/>
-                </a:solidFill>
-              </a:defRPr>
-            </a:pPr>
-            <a:r>
-              <a:t>• ออกใบรับรอง Certificate of Calibration สำหรับการตรวจประเมิน ISO</a:t>
-            </a:r>
-          </a:p>
-          <a:p>
-            <a:pPr>
-              <a:spcAft>
-                <a:spcPts val="200"/>
-              </a:spcAft>
-              <a:defRPr sz="950">
-                <a:solidFill>
-                  <a:srgbClr val="64748B"/>
-                </a:solidFill>
-              </a:defRPr>
-            </a:pPr>
-            <a:r>
-              <a:t>• สิทธิ์เปลี่ยนอะไหล่ฉุกเฉินและมีอุปกรณ์สำรองใช้งานระหว่างส่งซ่อม</a:t>
-            </a:r>
-          </a:p>
-        </p:txBody>
-      </p:sp>
-      <p:sp>
-        <p:nvSpPr>
-          <p:cNvPr id="7" name="Rounded Rectangle 6"/>
-          <p:cNvSpPr/>
-          <p:nvPr/>
-        </p:nvSpPr>
-        <p:spPr>
-          <a:xfrm>
-            <a:off x="731520" y="3840480"/>
-            <a:ext cx="5120640" cy="2194560"/>
-          </a:xfrm>
-          <a:prstGeom prst="roundRect">
-            <a:avLst/>
-          </a:prstGeom>
-          <a:solidFill>
-            <a:srgbClr val="FFFFFF"/>
-          </a:solidFill>
-          <a:ln w="19050">
-            <a:solidFill>
-              <a:srgbClr val="CBD5E1"/>
-            </a:solidFill>
-          </a:ln>
-        </p:spPr>
-        <p:style>
-          <a:lnRef idx="1">
-            <a:schemeClr val="accent1"/>
-          </a:lnRef>
-          <a:fillRef idx="3">
-            <a:schemeClr val="accent1"/>
-          </a:fillRef>
-          <a:effectRef idx="2">
-            <a:schemeClr val="accent1"/>
-          </a:effectRef>
-          <a:fontRef idx="minor">
-            <a:schemeClr val="lt1"/>
-          </a:fontRef>
-        </p:style>
-        <p:txBody>
-          <a:bodyPr rtlCol="0" anchor="ctr"/>
-          <a:lstStyle/>
-          <a:p>
-            <a:pPr algn="ctr"/>
-          </a:p>
-        </p:txBody>
-      </p:sp>
-      <p:sp>
-        <p:nvSpPr>
-          <p:cNvPr id="8" name="TextBox 7"/>
-          <p:cNvSpPr txBox="1"/>
-          <p:nvPr/>
-        </p:nvSpPr>
-        <p:spPr>
-          <a:xfrm>
-            <a:off x="914400" y="3977640"/>
-            <a:ext cx="4754880" cy="1920240"/>
-          </a:xfrm>
-          <a:prstGeom prst="rect">
-            <a:avLst/>
-          </a:prstGeom>
-          <a:noFill/>
-        </p:spPr>
-        <p:txBody>
-          <a:bodyPr wrap="square">
-            <a:spAutoFit/>
-          </a:bodyPr>
-          <a:lstStyle/>
-          <a:p>
-            <a:pPr>
-              <a:defRPr b="1" sz="1250">
-                <a:solidFill>
-                  <a:srgbClr val="0F172A"/>
-                </a:solidFill>
-              </a:defRPr>
-            </a:pPr>
-            <a:r>
-              <a:t>💧 ชุดกระเปาะวัดน้ำติดตั้งสำเร็จ (Flow Cell Chamber Kit)</a:t>
-            </a:r>
-          </a:p>
-          <a:p>
-            <a:pPr>
-              <a:spcAft>
-                <a:spcPts val="600"/>
-              </a:spcAft>
-              <a:defRPr b="1" sz="1200">
-                <a:solidFill>
-                  <a:srgbClr val="0284C7"/>
-                </a:solidFill>
-              </a:defRPr>
-            </a:pPr>
-            <a:r>
-              <a:t>ราคา: ฿8,500 / ชุด</a:t>
-            </a:r>
-          </a:p>
-          <a:p>
-            <a:pPr>
-              <a:spcAft>
-                <a:spcPts val="200"/>
-              </a:spcAft>
-              <a:defRPr sz="950">
-                <a:solidFill>
-                  <a:srgbClr val="64748B"/>
-                </a:solidFill>
-              </a:defRPr>
-            </a:pPr>
-            <a:r>
-              <a:t>• กระเปาะใส่หัววัด Acrylic/PVC ทนแรงดัน พร้อมวาล์วปรับอัตราการไหล</a:t>
-            </a:r>
-          </a:p>
-          <a:p>
-            <a:pPr>
-              <a:spcAft>
-                <a:spcPts val="200"/>
-              </a:spcAft>
-              <a:defRPr sz="950">
-                <a:solidFill>
-                  <a:srgbClr val="64748B"/>
-                </a:solidFill>
-              </a:defRPr>
-            </a:pPr>
-            <a:r>
-              <a:t>• ระบบบายพาส (Bypass Loop) ง่ายต่อการถอดล้างและ Calibrate หัววัด</a:t>
-            </a:r>
-          </a:p>
-          <a:p>
-            <a:pPr>
-              <a:spcAft>
-                <a:spcPts val="200"/>
-              </a:spcAft>
-              <a:defRPr sz="950">
-                <a:solidFill>
-                  <a:srgbClr val="64748B"/>
-                </a:solidFill>
-              </a:defRPr>
-            </a:pPr>
-            <a:r>
-              <a:t>• มีช่องสำหรับติดตั้งหัววัด pH, Temp, TDS, Cl ครบในจุดเดียว</a:t>
-            </a:r>
-          </a:p>
-          <a:p>
-            <a:pPr>
-              <a:spcAft>
-                <a:spcPts val="200"/>
-              </a:spcAft>
-              <a:defRPr sz="950">
-                <a:solidFill>
-                  <a:srgbClr val="64748B"/>
-                </a:solidFill>
-              </a:defRPr>
-            </a:pPr>
-            <a:r>
-              <a:t>• ป้องกันฟองอากาศรบกวนการอ่านค่าของเซนเซอร์</a:t>
-            </a:r>
-          </a:p>
-        </p:txBody>
-      </p:sp>
-      <p:sp>
-        <p:nvSpPr>
-          <p:cNvPr id="9" name="Rounded Rectangle 8"/>
-          <p:cNvSpPr/>
-          <p:nvPr/>
-        </p:nvSpPr>
-        <p:spPr>
-          <a:xfrm>
-            <a:off x="6126480" y="3840480"/>
-            <a:ext cx="5120640" cy="2194560"/>
-          </a:xfrm>
-          <a:prstGeom prst="roundRect">
-            <a:avLst/>
-          </a:prstGeom>
-          <a:solidFill>
-            <a:srgbClr val="FFFFFF"/>
-          </a:solidFill>
-          <a:ln w="19050">
-            <a:solidFill>
-              <a:srgbClr val="CBD5E1"/>
-            </a:solidFill>
-          </a:ln>
-        </p:spPr>
-        <p:style>
-          <a:lnRef idx="1">
-            <a:schemeClr val="accent1"/>
-          </a:lnRef>
-          <a:fillRef idx="3">
-            <a:schemeClr val="accent1"/>
-          </a:fillRef>
-          <a:effectRef idx="2">
-            <a:schemeClr val="accent1"/>
-          </a:effectRef>
-          <a:fontRef idx="minor">
-            <a:schemeClr val="lt1"/>
-          </a:fontRef>
-        </p:style>
-        <p:txBody>
-          <a:bodyPr rtlCol="0" anchor="ctr"/>
-          <a:lstStyle/>
-          <a:p>
-            <a:pPr algn="ctr"/>
-          </a:p>
-        </p:txBody>
-      </p:sp>
-      <p:sp>
-        <p:nvSpPr>
-          <p:cNvPr id="10" name="TextBox 9"/>
-          <p:cNvSpPr txBox="1"/>
-          <p:nvPr/>
-        </p:nvSpPr>
-        <p:spPr>
-          <a:xfrm>
-            <a:off x="6309360" y="3977640"/>
-            <a:ext cx="4754880" cy="1920240"/>
-          </a:xfrm>
-          <a:prstGeom prst="rect">
-            <a:avLst/>
-          </a:prstGeom>
-          <a:noFill/>
-        </p:spPr>
-        <p:txBody>
-          <a:bodyPr wrap="square">
-            <a:spAutoFit/>
-          </a:bodyPr>
-          <a:lstStyle/>
-          <a:p>
-            <a:pPr>
-              <a:defRPr b="1" sz="1250">
-                <a:solidFill>
-                  <a:srgbClr val="0F172A"/>
-                </a:solidFill>
-              </a:defRPr>
-            </a:pPr>
-            <a:r>
-              <a:t>🔌 โมดูลเชื่อมต่อระบบภายนอก (SCADA / ERP / Modbus TCP)</a:t>
-            </a:r>
-          </a:p>
-          <a:p>
-            <a:pPr>
-              <a:spcAft>
-                <a:spcPts val="600"/>
-              </a:spcAft>
-              <a:defRPr b="1" sz="1200">
-                <a:solidFill>
-                  <a:srgbClr val="0284C7"/>
-                </a:solidFill>
-              </a:defRPr>
-            </a:pPr>
-            <a:r>
-              <a:t>ราคา: ฿12,000 / ระบบ</a:t>
-            </a:r>
-          </a:p>
-          <a:p>
-            <a:pPr>
-              <a:spcAft>
-                <a:spcPts val="200"/>
-              </a:spcAft>
-              <a:defRPr sz="950">
-                <a:solidFill>
-                  <a:srgbClr val="64748B"/>
-                </a:solidFill>
-              </a:defRPr>
-            </a:pPr>
-            <a:r>
-              <a:t>• ส่งต่อข้อมูลคุณภาพน้ำเข้าสู่ระบบ SCADA เดิมของโรงงานผ่าน Modbus TCP/RTU</a:t>
-            </a:r>
-          </a:p>
-          <a:p>
-            <a:pPr>
-              <a:spcAft>
-                <a:spcPts val="200"/>
-              </a:spcAft>
-              <a:defRPr sz="950">
-                <a:solidFill>
-                  <a:srgbClr val="64748B"/>
-                </a:solidFill>
-              </a:defRPr>
-            </a:pPr>
-            <a:r>
-              <a:t>• RESTful API &amp; Webhook สำหรับดึงข้อมูลเข้าสู่ระบบ ERP, MES หรือ Power BI</a:t>
-            </a:r>
-          </a:p>
-          <a:p>
-            <a:pPr>
-              <a:spcAft>
-                <a:spcPts val="200"/>
-              </a:spcAft>
-              <a:defRPr sz="950">
-                <a:solidFill>
-                  <a:srgbClr val="64748B"/>
-                </a:solidFill>
-              </a:defRPr>
-            </a:pPr>
-            <a:r>
-              <a:t>• รองรับการเชื่อมต่อกับระบบ PLC ยี่ห้อ Siemens, Mitsubishi, Omron</a:t>
-            </a:r>
-          </a:p>
-          <a:p>
-            <a:pPr>
-              <a:spcAft>
-                <a:spcPts val="200"/>
-              </a:spcAft>
-              <a:defRPr sz="950">
-                <a:solidFill>
-                  <a:srgbClr val="64748B"/>
-                </a:solidFill>
-              </a:defRPr>
-            </a:pPr>
-            <a:r>
-              <a:t>• พร้อมทีมวิศวกรซอฟต์แวร์สนับสนุนการ Integration จนใช้งานได้สมบูรณ์</a:t>
-            </a:r>
-          </a:p>
-        </p:txBody>
-      </p:sp>
-    </p:spTree>
-  </p:cSld>
-  <p:clrMapOvr>
-    <a:masterClrMapping/>
-  </p:clrMapOvr>
-</p:sld>
-</file>
-
-<file path=ppt/slides/slide8.xml><?xml version="1.0" encoding="utf-8"?>
-<p:sld xmlns:a="http://schemas.openxmlformats.org/drawingml/2006/main" xmlns:p="http://schemas.openxmlformats.org/presentationml/2006/main" xmlns:r="http://schemas.openxmlformats.org/officeDocument/2006/relationships">
-  <p:cSld>
-    <p:bg>
-      <p:bgPr>
-        <a:solidFill>
-          <a:srgbClr val="F1F6FB"/>
-        </a:solidFill>
-        <a:effectLst/>
-      </p:bgPr>
-    </p:bg>
-    <p:spTree>
-      <p:nvGrpSpPr>
-        <p:cNvPr id="1" name=""/>
-        <p:cNvGrpSpPr/>
-        <p:nvPr/>
-      </p:nvGrpSpPr>
-      <p:grpSpPr/>
-      <p:sp>
-        <p:nvSpPr>
-          <p:cNvPr id="2" name="TextBox 1"/>
-          <p:cNvSpPr txBox="1"/>
-          <p:nvPr/>
-        </p:nvSpPr>
-        <p:spPr>
-          <a:xfrm>
-            <a:off x="731520" y="365760"/>
-            <a:ext cx="10728655" cy="1005840"/>
-          </a:xfrm>
-          <a:prstGeom prst="rect">
-            <a:avLst/>
-          </a:prstGeom>
-          <a:noFill/>
-        </p:spPr>
-        <p:txBody>
-          <a:bodyPr wrap="square" lIns="0" tIns="0" rIns="0" bIns="0">
-            <a:spAutoFit/>
-          </a:bodyPr>
-          <a:lstStyle/>
-          <a:p>
-            <a:pPr>
-              <a:spcAft>
-                <a:spcPts val="200"/>
-              </a:spcAft>
-              <a:defRPr sz="1100" b="1">
-                <a:solidFill>
-                  <a:srgbClr val="0284C7"/>
-                </a:solidFill>
-              </a:defRPr>
-            </a:pPr>
-            <a:r>
-              <a:t>NCT WATER NEXUS PRO | SMART WATER MONITORING</a:t>
-            </a:r>
-          </a:p>
-          <a:p>
-            <a:pPr>
-              <a:defRPr sz="2400" b="1">
+              <a:t>NCT WATER NEXUS PRO | COMMERCIAL PROPOSAL</a:t>
+            </a:r>
+          </a:p>
+          <a:p>
+            <a:pPr>
+              <a:defRPr sz="2300" b="1">
                 <a:solidFill>
                   <a:srgbClr val="0F172A"/>
                 </a:solidFill>
@@ -8397,13 +7508,13 @@
 </p:sld>
 </file>
 
-<file path=ppt/slides/slide9.xml><?xml version="1.0" encoding="utf-8"?>
+<file path=ppt/slides/slide8.xml><?xml version="1.0" encoding="utf-8"?>
 <p:sld xmlns:a="http://schemas.openxmlformats.org/drawingml/2006/main" xmlns:p="http://schemas.openxmlformats.org/presentationml/2006/main" xmlns:r="http://schemas.openxmlformats.org/officeDocument/2006/relationships">
   <p:cSld>
     <p:bg>
       <p:bgPr>
         <a:solidFill>
-          <a:srgbClr val="F1F6FB"/>
+          <a:srgbClr val="0F172A"/>
         </a:solidFill>
         <a:effectLst/>
       </p:bgPr>
@@ -8417,535 +7528,20 @@
       <p:grpSpPr/>
       <p:sp>
         <p:nvSpPr>
-          <p:cNvPr id="2" name="TextBox 1"/>
-          <p:cNvSpPr txBox="1"/>
+          <p:cNvPr id="2" name="Rounded Rectangle 1"/>
+          <p:cNvSpPr/>
           <p:nvPr/>
         </p:nvSpPr>
         <p:spPr>
           <a:xfrm>
-            <a:off x="731520" y="365760"/>
-            <a:ext cx="10728655" cy="1005840"/>
-          </a:xfrm>
-          <a:prstGeom prst="rect">
-            <a:avLst/>
-          </a:prstGeom>
-          <a:noFill/>
-        </p:spPr>
-        <p:txBody>
-          <a:bodyPr wrap="square" lIns="0" tIns="0" rIns="0" bIns="0">
-            <a:spAutoFit/>
-          </a:bodyPr>
-          <a:lstStyle/>
-          <a:p>
-            <a:pPr>
-              <a:spcAft>
-                <a:spcPts val="200"/>
-              </a:spcAft>
-              <a:defRPr sz="1100" b="1">
-                <a:solidFill>
-                  <a:srgbClr val="0284C7"/>
-                </a:solidFill>
-              </a:defRPr>
-            </a:pPr>
-            <a:r>
-              <a:t>NCT WATER NEXUS PRO | SMART WATER MONITORING</a:t>
-            </a:r>
-          </a:p>
-          <a:p>
-            <a:pPr>
-              <a:defRPr sz="2400" b="1">
-                <a:solidFill>
-                  <a:srgbClr val="0F172A"/>
-                </a:solidFill>
-              </a:defRPr>
-            </a:pPr>
-            <a:r>
-              <a:t>ขั้นตอนการติดตั้งและส่งมอบงาน (4-Week Implementation Roadmap)</a:t>
-            </a:r>
-          </a:p>
-        </p:txBody>
-      </p:sp>
-      <p:sp>
-        <p:nvSpPr>
-          <p:cNvPr id="3" name="Rounded Rectangle 2"/>
-          <p:cNvSpPr/>
-          <p:nvPr/>
-        </p:nvSpPr>
-        <p:spPr>
-          <a:xfrm>
-            <a:off x="731520" y="1463040"/>
-            <a:ext cx="2468880" cy="4754880"/>
+            <a:off x="731520" y="731520"/>
+            <a:ext cx="10728655" cy="5394960"/>
           </a:xfrm>
           <a:prstGeom prst="roundRect">
             <a:avLst/>
           </a:prstGeom>
           <a:solidFill>
-            <a:srgbClr val="FFFFFF"/>
-          </a:solidFill>
-          <a:ln w="19050">
-            <a:solidFill>
-              <a:srgbClr val="CBD5E1"/>
-            </a:solidFill>
-          </a:ln>
-        </p:spPr>
-        <p:style>
-          <a:lnRef idx="1">
-            <a:schemeClr val="accent1"/>
-          </a:lnRef>
-          <a:fillRef idx="3">
-            <a:schemeClr val="accent1"/>
-          </a:fillRef>
-          <a:effectRef idx="2">
-            <a:schemeClr val="accent1"/>
-          </a:effectRef>
-          <a:fontRef idx="minor">
-            <a:schemeClr val="lt1"/>
-          </a:fontRef>
-        </p:style>
-        <p:txBody>
-          <a:bodyPr rtlCol="0" anchor="ctr"/>
-          <a:lstStyle/>
-          <a:p>
-            <a:pPr algn="ctr"/>
-          </a:p>
-        </p:txBody>
-      </p:sp>
-      <p:sp>
-        <p:nvSpPr>
-          <p:cNvPr id="4" name="TextBox 3"/>
-          <p:cNvSpPr txBox="1"/>
-          <p:nvPr/>
-        </p:nvSpPr>
-        <p:spPr>
-          <a:xfrm>
-            <a:off x="868680" y="1645920"/>
-            <a:ext cx="2194560" cy="4389120"/>
-          </a:xfrm>
-          <a:prstGeom prst="rect">
-            <a:avLst/>
-          </a:prstGeom>
-          <a:noFill/>
-        </p:spPr>
-        <p:txBody>
-          <a:bodyPr wrap="square">
-            <a:spAutoFit/>
-          </a:bodyPr>
-          <a:lstStyle/>
-          <a:p>
-            <a:pPr>
-              <a:defRPr b="1" sz="1300">
-                <a:solidFill>
-                  <a:srgbClr val="0284C7"/>
-                </a:solidFill>
-              </a:defRPr>
-            </a:pPr>
-            <a:r>
-              <a:t>WEEK 01</a:t>
-            </a:r>
-          </a:p>
-          <a:p>
-            <a:pPr>
-              <a:spcAft>
-                <a:spcPts val="1200"/>
-              </a:spcAft>
-              <a:defRPr b="1" sz="1200">
-                <a:solidFill>
-                  <a:srgbClr val="0F172A"/>
-                </a:solidFill>
-              </a:defRPr>
-            </a:pPr>
-            <a:r>
-              <a:t>สำรวจหน้างานและตำแหน่ง (Site Survey)</a:t>
-            </a:r>
-          </a:p>
-          <a:p>
-            <a:pPr>
-              <a:spcAft>
-                <a:spcPts val="600"/>
-              </a:spcAft>
-              <a:defRPr sz="1000">
-                <a:solidFill>
-                  <a:srgbClr val="64748B"/>
-                </a:solidFill>
-              </a:defRPr>
-            </a:pPr>
-            <a:r>
-              <a:t>• สำรวจจุดติดตั้งท่อน้ำ Flow Chamber</a:t>
-            </a:r>
-          </a:p>
-          <a:p>
-            <a:pPr>
-              <a:spcAft>
-                <a:spcPts val="600"/>
-              </a:spcAft>
-              <a:defRPr sz="1000">
-                <a:solidFill>
-                  <a:srgbClr val="64748B"/>
-                </a:solidFill>
-              </a:defRPr>
-            </a:pPr>
-            <a:r>
-              <a:t>• กำหนดพิกัดติดตั้งตู้คอนโทรลเลอร์</a:t>
-            </a:r>
-          </a:p>
-          <a:p>
-            <a:pPr>
-              <a:spcAft>
-                <a:spcPts val="600"/>
-              </a:spcAft>
-              <a:defRPr sz="1000">
-                <a:solidFill>
-                  <a:srgbClr val="64748B"/>
-                </a:solidFill>
-              </a:defRPr>
-            </a:pPr>
-            <a:r>
-              <a:t>• ทดสอบสัญญาณ WiFi / 4G Cellular</a:t>
-            </a:r>
-          </a:p>
-          <a:p>
-            <a:pPr>
-              <a:spcAft>
-                <a:spcPts val="600"/>
-              </a:spcAft>
-              <a:defRPr sz="1000">
-                <a:solidFill>
-                  <a:srgbClr val="64748B"/>
-                </a:solidFill>
-              </a:defRPr>
-            </a:pPr>
-            <a:r>
-              <a:t>• สรุปแบบ Diagram และรายการอุปกรณ์</a:t>
-            </a:r>
-          </a:p>
-        </p:txBody>
-      </p:sp>
-      <p:sp>
-        <p:nvSpPr>
-          <p:cNvPr id="5" name="Rounded Rectangle 4"/>
-          <p:cNvSpPr/>
-          <p:nvPr/>
-        </p:nvSpPr>
-        <p:spPr>
-          <a:xfrm>
-            <a:off x="3474720" y="1463040"/>
-            <a:ext cx="2468880" cy="4754880"/>
-          </a:xfrm>
-          <a:prstGeom prst="roundRect">
-            <a:avLst/>
-          </a:prstGeom>
-          <a:solidFill>
-            <a:srgbClr val="FFFFFF"/>
-          </a:solidFill>
-          <a:ln w="19050">
-            <a:solidFill>
-              <a:srgbClr val="CBD5E1"/>
-            </a:solidFill>
-          </a:ln>
-        </p:spPr>
-        <p:style>
-          <a:lnRef idx="1">
-            <a:schemeClr val="accent1"/>
-          </a:lnRef>
-          <a:fillRef idx="3">
-            <a:schemeClr val="accent1"/>
-          </a:fillRef>
-          <a:effectRef idx="2">
-            <a:schemeClr val="accent1"/>
-          </a:effectRef>
-          <a:fontRef idx="minor">
-            <a:schemeClr val="lt1"/>
-          </a:fontRef>
-        </p:style>
-        <p:txBody>
-          <a:bodyPr rtlCol="0" anchor="ctr"/>
-          <a:lstStyle/>
-          <a:p>
-            <a:pPr algn="ctr"/>
-          </a:p>
-        </p:txBody>
-      </p:sp>
-      <p:sp>
-        <p:nvSpPr>
-          <p:cNvPr id="6" name="TextBox 5"/>
-          <p:cNvSpPr txBox="1"/>
-          <p:nvPr/>
-        </p:nvSpPr>
-        <p:spPr>
-          <a:xfrm>
-            <a:off x="3611880" y="1645920"/>
-            <a:ext cx="2194560" cy="4389120"/>
-          </a:xfrm>
-          <a:prstGeom prst="rect">
-            <a:avLst/>
-          </a:prstGeom>
-          <a:noFill/>
-        </p:spPr>
-        <p:txBody>
-          <a:bodyPr wrap="square">
-            <a:spAutoFit/>
-          </a:bodyPr>
-          <a:lstStyle/>
-          <a:p>
-            <a:pPr>
-              <a:defRPr b="1" sz="1300">
-                <a:solidFill>
-                  <a:srgbClr val="0284C7"/>
-                </a:solidFill>
-              </a:defRPr>
-            </a:pPr>
-            <a:r>
-              <a:t>WEEK 02</a:t>
-            </a:r>
-          </a:p>
-          <a:p>
-            <a:pPr>
-              <a:spcAft>
-                <a:spcPts val="1200"/>
-              </a:spcAft>
-              <a:defRPr b="1" sz="1200">
-                <a:solidFill>
-                  <a:srgbClr val="0F172A"/>
-                </a:solidFill>
-              </a:defRPr>
-            </a:pPr>
-            <a:r>
-              <a:t>ติดตั้งฮาร์ดแวร์และเซนเซอร์ (Installation)</a:t>
-            </a:r>
-          </a:p>
-          <a:p>
-            <a:pPr>
-              <a:spcAft>
-                <a:spcPts val="600"/>
-              </a:spcAft>
-              <a:defRPr sz="1000">
-                <a:solidFill>
-                  <a:srgbClr val="64748B"/>
-                </a:solidFill>
-              </a:defRPr>
-            </a:pPr>
-            <a:r>
-              <a:t>• ติดตั้งตู้ควบคุม NCT Controller Node</a:t>
-            </a:r>
-          </a:p>
-          <a:p>
-            <a:pPr>
-              <a:spcAft>
-                <a:spcPts val="600"/>
-              </a:spcAft>
-              <a:defRPr sz="1000">
-                <a:solidFill>
-                  <a:srgbClr val="64748B"/>
-                </a:solidFill>
-              </a:defRPr>
-            </a:pPr>
-            <a:r>
-              <a:t>• ติดตั้งชุดเซนเซอร์และ Flow Sensor Cell</a:t>
-            </a:r>
-          </a:p>
-          <a:p>
-            <a:pPr>
-              <a:spcAft>
-                <a:spcPts val="600"/>
-              </a:spcAft>
-              <a:defRPr sz="1000">
-                <a:solidFill>
-                  <a:srgbClr val="64748B"/>
-                </a:solidFill>
-              </a:defRPr>
-            </a:pPr>
-            <a:r>
-              <a:t>• เดินสายสัญญาณและระบบไฟฟ้าสำรอง</a:t>
-            </a:r>
-          </a:p>
-          <a:p>
-            <a:pPr>
-              <a:spcAft>
-                <a:spcPts val="600"/>
-              </a:spcAft>
-              <a:defRPr sz="1000">
-                <a:solidFill>
-                  <a:srgbClr val="64748B"/>
-                </a:solidFill>
-              </a:defRPr>
-            </a:pPr>
-            <a:r>
-              <a:t>• ทดสอบระบบไฟและเซนเซอร์เบื้องต้น</a:t>
-            </a:r>
-          </a:p>
-        </p:txBody>
-      </p:sp>
-      <p:sp>
-        <p:nvSpPr>
-          <p:cNvPr id="7" name="Rounded Rectangle 6"/>
-          <p:cNvSpPr/>
-          <p:nvPr/>
-        </p:nvSpPr>
-        <p:spPr>
-          <a:xfrm>
-            <a:off x="6217920" y="1463040"/>
-            <a:ext cx="2468880" cy="4754880"/>
-          </a:xfrm>
-          <a:prstGeom prst="roundRect">
-            <a:avLst/>
-          </a:prstGeom>
-          <a:solidFill>
-            <a:srgbClr val="FFFFFF"/>
-          </a:solidFill>
-          <a:ln w="19050">
-            <a:solidFill>
-              <a:srgbClr val="CBD5E1"/>
-            </a:solidFill>
-          </a:ln>
-        </p:spPr>
-        <p:style>
-          <a:lnRef idx="1">
-            <a:schemeClr val="accent1"/>
-          </a:lnRef>
-          <a:fillRef idx="3">
-            <a:schemeClr val="accent1"/>
-          </a:fillRef>
-          <a:effectRef idx="2">
-            <a:schemeClr val="accent1"/>
-          </a:effectRef>
-          <a:fontRef idx="minor">
-            <a:schemeClr val="lt1"/>
-          </a:fontRef>
-        </p:style>
-        <p:txBody>
-          <a:bodyPr rtlCol="0" anchor="ctr"/>
-          <a:lstStyle/>
-          <a:p>
-            <a:pPr algn="ctr"/>
-          </a:p>
-        </p:txBody>
-      </p:sp>
-      <p:sp>
-        <p:nvSpPr>
-          <p:cNvPr id="8" name="TextBox 7"/>
-          <p:cNvSpPr txBox="1"/>
-          <p:nvPr/>
-        </p:nvSpPr>
-        <p:spPr>
-          <a:xfrm>
-            <a:off x="6355080" y="1645920"/>
-            <a:ext cx="2194560" cy="4389120"/>
-          </a:xfrm>
-          <a:prstGeom prst="rect">
-            <a:avLst/>
-          </a:prstGeom>
-          <a:noFill/>
-        </p:spPr>
-        <p:txBody>
-          <a:bodyPr wrap="square">
-            <a:spAutoFit/>
-          </a:bodyPr>
-          <a:lstStyle/>
-          <a:p>
-            <a:pPr>
-              <a:defRPr b="1" sz="1300">
-                <a:solidFill>
-                  <a:srgbClr val="0284C7"/>
-                </a:solidFill>
-              </a:defRPr>
-            </a:pPr>
-            <a:r>
-              <a:t>WEEK 03</a:t>
-            </a:r>
-          </a:p>
-          <a:p>
-            <a:pPr>
-              <a:spcAft>
-                <a:spcPts val="1200"/>
-              </a:spcAft>
-              <a:defRPr b="1" sz="1200">
-                <a:solidFill>
-                  <a:srgbClr val="0F172A"/>
-                </a:solidFill>
-              </a:defRPr>
-            </a:pPr>
-            <a:r>
-              <a:t>สอบเทียบและเชื่อมต่อระบบ (Cloud Setup)</a:t>
-            </a:r>
-          </a:p>
-          <a:p>
-            <a:pPr>
-              <a:spcAft>
-                <a:spcPts val="600"/>
-              </a:spcAft>
-              <a:defRPr sz="1000">
-                <a:solidFill>
-                  <a:srgbClr val="64748B"/>
-                </a:solidFill>
-              </a:defRPr>
-            </a:pPr>
-            <a:r>
-              <a:t>• เทียบมาตรฐานหัววัด (Calibration 2/3 Points)</a:t>
-            </a:r>
-          </a:p>
-          <a:p>
-            <a:pPr>
-              <a:spcAft>
-                <a:spcPts val="600"/>
-              </a:spcAft>
-              <a:defRPr sz="1000">
-                <a:solidFill>
-                  <a:srgbClr val="64748B"/>
-                </a:solidFill>
-              </a:defRPr>
-            </a:pPr>
-            <a:r>
-              <a:t>• เชื่อมต่อระบบ Telemetry สู่ Cloud Server</a:t>
-            </a:r>
-          </a:p>
-          <a:p>
-            <a:pPr>
-              <a:spcAft>
-                <a:spcPts val="600"/>
-              </a:spcAft>
-              <a:defRPr sz="1000">
-                <a:solidFill>
-                  <a:srgbClr val="64748B"/>
-                </a:solidFill>
-              </a:defRPr>
-            </a:pPr>
-            <a:r>
-              <a:t>• ตั้งค่าเกณฑ์แจ้งเตือน Dashboard และ Line</a:t>
-            </a:r>
-          </a:p>
-          <a:p>
-            <a:pPr>
-              <a:spcAft>
-                <a:spcPts val="600"/>
-              </a:spcAft>
-              <a:defRPr sz="1000">
-                <a:solidFill>
-                  <a:srgbClr val="64748B"/>
-                </a:solidFill>
-              </a:defRPr>
-            </a:pPr>
-            <a:r>
-              <a:t>• ทดสอบระบบเตือนภัยฉุกเฉิน (Alert Test)</a:t>
-            </a:r>
-          </a:p>
-        </p:txBody>
-      </p:sp>
-      <p:sp>
-        <p:nvSpPr>
-          <p:cNvPr id="9" name="Rounded Rectangle 8"/>
-          <p:cNvSpPr/>
-          <p:nvPr/>
-        </p:nvSpPr>
-        <p:spPr>
-          <a:xfrm>
-            <a:off x="8961120" y="1463040"/>
-            <a:ext cx="2468880" cy="4754880"/>
-          </a:xfrm>
-          <a:prstGeom prst="roundRect">
-            <a:avLst/>
-          </a:prstGeom>
-          <a:solidFill>
-            <a:srgbClr val="FFFFFF"/>
+            <a:srgbClr val="1E293B"/>
           </a:solidFill>
           <a:ln w="19050">
             <a:solidFill>
@@ -8977,14 +7573,14 @@
       </p:sp>
       <p:sp>
         <p:nvSpPr>
-          <p:cNvPr id="10" name="TextBox 9"/>
+          <p:cNvPr id="3" name="TextBox 2"/>
           <p:cNvSpPr txBox="1"/>
           <p:nvPr/>
         </p:nvSpPr>
         <p:spPr>
           <a:xfrm>
-            <a:off x="9098280" y="1645920"/>
-            <a:ext cx="2194560" cy="4389120"/>
+            <a:off x="1280160" y="1188720"/>
+            <a:ext cx="9601200" cy="4389120"/>
           </a:xfrm>
           <a:prstGeom prst="rect">
             <a:avLst/>
@@ -8998,89 +7594,98 @@
           <a:lstStyle/>
           <a:p>
             <a:pPr>
+              <a:spcAft>
+                <a:spcPts val="800"/>
+              </a:spcAft>
+              <a:defRPr sz="1400" b="1">
+                <a:solidFill>
+                  <a:srgbClr val="2DD4BF"/>
+                </a:solidFill>
+              </a:defRPr>
+            </a:pPr>
+            <a:r>
+              <a:t>💧 ยกระดับระบบตรวจวัดและบริหารจัดการคุณภาพน้ำสู่อนาคต</a:t>
+            </a:r>
+          </a:p>
+          <a:p>
+            <a:pPr>
+              <a:spcAft>
+                <a:spcPts val="800"/>
+              </a:spcAft>
+              <a:defRPr sz="3200" b="1">
+                <a:solidFill>
+                  <a:srgbClr val="FFFFFF"/>
+                </a:solidFill>
+              </a:defRPr>
+            </a:pPr>
+            <a:r>
+              <a:t>NCT WATER NEXUS PRO</a:t>
+            </a:r>
+          </a:p>
+          <a:p>
+            <a:pPr>
+              <a:spcAft>
+                <a:spcPts val="2400"/>
+              </a:spcAft>
+              <a:defRPr sz="1400">
+                <a:solidFill>
+                  <a:srgbClr val="CBD5E1"/>
+                </a:solidFill>
+              </a:defRPr>
+            </a:pPr>
+            <a:r>
+              <a:t>พร้อมให้คำปรึกษา ออกแบบระบบ และจัดทำใบเสนอราคาตามจำนวนชุดที่ท่านต้องการ</a:t>
+            </a:r>
+          </a:p>
+          <a:p>
+            <a:pPr>
               <a:defRPr b="1" sz="1300">
                 <a:solidFill>
-                  <a:srgbClr val="0284C7"/>
-                </a:solidFill>
-              </a:defRPr>
-            </a:pPr>
-            <a:r>
-              <a:t>WEEK 04</a:t>
+                  <a:srgbClr val="FFFFFF"/>
+                </a:solidFill>
+              </a:defRPr>
+            </a:pPr>
+            <a:r>
+              <a:t>✨ สรุปทางเลือกการลงทุน:</a:t>
             </a:r>
           </a:p>
           <a:p>
             <a:pPr>
               <a:spcAft>
-                <a:spcPts val="1200"/>
+                <a:spcPts val="2800"/>
               </a:spcAft>
-              <a:defRPr b="1" sz="1200">
-                <a:solidFill>
-                  <a:srgbClr val="0F172A"/>
-                </a:solidFill>
-              </a:defRPr>
-            </a:pPr>
-            <a:r>
-              <a:t>อบรมและส่งมอบโครงการ (Commissioning)</a:t>
-            </a:r>
-          </a:p>
-          <a:p>
-            <a:pPr>
-              <a:spcAft>
-                <a:spcPts val="600"/>
-              </a:spcAft>
-              <a:defRPr sz="1000">
-                <a:solidFill>
-                  <a:srgbClr val="64748B"/>
-                </a:solidFill>
-              </a:defRPr>
-            </a:pPr>
-            <a:r>
-              <a:t>• ทดสอบการทำงานต่อเนื่อง 72 ชั่วโมง (Trial Run)</a:t>
-            </a:r>
-          </a:p>
-          <a:p>
-            <a:pPr>
-              <a:spcAft>
-                <a:spcPts val="600"/>
-              </a:spcAft>
-              <a:defRPr sz="1000">
-                <a:solidFill>
-                  <a:srgbClr val="64748B"/>
-                </a:solidFill>
-              </a:defRPr>
-            </a:pPr>
-            <a:r>
-              <a:t>• อบรมการใช้งาน Dashboard สำหรับทีมวิศวกร</a:t>
-            </a:r>
-          </a:p>
-          <a:p>
-            <a:pPr>
-              <a:spcAft>
-                <a:spcPts val="600"/>
-              </a:spcAft>
-              <a:defRPr sz="1000">
-                <a:solidFill>
-                  <a:srgbClr val="64748B"/>
-                </a:solidFill>
-              </a:defRPr>
-            </a:pPr>
-            <a:r>
-              <a:t>• ส่งมอบคู่มือการบำรุงรักษาและเอกสารรับประกัน</a:t>
-            </a:r>
-          </a:p>
-          <a:p>
-            <a:pPr>
-              <a:spcAft>
-                <a:spcPts val="600"/>
-              </a:spcAft>
-              <a:defRPr sz="1000">
-                <a:solidFill>
-                  <a:srgbClr val="64748B"/>
-                </a:solidFill>
-              </a:defRPr>
-            </a:pPr>
-            <a:r>
-              <a:t>• เริ่มนับระยะเวลารับประกันโครงการ (Go-Live)</a:t>
+              <a:defRPr sz="1150">
+                <a:solidFill>
+                  <a:srgbClr val="E2E8F0"/>
+                </a:solidFill>
+              </a:defRPr>
+            </a:pPr>
+            <a:r>
+              <a:t>• สั่งซื้อ &lt; 100 ชุด: ซื้อขาด ฿24,900 – ฿79,000  |  รายปี ฿12,000 – ฿39,000 / ปี</a:t>
+            </a:r>
+            <a:br/>
+            <a:r>
+              <a:t>• สั่งซื้อ ≥ 100 ชุด (Bulk): ซื้อขาด ฿16,900 – ฿55,000  |  รายปี ฿8,400 – ฿27,000 / ปี</a:t>
+            </a:r>
+            <a:br/>
+            <a:r>
+              <a:t>• ทดลองดูหน้าจอ Dashboard ออนไลน์สดได้ที่: https://woobwarb.github.io/nct-water-nexus/</a:t>
+            </a:r>
+          </a:p>
+          <a:p>
+            <a:pPr>
+              <a:defRPr sz="1200" b="1">
+                <a:solidFill>
+                  <a:srgbClr val="2DD4BF"/>
+                </a:solidFill>
+              </a:defRPr>
+            </a:pPr>
+            <a:r>
+              <a:t>📞 สนใจสอบถามข้อมูลเพิ่มเติมและขอใบเสนอราคา (Request for Quotation):</a:t>
+            </a:r>
+            <a:br/>
+            <a:r>
+              <a:t>• Email: sales@nct-water.com  |  Tel: 02-XXX-XXXX, 08X-XXX-XXXX  |  Line: @nctwater</a:t>
             </a:r>
           </a:p>
         </p:txBody>

--- a/NCT_Water_Nexus_Report_and_Pricing.pptx
+++ b/NCT_Water_Nexus_Report_and_Pricing.pptx
@@ -3181,7 +3181,7 @@
               </a:defRPr>
             </a:pPr>
             <a:r>
-              <a:t>💧 ONLINE SMART WATER MONITORING &amp; TELEMETRY</a:t>
+              <a:t>💧 ENTERPRISE IOT WATER QUALITY MONITORING SOLUTION</a:t>
             </a:r>
           </a:p>
           <a:p>
@@ -3211,7 +3211,7 @@
               </a:defRPr>
             </a:pPr>
             <a:r>
-              <a:t>Smart Water Quality Intelligence &amp; Real-Time Telemetry Platform</a:t>
+              <a:t>100-Node Scalable Water Quality Intelligence &amp; Telemetry Solution</a:t>
             </a:r>
           </a:p>
           <a:p>
@@ -3226,11 +3226,11 @@
               </a:defRPr>
             </a:pPr>
             <a:r>
-              <a:t>ข้อเสนอราคาและโมเดลการลงทุน: 【 ซื้อขาด (One-Time) 】 vs 【 เช่าใช้รายปี (Annual Subscription) 】</a:t>
+              <a:t>โซลูชันระบบตรวจวัดคุณภาพน้ำอัจฉริยะแบบกลุ่มโครงการ (Lot of 100 Nodes Package)</a:t>
             </a:r>
             <a:br/>
             <a:r>
-              <a:t>แยกตามจำนวนสั่งซื้อ: 【 น้อยกว่า 100 ชุด (&lt;100) 】 และ 【 มากกว่า 100 ชุดขึ้นไป (≥100 Bulk Discount) 】</a:t>
+              <a:t>โครงสร้างราคา 2 รูปแบบ: 【 แบบซื้อขาด (One-Time) 】 vs 【 แบบสัญญารายปี (Annual Subscription) 】</a:t>
             </a:r>
           </a:p>
           <a:p>
@@ -3306,7 +3306,7 @@
               </a:defRPr>
             </a:pPr>
             <a:r>
-              <a:t>NCT WATER NEXUS PRO | COMMERCIAL PROPOSAL</a:t>
+              <a:t>NCT WATER NEXUS PRO | 100-NODE PROJECT SOLUTION</a:t>
             </a:r>
           </a:p>
           <a:p>
@@ -3318,7 +3318,7 @@
               </a:defRPr>
             </a:pPr>
             <a:r>
-              <a:t>สรุปภาพรวมโครงสร้างราคา 2 รูปแบบ x 2 กลุ่มจำนวน (Pricing Structure)</a:t>
+              <a:t>จุดเด่นของโซลูชันโครงการชุดละ 100 สถานี (Lot of 100 Nodes Solution)</a:t>
             </a:r>
           </a:p>
         </p:txBody>
@@ -3332,7 +3332,7 @@
         <p:spPr>
           <a:xfrm>
             <a:off x="731520" y="1463040"/>
-            <a:ext cx="5120640" cy="4754880"/>
+            <a:ext cx="2468880" cy="4754880"/>
           </a:xfrm>
           <a:prstGeom prst="roundRect">
             <a:avLst/>
@@ -3370,14 +3370,57 @@
       </p:sp>
       <p:sp>
         <p:nvSpPr>
-          <p:cNvPr id="4" name="TextBox 3"/>
+          <p:cNvPr id="4" name="Rounded Rectangle 3"/>
+          <p:cNvSpPr/>
+          <p:nvPr/>
+        </p:nvSpPr>
+        <p:spPr>
+          <a:xfrm>
+            <a:off x="731520" y="1463040"/>
+            <a:ext cx="2468880" cy="1371600"/>
+          </a:xfrm>
+          <a:prstGeom prst="roundRect">
+            <a:avLst/>
+          </a:prstGeom>
+          <a:solidFill>
+            <a:srgbClr val="0284C7"/>
+          </a:solidFill>
+          <a:ln>
+            <a:noFill/>
+          </a:ln>
+        </p:spPr>
+        <p:style>
+          <a:lnRef idx="1">
+            <a:schemeClr val="accent1"/>
+          </a:lnRef>
+          <a:fillRef idx="3">
+            <a:schemeClr val="accent1"/>
+          </a:fillRef>
+          <a:effectRef idx="2">
+            <a:schemeClr val="accent1"/>
+          </a:effectRef>
+          <a:fontRef idx="minor">
+            <a:schemeClr val="lt1"/>
+          </a:fontRef>
+        </p:style>
+        <p:txBody>
+          <a:bodyPr rtlCol="0" anchor="ctr"/>
+          <a:lstStyle/>
+          <a:p>
+            <a:pPr algn="ctr"/>
+          </a:p>
+        </p:txBody>
+      </p:sp>
+      <p:sp>
+        <p:nvSpPr>
+          <p:cNvPr id="5" name="TextBox 4"/>
           <p:cNvSpPr txBox="1"/>
           <p:nvPr/>
         </p:nvSpPr>
         <p:spPr>
           <a:xfrm>
-            <a:off x="1005840" y="1691640"/>
-            <a:ext cx="4572000" cy="4297680"/>
+            <a:off x="868680" y="1600200"/>
+            <a:ext cx="2194560" cy="1097280"/>
           </a:xfrm>
           <a:prstGeom prst="rect">
             <a:avLst/>
@@ -3391,109 +3434,75 @@
           <a:lstStyle/>
           <a:p>
             <a:pPr>
-              <a:spcAft>
-                <a:spcPts val="1200"/>
-              </a:spcAft>
+              <a:defRPr sz="900" b="1">
+                <a:solidFill>
+                  <a:srgbClr val="FFFFFF"/>
+                </a:solidFill>
+              </a:defRPr>
+            </a:pPr>
+            <a:r>
+              <a:t>ระบบรวมศูนย์ 100 จุด</a:t>
+            </a:r>
+          </a:p>
+          <a:p>
+            <a:pPr>
               <a:defRPr sz="1400" b="1">
                 <a:solidFill>
-                  <a:srgbClr val="0284C7"/>
-                </a:solidFill>
-              </a:defRPr>
-            </a:pPr>
-            <a:r>
-              <a:t>📦 กลุ่มที่ 1: จำนวนน้อยกว่า 100 ชุด (&lt; 100 Sets)</a:t>
-            </a:r>
-          </a:p>
-          <a:p>
-            <a:pPr>
-              <a:defRPr b="1" sz="1150">
-                <a:solidFill>
-                  <a:srgbClr val="0F172A"/>
-                </a:solidFill>
-              </a:defRPr>
-            </a:pPr>
-            <a:r>
-              <a:t>1. แบบซื้อขาด (Outright Purchase):</a:t>
-            </a:r>
-          </a:p>
-          <a:p>
-            <a:pPr>
-              <a:spcAft>
-                <a:spcPts val="800"/>
-              </a:spcAft>
-              <a:defRPr sz="1000">
+                  <a:srgbClr val="FFFFFF"/>
+                </a:solidFill>
+              </a:defRPr>
+            </a:pPr>
+            <a:r>
+              <a:t>🗺️ Centralized SCADA Multi-Node</a:t>
+            </a:r>
+          </a:p>
+        </p:txBody>
+      </p:sp>
+      <p:sp>
+        <p:nvSpPr>
+          <p:cNvPr id="6" name="TextBox 5"/>
+          <p:cNvSpPr txBox="1"/>
+          <p:nvPr/>
+        </p:nvSpPr>
+        <p:spPr>
+          <a:xfrm>
+            <a:off x="868680" y="3017520"/>
+            <a:ext cx="2194560" cy="3017520"/>
+          </a:xfrm>
+          <a:prstGeom prst="rect">
+            <a:avLst/>
+          </a:prstGeom>
+          <a:noFill/>
+        </p:spPr>
+        <p:txBody>
+          <a:bodyPr wrap="square">
+            <a:spAutoFit/>
+          </a:bodyPr>
+          <a:lstStyle/>
+          <a:p>
+            <a:pPr>
+              <a:defRPr sz="1050">
                 <a:solidFill>
                   <a:srgbClr val="64748B"/>
                 </a:solidFill>
               </a:defRPr>
             </a:pPr>
             <a:r>
-              <a:t>• Standard (pH + Temp): ฿24,900 / ชุด</a:t>
-            </a:r>
-            <a:br/>
-            <a:r>
-              <a:t>• Pro 4-in-1 (pH + Temp + TDS + Cl): ฿49,000 / ชุด (ยอดนิยม)</a:t>
-            </a:r>
-            <a:br/>
-            <a:r>
-              <a:t>• Enterprise 5-in-1 (+ ORP): ฿79,000 / ชุด</a:t>
-            </a:r>
-            <a:br/>
-            <a:r>
-              <a:t>  (ฟรี Cloud Dashboard 1-2 ปีแรก, ประกัน 1-2 ปี)</a:t>
-            </a:r>
-          </a:p>
-          <a:p>
-            <a:pPr>
-              <a:defRPr b="1" sz="1150">
-                <a:solidFill>
-                  <a:srgbClr val="0F172A"/>
-                </a:solidFill>
-              </a:defRPr>
-            </a:pPr>
-            <a:r>
-              <a:t>2. แบบเช่าใช้รายปี (Annual Subscription):</a:t>
-            </a:r>
-          </a:p>
-          <a:p>
-            <a:pPr>
-              <a:spcAft>
-                <a:spcPts val="800"/>
-              </a:spcAft>
-              <a:defRPr sz="1000">
-                <a:solidFill>
-                  <a:srgbClr val="64748B"/>
-                </a:solidFill>
-              </a:defRPr>
-            </a:pPr>
-            <a:r>
-              <a:t>• Standard Care: ฿12,000 / ชุด / ปี (~฿1,000/ด.)</a:t>
-            </a:r>
-            <a:br/>
-            <a:r>
-              <a:t>• Pro Care (4-in-1): ฿24,000 / ชุด / ปี (~฿2,000/ด.)</a:t>
-            </a:r>
-            <a:br/>
-            <a:r>
-              <a:t>• Enterprise Care: ฿39,000 / ชุด / ปี (~฿3,250/ด.)</a:t>
-            </a:r>
-            <a:br/>
-            <a:r>
-              <a:t>  (ฟรีเครื่อง + เซนเซอร์ + ซิม + Cloud + เปลี่ยนหัววัดฟรีตลอดสัญญา)</a:t>
-            </a:r>
-          </a:p>
-        </p:txBody>
-      </p:sp>
-      <p:sp>
-        <p:nvSpPr>
-          <p:cNvPr id="5" name="Rounded Rectangle 4"/>
+              <a:t>แดชบอร์ดแผนที่ GIS และ Grid View รวมสถานีตรวจวัดน้ำทั้ง 100 จุดไว้ในจอเดียว ตรวจเช็คสถานะ Online/Offline และค่าน้ำได้พร้อมกันแบบ Real-Time</a:t>
+            </a:r>
+          </a:p>
+        </p:txBody>
+      </p:sp>
+      <p:sp>
+        <p:nvSpPr>
+          <p:cNvPr id="7" name="Rounded Rectangle 6"/>
           <p:cNvSpPr/>
           <p:nvPr/>
         </p:nvSpPr>
         <p:spPr>
           <a:xfrm>
-            <a:off x="6309360" y="1463040"/>
-            <a:ext cx="5120640" cy="4754880"/>
+            <a:off x="3474720" y="1463040"/>
+            <a:ext cx="2468880" cy="4754880"/>
           </a:xfrm>
           <a:prstGeom prst="roundRect">
             <a:avLst/>
@@ -3531,14 +3540,57 @@
       </p:sp>
       <p:sp>
         <p:nvSpPr>
-          <p:cNvPr id="6" name="TextBox 5"/>
+          <p:cNvPr id="8" name="Rounded Rectangle 7"/>
+          <p:cNvSpPr/>
+          <p:nvPr/>
+        </p:nvSpPr>
+        <p:spPr>
+          <a:xfrm>
+            <a:off x="3474720" y="1463040"/>
+            <a:ext cx="2468880" cy="1371600"/>
+          </a:xfrm>
+          <a:prstGeom prst="roundRect">
+            <a:avLst/>
+          </a:prstGeom>
+          <a:solidFill>
+            <a:srgbClr val="059669"/>
+          </a:solidFill>
+          <a:ln>
+            <a:noFill/>
+          </a:ln>
+        </p:spPr>
+        <p:style>
+          <a:lnRef idx="1">
+            <a:schemeClr val="accent1"/>
+          </a:lnRef>
+          <a:fillRef idx="3">
+            <a:schemeClr val="accent1"/>
+          </a:fillRef>
+          <a:effectRef idx="2">
+            <a:schemeClr val="accent1"/>
+          </a:effectRef>
+          <a:fontRef idx="minor">
+            <a:schemeClr val="lt1"/>
+          </a:fontRef>
+        </p:style>
+        <p:txBody>
+          <a:bodyPr rtlCol="0" anchor="ctr"/>
+          <a:lstStyle/>
+          <a:p>
+            <a:pPr algn="ctr"/>
+          </a:p>
+        </p:txBody>
+      </p:sp>
+      <p:sp>
+        <p:nvSpPr>
+          <p:cNvPr id="9" name="TextBox 8"/>
           <p:cNvSpPr txBox="1"/>
           <p:nvPr/>
         </p:nvSpPr>
         <p:spPr>
           <a:xfrm>
-            <a:off x="6583680" y="1691640"/>
-            <a:ext cx="4572000" cy="4297680"/>
+            <a:off x="3611880" y="1600200"/>
+            <a:ext cx="2194560" cy="1097280"/>
           </a:xfrm>
           <a:prstGeom prst="rect">
             <a:avLst/>
@@ -3552,122 +3604,401 @@
           <a:lstStyle/>
           <a:p>
             <a:pPr>
-              <a:spcAft>
-                <a:spcPts val="1200"/>
-              </a:spcAft>
+              <a:defRPr sz="900" b="1">
+                <a:solidFill>
+                  <a:srgbClr val="FFFFFF"/>
+                </a:solidFill>
+              </a:defRPr>
+            </a:pPr>
+            <a:r>
+              <a:t>สลับดู 100 สถานีในมือถือ</a:t>
+            </a:r>
+          </a:p>
+          <a:p>
+            <a:pPr>
               <a:defRPr sz="1400" b="1">
                 <a:solidFill>
-                  <a:srgbClr val="059669"/>
-                </a:solidFill>
-              </a:defRPr>
-            </a:pPr>
-            <a:r>
-              <a:t>🏢 กลุ่มที่ 2: จำนวน 100 ชุดขึ้นไป (≥ 100 Sets Bulk Discount)</a:t>
-            </a:r>
-          </a:p>
-          <a:p>
-            <a:pPr>
-              <a:defRPr b="1" sz="1150">
-                <a:solidFill>
-                  <a:srgbClr val="0F172A"/>
-                </a:solidFill>
-              </a:defRPr>
-            </a:pPr>
-            <a:r>
-              <a:t>1. แบบซื้อขาดราคาส่ง (Bulk Outright - ส่วนลด ~30%):</a:t>
-            </a:r>
-          </a:p>
-          <a:p>
-            <a:pPr>
-              <a:spcAft>
-                <a:spcPts val="600"/>
-              </a:spcAft>
-              <a:defRPr sz="1000">
+                  <a:srgbClr val="FFFFFF"/>
+                </a:solidFill>
+              </a:defRPr>
+            </a:pPr>
+            <a:r>
+              <a:t>📱 Multi-Device Mobile App</a:t>
+            </a:r>
+          </a:p>
+        </p:txBody>
+      </p:sp>
+      <p:sp>
+        <p:nvSpPr>
+          <p:cNvPr id="10" name="TextBox 9"/>
+          <p:cNvSpPr txBox="1"/>
+          <p:nvPr/>
+        </p:nvSpPr>
+        <p:spPr>
+          <a:xfrm>
+            <a:off x="3611880" y="3017520"/>
+            <a:ext cx="2194560" cy="3017520"/>
+          </a:xfrm>
+          <a:prstGeom prst="rect">
+            <a:avLst/>
+          </a:prstGeom>
+          <a:noFill/>
+        </p:spPr>
+        <p:txBody>
+          <a:bodyPr wrap="square">
+            <a:spAutoFit/>
+          </a:bodyPr>
+          <a:lstStyle/>
+          <a:p>
+            <a:pPr>
+              <a:defRPr sz="1050">
                 <a:solidFill>
                   <a:srgbClr val="64748B"/>
                 </a:solidFill>
               </a:defRPr>
             </a:pPr>
             <a:r>
-              <a:t>• Standard (pH + Temp): ฿16,900 / ชุด</a:t>
-            </a:r>
-            <a:br/>
-            <a:r>
-              <a:t>• Pro 4-in-1 (pH + Temp + TDS + Cl): ฿34,500 / ชุด (ประหยัด ฿1.45 ล้าน/100ชุด)</a:t>
-            </a:r>
-            <a:br/>
-            <a:r>
-              <a:t>• Enterprise 5-in-1 (+ ORP): ฿55,000 / ชุด</a:t>
-            </a:r>
-          </a:p>
-          <a:p>
-            <a:pPr>
-              <a:defRPr b="1" sz="1150">
-                <a:solidFill>
-                  <a:srgbClr val="0F172A"/>
-                </a:solidFill>
-              </a:defRPr>
-            </a:pPr>
-            <a:r>
-              <a:t>2. แบบเช่าใช้รายปีราคาส่ง (Bulk Annual - ส่วนลด ~30%):</a:t>
-            </a:r>
-          </a:p>
-          <a:p>
-            <a:pPr>
-              <a:spcAft>
-                <a:spcPts val="600"/>
-              </a:spcAft>
-              <a:defRPr sz="1000">
+              <a:t>ผู้บริหารและวิศวกรสามารถเลือกดูข้อมูลสถานีใดก็ได้ใน 100 จุดผ่านสมาร์ทโฟน พร้อมระบบแจ้งเตือน Line Alert แยกตามโซนพื้นที่</a:t>
+            </a:r>
+          </a:p>
+        </p:txBody>
+      </p:sp>
+      <p:sp>
+        <p:nvSpPr>
+          <p:cNvPr id="11" name="Rounded Rectangle 10"/>
+          <p:cNvSpPr/>
+          <p:nvPr/>
+        </p:nvSpPr>
+        <p:spPr>
+          <a:xfrm>
+            <a:off x="6217920" y="1463040"/>
+            <a:ext cx="2468880" cy="4754880"/>
+          </a:xfrm>
+          <a:prstGeom prst="roundRect">
+            <a:avLst/>
+          </a:prstGeom>
+          <a:solidFill>
+            <a:srgbClr val="FFFFFF"/>
+          </a:solidFill>
+          <a:ln w="19050">
+            <a:solidFill>
+              <a:srgbClr val="D97706"/>
+            </a:solidFill>
+          </a:ln>
+        </p:spPr>
+        <p:style>
+          <a:lnRef idx="1">
+            <a:schemeClr val="accent1"/>
+          </a:lnRef>
+          <a:fillRef idx="3">
+            <a:schemeClr val="accent1"/>
+          </a:fillRef>
+          <a:effectRef idx="2">
+            <a:schemeClr val="accent1"/>
+          </a:effectRef>
+          <a:fontRef idx="minor">
+            <a:schemeClr val="lt1"/>
+          </a:fontRef>
+        </p:style>
+        <p:txBody>
+          <a:bodyPr rtlCol="0" anchor="ctr"/>
+          <a:lstStyle/>
+          <a:p>
+            <a:pPr algn="ctr"/>
+          </a:p>
+        </p:txBody>
+      </p:sp>
+      <p:sp>
+        <p:nvSpPr>
+          <p:cNvPr id="12" name="Rounded Rectangle 11"/>
+          <p:cNvSpPr/>
+          <p:nvPr/>
+        </p:nvSpPr>
+        <p:spPr>
+          <a:xfrm>
+            <a:off x="6217920" y="1463040"/>
+            <a:ext cx="2468880" cy="1371600"/>
+          </a:xfrm>
+          <a:prstGeom prst="roundRect">
+            <a:avLst/>
+          </a:prstGeom>
+          <a:solidFill>
+            <a:srgbClr val="D97706"/>
+          </a:solidFill>
+          <a:ln>
+            <a:noFill/>
+          </a:ln>
+        </p:spPr>
+        <p:style>
+          <a:lnRef idx="1">
+            <a:schemeClr val="accent1"/>
+          </a:lnRef>
+          <a:fillRef idx="3">
+            <a:schemeClr val="accent1"/>
+          </a:fillRef>
+          <a:effectRef idx="2">
+            <a:schemeClr val="accent1"/>
+          </a:effectRef>
+          <a:fontRef idx="minor">
+            <a:schemeClr val="lt1"/>
+          </a:fontRef>
+        </p:style>
+        <p:txBody>
+          <a:bodyPr rtlCol="0" anchor="ctr"/>
+          <a:lstStyle/>
+          <a:p>
+            <a:pPr algn="ctr"/>
+          </a:p>
+        </p:txBody>
+      </p:sp>
+      <p:sp>
+        <p:nvSpPr>
+          <p:cNvPr id="13" name="TextBox 12"/>
+          <p:cNvSpPr txBox="1"/>
+          <p:nvPr/>
+        </p:nvSpPr>
+        <p:spPr>
+          <a:xfrm>
+            <a:off x="6355080" y="1600200"/>
+            <a:ext cx="2194560" cy="1097280"/>
+          </a:xfrm>
+          <a:prstGeom prst="rect">
+            <a:avLst/>
+          </a:prstGeom>
+          <a:noFill/>
+        </p:spPr>
+        <p:txBody>
+          <a:bodyPr wrap="square">
+            <a:spAutoFit/>
+          </a:bodyPr>
+          <a:lstStyle/>
+          <a:p>
+            <a:pPr>
+              <a:defRPr sz="900" b="1">
+                <a:solidFill>
+                  <a:srgbClr val="FFFFFF"/>
+                </a:solidFill>
+              </a:defRPr>
+            </a:pPr>
+            <a:r>
+              <a:t>ติดแบรนด์และโลโก้ลูกค้า</a:t>
+            </a:r>
+          </a:p>
+          <a:p>
+            <a:pPr>
+              <a:defRPr sz="1400" b="1">
+                <a:solidFill>
+                  <a:srgbClr val="FFFFFF"/>
+                </a:solidFill>
+              </a:defRPr>
+            </a:pPr>
+            <a:r>
+              <a:t>🏷️ White-Label Branding</a:t>
+            </a:r>
+          </a:p>
+        </p:txBody>
+      </p:sp>
+      <p:sp>
+        <p:nvSpPr>
+          <p:cNvPr id="14" name="TextBox 13"/>
+          <p:cNvSpPr txBox="1"/>
+          <p:nvPr/>
+        </p:nvSpPr>
+        <p:spPr>
+          <a:xfrm>
+            <a:off x="6355080" y="3017520"/>
+            <a:ext cx="2194560" cy="3017520"/>
+          </a:xfrm>
+          <a:prstGeom prst="rect">
+            <a:avLst/>
+          </a:prstGeom>
+          <a:noFill/>
+        </p:spPr>
+        <p:txBody>
+          <a:bodyPr wrap="square">
+            <a:spAutoFit/>
+          </a:bodyPr>
+          <a:lstStyle/>
+          <a:p>
+            <a:pPr>
+              <a:defRPr sz="1050">
                 <a:solidFill>
                   <a:srgbClr val="64748B"/>
                 </a:solidFill>
               </a:defRPr>
             </a:pPr>
             <a:r>
-              <a:t>• Standard Care: ฿8,400 / ชุด / ปี (~฿700/ด.)</a:t>
-            </a:r>
-            <a:br/>
-            <a:r>
-              <a:t>• Pro Care (4-in-1): ฿16,800 / ชุด / ปี (~฿1,400/ด.)</a:t>
-            </a:r>
-            <a:br/>
-            <a:r>
-              <a:t>• Enterprise Care: ฿27,000 / ชุด / ปี (~฿2,250/ด.)</a:t>
-            </a:r>
-          </a:p>
-          <a:p>
-            <a:pPr>
-              <a:defRPr b="1" sz="1150">
-                <a:solidFill>
-                  <a:srgbClr val="0F172A"/>
-                </a:solidFill>
-              </a:defRPr>
-            </a:pPr>
-            <a:r>
-              <a:t>🌟 สิทธิพิเศษสำหรับยอดสั่งซื้อ 100+ ชุด:</a:t>
-            </a:r>
-          </a:p>
-          <a:p>
-            <a:pPr>
-              <a:spcAft>
-                <a:spcPts val="600"/>
-              </a:spcAft>
-              <a:defRPr sz="1000">
+              <a:t>ฟรีสกรีนโลโก้และชื่อโครงการของลูกค้าบนตู้ควบคุมคอนโทรลเลอร์ทั้ง 100 ชุด และปรับแต่ง UI แดชบอร์ดตามอัตลักษณ์ขององค์กร</a:t>
+            </a:r>
+          </a:p>
+        </p:txBody>
+      </p:sp>
+      <p:sp>
+        <p:nvSpPr>
+          <p:cNvPr id="15" name="Rounded Rectangle 14"/>
+          <p:cNvSpPr/>
+          <p:nvPr/>
+        </p:nvSpPr>
+        <p:spPr>
+          <a:xfrm>
+            <a:off x="8961120" y="1463040"/>
+            <a:ext cx="2468880" cy="4754880"/>
+          </a:xfrm>
+          <a:prstGeom prst="roundRect">
+            <a:avLst/>
+          </a:prstGeom>
+          <a:solidFill>
+            <a:srgbClr val="FFFFFF"/>
+          </a:solidFill>
+          <a:ln w="19050">
+            <a:solidFill>
+              <a:srgbClr val="1E293B"/>
+            </a:solidFill>
+          </a:ln>
+        </p:spPr>
+        <p:style>
+          <a:lnRef idx="1">
+            <a:schemeClr val="accent1"/>
+          </a:lnRef>
+          <a:fillRef idx="3">
+            <a:schemeClr val="accent1"/>
+          </a:fillRef>
+          <a:effectRef idx="2">
+            <a:schemeClr val="accent1"/>
+          </a:effectRef>
+          <a:fontRef idx="minor">
+            <a:schemeClr val="lt1"/>
+          </a:fontRef>
+        </p:style>
+        <p:txBody>
+          <a:bodyPr rtlCol="0" anchor="ctr"/>
+          <a:lstStyle/>
+          <a:p>
+            <a:pPr algn="ctr"/>
+          </a:p>
+        </p:txBody>
+      </p:sp>
+      <p:sp>
+        <p:nvSpPr>
+          <p:cNvPr id="16" name="Rounded Rectangle 15"/>
+          <p:cNvSpPr/>
+          <p:nvPr/>
+        </p:nvSpPr>
+        <p:spPr>
+          <a:xfrm>
+            <a:off x="8961120" y="1463040"/>
+            <a:ext cx="2468880" cy="1371600"/>
+          </a:xfrm>
+          <a:prstGeom prst="roundRect">
+            <a:avLst/>
+          </a:prstGeom>
+          <a:solidFill>
+            <a:srgbClr val="1E293B"/>
+          </a:solidFill>
+          <a:ln>
+            <a:noFill/>
+          </a:ln>
+        </p:spPr>
+        <p:style>
+          <a:lnRef idx="1">
+            <a:schemeClr val="accent1"/>
+          </a:lnRef>
+          <a:fillRef idx="3">
+            <a:schemeClr val="accent1"/>
+          </a:fillRef>
+          <a:effectRef idx="2">
+            <a:schemeClr val="accent1"/>
+          </a:effectRef>
+          <a:fontRef idx="minor">
+            <a:schemeClr val="lt1"/>
+          </a:fontRef>
+        </p:style>
+        <p:txBody>
+          <a:bodyPr rtlCol="0" anchor="ctr"/>
+          <a:lstStyle/>
+          <a:p>
+            <a:pPr algn="ctr"/>
+          </a:p>
+        </p:txBody>
+      </p:sp>
+      <p:sp>
+        <p:nvSpPr>
+          <p:cNvPr id="17" name="TextBox 16"/>
+          <p:cNvSpPr txBox="1"/>
+          <p:nvPr/>
+        </p:nvSpPr>
+        <p:spPr>
+          <a:xfrm>
+            <a:off x="9098280" y="1600200"/>
+            <a:ext cx="2194560" cy="1097280"/>
+          </a:xfrm>
+          <a:prstGeom prst="rect">
+            <a:avLst/>
+          </a:prstGeom>
+          <a:noFill/>
+        </p:spPr>
+        <p:txBody>
+          <a:bodyPr wrap="square">
+            <a:spAutoFit/>
+          </a:bodyPr>
+          <a:lstStyle/>
+          <a:p>
+            <a:pPr>
+              <a:defRPr sz="900" b="1">
+                <a:solidFill>
+                  <a:srgbClr val="FFFFFF"/>
+                </a:solidFill>
+              </a:defRPr>
+            </a:pPr>
+            <a:r>
+              <a:t>อะไหล่สำรอง &amp; ทีมดูแล</a:t>
+            </a:r>
+          </a:p>
+          <a:p>
+            <a:pPr>
+              <a:defRPr sz="1400" b="1">
+                <a:solidFill>
+                  <a:srgbClr val="FFFFFF"/>
+                </a:solidFill>
+              </a:defRPr>
+            </a:pPr>
+            <a:r>
+              <a:t>🛡️ 5% Spare Units &amp; On-site SLA</a:t>
+            </a:r>
+          </a:p>
+        </p:txBody>
+      </p:sp>
+      <p:sp>
+        <p:nvSpPr>
+          <p:cNvPr id="18" name="TextBox 17"/>
+          <p:cNvSpPr txBox="1"/>
+          <p:nvPr/>
+        </p:nvSpPr>
+        <p:spPr>
+          <a:xfrm>
+            <a:off x="9098280" y="3017520"/>
+            <a:ext cx="2194560" cy="3017520"/>
+          </a:xfrm>
+          <a:prstGeom prst="rect">
+            <a:avLst/>
+          </a:prstGeom>
+          <a:noFill/>
+        </p:spPr>
+        <p:txBody>
+          <a:bodyPr wrap="square">
+            <a:spAutoFit/>
+          </a:bodyPr>
+          <a:lstStyle/>
+          <a:p>
+            <a:pPr>
+              <a:defRPr sz="1050">
                 <a:solidFill>
                   <a:srgbClr val="64748B"/>
                 </a:solidFill>
               </a:defRPr>
             </a:pPr>
             <a:r>
-              <a:t>• ฟรี Private Cloud Server &amp; Custom Domain</a:t>
-            </a:r>
-            <a:br/>
-            <a:r>
-              <a:t>• ฟรีสกรีนโลโก้แบรนด์ลูกค้าบนเครื่อง &amp; Dashboard (White-label)</a:t>
-            </a:r>
-            <a:br/>
-            <a:r>
-              <a:t>• ฟรีเครื่องสำรอง Spare Units ประจำไซต์ 5% ทันที</a:t>
+              <a:t>ส่งมอบเครื่องและเซนเซอร์สำรองฉุกเฉินประจำไซต์งาน 5 ชุด (5%) พร้อมทีมวิศวกรเข้าอบรมช่างเทคนิคและดูแลตลอดโครงการ</a:t>
             </a:r>
           </a:p>
         </p:txBody>
@@ -3731,7 +4062,7 @@
               </a:defRPr>
             </a:pPr>
             <a:r>
-              <a:t>NCT WATER NEXUS PRO | COMMERCIAL PROPOSAL</a:t>
+              <a:t>NCT WATER NEXUS PRO | 100-NODE PROJECT SOLUTION</a:t>
             </a:r>
           </a:p>
           <a:p>
@@ -3743,7 +4074,7 @@
               </a:defRPr>
             </a:pPr>
             <a:r>
-              <a:t>ตารางเปรียบเทียบราคาขาย: ซื้อขาด vs รายปี (&lt;100 ชุด และ ≥100 ชุด)</a:t>
+              <a:t>ตารางราคาจำหน่าย: ราคาต่อชุด (&lt;100) vs แพ็กเกจโครงการ 100 ชุด (Lot of 100)</a:t>
             </a:r>
           </a:p>
         </p:txBody>
@@ -3787,7 +4118,7 @@
                         </a:defRPr>
                       </a:pPr>
                       <a:r>
-                        <a:t>ระดับแพ็กเกจ (Package Tier)</a:t>
+                        <a:t>ระดับแพ็กเกจ (Tier)</a:t>
                       </a:r>
                     </a:p>
                   </a:txBody>
@@ -3810,7 +4141,7 @@
                         </a:defRPr>
                       </a:pPr>
                       <a:r>
-                        <a:t>ซื้อขาด (&lt;100 ชุด)</a:t>
+                        <a:t>ซื้อขาด (&lt; 100 ชุด)</a:t>
                       </a:r>
                     </a:p>
                   </a:txBody>
@@ -3833,7 +4164,7 @@
                         </a:defRPr>
                       </a:pPr>
                       <a:r>
-                        <a:t>ซื้อขาด (≥100 ชุด)</a:t>
+                        <a:t>ซื้อขาด (Lot 100 ชุด)</a:t>
                       </a:r>
                     </a:p>
                   </a:txBody>
@@ -3856,7 +4187,7 @@
                         </a:defRPr>
                       </a:pPr>
                       <a:r>
-                        <a:t>รายปี (&lt;100 ชุด)</a:t>
+                        <a:t>รายปี (&lt; 100 ชุด)</a:t>
                       </a:r>
                     </a:p>
                   </a:txBody>
@@ -3879,7 +4210,7 @@
                         </a:defRPr>
                       </a:pPr>
                       <a:r>
-                        <a:t>รายปี (≥100 ชุด)</a:t>
+                        <a:t>รายปี (Lot 100 ชุด/ปี)</a:t>
                       </a:r>
                     </a:p>
                   </a:txBody>
@@ -3897,7 +4228,7 @@
                     <a:lstStyle/>
                     <a:p>
                       <a:pPr>
-                        <a:defRPr sz="1000">
+                        <a:defRPr sz="950">
                           <a:solidFill>
                             <a:srgbClr val="0F172A"/>
                           </a:solidFill>
@@ -3920,7 +4251,7 @@
                     <a:lstStyle/>
                     <a:p>
                       <a:pPr algn="ctr">
-                        <a:defRPr sz="1000" b="1">
+                        <a:defRPr sz="950" b="1">
                           <a:solidFill>
                             <a:srgbClr val="0284C7"/>
                           </a:solidFill>
@@ -3943,14 +4274,18 @@
                     <a:lstStyle/>
                     <a:p>
                       <a:pPr algn="ctr">
-                        <a:defRPr sz="1000" b="1">
+                        <a:defRPr sz="950" b="1">
                           <a:solidFill>
                             <a:srgbClr val="0284C7"/>
                           </a:solidFill>
                         </a:defRPr>
                       </a:pPr>
                       <a:r>
-                        <a:t>฿16,900 / ชุด</a:t>
+                        <a:t>฿2,190,000 / Lot</a:t>
+                      </a:r>
+                      <a:br/>
+                      <a:r>
+                        <a:t>(฿21,900/ชุด)</a:t>
                       </a:r>
                     </a:p>
                   </a:txBody>
@@ -3966,14 +4301,14 @@
                     <a:lstStyle/>
                     <a:p>
                       <a:pPr algn="ctr">
-                        <a:defRPr sz="1000" b="1">
+                        <a:defRPr sz="950" b="1">
                           <a:solidFill>
                             <a:srgbClr val="059669"/>
                           </a:solidFill>
                         </a:defRPr>
                       </a:pPr>
                       <a:r>
-                        <a:t>฿12,000 / ปี</a:t>
+                        <a:t>฿12,000 / ชุด / ปี</a:t>
                       </a:r>
                     </a:p>
                   </a:txBody>
@@ -3989,14 +4324,18 @@
                     <a:lstStyle/>
                     <a:p>
                       <a:pPr algn="ctr">
-                        <a:defRPr sz="1000" b="1">
+                        <a:defRPr sz="950" b="1">
                           <a:solidFill>
                             <a:srgbClr val="059669"/>
                           </a:solidFill>
                         </a:defRPr>
                       </a:pPr>
                       <a:r>
-                        <a:t>฿8,400 / ปี (~฿700/ด.)</a:t>
+                        <a:t>฿1,050,000 / Lot / ปี</a:t>
+                      </a:r>
+                      <a:br/>
+                      <a:r>
+                        <a:t>(฿10,500/ชุด/ปี)</a:t>
                       </a:r>
                     </a:p>
                   </a:txBody>
@@ -4014,7 +4353,7 @@
                     <a:lstStyle/>
                     <a:p>
                       <a:pPr>
-                        <a:defRPr sz="1000">
+                        <a:defRPr sz="950">
                           <a:solidFill>
                             <a:srgbClr val="0F172A"/>
                           </a:solidFill>
@@ -4037,7 +4376,7 @@
                     <a:lstStyle/>
                     <a:p>
                       <a:pPr algn="ctr">
-                        <a:defRPr sz="1000" b="1">
+                        <a:defRPr sz="950" b="1">
                           <a:solidFill>
                             <a:srgbClr val="0284C7"/>
                           </a:solidFill>
@@ -4060,14 +4399,18 @@
                     <a:lstStyle/>
                     <a:p>
                       <a:pPr algn="ctr">
-                        <a:defRPr sz="1000" b="1">
+                        <a:defRPr sz="950" b="1">
                           <a:solidFill>
                             <a:srgbClr val="0284C7"/>
                           </a:solidFill>
                         </a:defRPr>
                       </a:pPr>
                       <a:r>
-                        <a:t>฿34,500 / ชุด</a:t>
+                        <a:t>฿4,250,000 / Lot</a:t>
+                      </a:r>
+                      <a:br/>
+                      <a:r>
+                        <a:t>(฿42,500/ชุด)</a:t>
                       </a:r>
                     </a:p>
                   </a:txBody>
@@ -4083,14 +4426,14 @@
                     <a:lstStyle/>
                     <a:p>
                       <a:pPr algn="ctr">
-                        <a:defRPr sz="1000" b="1">
+                        <a:defRPr sz="950" b="1">
                           <a:solidFill>
                             <a:srgbClr val="059669"/>
                           </a:solidFill>
                         </a:defRPr>
                       </a:pPr>
                       <a:r>
-                        <a:t>฿24,000 / ปี</a:t>
+                        <a:t>฿24,000 / ชุด / ปี</a:t>
                       </a:r>
                     </a:p>
                   </a:txBody>
@@ -4106,14 +4449,18 @@
                     <a:lstStyle/>
                     <a:p>
                       <a:pPr algn="ctr">
-                        <a:defRPr sz="1000" b="1">
+                        <a:defRPr sz="950" b="1">
                           <a:solidFill>
                             <a:srgbClr val="059669"/>
                           </a:solidFill>
                         </a:defRPr>
                       </a:pPr>
                       <a:r>
-                        <a:t>฿16,800 / ปี (~฿1,400/ด.)</a:t>
+                        <a:t>฿2,100,000 / Lot / ปี</a:t>
+                      </a:r>
+                      <a:br/>
+                      <a:r>
+                        <a:t>(฿21,000/ชุด/ปี)</a:t>
                       </a:r>
                     </a:p>
                   </a:txBody>
@@ -4131,7 +4478,7 @@
                     <a:lstStyle/>
                     <a:p>
                       <a:pPr>
-                        <a:defRPr sz="1000">
+                        <a:defRPr sz="950">
                           <a:solidFill>
                             <a:srgbClr val="0F172A"/>
                           </a:solidFill>
@@ -4154,7 +4501,7 @@
                     <a:lstStyle/>
                     <a:p>
                       <a:pPr algn="ctr">
-                        <a:defRPr sz="1000" b="1">
+                        <a:defRPr sz="950" b="1">
                           <a:solidFill>
                             <a:srgbClr val="0284C7"/>
                           </a:solidFill>
@@ -4177,14 +4524,18 @@
                     <a:lstStyle/>
                     <a:p>
                       <a:pPr algn="ctr">
-                        <a:defRPr sz="1000" b="1">
+                        <a:defRPr sz="950" b="1">
                           <a:solidFill>
                             <a:srgbClr val="0284C7"/>
                           </a:solidFill>
                         </a:defRPr>
                       </a:pPr>
                       <a:r>
-                        <a:t>฿55,000 / ชุด</a:t>
+                        <a:t>฿6,900,000 / Lot</a:t>
+                      </a:r>
+                      <a:br/>
+                      <a:r>
+                        <a:t>(฿69,000/ชุด)</a:t>
                       </a:r>
                     </a:p>
                   </a:txBody>
@@ -4200,14 +4551,14 @@
                     <a:lstStyle/>
                     <a:p>
                       <a:pPr algn="ctr">
-                        <a:defRPr sz="1000" b="1">
+                        <a:defRPr sz="950" b="1">
                           <a:solidFill>
                             <a:srgbClr val="059669"/>
                           </a:solidFill>
                         </a:defRPr>
                       </a:pPr>
                       <a:r>
-                        <a:t>฿39,000 / ปี</a:t>
+                        <a:t>฿39,000 / ชุด / ปี</a:t>
                       </a:r>
                     </a:p>
                   </a:txBody>
@@ -4223,14 +4574,18 @@
                     <a:lstStyle/>
                     <a:p>
                       <a:pPr algn="ctr">
-                        <a:defRPr sz="1000" b="1">
+                        <a:defRPr sz="950" b="1">
                           <a:solidFill>
                             <a:srgbClr val="059669"/>
                           </a:solidFill>
                         </a:defRPr>
                       </a:pPr>
                       <a:r>
-                        <a:t>฿27,000 / ปี (~฿2,250/ด.)</a:t>
+                        <a:t>฿3,450,000 / Lot / ปี</a:t>
+                      </a:r>
+                      <a:br/>
+                      <a:r>
+                        <a:t>(฿34,500/ชุด/ปี)</a:t>
                       </a:r>
                     </a:p>
                   </a:txBody>
@@ -4248,7 +4603,7 @@
                     <a:lstStyle/>
                     <a:p>
                       <a:pPr>
-                        <a:defRPr sz="1000">
+                        <a:defRPr sz="950">
                           <a:solidFill>
                             <a:srgbClr val="0F172A"/>
                           </a:solidFill>
@@ -4271,7 +4626,7 @@
                     <a:lstStyle/>
                     <a:p>
                       <a:pPr algn="ctr">
-                        <a:defRPr sz="1000" b="1">
+                        <a:defRPr sz="950" b="1">
                           <a:solidFill>
                             <a:srgbClr val="0284C7"/>
                           </a:solidFill>
@@ -4294,7 +4649,7 @@
                     <a:lstStyle/>
                     <a:p>
                       <a:pPr algn="ctr">
-                        <a:defRPr sz="1000" b="1">
+                        <a:defRPr sz="950" b="1">
                           <a:solidFill>
                             <a:srgbClr val="0284C7"/>
                           </a:solidFill>
@@ -4317,7 +4672,7 @@
                     <a:lstStyle/>
                     <a:p>
                       <a:pPr algn="ctr">
-                        <a:defRPr sz="1000" b="1">
+                        <a:defRPr sz="950" b="1">
                           <a:solidFill>
                             <a:srgbClr val="059669"/>
                           </a:solidFill>
@@ -4340,7 +4695,7 @@
                     <a:lstStyle/>
                     <a:p>
                       <a:pPr algn="ctr">
-                        <a:defRPr sz="1000" b="1">
+                        <a:defRPr sz="950" b="1">
                           <a:solidFill>
                             <a:srgbClr val="059669"/>
                           </a:solidFill>
@@ -4365,14 +4720,14 @@
                     <a:lstStyle/>
                     <a:p>
                       <a:pPr>
-                        <a:defRPr sz="1000">
+                        <a:defRPr sz="950">
                           <a:solidFill>
                             <a:srgbClr val="0F172A"/>
                           </a:solidFill>
                         </a:defRPr>
                       </a:pPr>
                       <a:r>
-                        <a:t>การเปลี่ยนหัววัด/อะไหล่เสื่อม</a:t>
+                        <a:t>อะไหล่สำรองหน้างาน (Spares)</a:t>
                       </a:r>
                     </a:p>
                   </a:txBody>
@@ -4388,7 +4743,7 @@
                     <a:lstStyle/>
                     <a:p>
                       <a:pPr algn="ctr">
-                        <a:defRPr sz="1000" b="1">
+                        <a:defRPr sz="950" b="1">
                           <a:solidFill>
                             <a:srgbClr val="0284C7"/>
                           </a:solidFill>
@@ -4411,14 +4766,14 @@
                     <a:lstStyle/>
                     <a:p>
                       <a:pPr algn="ctr">
-                        <a:defRPr sz="1000" b="1">
+                        <a:defRPr sz="950" b="1">
                           <a:solidFill>
                             <a:srgbClr val="0284C7"/>
                           </a:solidFill>
                         </a:defRPr>
                       </a:pPr>
                       <a:r>
-                        <a:t>ฟรีตามระยะประกัน</a:t>
+                        <a:t>ฟรีตามประกัน + Spare 5%</a:t>
                       </a:r>
                     </a:p>
                   </a:txBody>
@@ -4434,7 +4789,7 @@
                     <a:lstStyle/>
                     <a:p>
                       <a:pPr algn="ctr">
-                        <a:defRPr sz="1000" b="1">
+                        <a:defRPr sz="950" b="1">
                           <a:solidFill>
                             <a:srgbClr val="059669"/>
                           </a:solidFill>
@@ -4457,14 +4812,14 @@
                     <a:lstStyle/>
                     <a:p>
                       <a:pPr algn="ctr">
-                        <a:defRPr sz="1000" b="1">
+                        <a:defRPr sz="950" b="1">
                           <a:solidFill>
                             <a:srgbClr val="059669"/>
                           </a:solidFill>
                         </a:defRPr>
                       </a:pPr>
                       <a:r>
-                        <a:t>ฟรี 100% + อะไหล่สำรอง 5%</a:t>
+                        <a:t>ฟรี 100% + Spare 5% (5 ชุด)</a:t>
                       </a:r>
                     </a:p>
                   </a:txBody>
@@ -4482,7 +4837,7 @@
                     <a:lstStyle/>
                     <a:p>
                       <a:pPr>
-                        <a:defRPr sz="1000">
+                        <a:defRPr sz="950">
                           <a:solidFill>
                             <a:srgbClr val="0F172A"/>
                           </a:solidFill>
@@ -4505,7 +4860,7 @@
                     <a:lstStyle/>
                     <a:p>
                       <a:pPr algn="ctr">
-                        <a:defRPr sz="1000" b="1">
+                        <a:defRPr sz="950" b="1">
                           <a:solidFill>
                             <a:srgbClr val="0284C7"/>
                           </a:solidFill>
@@ -4528,14 +4883,14 @@
                     <a:lstStyle/>
                     <a:p>
                       <a:pPr algn="ctr">
-                        <a:defRPr sz="1000" b="1">
+                        <a:defRPr sz="950" b="1">
                           <a:solidFill>
                             <a:srgbClr val="0284C7"/>
                           </a:solidFill>
                         </a:defRPr>
                       </a:pPr>
                       <a:r>
-                        <a:t>ฟรี 2 ปีแรก</a:t>
+                        <a:t>ฟรี 2 ปีเต็ม (Private Server)</a:t>
                       </a:r>
                     </a:p>
                   </a:txBody>
@@ -4551,7 +4906,7 @@
                     <a:lstStyle/>
                     <a:p>
                       <a:pPr algn="ctr">
-                        <a:defRPr sz="1000" b="1">
+                        <a:defRPr sz="950" b="1">
                           <a:solidFill>
                             <a:srgbClr val="059669"/>
                           </a:solidFill>
@@ -4574,7 +4929,7 @@
                     <a:lstStyle/>
                     <a:p>
                       <a:pPr algn="ctr">
-                        <a:defRPr sz="1000" b="1">
+                        <a:defRPr sz="950" b="1">
                           <a:solidFill>
                             <a:srgbClr val="059669"/>
                           </a:solidFill>
@@ -4671,7 +5026,7 @@
               </a:defRPr>
             </a:pPr>
             <a:r>
-              <a:t>💡 สำหรับโครงการระดับ 100 ชุดขึ้นไป: มีระบบ White-Label ติดแบรนด์ของลูกค้า, Private Server และจัดทีมอบรมช่างเทคนิคประจำไซต์งานฟรี</a:t>
+              <a:t>💡 แพ็กเกจโครงการ 100 ชุด ให้ส่วนลดพิเศษโครงการ ~12-13% พร้อมจัดส่งเครื่องสำรองหน้างาน (Spare Units) 5% ทันที</a:t>
             </a:r>
           </a:p>
         </p:txBody>
@@ -4735,7 +5090,7 @@
               </a:defRPr>
             </a:pPr>
             <a:r>
-              <a:t>NCT WATER NEXUS PRO | COMMERCIAL PROPOSAL</a:t>
+              <a:t>NCT WATER NEXUS PRO | 100-NODE PROJECT SOLUTION</a:t>
             </a:r>
           </a:p>
           <a:p>
@@ -4747,7 +5102,7 @@
               </a:defRPr>
             </a:pPr>
             <a:r>
-              <a:t>สเปกเซนเซอร์ตรวจวัดคุณภาพน้ำ (High-Precision Sensor Probes)</a:t>
+              <a:t>แพ็กเกจโครงการ 100 ชุด: แบบซื้อขาด (100-Node Outright Packages)</a:t>
             </a:r>
           </a:p>
         </p:txBody>
@@ -4761,7 +5116,7 @@
         <p:spPr>
           <a:xfrm>
             <a:off x="731520" y="1463040"/>
-            <a:ext cx="2468880" cy="2926080"/>
+            <a:ext cx="3383280" cy="4754880"/>
           </a:xfrm>
           <a:prstGeom prst="roundRect">
             <a:avLst/>
@@ -4771,7 +5126,7 @@
           </a:solidFill>
           <a:ln w="19050">
             <a:solidFill>
-              <a:srgbClr val="D97706"/>
+              <a:srgbClr val="CBD5E1"/>
             </a:solidFill>
           </a:ln>
         </p:spPr>
@@ -4799,14 +5154,57 @@
       </p:sp>
       <p:sp>
         <p:nvSpPr>
-          <p:cNvPr id="4" name="TextBox 3"/>
+          <p:cNvPr id="4" name="Rounded Rectangle 3"/>
+          <p:cNvSpPr/>
+          <p:nvPr/>
+        </p:nvSpPr>
+        <p:spPr>
+          <a:xfrm>
+            <a:off x="731520" y="1463040"/>
+            <a:ext cx="3383280" cy="1188720"/>
+          </a:xfrm>
+          <a:prstGeom prst="roundRect">
+            <a:avLst/>
+          </a:prstGeom>
+          <a:solidFill>
+            <a:srgbClr val="1E293B"/>
+          </a:solidFill>
+          <a:ln>
+            <a:noFill/>
+          </a:ln>
+        </p:spPr>
+        <p:style>
+          <a:lnRef idx="1">
+            <a:schemeClr val="accent1"/>
+          </a:lnRef>
+          <a:fillRef idx="3">
+            <a:schemeClr val="accent1"/>
+          </a:fillRef>
+          <a:effectRef idx="2">
+            <a:schemeClr val="accent1"/>
+          </a:effectRef>
+          <a:fontRef idx="minor">
+            <a:schemeClr val="lt1"/>
+          </a:fontRef>
+        </p:style>
+        <p:txBody>
+          <a:bodyPr rtlCol="0" anchor="ctr"/>
+          <a:lstStyle/>
+          <a:p>
+            <a:pPr algn="ctr"/>
+          </a:p>
+        </p:txBody>
+      </p:sp>
+      <p:sp>
+        <p:nvSpPr>
+          <p:cNvPr id="5" name="TextBox 4"/>
           <p:cNvSpPr txBox="1"/>
           <p:nvPr/>
         </p:nvSpPr>
         <p:spPr>
           <a:xfrm>
-            <a:off x="868680" y="1600200"/>
-            <a:ext cx="2194560" cy="2651760"/>
+            <a:off x="914400" y="1554480"/>
+            <a:ext cx="3017520" cy="1005840"/>
           </a:xfrm>
           <a:prstGeom prst="rect">
             <a:avLst/>
@@ -4820,78 +5218,195 @@
           <a:lstStyle/>
           <a:p>
             <a:pPr>
-              <a:defRPr sz="1000" b="1">
-                <a:solidFill>
-                  <a:srgbClr val="D97706"/>
-                </a:solidFill>
-              </a:defRPr>
-            </a:pPr>
-            <a:r>
-              <a:t>SENSOR 01</a:t>
-            </a:r>
-          </a:p>
+              <a:defRPr sz="950" b="1">
+                <a:solidFill>
+                  <a:srgbClr val="2DD4BF"/>
+                </a:solidFill>
+              </a:defRPr>
+            </a:pPr>
+            <a:r>
+              <a:t>ซื้อขาด • 100 สถานี</a:t>
+            </a:r>
+          </a:p>
+          <a:p>
+            <a:pPr>
+              <a:defRPr sz="1400" b="1">
+                <a:solidFill>
+                  <a:srgbClr val="FFFFFF"/>
+                </a:solidFill>
+              </a:defRPr>
+            </a:pPr>
+            <a:r>
+              <a:t>STANDARD LOT 100</a:t>
+            </a:r>
+          </a:p>
+          <a:p>
+            <a:pPr>
+              <a:defRPr sz="2000" b="1">
+                <a:solidFill>
+                  <a:srgbClr val="FFFFFF"/>
+                </a:solidFill>
+              </a:defRPr>
+            </a:pPr>
+            <a:r>
+              <a:t>฿2,190,000</a:t>
+            </a:r>
+          </a:p>
+        </p:txBody>
+      </p:sp>
+      <p:sp>
+        <p:nvSpPr>
+          <p:cNvPr id="6" name="TextBox 5"/>
+          <p:cNvSpPr txBox="1"/>
+          <p:nvPr/>
+        </p:nvSpPr>
+        <p:spPr>
+          <a:xfrm>
+            <a:off x="914400" y="2743200"/>
+            <a:ext cx="3017520" cy="3383280"/>
+          </a:xfrm>
+          <a:prstGeom prst="rect">
+            <a:avLst/>
+          </a:prstGeom>
+          <a:noFill/>
+        </p:spPr>
+        <p:txBody>
+          <a:bodyPr wrap="square">
+            <a:spAutoFit/>
+          </a:bodyPr>
+          <a:lstStyle/>
           <a:p>
             <a:pPr>
               <a:spcAft>
-                <a:spcPts val="400"/>
+                <a:spcPts val="800"/>
               </a:spcAft>
-              <a:defRPr sz="1300" b="1">
+              <a:defRPr sz="900" b="1">
+                <a:solidFill>
+                  <a:srgbClr val="0284C7"/>
+                </a:solidFill>
+              </a:defRPr>
+            </a:pPr>
+            <a:r>
+              <a:t>ตรวจวัด pH + Temp รวม 100 จุด (เฉลี่ย ฿21,900 / จุด)</a:t>
+            </a:r>
+          </a:p>
+          <a:p>
+            <a:pPr>
+              <a:spcAft>
+                <a:spcPts val="300"/>
+              </a:spcAft>
+              <a:defRPr sz="900">
                 <a:solidFill>
                   <a:srgbClr val="0F172A"/>
                 </a:solidFill>
               </a:defRPr>
             </a:pPr>
             <a:r>
-              <a:t>อุณหภูมิน้ำ (Water Temp)</a:t>
+              <a:t>✓ 100x ตู้ควบคุม NCT WiFi Node</a:t>
             </a:r>
           </a:p>
           <a:p>
             <a:pPr>
               <a:spcAft>
-                <a:spcPts val="600"/>
+                <a:spcPts val="300"/>
               </a:spcAft>
-              <a:defRPr sz="1050" b="1">
-                <a:solidFill>
-                  <a:srgbClr val="D97706"/>
-                </a:solidFill>
-              </a:defRPr>
-            </a:pPr>
-            <a:r>
-              <a:t>หัววัด: PT1000 Platinum RTD</a:t>
-            </a:r>
-          </a:p>
-          <a:p>
-            <a:pPr>
-              <a:defRPr sz="950">
-                <a:solidFill>
-                  <a:srgbClr val="64748B"/>
-                </a:solidFill>
-              </a:defRPr>
-            </a:pPr>
-            <a:r>
-              <a:t>ช่วงวัด: 0.0 - 50.0°C</a:t>
-            </a:r>
-            <a:br/>
-            <a:r>
-              <a:t>ความละเอียด: ±0.1°C</a:t>
-            </a:r>
-            <a:br/>
-            <a:r>
-              <a:t>ฟังก์ชัน: ระบบชดเชยอุณหภูมิอัตโนมัติ (ATC Compensation) เพื่อความเที่ยงตรงสูงสุดของค่า pH &amp; TDS</a:t>
-            </a:r>
-          </a:p>
-        </p:txBody>
-      </p:sp>
-      <p:sp>
-        <p:nvSpPr>
-          <p:cNvPr id="5" name="Rounded Rectangle 4"/>
+              <a:defRPr sz="900">
+                <a:solidFill>
+                  <a:srgbClr val="0F172A"/>
+                </a:solidFill>
+              </a:defRPr>
+            </a:pPr>
+            <a:r>
+              <a:t>✓ 100x หัววัด pH แก้วอุตสาหกรรม (±0.01 pH)</a:t>
+            </a:r>
+          </a:p>
+          <a:p>
+            <a:pPr>
+              <a:spcAft>
+                <a:spcPts val="300"/>
+              </a:spcAft>
+              <a:defRPr sz="900">
+                <a:solidFill>
+                  <a:srgbClr val="0F172A"/>
+                </a:solidFill>
+              </a:defRPr>
+            </a:pPr>
+            <a:r>
+              <a:t>✓ 100x หัววัดอุณหภูมิ PT1000 (พร้อม ATC)</a:t>
+            </a:r>
+          </a:p>
+          <a:p>
+            <a:pPr>
+              <a:spcAft>
+                <a:spcPts val="300"/>
+              </a:spcAft>
+              <a:defRPr sz="900">
+                <a:solidFill>
+                  <a:srgbClr val="0F172A"/>
+                </a:solidFill>
+              </a:defRPr>
+            </a:pPr>
+            <a:r>
+              <a:t>✓ รวม Dashboard รวมศูนย์ 100 จุด (GIS Map)</a:t>
+            </a:r>
+          </a:p>
+          <a:p>
+            <a:pPr>
+              <a:spcAft>
+                <a:spcPts val="300"/>
+              </a:spcAft>
+              <a:defRPr sz="900">
+                <a:solidFill>
+                  <a:srgbClr val="0F172A"/>
+                </a:solidFill>
+              </a:defRPr>
+            </a:pPr>
+            <a:r>
+              <a:t>✓ ฟรี Cloud Server &amp; ซิม 4G ตลอด 2 ปีแรก</a:t>
+            </a:r>
+          </a:p>
+          <a:p>
+            <a:pPr>
+              <a:spcAft>
+                <a:spcPts val="300"/>
+              </a:spcAft>
+              <a:defRPr sz="900">
+                <a:solidFill>
+                  <a:srgbClr val="0F172A"/>
+                </a:solidFill>
+              </a:defRPr>
+            </a:pPr>
+            <a:r>
+              <a:t>✓ แถมฟรีชุดสำรองหน้างาน Spare Units 5 ชุด</a:t>
+            </a:r>
+          </a:p>
+          <a:p>
+            <a:pPr>
+              <a:spcAft>
+                <a:spcPts val="300"/>
+              </a:spcAft>
+              <a:defRPr sz="900">
+                <a:solidFill>
+                  <a:srgbClr val="0F172A"/>
+                </a:solidFill>
+              </a:defRPr>
+            </a:pPr>
+            <a:r>
+              <a:t>✓ รับประกันอุปกรณ์ 2 ปีเต็ม</a:t>
+            </a:r>
+          </a:p>
+        </p:txBody>
+      </p:sp>
+      <p:sp>
+        <p:nvSpPr>
+          <p:cNvPr id="7" name="Rounded Rectangle 6"/>
           <p:cNvSpPr/>
           <p:nvPr/>
         </p:nvSpPr>
         <p:spPr>
           <a:xfrm>
-            <a:off x="3474720" y="1463040"/>
-            <a:ext cx="2468880" cy="2926080"/>
+            <a:off x="4389120" y="1463040"/>
+            <a:ext cx="3383280" cy="4754880"/>
           </a:xfrm>
           <a:prstGeom prst="roundRect">
             <a:avLst/>
@@ -4929,14 +5444,57 @@
       </p:sp>
       <p:sp>
         <p:nvSpPr>
-          <p:cNvPr id="6" name="TextBox 5"/>
+          <p:cNvPr id="8" name="Rounded Rectangle 7"/>
+          <p:cNvSpPr/>
+          <p:nvPr/>
+        </p:nvSpPr>
+        <p:spPr>
+          <a:xfrm>
+            <a:off x="4389120" y="1463040"/>
+            <a:ext cx="3383280" cy="1188720"/>
+          </a:xfrm>
+          <a:prstGeom prst="roundRect">
+            <a:avLst/>
+          </a:prstGeom>
+          <a:solidFill>
+            <a:srgbClr val="0284C7"/>
+          </a:solidFill>
+          <a:ln>
+            <a:noFill/>
+          </a:ln>
+        </p:spPr>
+        <p:style>
+          <a:lnRef idx="1">
+            <a:schemeClr val="accent1"/>
+          </a:lnRef>
+          <a:fillRef idx="3">
+            <a:schemeClr val="accent1"/>
+          </a:fillRef>
+          <a:effectRef idx="2">
+            <a:schemeClr val="accent1"/>
+          </a:effectRef>
+          <a:fontRef idx="minor">
+            <a:schemeClr val="lt1"/>
+          </a:fontRef>
+        </p:style>
+        <p:txBody>
+          <a:bodyPr rtlCol="0" anchor="ctr"/>
+          <a:lstStyle/>
+          <a:p>
+            <a:pPr algn="ctr"/>
+          </a:p>
+        </p:txBody>
+      </p:sp>
+      <p:sp>
+        <p:nvSpPr>
+          <p:cNvPr id="9" name="TextBox 8"/>
           <p:cNvSpPr txBox="1"/>
           <p:nvPr/>
         </p:nvSpPr>
         <p:spPr>
           <a:xfrm>
-            <a:off x="3611880" y="1600200"/>
-            <a:ext cx="2194560" cy="2651760"/>
+            <a:off x="4572000" y="1554480"/>
+            <a:ext cx="3017520" cy="1005840"/>
           </a:xfrm>
           <a:prstGeom prst="rect">
             <a:avLst/>
@@ -4950,82 +5508,195 @@
           <a:lstStyle/>
           <a:p>
             <a:pPr>
-              <a:defRPr sz="1000" b="1">
+              <a:defRPr sz="950" b="1">
+                <a:solidFill>
+                  <a:srgbClr val="FFFFFF"/>
+                </a:solidFill>
+              </a:defRPr>
+            </a:pPr>
+            <a:r>
+              <a:t>★ ยอดนิยมสูงสุด</a:t>
+            </a:r>
+          </a:p>
+          <a:p>
+            <a:pPr>
+              <a:defRPr sz="1400" b="1">
+                <a:solidFill>
+                  <a:srgbClr val="FFFFFF"/>
+                </a:solidFill>
+              </a:defRPr>
+            </a:pPr>
+            <a:r>
+              <a:t>PRO TELEMETRY LOT 100</a:t>
+            </a:r>
+          </a:p>
+          <a:p>
+            <a:pPr>
+              <a:defRPr sz="2000" b="1">
+                <a:solidFill>
+                  <a:srgbClr val="FFFFFF"/>
+                </a:solidFill>
+              </a:defRPr>
+            </a:pPr>
+            <a:r>
+              <a:t>฿4,250,000</a:t>
+            </a:r>
+          </a:p>
+        </p:txBody>
+      </p:sp>
+      <p:sp>
+        <p:nvSpPr>
+          <p:cNvPr id="10" name="TextBox 9"/>
+          <p:cNvSpPr txBox="1"/>
+          <p:nvPr/>
+        </p:nvSpPr>
+        <p:spPr>
+          <a:xfrm>
+            <a:off x="4572000" y="2743200"/>
+            <a:ext cx="3017520" cy="3383280"/>
+          </a:xfrm>
+          <a:prstGeom prst="rect">
+            <a:avLst/>
+          </a:prstGeom>
+          <a:noFill/>
+        </p:spPr>
+        <p:txBody>
+          <a:bodyPr wrap="square">
+            <a:spAutoFit/>
+          </a:bodyPr>
+          <a:lstStyle/>
+          <a:p>
+            <a:pPr>
+              <a:spcAft>
+                <a:spcPts val="800"/>
+              </a:spcAft>
+              <a:defRPr sz="900" b="1">
                 <a:solidFill>
                   <a:srgbClr val="0284C7"/>
                 </a:solidFill>
               </a:defRPr>
             </a:pPr>
             <a:r>
-              <a:t>SENSOR 02</a:t>
+              <a:t>ยอดนิยม! ตรวจวัดครบ 4 ค่า รวม 100 จุด (เฉลี่ย ฿42,500 / จุด (ประหยัด ฿650,000))</a:t>
             </a:r>
           </a:p>
           <a:p>
             <a:pPr>
               <a:spcAft>
-                <a:spcPts val="400"/>
+                <a:spcPts val="300"/>
               </a:spcAft>
-              <a:defRPr sz="1300" b="1">
+              <a:defRPr sz="900">
                 <a:solidFill>
                   <a:srgbClr val="0F172A"/>
                 </a:solidFill>
               </a:defRPr>
             </a:pPr>
             <a:r>
-              <a:t>ความเป็นกรด-ด่าง (pH)</a:t>
+              <a:t>✓ 100x Heavy-Duty SCADA Node (IP67)</a:t>
             </a:r>
           </a:p>
           <a:p>
             <a:pPr>
               <a:spcAft>
-                <a:spcPts val="600"/>
+                <a:spcPts val="300"/>
               </a:spcAft>
-              <a:defRPr sz="1050" b="1">
-                <a:solidFill>
-                  <a:srgbClr val="0284C7"/>
-                </a:solidFill>
-              </a:defRPr>
-            </a:pPr>
-            <a:r>
-              <a:t>หัววัด: Industrial Glass Electrode</a:t>
-            </a:r>
-          </a:p>
-          <a:p>
-            <a:pPr>
-              <a:defRPr sz="950">
-                <a:solidFill>
-                  <a:srgbClr val="64748B"/>
-                </a:solidFill>
-              </a:defRPr>
-            </a:pPr>
-            <a:r>
-              <a:t>ช่วงวัด: 0.00 - 14.00 pH</a:t>
-            </a:r>
-            <a:br/>
-            <a:r>
-              <a:t>ความแม่นยำ: ±0.01 pH</a:t>
-            </a:r>
-            <a:br/>
-            <a:r>
-              <a:t>เกณฑ์มาตรฐาน: 6.50 - 8.50 pH</a:t>
-            </a:r>
-            <a:br/>
-            <a:r>
-              <a:t>รองรับการสอบเทียบดิจิทัล (Buffer 4.01, 7.00, 10.01)</a:t>
-            </a:r>
-          </a:p>
-        </p:txBody>
-      </p:sp>
-      <p:sp>
-        <p:nvSpPr>
-          <p:cNvPr id="7" name="Rounded Rectangle 6"/>
+              <a:defRPr sz="900">
+                <a:solidFill>
+                  <a:srgbClr val="0F172A"/>
+                </a:solidFill>
+              </a:defRPr>
+            </a:pPr>
+            <a:r>
+              <a:t>✓ 100x เซนเซอร์ 4 ค่า (pH, Temp, TDS, Cl)</a:t>
+            </a:r>
+          </a:p>
+          <a:p>
+            <a:pPr>
+              <a:spcAft>
+                <a:spcPts val="300"/>
+              </a:spcAft>
+              <a:defRPr sz="900">
+                <a:solidFill>
+                  <a:srgbClr val="0F172A"/>
+                </a:solidFill>
+              </a:defRPr>
+            </a:pPr>
+            <a:r>
+              <a:t>✓ Dual Telemetry 4G LTE + WiFi ทุกจุด</a:t>
+            </a:r>
+          </a:p>
+          <a:p>
+            <a:pPr>
+              <a:spcAft>
+                <a:spcPts val="300"/>
+              </a:spcAft>
+              <a:defRPr sz="900">
+                <a:solidFill>
+                  <a:srgbClr val="0F172A"/>
+                </a:solidFill>
+              </a:defRPr>
+            </a:pPr>
+            <a:r>
+              <a:t>✓ แบตเตอรี่สำรอง LiFePO4 ครบทั้ง 100 ตู้</a:t>
+            </a:r>
+          </a:p>
+          <a:p>
+            <a:pPr>
+              <a:spcAft>
+                <a:spcPts val="300"/>
+              </a:spcAft>
+              <a:defRPr sz="900">
+                <a:solidFill>
+                  <a:srgbClr val="0F172A"/>
+                </a:solidFill>
+              </a:defRPr>
+            </a:pPr>
+            <a:r>
+              <a:t>✓ ฟรี Private Cloud Server &amp; Custom Domain 2 ปี</a:t>
+            </a:r>
+          </a:p>
+          <a:p>
+            <a:pPr>
+              <a:spcAft>
+                <a:spcPts val="300"/>
+              </a:spcAft>
+              <a:defRPr sz="900">
+                <a:solidFill>
+                  <a:srgbClr val="0F172A"/>
+                </a:solidFill>
+              </a:defRPr>
+            </a:pPr>
+            <a:r>
+              <a:t>✓ ฟรี White-label สกรีนโลโก้ลูกค้าบน 100 ตู้</a:t>
+            </a:r>
+          </a:p>
+          <a:p>
+            <a:pPr>
+              <a:spcAft>
+                <a:spcPts val="300"/>
+              </a:spcAft>
+              <a:defRPr sz="900">
+                <a:solidFill>
+                  <a:srgbClr val="0F172A"/>
+                </a:solidFill>
+              </a:defRPr>
+            </a:pPr>
+            <a:r>
+              <a:t>✓ แถมชุดสำรอง Spare Units 5 ชุด + ประกัน 2 ปี</a:t>
+            </a:r>
+          </a:p>
+        </p:txBody>
+      </p:sp>
+      <p:sp>
+        <p:nvSpPr>
+          <p:cNvPr id="11" name="Rounded Rectangle 10"/>
           <p:cNvSpPr/>
           <p:nvPr/>
         </p:nvSpPr>
         <p:spPr>
           <a:xfrm>
-            <a:off x="6217920" y="1463040"/>
-            <a:ext cx="2468880" cy="2926080"/>
+            <a:off x="8046720" y="1463040"/>
+            <a:ext cx="3383280" cy="4754880"/>
           </a:xfrm>
           <a:prstGeom prst="roundRect">
             <a:avLst/>
@@ -5063,114 +5734,23 @@
       </p:sp>
       <p:sp>
         <p:nvSpPr>
-          <p:cNvPr id="8" name="TextBox 7"/>
-          <p:cNvSpPr txBox="1"/>
-          <p:nvPr/>
-        </p:nvSpPr>
-        <p:spPr>
-          <a:xfrm>
-            <a:off x="6355080" y="1600200"/>
-            <a:ext cx="2194560" cy="2651760"/>
-          </a:xfrm>
-          <a:prstGeom prst="rect">
-            <a:avLst/>
-          </a:prstGeom>
-          <a:noFill/>
-        </p:spPr>
-        <p:txBody>
-          <a:bodyPr wrap="square">
-            <a:spAutoFit/>
-          </a:bodyPr>
-          <a:lstStyle/>
-          <a:p>
-            <a:pPr>
-              <a:defRPr sz="1000" b="1">
-                <a:solidFill>
-                  <a:srgbClr val="059669"/>
-                </a:solidFill>
-              </a:defRPr>
-            </a:pPr>
-            <a:r>
-              <a:t>SENSOR 03</a:t>
-            </a:r>
-          </a:p>
-          <a:p>
-            <a:pPr>
-              <a:spcAft>
-                <a:spcPts val="400"/>
-              </a:spcAft>
-              <a:defRPr sz="1300" b="1">
-                <a:solidFill>
-                  <a:srgbClr val="0F172A"/>
-                </a:solidFill>
-              </a:defRPr>
-            </a:pPr>
-            <a:r>
-              <a:t>สารละลายรวม (TDS / EC)</a:t>
-            </a:r>
-          </a:p>
-          <a:p>
-            <a:pPr>
-              <a:spcAft>
-                <a:spcPts val="600"/>
-              </a:spcAft>
-              <a:defRPr sz="1050" b="1">
-                <a:solidFill>
-                  <a:srgbClr val="059669"/>
-                </a:solidFill>
-              </a:defRPr>
-            </a:pPr>
-            <a:r>
-              <a:t>หัววัด: Titanium Alloy 2-Pole</a:t>
-            </a:r>
-          </a:p>
-          <a:p>
-            <a:pPr>
-              <a:defRPr sz="950">
-                <a:solidFill>
-                  <a:srgbClr val="64748B"/>
-                </a:solidFill>
-              </a:defRPr>
-            </a:pPr>
-            <a:r>
-              <a:t>ช่วงวัด: 0 - 2,000 ppm (mg/L)</a:t>
-            </a:r>
-            <a:br/>
-            <a:r>
-              <a:t>ความแม่นยำ: ±2% F.S.</a:t>
-            </a:r>
-            <a:br/>
-            <a:r>
-              <a:t>เกณฑ์มาตรฐาน: &lt; 500 ppm</a:t>
-            </a:r>
-            <a:br/>
-            <a:r>
-              <a:t>ตรวจจับปริมาณสารแขวนลอยและแร่ธาตุในน้ำ</a:t>
-            </a:r>
-          </a:p>
-        </p:txBody>
-      </p:sp>
-      <p:sp>
-        <p:nvSpPr>
-          <p:cNvPr id="9" name="Rounded Rectangle 8"/>
+          <p:cNvPr id="12" name="Rounded Rectangle 11"/>
           <p:cNvSpPr/>
           <p:nvPr/>
         </p:nvSpPr>
         <p:spPr>
           <a:xfrm>
-            <a:off x="8961120" y="1463040"/>
-            <a:ext cx="2468880" cy="2926080"/>
+            <a:off x="8046720" y="1463040"/>
+            <a:ext cx="3383280" cy="1188720"/>
           </a:xfrm>
           <a:prstGeom prst="roundRect">
             <a:avLst/>
           </a:prstGeom>
           <a:solidFill>
-            <a:srgbClr val="FFFFFF"/>
+            <a:srgbClr val="059669"/>
           </a:solidFill>
-          <a:ln w="19050">
-            <a:solidFill>
-              <a:srgbClr val="0284C7"/>
-            </a:solidFill>
+          <a:ln>
+            <a:noFill/>
           </a:ln>
         </p:spPr>
         <p:style>
@@ -5197,14 +5777,14 @@
       </p:sp>
       <p:sp>
         <p:nvSpPr>
-          <p:cNvPr id="10" name="TextBox 9"/>
+          <p:cNvPr id="13" name="TextBox 12"/>
           <p:cNvSpPr txBox="1"/>
           <p:nvPr/>
         </p:nvSpPr>
         <p:spPr>
           <a:xfrm>
-            <a:off x="9098280" y="1600200"/>
-            <a:ext cx="2194560" cy="2651760"/>
+            <a:off x="8229600" y="1554480"/>
+            <a:ext cx="3017520" cy="1005840"/>
           </a:xfrm>
           <a:prstGeom prst="rect">
             <a:avLst/>
@@ -5218,127 +5798,52 @@
           <a:lstStyle/>
           <a:p>
             <a:pPr>
-              <a:defRPr sz="1000" b="1">
-                <a:solidFill>
-                  <a:srgbClr val="0284C7"/>
-                </a:solidFill>
-              </a:defRPr>
-            </a:pPr>
-            <a:r>
-              <a:t>SENSOR 04</a:t>
-            </a:r>
-          </a:p>
-          <a:p>
-            <a:pPr>
-              <a:spcAft>
-                <a:spcPts val="400"/>
-              </a:spcAft>
-              <a:defRPr sz="1300" b="1">
-                <a:solidFill>
-                  <a:srgbClr val="0F172A"/>
-                </a:solidFill>
-              </a:defRPr>
-            </a:pPr>
-            <a:r>
-              <a:t>คลอรีนคงเหลือ (Residual Cl)</a:t>
-            </a:r>
-          </a:p>
-          <a:p>
-            <a:pPr>
-              <a:spcAft>
-                <a:spcPts val="600"/>
-              </a:spcAft>
-              <a:defRPr sz="1050" b="1">
-                <a:solidFill>
-                  <a:srgbClr val="0284C7"/>
-                </a:solidFill>
-              </a:defRPr>
-            </a:pPr>
-            <a:r>
-              <a:t>หัววัด: Amperometric Probe</a:t>
-            </a:r>
-          </a:p>
-          <a:p>
-            <a:pPr>
-              <a:defRPr sz="950">
-                <a:solidFill>
-                  <a:srgbClr val="64748B"/>
-                </a:solidFill>
-              </a:defRPr>
-            </a:pPr>
-            <a:r>
-              <a:t>ช่วงวัด: 0.00 - 5.00 mg/L (ppm)</a:t>
-            </a:r>
-            <a:br/>
-            <a:r>
-              <a:t>ความแม่นยำ: ±0.05 mg/L</a:t>
-            </a:r>
-            <a:br/>
-            <a:r>
-              <a:t>เกณฑ์มาตรฐาน: 0.20 - 2.00 mg/L</a:t>
-            </a:r>
-            <a:br/>
-            <a:r>
-              <a:t>ตรวจเช็คประสิทธิภาพการฆ่าเชื้อโรค 100%</a:t>
-            </a:r>
-          </a:p>
-        </p:txBody>
-      </p:sp>
-      <p:sp>
-        <p:nvSpPr>
-          <p:cNvPr id="11" name="Rounded Rectangle 10"/>
-          <p:cNvSpPr/>
-          <p:nvPr/>
-        </p:nvSpPr>
-        <p:spPr>
-          <a:xfrm>
-            <a:off x="731520" y="4663440"/>
-            <a:ext cx="10728655" cy="1645920"/>
-          </a:xfrm>
-          <a:prstGeom prst="roundRect">
-            <a:avLst/>
-          </a:prstGeom>
-          <a:solidFill>
-            <a:srgbClr val="0F172A"/>
-          </a:solidFill>
-          <a:ln w="19050">
-            <a:solidFill>
-              <a:srgbClr val="0284C7"/>
-            </a:solidFill>
-          </a:ln>
-        </p:spPr>
-        <p:style>
-          <a:lnRef idx="1">
-            <a:schemeClr val="accent1"/>
-          </a:lnRef>
-          <a:fillRef idx="3">
-            <a:schemeClr val="accent1"/>
-          </a:fillRef>
-          <a:effectRef idx="2">
-            <a:schemeClr val="accent1"/>
-          </a:effectRef>
-          <a:fontRef idx="minor">
-            <a:schemeClr val="lt1"/>
-          </a:fontRef>
-        </p:style>
-        <p:txBody>
-          <a:bodyPr rtlCol="0" anchor="ctr"/>
-          <a:lstStyle/>
-          <a:p>
-            <a:pPr algn="ctr"/>
-          </a:p>
-        </p:txBody>
-      </p:sp>
-      <p:sp>
-        <p:nvSpPr>
-          <p:cNvPr id="12" name="TextBox 11"/>
+              <a:defRPr sz="950" b="1">
+                <a:solidFill>
+                  <a:srgbClr val="FFFFFF"/>
+                </a:solidFill>
+              </a:defRPr>
+            </a:pPr>
+            <a:r>
+              <a:t>Lab Grade • 100 สถานี</a:t>
+            </a:r>
+          </a:p>
+          <a:p>
+            <a:pPr>
+              <a:defRPr sz="1400" b="1">
+                <a:solidFill>
+                  <a:srgbClr val="FFFFFF"/>
+                </a:solidFill>
+              </a:defRPr>
+            </a:pPr>
+            <a:r>
+              <a:t>ENTERPRISE LOT 100</a:t>
+            </a:r>
+          </a:p>
+          <a:p>
+            <a:pPr>
+              <a:defRPr sz="2000" b="1">
+                <a:solidFill>
+                  <a:srgbClr val="FFFFFF"/>
+                </a:solidFill>
+              </a:defRPr>
+            </a:pPr>
+            <a:r>
+              <a:t>฿6,900,000</a:t>
+            </a:r>
+          </a:p>
+        </p:txBody>
+      </p:sp>
+      <p:sp>
+        <p:nvSpPr>
+          <p:cNvPr id="14" name="TextBox 13"/>
           <p:cNvSpPr txBox="1"/>
           <p:nvPr/>
         </p:nvSpPr>
         <p:spPr>
           <a:xfrm>
-            <a:off x="1005840" y="4800600"/>
-            <a:ext cx="10149840" cy="1371600"/>
+            <a:off x="8229600" y="2743200"/>
+            <a:ext cx="3017520" cy="3383280"/>
           </a:xfrm>
           <a:prstGeom prst="rect">
             <a:avLst/>
@@ -5353,36 +5858,121 @@
           <a:p>
             <a:pPr>
               <a:spcAft>
-                <a:spcPts val="400"/>
+                <a:spcPts val="800"/>
               </a:spcAft>
-              <a:defRPr sz="1300" b="1">
-                <a:solidFill>
-                  <a:srgbClr val="2DD4BF"/>
-                </a:solidFill>
-              </a:defRPr>
-            </a:pPr>
-            <a:r>
-              <a:t>🎛️ SMART INDUSTRIAL CONTROLLER NODE &amp; TELEMETRY</a:t>
-            </a:r>
-          </a:p>
-          <a:p>
-            <a:pPr>
-              <a:defRPr sz="1050">
-                <a:solidFill>
-                  <a:srgbClr val="E2E8F0"/>
-                </a:solidFill>
-              </a:defRPr>
-            </a:pPr>
-            <a:r>
-              <a:t>• Telemetry Multi-Link: ส่งสัญญาณผ่าน WiFi 2.4GHz, 4G LTE Cellular และ Modbus RS-485 สู่ระบบ Cloud SCADA ตลอด 24 ชม.</a:t>
-            </a:r>
-            <a:br/>
-            <a:r>
-              <a:t>• ระบบสำรองไฟอัจฉริยะ (LiFePO4 Battery Backup): ใช้งานต่อเนื่องแม้ยามไฟดับ พร้อมระบบตรวจสอบระดับแบตเตอรี่ Real-time</a:t>
-            </a:r>
-            <a:br/>
-            <a:r>
-              <a:t>• Alarm Output Relay: พอร์ต Dry Contact สำหรับต่อไซเรนเตือนภัยภายนอก หรือส่งสัญญาณต่อไปยังระบบ SCADA / PLC เดิมของโรงงาน</a:t>
+              <a:defRPr sz="900" b="1">
+                <a:solidFill>
+                  <a:srgbClr val="059669"/>
+                </a:solidFill>
+              </a:defRPr>
+            </a:pPr>
+            <a:r>
+              <a:t>ระดับห้องแล็บ 5 พารามิเตอร์ รวม 100 จุด (เฉลี่ย ฿69,000 / จุด (ประหยัด ฿1,000,000))</a:t>
+            </a:r>
+          </a:p>
+          <a:p>
+            <a:pPr>
+              <a:spcAft>
+                <a:spcPts val="300"/>
+              </a:spcAft>
+              <a:defRPr sz="900">
+                <a:solidFill>
+                  <a:srgbClr val="0F172A"/>
+                </a:solidFill>
+              </a:defRPr>
+            </a:pPr>
+            <a:r>
+              <a:t>✓ 100x Master SCADA PLC Hub</a:t>
+            </a:r>
+          </a:p>
+          <a:p>
+            <a:pPr>
+              <a:spcAft>
+                <a:spcPts val="300"/>
+              </a:spcAft>
+              <a:defRPr sz="900">
+                <a:solidFill>
+                  <a:srgbClr val="0F172A"/>
+                </a:solidFill>
+              </a:defRPr>
+            </a:pPr>
+            <a:r>
+              <a:t>✓ 100x เซนเซอร์แล็บ 5 ค่า (+ ORP)</a:t>
+            </a:r>
+          </a:p>
+          <a:p>
+            <a:pPr>
+              <a:spcAft>
+                <a:spcPts val="300"/>
+              </a:spcAft>
+              <a:defRPr sz="900">
+                <a:solidFill>
+                  <a:srgbClr val="0F172A"/>
+                </a:solidFill>
+              </a:defRPr>
+            </a:pPr>
+            <a:r>
+              <a:t>✓ 100x ชุดกระเปาะ Flow Cell Chamber</a:t>
+            </a:r>
+          </a:p>
+          <a:p>
+            <a:pPr>
+              <a:spcAft>
+                <a:spcPts val="300"/>
+              </a:spcAft>
+              <a:defRPr sz="900">
+                <a:solidFill>
+                  <a:srgbClr val="0F172A"/>
+                </a:solidFill>
+              </a:defRPr>
+            </a:pPr>
+            <a:r>
+              <a:t>✓ Dual Power Supply + LiFePO4 Backup</a:t>
+            </a:r>
+          </a:p>
+          <a:p>
+            <a:pPr>
+              <a:spcAft>
+                <a:spcPts val="300"/>
+              </a:spcAft>
+              <a:defRPr sz="900">
+                <a:solidFill>
+                  <a:srgbClr val="0F172A"/>
+                </a:solidFill>
+              </a:defRPr>
+            </a:pPr>
+            <a:r>
+              <a:t>✓ Cloud Unlimited + Modbus TCP/ERP API</a:t>
+            </a:r>
+          </a:p>
+          <a:p>
+            <a:pPr>
+              <a:spcAft>
+                <a:spcPts val="300"/>
+              </a:spcAft>
+              <a:defRPr sz="900">
+                <a:solidFill>
+                  <a:srgbClr val="0F172A"/>
+                </a:solidFill>
+              </a:defRPr>
+            </a:pPr>
+            <a:r>
+              <a:t>✓ บริการ Calibrate หน้างาน 4 ครั้ง/ปี</a:t>
+            </a:r>
+          </a:p>
+          <a:p>
+            <a:pPr>
+              <a:spcAft>
+                <a:spcPts val="300"/>
+              </a:spcAft>
+              <a:defRPr sz="900">
+                <a:solidFill>
+                  <a:srgbClr val="0F172A"/>
+                </a:solidFill>
+              </a:defRPr>
+            </a:pPr>
+            <a:r>
+              <a:t>✓ แถมชุดสำรอง Spare Units 5 ชุด + ประกัน 3 ปี</a:t>
             </a:r>
           </a:p>
         </p:txBody>
@@ -5446,7 +6036,7 @@
               </a:defRPr>
             </a:pPr>
             <a:r>
-              <a:t>NCT WATER NEXUS PRO | COMMERCIAL PROPOSAL</a:t>
+              <a:t>NCT WATER NEXUS PRO | 100-NODE PROJECT SOLUTION</a:t>
             </a:r>
           </a:p>
           <a:p>
@@ -5458,7 +6048,7 @@
               </a:defRPr>
             </a:pPr>
             <a:r>
-              <a:t>ระบบแดชบอร์ด SCADA และ Mobile Companion App (Software Platform)</a:t>
+              <a:t>แพ็กเกจโครงการ 100 ชุด: แบบสัญญารายปี (100-Node Annual Subscription)</a:t>
             </a:r>
           </a:p>
         </p:txBody>
@@ -5472,7 +6062,7 @@
         <p:spPr>
           <a:xfrm>
             <a:off x="731520" y="1463040"/>
-            <a:ext cx="5120640" cy="4754880"/>
+            <a:ext cx="3383280" cy="4754880"/>
           </a:xfrm>
           <a:prstGeom prst="roundRect">
             <a:avLst/>
@@ -5510,14 +6100,57 @@
       </p:sp>
       <p:sp>
         <p:nvSpPr>
-          <p:cNvPr id="4" name="TextBox 3"/>
+          <p:cNvPr id="4" name="Rounded Rectangle 3"/>
+          <p:cNvSpPr/>
+          <p:nvPr/>
+        </p:nvSpPr>
+        <p:spPr>
+          <a:xfrm>
+            <a:off x="731520" y="1463040"/>
+            <a:ext cx="3383280" cy="1188720"/>
+          </a:xfrm>
+          <a:prstGeom prst="roundRect">
+            <a:avLst/>
+          </a:prstGeom>
+          <a:solidFill>
+            <a:srgbClr val="1E293B"/>
+          </a:solidFill>
+          <a:ln>
+            <a:noFill/>
+          </a:ln>
+        </p:spPr>
+        <p:style>
+          <a:lnRef idx="1">
+            <a:schemeClr val="accent1"/>
+          </a:lnRef>
+          <a:fillRef idx="3">
+            <a:schemeClr val="accent1"/>
+          </a:fillRef>
+          <a:effectRef idx="2">
+            <a:schemeClr val="accent1"/>
+          </a:effectRef>
+          <a:fontRef idx="minor">
+            <a:schemeClr val="lt1"/>
+          </a:fontRef>
+        </p:style>
+        <p:txBody>
+          <a:bodyPr rtlCol="0" anchor="ctr"/>
+          <a:lstStyle/>
+          <a:p>
+            <a:pPr algn="ctr"/>
+          </a:p>
+        </p:txBody>
+      </p:sp>
+      <p:sp>
+        <p:nvSpPr>
+          <p:cNvPr id="5" name="TextBox 4"/>
           <p:cNvSpPr txBox="1"/>
           <p:nvPr/>
         </p:nvSpPr>
         <p:spPr>
           <a:xfrm>
-            <a:off x="1005840" y="1691640"/>
-            <a:ext cx="4572000" cy="4297680"/>
+            <a:off x="914400" y="1554480"/>
+            <a:ext cx="3017520" cy="1005840"/>
           </a:xfrm>
           <a:prstGeom prst="rect">
             <a:avLst/>
@@ -5531,139 +6164,195 @@
           <a:lstStyle/>
           <a:p>
             <a:pPr>
+              <a:defRPr sz="950" b="1">
+                <a:solidFill>
+                  <a:srgbClr val="2DD4BF"/>
+                </a:solidFill>
+              </a:defRPr>
+            </a:pPr>
+            <a:r>
+              <a:t>รายปี • 100 สถานี</a:t>
+            </a:r>
+          </a:p>
+          <a:p>
+            <a:pPr>
+              <a:defRPr sz="1350" b="1">
+                <a:solidFill>
+                  <a:srgbClr val="FFFFFF"/>
+                </a:solidFill>
+              </a:defRPr>
+            </a:pPr>
+            <a:r>
+              <a:t>STANDARD CARE LOT 100</a:t>
+            </a:r>
+          </a:p>
+          <a:p>
+            <a:pPr>
+              <a:defRPr sz="2000" b="1">
+                <a:solidFill>
+                  <a:srgbClr val="FFFFFF"/>
+                </a:solidFill>
+              </a:defRPr>
+            </a:pPr>
+            <a:r>
+              <a:t>฿1,050,000 / ปี</a:t>
+            </a:r>
+          </a:p>
+        </p:txBody>
+      </p:sp>
+      <p:sp>
+        <p:nvSpPr>
+          <p:cNvPr id="6" name="TextBox 5"/>
+          <p:cNvSpPr txBox="1"/>
+          <p:nvPr/>
+        </p:nvSpPr>
+        <p:spPr>
+          <a:xfrm>
+            <a:off x="914400" y="2743200"/>
+            <a:ext cx="3017520" cy="3383280"/>
+          </a:xfrm>
+          <a:prstGeom prst="rect">
+            <a:avLst/>
+          </a:prstGeom>
+          <a:noFill/>
+        </p:spPr>
+        <p:txBody>
+          <a:bodyPr wrap="square">
+            <a:spAutoFit/>
+          </a:bodyPr>
+          <a:lstStyle/>
+          <a:p>
+            <a:pPr>
               <a:spcAft>
-                <a:spcPts val="1000"/>
+                <a:spcPts val="800"/>
               </a:spcAft>
-              <a:defRPr sz="1400" b="1">
+              <a:defRPr sz="900" b="1">
                 <a:solidFill>
                   <a:srgbClr val="0284C7"/>
                 </a:solidFill>
               </a:defRPr>
             </a:pPr>
             <a:r>
-              <a:t>💻 1. Desktop SCADA Widescreen Dashboard</a:t>
-            </a:r>
-          </a:p>
-          <a:p>
-            <a:pPr>
-              <a:defRPr b="1" sz="1150">
+              <a:t>pH + Temp 100 จุด (เฉลี่ย ฿875/จุด/ด.)</a:t>
+            </a:r>
+          </a:p>
+          <a:p>
+            <a:pPr>
+              <a:spcAft>
+                <a:spcPts val="300"/>
+              </a:spcAft>
+              <a:defRPr sz="900">
                 <a:solidFill>
                   <a:srgbClr val="0F172A"/>
                 </a:solidFill>
               </a:defRPr>
             </a:pPr>
             <a:r>
-              <a:t>• Widescreen Plant Overview:</a:t>
+              <a:t>✓ ให้ยืมเครื่อง NCT Controller ครบ 100 ชุด</a:t>
             </a:r>
           </a:p>
           <a:p>
             <a:pPr>
               <a:spcAft>
-                <a:spcPts val="600"/>
+                <a:spcPts val="300"/>
               </a:spcAft>
-              <a:defRPr sz="1050">
-                <a:solidFill>
-                  <a:srgbClr val="64748B"/>
-                </a:solidFill>
-              </a:defRPr>
-            </a:pPr>
-            <a:r>
-              <a:t>  แดชบอร์ดขนาดใหญ่สำหรับห้องควบคุม (Control Room) แสดงสถานะและแนวโน้มชัดเจน</a:t>
-            </a:r>
-          </a:p>
-          <a:p>
-            <a:pPr>
-              <a:defRPr b="1" sz="1150">
+              <a:defRPr sz="900">
                 <a:solidFill>
                   <a:srgbClr val="0F172A"/>
                 </a:solidFill>
               </a:defRPr>
             </a:pPr>
             <a:r>
-              <a:t>• High-Frequency Telemetry Trends:</a:t>
+              <a:t>✓ หัววัด pH + Temp 100 ชุด (เปลี่ยนฟรีเมื่อเสื่อม)</a:t>
             </a:r>
           </a:p>
           <a:p>
             <a:pPr>
               <a:spcAft>
-                <a:spcPts val="600"/>
+                <a:spcPts val="300"/>
               </a:spcAft>
-              <a:defRPr sz="1050">
-                <a:solidFill>
-                  <a:srgbClr val="64748B"/>
-                </a:solidFill>
-              </a:defRPr>
-            </a:pPr>
-            <a:r>
-              <a:t>  กราฟ Real-Time Dynamic Charts แบบ Multi-Axis วิเคราะห์ pH, Temp, TDS, Cl พร้อมกัน</a:t>
-            </a:r>
-          </a:p>
-          <a:p>
-            <a:pPr>
-              <a:defRPr b="1" sz="1150">
+              <a:defRPr sz="900">
                 <a:solidFill>
                   <a:srgbClr val="0F172A"/>
                 </a:solidFill>
               </a:defRPr>
             </a:pPr>
             <a:r>
-              <a:t>• Interactive Hardware Controls:</a:t>
+              <a:t>✓ ฟรี Cloud Server &amp; ซิม 4G 100 ซิม ไม่จำกัด</a:t>
             </a:r>
           </a:p>
           <a:p>
             <a:pPr>
               <a:spcAft>
-                <a:spcPts val="600"/>
+                <a:spcPts val="300"/>
               </a:spcAft>
-              <a:defRPr sz="1050">
-                <a:solidFill>
-                  <a:srgbClr val="64748B"/>
-                </a:solidFill>
-              </a:defRPr>
-            </a:pPr>
-            <a:r>
-              <a:t>  สวิตช์เปิด-ปิดไฟหน้าจอ ตรวจสอบสถานะการเชื่อมต่อ และทดสอบสัญญาณ Real-time</a:t>
-            </a:r>
-          </a:p>
-          <a:p>
-            <a:pPr>
-              <a:defRPr b="1" sz="1150">
+              <a:defRPr sz="900">
                 <a:solidFill>
                   <a:srgbClr val="0F172A"/>
                 </a:solidFill>
               </a:defRPr>
             </a:pPr>
             <a:r>
-              <a:t>• Automated Calibration Assistant:</a:t>
+              <a:t>✓ ระบบรวมศูนย์ SCADA 100 จุด + Mobile App</a:t>
             </a:r>
           </a:p>
           <a:p>
             <a:pPr>
               <a:spcAft>
-                <a:spcPts val="600"/>
+                <a:spcPts val="300"/>
               </a:spcAft>
-              <a:defRPr sz="1050">
-                <a:solidFill>
-                  <a:srgbClr val="64748B"/>
-                </a:solidFill>
-              </a:defRPr>
-            </a:pPr>
-            <a:r>
-              <a:t>  ระบบช่วยเทียบมาตรฐานหัววัด pH (One-Click Digital Calibrate Buffer 7.00 / 4.01) ง่ายและแม่นยำ</a:t>
-            </a:r>
-          </a:p>
-        </p:txBody>
-      </p:sp>
-      <p:sp>
-        <p:nvSpPr>
-          <p:cNvPr id="5" name="Rounded Rectangle 4"/>
+              <a:defRPr sz="900">
+                <a:solidFill>
+                  <a:srgbClr val="0F172A"/>
+                </a:solidFill>
+              </a:defRPr>
+            </a:pPr>
+            <a:r>
+              <a:t>✓ แจ้งเตือน Line Alert &amp; SMS แยกโซน 24 ชม.</a:t>
+            </a:r>
+          </a:p>
+          <a:p>
+            <a:pPr>
+              <a:spcAft>
+                <a:spcPts val="300"/>
+              </a:spcAft>
+              <a:defRPr sz="900">
+                <a:solidFill>
+                  <a:srgbClr val="0F172A"/>
+                </a:solidFill>
+              </a:defRPr>
+            </a:pPr>
+            <a:r>
+              <a:t>✓ แถมชุดสำรอง Spare Units ประจำไซต์ 5 ชุด</a:t>
+            </a:r>
+          </a:p>
+          <a:p>
+            <a:pPr>
+              <a:spcAft>
+                <a:spcPts val="300"/>
+              </a:spcAft>
+              <a:defRPr sz="900">
+                <a:solidFill>
+                  <a:srgbClr val="0F172A"/>
+                </a:solidFill>
+              </a:defRPr>
+            </a:pPr>
+            <a:r>
+              <a:t>✓ ดูแลและรับประกันตลอดอายุสัญญาเช่า</a:t>
+            </a:r>
+          </a:p>
+        </p:txBody>
+      </p:sp>
+      <p:sp>
+        <p:nvSpPr>
+          <p:cNvPr id="7" name="Rounded Rectangle 6"/>
           <p:cNvSpPr/>
           <p:nvPr/>
         </p:nvSpPr>
         <p:spPr>
           <a:xfrm>
-            <a:off x="6309360" y="1463040"/>
-            <a:ext cx="5120640" cy="4754880"/>
+            <a:off x="4389120" y="1463040"/>
+            <a:ext cx="3383280" cy="4754880"/>
           </a:xfrm>
           <a:prstGeom prst="roundRect">
             <a:avLst/>
@@ -5673,7 +6362,7 @@
           </a:solidFill>
           <a:ln w="19050">
             <a:solidFill>
-              <a:srgbClr val="CBD5E1"/>
+              <a:srgbClr val="0284C7"/>
             </a:solidFill>
           </a:ln>
         </p:spPr>
@@ -5701,14 +6390,57 @@
       </p:sp>
       <p:sp>
         <p:nvSpPr>
-          <p:cNvPr id="6" name="TextBox 5"/>
+          <p:cNvPr id="8" name="Rounded Rectangle 7"/>
+          <p:cNvSpPr/>
+          <p:nvPr/>
+        </p:nvSpPr>
+        <p:spPr>
+          <a:xfrm>
+            <a:off x="4389120" y="1463040"/>
+            <a:ext cx="3383280" cy="1188720"/>
+          </a:xfrm>
+          <a:prstGeom prst="roundRect">
+            <a:avLst/>
+          </a:prstGeom>
+          <a:solidFill>
+            <a:srgbClr val="0284C7"/>
+          </a:solidFill>
+          <a:ln>
+            <a:noFill/>
+          </a:ln>
+        </p:spPr>
+        <p:style>
+          <a:lnRef idx="1">
+            <a:schemeClr val="accent1"/>
+          </a:lnRef>
+          <a:fillRef idx="3">
+            <a:schemeClr val="accent1"/>
+          </a:fillRef>
+          <a:effectRef idx="2">
+            <a:schemeClr val="accent1"/>
+          </a:effectRef>
+          <a:fontRef idx="minor">
+            <a:schemeClr val="lt1"/>
+          </a:fontRef>
+        </p:style>
+        <p:txBody>
+          <a:bodyPr rtlCol="0" anchor="ctr"/>
+          <a:lstStyle/>
+          <a:p>
+            <a:pPr algn="ctr"/>
+          </a:p>
+        </p:txBody>
+      </p:sp>
+      <p:sp>
+        <p:nvSpPr>
+          <p:cNvPr id="9" name="TextBox 8"/>
           <p:cNvSpPr txBox="1"/>
           <p:nvPr/>
         </p:nvSpPr>
         <p:spPr>
           <a:xfrm>
-            <a:off x="6583680" y="1691640"/>
-            <a:ext cx="4572000" cy="4297680"/>
+            <a:off x="4572000" y="1554480"/>
+            <a:ext cx="3017520" cy="1005840"/>
           </a:xfrm>
           <a:prstGeom prst="rect">
             <a:avLst/>
@@ -5722,125 +6454,471 @@
           <a:lstStyle/>
           <a:p>
             <a:pPr>
+              <a:defRPr sz="950" b="1">
+                <a:solidFill>
+                  <a:srgbClr val="FFFFFF"/>
+                </a:solidFill>
+              </a:defRPr>
+            </a:pPr>
+            <a:r>
+              <a:t>★ แนะนำสำหรับนิคมฯ/ประปา</a:t>
+            </a:r>
+          </a:p>
+          <a:p>
+            <a:pPr>
+              <a:defRPr sz="1350" b="1">
+                <a:solidFill>
+                  <a:srgbClr val="FFFFFF"/>
+                </a:solidFill>
+              </a:defRPr>
+            </a:pPr>
+            <a:r>
+              <a:t>PRO CARE LOT 100</a:t>
+            </a:r>
+          </a:p>
+          <a:p>
+            <a:pPr>
+              <a:defRPr sz="2000" b="1">
+                <a:solidFill>
+                  <a:srgbClr val="FFFFFF"/>
+                </a:solidFill>
+              </a:defRPr>
+            </a:pPr>
+            <a:r>
+              <a:t>฿2,100,000 / ปี</a:t>
+            </a:r>
+          </a:p>
+        </p:txBody>
+      </p:sp>
+      <p:sp>
+        <p:nvSpPr>
+          <p:cNvPr id="10" name="TextBox 9"/>
+          <p:cNvSpPr txBox="1"/>
+          <p:nvPr/>
+        </p:nvSpPr>
+        <p:spPr>
+          <a:xfrm>
+            <a:off x="4572000" y="2743200"/>
+            <a:ext cx="3017520" cy="3383280"/>
+          </a:xfrm>
+          <a:prstGeom prst="rect">
+            <a:avLst/>
+          </a:prstGeom>
+          <a:noFill/>
+        </p:spPr>
+        <p:txBody>
+          <a:bodyPr wrap="square">
+            <a:spAutoFit/>
+          </a:bodyPr>
+          <a:lstStyle/>
+          <a:p>
+            <a:pPr>
               <a:spcAft>
-                <a:spcPts val="1000"/>
+                <a:spcPts val="800"/>
               </a:spcAft>
-              <a:defRPr sz="1400" b="1">
+              <a:defRPr sz="900" b="1">
+                <a:solidFill>
+                  <a:srgbClr val="0284C7"/>
+                </a:solidFill>
+              </a:defRPr>
+            </a:pPr>
+            <a:r>
+              <a:t>ตรวจ 4 ค่า 100 จุด (เฉลี่ย ฿1,750/จุด/ด.)</a:t>
+            </a:r>
+          </a:p>
+          <a:p>
+            <a:pPr>
+              <a:spcAft>
+                <a:spcPts val="300"/>
+              </a:spcAft>
+              <a:defRPr sz="900">
+                <a:solidFill>
+                  <a:srgbClr val="0F172A"/>
+                </a:solidFill>
+              </a:defRPr>
+            </a:pPr>
+            <a:r>
+              <a:t>✓ ให้ยืมเครื่อง Heavy-Duty SCADA ครบ 100 ชุด</a:t>
+            </a:r>
+          </a:p>
+          <a:p>
+            <a:pPr>
+              <a:spcAft>
+                <a:spcPts val="300"/>
+              </a:spcAft>
+              <a:defRPr sz="900">
+                <a:solidFill>
+                  <a:srgbClr val="0F172A"/>
+                </a:solidFill>
+              </a:defRPr>
+            </a:pPr>
+            <a:r>
+              <a:t>✓ หัววัดครบ 4 ค่า (pH, Temp, TDS, Cl) 100 จุด</a:t>
+            </a:r>
+          </a:p>
+          <a:p>
+            <a:pPr>
+              <a:spcAft>
+                <a:spcPts val="300"/>
+              </a:spcAft>
+              <a:defRPr sz="900">
+                <a:solidFill>
+                  <a:srgbClr val="0F172A"/>
+                </a:solidFill>
+              </a:defRPr>
+            </a:pPr>
+            <a:r>
+              <a:t>✓ ฟรี Calibrate สอบเทียบหน้างาน 2 ครั้ง/ปี</a:t>
+            </a:r>
+          </a:p>
+          <a:p>
+            <a:pPr>
+              <a:spcAft>
+                <a:spcPts val="300"/>
+              </a:spcAft>
+              <a:defRPr sz="900">
+                <a:solidFill>
+                  <a:srgbClr val="0F172A"/>
+                </a:solidFill>
+              </a:defRPr>
+            </a:pPr>
+            <a:r>
+              <a:t>✓ ฟรีอะไหล่และหัววัดเปลี่ยนใหม่ทันทีตลอดสัญญา</a:t>
+            </a:r>
+          </a:p>
+          <a:p>
+            <a:pPr>
+              <a:spcAft>
+                <a:spcPts val="300"/>
+              </a:spcAft>
+              <a:defRPr sz="900">
+                <a:solidFill>
+                  <a:srgbClr val="0F172A"/>
+                </a:solidFill>
+              </a:defRPr>
+            </a:pPr>
+            <a:r>
+              <a:t>✓ ฟรี Private Cloud Server &amp; White-Label Logo</a:t>
+            </a:r>
+          </a:p>
+          <a:p>
+            <a:pPr>
+              <a:spcAft>
+                <a:spcPts val="300"/>
+              </a:spcAft>
+              <a:defRPr sz="900">
+                <a:solidFill>
+                  <a:srgbClr val="0F172A"/>
+                </a:solidFill>
+              </a:defRPr>
+            </a:pPr>
+            <a:r>
+              <a:t>✓ แถมชุดสำรอง Spare Units 5 ชุด + On-site SLA</a:t>
+            </a:r>
+          </a:p>
+          <a:p>
+            <a:pPr>
+              <a:spcAft>
+                <a:spcPts val="300"/>
+              </a:spcAft>
+              <a:defRPr sz="900">
+                <a:solidFill>
+                  <a:srgbClr val="0F172A"/>
+                </a:solidFill>
+              </a:defRPr>
+            </a:pPr>
+            <a:r>
+              <a:t>✓ ทีมวิศวกร Support ดูแลตลอดสัญญา 24/7</a:t>
+            </a:r>
+          </a:p>
+        </p:txBody>
+      </p:sp>
+      <p:sp>
+        <p:nvSpPr>
+          <p:cNvPr id="11" name="Rounded Rectangle 10"/>
+          <p:cNvSpPr/>
+          <p:nvPr/>
+        </p:nvSpPr>
+        <p:spPr>
+          <a:xfrm>
+            <a:off x="8046720" y="1463040"/>
+            <a:ext cx="3383280" cy="4754880"/>
+          </a:xfrm>
+          <a:prstGeom prst="roundRect">
+            <a:avLst/>
+          </a:prstGeom>
+          <a:solidFill>
+            <a:srgbClr val="FFFFFF"/>
+          </a:solidFill>
+          <a:ln w="19050">
+            <a:solidFill>
+              <a:srgbClr val="059669"/>
+            </a:solidFill>
+          </a:ln>
+        </p:spPr>
+        <p:style>
+          <a:lnRef idx="1">
+            <a:schemeClr val="accent1"/>
+          </a:lnRef>
+          <a:fillRef idx="3">
+            <a:schemeClr val="accent1"/>
+          </a:fillRef>
+          <a:effectRef idx="2">
+            <a:schemeClr val="accent1"/>
+          </a:effectRef>
+          <a:fontRef idx="minor">
+            <a:schemeClr val="lt1"/>
+          </a:fontRef>
+        </p:style>
+        <p:txBody>
+          <a:bodyPr rtlCol="0" anchor="ctr"/>
+          <a:lstStyle/>
+          <a:p>
+            <a:pPr algn="ctr"/>
+          </a:p>
+        </p:txBody>
+      </p:sp>
+      <p:sp>
+        <p:nvSpPr>
+          <p:cNvPr id="12" name="Rounded Rectangle 11"/>
+          <p:cNvSpPr/>
+          <p:nvPr/>
+        </p:nvSpPr>
+        <p:spPr>
+          <a:xfrm>
+            <a:off x="8046720" y="1463040"/>
+            <a:ext cx="3383280" cy="1188720"/>
+          </a:xfrm>
+          <a:prstGeom prst="roundRect">
+            <a:avLst/>
+          </a:prstGeom>
+          <a:solidFill>
+            <a:srgbClr val="059669"/>
+          </a:solidFill>
+          <a:ln>
+            <a:noFill/>
+          </a:ln>
+        </p:spPr>
+        <p:style>
+          <a:lnRef idx="1">
+            <a:schemeClr val="accent1"/>
+          </a:lnRef>
+          <a:fillRef idx="3">
+            <a:schemeClr val="accent1"/>
+          </a:fillRef>
+          <a:effectRef idx="2">
+            <a:schemeClr val="accent1"/>
+          </a:effectRef>
+          <a:fontRef idx="minor">
+            <a:schemeClr val="lt1"/>
+          </a:fontRef>
+        </p:style>
+        <p:txBody>
+          <a:bodyPr rtlCol="0" anchor="ctr"/>
+          <a:lstStyle/>
+          <a:p>
+            <a:pPr algn="ctr"/>
+          </a:p>
+        </p:txBody>
+      </p:sp>
+      <p:sp>
+        <p:nvSpPr>
+          <p:cNvPr id="13" name="TextBox 12"/>
+          <p:cNvSpPr txBox="1"/>
+          <p:nvPr/>
+        </p:nvSpPr>
+        <p:spPr>
+          <a:xfrm>
+            <a:off x="8229600" y="1554480"/>
+            <a:ext cx="3017520" cy="1005840"/>
+          </a:xfrm>
+          <a:prstGeom prst="rect">
+            <a:avLst/>
+          </a:prstGeom>
+          <a:noFill/>
+        </p:spPr>
+        <p:txBody>
+          <a:bodyPr wrap="square">
+            <a:spAutoFit/>
+          </a:bodyPr>
+          <a:lstStyle/>
+          <a:p>
+            <a:pPr>
+              <a:defRPr sz="950" b="1">
+                <a:solidFill>
+                  <a:srgbClr val="FFFFFF"/>
+                </a:solidFill>
+              </a:defRPr>
+            </a:pPr>
+            <a:r>
+              <a:t>Full SLA • 100 สถานี</a:t>
+            </a:r>
+          </a:p>
+          <a:p>
+            <a:pPr>
+              <a:defRPr sz="1350" b="1">
+                <a:solidFill>
+                  <a:srgbClr val="FFFFFF"/>
+                </a:solidFill>
+              </a:defRPr>
+            </a:pPr>
+            <a:r>
+              <a:t>ENTERPRISE CARE LOT 100</a:t>
+            </a:r>
+          </a:p>
+          <a:p>
+            <a:pPr>
+              <a:defRPr sz="2000" b="1">
+                <a:solidFill>
+                  <a:srgbClr val="FFFFFF"/>
+                </a:solidFill>
+              </a:defRPr>
+            </a:pPr>
+            <a:r>
+              <a:t>฿3,450,000 / ปี</a:t>
+            </a:r>
+          </a:p>
+        </p:txBody>
+      </p:sp>
+      <p:sp>
+        <p:nvSpPr>
+          <p:cNvPr id="14" name="TextBox 13"/>
+          <p:cNvSpPr txBox="1"/>
+          <p:nvPr/>
+        </p:nvSpPr>
+        <p:spPr>
+          <a:xfrm>
+            <a:off x="8229600" y="2743200"/>
+            <a:ext cx="3017520" cy="3383280"/>
+          </a:xfrm>
+          <a:prstGeom prst="rect">
+            <a:avLst/>
+          </a:prstGeom>
+          <a:noFill/>
+        </p:spPr>
+        <p:txBody>
+          <a:bodyPr wrap="square">
+            <a:spAutoFit/>
+          </a:bodyPr>
+          <a:lstStyle/>
+          <a:p>
+            <a:pPr>
+              <a:spcAft>
+                <a:spcPts val="800"/>
+              </a:spcAft>
+              <a:defRPr sz="900" b="1">
                 <a:solidFill>
                   <a:srgbClr val="059669"/>
                 </a:solidFill>
               </a:defRPr>
             </a:pPr>
             <a:r>
-              <a:t>📱 2. Mobile Companion App (iOS &amp; Android)</a:t>
-            </a:r>
-          </a:p>
-          <a:p>
-            <a:pPr>
-              <a:defRPr b="1" sz="1150">
+              <a:t>เกรดแล็บ 5 ค่า 100 จุด (เฉลี่ย ฿2,875/จุด/ด.)</a:t>
+            </a:r>
+          </a:p>
+          <a:p>
+            <a:pPr>
+              <a:spcAft>
+                <a:spcPts val="300"/>
+              </a:spcAft>
+              <a:defRPr sz="900">
                 <a:solidFill>
                   <a:srgbClr val="0F172A"/>
                 </a:solidFill>
               </a:defRPr>
             </a:pPr>
             <a:r>
-              <a:t>• Native Phone Experience:</a:t>
+              <a:t>✓ ให้ยืมตู้ Master SCADA PLC Hub ครบ 100 ชุด</a:t>
             </a:r>
           </a:p>
           <a:p>
             <a:pPr>
               <a:spcAft>
-                <a:spcPts val="600"/>
+                <a:spcPts val="300"/>
               </a:spcAft>
-              <a:defRPr sz="1050">
-                <a:solidFill>
-                  <a:srgbClr val="64748B"/>
-                </a:solidFill>
-              </a:defRPr>
-            </a:pPr>
-            <a:r>
-              <a:t>  ดีไซน์เฉพาะสำหรับสมาร์ทโฟน เช็คค่าน้ำได้สะดวกรวดเร็วตลอด 24 ชม. ทุกที่ทุกเวลา</a:t>
-            </a:r>
-          </a:p>
-          <a:p>
-            <a:pPr>
-              <a:defRPr b="1" sz="1150">
+              <a:defRPr sz="900">
                 <a:solidFill>
                   <a:srgbClr val="0F172A"/>
                 </a:solidFill>
               </a:defRPr>
             </a:pPr>
             <a:r>
-              <a:t>• Color-Coded Metric Cards:</a:t>
+              <a:t>✓ หัววัด 5 ค่า (+ ORP) + Flow Cell 100 จุด</a:t>
             </a:r>
           </a:p>
           <a:p>
             <a:pPr>
               <a:spcAft>
-                <a:spcPts val="600"/>
+                <a:spcPts val="300"/>
               </a:spcAft>
-              <a:defRPr sz="1050">
-                <a:solidFill>
-                  <a:srgbClr val="64748B"/>
-                </a:solidFill>
-              </a:defRPr>
-            </a:pPr>
-            <a:r>
-              <a:t>  การ์ดแสดงค่าแยกสีชัดเจน (Teal=pH, Amber=Temp, Green=TDS, Blue=Chlorine) อ่านค่าง่ายทันที</a:t>
-            </a:r>
-          </a:p>
-          <a:p>
-            <a:pPr>
-              <a:defRPr b="1" sz="1150">
+              <a:defRPr sz="900">
                 <a:solidFill>
                   <a:srgbClr val="0F172A"/>
                 </a:solidFill>
               </a:defRPr>
             </a:pPr>
             <a:r>
-              <a:t>• Real-Time Connection Topology:</a:t>
+              <a:t>✓ ฟรี Calibrate 4 ครั้ง/ปี พร้อมใบรับรอง ISO</a:t>
             </a:r>
           </a:p>
           <a:p>
             <a:pPr>
               <a:spcAft>
-                <a:spcPts val="600"/>
+                <a:spcPts val="300"/>
               </a:spcAft>
-              <a:defRPr sz="1050">
-                <a:solidFill>
-                  <a:srgbClr val="64748B"/>
-                </a:solidFill>
-              </a:defRPr>
-            </a:pPr>
-            <a:r>
-              <a:t>  แสดงสถานะการเชื่อมต่อแบบภาพ (WiFi ➔ Display ➔ Probe) พร้อมแจ้งระดับแบตเตอรี่</a:t>
-            </a:r>
-          </a:p>
-          <a:p>
-            <a:pPr>
-              <a:defRPr b="1" sz="1150">
+              <a:defRPr sz="900">
                 <a:solidFill>
                   <a:srgbClr val="0F172A"/>
                 </a:solidFill>
               </a:defRPr>
             </a:pPr>
             <a:r>
-              <a:t>• Multi-Station Management:</a:t>
+              <a:t>✓ Cloud Unlimited + Modbus TCP / ERP API</a:t>
             </a:r>
           </a:p>
           <a:p>
             <a:pPr>
               <a:spcAft>
-                <a:spcPts val="600"/>
+                <a:spcPts val="300"/>
               </a:spcAft>
-              <a:defRPr sz="1050">
-                <a:solidFill>
-                  <a:srgbClr val="64748B"/>
-                </a:solidFill>
-              </a:defRPr>
-            </a:pPr>
-            <a:r>
-              <a:t>  สลับดูข้อมูลสถานีตรวจวัดน้ำได้หลายจุดพร้อมกันในแอปเดียว (All Devices Hub)</a:t>
+              <a:defRPr sz="900">
+                <a:solidFill>
+                  <a:srgbClr val="0F172A"/>
+                </a:solidFill>
+              </a:defRPr>
+            </a:pPr>
+            <a:r>
+              <a:t>✓ เครื่องสำรองประจำไซต์ 5 ชุด + เคลมใน 24 ชม.</a:t>
+            </a:r>
+          </a:p>
+          <a:p>
+            <a:pPr>
+              <a:spcAft>
+                <a:spcPts val="300"/>
+              </a:spcAft>
+              <a:defRPr sz="900">
+                <a:solidFill>
+                  <a:srgbClr val="0F172A"/>
+                </a:solidFill>
+              </a:defRPr>
+            </a:pPr>
+            <a:r>
+              <a:t>✓ สัญญาบริการระดับ Priority 24/7 SLA</a:t>
+            </a:r>
+          </a:p>
+          <a:p>
+            <a:pPr>
+              <a:spcAft>
+                <a:spcPts val="300"/>
+              </a:spcAft>
+              <a:defRPr sz="900">
+                <a:solidFill>
+                  <a:srgbClr val="0F172A"/>
+                </a:solidFill>
+              </a:defRPr>
+            </a:pPr>
+            <a:r>
+              <a:t>✓ ทีมวิศวกรประจำโครงการดูแลเฉพาะองค์กร</a:t>
             </a:r>
           </a:p>
         </p:txBody>
@@ -5904,7 +6982,7 @@
               </a:defRPr>
             </a:pPr>
             <a:r>
-              <a:t>NCT WATER NEXUS PRO | COMMERCIAL PROPOSAL</a:t>
+              <a:t>NCT WATER NEXUS PRO | 100-NODE PROJECT SOLUTION</a:t>
             </a:r>
           </a:p>
           <a:p>
@@ -5916,752 +6994,151 @@
               </a:defRPr>
             </a:pPr>
             <a:r>
-              <a:t>เกณฑ์มาตรฐานคุณภาพน้ำและการแจ้งเตือน (Water Quality Benchmarks)</a:t>
-            </a:r>
-          </a:p>
-        </p:txBody>
-      </p:sp>
-      <p:graphicFrame>
-        <p:nvGraphicFramePr>
-          <p:cNvPr id="3" name="Table 2"/>
-          <p:cNvGraphicFramePr>
-            <a:graphicFrameLocks noGrp="1"/>
-          </p:cNvGraphicFramePr>
-          <p:nvPr/>
-        </p:nvGraphicFramePr>
-        <p:xfrm>
-          <a:off x="731520" y="1463040"/>
-          <a:ext cx="10728655" cy="3657600"/>
-        </p:xfrm>
-        <a:graphic>
-          <a:graphicData uri="http://schemas.openxmlformats.org/drawingml/2006/table">
-            <a:tbl>
-              <a:tblPr firstRow="1" bandRow="1">
-                <a:tableStyleId>{5C22544A-7EE6-4342-B048-85BDC9FD1C3A}</a:tableStyleId>
-              </a:tblPr>
-              <a:tblGrid>
-                <a:gridCol w="2011680"/>
-                <a:gridCol w="1645920"/>
-                <a:gridCol w="2286000"/>
-                <a:gridCol w="2011680"/>
-                <a:gridCol w="2773375"/>
-              </a:tblGrid>
-              <a:tr h="609600">
-                <a:tc>
-                  <a:txBody>
-                    <a:bodyPr/>
-                    <a:lstStyle/>
-                    <a:p>
-                      <a:pPr algn="ctr">
-                        <a:defRPr b="1" sz="1100">
-                          <a:solidFill>
-                            <a:srgbClr val="FFFFFF"/>
-                          </a:solidFill>
-                        </a:defRPr>
-                      </a:pPr>
-                      <a:r>
-                        <a:t>พารามิเตอร์ (Parameter)</a:t>
-                      </a:r>
-                    </a:p>
-                  </a:txBody>
-                  <a:tcPr>
-                    <a:solidFill>
-                      <a:srgbClr val="0F172A"/>
-                    </a:solidFill>
-                  </a:tcPr>
-                </a:tc>
-                <a:tc>
-                  <a:txBody>
-                    <a:bodyPr/>
-                    <a:lstStyle/>
-                    <a:p>
-                      <a:pPr algn="ctr">
-                        <a:defRPr b="1" sz="1100">
-                          <a:solidFill>
-                            <a:srgbClr val="FFFFFF"/>
-                          </a:solidFill>
-                        </a:defRPr>
-                      </a:pPr>
-                      <a:r>
-                        <a:t>หน่วยตรวจวัด</a:t>
-                      </a:r>
-                    </a:p>
-                  </a:txBody>
-                  <a:tcPr>
-                    <a:solidFill>
-                      <a:srgbClr val="0F172A"/>
-                    </a:solidFill>
-                  </a:tcPr>
-                </a:tc>
-                <a:tc>
-                  <a:txBody>
-                    <a:bodyPr/>
-                    <a:lstStyle/>
-                    <a:p>
-                      <a:pPr algn="ctr">
-                        <a:defRPr b="1" sz="1100">
-                          <a:solidFill>
-                            <a:srgbClr val="FFFFFF"/>
-                          </a:solidFill>
-                        </a:defRPr>
-                      </a:pPr>
-                      <a:r>
-                        <a:t>เกณฑ์มาตรฐานปลอดภัย</a:t>
-                      </a:r>
-                    </a:p>
-                  </a:txBody>
-                  <a:tcPr>
-                    <a:solidFill>
-                      <a:srgbClr val="0F172A"/>
-                    </a:solidFill>
-                  </a:tcPr>
-                </a:tc>
-                <a:tc>
-                  <a:txBody>
-                    <a:bodyPr/>
-                    <a:lstStyle/>
-                    <a:p>
-                      <a:pPr algn="ctr">
-                        <a:defRPr b="1" sz="1100">
-                          <a:solidFill>
-                            <a:srgbClr val="FFFFFF"/>
-                          </a:solidFill>
-                        </a:defRPr>
-                      </a:pPr>
-                      <a:r>
-                        <a:t>ค่าเฉลี่ยปกติของระบบ</a:t>
-                      </a:r>
-                    </a:p>
-                  </a:txBody>
-                  <a:tcPr>
-                    <a:solidFill>
-                      <a:srgbClr val="0F172A"/>
-                    </a:solidFill>
-                  </a:tcPr>
-                </a:tc>
-                <a:tc>
-                  <a:txBody>
-                    <a:bodyPr/>
-                    <a:lstStyle/>
-                    <a:p>
-                      <a:pPr algn="ctr">
-                        <a:defRPr b="1" sz="1100">
-                          <a:solidFill>
-                            <a:srgbClr val="FFFFFF"/>
-                          </a:solidFill>
-                        </a:defRPr>
-                      </a:pPr>
-                      <a:r>
-                        <a:t>เงื่อนไขการแจ้งเตือน (Alert Action)</a:t>
-                      </a:r>
-                    </a:p>
-                  </a:txBody>
-                  <a:tcPr>
-                    <a:solidFill>
-                      <a:srgbClr val="0F172A"/>
-                    </a:solidFill>
-                  </a:tcPr>
-                </a:tc>
-              </a:tr>
-              <a:tr h="609600">
-                <a:tc>
-                  <a:txBody>
-                    <a:bodyPr/>
-                    <a:lstStyle/>
-                    <a:p>
-                      <a:pPr>
-                        <a:defRPr sz="1000">
-                          <a:solidFill>
-                            <a:srgbClr val="0F172A"/>
-                          </a:solidFill>
-                        </a:defRPr>
-                      </a:pPr>
-                      <a:r>
-                        <a:t>ความเป็นกรด-ด่าง (pH)</a:t>
-                      </a:r>
-                    </a:p>
-                  </a:txBody>
-                  <a:tcPr>
-                    <a:solidFill>
-                      <a:srgbClr val="FFFFFF"/>
-                    </a:solidFill>
-                  </a:tcPr>
-                </a:tc>
-                <a:tc>
-                  <a:txBody>
-                    <a:bodyPr/>
-                    <a:lstStyle/>
-                    <a:p>
-                      <a:pPr algn="ctr">
-                        <a:defRPr sz="1000">
-                          <a:solidFill>
-                            <a:srgbClr val="0F172A"/>
-                          </a:solidFill>
-                        </a:defRPr>
-                      </a:pPr>
-                      <a:r>
-                        <a:t>pH Scale</a:t>
-                      </a:r>
-                    </a:p>
-                  </a:txBody>
-                  <a:tcPr>
-                    <a:solidFill>
-                      <a:srgbClr val="FFFFFF"/>
-                    </a:solidFill>
-                  </a:tcPr>
-                </a:tc>
-                <a:tc>
-                  <a:txBody>
-                    <a:bodyPr/>
-                    <a:lstStyle/>
-                    <a:p>
-                      <a:pPr algn="ctr">
-                        <a:defRPr sz="1000">
-                          <a:solidFill>
-                            <a:srgbClr val="0F172A"/>
-                          </a:solidFill>
-                        </a:defRPr>
-                      </a:pPr>
-                      <a:r>
-                        <a:t>6.50 - 8.50 pH</a:t>
-                      </a:r>
-                    </a:p>
-                  </a:txBody>
-                  <a:tcPr>
-                    <a:solidFill>
-                      <a:srgbClr val="FFFFFF"/>
-                    </a:solidFill>
-                  </a:tcPr>
-                </a:tc>
-                <a:tc>
-                  <a:txBody>
-                    <a:bodyPr/>
-                    <a:lstStyle/>
-                    <a:p>
-                      <a:pPr algn="ctr">
-                        <a:defRPr sz="1000">
-                          <a:solidFill>
-                            <a:srgbClr val="059669"/>
-                          </a:solidFill>
-                        </a:defRPr>
-                      </a:pPr>
-                      <a:r>
-                        <a:t>7.20 - 7.35 pH</a:t>
-                      </a:r>
-                    </a:p>
-                  </a:txBody>
-                  <a:tcPr>
-                    <a:solidFill>
-                      <a:srgbClr val="FFFFFF"/>
-                    </a:solidFill>
-                  </a:tcPr>
-                </a:tc>
-                <a:tc>
-                  <a:txBody>
-                    <a:bodyPr/>
-                    <a:lstStyle/>
-                    <a:p>
-                      <a:pPr>
-                        <a:defRPr sz="1000">
-                          <a:solidFill>
-                            <a:srgbClr val="0284C7"/>
-                          </a:solidFill>
-                        </a:defRPr>
-                      </a:pPr>
-                      <a:r>
-                        <a:t>เตือนทันทีเมื่อ pH &lt; 6.80 หรือ &gt; 8.20</a:t>
-                      </a:r>
-                    </a:p>
-                  </a:txBody>
-                  <a:tcPr>
-                    <a:solidFill>
-                      <a:srgbClr val="FFFFFF"/>
-                    </a:solidFill>
-                  </a:tcPr>
-                </a:tc>
-              </a:tr>
-              <a:tr h="609600">
-                <a:tc>
-                  <a:txBody>
-                    <a:bodyPr/>
-                    <a:lstStyle/>
-                    <a:p>
-                      <a:pPr>
-                        <a:defRPr sz="1000">
-                          <a:solidFill>
-                            <a:srgbClr val="0F172A"/>
-                          </a:solidFill>
-                        </a:defRPr>
-                      </a:pPr>
-                      <a:r>
-                        <a:t>อุณหภูมิน้ำ (Water Temp)</a:t>
-                      </a:r>
-                    </a:p>
-                  </a:txBody>
-                  <a:tcPr>
-                    <a:solidFill>
-                      <a:srgbClr val="F8FAFC"/>
-                    </a:solidFill>
-                  </a:tcPr>
-                </a:tc>
-                <a:tc>
-                  <a:txBody>
-                    <a:bodyPr/>
-                    <a:lstStyle/>
-                    <a:p>
-                      <a:pPr algn="ctr">
-                        <a:defRPr sz="1000">
-                          <a:solidFill>
-                            <a:srgbClr val="0F172A"/>
-                          </a:solidFill>
-                        </a:defRPr>
-                      </a:pPr>
-                      <a:r>
-                        <a:t>°Celsius / °F</a:t>
-                      </a:r>
-                    </a:p>
-                  </a:txBody>
-                  <a:tcPr>
-                    <a:solidFill>
-                      <a:srgbClr val="F8FAFC"/>
-                    </a:solidFill>
-                  </a:tcPr>
-                </a:tc>
-                <a:tc>
-                  <a:txBody>
-                    <a:bodyPr/>
-                    <a:lstStyle/>
-                    <a:p>
-                      <a:pPr algn="ctr">
-                        <a:defRPr sz="1000">
-                          <a:solidFill>
-                            <a:srgbClr val="0F172A"/>
-                          </a:solidFill>
-                        </a:defRPr>
-                      </a:pPr>
-                      <a:r>
-                        <a:t>15.0 - 30.0 °C</a:t>
-                      </a:r>
-                    </a:p>
-                  </a:txBody>
-                  <a:tcPr>
-                    <a:solidFill>
-                      <a:srgbClr val="F8FAFC"/>
-                    </a:solidFill>
-                  </a:tcPr>
-                </a:tc>
-                <a:tc>
-                  <a:txBody>
-                    <a:bodyPr/>
-                    <a:lstStyle/>
-                    <a:p>
-                      <a:pPr algn="ctr">
-                        <a:defRPr sz="1000">
-                          <a:solidFill>
-                            <a:srgbClr val="059669"/>
-                          </a:solidFill>
-                        </a:defRPr>
-                      </a:pPr>
-                      <a:r>
-                        <a:t>17.0 - 22.0 °C</a:t>
-                      </a:r>
-                    </a:p>
-                  </a:txBody>
-                  <a:tcPr>
-                    <a:solidFill>
-                      <a:srgbClr val="F8FAFC"/>
-                    </a:solidFill>
-                  </a:tcPr>
-                </a:tc>
-                <a:tc>
-                  <a:txBody>
-                    <a:bodyPr/>
-                    <a:lstStyle/>
-                    <a:p>
-                      <a:pPr>
-                        <a:defRPr sz="1000">
-                          <a:solidFill>
-                            <a:srgbClr val="0284C7"/>
-                          </a:solidFill>
-                        </a:defRPr>
-                      </a:pPr>
-                      <a:r>
-                        <a:t>ส่งค่า ATC ปรับชดเชยการอ่านค่า pH/TDS สด</a:t>
-                      </a:r>
-                    </a:p>
-                  </a:txBody>
-                  <a:tcPr>
-                    <a:solidFill>
-                      <a:srgbClr val="F8FAFC"/>
-                    </a:solidFill>
-                  </a:tcPr>
-                </a:tc>
-              </a:tr>
-              <a:tr h="609600">
-                <a:tc>
-                  <a:txBody>
-                    <a:bodyPr/>
-                    <a:lstStyle/>
-                    <a:p>
-                      <a:pPr>
-                        <a:defRPr sz="1000">
-                          <a:solidFill>
-                            <a:srgbClr val="0F172A"/>
-                          </a:solidFill>
-                        </a:defRPr>
-                      </a:pPr>
-                      <a:r>
-                        <a:t>สารละลายรวม (TDS)</a:t>
-                      </a:r>
-                    </a:p>
-                  </a:txBody>
-                  <a:tcPr>
-                    <a:solidFill>
-                      <a:srgbClr val="FFFFFF"/>
-                    </a:solidFill>
-                  </a:tcPr>
-                </a:tc>
-                <a:tc>
-                  <a:txBody>
-                    <a:bodyPr/>
-                    <a:lstStyle/>
-                    <a:p>
-                      <a:pPr algn="ctr">
-                        <a:defRPr sz="1000">
-                          <a:solidFill>
-                            <a:srgbClr val="0F172A"/>
-                          </a:solidFill>
-                        </a:defRPr>
-                      </a:pPr>
-                      <a:r>
-                        <a:t>ppm (mg/L)</a:t>
-                      </a:r>
-                    </a:p>
-                  </a:txBody>
-                  <a:tcPr>
-                    <a:solidFill>
-                      <a:srgbClr val="FFFFFF"/>
-                    </a:solidFill>
-                  </a:tcPr>
-                </a:tc>
-                <a:tc>
-                  <a:txBody>
-                    <a:bodyPr/>
-                    <a:lstStyle/>
-                    <a:p>
-                      <a:pPr algn="ctr">
-                        <a:defRPr sz="1000">
-                          <a:solidFill>
-                            <a:srgbClr val="0F172A"/>
-                          </a:solidFill>
-                        </a:defRPr>
-                      </a:pPr>
-                      <a:r>
-                        <a:t>&lt; 500 ppm</a:t>
-                      </a:r>
-                    </a:p>
-                  </a:txBody>
-                  <a:tcPr>
-                    <a:solidFill>
-                      <a:srgbClr val="FFFFFF"/>
-                    </a:solidFill>
-                  </a:tcPr>
-                </a:tc>
-                <a:tc>
-                  <a:txBody>
-                    <a:bodyPr/>
-                    <a:lstStyle/>
-                    <a:p>
-                      <a:pPr algn="ctr">
-                        <a:defRPr sz="1000">
-                          <a:solidFill>
-                            <a:srgbClr val="059669"/>
-                          </a:solidFill>
-                        </a:defRPr>
-                      </a:pPr>
-                      <a:r>
-                        <a:t>180 - 230 ppm</a:t>
-                      </a:r>
-                    </a:p>
-                  </a:txBody>
-                  <a:tcPr>
-                    <a:solidFill>
-                      <a:srgbClr val="FFFFFF"/>
-                    </a:solidFill>
-                  </a:tcPr>
-                </a:tc>
-                <a:tc>
-                  <a:txBody>
-                    <a:bodyPr/>
-                    <a:lstStyle/>
-                    <a:p>
-                      <a:pPr>
-                        <a:defRPr sz="1000">
-                          <a:solidFill>
-                            <a:srgbClr val="0284C7"/>
-                          </a:solidFill>
-                        </a:defRPr>
-                      </a:pPr>
-                      <a:r>
-                        <a:t>เตือนเมื่อ &gt; 450 ppm (แนะตรวจเช็คไส้กรอง)</a:t>
-                      </a:r>
-                    </a:p>
-                  </a:txBody>
-                  <a:tcPr>
-                    <a:solidFill>
-                      <a:srgbClr val="FFFFFF"/>
-                    </a:solidFill>
-                  </a:tcPr>
-                </a:tc>
-              </a:tr>
-              <a:tr h="609600">
-                <a:tc>
-                  <a:txBody>
-                    <a:bodyPr/>
-                    <a:lstStyle/>
-                    <a:p>
-                      <a:pPr>
-                        <a:defRPr sz="1000">
-                          <a:solidFill>
-                            <a:srgbClr val="0F172A"/>
-                          </a:solidFill>
-                        </a:defRPr>
-                      </a:pPr>
-                      <a:r>
-                        <a:t>คลอรีนคงเหลือ (Residual Cl)</a:t>
-                      </a:r>
-                    </a:p>
-                  </a:txBody>
-                  <a:tcPr>
-                    <a:solidFill>
-                      <a:srgbClr val="F8FAFC"/>
-                    </a:solidFill>
-                  </a:tcPr>
-                </a:tc>
-                <a:tc>
-                  <a:txBody>
-                    <a:bodyPr/>
-                    <a:lstStyle/>
-                    <a:p>
-                      <a:pPr algn="ctr">
-                        <a:defRPr sz="1000">
-                          <a:solidFill>
-                            <a:srgbClr val="0F172A"/>
-                          </a:solidFill>
-                        </a:defRPr>
-                      </a:pPr>
-                      <a:r>
-                        <a:t>mg/L (ppm)</a:t>
-                      </a:r>
-                    </a:p>
-                  </a:txBody>
-                  <a:tcPr>
-                    <a:solidFill>
-                      <a:srgbClr val="F8FAFC"/>
-                    </a:solidFill>
-                  </a:tcPr>
-                </a:tc>
-                <a:tc>
-                  <a:txBody>
-                    <a:bodyPr/>
-                    <a:lstStyle/>
-                    <a:p>
-                      <a:pPr algn="ctr">
-                        <a:defRPr sz="1000">
-                          <a:solidFill>
-                            <a:srgbClr val="0F172A"/>
-                          </a:solidFill>
-                        </a:defRPr>
-                      </a:pPr>
-                      <a:r>
-                        <a:t>0.20 - 2.00 mg/L</a:t>
-                      </a:r>
-                    </a:p>
-                  </a:txBody>
-                  <a:tcPr>
-                    <a:solidFill>
-                      <a:srgbClr val="F8FAFC"/>
-                    </a:solidFill>
-                  </a:tcPr>
-                </a:tc>
-                <a:tc>
-                  <a:txBody>
-                    <a:bodyPr/>
-                    <a:lstStyle/>
-                    <a:p>
-                      <a:pPr algn="ctr">
-                        <a:defRPr sz="1000">
-                          <a:solidFill>
-                            <a:srgbClr val="059669"/>
-                          </a:solidFill>
-                        </a:defRPr>
-                      </a:pPr>
-                      <a:r>
-                        <a:t>0.80 - 1.00 mg/L</a:t>
-                      </a:r>
-                    </a:p>
-                  </a:txBody>
-                  <a:tcPr>
-                    <a:solidFill>
-                      <a:srgbClr val="F8FAFC"/>
-                    </a:solidFill>
-                  </a:tcPr>
-                </a:tc>
-                <a:tc>
-                  <a:txBody>
-                    <a:bodyPr/>
-                    <a:lstStyle/>
-                    <a:p>
-                      <a:pPr>
-                        <a:defRPr sz="1000">
-                          <a:solidFill>
-                            <a:srgbClr val="0284C7"/>
-                          </a:solidFill>
-                        </a:defRPr>
-                      </a:pPr>
-                      <a:r>
-                        <a:t>เตือนเมื่อ &lt; 0.20 mg/L (ความเสี่ยงเชื้อโรค)</a:t>
-                      </a:r>
-                    </a:p>
-                  </a:txBody>
-                  <a:tcPr>
-                    <a:solidFill>
-                      <a:srgbClr val="F8FAFC"/>
-                    </a:solidFill>
-                  </a:tcPr>
-                </a:tc>
-              </a:tr>
-              <a:tr h="609600">
-                <a:tc>
-                  <a:txBody>
-                    <a:bodyPr/>
-                    <a:lstStyle/>
-                    <a:p>
-                      <a:pPr>
-                        <a:defRPr sz="1000">
-                          <a:solidFill>
-                            <a:srgbClr val="0F172A"/>
-                          </a:solidFill>
-                        </a:defRPr>
-                      </a:pPr>
-                      <a:r>
-                        <a:t>ศักย์ไฟฟ้าออกซิเดชัน (ORP)</a:t>
-                      </a:r>
-                    </a:p>
-                  </a:txBody>
-                  <a:tcPr>
-                    <a:solidFill>
-                      <a:srgbClr val="FFFFFF"/>
-                    </a:solidFill>
-                  </a:tcPr>
-                </a:tc>
-                <a:tc>
-                  <a:txBody>
-                    <a:bodyPr/>
-                    <a:lstStyle/>
-                    <a:p>
-                      <a:pPr algn="ctr">
-                        <a:defRPr sz="1000">
-                          <a:solidFill>
-                            <a:srgbClr val="0F172A"/>
-                          </a:solidFill>
-                        </a:defRPr>
-                      </a:pPr>
-                      <a:r>
-                        <a:t>mV (Millivolts)</a:t>
-                      </a:r>
-                    </a:p>
-                  </a:txBody>
-                  <a:tcPr>
-                    <a:solidFill>
-                      <a:srgbClr val="FFFFFF"/>
-                    </a:solidFill>
-                  </a:tcPr>
-                </a:tc>
-                <a:tc>
-                  <a:txBody>
-                    <a:bodyPr/>
-                    <a:lstStyle/>
-                    <a:p>
-                      <a:pPr algn="ctr">
-                        <a:defRPr sz="1000">
-                          <a:solidFill>
-                            <a:srgbClr val="0F172A"/>
-                          </a:solidFill>
-                        </a:defRPr>
-                      </a:pPr>
-                      <a:r>
-                        <a:t>&gt; 650 mV (Sanitized)</a:t>
-                      </a:r>
-                    </a:p>
-                  </a:txBody>
-                  <a:tcPr>
-                    <a:solidFill>
-                      <a:srgbClr val="FFFFFF"/>
-                    </a:solidFill>
-                  </a:tcPr>
-                </a:tc>
-                <a:tc>
-                  <a:txBody>
-                    <a:bodyPr/>
-                    <a:lstStyle/>
-                    <a:p>
-                      <a:pPr algn="ctr">
-                        <a:defRPr sz="1000">
-                          <a:solidFill>
-                            <a:srgbClr val="059669"/>
-                          </a:solidFill>
-                        </a:defRPr>
-                      </a:pPr>
-                      <a:r>
-                        <a:t>700 - 750 mV</a:t>
-                      </a:r>
-                    </a:p>
-                  </a:txBody>
-                  <a:tcPr>
-                    <a:solidFill>
-                      <a:srgbClr val="FFFFFF"/>
-                    </a:solidFill>
-                  </a:tcPr>
-                </a:tc>
-                <a:tc>
-                  <a:txBody>
-                    <a:bodyPr/>
-                    <a:lstStyle/>
-                    <a:p>
-                      <a:pPr>
-                        <a:defRPr sz="1000">
-                          <a:solidFill>
-                            <a:srgbClr val="0284C7"/>
-                          </a:solidFill>
-                        </a:defRPr>
-                      </a:pPr>
-                      <a:r>
-                        <a:t>ยืนยันความสามารถในการฆ่าเชื้อโรค 99.9%</a:t>
-                      </a:r>
-                    </a:p>
-                  </a:txBody>
-                  <a:tcPr>
-                    <a:solidFill>
-                      <a:srgbClr val="FFFFFF"/>
-                    </a:solidFill>
-                  </a:tcPr>
-                </a:tc>
-              </a:tr>
-            </a:tbl>
-          </a:graphicData>
-        </a:graphic>
-      </p:graphicFrame>
-      <p:sp>
-        <p:nvSpPr>
-          <p:cNvPr id="4" name="Rounded Rectangle 3"/>
+              <a:t>สเปกเซนเซอร์ตรวจวัดคุณภาพน้ำ (High-Precision Sensor Probes)</a:t>
+            </a:r>
+          </a:p>
+        </p:txBody>
+      </p:sp>
+      <p:sp>
+        <p:nvSpPr>
+          <p:cNvPr id="3" name="Rounded Rectangle 2"/>
           <p:cNvSpPr/>
           <p:nvPr/>
         </p:nvSpPr>
         <p:spPr>
           <a:xfrm>
-            <a:off x="731520" y="5303520"/>
-            <a:ext cx="10728655" cy="1005840"/>
+            <a:off x="731520" y="1463040"/>
+            <a:ext cx="2468880" cy="2926080"/>
+          </a:xfrm>
+          <a:prstGeom prst="roundRect">
+            <a:avLst/>
+          </a:prstGeom>
+          <a:solidFill>
+            <a:srgbClr val="FFFFFF"/>
+          </a:solidFill>
+          <a:ln w="19050">
+            <a:solidFill>
+              <a:srgbClr val="D97706"/>
+            </a:solidFill>
+          </a:ln>
+        </p:spPr>
+        <p:style>
+          <a:lnRef idx="1">
+            <a:schemeClr val="accent1"/>
+          </a:lnRef>
+          <a:fillRef idx="3">
+            <a:schemeClr val="accent1"/>
+          </a:fillRef>
+          <a:effectRef idx="2">
+            <a:schemeClr val="accent1"/>
+          </a:effectRef>
+          <a:fontRef idx="minor">
+            <a:schemeClr val="lt1"/>
+          </a:fontRef>
+        </p:style>
+        <p:txBody>
+          <a:bodyPr rtlCol="0" anchor="ctr"/>
+          <a:lstStyle/>
+          <a:p>
+            <a:pPr algn="ctr"/>
+          </a:p>
+        </p:txBody>
+      </p:sp>
+      <p:sp>
+        <p:nvSpPr>
+          <p:cNvPr id="4" name="TextBox 3"/>
+          <p:cNvSpPr txBox="1"/>
+          <p:nvPr/>
+        </p:nvSpPr>
+        <p:spPr>
+          <a:xfrm>
+            <a:off x="868680" y="1600200"/>
+            <a:ext cx="2194560" cy="2651760"/>
+          </a:xfrm>
+          <a:prstGeom prst="rect">
+            <a:avLst/>
+          </a:prstGeom>
+          <a:noFill/>
+        </p:spPr>
+        <p:txBody>
+          <a:bodyPr wrap="square">
+            <a:spAutoFit/>
+          </a:bodyPr>
+          <a:lstStyle/>
+          <a:p>
+            <a:pPr>
+              <a:defRPr sz="1000" b="1">
+                <a:solidFill>
+                  <a:srgbClr val="D97706"/>
+                </a:solidFill>
+              </a:defRPr>
+            </a:pPr>
+            <a:r>
+              <a:t>SENSOR 01</a:t>
+            </a:r>
+          </a:p>
+          <a:p>
+            <a:pPr>
+              <a:spcAft>
+                <a:spcPts val="400"/>
+              </a:spcAft>
+              <a:defRPr sz="1300" b="1">
+                <a:solidFill>
+                  <a:srgbClr val="0F172A"/>
+                </a:solidFill>
+              </a:defRPr>
+            </a:pPr>
+            <a:r>
+              <a:t>อุณหภูมิน้ำ (Water Temp)</a:t>
+            </a:r>
+          </a:p>
+          <a:p>
+            <a:pPr>
+              <a:spcAft>
+                <a:spcPts val="600"/>
+              </a:spcAft>
+              <a:defRPr sz="1050" b="1">
+                <a:solidFill>
+                  <a:srgbClr val="D97706"/>
+                </a:solidFill>
+              </a:defRPr>
+            </a:pPr>
+            <a:r>
+              <a:t>หัววัด: PT1000 Platinum RTD</a:t>
+            </a:r>
+          </a:p>
+          <a:p>
+            <a:pPr>
+              <a:defRPr sz="950">
+                <a:solidFill>
+                  <a:srgbClr val="64748B"/>
+                </a:solidFill>
+              </a:defRPr>
+            </a:pPr>
+            <a:r>
+              <a:t>ช่วงวัด: 0.0 - 50.0°C</a:t>
+            </a:r>
+            <a:br/>
+            <a:r>
+              <a:t>ความละเอียด: ±0.1°C</a:t>
+            </a:r>
+            <a:br/>
+            <a:r>
+              <a:t>ฟังก์ชัน: ระบบชดเชยอุณหภูมิอัตโนมัติ (ATC Compensation) เพื่อความเที่ยงตรงสูงสุดของค่า pH &amp; TDS</a:t>
+            </a:r>
+          </a:p>
+        </p:txBody>
+      </p:sp>
+      <p:sp>
+        <p:nvSpPr>
+          <p:cNvPr id="5" name="Rounded Rectangle 4"/>
+          <p:cNvSpPr/>
+          <p:nvPr/>
+        </p:nvSpPr>
+        <p:spPr>
+          <a:xfrm>
+            <a:off x="3474720" y="1463040"/>
+            <a:ext cx="2468880" cy="2926080"/>
           </a:xfrm>
           <a:prstGeom prst="roundRect">
             <a:avLst/>
@@ -6699,14 +7176,14 @@
       </p:sp>
       <p:sp>
         <p:nvSpPr>
-          <p:cNvPr id="5" name="TextBox 4"/>
+          <p:cNvPr id="6" name="TextBox 5"/>
           <p:cNvSpPr txBox="1"/>
           <p:nvPr/>
         </p:nvSpPr>
         <p:spPr>
           <a:xfrm>
-            <a:off x="914400" y="5394960"/>
-            <a:ext cx="10332720" cy="822960"/>
+            <a:off x="3611880" y="1600200"/>
+            <a:ext cx="2194560" cy="2651760"/>
           </a:xfrm>
           <a:prstGeom prst="rect">
             <a:avLst/>
@@ -6720,26 +7197,439 @@
           <a:lstStyle/>
           <a:p>
             <a:pPr>
-              <a:defRPr b="1" sz="1100">
+              <a:defRPr sz="1000" b="1">
                 <a:solidFill>
                   <a:srgbClr val="0284C7"/>
                 </a:solidFill>
               </a:defRPr>
             </a:pPr>
             <a:r>
-              <a:t>🛡️ ความสอดคล้องตามมาตรฐานระดับสากลและในประเทศ:</a:t>
-            </a:r>
-          </a:p>
-          <a:p>
-            <a:pPr>
-              <a:defRPr sz="1000">
+              <a:t>SENSOR 02</a:t>
+            </a:r>
+          </a:p>
+          <a:p>
+            <a:pPr>
+              <a:spcAft>
+                <a:spcPts val="400"/>
+              </a:spcAft>
+              <a:defRPr sz="1300" b="1">
+                <a:solidFill>
+                  <a:srgbClr val="0F172A"/>
+                </a:solidFill>
+              </a:defRPr>
+            </a:pPr>
+            <a:r>
+              <a:t>ความเป็นกรด-ด่าง (pH)</a:t>
+            </a:r>
+          </a:p>
+          <a:p>
+            <a:pPr>
+              <a:spcAft>
+                <a:spcPts val="600"/>
+              </a:spcAft>
+              <a:defRPr sz="1050" b="1">
+                <a:solidFill>
+                  <a:srgbClr val="0284C7"/>
+                </a:solidFill>
+              </a:defRPr>
+            </a:pPr>
+            <a:r>
+              <a:t>หัววัด: Industrial Glass Electrode</a:t>
+            </a:r>
+          </a:p>
+          <a:p>
+            <a:pPr>
+              <a:defRPr sz="950">
                 <a:solidFill>
                   <a:srgbClr val="64748B"/>
                 </a:solidFill>
               </a:defRPr>
             </a:pPr>
             <a:r>
-              <a:t>ระบบ NCT WATER NEXUS ออกแบบตามข้อกำหนดมาตรฐานน้ำบริโภคของ กรมอนามัย กระทรวงสาธารณสุข, กรมโรงงานอุตสาหกรรม (DIW), องค์การอนามัยโลก (WHO Drinking Water Guidelines) และ US EPA</a:t>
+              <a:t>ช่วงวัด: 0.00 - 14.00 pH</a:t>
+            </a:r>
+            <a:br/>
+            <a:r>
+              <a:t>ความแม่นยำ: ±0.01 pH</a:t>
+            </a:r>
+            <a:br/>
+            <a:r>
+              <a:t>เกณฑ์มาตรฐาน: 6.50 - 8.50 pH</a:t>
+            </a:r>
+            <a:br/>
+            <a:r>
+              <a:t>รองรับการสอบเทียบดิจิทัล (Buffer 4.01, 7.00, 10.01)</a:t>
+            </a:r>
+          </a:p>
+        </p:txBody>
+      </p:sp>
+      <p:sp>
+        <p:nvSpPr>
+          <p:cNvPr id="7" name="Rounded Rectangle 6"/>
+          <p:cNvSpPr/>
+          <p:nvPr/>
+        </p:nvSpPr>
+        <p:spPr>
+          <a:xfrm>
+            <a:off x="6217920" y="1463040"/>
+            <a:ext cx="2468880" cy="2926080"/>
+          </a:xfrm>
+          <a:prstGeom prst="roundRect">
+            <a:avLst/>
+          </a:prstGeom>
+          <a:solidFill>
+            <a:srgbClr val="FFFFFF"/>
+          </a:solidFill>
+          <a:ln w="19050">
+            <a:solidFill>
+              <a:srgbClr val="059669"/>
+            </a:solidFill>
+          </a:ln>
+        </p:spPr>
+        <p:style>
+          <a:lnRef idx="1">
+            <a:schemeClr val="accent1"/>
+          </a:lnRef>
+          <a:fillRef idx="3">
+            <a:schemeClr val="accent1"/>
+          </a:fillRef>
+          <a:effectRef idx="2">
+            <a:schemeClr val="accent1"/>
+          </a:effectRef>
+          <a:fontRef idx="minor">
+            <a:schemeClr val="lt1"/>
+          </a:fontRef>
+        </p:style>
+        <p:txBody>
+          <a:bodyPr rtlCol="0" anchor="ctr"/>
+          <a:lstStyle/>
+          <a:p>
+            <a:pPr algn="ctr"/>
+          </a:p>
+        </p:txBody>
+      </p:sp>
+      <p:sp>
+        <p:nvSpPr>
+          <p:cNvPr id="8" name="TextBox 7"/>
+          <p:cNvSpPr txBox="1"/>
+          <p:nvPr/>
+        </p:nvSpPr>
+        <p:spPr>
+          <a:xfrm>
+            <a:off x="6355080" y="1600200"/>
+            <a:ext cx="2194560" cy="2651760"/>
+          </a:xfrm>
+          <a:prstGeom prst="rect">
+            <a:avLst/>
+          </a:prstGeom>
+          <a:noFill/>
+        </p:spPr>
+        <p:txBody>
+          <a:bodyPr wrap="square">
+            <a:spAutoFit/>
+          </a:bodyPr>
+          <a:lstStyle/>
+          <a:p>
+            <a:pPr>
+              <a:defRPr sz="1000" b="1">
+                <a:solidFill>
+                  <a:srgbClr val="059669"/>
+                </a:solidFill>
+              </a:defRPr>
+            </a:pPr>
+            <a:r>
+              <a:t>SENSOR 03</a:t>
+            </a:r>
+          </a:p>
+          <a:p>
+            <a:pPr>
+              <a:spcAft>
+                <a:spcPts val="400"/>
+              </a:spcAft>
+              <a:defRPr sz="1300" b="1">
+                <a:solidFill>
+                  <a:srgbClr val="0F172A"/>
+                </a:solidFill>
+              </a:defRPr>
+            </a:pPr>
+            <a:r>
+              <a:t>สารละลายรวม (TDS / EC)</a:t>
+            </a:r>
+          </a:p>
+          <a:p>
+            <a:pPr>
+              <a:spcAft>
+                <a:spcPts val="600"/>
+              </a:spcAft>
+              <a:defRPr sz="1050" b="1">
+                <a:solidFill>
+                  <a:srgbClr val="059669"/>
+                </a:solidFill>
+              </a:defRPr>
+            </a:pPr>
+            <a:r>
+              <a:t>หัววัด: Titanium Alloy 2-Pole</a:t>
+            </a:r>
+          </a:p>
+          <a:p>
+            <a:pPr>
+              <a:defRPr sz="950">
+                <a:solidFill>
+                  <a:srgbClr val="64748B"/>
+                </a:solidFill>
+              </a:defRPr>
+            </a:pPr>
+            <a:r>
+              <a:t>ช่วงวัด: 0 - 2,000 ppm (mg/L)</a:t>
+            </a:r>
+            <a:br/>
+            <a:r>
+              <a:t>ความแม่นยำ: ±2% F.S.</a:t>
+            </a:r>
+            <a:br/>
+            <a:r>
+              <a:t>เกณฑ์มาตรฐาน: &lt; 500 ppm</a:t>
+            </a:r>
+            <a:br/>
+            <a:r>
+              <a:t>ตรวจจับปริมาณสารแขวนลอยและแร่ธาตุในน้ำ</a:t>
+            </a:r>
+          </a:p>
+        </p:txBody>
+      </p:sp>
+      <p:sp>
+        <p:nvSpPr>
+          <p:cNvPr id="9" name="Rounded Rectangle 8"/>
+          <p:cNvSpPr/>
+          <p:nvPr/>
+        </p:nvSpPr>
+        <p:spPr>
+          <a:xfrm>
+            <a:off x="8961120" y="1463040"/>
+            <a:ext cx="2468880" cy="2926080"/>
+          </a:xfrm>
+          <a:prstGeom prst="roundRect">
+            <a:avLst/>
+          </a:prstGeom>
+          <a:solidFill>
+            <a:srgbClr val="FFFFFF"/>
+          </a:solidFill>
+          <a:ln w="19050">
+            <a:solidFill>
+              <a:srgbClr val="0284C7"/>
+            </a:solidFill>
+          </a:ln>
+        </p:spPr>
+        <p:style>
+          <a:lnRef idx="1">
+            <a:schemeClr val="accent1"/>
+          </a:lnRef>
+          <a:fillRef idx="3">
+            <a:schemeClr val="accent1"/>
+          </a:fillRef>
+          <a:effectRef idx="2">
+            <a:schemeClr val="accent1"/>
+          </a:effectRef>
+          <a:fontRef idx="minor">
+            <a:schemeClr val="lt1"/>
+          </a:fontRef>
+        </p:style>
+        <p:txBody>
+          <a:bodyPr rtlCol="0" anchor="ctr"/>
+          <a:lstStyle/>
+          <a:p>
+            <a:pPr algn="ctr"/>
+          </a:p>
+        </p:txBody>
+      </p:sp>
+      <p:sp>
+        <p:nvSpPr>
+          <p:cNvPr id="10" name="TextBox 9"/>
+          <p:cNvSpPr txBox="1"/>
+          <p:nvPr/>
+        </p:nvSpPr>
+        <p:spPr>
+          <a:xfrm>
+            <a:off x="9098280" y="1600200"/>
+            <a:ext cx="2194560" cy="2651760"/>
+          </a:xfrm>
+          <a:prstGeom prst="rect">
+            <a:avLst/>
+          </a:prstGeom>
+          <a:noFill/>
+        </p:spPr>
+        <p:txBody>
+          <a:bodyPr wrap="square">
+            <a:spAutoFit/>
+          </a:bodyPr>
+          <a:lstStyle/>
+          <a:p>
+            <a:pPr>
+              <a:defRPr sz="1000" b="1">
+                <a:solidFill>
+                  <a:srgbClr val="0284C7"/>
+                </a:solidFill>
+              </a:defRPr>
+            </a:pPr>
+            <a:r>
+              <a:t>SENSOR 04</a:t>
+            </a:r>
+          </a:p>
+          <a:p>
+            <a:pPr>
+              <a:spcAft>
+                <a:spcPts val="400"/>
+              </a:spcAft>
+              <a:defRPr sz="1300" b="1">
+                <a:solidFill>
+                  <a:srgbClr val="0F172A"/>
+                </a:solidFill>
+              </a:defRPr>
+            </a:pPr>
+            <a:r>
+              <a:t>คลอรีนคงเหลือ (Residual Cl)</a:t>
+            </a:r>
+          </a:p>
+          <a:p>
+            <a:pPr>
+              <a:spcAft>
+                <a:spcPts val="600"/>
+              </a:spcAft>
+              <a:defRPr sz="1050" b="1">
+                <a:solidFill>
+                  <a:srgbClr val="0284C7"/>
+                </a:solidFill>
+              </a:defRPr>
+            </a:pPr>
+            <a:r>
+              <a:t>หัววัด: Amperometric Probe</a:t>
+            </a:r>
+          </a:p>
+          <a:p>
+            <a:pPr>
+              <a:defRPr sz="950">
+                <a:solidFill>
+                  <a:srgbClr val="64748B"/>
+                </a:solidFill>
+              </a:defRPr>
+            </a:pPr>
+            <a:r>
+              <a:t>ช่วงวัด: 0.00 - 5.00 mg/L (ppm)</a:t>
+            </a:r>
+            <a:br/>
+            <a:r>
+              <a:t>ความแม่นยำ: ±0.05 mg/L</a:t>
+            </a:r>
+            <a:br/>
+            <a:r>
+              <a:t>เกณฑ์มาตรฐาน: 0.20 - 2.00 mg/L</a:t>
+            </a:r>
+            <a:br/>
+            <a:r>
+              <a:t>ตรวจเช็คประสิทธิภาพการฆ่าเชื้อโรค 100%</a:t>
+            </a:r>
+          </a:p>
+        </p:txBody>
+      </p:sp>
+      <p:sp>
+        <p:nvSpPr>
+          <p:cNvPr id="11" name="Rounded Rectangle 10"/>
+          <p:cNvSpPr/>
+          <p:nvPr/>
+        </p:nvSpPr>
+        <p:spPr>
+          <a:xfrm>
+            <a:off x="731520" y="4663440"/>
+            <a:ext cx="10728655" cy="1645920"/>
+          </a:xfrm>
+          <a:prstGeom prst="roundRect">
+            <a:avLst/>
+          </a:prstGeom>
+          <a:solidFill>
+            <a:srgbClr val="0F172A"/>
+          </a:solidFill>
+          <a:ln w="19050">
+            <a:solidFill>
+              <a:srgbClr val="0284C7"/>
+            </a:solidFill>
+          </a:ln>
+        </p:spPr>
+        <p:style>
+          <a:lnRef idx="1">
+            <a:schemeClr val="accent1"/>
+          </a:lnRef>
+          <a:fillRef idx="3">
+            <a:schemeClr val="accent1"/>
+          </a:fillRef>
+          <a:effectRef idx="2">
+            <a:schemeClr val="accent1"/>
+          </a:effectRef>
+          <a:fontRef idx="minor">
+            <a:schemeClr val="lt1"/>
+          </a:fontRef>
+        </p:style>
+        <p:txBody>
+          <a:bodyPr rtlCol="0" anchor="ctr"/>
+          <a:lstStyle/>
+          <a:p>
+            <a:pPr algn="ctr"/>
+          </a:p>
+        </p:txBody>
+      </p:sp>
+      <p:sp>
+        <p:nvSpPr>
+          <p:cNvPr id="12" name="TextBox 11"/>
+          <p:cNvSpPr txBox="1"/>
+          <p:nvPr/>
+        </p:nvSpPr>
+        <p:spPr>
+          <a:xfrm>
+            <a:off x="1005840" y="4800600"/>
+            <a:ext cx="10149840" cy="1371600"/>
+          </a:xfrm>
+          <a:prstGeom prst="rect">
+            <a:avLst/>
+          </a:prstGeom>
+          <a:noFill/>
+        </p:spPr>
+        <p:txBody>
+          <a:bodyPr wrap="square">
+            <a:spAutoFit/>
+          </a:bodyPr>
+          <a:lstStyle/>
+          <a:p>
+            <a:pPr>
+              <a:spcAft>
+                <a:spcPts val="400"/>
+              </a:spcAft>
+              <a:defRPr sz="1300" b="1">
+                <a:solidFill>
+                  <a:srgbClr val="2DD4BF"/>
+                </a:solidFill>
+              </a:defRPr>
+            </a:pPr>
+            <a:r>
+              <a:t>🎛️ SMART INDUSTRIAL CONTROLLER NODE &amp; TELEMETRY</a:t>
+            </a:r>
+          </a:p>
+          <a:p>
+            <a:pPr>
+              <a:defRPr sz="1050">
+                <a:solidFill>
+                  <a:srgbClr val="E2E8F0"/>
+                </a:solidFill>
+              </a:defRPr>
+            </a:pPr>
+            <a:r>
+              <a:t>• Telemetry Multi-Link: ส่งสัญญาณผ่าน WiFi 2.4GHz, 4G LTE Cellular และ Modbus RS-485 สู่ระบบ Cloud SCADA ตลอด 24 ชม.</a:t>
+            </a:r>
+            <a:br/>
+            <a:r>
+              <a:t>• ระบบสำรองไฟอัจฉริยะ (LiFePO4 Battery Backup): ใช้งานต่อเนื่องแม้ยามไฟดับ พร้อมระบบตรวจสอบระดับแบตเตอรี่ Real-time</a:t>
+            </a:r>
+            <a:br/>
+            <a:r>
+              <a:t>• Alarm Output Relay: พอร์ต Dry Contact สำหรับต่อไซเรนเตือนภัยภายนอก หรือส่งสัญญาณต่อไปยังระบบ SCADA / PLC เดิมของโรงงาน</a:t>
             </a:r>
           </a:p>
         </p:txBody>
@@ -6803,7 +7693,7 @@
               </a:defRPr>
             </a:pPr>
             <a:r>
-              <a:t>NCT WATER NEXUS PRO | COMMERCIAL PROPOSAL</a:t>
+              <a:t>NCT WATER NEXUS PRO | 100-NODE PROJECT SOLUTION</a:t>
             </a:r>
           </a:p>
           <a:p>
@@ -6815,7 +7705,7 @@
               </a:defRPr>
             </a:pPr>
             <a:r>
-              <a:t>ความคุ้มค่าและผลตอบแทนการลงทุน (ROI &amp; Business Value)</a:t>
+              <a:t>ระบบแดชบอร์ดรวมศูนย์ 100 จุด (Centralized 100-Node Dashboard)</a:t>
             </a:r>
           </a:p>
         </p:txBody>
@@ -6829,7 +7719,7 @@
         <p:spPr>
           <a:xfrm>
             <a:off x="731520" y="1463040"/>
-            <a:ext cx="2468880" cy="4754880"/>
+            <a:ext cx="5120640" cy="4754880"/>
           </a:xfrm>
           <a:prstGeom prst="roundRect">
             <a:avLst/>
@@ -6839,7 +7729,7 @@
           </a:solidFill>
           <a:ln w="19050">
             <a:solidFill>
-              <a:srgbClr val="0284C7"/>
+              <a:srgbClr val="CBD5E1"/>
             </a:solidFill>
           </a:ln>
         </p:spPr>
@@ -6867,57 +7757,14 @@
       </p:sp>
       <p:sp>
         <p:nvSpPr>
-          <p:cNvPr id="4" name="Rounded Rectangle 3"/>
-          <p:cNvSpPr/>
-          <p:nvPr/>
-        </p:nvSpPr>
-        <p:spPr>
-          <a:xfrm>
-            <a:off x="731520" y="1463040"/>
-            <a:ext cx="2468880" cy="1371600"/>
-          </a:xfrm>
-          <a:prstGeom prst="roundRect">
-            <a:avLst/>
-          </a:prstGeom>
-          <a:solidFill>
-            <a:srgbClr val="0284C7"/>
-          </a:solidFill>
-          <a:ln>
-            <a:noFill/>
-          </a:ln>
-        </p:spPr>
-        <p:style>
-          <a:lnRef idx="1">
-            <a:schemeClr val="accent1"/>
-          </a:lnRef>
-          <a:fillRef idx="3">
-            <a:schemeClr val="accent1"/>
-          </a:fillRef>
-          <a:effectRef idx="2">
-            <a:schemeClr val="accent1"/>
-          </a:effectRef>
-          <a:fontRef idx="minor">
-            <a:schemeClr val="lt1"/>
-          </a:fontRef>
-        </p:style>
-        <p:txBody>
-          <a:bodyPr rtlCol="0" anchor="ctr"/>
-          <a:lstStyle/>
-          <a:p>
-            <a:pPr algn="ctr"/>
-          </a:p>
-        </p:txBody>
-      </p:sp>
-      <p:sp>
-        <p:nvSpPr>
-          <p:cNvPr id="5" name="TextBox 4"/>
+          <p:cNvPr id="4" name="TextBox 3"/>
           <p:cNvSpPr txBox="1"/>
           <p:nvPr/>
         </p:nvSpPr>
         <p:spPr>
           <a:xfrm>
-            <a:off x="868680" y="1600200"/>
-            <a:ext cx="2194560" cy="1097280"/>
+            <a:off x="1005840" y="1691640"/>
+            <a:ext cx="4572000" cy="4297680"/>
           </a:xfrm>
           <a:prstGeom prst="rect">
             <a:avLst/>
@@ -6931,75 +7778,139 @@
           <a:lstStyle/>
           <a:p>
             <a:pPr>
-              <a:defRPr sz="900" b="1">
-                <a:solidFill>
-                  <a:srgbClr val="FFFFFF"/>
-                </a:solidFill>
-              </a:defRPr>
-            </a:pPr>
-            <a:r>
-              <a:t>LABOR HOURS SAVED</a:t>
-            </a:r>
-          </a:p>
-          <a:p>
-            <a:pPr>
-              <a:defRPr sz="1600" b="1">
-                <a:solidFill>
-                  <a:srgbClr val="FFFFFF"/>
-                </a:solidFill>
-              </a:defRPr>
-            </a:pPr>
-            <a:r>
-              <a:t>ลดเวลาแรงงาน 80%</a:t>
-            </a:r>
-          </a:p>
-        </p:txBody>
-      </p:sp>
-      <p:sp>
-        <p:nvSpPr>
-          <p:cNvPr id="6" name="TextBox 5"/>
-          <p:cNvSpPr txBox="1"/>
-          <p:nvPr/>
-        </p:nvSpPr>
-        <p:spPr>
-          <a:xfrm>
-            <a:off x="868680" y="3017520"/>
-            <a:ext cx="2194560" cy="3017520"/>
-          </a:xfrm>
-          <a:prstGeom prst="rect">
-            <a:avLst/>
-          </a:prstGeom>
-          <a:noFill/>
-        </p:spPr>
-        <p:txBody>
-          <a:bodyPr wrap="square">
-            <a:spAutoFit/>
-          </a:bodyPr>
-          <a:lstStyle/>
-          <a:p>
-            <a:pPr>
-              <a:defRPr sz="1050">
+              <a:spcAft>
+                <a:spcPts val="1000"/>
+              </a:spcAft>
+              <a:defRPr sz="1400" b="1">
+                <a:solidFill>
+                  <a:srgbClr val="0284C7"/>
+                </a:solidFill>
+              </a:defRPr>
+            </a:pPr>
+            <a:r>
+              <a:t>💻 1. Centralized SCADA Widescreen View</a:t>
+            </a:r>
+          </a:p>
+          <a:p>
+            <a:pPr>
+              <a:defRPr b="1" sz="1100">
+                <a:solidFill>
+                  <a:srgbClr val="0F172A"/>
+                </a:solidFill>
+              </a:defRPr>
+            </a:pPr>
+            <a:r>
+              <a:t>• GIS Map &amp; 100-Node Grid Overview:</a:t>
+            </a:r>
+          </a:p>
+          <a:p>
+            <a:pPr>
+              <a:spcAft>
+                <a:spcPts val="600"/>
+              </a:spcAft>
+              <a:defRPr sz="1000">
                 <a:solidFill>
                   <a:srgbClr val="64748B"/>
                 </a:solidFill>
               </a:defRPr>
             </a:pPr>
             <a:r>
-              <a:t>ไม่ต้องจัดเจ้าหน้าที่เดินตักน้ำตรวจวันละหลายรอบ ลดภาระงานและให้พนักงานโฟกัสงานซ่อมบำรุงเชิงรุก</a:t>
-            </a:r>
-          </a:p>
-        </p:txBody>
-      </p:sp>
-      <p:sp>
-        <p:nvSpPr>
-          <p:cNvPr id="7" name="Rounded Rectangle 6"/>
+              <a:t>  แสดงตำแหน่งและสถานะของทั้ง 100 สถานีบนแผนที่ GIS ตรวจเช็คจุดผิดปกติได้ทันที</a:t>
+            </a:r>
+          </a:p>
+          <a:p>
+            <a:pPr>
+              <a:defRPr b="1" sz="1100">
+                <a:solidFill>
+                  <a:srgbClr val="0F172A"/>
+                </a:solidFill>
+              </a:defRPr>
+            </a:pPr>
+            <a:r>
+              <a:t>• High-Frequency Telemetry Trends:</a:t>
+            </a:r>
+          </a:p>
+          <a:p>
+            <a:pPr>
+              <a:spcAft>
+                <a:spcPts val="600"/>
+              </a:spcAft>
+              <a:defRPr sz="1000">
+                <a:solidFill>
+                  <a:srgbClr val="64748B"/>
+                </a:solidFill>
+              </a:defRPr>
+            </a:pPr>
+            <a:r>
+              <a:t>  กราฟ Real-Time Dynamic Charts วิเคราะห์แนวโน้มคุณภาพน้ำของแต่ละสถานี 24 ชม.</a:t>
+            </a:r>
+          </a:p>
+          <a:p>
+            <a:pPr>
+              <a:defRPr b="1" sz="1100">
+                <a:solidFill>
+                  <a:srgbClr val="0F172A"/>
+                </a:solidFill>
+              </a:defRPr>
+            </a:pPr>
+            <a:r>
+              <a:t>• Zone Alert Management:</a:t>
+            </a:r>
+          </a:p>
+          <a:p>
+            <a:pPr>
+              <a:spcAft>
+                <a:spcPts val="600"/>
+              </a:spcAft>
+              <a:defRPr sz="1000">
+                <a:solidFill>
+                  <a:srgbClr val="64748B"/>
+                </a:solidFill>
+              </a:defRPr>
+            </a:pPr>
+            <a:r>
+              <a:t>  ระบบแยกกลุ่มโซนการแจ้งเตือนตามพื้นที่ (เช่น โซนอาคาร A, โซนโรงงาน 1-4)</a:t>
+            </a:r>
+          </a:p>
+          <a:p>
+            <a:pPr>
+              <a:defRPr b="1" sz="1100">
+                <a:solidFill>
+                  <a:srgbClr val="0F172A"/>
+                </a:solidFill>
+              </a:defRPr>
+            </a:pPr>
+            <a:r>
+              <a:t>• Automated Compliance Reports:</a:t>
+            </a:r>
+          </a:p>
+          <a:p>
+            <a:pPr>
+              <a:spcAft>
+                <a:spcPts val="600"/>
+              </a:spcAft>
+              <a:defRPr sz="1000">
+                <a:solidFill>
+                  <a:srgbClr val="64748B"/>
+                </a:solidFill>
+              </a:defRPr>
+            </a:pPr>
+            <a:r>
+              <a:t>  สร้างรายงานสรุปเปรียบเทียบ 100 จุดอัตโนมัติ ส่งออกเป็น Excel / PDF ในคลิกเดียว</a:t>
+            </a:r>
+          </a:p>
+        </p:txBody>
+      </p:sp>
+      <p:sp>
+        <p:nvSpPr>
+          <p:cNvPr id="5" name="Rounded Rectangle 4"/>
           <p:cNvSpPr/>
           <p:nvPr/>
         </p:nvSpPr>
         <p:spPr>
           <a:xfrm>
-            <a:off x="3474720" y="1463040"/>
-            <a:ext cx="2468880" cy="4754880"/>
+            <a:off x="6309360" y="1463040"/>
+            <a:ext cx="5120640" cy="4754880"/>
           </a:xfrm>
           <a:prstGeom prst="roundRect">
             <a:avLst/>
@@ -7009,7 +7920,7 @@
           </a:solidFill>
           <a:ln w="19050">
             <a:solidFill>
-              <a:srgbClr val="059669"/>
+              <a:srgbClr val="CBD5E1"/>
             </a:solidFill>
           </a:ln>
         </p:spPr>
@@ -7037,57 +7948,14 @@
       </p:sp>
       <p:sp>
         <p:nvSpPr>
-          <p:cNvPr id="8" name="Rounded Rectangle 7"/>
-          <p:cNvSpPr/>
-          <p:nvPr/>
-        </p:nvSpPr>
-        <p:spPr>
-          <a:xfrm>
-            <a:off x="3474720" y="1463040"/>
-            <a:ext cx="2468880" cy="1371600"/>
-          </a:xfrm>
-          <a:prstGeom prst="roundRect">
-            <a:avLst/>
-          </a:prstGeom>
-          <a:solidFill>
-            <a:srgbClr val="059669"/>
-          </a:solidFill>
-          <a:ln>
-            <a:noFill/>
-          </a:ln>
-        </p:spPr>
-        <p:style>
-          <a:lnRef idx="1">
-            <a:schemeClr val="accent1"/>
-          </a:lnRef>
-          <a:fillRef idx="3">
-            <a:schemeClr val="accent1"/>
-          </a:fillRef>
-          <a:effectRef idx="2">
-            <a:schemeClr val="accent1"/>
-          </a:effectRef>
-          <a:fontRef idx="minor">
-            <a:schemeClr val="lt1"/>
-          </a:fontRef>
-        </p:style>
-        <p:txBody>
-          <a:bodyPr rtlCol="0" anchor="ctr"/>
-          <a:lstStyle/>
-          <a:p>
-            <a:pPr algn="ctr"/>
-          </a:p>
-        </p:txBody>
-      </p:sp>
-      <p:sp>
-        <p:nvSpPr>
-          <p:cNvPr id="9" name="TextBox 8"/>
+          <p:cNvPr id="6" name="TextBox 5"/>
           <p:cNvSpPr txBox="1"/>
           <p:nvPr/>
         </p:nvSpPr>
         <p:spPr>
           <a:xfrm>
-            <a:off x="3611880" y="1600200"/>
-            <a:ext cx="2194560" cy="1097280"/>
+            <a:off x="6583680" y="1691640"/>
+            <a:ext cx="4572000" cy="4297680"/>
           </a:xfrm>
           <a:prstGeom prst="rect">
             <a:avLst/>
@@ -7101,401 +7969,125 @@
           <a:lstStyle/>
           <a:p>
             <a:pPr>
-              <a:defRPr sz="900" b="1">
-                <a:solidFill>
-                  <a:srgbClr val="FFFFFF"/>
-                </a:solidFill>
-              </a:defRPr>
-            </a:pPr>
-            <a:r>
-              <a:t>ZERO COMPLIANCE VIOLATION</a:t>
-            </a:r>
-          </a:p>
-          <a:p>
-            <a:pPr>
-              <a:defRPr sz="1600" b="1">
-                <a:solidFill>
-                  <a:srgbClr val="FFFFFF"/>
-                </a:solidFill>
-              </a:defRPr>
-            </a:pPr>
-            <a:r>
-              <a:t>ป้องกันน้ำหลุดเกณฑ์ 100%</a:t>
-            </a:r>
-          </a:p>
-        </p:txBody>
-      </p:sp>
-      <p:sp>
-        <p:nvSpPr>
-          <p:cNvPr id="10" name="TextBox 9"/>
-          <p:cNvSpPr txBox="1"/>
-          <p:nvPr/>
-        </p:nvSpPr>
-        <p:spPr>
-          <a:xfrm>
-            <a:off x="3611880" y="3017520"/>
-            <a:ext cx="2194560" cy="3017520"/>
-          </a:xfrm>
-          <a:prstGeom prst="rect">
-            <a:avLst/>
-          </a:prstGeom>
-          <a:noFill/>
-        </p:spPr>
-        <p:txBody>
-          <a:bodyPr wrap="square">
-            <a:spAutoFit/>
-          </a:bodyPr>
-          <a:lstStyle/>
-          <a:p>
-            <a:pPr>
-              <a:defRPr sz="1050">
+              <a:spcAft>
+                <a:spcPts val="1000"/>
+              </a:spcAft>
+              <a:defRPr sz="1400" b="1">
+                <a:solidFill>
+                  <a:srgbClr val="059669"/>
+                </a:solidFill>
+              </a:defRPr>
+            </a:pPr>
+            <a:r>
+              <a:t>📱 2. Multi-Station Mobile Companion App</a:t>
+            </a:r>
+          </a:p>
+          <a:p>
+            <a:pPr>
+              <a:defRPr b="1" sz="1100">
+                <a:solidFill>
+                  <a:srgbClr val="0F172A"/>
+                </a:solidFill>
+              </a:defRPr>
+            </a:pPr>
+            <a:r>
+              <a:t>• 100-Device Hub Selector:</a:t>
+            </a:r>
+          </a:p>
+          <a:p>
+            <a:pPr>
+              <a:spcAft>
+                <a:spcPts val="600"/>
+              </a:spcAft>
+              <a:defRPr sz="1000">
                 <a:solidFill>
                   <a:srgbClr val="64748B"/>
                 </a:solidFill>
               </a:defRPr>
             </a:pPr>
             <a:r>
-              <a:t>ระบบตรวจจับและแจ้งเตือนทันทีภายใน 1 วินาที ป้องกันปัญหาสินค้าเสียหายและค่าปรับจากหน่วยงานรัฐ</a:t>
-            </a:r>
-          </a:p>
-        </p:txBody>
-      </p:sp>
-      <p:sp>
-        <p:nvSpPr>
-          <p:cNvPr id="11" name="Rounded Rectangle 10"/>
-          <p:cNvSpPr/>
-          <p:nvPr/>
-        </p:nvSpPr>
-        <p:spPr>
-          <a:xfrm>
-            <a:off x="6217920" y="1463040"/>
-            <a:ext cx="2468880" cy="4754880"/>
-          </a:xfrm>
-          <a:prstGeom prst="roundRect">
-            <a:avLst/>
-          </a:prstGeom>
-          <a:solidFill>
-            <a:srgbClr val="FFFFFF"/>
-          </a:solidFill>
-          <a:ln w="19050">
-            <a:solidFill>
-              <a:srgbClr val="D97706"/>
-            </a:solidFill>
-          </a:ln>
-        </p:spPr>
-        <p:style>
-          <a:lnRef idx="1">
-            <a:schemeClr val="accent1"/>
-          </a:lnRef>
-          <a:fillRef idx="3">
-            <a:schemeClr val="accent1"/>
-          </a:fillRef>
-          <a:effectRef idx="2">
-            <a:schemeClr val="accent1"/>
-          </a:effectRef>
-          <a:fontRef idx="minor">
-            <a:schemeClr val="lt1"/>
-          </a:fontRef>
-        </p:style>
-        <p:txBody>
-          <a:bodyPr rtlCol="0" anchor="ctr"/>
-          <a:lstStyle/>
-          <a:p>
-            <a:pPr algn="ctr"/>
-          </a:p>
-        </p:txBody>
-      </p:sp>
-      <p:sp>
-        <p:nvSpPr>
-          <p:cNvPr id="12" name="Rounded Rectangle 11"/>
-          <p:cNvSpPr/>
-          <p:nvPr/>
-        </p:nvSpPr>
-        <p:spPr>
-          <a:xfrm>
-            <a:off x="6217920" y="1463040"/>
-            <a:ext cx="2468880" cy="1371600"/>
-          </a:xfrm>
-          <a:prstGeom prst="roundRect">
-            <a:avLst/>
-          </a:prstGeom>
-          <a:solidFill>
-            <a:srgbClr val="D97706"/>
-          </a:solidFill>
-          <a:ln>
-            <a:noFill/>
-          </a:ln>
-        </p:spPr>
-        <p:style>
-          <a:lnRef idx="1">
-            <a:schemeClr val="accent1"/>
-          </a:lnRef>
-          <a:fillRef idx="3">
-            <a:schemeClr val="accent1"/>
-          </a:fillRef>
-          <a:effectRef idx="2">
-            <a:schemeClr val="accent1"/>
-          </a:effectRef>
-          <a:fontRef idx="minor">
-            <a:schemeClr val="lt1"/>
-          </a:fontRef>
-        </p:style>
-        <p:txBody>
-          <a:bodyPr rtlCol="0" anchor="ctr"/>
-          <a:lstStyle/>
-          <a:p>
-            <a:pPr algn="ctr"/>
-          </a:p>
-        </p:txBody>
-      </p:sp>
-      <p:sp>
-        <p:nvSpPr>
-          <p:cNvPr id="13" name="TextBox 12"/>
-          <p:cNvSpPr txBox="1"/>
-          <p:nvPr/>
-        </p:nvSpPr>
-        <p:spPr>
-          <a:xfrm>
-            <a:off x="6355080" y="1600200"/>
-            <a:ext cx="2194560" cy="1097280"/>
-          </a:xfrm>
-          <a:prstGeom prst="rect">
-            <a:avLst/>
-          </a:prstGeom>
-          <a:noFill/>
-        </p:spPr>
-        <p:txBody>
-          <a:bodyPr wrap="square">
-            <a:spAutoFit/>
-          </a:bodyPr>
-          <a:lstStyle/>
-          <a:p>
-            <a:pPr>
-              <a:defRPr sz="900" b="1">
-                <a:solidFill>
-                  <a:srgbClr val="FFFFFF"/>
-                </a:solidFill>
-              </a:defRPr>
-            </a:pPr>
-            <a:r>
-              <a:t>PREDICTIVE MAINTENANCE</a:t>
-            </a:r>
-          </a:p>
-          <a:p>
-            <a:pPr>
-              <a:defRPr sz="1600" b="1">
-                <a:solidFill>
-                  <a:srgbClr val="FFFFFF"/>
-                </a:solidFill>
-              </a:defRPr>
-            </a:pPr>
-            <a:r>
-              <a:t>เพิ่มประสิทธิภาพโรงงาน</a:t>
-            </a:r>
-          </a:p>
-        </p:txBody>
-      </p:sp>
-      <p:sp>
-        <p:nvSpPr>
-          <p:cNvPr id="14" name="TextBox 13"/>
-          <p:cNvSpPr txBox="1"/>
-          <p:nvPr/>
-        </p:nvSpPr>
-        <p:spPr>
-          <a:xfrm>
-            <a:off x="6355080" y="3017520"/>
-            <a:ext cx="2194560" cy="3017520"/>
-          </a:xfrm>
-          <a:prstGeom prst="rect">
-            <a:avLst/>
-          </a:prstGeom>
-          <a:noFill/>
-        </p:spPr>
-        <p:txBody>
-          <a:bodyPr wrap="square">
-            <a:spAutoFit/>
-          </a:bodyPr>
-          <a:lstStyle/>
-          <a:p>
-            <a:pPr>
-              <a:defRPr sz="1050">
+              <a:t>  สลับดูข้อมูลสถานีตรวจวัดน้ำทั้ง 100 จุดได้ง่ายดายในแอปเดียว (ค้นหาตามชื่อ/โซน)</a:t>
+            </a:r>
+          </a:p>
+          <a:p>
+            <a:pPr>
+              <a:defRPr b="1" sz="1100">
+                <a:solidFill>
+                  <a:srgbClr val="0F172A"/>
+                </a:solidFill>
+              </a:defRPr>
+            </a:pPr>
+            <a:r>
+              <a:t>• Instant Push Notification &amp; Line Alert:</a:t>
+            </a:r>
+          </a:p>
+          <a:p>
+            <a:pPr>
+              <a:spcAft>
+                <a:spcPts val="600"/>
+              </a:spcAft>
+              <a:defRPr sz="1000">
                 <a:solidFill>
                   <a:srgbClr val="64748B"/>
                 </a:solidFill>
               </a:defRPr>
             </a:pPr>
             <a:r>
-              <a:t>วิเคราะห์แนวโน้มล่วงหน้า รู้จังหวะล้างฟิลเตอร์และเปลี่ยนสารกรองก่อนที่ระบบจะตันหรือพัง</a:t>
-            </a:r>
-          </a:p>
-        </p:txBody>
-      </p:sp>
-      <p:sp>
-        <p:nvSpPr>
-          <p:cNvPr id="15" name="Rounded Rectangle 14"/>
-          <p:cNvSpPr/>
-          <p:nvPr/>
-        </p:nvSpPr>
-        <p:spPr>
-          <a:xfrm>
-            <a:off x="8961120" y="1463040"/>
-            <a:ext cx="2468880" cy="4754880"/>
-          </a:xfrm>
-          <a:prstGeom prst="roundRect">
-            <a:avLst/>
-          </a:prstGeom>
-          <a:solidFill>
-            <a:srgbClr val="FFFFFF"/>
-          </a:solidFill>
-          <a:ln w="19050">
-            <a:solidFill>
-              <a:srgbClr val="1E293B"/>
-            </a:solidFill>
-          </a:ln>
-        </p:spPr>
-        <p:style>
-          <a:lnRef idx="1">
-            <a:schemeClr val="accent1"/>
-          </a:lnRef>
-          <a:fillRef idx="3">
-            <a:schemeClr val="accent1"/>
-          </a:fillRef>
-          <a:effectRef idx="2">
-            <a:schemeClr val="accent1"/>
-          </a:effectRef>
-          <a:fontRef idx="minor">
-            <a:schemeClr val="lt1"/>
-          </a:fontRef>
-        </p:style>
-        <p:txBody>
-          <a:bodyPr rtlCol="0" anchor="ctr"/>
-          <a:lstStyle/>
-          <a:p>
-            <a:pPr algn="ctr"/>
-          </a:p>
-        </p:txBody>
-      </p:sp>
-      <p:sp>
-        <p:nvSpPr>
-          <p:cNvPr id="16" name="Rounded Rectangle 15"/>
-          <p:cNvSpPr/>
-          <p:nvPr/>
-        </p:nvSpPr>
-        <p:spPr>
-          <a:xfrm>
-            <a:off x="8961120" y="1463040"/>
-            <a:ext cx="2468880" cy="1371600"/>
-          </a:xfrm>
-          <a:prstGeom prst="roundRect">
-            <a:avLst/>
-          </a:prstGeom>
-          <a:solidFill>
-            <a:srgbClr val="1E293B"/>
-          </a:solidFill>
-          <a:ln>
-            <a:noFill/>
-          </a:ln>
-        </p:spPr>
-        <p:style>
-          <a:lnRef idx="1">
-            <a:schemeClr val="accent1"/>
-          </a:lnRef>
-          <a:fillRef idx="3">
-            <a:schemeClr val="accent1"/>
-          </a:fillRef>
-          <a:effectRef idx="2">
-            <a:schemeClr val="accent1"/>
-          </a:effectRef>
-          <a:fontRef idx="minor">
-            <a:schemeClr val="lt1"/>
-          </a:fontRef>
-        </p:style>
-        <p:txBody>
-          <a:bodyPr rtlCol="0" anchor="ctr"/>
-          <a:lstStyle/>
-          <a:p>
-            <a:pPr algn="ctr"/>
-          </a:p>
-        </p:txBody>
-      </p:sp>
-      <p:sp>
-        <p:nvSpPr>
-          <p:cNvPr id="17" name="TextBox 16"/>
-          <p:cNvSpPr txBox="1"/>
-          <p:nvPr/>
-        </p:nvSpPr>
-        <p:spPr>
-          <a:xfrm>
-            <a:off x="9098280" y="1600200"/>
-            <a:ext cx="2194560" cy="1097280"/>
-          </a:xfrm>
-          <a:prstGeom prst="rect">
-            <a:avLst/>
-          </a:prstGeom>
-          <a:noFill/>
-        </p:spPr>
-        <p:txBody>
-          <a:bodyPr wrap="square">
-            <a:spAutoFit/>
-          </a:bodyPr>
-          <a:lstStyle/>
-          <a:p>
-            <a:pPr>
-              <a:defRPr sz="900" b="1">
-                <a:solidFill>
-                  <a:srgbClr val="FFFFFF"/>
-                </a:solidFill>
-              </a:defRPr>
-            </a:pPr>
-            <a:r>
-              <a:t>FAST PAYBACK PERIOD</a:t>
-            </a:r>
-          </a:p>
-          <a:p>
-            <a:pPr>
-              <a:defRPr sz="1600" b="1">
-                <a:solidFill>
-                  <a:srgbClr val="FFFFFF"/>
-                </a:solidFill>
-              </a:defRPr>
-            </a:pPr>
-            <a:r>
-              <a:t>คืนทุนภายใน 3 - 5 เดือน</a:t>
-            </a:r>
-          </a:p>
-        </p:txBody>
-      </p:sp>
-      <p:sp>
-        <p:nvSpPr>
-          <p:cNvPr id="18" name="TextBox 17"/>
-          <p:cNvSpPr txBox="1"/>
-          <p:nvPr/>
-        </p:nvSpPr>
-        <p:spPr>
-          <a:xfrm>
-            <a:off x="9098280" y="3017520"/>
-            <a:ext cx="2194560" cy="3017520"/>
-          </a:xfrm>
-          <a:prstGeom prst="rect">
-            <a:avLst/>
-          </a:prstGeom>
-          <a:noFill/>
-        </p:spPr>
-        <p:txBody>
-          <a:bodyPr wrap="square">
-            <a:spAutoFit/>
-          </a:bodyPr>
-          <a:lstStyle/>
-          <a:p>
-            <a:pPr>
-              <a:defRPr sz="1050">
+              <a:t>  แจ้งเตือนข้อความฉุกเฉินทันทีเมื่อมีจุดใดจุดหนึ่งใน 100 จุดหลุดเกณฑ์มาตรฐาน</a:t>
+            </a:r>
+          </a:p>
+          <a:p>
+            <a:pPr>
+              <a:defRPr b="1" sz="1100">
+                <a:solidFill>
+                  <a:srgbClr val="0F172A"/>
+                </a:solidFill>
+              </a:defRPr>
+            </a:pPr>
+            <a:r>
+              <a:t>• Color-Coded Status Cards:</a:t>
+            </a:r>
+          </a:p>
+          <a:p>
+            <a:pPr>
+              <a:spcAft>
+                <a:spcPts val="600"/>
+              </a:spcAft>
+              <a:defRPr sz="1000">
                 <a:solidFill>
                   <a:srgbClr val="64748B"/>
                 </a:solidFill>
               </a:defRPr>
             </a:pPr>
             <a:r>
-              <a:t>เมื่อเทียบกับค่าแรงงานที่ประหยัดได้ + การป้องกันความเสียหายของเครื่องจักรและผลิตภัณฑ์</a:t>
+              <a:t>  แสดงสถานะด้วยสีเขียว/เหลือง/แดง ชัดเจน รู้ทันทีว่าจุดไหนปกติดีหรือต้องตรวจเช็ค</a:t>
+            </a:r>
+          </a:p>
+          <a:p>
+            <a:pPr>
+              <a:defRPr b="1" sz="1100">
+                <a:solidFill>
+                  <a:srgbClr val="0F172A"/>
+                </a:solidFill>
+              </a:defRPr>
+            </a:pPr>
+            <a:r>
+              <a:t>• Offline Battery &amp; Link Monitor:</a:t>
+            </a:r>
+          </a:p>
+          <a:p>
+            <a:pPr>
+              <a:spcAft>
+                <a:spcPts val="600"/>
+              </a:spcAft>
+              <a:defRPr sz="1000">
+                <a:solidFill>
+                  <a:srgbClr val="64748B"/>
+                </a:solidFill>
+              </a:defRPr>
+            </a:pPr>
+            <a:r>
+              <a:t>  ตรวจสอบสัญญาณ WiFi/4G และระดับแบตเตอรี่สำรองของทุกตู้ได้จากระยะไกล</a:t>
             </a:r>
           </a:p>
         </p:txBody>
@@ -7604,7 +8196,7 @@
               </a:defRPr>
             </a:pPr>
             <a:r>
-              <a:t>💧 ยกระดับระบบตรวจวัดและบริหารจัดการคุณภาพน้ำสู่อนาคต</a:t>
+              <a:t>💧 โซลูชันบริหารจัดการคุณภาพน้ำระดับโครงการ 100 สถานี</a:t>
             </a:r>
           </a:p>
           <a:p>
@@ -7612,14 +8204,41 @@
               <a:spcAft>
                 <a:spcPts val="800"/>
               </a:spcAft>
-              <a:defRPr sz="3200" b="1">
+              <a:defRPr sz="3000" b="1">
                 <a:solidFill>
                   <a:srgbClr val="FFFFFF"/>
                 </a:solidFill>
               </a:defRPr>
             </a:pPr>
             <a:r>
-              <a:t>NCT WATER NEXUS PRO</a:t>
+              <a:t>NCT WATER NEXUS PRO (LOT OF 100 NODES)</a:t>
+            </a:r>
+          </a:p>
+          <a:p>
+            <a:pPr>
+              <a:spcAft>
+                <a:spcPts val="2000"/>
+              </a:spcAft>
+              <a:defRPr sz="1350">
+                <a:solidFill>
+                  <a:srgbClr val="CBD5E1"/>
+                </a:solidFill>
+              </a:defRPr>
+            </a:pPr>
+            <a:r>
+              <a:t>พร้อมให้คำปรึกษา ออกแบบระบบ และจัดทำใบเสนอราคาโครงการ 100 จุดโดยทีมวิศวกรผู้เชี่ยวชาญ</a:t>
+            </a:r>
+          </a:p>
+          <a:p>
+            <a:pPr>
+              <a:defRPr b="1" sz="1300">
+                <a:solidFill>
+                  <a:srgbClr val="FFFFFF"/>
+                </a:solidFill>
+              </a:defRPr>
+            </a:pPr>
+            <a:r>
+              <a:t>✨ สรุปข้อเสนอแพ็กเกจโครงการ 100 จุด:</a:t>
             </a:r>
           </a:p>
           <a:p>
@@ -7627,49 +8246,26 @@
               <a:spcAft>
                 <a:spcPts val="2400"/>
               </a:spcAft>
-              <a:defRPr sz="1400">
-                <a:solidFill>
-                  <a:srgbClr val="CBD5E1"/>
-                </a:solidFill>
-              </a:defRPr>
-            </a:pPr>
-            <a:r>
-              <a:t>พร้อมให้คำปรึกษา ออกแบบระบบ และจัดทำใบเสนอราคาตามจำนวนชุดที่ท่านต้องการ</a:t>
-            </a:r>
-          </a:p>
-          <a:p>
-            <a:pPr>
-              <a:defRPr b="1" sz="1300">
-                <a:solidFill>
-                  <a:srgbClr val="FFFFFF"/>
-                </a:solidFill>
-              </a:defRPr>
-            </a:pPr>
-            <a:r>
-              <a:t>✨ สรุปทางเลือกการลงทุน:</a:t>
-            </a:r>
-          </a:p>
-          <a:p>
-            <a:pPr>
-              <a:spcAft>
-                <a:spcPts val="2800"/>
-              </a:spcAft>
-              <a:defRPr sz="1150">
+              <a:defRPr sz="1100">
                 <a:solidFill>
                   <a:srgbClr val="E2E8F0"/>
                 </a:solidFill>
               </a:defRPr>
             </a:pPr>
             <a:r>
-              <a:t>• สั่งซื้อ &lt; 100 ชุด: ซื้อขาด ฿24,900 – ฿79,000  |  รายปี ฿12,000 – ฿39,000 / ปี</a:t>
+              <a:t>• ซื้อขาด 100 จุด (Outright Lot): ฿2,190,000 – ฿6,900,000 (เฉลี่ย ฿21,900 – ฿69,000 / จุด)</a:t>
             </a:r>
             <a:br/>
             <a:r>
-              <a:t>• สั่งซื้อ ≥ 100 ชุด (Bulk): ซื้อขาด ฿16,900 – ฿55,000  |  รายปี ฿8,400 – ฿27,000 / ปี</a:t>
+              <a:t>• สัญญารายปี 100 จุด (Annual Lot): ฿1,050,000 – ฿3,450,000 / ปี (เฉลี่ย ฿875 – ฿2,875 / จุด / เดือน)</a:t>
             </a:r>
             <a:br/>
             <a:r>
-              <a:t>• ทดลองดูหน้าจอ Dashboard ออนไลน์สดได้ที่: https://woobwarb.github.io/nct-water-nexus/</a:t>
+              <a:t>• รวมแถมเครื่องสำรอง Spare 5% + Private Cloud + White-label Logo ฟรี</a:t>
+            </a:r>
+            <a:br/>
+            <a:r>
+              <a:t>• ทดลองดู Dashboard จำลองออนไลน์ได้ที่: https://woobwarb.github.io/nct-water-nexus/</a:t>
             </a:r>
           </a:p>
           <a:p>

--- a/NCT_Water_Nexus_Report_and_Pricing.pptx
+++ b/NCT_Water_Nexus_Report_and_Pricing.pptx
@@ -3181,7 +3181,7 @@
               </a:defRPr>
             </a:pPr>
             <a:r>
-              <a:t>💧 ENTERPRISE IOT WATER QUALITY MONITORING SOLUTION</a:t>
+              <a:t>💧 โครงการระบบตรวจวัดคุณภาพน้ำอัจฉริยะและแจ้งเตือนอัตโนมัติ (100 จุด)</a:t>
             </a:r>
           </a:p>
           <a:p>
@@ -3211,26 +3211,30 @@
               </a:defRPr>
             </a:pPr>
             <a:r>
-              <a:t>100-Node Scalable Water Quality Intelligence &amp; Telemetry Solution</a:t>
+              <a:t>สรุปราคาและรูปแบบแจ้งเตือน: ตรวจวัด pH / TDS / อุณหภูมิ / คลอรีนคงเหลือ</a:t>
             </a:r>
           </a:p>
           <a:p>
             <a:pPr>
               <a:spcAft>
-                <a:spcPts val="3000"/>
+                <a:spcPts val="2800"/>
               </a:spcAft>
-              <a:defRPr sz="1250">
+              <a:defRPr sz="1200">
                 <a:solidFill>
                   <a:srgbClr val="94A3B8"/>
                 </a:solidFill>
               </a:defRPr>
             </a:pPr>
             <a:r>
-              <a:t>โซลูชันระบบตรวจวัดคุณภาพน้ำอัจฉริยะแบบกลุ่มโครงการ (Lot of 100 Nodes Package)</a:t>
+              <a:t>• ต้นทุนฮาร์ดแวร์ตู้คอนโทรล 4 ค่า: ฿21,000 / ชุด (รวม 100 จุด = ฿2,100,000)</a:t>
             </a:r>
             <a:br/>
             <a:r>
-              <a:t>โครงสร้างราคา 2 รูปแบบ: 【 แบบซื้อขาด (One-Time) 】 vs 【 แบบสัญญารายปี (Annual Subscription) 】</a:t>
+              <a:t>• 3 ออปชันซอฟต์แวร์และระบบแจ้งเตือน (Option 1: App+Telegram | Option 2: Web+Telegram | Option 3: Web+App+LINE OA)</a:t>
+            </a:r>
+            <a:br/>
+            <a:r>
+              <a:t>• รูปแบบการลงทุน: 【 แบบซื้อขาด (2.5 - 6.0 แสน) 】 vs 【 แบบรายปี (1.2 - 3.6 แสน/ปี Recurring Income) 】</a:t>
             </a:r>
           </a:p>
           <a:p>
@@ -3306,19 +3310,19 @@
               </a:defRPr>
             </a:pPr>
             <a:r>
-              <a:t>NCT WATER NEXUS PRO | 100-NODE PROJECT SOLUTION</a:t>
-            </a:r>
-          </a:p>
-          <a:p>
-            <a:pPr>
-              <a:defRPr sz="2300" b="1">
+              <a:t>โครงการระบบวัดคุณภาพน้ำอัจฉริยะ 100 จุด (NCT WATER NEXUS)</a:t>
+            </a:r>
+          </a:p>
+          <a:p>
+            <a:pPr>
+              <a:defRPr sz="2200" b="1">
                 <a:solidFill>
                   <a:srgbClr val="0F172A"/>
                 </a:solidFill>
               </a:defRPr>
             </a:pPr>
             <a:r>
-              <a:t>จุดเด่นของโซลูชันโครงการชุดละ 100 สถานี (Lot of 100 Nodes Solution)</a:t>
+              <a:t>1. ต้นทุนฮาร์ดแวร์ตู้คอนโทรลต่อชุดและรวม 100 จุด (Hardware BOM)</a:t>
             </a:r>
           </a:p>
         </p:txBody>
@@ -3332,7 +3336,7 @@
         <p:spPr>
           <a:xfrm>
             <a:off x="731520" y="1463040"/>
-            <a:ext cx="2468880" cy="4754880"/>
+            <a:ext cx="3383280" cy="3474720"/>
           </a:xfrm>
           <a:prstGeom prst="roundRect">
             <a:avLst/>
@@ -3377,7 +3381,7 @@
         <p:spPr>
           <a:xfrm>
             <a:off x="731520" y="1463040"/>
-            <a:ext cx="2468880" cy="1371600"/>
+            <a:ext cx="3383280" cy="1097280"/>
           </a:xfrm>
           <a:prstGeom prst="roundRect">
             <a:avLst/>
@@ -3419,8 +3423,8 @@
         </p:nvSpPr>
         <p:spPr>
           <a:xfrm>
-            <a:off x="868680" y="1600200"/>
-            <a:ext cx="2194560" cy="1097280"/>
+            <a:off x="868680" y="1554480"/>
+            <a:ext cx="3108960" cy="914400"/>
           </a:xfrm>
           <a:prstGeom prst="rect">
             <a:avLst/>
@@ -3434,14 +3438,14 @@
           <a:lstStyle/>
           <a:p>
             <a:pPr>
-              <a:defRPr sz="900" b="1">
+              <a:defRPr sz="1150" b="1">
                 <a:solidFill>
                   <a:srgbClr val="FFFFFF"/>
                 </a:solidFill>
               </a:defRPr>
             </a:pPr>
             <a:r>
-              <a:t>ระบบรวมศูนย์ 100 จุด</a:t>
+              <a:t>ชุดเซนเซอร์ 4 ค่า (Modela + คลอรีน)</a:t>
             </a:r>
           </a:p>
           <a:p>
@@ -3453,7 +3457,7 @@
               </a:defRPr>
             </a:pPr>
             <a:r>
-              <a:t>🗺️ Centralized SCADA Multi-Node</a:t>
+              <a:t>ต้นทุน: ฿17,000 / ชุด</a:t>
             </a:r>
           </a:p>
         </p:txBody>
@@ -3466,8 +3470,8 @@
         </p:nvSpPr>
         <p:spPr>
           <a:xfrm>
-            <a:off x="868680" y="3017520"/>
-            <a:ext cx="2194560" cy="3017520"/>
+            <a:off x="868680" y="2697480"/>
+            <a:ext cx="3108960" cy="2103120"/>
           </a:xfrm>
           <a:prstGeom prst="rect">
             <a:avLst/>
@@ -3481,14 +3485,26 @@
           <a:lstStyle/>
           <a:p>
             <a:pPr>
-              <a:defRPr sz="1050">
+              <a:defRPr sz="1000">
                 <a:solidFill>
                   <a:srgbClr val="64748B"/>
                 </a:solidFill>
               </a:defRPr>
             </a:pPr>
             <a:r>
-              <a:t>แดชบอร์ดแผนที่ GIS และ Grid View รวมสถานีตรวจวัดน้ำทั้ง 100 จุดไว้ในจอเดียว ตรวจเช็คสถานะ Online/Offline และค่าน้ำได้พร้อมกันแบบ Real-Time</a:t>
+              <a:t>• หัววัด pH แก้วอุตสาหกรรม (±0.01 pH)</a:t>
+            </a:r>
+            <a:br/>
+            <a:r>
+              <a:t>• หัววัด TDS / EC Titanium Dual-Pole</a:t>
+            </a:r>
+            <a:br/>
+            <a:r>
+              <a:t>• หัววัดอุณหภูมิน้ำ PT1000 RTD พร้อมระบบ ATC</a:t>
+            </a:r>
+            <a:br/>
+            <a:r>
+              <a:t>• หัววัดคลอรีนคงเหลือ (Residual Chlorine)</a:t>
             </a:r>
           </a:p>
         </p:txBody>
@@ -3501,8 +3517,8 @@
         </p:nvSpPr>
         <p:spPr>
           <a:xfrm>
-            <a:off x="3474720" y="1463040"/>
-            <a:ext cx="2468880" cy="4754880"/>
+            <a:off x="4389120" y="1463040"/>
+            <a:ext cx="3383280" cy="3474720"/>
           </a:xfrm>
           <a:prstGeom prst="roundRect">
             <a:avLst/>
@@ -3546,8 +3562,8 @@
         </p:nvSpPr>
         <p:spPr>
           <a:xfrm>
-            <a:off x="3474720" y="1463040"/>
-            <a:ext cx="2468880" cy="1371600"/>
+            <a:off x="4389120" y="1463040"/>
+            <a:ext cx="3383280" cy="1097280"/>
           </a:xfrm>
           <a:prstGeom prst="roundRect">
             <a:avLst/>
@@ -3589,8 +3605,8 @@
         </p:nvSpPr>
         <p:spPr>
           <a:xfrm>
-            <a:off x="3611880" y="1600200"/>
-            <a:ext cx="2194560" cy="1097280"/>
+            <a:off x="4526280" y="1554480"/>
+            <a:ext cx="3108960" cy="914400"/>
           </a:xfrm>
           <a:prstGeom prst="rect">
             <a:avLst/>
@@ -3604,14 +3620,14 @@
           <a:lstStyle/>
           <a:p>
             <a:pPr>
-              <a:defRPr sz="900" b="1">
+              <a:defRPr sz="1150" b="1">
                 <a:solidFill>
                   <a:srgbClr val="FFFFFF"/>
                 </a:solidFill>
               </a:defRPr>
             </a:pPr>
             <a:r>
-              <a:t>สลับดู 100 สถานีในมือถือ</a:t>
+              <a:t>4G Router + ซิมรายปี</a:t>
             </a:r>
           </a:p>
           <a:p>
@@ -3623,7 +3639,7 @@
               </a:defRPr>
             </a:pPr>
             <a:r>
-              <a:t>📱 Multi-Device Mobile App</a:t>
+              <a:t>ต้นทุน: ฿2,800 / ชุด</a:t>
             </a:r>
           </a:p>
         </p:txBody>
@@ -3636,8 +3652,8 @@
         </p:nvSpPr>
         <p:spPr>
           <a:xfrm>
-            <a:off x="3611880" y="3017520"/>
-            <a:ext cx="2194560" cy="3017520"/>
+            <a:off x="4526280" y="2697480"/>
+            <a:ext cx="3108960" cy="2103120"/>
           </a:xfrm>
           <a:prstGeom prst="rect">
             <a:avLst/>
@@ -3651,14 +3667,22 @@
           <a:lstStyle/>
           <a:p>
             <a:pPr>
-              <a:defRPr sz="1050">
+              <a:defRPr sz="1000">
                 <a:solidFill>
                   <a:srgbClr val="64748B"/>
                 </a:solidFill>
               </a:defRPr>
             </a:pPr>
             <a:r>
-              <a:t>ผู้บริหารและวิศวกรสามารถเลือกดูข้อมูลสถานีใดก็ได้ใน 100 จุดผ่านสมาร์ทโฟน พร้อมระบบแจ้งเตือน Line Alert แยกตามโซนพื้นที่</a:t>
+              <a:t>• Industrial 4G LTE Router เสาสัญญาณภายนอก</a:t>
+            </a:r>
+            <a:br/>
+            <a:r>
+              <a:t>• ซิมอินเทอร์เน็ต IoT รายปี ไม่จำกัดปริมาณข้อมูล</a:t>
+            </a:r>
+            <a:br/>
+            <a:r>
+              <a:t>• ส่งข้อมูล Telemetry สดทุก 1 วินาที สู่คลาวด์</a:t>
             </a:r>
           </a:p>
         </p:txBody>
@@ -3671,8 +3695,8 @@
         </p:nvSpPr>
         <p:spPr>
           <a:xfrm>
-            <a:off x="6217920" y="1463040"/>
-            <a:ext cx="2468880" cy="4754880"/>
+            <a:off x="8046720" y="1463040"/>
+            <a:ext cx="3383280" cy="3474720"/>
           </a:xfrm>
           <a:prstGeom prst="roundRect">
             <a:avLst/>
@@ -3716,8 +3740,8 @@
         </p:nvSpPr>
         <p:spPr>
           <a:xfrm>
-            <a:off x="6217920" y="1463040"/>
-            <a:ext cx="2468880" cy="1371600"/>
+            <a:off x="8046720" y="1463040"/>
+            <a:ext cx="3383280" cy="1097280"/>
           </a:xfrm>
           <a:prstGeom prst="roundRect">
             <a:avLst/>
@@ -3759,8 +3783,8 @@
         </p:nvSpPr>
         <p:spPr>
           <a:xfrm>
-            <a:off x="6355080" y="1600200"/>
-            <a:ext cx="2194560" cy="1097280"/>
+            <a:off x="8183880" y="1554480"/>
+            <a:ext cx="3108960" cy="914400"/>
           </a:xfrm>
           <a:prstGeom prst="rect">
             <a:avLst/>
@@ -3774,14 +3798,14 @@
           <a:lstStyle/>
           <a:p>
             <a:pPr>
-              <a:defRPr sz="900" b="1">
+              <a:defRPr sz="1150" b="1">
                 <a:solidFill>
                   <a:srgbClr val="FFFFFF"/>
                 </a:solidFill>
               </a:defRPr>
             </a:pPr>
             <a:r>
-              <a:t>ติดแบรนด์และโลโก้ลูกค้า</a:t>
+              <a:t>ตู้กันน้ำ IP65 + สวิตชิ่ง + เบรกเกอร์</a:t>
             </a:r>
           </a:p>
           <a:p>
@@ -3793,7 +3817,7 @@
               </a:defRPr>
             </a:pPr>
             <a:r>
-              <a:t>🏷️ White-Label Branding</a:t>
+              <a:t>ต้นทุน: ฿1,200 / ชุด</a:t>
             </a:r>
           </a:p>
         </p:txBody>
@@ -3806,8 +3830,8 @@
         </p:nvSpPr>
         <p:spPr>
           <a:xfrm>
-            <a:off x="6355080" y="3017520"/>
-            <a:ext cx="2194560" cy="3017520"/>
+            <a:off x="8183880" y="2697480"/>
+            <a:ext cx="3108960" cy="2103120"/>
           </a:xfrm>
           <a:prstGeom prst="rect">
             <a:avLst/>
@@ -3821,14 +3845,22 @@
           <a:lstStyle/>
           <a:p>
             <a:pPr>
-              <a:defRPr sz="1050">
+              <a:defRPr sz="1000">
                 <a:solidFill>
                   <a:srgbClr val="64748B"/>
                 </a:solidFill>
               </a:defRPr>
             </a:pPr>
             <a:r>
-              <a:t>ฟรีสกรีนโลโก้และชื่อโครงการของลูกค้าบนตู้ควบคุมคอนโทรลเลอร์ทั้ง 100 ชุด และปรับแต่ง UI แดชบอร์ดตามอัตลักษณ์ขององค์กร</a:t>
+              <a:t>• ตู้ควบคุมกันน้ำกันฝุ่นมาตรฐาน IP65</a:t>
+            </a:r>
+            <a:br/>
+            <a:r>
+              <a:t>• แหล่งจ่ายไฟ Switching Power Supply 12V/24V</a:t>
+            </a:r>
+            <a:br/>
+            <a:r>
+              <a:t>• เบรกเกอร์ป้องกันไฟกระชากและไฟเกิน (Surge)</a:t>
             </a:r>
           </a:p>
         </p:txBody>
@@ -3841,18 +3873,18 @@
         </p:nvSpPr>
         <p:spPr>
           <a:xfrm>
-            <a:off x="8961120" y="1463040"/>
-            <a:ext cx="2468880" cy="4754880"/>
+            <a:off x="731520" y="5120640"/>
+            <a:ext cx="10728655" cy="1188720"/>
           </a:xfrm>
           <a:prstGeom prst="roundRect">
             <a:avLst/>
           </a:prstGeom>
           <a:solidFill>
-            <a:srgbClr val="FFFFFF"/>
+            <a:srgbClr val="0F172A"/>
           </a:solidFill>
           <a:ln w="19050">
             <a:solidFill>
-              <a:srgbClr val="1E293B"/>
+              <a:srgbClr val="0284C7"/>
             </a:solidFill>
           </a:ln>
         </p:spPr>
@@ -3880,57 +3912,14 @@
       </p:sp>
       <p:sp>
         <p:nvSpPr>
-          <p:cNvPr id="16" name="Rounded Rectangle 15"/>
-          <p:cNvSpPr/>
-          <p:nvPr/>
-        </p:nvSpPr>
-        <p:spPr>
-          <a:xfrm>
-            <a:off x="8961120" y="1463040"/>
-            <a:ext cx="2468880" cy="1371600"/>
-          </a:xfrm>
-          <a:prstGeom prst="roundRect">
-            <a:avLst/>
-          </a:prstGeom>
-          <a:solidFill>
-            <a:srgbClr val="1E293B"/>
-          </a:solidFill>
-          <a:ln>
-            <a:noFill/>
-          </a:ln>
-        </p:spPr>
-        <p:style>
-          <a:lnRef idx="1">
-            <a:schemeClr val="accent1"/>
-          </a:lnRef>
-          <a:fillRef idx="3">
-            <a:schemeClr val="accent1"/>
-          </a:fillRef>
-          <a:effectRef idx="2">
-            <a:schemeClr val="accent1"/>
-          </a:effectRef>
-          <a:fontRef idx="minor">
-            <a:schemeClr val="lt1"/>
-          </a:fontRef>
-        </p:style>
-        <p:txBody>
-          <a:bodyPr rtlCol="0" anchor="ctr"/>
-          <a:lstStyle/>
-          <a:p>
-            <a:pPr algn="ctr"/>
-          </a:p>
-        </p:txBody>
-      </p:sp>
-      <p:sp>
-        <p:nvSpPr>
-          <p:cNvPr id="17" name="TextBox 16"/>
+          <p:cNvPr id="16" name="TextBox 15"/>
           <p:cNvSpPr txBox="1"/>
           <p:nvPr/>
         </p:nvSpPr>
         <p:spPr>
           <a:xfrm>
-            <a:off x="9098280" y="1600200"/>
-            <a:ext cx="2194560" cy="1097280"/>
+            <a:off x="1005840" y="5257800"/>
+            <a:ext cx="10149840" cy="914400"/>
           </a:xfrm>
           <a:prstGeom prst="rect">
             <a:avLst/>
@@ -3944,61 +3933,29 @@
           <a:lstStyle/>
           <a:p>
             <a:pPr>
-              <a:defRPr sz="900" b="1">
-                <a:solidFill>
-                  <a:srgbClr val="FFFFFF"/>
-                </a:solidFill>
-              </a:defRPr>
-            </a:pPr>
-            <a:r>
-              <a:t>อะไหล่สำรอง &amp; ทีมดูแล</a:t>
-            </a:r>
-          </a:p>
-          <a:p>
-            <a:pPr>
-              <a:defRPr sz="1400" b="1">
-                <a:solidFill>
-                  <a:srgbClr val="FFFFFF"/>
-                </a:solidFill>
-              </a:defRPr>
-            </a:pPr>
-            <a:r>
-              <a:t>🛡️ 5% Spare Units &amp; On-site SLA</a:t>
-            </a:r>
-          </a:p>
-        </p:txBody>
-      </p:sp>
-      <p:sp>
-        <p:nvSpPr>
-          <p:cNvPr id="18" name="TextBox 17"/>
-          <p:cNvSpPr txBox="1"/>
-          <p:nvPr/>
-        </p:nvSpPr>
-        <p:spPr>
-          <a:xfrm>
-            <a:off x="9098280" y="3017520"/>
-            <a:ext cx="2194560" cy="3017520"/>
-          </a:xfrm>
-          <a:prstGeom prst="rect">
-            <a:avLst/>
-          </a:prstGeom>
-          <a:noFill/>
-        </p:spPr>
-        <p:txBody>
-          <a:bodyPr wrap="square">
-            <a:spAutoFit/>
-          </a:bodyPr>
-          <a:lstStyle/>
+              <a:spcAft>
+                <a:spcPts val="400"/>
+              </a:spcAft>
+              <a:defRPr sz="1500" b="1">
+                <a:solidFill>
+                  <a:srgbClr val="2DD4BF"/>
+                </a:solidFill>
+              </a:defRPr>
+            </a:pPr>
+            <a:r>
+              <a:t>➡️ รวมต้นทุนฮาร์ดแวร์: ฿21,000 บ./ชุด  |  โครงการ 100 จุด = ฿2,100,000 บาท</a:t>
+            </a:r>
+          </a:p>
           <a:p>
             <a:pPr>
               <a:defRPr sz="1050">
                 <a:solidFill>
-                  <a:srgbClr val="64748B"/>
-                </a:solidFill>
-              </a:defRPr>
-            </a:pPr>
-            <a:r>
-              <a:t>ส่งมอบเครื่องและเซนเซอร์สำรองฉุกเฉินประจำไซต์งาน 5 ชุด (5%) พร้อมทีมวิศวกรเข้าอบรมช่างเทคนิคและดูแลตลอดโครงการ</a:t>
+                  <a:srgbClr val="E2E8F0"/>
+                </a:solidFill>
+              </a:defRPr>
+            </a:pPr>
+            <a:r>
+              <a:t>วัดค่าครบ 4 พารามิเตอร์: pH (กรด-ด่าง) • TDS (สารละลายรวม) • อุณหภูมิน้ำ (ATC) • คลอรีนคงเหลือ (Residual Chlorine) พร้อมส่งสัญญาณ 4G เรียบร้อย</a:t>
             </a:r>
           </a:p>
         </p:txBody>
@@ -4062,905 +4019,33 @@
               </a:defRPr>
             </a:pPr>
             <a:r>
-              <a:t>NCT WATER NEXUS PRO | 100-NODE PROJECT SOLUTION</a:t>
-            </a:r>
-          </a:p>
-          <a:p>
-            <a:pPr>
-              <a:defRPr sz="2300" b="1">
+              <a:t>โครงการระบบวัดคุณภาพน้ำอัจฉริยะ 100 จุด (NCT WATER NEXUS)</a:t>
+            </a:r>
+          </a:p>
+          <a:p>
+            <a:pPr>
+              <a:defRPr sz="2200" b="1">
                 <a:solidFill>
                   <a:srgbClr val="0F172A"/>
                 </a:solidFill>
               </a:defRPr>
             </a:pPr>
             <a:r>
-              <a:t>ตารางราคาจำหน่าย: ราคาต่อชุด (&lt;100) vs แพ็กเกจโครงการ 100 ชุด (Lot of 100)</a:t>
-            </a:r>
-          </a:p>
-        </p:txBody>
-      </p:sp>
-      <p:graphicFrame>
-        <p:nvGraphicFramePr>
-          <p:cNvPr id="3" name="Table 2"/>
-          <p:cNvGraphicFramePr>
-            <a:graphicFrameLocks noGrp="1"/>
-          </p:cNvGraphicFramePr>
-          <p:nvPr/>
-        </p:nvGraphicFramePr>
-        <p:xfrm>
-          <a:off x="731520" y="1463040"/>
-          <a:ext cx="10728655" cy="3931920"/>
-        </p:xfrm>
-        <a:graphic>
-          <a:graphicData uri="http://schemas.openxmlformats.org/drawingml/2006/table">
-            <a:tbl>
-              <a:tblPr firstRow="1" bandRow="1">
-                <a:tableStyleId>{5C22544A-7EE6-4342-B048-85BDC9FD1C3A}</a:tableStyleId>
-              </a:tblPr>
-              <a:tblGrid>
-                <a:gridCol w="2499055"/>
-                <a:gridCol w="2057400"/>
-                <a:gridCol w="2057400"/>
-                <a:gridCol w="2057400"/>
-                <a:gridCol w="2057400"/>
-              </a:tblGrid>
-              <a:tr h="561702">
-                <a:tc>
-                  <a:txBody>
-                    <a:bodyPr/>
-                    <a:lstStyle/>
-                    <a:p>
-                      <a:pPr algn="ctr">
-                        <a:defRPr b="1" sz="1100">
-                          <a:solidFill>
-                            <a:srgbClr val="FFFFFF"/>
-                          </a:solidFill>
-                        </a:defRPr>
-                      </a:pPr>
-                      <a:r>
-                        <a:t>ระดับแพ็กเกจ (Tier)</a:t>
-                      </a:r>
-                    </a:p>
-                  </a:txBody>
-                  <a:tcPr>
-                    <a:solidFill>
-                      <a:srgbClr val="0F172A"/>
-                    </a:solidFill>
-                  </a:tcPr>
-                </a:tc>
-                <a:tc>
-                  <a:txBody>
-                    <a:bodyPr/>
-                    <a:lstStyle/>
-                    <a:p>
-                      <a:pPr algn="ctr">
-                        <a:defRPr b="1" sz="1100">
-                          <a:solidFill>
-                            <a:srgbClr val="FFFFFF"/>
-                          </a:solidFill>
-                        </a:defRPr>
-                      </a:pPr>
-                      <a:r>
-                        <a:t>ซื้อขาด (&lt; 100 ชุด)</a:t>
-                      </a:r>
-                    </a:p>
-                  </a:txBody>
-                  <a:tcPr>
-                    <a:solidFill>
-                      <a:srgbClr val="0F172A"/>
-                    </a:solidFill>
-                  </a:tcPr>
-                </a:tc>
-                <a:tc>
-                  <a:txBody>
-                    <a:bodyPr/>
-                    <a:lstStyle/>
-                    <a:p>
-                      <a:pPr algn="ctr">
-                        <a:defRPr b="1" sz="1100">
-                          <a:solidFill>
-                            <a:srgbClr val="FFFFFF"/>
-                          </a:solidFill>
-                        </a:defRPr>
-                      </a:pPr>
-                      <a:r>
-                        <a:t>ซื้อขาด (Lot 100 ชุด)</a:t>
-                      </a:r>
-                    </a:p>
-                  </a:txBody>
-                  <a:tcPr>
-                    <a:solidFill>
-                      <a:srgbClr val="0F172A"/>
-                    </a:solidFill>
-                  </a:tcPr>
-                </a:tc>
-                <a:tc>
-                  <a:txBody>
-                    <a:bodyPr/>
-                    <a:lstStyle/>
-                    <a:p>
-                      <a:pPr algn="ctr">
-                        <a:defRPr b="1" sz="1100">
-                          <a:solidFill>
-                            <a:srgbClr val="FFFFFF"/>
-                          </a:solidFill>
-                        </a:defRPr>
-                      </a:pPr>
-                      <a:r>
-                        <a:t>รายปี (&lt; 100 ชุด)</a:t>
-                      </a:r>
-                    </a:p>
-                  </a:txBody>
-                  <a:tcPr>
-                    <a:solidFill>
-                      <a:srgbClr val="0F172A"/>
-                    </a:solidFill>
-                  </a:tcPr>
-                </a:tc>
-                <a:tc>
-                  <a:txBody>
-                    <a:bodyPr/>
-                    <a:lstStyle/>
-                    <a:p>
-                      <a:pPr algn="ctr">
-                        <a:defRPr b="1" sz="1100">
-                          <a:solidFill>
-                            <a:srgbClr val="FFFFFF"/>
-                          </a:solidFill>
-                        </a:defRPr>
-                      </a:pPr>
-                      <a:r>
-                        <a:t>รายปี (Lot 100 ชุด/ปี)</a:t>
-                      </a:r>
-                    </a:p>
-                  </a:txBody>
-                  <a:tcPr>
-                    <a:solidFill>
-                      <a:srgbClr val="0F172A"/>
-                    </a:solidFill>
-                  </a:tcPr>
-                </a:tc>
-              </a:tr>
-              <a:tr h="561702">
-                <a:tc>
-                  <a:txBody>
-                    <a:bodyPr/>
-                    <a:lstStyle/>
-                    <a:p>
-                      <a:pPr>
-                        <a:defRPr sz="950">
-                          <a:solidFill>
-                            <a:srgbClr val="0F172A"/>
-                          </a:solidFill>
-                        </a:defRPr>
-                      </a:pPr>
-                      <a:r>
-                        <a:t>1. Standard (pH + Temp PT1000)</a:t>
-                      </a:r>
-                    </a:p>
-                  </a:txBody>
-                  <a:tcPr>
-                    <a:solidFill>
-                      <a:srgbClr val="FFFFFF"/>
-                    </a:solidFill>
-                  </a:tcPr>
-                </a:tc>
-                <a:tc>
-                  <a:txBody>
-                    <a:bodyPr/>
-                    <a:lstStyle/>
-                    <a:p>
-                      <a:pPr algn="ctr">
-                        <a:defRPr sz="950" b="1">
-                          <a:solidFill>
-                            <a:srgbClr val="0284C7"/>
-                          </a:solidFill>
-                        </a:defRPr>
-                      </a:pPr>
-                      <a:r>
-                        <a:t>฿24,900 / ชุด</a:t>
-                      </a:r>
-                    </a:p>
-                  </a:txBody>
-                  <a:tcPr>
-                    <a:solidFill>
-                      <a:srgbClr val="FFFFFF"/>
-                    </a:solidFill>
-                  </a:tcPr>
-                </a:tc>
-                <a:tc>
-                  <a:txBody>
-                    <a:bodyPr/>
-                    <a:lstStyle/>
-                    <a:p>
-                      <a:pPr algn="ctr">
-                        <a:defRPr sz="950" b="1">
-                          <a:solidFill>
-                            <a:srgbClr val="0284C7"/>
-                          </a:solidFill>
-                        </a:defRPr>
-                      </a:pPr>
-                      <a:r>
-                        <a:t>฿2,190,000 / Lot</a:t>
-                      </a:r>
-                      <a:br/>
-                      <a:r>
-                        <a:t>(฿21,900/ชุด)</a:t>
-                      </a:r>
-                    </a:p>
-                  </a:txBody>
-                  <a:tcPr>
-                    <a:solidFill>
-                      <a:srgbClr val="FFFFFF"/>
-                    </a:solidFill>
-                  </a:tcPr>
-                </a:tc>
-                <a:tc>
-                  <a:txBody>
-                    <a:bodyPr/>
-                    <a:lstStyle/>
-                    <a:p>
-                      <a:pPr algn="ctr">
-                        <a:defRPr sz="950" b="1">
-                          <a:solidFill>
-                            <a:srgbClr val="059669"/>
-                          </a:solidFill>
-                        </a:defRPr>
-                      </a:pPr>
-                      <a:r>
-                        <a:t>฿12,000 / ชุด / ปี</a:t>
-                      </a:r>
-                    </a:p>
-                  </a:txBody>
-                  <a:tcPr>
-                    <a:solidFill>
-                      <a:srgbClr val="FFFFFF"/>
-                    </a:solidFill>
-                  </a:tcPr>
-                </a:tc>
-                <a:tc>
-                  <a:txBody>
-                    <a:bodyPr/>
-                    <a:lstStyle/>
-                    <a:p>
-                      <a:pPr algn="ctr">
-                        <a:defRPr sz="950" b="1">
-                          <a:solidFill>
-                            <a:srgbClr val="059669"/>
-                          </a:solidFill>
-                        </a:defRPr>
-                      </a:pPr>
-                      <a:r>
-                        <a:t>฿1,050,000 / Lot / ปี</a:t>
-                      </a:r>
-                      <a:br/>
-                      <a:r>
-                        <a:t>(฿10,500/ชุด/ปี)</a:t>
-                      </a:r>
-                    </a:p>
-                  </a:txBody>
-                  <a:tcPr>
-                    <a:solidFill>
-                      <a:srgbClr val="FFFFFF"/>
-                    </a:solidFill>
-                  </a:tcPr>
-                </a:tc>
-              </a:tr>
-              <a:tr h="561702">
-                <a:tc>
-                  <a:txBody>
-                    <a:bodyPr/>
-                    <a:lstStyle/>
-                    <a:p>
-                      <a:pPr>
-                        <a:defRPr sz="950">
-                          <a:solidFill>
-                            <a:srgbClr val="0F172A"/>
-                          </a:solidFill>
-                        </a:defRPr>
-                      </a:pPr>
-                      <a:r>
-                        <a:t>2. Pro 4-in-1 (pH, Temp, TDS, Cl)</a:t>
-                      </a:r>
-                    </a:p>
-                  </a:txBody>
-                  <a:tcPr>
-                    <a:solidFill>
-                      <a:srgbClr val="F8FAFC"/>
-                    </a:solidFill>
-                  </a:tcPr>
-                </a:tc>
-                <a:tc>
-                  <a:txBody>
-                    <a:bodyPr/>
-                    <a:lstStyle/>
-                    <a:p>
-                      <a:pPr algn="ctr">
-                        <a:defRPr sz="950" b="1">
-                          <a:solidFill>
-                            <a:srgbClr val="0284C7"/>
-                          </a:solidFill>
-                        </a:defRPr>
-                      </a:pPr>
-                      <a:r>
-                        <a:t>฿49,000 / ชุด</a:t>
-                      </a:r>
-                    </a:p>
-                  </a:txBody>
-                  <a:tcPr>
-                    <a:solidFill>
-                      <a:srgbClr val="F8FAFC"/>
-                    </a:solidFill>
-                  </a:tcPr>
-                </a:tc>
-                <a:tc>
-                  <a:txBody>
-                    <a:bodyPr/>
-                    <a:lstStyle/>
-                    <a:p>
-                      <a:pPr algn="ctr">
-                        <a:defRPr sz="950" b="1">
-                          <a:solidFill>
-                            <a:srgbClr val="0284C7"/>
-                          </a:solidFill>
-                        </a:defRPr>
-                      </a:pPr>
-                      <a:r>
-                        <a:t>฿4,250,000 / Lot</a:t>
-                      </a:r>
-                      <a:br/>
-                      <a:r>
-                        <a:t>(฿42,500/ชุด)</a:t>
-                      </a:r>
-                    </a:p>
-                  </a:txBody>
-                  <a:tcPr>
-                    <a:solidFill>
-                      <a:srgbClr val="F8FAFC"/>
-                    </a:solidFill>
-                  </a:tcPr>
-                </a:tc>
-                <a:tc>
-                  <a:txBody>
-                    <a:bodyPr/>
-                    <a:lstStyle/>
-                    <a:p>
-                      <a:pPr algn="ctr">
-                        <a:defRPr sz="950" b="1">
-                          <a:solidFill>
-                            <a:srgbClr val="059669"/>
-                          </a:solidFill>
-                        </a:defRPr>
-                      </a:pPr>
-                      <a:r>
-                        <a:t>฿24,000 / ชุด / ปี</a:t>
-                      </a:r>
-                    </a:p>
-                  </a:txBody>
-                  <a:tcPr>
-                    <a:solidFill>
-                      <a:srgbClr val="F8FAFC"/>
-                    </a:solidFill>
-                  </a:tcPr>
-                </a:tc>
-                <a:tc>
-                  <a:txBody>
-                    <a:bodyPr/>
-                    <a:lstStyle/>
-                    <a:p>
-                      <a:pPr algn="ctr">
-                        <a:defRPr sz="950" b="1">
-                          <a:solidFill>
-                            <a:srgbClr val="059669"/>
-                          </a:solidFill>
-                        </a:defRPr>
-                      </a:pPr>
-                      <a:r>
-                        <a:t>฿2,100,000 / Lot / ปี</a:t>
-                      </a:r>
-                      <a:br/>
-                      <a:r>
-                        <a:t>(฿21,000/ชุด/ปี)</a:t>
-                      </a:r>
-                    </a:p>
-                  </a:txBody>
-                  <a:tcPr>
-                    <a:solidFill>
-                      <a:srgbClr val="F8FAFC"/>
-                    </a:solidFill>
-                  </a:tcPr>
-                </a:tc>
-              </a:tr>
-              <a:tr h="561702">
-                <a:tc>
-                  <a:txBody>
-                    <a:bodyPr/>
-                    <a:lstStyle/>
-                    <a:p>
-                      <a:pPr>
-                        <a:defRPr sz="950">
-                          <a:solidFill>
-                            <a:srgbClr val="0F172A"/>
-                          </a:solidFill>
-                        </a:defRPr>
-                      </a:pPr>
-                      <a:r>
-                        <a:t>3. Enterprise 5-in-1 (+ ORP)</a:t>
-                      </a:r>
-                    </a:p>
-                  </a:txBody>
-                  <a:tcPr>
-                    <a:solidFill>
-                      <a:srgbClr val="FFFFFF"/>
-                    </a:solidFill>
-                  </a:tcPr>
-                </a:tc>
-                <a:tc>
-                  <a:txBody>
-                    <a:bodyPr/>
-                    <a:lstStyle/>
-                    <a:p>
-                      <a:pPr algn="ctr">
-                        <a:defRPr sz="950" b="1">
-                          <a:solidFill>
-                            <a:srgbClr val="0284C7"/>
-                          </a:solidFill>
-                        </a:defRPr>
-                      </a:pPr>
-                      <a:r>
-                        <a:t>฿79,000 / ชุด</a:t>
-                      </a:r>
-                    </a:p>
-                  </a:txBody>
-                  <a:tcPr>
-                    <a:solidFill>
-                      <a:srgbClr val="FFFFFF"/>
-                    </a:solidFill>
-                  </a:tcPr>
-                </a:tc>
-                <a:tc>
-                  <a:txBody>
-                    <a:bodyPr/>
-                    <a:lstStyle/>
-                    <a:p>
-                      <a:pPr algn="ctr">
-                        <a:defRPr sz="950" b="1">
-                          <a:solidFill>
-                            <a:srgbClr val="0284C7"/>
-                          </a:solidFill>
-                        </a:defRPr>
-                      </a:pPr>
-                      <a:r>
-                        <a:t>฿6,900,000 / Lot</a:t>
-                      </a:r>
-                      <a:br/>
-                      <a:r>
-                        <a:t>(฿69,000/ชุด)</a:t>
-                      </a:r>
-                    </a:p>
-                  </a:txBody>
-                  <a:tcPr>
-                    <a:solidFill>
-                      <a:srgbClr val="FFFFFF"/>
-                    </a:solidFill>
-                  </a:tcPr>
-                </a:tc>
-                <a:tc>
-                  <a:txBody>
-                    <a:bodyPr/>
-                    <a:lstStyle/>
-                    <a:p>
-                      <a:pPr algn="ctr">
-                        <a:defRPr sz="950" b="1">
-                          <a:solidFill>
-                            <a:srgbClr val="059669"/>
-                          </a:solidFill>
-                        </a:defRPr>
-                      </a:pPr>
-                      <a:r>
-                        <a:t>฿39,000 / ชุด / ปี</a:t>
-                      </a:r>
-                    </a:p>
-                  </a:txBody>
-                  <a:tcPr>
-                    <a:solidFill>
-                      <a:srgbClr val="FFFFFF"/>
-                    </a:solidFill>
-                  </a:tcPr>
-                </a:tc>
-                <a:tc>
-                  <a:txBody>
-                    <a:bodyPr/>
-                    <a:lstStyle/>
-                    <a:p>
-                      <a:pPr algn="ctr">
-                        <a:defRPr sz="950" b="1">
-                          <a:solidFill>
-                            <a:srgbClr val="059669"/>
-                          </a:solidFill>
-                        </a:defRPr>
-                      </a:pPr>
-                      <a:r>
-                        <a:t>฿3,450,000 / Lot / ปี</a:t>
-                      </a:r>
-                      <a:br/>
-                      <a:r>
-                        <a:t>(฿34,500/ชุด/ปี)</a:t>
-                      </a:r>
-                    </a:p>
-                  </a:txBody>
-                  <a:tcPr>
-                    <a:solidFill>
-                      <a:srgbClr val="FFFFFF"/>
-                    </a:solidFill>
-                  </a:tcPr>
-                </a:tc>
-              </a:tr>
-              <a:tr h="561702">
-                <a:tc>
-                  <a:txBody>
-                    <a:bodyPr/>
-                    <a:lstStyle/>
-                    <a:p>
-                      <a:pPr>
-                        <a:defRPr sz="950">
-                          <a:solidFill>
-                            <a:srgbClr val="0F172A"/>
-                          </a:solidFill>
-                        </a:defRPr>
-                      </a:pPr>
-                      <a:r>
-                        <a:t>กรรมสิทธิ์อุปกรณ์ (Hardware)</a:t>
-                      </a:r>
-                    </a:p>
-                  </a:txBody>
-                  <a:tcPr>
-                    <a:solidFill>
-                      <a:srgbClr val="F8FAFC"/>
-                    </a:solidFill>
-                  </a:tcPr>
-                </a:tc>
-                <a:tc>
-                  <a:txBody>
-                    <a:bodyPr/>
-                    <a:lstStyle/>
-                    <a:p>
-                      <a:pPr algn="ctr">
-                        <a:defRPr sz="950" b="1">
-                          <a:solidFill>
-                            <a:srgbClr val="0284C7"/>
-                          </a:solidFill>
-                        </a:defRPr>
-                      </a:pPr>
-                      <a:r>
-                        <a:t>เป็นของลูกค้า 100%</a:t>
-                      </a:r>
-                    </a:p>
-                  </a:txBody>
-                  <a:tcPr>
-                    <a:solidFill>
-                      <a:srgbClr val="F8FAFC"/>
-                    </a:solidFill>
-                  </a:tcPr>
-                </a:tc>
-                <a:tc>
-                  <a:txBody>
-                    <a:bodyPr/>
-                    <a:lstStyle/>
-                    <a:p>
-                      <a:pPr algn="ctr">
-                        <a:defRPr sz="950" b="1">
-                          <a:solidFill>
-                            <a:srgbClr val="0284C7"/>
-                          </a:solidFill>
-                        </a:defRPr>
-                      </a:pPr>
-                      <a:r>
-                        <a:t>เป็นของลูกค้า 100%</a:t>
-                      </a:r>
-                    </a:p>
-                  </a:txBody>
-                  <a:tcPr>
-                    <a:solidFill>
-                      <a:srgbClr val="F8FAFC"/>
-                    </a:solidFill>
-                  </a:tcPr>
-                </a:tc>
-                <a:tc>
-                  <a:txBody>
-                    <a:bodyPr/>
-                    <a:lstStyle/>
-                    <a:p>
-                      <a:pPr algn="ctr">
-                        <a:defRPr sz="950" b="1">
-                          <a:solidFill>
-                            <a:srgbClr val="059669"/>
-                          </a:solidFill>
-                        </a:defRPr>
-                      </a:pPr>
-                      <a:r>
-                        <a:t>ให้ยืมเครื่องฟรีตลอดสัญญา</a:t>
-                      </a:r>
-                    </a:p>
-                  </a:txBody>
-                  <a:tcPr>
-                    <a:solidFill>
-                      <a:srgbClr val="F8FAFC"/>
-                    </a:solidFill>
-                  </a:tcPr>
-                </a:tc>
-                <a:tc>
-                  <a:txBody>
-                    <a:bodyPr/>
-                    <a:lstStyle/>
-                    <a:p>
-                      <a:pPr algn="ctr">
-                        <a:defRPr sz="950" b="1">
-                          <a:solidFill>
-                            <a:srgbClr val="059669"/>
-                          </a:solidFill>
-                        </a:defRPr>
-                      </a:pPr>
-                      <a:r>
-                        <a:t>ให้ยืมเครื่องฟรีตลอดสัญญา</a:t>
-                      </a:r>
-                    </a:p>
-                  </a:txBody>
-                  <a:tcPr>
-                    <a:solidFill>
-                      <a:srgbClr val="F8FAFC"/>
-                    </a:solidFill>
-                  </a:tcPr>
-                </a:tc>
-              </a:tr>
-              <a:tr h="561702">
-                <a:tc>
-                  <a:txBody>
-                    <a:bodyPr/>
-                    <a:lstStyle/>
-                    <a:p>
-                      <a:pPr>
-                        <a:defRPr sz="950">
-                          <a:solidFill>
-                            <a:srgbClr val="0F172A"/>
-                          </a:solidFill>
-                        </a:defRPr>
-                      </a:pPr>
-                      <a:r>
-                        <a:t>อะไหล่สำรองหน้างาน (Spares)</a:t>
-                      </a:r>
-                    </a:p>
-                  </a:txBody>
-                  <a:tcPr>
-                    <a:solidFill>
-                      <a:srgbClr val="FFFFFF"/>
-                    </a:solidFill>
-                  </a:tcPr>
-                </a:tc>
-                <a:tc>
-                  <a:txBody>
-                    <a:bodyPr/>
-                    <a:lstStyle/>
-                    <a:p>
-                      <a:pPr algn="ctr">
-                        <a:defRPr sz="950" b="1">
-                          <a:solidFill>
-                            <a:srgbClr val="0284C7"/>
-                          </a:solidFill>
-                        </a:defRPr>
-                      </a:pPr>
-                      <a:r>
-                        <a:t>ฟรีตามระยะประกัน</a:t>
-                      </a:r>
-                    </a:p>
-                  </a:txBody>
-                  <a:tcPr>
-                    <a:solidFill>
-                      <a:srgbClr val="FFFFFF"/>
-                    </a:solidFill>
-                  </a:tcPr>
-                </a:tc>
-                <a:tc>
-                  <a:txBody>
-                    <a:bodyPr/>
-                    <a:lstStyle/>
-                    <a:p>
-                      <a:pPr algn="ctr">
-                        <a:defRPr sz="950" b="1">
-                          <a:solidFill>
-                            <a:srgbClr val="0284C7"/>
-                          </a:solidFill>
-                        </a:defRPr>
-                      </a:pPr>
-                      <a:r>
-                        <a:t>ฟรีตามประกัน + Spare 5%</a:t>
-                      </a:r>
-                    </a:p>
-                  </a:txBody>
-                  <a:tcPr>
-                    <a:solidFill>
-                      <a:srgbClr val="FFFFFF"/>
-                    </a:solidFill>
-                  </a:tcPr>
-                </a:tc>
-                <a:tc>
-                  <a:txBody>
-                    <a:bodyPr/>
-                    <a:lstStyle/>
-                    <a:p>
-                      <a:pPr algn="ctr">
-                        <a:defRPr sz="950" b="1">
-                          <a:solidFill>
-                            <a:srgbClr val="059669"/>
-                          </a:solidFill>
-                        </a:defRPr>
-                      </a:pPr>
-                      <a:r>
-                        <a:t>ฟรี 100% ตลอดสัญญา</a:t>
-                      </a:r>
-                    </a:p>
-                  </a:txBody>
-                  <a:tcPr>
-                    <a:solidFill>
-                      <a:srgbClr val="FFFFFF"/>
-                    </a:solidFill>
-                  </a:tcPr>
-                </a:tc>
-                <a:tc>
-                  <a:txBody>
-                    <a:bodyPr/>
-                    <a:lstStyle/>
-                    <a:p>
-                      <a:pPr algn="ctr">
-                        <a:defRPr sz="950" b="1">
-                          <a:solidFill>
-                            <a:srgbClr val="059669"/>
-                          </a:solidFill>
-                        </a:defRPr>
-                      </a:pPr>
-                      <a:r>
-                        <a:t>ฟรี 100% + Spare 5% (5 ชุด)</a:t>
-                      </a:r>
-                    </a:p>
-                  </a:txBody>
-                  <a:tcPr>
-                    <a:solidFill>
-                      <a:srgbClr val="FFFFFF"/>
-                    </a:solidFill>
-                  </a:tcPr>
-                </a:tc>
-              </a:tr>
-              <a:tr h="561708">
-                <a:tc>
-                  <a:txBody>
-                    <a:bodyPr/>
-                    <a:lstStyle/>
-                    <a:p>
-                      <a:pPr>
-                        <a:defRPr sz="950">
-                          <a:solidFill>
-                            <a:srgbClr val="0F172A"/>
-                          </a:solidFill>
-                        </a:defRPr>
-                      </a:pPr>
-                      <a:r>
-                        <a:t>Cloud &amp; ซิม 4G Telemetry</a:t>
-                      </a:r>
-                    </a:p>
-                  </a:txBody>
-                  <a:tcPr>
-                    <a:solidFill>
-                      <a:srgbClr val="F8FAFC"/>
-                    </a:solidFill>
-                  </a:tcPr>
-                </a:tc>
-                <a:tc>
-                  <a:txBody>
-                    <a:bodyPr/>
-                    <a:lstStyle/>
-                    <a:p>
-                      <a:pPr algn="ctr">
-                        <a:defRPr sz="950" b="1">
-                          <a:solidFill>
-                            <a:srgbClr val="0284C7"/>
-                          </a:solidFill>
-                        </a:defRPr>
-                      </a:pPr>
-                      <a:r>
-                        <a:t>ฟรี 1-2 ปีแรก</a:t>
-                      </a:r>
-                    </a:p>
-                  </a:txBody>
-                  <a:tcPr>
-                    <a:solidFill>
-                      <a:srgbClr val="F8FAFC"/>
-                    </a:solidFill>
-                  </a:tcPr>
-                </a:tc>
-                <a:tc>
-                  <a:txBody>
-                    <a:bodyPr/>
-                    <a:lstStyle/>
-                    <a:p>
-                      <a:pPr algn="ctr">
-                        <a:defRPr sz="950" b="1">
-                          <a:solidFill>
-                            <a:srgbClr val="0284C7"/>
-                          </a:solidFill>
-                        </a:defRPr>
-                      </a:pPr>
-                      <a:r>
-                        <a:t>ฟรี 2 ปีเต็ม (Private Server)</a:t>
-                      </a:r>
-                    </a:p>
-                  </a:txBody>
-                  <a:tcPr>
-                    <a:solidFill>
-                      <a:srgbClr val="F8FAFC"/>
-                    </a:solidFill>
-                  </a:tcPr>
-                </a:tc>
-                <a:tc>
-                  <a:txBody>
-                    <a:bodyPr/>
-                    <a:lstStyle/>
-                    <a:p>
-                      <a:pPr algn="ctr">
-                        <a:defRPr sz="950" b="1">
-                          <a:solidFill>
-                            <a:srgbClr val="059669"/>
-                          </a:solidFill>
-                        </a:defRPr>
-                      </a:pPr>
-                      <a:r>
-                        <a:t>รวมอยู่ในค่าบริการแล้ว</a:t>
-                      </a:r>
-                    </a:p>
-                  </a:txBody>
-                  <a:tcPr>
-                    <a:solidFill>
-                      <a:srgbClr val="F8FAFC"/>
-                    </a:solidFill>
-                  </a:tcPr>
-                </a:tc>
-                <a:tc>
-                  <a:txBody>
-                    <a:bodyPr/>
-                    <a:lstStyle/>
-                    <a:p>
-                      <a:pPr algn="ctr">
-                        <a:defRPr sz="950" b="1">
-                          <a:solidFill>
-                            <a:srgbClr val="059669"/>
-                          </a:solidFill>
-                        </a:defRPr>
-                      </a:pPr>
-                      <a:r>
-                        <a:t>รวมอยู่ในค่าบริการแล้ว</a:t>
-                      </a:r>
-                    </a:p>
-                  </a:txBody>
-                  <a:tcPr>
-                    <a:solidFill>
-                      <a:srgbClr val="F8FAFC"/>
-                    </a:solidFill>
-                  </a:tcPr>
-                </a:tc>
-              </a:tr>
-            </a:tbl>
-          </a:graphicData>
-        </a:graphic>
-      </p:graphicFrame>
-      <p:sp>
-        <p:nvSpPr>
-          <p:cNvPr id="4" name="Rounded Rectangle 3"/>
+              <a:t>2. ราคาซอฟต์แวร์ Dashboard &amp; ระบบแจ้งเตือน (โครงการ 100 จุด)</a:t>
+            </a:r>
+          </a:p>
+        </p:txBody>
+      </p:sp>
+      <p:sp>
+        <p:nvSpPr>
+          <p:cNvPr id="3" name="Rounded Rectangle 2"/>
           <p:cNvSpPr/>
           <p:nvPr/>
         </p:nvSpPr>
         <p:spPr>
           <a:xfrm>
-            <a:off x="731520" y="5577840"/>
-            <a:ext cx="10728655" cy="822960"/>
+            <a:off x="731520" y="1463040"/>
+            <a:ext cx="3383280" cy="4754880"/>
           </a:xfrm>
           <a:prstGeom prst="roundRect">
             <a:avLst/>
@@ -4998,14 +4083,57 @@
       </p:sp>
       <p:sp>
         <p:nvSpPr>
+          <p:cNvPr id="4" name="Rounded Rectangle 3"/>
+          <p:cNvSpPr/>
+          <p:nvPr/>
+        </p:nvSpPr>
+        <p:spPr>
+          <a:xfrm>
+            <a:off x="731520" y="1463040"/>
+            <a:ext cx="3383280" cy="1280160"/>
+          </a:xfrm>
+          <a:prstGeom prst="roundRect">
+            <a:avLst/>
+          </a:prstGeom>
+          <a:solidFill>
+            <a:srgbClr val="0284C7"/>
+          </a:solidFill>
+          <a:ln>
+            <a:noFill/>
+          </a:ln>
+        </p:spPr>
+        <p:style>
+          <a:lnRef idx="1">
+            <a:schemeClr val="accent1"/>
+          </a:lnRef>
+          <a:fillRef idx="3">
+            <a:schemeClr val="accent1"/>
+          </a:fillRef>
+          <a:effectRef idx="2">
+            <a:schemeClr val="accent1"/>
+          </a:effectRef>
+          <a:fontRef idx="minor">
+            <a:schemeClr val="lt1"/>
+          </a:fontRef>
+        </p:style>
+        <p:txBody>
+          <a:bodyPr rtlCol="0" anchor="ctr"/>
+          <a:lstStyle/>
+          <a:p>
+            <a:pPr algn="ctr"/>
+          </a:p>
+        </p:txBody>
+      </p:sp>
+      <p:sp>
+        <p:nvSpPr>
           <p:cNvPr id="5" name="TextBox 4"/>
           <p:cNvSpPr txBox="1"/>
           <p:nvPr/>
         </p:nvSpPr>
         <p:spPr>
           <a:xfrm>
-            <a:off x="914400" y="5623560"/>
-            <a:ext cx="10332720" cy="731520"/>
+            <a:off x="914400" y="1554480"/>
+            <a:ext cx="3017520" cy="1097280"/>
           </a:xfrm>
           <a:prstGeom prst="rect">
             <a:avLst/>
@@ -5019,14 +4147,728 @@
           <a:lstStyle/>
           <a:p>
             <a:pPr>
-              <a:defRPr sz="1050" b="1">
+              <a:defRPr sz="950" b="1">
+                <a:solidFill>
+                  <a:srgbClr val="FFFFFF"/>
+                </a:solidFill>
+              </a:defRPr>
+            </a:pPr>
+            <a:r>
+              <a:t>[ Option 1 ] ★ แนะนำ คุ้มค่าสูงสุด</a:t>
+            </a:r>
+          </a:p>
+          <a:p>
+            <a:pPr>
+              <a:defRPr sz="1350" b="1">
+                <a:solidFill>
+                  <a:srgbClr val="FFFFFF"/>
+                </a:solidFill>
+              </a:defRPr>
+            </a:pPr>
+            <a:r>
+              <a:t>แอปมือถือ + Telegram</a:t>
+            </a:r>
+          </a:p>
+        </p:txBody>
+      </p:sp>
+      <p:sp>
+        <p:nvSpPr>
+          <p:cNvPr id="6" name="TextBox 5"/>
+          <p:cNvSpPr txBox="1"/>
+          <p:nvPr/>
+        </p:nvSpPr>
+        <p:spPr>
+          <a:xfrm>
+            <a:off x="914400" y="2834640"/>
+            <a:ext cx="3017520" cy="3291840"/>
+          </a:xfrm>
+          <a:prstGeom prst="rect">
+            <a:avLst/>
+          </a:prstGeom>
+          <a:noFill/>
+        </p:spPr>
+        <p:txBody>
+          <a:bodyPr wrap="square">
+            <a:spAutoFit/>
+          </a:bodyPr>
+          <a:lstStyle/>
+          <a:p>
+            <a:pPr>
+              <a:defRPr b="1" sz="1050">
+                <a:solidFill>
+                  <a:srgbClr val="0284C7"/>
+                </a:solidFill>
+              </a:defRPr>
+            </a:pPr>
+            <a:r>
+              <a:t>• แบบซื้อขาด: ฿250,000 (2,500 บ./จุด)</a:t>
+            </a:r>
+          </a:p>
+          <a:p>
+            <a:pPr>
+              <a:spcAft>
+                <a:spcPts val="600"/>
+              </a:spcAft>
+              <a:defRPr b="1" sz="1000">
+                <a:solidFill>
+                  <a:srgbClr val="059669"/>
+                </a:solidFill>
+              </a:defRPr>
+            </a:pPr>
+            <a:r>
+              <a:t>• แบบรายปี: ฿170,000 (ปีแรก)</a:t>
+            </a:r>
+            <a:br/>
+            <a:r>
+              <a:t>  (ปีถัดไป ฿120,000 บ./ปี (1,200 บ./จุด/ปี))</a:t>
+            </a:r>
+          </a:p>
+          <a:p>
+            <a:pPr>
+              <a:spcAft>
+                <a:spcPts val="600"/>
+              </a:spcAft>
+              <a:defRPr sz="900" b="1">
                 <a:solidFill>
                   <a:srgbClr val="0F172A"/>
                 </a:solidFill>
               </a:defRPr>
             </a:pPr>
             <a:r>
-              <a:t>💡 แพ็กเกจโครงการ 100 ชุด ให้ส่วนลดพิเศษโครงการ ~12-13% พร้อมจัดส่งเครื่องสำรองหน้างาน (Spare Units) 5% ทันที</a:t>
+              <a:t>💡 จุดเด่น: แจ้งเตือนฟรีตลอดชีพ ไม่มีค่าส่งข้อความ</a:t>
+            </a:r>
+          </a:p>
+          <a:p>
+            <a:pPr>
+              <a:spcAft>
+                <a:spcPts val="200"/>
+              </a:spcAft>
+              <a:defRPr sz="880">
+                <a:solidFill>
+                  <a:srgbClr val="64748B"/>
+                </a:solidFill>
+              </a:defRPr>
+            </a:pPr>
+            <a:r>
+              <a:t>✓ Mobile App (iOS &amp; Android) สลับดู 100 จุด</a:t>
+            </a:r>
+          </a:p>
+          <a:p>
+            <a:pPr>
+              <a:spcAft>
+                <a:spcPts val="200"/>
+              </a:spcAft>
+              <a:defRPr sz="880">
+                <a:solidFill>
+                  <a:srgbClr val="64748B"/>
+                </a:solidFill>
+              </a:defRPr>
+            </a:pPr>
+            <a:r>
+              <a:t>✓ แจ้งเตือนผ่าน Telegram Bot แบบกลุ่ม/เดี่ยว</a:t>
+            </a:r>
+          </a:p>
+          <a:p>
+            <a:pPr>
+              <a:spcAft>
+                <a:spcPts val="200"/>
+              </a:spcAft>
+              <a:defRPr sz="880">
+                <a:solidFill>
+                  <a:srgbClr val="64748B"/>
+                </a:solidFill>
+              </a:defRPr>
+            </a:pPr>
+            <a:r>
+              <a:t>✓ ส่งข้อความเตือนฟรี 100% ไม่จำกัดจำนวนครั้ง</a:t>
+            </a:r>
+          </a:p>
+          <a:p>
+            <a:pPr>
+              <a:spcAft>
+                <a:spcPts val="200"/>
+              </a:spcAft>
+              <a:defRPr sz="880">
+                <a:solidFill>
+                  <a:srgbClr val="64748B"/>
+                </a:solidFill>
+              </a:defRPr>
+            </a:pPr>
+            <a:r>
+              <a:t>✓ ไม่มีต้นทุนแฝง กำไรเต็มเม็ดเต็มหน่วย</a:t>
+            </a:r>
+          </a:p>
+          <a:p>
+            <a:pPr>
+              <a:spcAft>
+                <a:spcPts val="200"/>
+              </a:spcAft>
+              <a:defRPr sz="880">
+                <a:solidFill>
+                  <a:srgbClr val="64748B"/>
+                </a:solidFill>
+              </a:defRPr>
+            </a:pPr>
+            <a:r>
+              <a:t>✓ ฟรี Support / แก้บั๊ก 1 ปีแรก</a:t>
+            </a:r>
+          </a:p>
+        </p:txBody>
+      </p:sp>
+      <p:sp>
+        <p:nvSpPr>
+          <p:cNvPr id="7" name="Rounded Rectangle 6"/>
+          <p:cNvSpPr/>
+          <p:nvPr/>
+        </p:nvSpPr>
+        <p:spPr>
+          <a:xfrm>
+            <a:off x="4389120" y="1463040"/>
+            <a:ext cx="3383280" cy="4754880"/>
+          </a:xfrm>
+          <a:prstGeom prst="roundRect">
+            <a:avLst/>
+          </a:prstGeom>
+          <a:solidFill>
+            <a:srgbClr val="FFFFFF"/>
+          </a:solidFill>
+          <a:ln w="19050">
+            <a:solidFill>
+              <a:srgbClr val="059669"/>
+            </a:solidFill>
+          </a:ln>
+        </p:spPr>
+        <p:style>
+          <a:lnRef idx="1">
+            <a:schemeClr val="accent1"/>
+          </a:lnRef>
+          <a:fillRef idx="3">
+            <a:schemeClr val="accent1"/>
+          </a:fillRef>
+          <a:effectRef idx="2">
+            <a:schemeClr val="accent1"/>
+          </a:effectRef>
+          <a:fontRef idx="minor">
+            <a:schemeClr val="lt1"/>
+          </a:fontRef>
+        </p:style>
+        <p:txBody>
+          <a:bodyPr rtlCol="0" anchor="ctr"/>
+          <a:lstStyle/>
+          <a:p>
+            <a:pPr algn="ctr"/>
+          </a:p>
+        </p:txBody>
+      </p:sp>
+      <p:sp>
+        <p:nvSpPr>
+          <p:cNvPr id="8" name="Rounded Rectangle 7"/>
+          <p:cNvSpPr/>
+          <p:nvPr/>
+        </p:nvSpPr>
+        <p:spPr>
+          <a:xfrm>
+            <a:off x="4389120" y="1463040"/>
+            <a:ext cx="3383280" cy="1280160"/>
+          </a:xfrm>
+          <a:prstGeom prst="roundRect">
+            <a:avLst/>
+          </a:prstGeom>
+          <a:solidFill>
+            <a:srgbClr val="059669"/>
+          </a:solidFill>
+          <a:ln>
+            <a:noFill/>
+          </a:ln>
+        </p:spPr>
+        <p:style>
+          <a:lnRef idx="1">
+            <a:schemeClr val="accent1"/>
+          </a:lnRef>
+          <a:fillRef idx="3">
+            <a:schemeClr val="accent1"/>
+          </a:fillRef>
+          <a:effectRef idx="2">
+            <a:schemeClr val="accent1"/>
+          </a:effectRef>
+          <a:fontRef idx="minor">
+            <a:schemeClr val="lt1"/>
+          </a:fontRef>
+        </p:style>
+        <p:txBody>
+          <a:bodyPr rtlCol="0" anchor="ctr"/>
+          <a:lstStyle/>
+          <a:p>
+            <a:pPr algn="ctr"/>
+          </a:p>
+        </p:txBody>
+      </p:sp>
+      <p:sp>
+        <p:nvSpPr>
+          <p:cNvPr id="9" name="TextBox 8"/>
+          <p:cNvSpPr txBox="1"/>
+          <p:nvPr/>
+        </p:nvSpPr>
+        <p:spPr>
+          <a:xfrm>
+            <a:off x="4572000" y="1554480"/>
+            <a:ext cx="3017520" cy="1097280"/>
+          </a:xfrm>
+          <a:prstGeom prst="rect">
+            <a:avLst/>
+          </a:prstGeom>
+          <a:noFill/>
+        </p:spPr>
+        <p:txBody>
+          <a:bodyPr wrap="square">
+            <a:spAutoFit/>
+          </a:bodyPr>
+          <a:lstStyle/>
+          <a:p>
+            <a:pPr>
+              <a:defRPr sz="950" b="1">
+                <a:solidFill>
+                  <a:srgbClr val="FFFFFF"/>
+                </a:solidFill>
+              </a:defRPr>
+            </a:pPr>
+            <a:r>
+              <a:t>[ Option 2 ] สำหรับห้องควบคุม SCADA</a:t>
+            </a:r>
+          </a:p>
+          <a:p>
+            <a:pPr>
+              <a:defRPr sz="1350" b="1">
+                <a:solidFill>
+                  <a:srgbClr val="FFFFFF"/>
+                </a:solidFill>
+              </a:defRPr>
+            </a:pPr>
+            <a:r>
+              <a:t>เว็บกลาง 100 จุด + Telegram</a:t>
+            </a:r>
+          </a:p>
+        </p:txBody>
+      </p:sp>
+      <p:sp>
+        <p:nvSpPr>
+          <p:cNvPr id="10" name="TextBox 9"/>
+          <p:cNvSpPr txBox="1"/>
+          <p:nvPr/>
+        </p:nvSpPr>
+        <p:spPr>
+          <a:xfrm>
+            <a:off x="4572000" y="2834640"/>
+            <a:ext cx="3017520" cy="3291840"/>
+          </a:xfrm>
+          <a:prstGeom prst="rect">
+            <a:avLst/>
+          </a:prstGeom>
+          <a:noFill/>
+        </p:spPr>
+        <p:txBody>
+          <a:bodyPr wrap="square">
+            <a:spAutoFit/>
+          </a:bodyPr>
+          <a:lstStyle/>
+          <a:p>
+            <a:pPr>
+              <a:defRPr b="1" sz="1050">
+                <a:solidFill>
+                  <a:srgbClr val="0284C7"/>
+                </a:solidFill>
+              </a:defRPr>
+            </a:pPr>
+            <a:r>
+              <a:t>• แบบซื้อขาด: ฿450,000 (4,500 บ./จุด)</a:t>
+            </a:r>
+          </a:p>
+          <a:p>
+            <a:pPr>
+              <a:spcAft>
+                <a:spcPts val="600"/>
+              </a:spcAft>
+              <a:defRPr b="1" sz="1000">
+                <a:solidFill>
+                  <a:srgbClr val="059669"/>
+                </a:solidFill>
+              </a:defRPr>
+            </a:pPr>
+            <a:r>
+              <a:t>• แบบรายปี: ฿340,000 (ปีแรก)</a:t>
+            </a:r>
+            <a:br/>
+            <a:r>
+              <a:t>  (ปีถัดไป ฿240,000 บ./ปี (2,400 บ./จุด/ปี))</a:t>
+            </a:r>
+          </a:p>
+          <a:p>
+            <a:pPr>
+              <a:spcAft>
+                <a:spcPts val="600"/>
+              </a:spcAft>
+              <a:defRPr sz="900" b="1">
+                <a:solidFill>
+                  <a:srgbClr val="0F172A"/>
+                </a:solidFill>
+              </a:defRPr>
+            </a:pPr>
+            <a:r>
+              <a:t>💡 จุดเด่น: ดูภาพรวมและตารางสรุปทั้ง 100 จุดในจอเดียว</a:t>
+            </a:r>
+          </a:p>
+          <a:p>
+            <a:pPr>
+              <a:spcAft>
+                <a:spcPts val="200"/>
+              </a:spcAft>
+              <a:defRPr sz="880">
+                <a:solidFill>
+                  <a:srgbClr val="64748B"/>
+                </a:solidFill>
+              </a:defRPr>
+            </a:pPr>
+            <a:r>
+              <a:t>✓ Centralized Web SCADA Dashboard 100 จุด</a:t>
+            </a:r>
+          </a:p>
+          <a:p>
+            <a:pPr>
+              <a:spcAft>
+                <a:spcPts val="200"/>
+              </a:spcAft>
+              <a:defRPr sz="880">
+                <a:solidFill>
+                  <a:srgbClr val="64748B"/>
+                </a:solidFill>
+              </a:defRPr>
+            </a:pPr>
+            <a:r>
+              <a:t>✓ แผนที่ GIS Map &amp; ตารางสรุปสถานะ Real-Time</a:t>
+            </a:r>
+          </a:p>
+          <a:p>
+            <a:pPr>
+              <a:spcAft>
+                <a:spcPts val="200"/>
+              </a:spcAft>
+              <a:defRPr sz="880">
+                <a:solidFill>
+                  <a:srgbClr val="64748B"/>
+                </a:solidFill>
+              </a:defRPr>
+            </a:pPr>
+            <a:r>
+              <a:t>✓ กราฟวิเคราะห์แนวโน้ม Multi-Axis 100 สถานี</a:t>
+            </a:r>
+          </a:p>
+          <a:p>
+            <a:pPr>
+              <a:spcAft>
+                <a:spcPts val="200"/>
+              </a:spcAft>
+              <a:defRPr sz="880">
+                <a:solidFill>
+                  <a:srgbClr val="64748B"/>
+                </a:solidFill>
+              </a:defRPr>
+            </a:pPr>
+            <a:r>
+              <a:t>✓ แจ้งเตือนผ่าน Telegram Bot ทันทีเมื่อผิดปกติ</a:t>
+            </a:r>
+          </a:p>
+          <a:p>
+            <a:pPr>
+              <a:spcAft>
+                <a:spcPts val="200"/>
+              </a:spcAft>
+              <a:defRPr sz="880">
+                <a:solidFill>
+                  <a:srgbClr val="64748B"/>
+                </a:solidFill>
+              </a:defRPr>
+            </a:pPr>
+            <a:r>
+              <a:t>✓ Export รายงาน Excel / PDF ย้อนหลังได้</a:t>
+            </a:r>
+          </a:p>
+        </p:txBody>
+      </p:sp>
+      <p:sp>
+        <p:nvSpPr>
+          <p:cNvPr id="11" name="Rounded Rectangle 10"/>
+          <p:cNvSpPr/>
+          <p:nvPr/>
+        </p:nvSpPr>
+        <p:spPr>
+          <a:xfrm>
+            <a:off x="8046720" y="1463040"/>
+            <a:ext cx="3383280" cy="4754880"/>
+          </a:xfrm>
+          <a:prstGeom prst="roundRect">
+            <a:avLst/>
+          </a:prstGeom>
+          <a:solidFill>
+            <a:srgbClr val="FFFFFF"/>
+          </a:solidFill>
+          <a:ln w="19050">
+            <a:solidFill>
+              <a:srgbClr val="1E293B"/>
+            </a:solidFill>
+          </a:ln>
+        </p:spPr>
+        <p:style>
+          <a:lnRef idx="1">
+            <a:schemeClr val="accent1"/>
+          </a:lnRef>
+          <a:fillRef idx="3">
+            <a:schemeClr val="accent1"/>
+          </a:fillRef>
+          <a:effectRef idx="2">
+            <a:schemeClr val="accent1"/>
+          </a:effectRef>
+          <a:fontRef idx="minor">
+            <a:schemeClr val="lt1"/>
+          </a:fontRef>
+        </p:style>
+        <p:txBody>
+          <a:bodyPr rtlCol="0" anchor="ctr"/>
+          <a:lstStyle/>
+          <a:p>
+            <a:pPr algn="ctr"/>
+          </a:p>
+        </p:txBody>
+      </p:sp>
+      <p:sp>
+        <p:nvSpPr>
+          <p:cNvPr id="12" name="Rounded Rectangle 11"/>
+          <p:cNvSpPr/>
+          <p:nvPr/>
+        </p:nvSpPr>
+        <p:spPr>
+          <a:xfrm>
+            <a:off x="8046720" y="1463040"/>
+            <a:ext cx="3383280" cy="1280160"/>
+          </a:xfrm>
+          <a:prstGeom prst="roundRect">
+            <a:avLst/>
+          </a:prstGeom>
+          <a:solidFill>
+            <a:srgbClr val="1E293B"/>
+          </a:solidFill>
+          <a:ln>
+            <a:noFill/>
+          </a:ln>
+        </p:spPr>
+        <p:style>
+          <a:lnRef idx="1">
+            <a:schemeClr val="accent1"/>
+          </a:lnRef>
+          <a:fillRef idx="3">
+            <a:schemeClr val="accent1"/>
+          </a:fillRef>
+          <a:effectRef idx="2">
+            <a:schemeClr val="accent1"/>
+          </a:effectRef>
+          <a:fontRef idx="minor">
+            <a:schemeClr val="lt1"/>
+          </a:fontRef>
+        </p:style>
+        <p:txBody>
+          <a:bodyPr rtlCol="0" anchor="ctr"/>
+          <a:lstStyle/>
+          <a:p>
+            <a:pPr algn="ctr"/>
+          </a:p>
+        </p:txBody>
+      </p:sp>
+      <p:sp>
+        <p:nvSpPr>
+          <p:cNvPr id="13" name="TextBox 12"/>
+          <p:cNvSpPr txBox="1"/>
+          <p:nvPr/>
+        </p:nvSpPr>
+        <p:spPr>
+          <a:xfrm>
+            <a:off x="8229600" y="1554480"/>
+            <a:ext cx="3017520" cy="1097280"/>
+          </a:xfrm>
+          <a:prstGeom prst="rect">
+            <a:avLst/>
+          </a:prstGeom>
+          <a:noFill/>
+        </p:spPr>
+        <p:txBody>
+          <a:bodyPr wrap="square">
+            <a:spAutoFit/>
+          </a:bodyPr>
+          <a:lstStyle/>
+          <a:p>
+            <a:pPr>
+              <a:defRPr sz="950" b="1">
+                <a:solidFill>
+                  <a:srgbClr val="2DD4BF"/>
+                </a:solidFill>
+              </a:defRPr>
+            </a:pPr>
+            <a:r>
+              <a:t>[ Option 3 ] ครบวงจร + แจ้งเตือน LINE</a:t>
+            </a:r>
+          </a:p>
+          <a:p>
+            <a:pPr>
+              <a:defRPr sz="1350" b="1">
+                <a:solidFill>
+                  <a:srgbClr val="FFFFFF"/>
+                </a:solidFill>
+              </a:defRPr>
+            </a:pPr>
+            <a:r>
+              <a:t>เว็บกลาง + แอป + LINE OA</a:t>
+            </a:r>
+          </a:p>
+        </p:txBody>
+      </p:sp>
+      <p:sp>
+        <p:nvSpPr>
+          <p:cNvPr id="14" name="TextBox 13"/>
+          <p:cNvSpPr txBox="1"/>
+          <p:nvPr/>
+        </p:nvSpPr>
+        <p:spPr>
+          <a:xfrm>
+            <a:off x="8229600" y="2834640"/>
+            <a:ext cx="3017520" cy="3291840"/>
+          </a:xfrm>
+          <a:prstGeom prst="rect">
+            <a:avLst/>
+          </a:prstGeom>
+          <a:noFill/>
+        </p:spPr>
+        <p:txBody>
+          <a:bodyPr wrap="square">
+            <a:spAutoFit/>
+          </a:bodyPr>
+          <a:lstStyle/>
+          <a:p>
+            <a:pPr>
+              <a:defRPr b="1" sz="1050">
+                <a:solidFill>
+                  <a:srgbClr val="0284C7"/>
+                </a:solidFill>
+              </a:defRPr>
+            </a:pPr>
+            <a:r>
+              <a:t>• แบบซื้อขาด: ฿600,000 (6,000 บ./จุด)</a:t>
+            </a:r>
+          </a:p>
+          <a:p>
+            <a:pPr>
+              <a:spcAft>
+                <a:spcPts val="600"/>
+              </a:spcAft>
+              <a:defRPr b="1" sz="1000">
+                <a:solidFill>
+                  <a:srgbClr val="059669"/>
+                </a:solidFill>
+              </a:defRPr>
+            </a:pPr>
+            <a:r>
+              <a:t>• แบบรายปี: ฿510,000 (ปีแรก)</a:t>
+            </a:r>
+            <a:br/>
+            <a:r>
+              <a:t>  (ปีถัดไป ฿360,000 บ./ปี (3,600 บ./จุด/ปี))</a:t>
+            </a:r>
+          </a:p>
+          <a:p>
+            <a:pPr>
+              <a:spcAft>
+                <a:spcPts val="600"/>
+              </a:spcAft>
+              <a:defRPr sz="900" b="1">
+                <a:solidFill>
+                  <a:srgbClr val="0F172A"/>
+                </a:solidFill>
+              </a:defRPr>
+            </a:pPr>
+            <a:r>
+              <a:t>💡 จุดเด่น: LINE มีค่าแพ็กเกจส่งข้อความรายเดือนเพิ่มเติม</a:t>
+            </a:r>
+          </a:p>
+          <a:p>
+            <a:pPr>
+              <a:spcAft>
+                <a:spcPts val="200"/>
+              </a:spcAft>
+              <a:defRPr sz="880">
+                <a:solidFill>
+                  <a:srgbClr val="64748B"/>
+                </a:solidFill>
+              </a:defRPr>
+            </a:pPr>
+            <a:r>
+              <a:t>✓ ได้ทั้ง Web SCADA + Mobile App ครบชุด</a:t>
+            </a:r>
+          </a:p>
+          <a:p>
+            <a:pPr>
+              <a:spcAft>
+                <a:spcPts val="200"/>
+              </a:spcAft>
+              <a:defRPr sz="880">
+                <a:solidFill>
+                  <a:srgbClr val="64748B"/>
+                </a:solidFill>
+              </a:defRPr>
+            </a:pPr>
+            <a:r>
+              <a:t>✓ แจ้งเตือนผ่าน LINE Official Account (LINE OA)</a:t>
+            </a:r>
+          </a:p>
+          <a:p>
+            <a:pPr>
+              <a:spcAft>
+                <a:spcPts val="200"/>
+              </a:spcAft>
+              <a:defRPr sz="880">
+                <a:solidFill>
+                  <a:srgbClr val="64748B"/>
+                </a:solidFill>
+              </a:defRPr>
+            </a:pPr>
+            <a:r>
+              <a:t>✓ ส่งการ์ดแจ้งเตือนพร้อมสีสถานะและปุ่มกดดูสด</a:t>
+            </a:r>
+          </a:p>
+          <a:p>
+            <a:pPr>
+              <a:spcAft>
+                <a:spcPts val="200"/>
+              </a:spcAft>
+              <a:defRPr sz="880">
+                <a:solidFill>
+                  <a:srgbClr val="64748B"/>
+                </a:solidFill>
+              </a:defRPr>
+            </a:pPr>
+            <a:r>
+              <a:t>✓ +฿1,500/จุด เพื่อซัพพอร์ตค่า Broadcast ของ LINE</a:t>
+            </a:r>
+          </a:p>
+          <a:p>
+            <a:pPr>
+              <a:spcAft>
+                <a:spcPts val="200"/>
+              </a:spcAft>
+              <a:defRPr sz="880">
+                <a:solidFill>
+                  <a:srgbClr val="64748B"/>
+                </a:solidFill>
+              </a:defRPr>
+            </a:pPr>
+            <a:r>
+              <a:t>✓ สัญญาบริการระดับพรีเมียม 24/7</a:t>
             </a:r>
           </a:p>
         </p:txBody>
@@ -5090,19 +4932,19 @@
               </a:defRPr>
             </a:pPr>
             <a:r>
-              <a:t>NCT WATER NEXUS PRO | 100-NODE PROJECT SOLUTION</a:t>
-            </a:r>
-          </a:p>
-          <a:p>
-            <a:pPr>
-              <a:defRPr sz="2300" b="1">
+              <a:t>โครงการระบบวัดคุณภาพน้ำอัจฉริยะ 100 จุด (NCT WATER NEXUS)</a:t>
+            </a:r>
+          </a:p>
+          <a:p>
+            <a:pPr>
+              <a:defRPr sz="2200" b="1">
                 <a:solidFill>
                   <a:srgbClr val="0F172A"/>
                 </a:solidFill>
               </a:defRPr>
             </a:pPr>
             <a:r>
-              <a:t>แพ็กเกจโครงการ 100 ชุด: แบบซื้อขาด (100-Node Outright Packages)</a:t>
+              <a:t>3. ตัวอย่างข้อความแจ้งเตือนเมื่อพบค่าผิดปกติ (Telegram vs LINE OA)</a:t>
             </a:r>
           </a:p>
         </p:txBody>
@@ -5116,297 +4958,7 @@
         <p:spPr>
           <a:xfrm>
             <a:off x="731520" y="1463040"/>
-            <a:ext cx="3383280" cy="4754880"/>
-          </a:xfrm>
-          <a:prstGeom prst="roundRect">
-            <a:avLst/>
-          </a:prstGeom>
-          <a:solidFill>
-            <a:srgbClr val="FFFFFF"/>
-          </a:solidFill>
-          <a:ln w="19050">
-            <a:solidFill>
-              <a:srgbClr val="CBD5E1"/>
-            </a:solidFill>
-          </a:ln>
-        </p:spPr>
-        <p:style>
-          <a:lnRef idx="1">
-            <a:schemeClr val="accent1"/>
-          </a:lnRef>
-          <a:fillRef idx="3">
-            <a:schemeClr val="accent1"/>
-          </a:fillRef>
-          <a:effectRef idx="2">
-            <a:schemeClr val="accent1"/>
-          </a:effectRef>
-          <a:fontRef idx="minor">
-            <a:schemeClr val="lt1"/>
-          </a:fontRef>
-        </p:style>
-        <p:txBody>
-          <a:bodyPr rtlCol="0" anchor="ctr"/>
-          <a:lstStyle/>
-          <a:p>
-            <a:pPr algn="ctr"/>
-          </a:p>
-        </p:txBody>
-      </p:sp>
-      <p:sp>
-        <p:nvSpPr>
-          <p:cNvPr id="4" name="Rounded Rectangle 3"/>
-          <p:cNvSpPr/>
-          <p:nvPr/>
-        </p:nvSpPr>
-        <p:spPr>
-          <a:xfrm>
-            <a:off x="731520" y="1463040"/>
-            <a:ext cx="3383280" cy="1188720"/>
-          </a:xfrm>
-          <a:prstGeom prst="roundRect">
-            <a:avLst/>
-          </a:prstGeom>
-          <a:solidFill>
-            <a:srgbClr val="1E293B"/>
-          </a:solidFill>
-          <a:ln>
-            <a:noFill/>
-          </a:ln>
-        </p:spPr>
-        <p:style>
-          <a:lnRef idx="1">
-            <a:schemeClr val="accent1"/>
-          </a:lnRef>
-          <a:fillRef idx="3">
-            <a:schemeClr val="accent1"/>
-          </a:fillRef>
-          <a:effectRef idx="2">
-            <a:schemeClr val="accent1"/>
-          </a:effectRef>
-          <a:fontRef idx="minor">
-            <a:schemeClr val="lt1"/>
-          </a:fontRef>
-        </p:style>
-        <p:txBody>
-          <a:bodyPr rtlCol="0" anchor="ctr"/>
-          <a:lstStyle/>
-          <a:p>
-            <a:pPr algn="ctr"/>
-          </a:p>
-        </p:txBody>
-      </p:sp>
-      <p:sp>
-        <p:nvSpPr>
-          <p:cNvPr id="5" name="TextBox 4"/>
-          <p:cNvSpPr txBox="1"/>
-          <p:nvPr/>
-        </p:nvSpPr>
-        <p:spPr>
-          <a:xfrm>
-            <a:off x="914400" y="1554480"/>
-            <a:ext cx="3017520" cy="1005840"/>
-          </a:xfrm>
-          <a:prstGeom prst="rect">
-            <a:avLst/>
-          </a:prstGeom>
-          <a:noFill/>
-        </p:spPr>
-        <p:txBody>
-          <a:bodyPr wrap="square">
-            <a:spAutoFit/>
-          </a:bodyPr>
-          <a:lstStyle/>
-          <a:p>
-            <a:pPr>
-              <a:defRPr sz="950" b="1">
-                <a:solidFill>
-                  <a:srgbClr val="2DD4BF"/>
-                </a:solidFill>
-              </a:defRPr>
-            </a:pPr>
-            <a:r>
-              <a:t>ซื้อขาด • 100 สถานี</a:t>
-            </a:r>
-          </a:p>
-          <a:p>
-            <a:pPr>
-              <a:defRPr sz="1400" b="1">
-                <a:solidFill>
-                  <a:srgbClr val="FFFFFF"/>
-                </a:solidFill>
-              </a:defRPr>
-            </a:pPr>
-            <a:r>
-              <a:t>STANDARD LOT 100</a:t>
-            </a:r>
-          </a:p>
-          <a:p>
-            <a:pPr>
-              <a:defRPr sz="2000" b="1">
-                <a:solidFill>
-                  <a:srgbClr val="FFFFFF"/>
-                </a:solidFill>
-              </a:defRPr>
-            </a:pPr>
-            <a:r>
-              <a:t>฿2,190,000</a:t>
-            </a:r>
-          </a:p>
-        </p:txBody>
-      </p:sp>
-      <p:sp>
-        <p:nvSpPr>
-          <p:cNvPr id="6" name="TextBox 5"/>
-          <p:cNvSpPr txBox="1"/>
-          <p:nvPr/>
-        </p:nvSpPr>
-        <p:spPr>
-          <a:xfrm>
-            <a:off x="914400" y="2743200"/>
-            <a:ext cx="3017520" cy="3383280"/>
-          </a:xfrm>
-          <a:prstGeom prst="rect">
-            <a:avLst/>
-          </a:prstGeom>
-          <a:noFill/>
-        </p:spPr>
-        <p:txBody>
-          <a:bodyPr wrap="square">
-            <a:spAutoFit/>
-          </a:bodyPr>
-          <a:lstStyle/>
-          <a:p>
-            <a:pPr>
-              <a:spcAft>
-                <a:spcPts val="800"/>
-              </a:spcAft>
-              <a:defRPr sz="900" b="1">
-                <a:solidFill>
-                  <a:srgbClr val="0284C7"/>
-                </a:solidFill>
-              </a:defRPr>
-            </a:pPr>
-            <a:r>
-              <a:t>ตรวจวัด pH + Temp รวม 100 จุด (เฉลี่ย ฿21,900 / จุด)</a:t>
-            </a:r>
-          </a:p>
-          <a:p>
-            <a:pPr>
-              <a:spcAft>
-                <a:spcPts val="300"/>
-              </a:spcAft>
-              <a:defRPr sz="900">
-                <a:solidFill>
-                  <a:srgbClr val="0F172A"/>
-                </a:solidFill>
-              </a:defRPr>
-            </a:pPr>
-            <a:r>
-              <a:t>✓ 100x ตู้ควบคุม NCT WiFi Node</a:t>
-            </a:r>
-          </a:p>
-          <a:p>
-            <a:pPr>
-              <a:spcAft>
-                <a:spcPts val="300"/>
-              </a:spcAft>
-              <a:defRPr sz="900">
-                <a:solidFill>
-                  <a:srgbClr val="0F172A"/>
-                </a:solidFill>
-              </a:defRPr>
-            </a:pPr>
-            <a:r>
-              <a:t>✓ 100x หัววัด pH แก้วอุตสาหกรรม (±0.01 pH)</a:t>
-            </a:r>
-          </a:p>
-          <a:p>
-            <a:pPr>
-              <a:spcAft>
-                <a:spcPts val="300"/>
-              </a:spcAft>
-              <a:defRPr sz="900">
-                <a:solidFill>
-                  <a:srgbClr val="0F172A"/>
-                </a:solidFill>
-              </a:defRPr>
-            </a:pPr>
-            <a:r>
-              <a:t>✓ 100x หัววัดอุณหภูมิ PT1000 (พร้อม ATC)</a:t>
-            </a:r>
-          </a:p>
-          <a:p>
-            <a:pPr>
-              <a:spcAft>
-                <a:spcPts val="300"/>
-              </a:spcAft>
-              <a:defRPr sz="900">
-                <a:solidFill>
-                  <a:srgbClr val="0F172A"/>
-                </a:solidFill>
-              </a:defRPr>
-            </a:pPr>
-            <a:r>
-              <a:t>✓ รวม Dashboard รวมศูนย์ 100 จุด (GIS Map)</a:t>
-            </a:r>
-          </a:p>
-          <a:p>
-            <a:pPr>
-              <a:spcAft>
-                <a:spcPts val="300"/>
-              </a:spcAft>
-              <a:defRPr sz="900">
-                <a:solidFill>
-                  <a:srgbClr val="0F172A"/>
-                </a:solidFill>
-              </a:defRPr>
-            </a:pPr>
-            <a:r>
-              <a:t>✓ ฟรี Cloud Server &amp; ซิม 4G ตลอด 2 ปีแรก</a:t>
-            </a:r>
-          </a:p>
-          <a:p>
-            <a:pPr>
-              <a:spcAft>
-                <a:spcPts val="300"/>
-              </a:spcAft>
-              <a:defRPr sz="900">
-                <a:solidFill>
-                  <a:srgbClr val="0F172A"/>
-                </a:solidFill>
-              </a:defRPr>
-            </a:pPr>
-            <a:r>
-              <a:t>✓ แถมฟรีชุดสำรองหน้างาน Spare Units 5 ชุด</a:t>
-            </a:r>
-          </a:p>
-          <a:p>
-            <a:pPr>
-              <a:spcAft>
-                <a:spcPts val="300"/>
-              </a:spcAft>
-              <a:defRPr sz="900">
-                <a:solidFill>
-                  <a:srgbClr val="0F172A"/>
-                </a:solidFill>
-              </a:defRPr>
-            </a:pPr>
-            <a:r>
-              <a:t>✓ รับประกันอุปกรณ์ 2 ปีเต็ม</a:t>
-            </a:r>
-          </a:p>
-        </p:txBody>
-      </p:sp>
-      <p:sp>
-        <p:nvSpPr>
-          <p:cNvPr id="7" name="Rounded Rectangle 6"/>
-          <p:cNvSpPr/>
-          <p:nvPr/>
-        </p:nvSpPr>
-        <p:spPr>
-          <a:xfrm>
-            <a:off x="4389120" y="1463040"/>
-            <a:ext cx="3383280" cy="4754880"/>
+            <a:ext cx="5120640" cy="4754880"/>
           </a:xfrm>
           <a:prstGeom prst="roundRect">
             <a:avLst/>
@@ -5444,57 +4996,14 @@
       </p:sp>
       <p:sp>
         <p:nvSpPr>
-          <p:cNvPr id="8" name="Rounded Rectangle 7"/>
-          <p:cNvSpPr/>
-          <p:nvPr/>
-        </p:nvSpPr>
-        <p:spPr>
-          <a:xfrm>
-            <a:off x="4389120" y="1463040"/>
-            <a:ext cx="3383280" cy="1188720"/>
-          </a:xfrm>
-          <a:prstGeom prst="roundRect">
-            <a:avLst/>
-          </a:prstGeom>
-          <a:solidFill>
-            <a:srgbClr val="0284C7"/>
-          </a:solidFill>
-          <a:ln>
-            <a:noFill/>
-          </a:ln>
-        </p:spPr>
-        <p:style>
-          <a:lnRef idx="1">
-            <a:schemeClr val="accent1"/>
-          </a:lnRef>
-          <a:fillRef idx="3">
-            <a:schemeClr val="accent1"/>
-          </a:fillRef>
-          <a:effectRef idx="2">
-            <a:schemeClr val="accent1"/>
-          </a:effectRef>
-          <a:fontRef idx="minor">
-            <a:schemeClr val="lt1"/>
-          </a:fontRef>
-        </p:style>
-        <p:txBody>
-          <a:bodyPr rtlCol="0" anchor="ctr"/>
-          <a:lstStyle/>
-          <a:p>
-            <a:pPr algn="ctr"/>
-          </a:p>
-        </p:txBody>
-      </p:sp>
-      <p:sp>
-        <p:nvSpPr>
-          <p:cNvPr id="9" name="TextBox 8"/>
+          <p:cNvPr id="4" name="TextBox 3"/>
           <p:cNvSpPr txBox="1"/>
           <p:nvPr/>
         </p:nvSpPr>
         <p:spPr>
           <a:xfrm>
-            <a:off x="4572000" y="1554480"/>
-            <a:ext cx="3017520" cy="1005840"/>
+            <a:off x="1005840" y="1691640"/>
+            <a:ext cx="4572000" cy="4297680"/>
           </a:xfrm>
           <a:prstGeom prst="rect">
             <a:avLst/>
@@ -5508,195 +5017,94 @@
           <a:lstStyle/>
           <a:p>
             <a:pPr>
+              <a:spcAft>
+                <a:spcPts val="1000"/>
+              </a:spcAft>
+              <a:defRPr sz="1400" b="1">
+                <a:solidFill>
+                  <a:srgbClr val="0284C7"/>
+                </a:solidFill>
+              </a:defRPr>
+            </a:pPr>
+            <a:r>
+              <a:t>✈️ รูปแบบ Telegram Alert (ส่งฟรี &amp; ไวมาก)</a:t>
+            </a:r>
+          </a:p>
+          <a:p>
+            <a:pPr>
+              <a:spcAft>
+                <a:spcPts val="1000"/>
+              </a:spcAft>
+              <a:defRPr sz="1050">
+                <a:solidFill>
+                  <a:srgbClr val="0F172A"/>
+                </a:solidFill>
+              </a:defRPr>
+            </a:pPr>
+            <a:r>
+              <a:t>🚨 แจ้งเตือนคุณภาพน้ำผิดปกติ</a:t>
+            </a:r>
+            <a:br/>
+            <a:r>
+              <a:t>📍 จุดติดตั้ง: บ่อพักน้ำ #04 (ตู้ 1004)</a:t>
+            </a:r>
+            <a:br/>
+            <a:r>
+              <a:t>⏰ เวลา: 14:15 น.</a:t>
+            </a:r>
+            <a:br/>
+            <a:r>
+              <a:t>━━━━━━━━━━━━━━━━━━━━</a:t>
+            </a:r>
+            <a:br/>
+            <a:r>
+              <a:t>• คลอรีน: 0.15 mg/L ❌ (เกณฑ์ 0.20-2.00)</a:t>
+            </a:r>
+            <a:br/>
+            <a:r>
+              <a:t>• pH: 6.4 ❌ (เกณฑ์ 6.5-8.5)</a:t>
+            </a:r>
+            <a:br/>
+            <a:r>
+              <a:t>• TDS: 185 ppm (ปกติ)</a:t>
+            </a:r>
+            <a:br/>
+            <a:r>
+              <a:t>• อุณหภูมิ: 28.5 °C (ปกติ)</a:t>
+            </a:r>
+            <a:br/>
+            <a:r>
+              <a:t>━━━━━━━━━━━━━━━━━━━━</a:t>
+            </a:r>
+            <a:br/>
+            <a:r>
+              <a:t>🔗 ดูกราฟย้อนหลัง: https://water-iot.com/node/1004</a:t>
+            </a:r>
+          </a:p>
+          <a:p>
+            <a:pPr>
               <a:defRPr sz="950" b="1">
                 <a:solidFill>
-                  <a:srgbClr val="FFFFFF"/>
-                </a:solidFill>
-              </a:defRPr>
-            </a:pPr>
-            <a:r>
-              <a:t>★ ยอดนิยมสูงสุด</a:t>
-            </a:r>
-          </a:p>
-          <a:p>
-            <a:pPr>
-              <a:defRPr sz="1400" b="1">
-                <a:solidFill>
-                  <a:srgbClr val="FFFFFF"/>
-                </a:solidFill>
-              </a:defRPr>
-            </a:pPr>
-            <a:r>
-              <a:t>PRO TELEMETRY LOT 100</a:t>
-            </a:r>
-          </a:p>
-          <a:p>
-            <a:pPr>
-              <a:defRPr sz="2000" b="1">
-                <a:solidFill>
-                  <a:srgbClr val="FFFFFF"/>
-                </a:solidFill>
-              </a:defRPr>
-            </a:pPr>
-            <a:r>
-              <a:t>฿4,250,000</a:t>
-            </a:r>
-          </a:p>
-        </p:txBody>
-      </p:sp>
-      <p:sp>
-        <p:nvSpPr>
-          <p:cNvPr id="10" name="TextBox 9"/>
-          <p:cNvSpPr txBox="1"/>
-          <p:nvPr/>
-        </p:nvSpPr>
-        <p:spPr>
-          <a:xfrm>
-            <a:off x="4572000" y="2743200"/>
-            <a:ext cx="3017520" cy="3383280"/>
-          </a:xfrm>
-          <a:prstGeom prst="rect">
-            <a:avLst/>
-          </a:prstGeom>
-          <a:noFill/>
-        </p:spPr>
-        <p:txBody>
-          <a:bodyPr wrap="square">
-            <a:spAutoFit/>
-          </a:bodyPr>
-          <a:lstStyle/>
-          <a:p>
-            <a:pPr>
-              <a:spcAft>
-                <a:spcPts val="800"/>
-              </a:spcAft>
-              <a:defRPr sz="900" b="1">
-                <a:solidFill>
-                  <a:srgbClr val="0284C7"/>
-                </a:solidFill>
-              </a:defRPr>
-            </a:pPr>
-            <a:r>
-              <a:t>ยอดนิยม! ตรวจวัดครบ 4 ค่า รวม 100 จุด (เฉลี่ย ฿42,500 / จุด (ประหยัด ฿650,000))</a:t>
-            </a:r>
-          </a:p>
-          <a:p>
-            <a:pPr>
-              <a:spcAft>
-                <a:spcPts val="300"/>
-              </a:spcAft>
-              <a:defRPr sz="900">
-                <a:solidFill>
-                  <a:srgbClr val="0F172A"/>
-                </a:solidFill>
-              </a:defRPr>
-            </a:pPr>
-            <a:r>
-              <a:t>✓ 100x Heavy-Duty SCADA Node (IP67)</a:t>
-            </a:r>
-          </a:p>
-          <a:p>
-            <a:pPr>
-              <a:spcAft>
-                <a:spcPts val="300"/>
-              </a:spcAft>
-              <a:defRPr sz="900">
-                <a:solidFill>
-                  <a:srgbClr val="0F172A"/>
-                </a:solidFill>
-              </a:defRPr>
-            </a:pPr>
-            <a:r>
-              <a:t>✓ 100x เซนเซอร์ 4 ค่า (pH, Temp, TDS, Cl)</a:t>
-            </a:r>
-          </a:p>
-          <a:p>
-            <a:pPr>
-              <a:spcAft>
-                <a:spcPts val="300"/>
-              </a:spcAft>
-              <a:defRPr sz="900">
-                <a:solidFill>
-                  <a:srgbClr val="0F172A"/>
-                </a:solidFill>
-              </a:defRPr>
-            </a:pPr>
-            <a:r>
-              <a:t>✓ Dual Telemetry 4G LTE + WiFi ทุกจุด</a:t>
-            </a:r>
-          </a:p>
-          <a:p>
-            <a:pPr>
-              <a:spcAft>
-                <a:spcPts val="300"/>
-              </a:spcAft>
-              <a:defRPr sz="900">
-                <a:solidFill>
-                  <a:srgbClr val="0F172A"/>
-                </a:solidFill>
-              </a:defRPr>
-            </a:pPr>
-            <a:r>
-              <a:t>✓ แบตเตอรี่สำรอง LiFePO4 ครบทั้ง 100 ตู้</a:t>
-            </a:r>
-          </a:p>
-          <a:p>
-            <a:pPr>
-              <a:spcAft>
-                <a:spcPts val="300"/>
-              </a:spcAft>
-              <a:defRPr sz="900">
-                <a:solidFill>
-                  <a:srgbClr val="0F172A"/>
-                </a:solidFill>
-              </a:defRPr>
-            </a:pPr>
-            <a:r>
-              <a:t>✓ ฟรี Private Cloud Server &amp; Custom Domain 2 ปี</a:t>
-            </a:r>
-          </a:p>
-          <a:p>
-            <a:pPr>
-              <a:spcAft>
-                <a:spcPts val="300"/>
-              </a:spcAft>
-              <a:defRPr sz="900">
-                <a:solidFill>
-                  <a:srgbClr val="0F172A"/>
-                </a:solidFill>
-              </a:defRPr>
-            </a:pPr>
-            <a:r>
-              <a:t>✓ ฟรี White-label สกรีนโลโก้ลูกค้าบน 100 ตู้</a:t>
-            </a:r>
-          </a:p>
-          <a:p>
-            <a:pPr>
-              <a:spcAft>
-                <a:spcPts val="300"/>
-              </a:spcAft>
-              <a:defRPr sz="900">
-                <a:solidFill>
-                  <a:srgbClr val="0F172A"/>
-                </a:solidFill>
-              </a:defRPr>
-            </a:pPr>
-            <a:r>
-              <a:t>✓ แถมชุดสำรอง Spare Units 5 ชุด + ประกัน 2 ปี</a:t>
-            </a:r>
-          </a:p>
-        </p:txBody>
-      </p:sp>
-      <p:sp>
-        <p:nvSpPr>
-          <p:cNvPr id="11" name="Rounded Rectangle 10"/>
+                  <a:srgbClr val="059669"/>
+                </a:solidFill>
+              </a:defRPr>
+            </a:pPr>
+            <a:r>
+              <a:t>✔ จุดเด่น: ส่งฟรี 100% ไม่มีค่า Broadcast รายเดือน กำไรเต็มเม็ดเต็มหน่วย</a:t>
+            </a:r>
+          </a:p>
+        </p:txBody>
+      </p:sp>
+      <p:sp>
+        <p:nvSpPr>
+          <p:cNvPr id="5" name="Rounded Rectangle 4"/>
           <p:cNvSpPr/>
           <p:nvPr/>
         </p:nvSpPr>
         <p:spPr>
           <a:xfrm>
-            <a:off x="8046720" y="1463040"/>
-            <a:ext cx="3383280" cy="4754880"/>
+            <a:off x="6309360" y="1463040"/>
+            <a:ext cx="5120640" cy="4754880"/>
           </a:xfrm>
           <a:prstGeom prst="roundRect">
             <a:avLst/>
@@ -5734,57 +5142,14 @@
       </p:sp>
       <p:sp>
         <p:nvSpPr>
-          <p:cNvPr id="12" name="Rounded Rectangle 11"/>
-          <p:cNvSpPr/>
-          <p:nvPr/>
-        </p:nvSpPr>
-        <p:spPr>
-          <a:xfrm>
-            <a:off x="8046720" y="1463040"/>
-            <a:ext cx="3383280" cy="1188720"/>
-          </a:xfrm>
-          <a:prstGeom prst="roundRect">
-            <a:avLst/>
-          </a:prstGeom>
-          <a:solidFill>
-            <a:srgbClr val="059669"/>
-          </a:solidFill>
-          <a:ln>
-            <a:noFill/>
-          </a:ln>
-        </p:spPr>
-        <p:style>
-          <a:lnRef idx="1">
-            <a:schemeClr val="accent1"/>
-          </a:lnRef>
-          <a:fillRef idx="3">
-            <a:schemeClr val="accent1"/>
-          </a:fillRef>
-          <a:effectRef idx="2">
-            <a:schemeClr val="accent1"/>
-          </a:effectRef>
-          <a:fontRef idx="minor">
-            <a:schemeClr val="lt1"/>
-          </a:fontRef>
-        </p:style>
-        <p:txBody>
-          <a:bodyPr rtlCol="0" anchor="ctr"/>
-          <a:lstStyle/>
-          <a:p>
-            <a:pPr algn="ctr"/>
-          </a:p>
-        </p:txBody>
-      </p:sp>
-      <p:sp>
-        <p:nvSpPr>
-          <p:cNvPr id="13" name="TextBox 12"/>
+          <p:cNvPr id="6" name="TextBox 5"/>
           <p:cNvSpPr txBox="1"/>
           <p:nvPr/>
         </p:nvSpPr>
         <p:spPr>
           <a:xfrm>
-            <a:off x="8229600" y="1554480"/>
-            <a:ext cx="3017520" cy="1005840"/>
+            <a:off x="6583680" y="1691640"/>
+            <a:ext cx="4572000" cy="4297680"/>
           </a:xfrm>
           <a:prstGeom prst="rect">
             <a:avLst/>
@@ -5798,181 +5163,76 @@
           <a:lstStyle/>
           <a:p>
             <a:pPr>
+              <a:spcAft>
+                <a:spcPts val="1000"/>
+              </a:spcAft>
+              <a:defRPr sz="1400" b="1">
+                <a:solidFill>
+                  <a:srgbClr val="059669"/>
+                </a:solidFill>
+              </a:defRPr>
+            </a:pPr>
+            <a:r>
+              <a:t>💬 รูปแบบ LINE OA Alert (การ์ดสถานะยอดนิยม)</a:t>
+            </a:r>
+          </a:p>
+          <a:p>
+            <a:pPr>
+              <a:spcAft>
+                <a:spcPts val="1000"/>
+              </a:spcAft>
+              <a:defRPr sz="1050">
+                <a:solidFill>
+                  <a:srgbClr val="0F172A"/>
+                </a:solidFill>
+              </a:defRPr>
+            </a:pPr>
+            <a:r>
+              <a:t>🚨 [CRITICAL] คุณภาพน้ำหลุดเกณฑ์</a:t>
+            </a:r>
+            <a:br/>
+            <a:r>
+              <a:t>📍 สถานี: บ่อจ่ายน้ำเขตเหนือ</a:t>
+            </a:r>
+            <a:br/>
+            <a:r>
+              <a:t>━━━━━━━━━━━━━━━━━━━━</a:t>
+            </a:r>
+            <a:br/>
+            <a:r>
+              <a:t>• คลอรีน: 0.12 mg/L ⚠️ (ต่ำกว่าเกณฑ์)</a:t>
+            </a:r>
+            <a:br/>
+            <a:r>
+              <a:t>• ค่า pH: 6.30 ⚠️ (ต่ำกว่าเกณฑ์)</a:t>
+            </a:r>
+            <a:br/>
+            <a:r>
+              <a:t>• ค่า TDS: 190 ppm (ปกติ)</a:t>
+            </a:r>
+            <a:br/>
+            <a:r>
+              <a:t>• อุณหภูมิ: 29.0 °C (ปกติ)</a:t>
+            </a:r>
+            <a:br/>
+            <a:r>
+              <a:t>━━━━━━━━━━━━━━━━━━━━</a:t>
+            </a:r>
+            <a:br/>
+            <a:r>
+              <a:t>👉 [เปิด Dashboard ดูข้อมูลสด]</a:t>
+            </a:r>
+          </a:p>
+          <a:p>
+            <a:pPr>
               <a:defRPr sz="950" b="1">
                 <a:solidFill>
-                  <a:srgbClr val="FFFFFF"/>
-                </a:solidFill>
-              </a:defRPr>
-            </a:pPr>
-            <a:r>
-              <a:t>Lab Grade • 100 สถานี</a:t>
-            </a:r>
-          </a:p>
-          <a:p>
-            <a:pPr>
-              <a:defRPr sz="1400" b="1">
-                <a:solidFill>
-                  <a:srgbClr val="FFFFFF"/>
-                </a:solidFill>
-              </a:defRPr>
-            </a:pPr>
-            <a:r>
-              <a:t>ENTERPRISE LOT 100</a:t>
-            </a:r>
-          </a:p>
-          <a:p>
-            <a:pPr>
-              <a:defRPr sz="2000" b="1">
-                <a:solidFill>
-                  <a:srgbClr val="FFFFFF"/>
-                </a:solidFill>
-              </a:defRPr>
-            </a:pPr>
-            <a:r>
-              <a:t>฿6,900,000</a:t>
-            </a:r>
-          </a:p>
-        </p:txBody>
-      </p:sp>
-      <p:sp>
-        <p:nvSpPr>
-          <p:cNvPr id="14" name="TextBox 13"/>
-          <p:cNvSpPr txBox="1"/>
-          <p:nvPr/>
-        </p:nvSpPr>
-        <p:spPr>
-          <a:xfrm>
-            <a:off x="8229600" y="2743200"/>
-            <a:ext cx="3017520" cy="3383280"/>
-          </a:xfrm>
-          <a:prstGeom prst="rect">
-            <a:avLst/>
-          </a:prstGeom>
-          <a:noFill/>
-        </p:spPr>
-        <p:txBody>
-          <a:bodyPr wrap="square">
-            <a:spAutoFit/>
-          </a:bodyPr>
-          <a:lstStyle/>
-          <a:p>
-            <a:pPr>
-              <a:spcAft>
-                <a:spcPts val="800"/>
-              </a:spcAft>
-              <a:defRPr sz="900" b="1">
-                <a:solidFill>
-                  <a:srgbClr val="059669"/>
-                </a:solidFill>
-              </a:defRPr>
-            </a:pPr>
-            <a:r>
-              <a:t>ระดับห้องแล็บ 5 พารามิเตอร์ รวม 100 จุด (เฉลี่ย ฿69,000 / จุด (ประหยัด ฿1,000,000))</a:t>
-            </a:r>
-          </a:p>
-          <a:p>
-            <a:pPr>
-              <a:spcAft>
-                <a:spcPts val="300"/>
-              </a:spcAft>
-              <a:defRPr sz="900">
-                <a:solidFill>
-                  <a:srgbClr val="0F172A"/>
-                </a:solidFill>
-              </a:defRPr>
-            </a:pPr>
-            <a:r>
-              <a:t>✓ 100x Master SCADA PLC Hub</a:t>
-            </a:r>
-          </a:p>
-          <a:p>
-            <a:pPr>
-              <a:spcAft>
-                <a:spcPts val="300"/>
-              </a:spcAft>
-              <a:defRPr sz="900">
-                <a:solidFill>
-                  <a:srgbClr val="0F172A"/>
-                </a:solidFill>
-              </a:defRPr>
-            </a:pPr>
-            <a:r>
-              <a:t>✓ 100x เซนเซอร์แล็บ 5 ค่า (+ ORP)</a:t>
-            </a:r>
-          </a:p>
-          <a:p>
-            <a:pPr>
-              <a:spcAft>
-                <a:spcPts val="300"/>
-              </a:spcAft>
-              <a:defRPr sz="900">
-                <a:solidFill>
-                  <a:srgbClr val="0F172A"/>
-                </a:solidFill>
-              </a:defRPr>
-            </a:pPr>
-            <a:r>
-              <a:t>✓ 100x ชุดกระเปาะ Flow Cell Chamber</a:t>
-            </a:r>
-          </a:p>
-          <a:p>
-            <a:pPr>
-              <a:spcAft>
-                <a:spcPts val="300"/>
-              </a:spcAft>
-              <a:defRPr sz="900">
-                <a:solidFill>
-                  <a:srgbClr val="0F172A"/>
-                </a:solidFill>
-              </a:defRPr>
-            </a:pPr>
-            <a:r>
-              <a:t>✓ Dual Power Supply + LiFePO4 Backup</a:t>
-            </a:r>
-          </a:p>
-          <a:p>
-            <a:pPr>
-              <a:spcAft>
-                <a:spcPts val="300"/>
-              </a:spcAft>
-              <a:defRPr sz="900">
-                <a:solidFill>
-                  <a:srgbClr val="0F172A"/>
-                </a:solidFill>
-              </a:defRPr>
-            </a:pPr>
-            <a:r>
-              <a:t>✓ Cloud Unlimited + Modbus TCP/ERP API</a:t>
-            </a:r>
-          </a:p>
-          <a:p>
-            <a:pPr>
-              <a:spcAft>
-                <a:spcPts val="300"/>
-              </a:spcAft>
-              <a:defRPr sz="900">
-                <a:solidFill>
-                  <a:srgbClr val="0F172A"/>
-                </a:solidFill>
-              </a:defRPr>
-            </a:pPr>
-            <a:r>
-              <a:t>✓ บริการ Calibrate หน้างาน 4 ครั้ง/ปี</a:t>
-            </a:r>
-          </a:p>
-          <a:p>
-            <a:pPr>
-              <a:spcAft>
-                <a:spcPts val="300"/>
-              </a:spcAft>
-              <a:defRPr sz="900">
-                <a:solidFill>
-                  <a:srgbClr val="0F172A"/>
-                </a:solidFill>
-              </a:defRPr>
-            </a:pPr>
-            <a:r>
-              <a:t>✓ แถมชุดสำรอง Spare Units 5 ชุด + ประกัน 3 ปี</a:t>
+                  <a:srgbClr val="0284C7"/>
+                </a:solidFill>
+              </a:defRPr>
+            </a:pPr>
+            <a:r>
+              <a:t>✔ จุดเด่น: ใช้งานง่ายในกลุ่มไลน์ผู้บริหาร (+฿1,500/จุด เพื่อซับพอร์ตค่า Broadcast LINE)</a:t>
             </a:r>
           </a:p>
         </p:txBody>
@@ -6036,19 +5296,19 @@
               </a:defRPr>
             </a:pPr>
             <a:r>
-              <a:t>NCT WATER NEXUS PRO | 100-NODE PROJECT SOLUTION</a:t>
-            </a:r>
-          </a:p>
-          <a:p>
-            <a:pPr>
-              <a:defRPr sz="2300" b="1">
+              <a:t>โครงการระบบวัดคุณภาพน้ำอัจฉริยะ 100 จุด (NCT WATER NEXUS)</a:t>
+            </a:r>
+          </a:p>
+          <a:p>
+            <a:pPr>
+              <a:defRPr sz="2200" b="1">
                 <a:solidFill>
                   <a:srgbClr val="0F172A"/>
                 </a:solidFill>
               </a:defRPr>
             </a:pPr>
             <a:r>
-              <a:t>แพ็กเกจโครงการ 100 ชุด: แบบสัญญารายปี (100-Node Annual Subscription)</a:t>
+              <a:t>วิเคราะห์จุดแข็ง-จุดเสี่ยงโมเดลราคา (Strategic Margin Analysis)</a:t>
             </a:r>
           </a:p>
         </p:txBody>
@@ -6062,7 +5322,7 @@
         <p:spPr>
           <a:xfrm>
             <a:off x="731520" y="1463040"/>
-            <a:ext cx="3383280" cy="4754880"/>
+            <a:ext cx="5120640" cy="4754880"/>
           </a:xfrm>
           <a:prstGeom prst="roundRect">
             <a:avLst/>
@@ -6072,7 +5332,7 @@
           </a:solidFill>
           <a:ln w="19050">
             <a:solidFill>
-              <a:srgbClr val="CBD5E1"/>
+              <a:srgbClr val="059669"/>
             </a:solidFill>
           </a:ln>
         </p:spPr>
@@ -6100,57 +5360,14 @@
       </p:sp>
       <p:sp>
         <p:nvSpPr>
-          <p:cNvPr id="4" name="Rounded Rectangle 3"/>
-          <p:cNvSpPr/>
-          <p:nvPr/>
-        </p:nvSpPr>
-        <p:spPr>
-          <a:xfrm>
-            <a:off x="731520" y="1463040"/>
-            <a:ext cx="3383280" cy="1188720"/>
-          </a:xfrm>
-          <a:prstGeom prst="roundRect">
-            <a:avLst/>
-          </a:prstGeom>
-          <a:solidFill>
-            <a:srgbClr val="1E293B"/>
-          </a:solidFill>
-          <a:ln>
-            <a:noFill/>
-          </a:ln>
-        </p:spPr>
-        <p:style>
-          <a:lnRef idx="1">
-            <a:schemeClr val="accent1"/>
-          </a:lnRef>
-          <a:fillRef idx="3">
-            <a:schemeClr val="accent1"/>
-          </a:fillRef>
-          <a:effectRef idx="2">
-            <a:schemeClr val="accent1"/>
-          </a:effectRef>
-          <a:fontRef idx="minor">
-            <a:schemeClr val="lt1"/>
-          </a:fontRef>
-        </p:style>
-        <p:txBody>
-          <a:bodyPr rtlCol="0" anchor="ctr"/>
-          <a:lstStyle/>
-          <a:p>
-            <a:pPr algn="ctr"/>
-          </a:p>
-        </p:txBody>
-      </p:sp>
-      <p:sp>
-        <p:nvSpPr>
-          <p:cNvPr id="5" name="TextBox 4"/>
+          <p:cNvPr id="4" name="TextBox 3"/>
           <p:cNvSpPr txBox="1"/>
           <p:nvPr/>
         </p:nvSpPr>
         <p:spPr>
           <a:xfrm>
-            <a:off x="914400" y="1554480"/>
-            <a:ext cx="3017520" cy="1005840"/>
+            <a:off x="1005840" y="1691640"/>
+            <a:ext cx="4572000" cy="4297680"/>
           </a:xfrm>
           <a:prstGeom prst="rect">
             <a:avLst/>
@@ -6164,195 +5381,112 @@
           <a:lstStyle/>
           <a:p>
             <a:pPr>
-              <a:defRPr sz="950" b="1">
-                <a:solidFill>
-                  <a:srgbClr val="2DD4BF"/>
-                </a:solidFill>
-              </a:defRPr>
-            </a:pPr>
-            <a:r>
-              <a:t>รายปี • 100 สถานี</a:t>
-            </a:r>
-          </a:p>
-          <a:p>
-            <a:pPr>
+              <a:spcAft>
+                <a:spcPts val="1000"/>
+              </a:spcAft>
               <a:defRPr sz="1350" b="1">
                 <a:solidFill>
-                  <a:srgbClr val="FFFFFF"/>
-                </a:solidFill>
-              </a:defRPr>
-            </a:pPr>
-            <a:r>
-              <a:t>STANDARD CARE LOT 100</a:t>
-            </a:r>
-          </a:p>
-          <a:p>
-            <a:pPr>
-              <a:defRPr sz="2000" b="1">
-                <a:solidFill>
-                  <a:srgbClr val="FFFFFF"/>
-                </a:solidFill>
-              </a:defRPr>
-            </a:pPr>
-            <a:r>
-              <a:t>฿1,050,000 / ปี</a:t>
-            </a:r>
-          </a:p>
-        </p:txBody>
-      </p:sp>
-      <p:sp>
-        <p:nvSpPr>
-          <p:cNvPr id="6" name="TextBox 5"/>
-          <p:cNvSpPr txBox="1"/>
-          <p:nvPr/>
-        </p:nvSpPr>
-        <p:spPr>
-          <a:xfrm>
-            <a:off x="914400" y="2743200"/>
-            <a:ext cx="3017520" cy="3383280"/>
-          </a:xfrm>
-          <a:prstGeom prst="rect">
-            <a:avLst/>
-          </a:prstGeom>
-          <a:noFill/>
-        </p:spPr>
-        <p:txBody>
-          <a:bodyPr wrap="square">
-            <a:spAutoFit/>
-          </a:bodyPr>
-          <a:lstStyle/>
+                  <a:srgbClr val="059669"/>
+                </a:solidFill>
+              </a:defRPr>
+            </a:pPr>
+            <a:r>
+              <a:t>🔄 ฝั่งรายปี (ดีมาก แนะนำให้ผลักดันลูกค้ารูปแบบนี้)</a:t>
+            </a:r>
+          </a:p>
+          <a:p>
+            <a:pPr>
+              <a:defRPr b="1" sz="1100">
+                <a:solidFill>
+                  <a:srgbClr val="0F172A"/>
+                </a:solidFill>
+              </a:defRPr>
+            </a:pPr>
+            <a:r>
+              <a:t>• ตัวเลข 1,200 – 3,600 บาท/จุด/ปี:</a:t>
+            </a:r>
+          </a:p>
           <a:p>
             <a:pPr>
               <a:spcAft>
-                <a:spcPts val="800"/>
+                <a:spcPts val="600"/>
               </a:spcAft>
-              <a:defRPr sz="900" b="1">
-                <a:solidFill>
-                  <a:srgbClr val="0284C7"/>
-                </a:solidFill>
-              </a:defRPr>
-            </a:pPr>
-            <a:r>
-              <a:t>pH + Temp 100 จุด (เฉลี่ย ฿875/จุด/ด.)</a:t>
+              <a:defRPr sz="1000">
+                <a:solidFill>
+                  <a:srgbClr val="64748B"/>
+                </a:solidFill>
+              </a:defRPr>
+            </a:pPr>
+            <a:r>
+              <a:t>  ตกเดือนละ 100–300 บาท/ตู้ เป็นราคาที่ลูกค้าองค์กร/โรงงาน/เทศบาล จ่ายได้ง่ายมาก</a:t>
+            </a:r>
+          </a:p>
+          <a:p>
+            <a:pPr>
+              <a:defRPr b="1" sz="1100">
+                <a:solidFill>
+                  <a:srgbClr val="0F172A"/>
+                </a:solidFill>
+              </a:defRPr>
+            </a:pPr>
+            <a:r>
+              <a:t>• Recurring Income ก้อนโตทุกปี:</a:t>
             </a:r>
           </a:p>
           <a:p>
             <a:pPr>
               <a:spcAft>
-                <a:spcPts val="300"/>
+                <a:spcPts val="600"/>
               </a:spcAft>
-              <a:defRPr sz="900">
+              <a:defRPr sz="1000">
+                <a:solidFill>
+                  <a:srgbClr val="64748B"/>
+                </a:solidFill>
+              </a:defRPr>
+            </a:pPr>
+            <a:r>
+              <a:t>  มีรายรับสม่ำเสมอ 120,000 – 360,000 บาททุกปี ไว้เป็นค่า Cloud Server, ค่าซ่อมบำรุง และกำไรต่อเนื่อง</a:t>
+            </a:r>
+          </a:p>
+          <a:p>
+            <a:pPr>
+              <a:defRPr b="1" sz="1100">
                 <a:solidFill>
                   <a:srgbClr val="0F172A"/>
                 </a:solidFill>
               </a:defRPr>
             </a:pPr>
             <a:r>
-              <a:t>✓ ให้ยืมเครื่อง NCT Controller ครบ 100 ชุด</a:t>
+              <a:t>• ล็อกฐานลูกค้าได้ยาวนาน:</a:t>
             </a:r>
           </a:p>
           <a:p>
             <a:pPr>
               <a:spcAft>
-                <a:spcPts val="300"/>
+                <a:spcPts val="600"/>
               </a:spcAft>
-              <a:defRPr sz="900">
-                <a:solidFill>
-                  <a:srgbClr val="0F172A"/>
-                </a:solidFill>
-              </a:defRPr>
-            </a:pPr>
-            <a:r>
-              <a:t>✓ หัววัด pH + Temp 100 ชุด (เปลี่ยนฟรีเมื่อเสื่อม)</a:t>
-            </a:r>
-          </a:p>
-          <a:p>
-            <a:pPr>
-              <a:spcAft>
-                <a:spcPts val="300"/>
-              </a:spcAft>
-              <a:defRPr sz="900">
-                <a:solidFill>
-                  <a:srgbClr val="0F172A"/>
-                </a:solidFill>
-              </a:defRPr>
-            </a:pPr>
-            <a:r>
-              <a:t>✓ ฟรี Cloud Server &amp; ซิม 4G 100 ซิม ไม่จำกัด</a:t>
-            </a:r>
-          </a:p>
-          <a:p>
-            <a:pPr>
-              <a:spcAft>
-                <a:spcPts val="300"/>
-              </a:spcAft>
-              <a:defRPr sz="900">
-                <a:solidFill>
-                  <a:srgbClr val="0F172A"/>
-                </a:solidFill>
-              </a:defRPr>
-            </a:pPr>
-            <a:r>
-              <a:t>✓ ระบบรวมศูนย์ SCADA 100 จุด + Mobile App</a:t>
-            </a:r>
-          </a:p>
-          <a:p>
-            <a:pPr>
-              <a:spcAft>
-                <a:spcPts val="300"/>
-              </a:spcAft>
-              <a:defRPr sz="900">
-                <a:solidFill>
-                  <a:srgbClr val="0F172A"/>
-                </a:solidFill>
-              </a:defRPr>
-            </a:pPr>
-            <a:r>
-              <a:t>✓ แจ้งเตือน Line Alert &amp; SMS แยกโซน 24 ชม.</a:t>
-            </a:r>
-          </a:p>
-          <a:p>
-            <a:pPr>
-              <a:spcAft>
-                <a:spcPts val="300"/>
-              </a:spcAft>
-              <a:defRPr sz="900">
-                <a:solidFill>
-                  <a:srgbClr val="0F172A"/>
-                </a:solidFill>
-              </a:defRPr>
-            </a:pPr>
-            <a:r>
-              <a:t>✓ แถมชุดสำรอง Spare Units ประจำไซต์ 5 ชุด</a:t>
-            </a:r>
-          </a:p>
-          <a:p>
-            <a:pPr>
-              <a:spcAft>
-                <a:spcPts val="300"/>
-              </a:spcAft>
-              <a:defRPr sz="900">
-                <a:solidFill>
-                  <a:srgbClr val="0F172A"/>
-                </a:solidFill>
-              </a:defRPr>
-            </a:pPr>
-            <a:r>
-              <a:t>✓ ดูแลและรับประกันตลอดอายุสัญญาเช่า</a:t>
-            </a:r>
-          </a:p>
-        </p:txBody>
-      </p:sp>
-      <p:sp>
-        <p:nvSpPr>
-          <p:cNvPr id="7" name="Rounded Rectangle 6"/>
+              <a:defRPr sz="1000">
+                <a:solidFill>
+                  <a:srgbClr val="64748B"/>
+                </a:solidFill>
+              </a:defRPr>
+            </a:pPr>
+            <a:r>
+              <a:t>  ลูกค้าไม่ต้องกังวลเรื่องการดูแล เราดูแลซ่อมบำรุงและอัปเดตระบบให้ 100%</a:t>
+            </a:r>
+          </a:p>
+        </p:txBody>
+      </p:sp>
+      <p:sp>
+        <p:nvSpPr>
+          <p:cNvPr id="5" name="Rounded Rectangle 4"/>
           <p:cNvSpPr/>
           <p:nvPr/>
         </p:nvSpPr>
         <p:spPr>
           <a:xfrm>
-            <a:off x="4389120" y="1463040"/>
-            <a:ext cx="3383280" cy="4754880"/>
+            <a:off x="6309360" y="1463040"/>
+            <a:ext cx="5120640" cy="4754880"/>
           </a:xfrm>
           <a:prstGeom prst="roundRect">
             <a:avLst/>
@@ -6390,57 +5524,14 @@
       </p:sp>
       <p:sp>
         <p:nvSpPr>
-          <p:cNvPr id="8" name="Rounded Rectangle 7"/>
-          <p:cNvSpPr/>
-          <p:nvPr/>
-        </p:nvSpPr>
-        <p:spPr>
-          <a:xfrm>
-            <a:off x="4389120" y="1463040"/>
-            <a:ext cx="3383280" cy="1188720"/>
-          </a:xfrm>
-          <a:prstGeom prst="roundRect">
-            <a:avLst/>
-          </a:prstGeom>
-          <a:solidFill>
-            <a:srgbClr val="0284C7"/>
-          </a:solidFill>
-          <a:ln>
-            <a:noFill/>
-          </a:ln>
-        </p:spPr>
-        <p:style>
-          <a:lnRef idx="1">
-            <a:schemeClr val="accent1"/>
-          </a:lnRef>
-          <a:fillRef idx="3">
-            <a:schemeClr val="accent1"/>
-          </a:fillRef>
-          <a:effectRef idx="2">
-            <a:schemeClr val="accent1"/>
-          </a:effectRef>
-          <a:fontRef idx="minor">
-            <a:schemeClr val="lt1"/>
-          </a:fontRef>
-        </p:style>
-        <p:txBody>
-          <a:bodyPr rtlCol="0" anchor="ctr"/>
-          <a:lstStyle/>
-          <a:p>
-            <a:pPr algn="ctr"/>
-          </a:p>
-        </p:txBody>
-      </p:sp>
-      <p:sp>
-        <p:nvSpPr>
-          <p:cNvPr id="9" name="TextBox 8"/>
+          <p:cNvPr id="6" name="TextBox 5"/>
           <p:cNvSpPr txBox="1"/>
           <p:nvPr/>
         </p:nvSpPr>
         <p:spPr>
           <a:xfrm>
-            <a:off x="4572000" y="1554480"/>
-            <a:ext cx="3017520" cy="1005840"/>
+            <a:off x="6583680" y="1691640"/>
+            <a:ext cx="4572000" cy="4297680"/>
           </a:xfrm>
           <a:prstGeom prst="rect">
             <a:avLst/>
@@ -6454,471 +5545,98 @@
           <a:lstStyle/>
           <a:p>
             <a:pPr>
-              <a:defRPr sz="950" b="1">
-                <a:solidFill>
-                  <a:srgbClr val="FFFFFF"/>
-                </a:solidFill>
-              </a:defRPr>
-            </a:pPr>
-            <a:r>
-              <a:t>★ แนะนำสำหรับนิคมฯ/ประปา</a:t>
-            </a:r>
-          </a:p>
-          <a:p>
-            <a:pPr>
+              <a:spcAft>
+                <a:spcPts val="1000"/>
+              </a:spcAft>
               <a:defRPr sz="1350" b="1">
                 <a:solidFill>
-                  <a:srgbClr val="FFFFFF"/>
-                </a:solidFill>
-              </a:defRPr>
-            </a:pPr>
-            <a:r>
-              <a:t>PRO CARE LOT 100</a:t>
-            </a:r>
-          </a:p>
-          <a:p>
-            <a:pPr>
-              <a:defRPr sz="2000" b="1">
-                <a:solidFill>
-                  <a:srgbClr val="FFFFFF"/>
-                </a:solidFill>
-              </a:defRPr>
-            </a:pPr>
-            <a:r>
-              <a:t>฿2,100,000 / ปี</a:t>
-            </a:r>
-          </a:p>
-        </p:txBody>
-      </p:sp>
-      <p:sp>
-        <p:nvSpPr>
-          <p:cNvPr id="10" name="TextBox 9"/>
-          <p:cNvSpPr txBox="1"/>
-          <p:nvPr/>
-        </p:nvSpPr>
-        <p:spPr>
-          <a:xfrm>
-            <a:off x="4572000" y="2743200"/>
-            <a:ext cx="3017520" cy="3383280"/>
-          </a:xfrm>
-          <a:prstGeom prst="rect">
-            <a:avLst/>
-          </a:prstGeom>
-          <a:noFill/>
-        </p:spPr>
-        <p:txBody>
-          <a:bodyPr wrap="square">
-            <a:spAutoFit/>
-          </a:bodyPr>
-          <a:lstStyle/>
+                  <a:srgbClr val="0284C7"/>
+                </a:solidFill>
+              </a:defRPr>
+            </a:pPr>
+            <a:r>
+              <a:t>🏷️ ฝั่งซื้อขาด (ตัวเลขผ่าน แต่ต้องล็อคขอบเขตให้ชัด)</a:t>
+            </a:r>
+          </a:p>
+          <a:p>
+            <a:pPr>
+              <a:defRPr b="1" sz="1100">
+                <a:solidFill>
+                  <a:srgbClr val="0F172A"/>
+                </a:solidFill>
+              </a:defRPr>
+            </a:pPr>
+            <a:r>
+              <a:t>• ราคาเฉลี่ย 2,500 – 6,000 บาท/จุด:</a:t>
+            </a:r>
+          </a:p>
           <a:p>
             <a:pPr>
               <a:spcAft>
-                <a:spcPts val="800"/>
+                <a:spcPts val="600"/>
               </a:spcAft>
-              <a:defRPr sz="900" b="1">
-                <a:solidFill>
-                  <a:srgbClr val="0284C7"/>
-                </a:solidFill>
-              </a:defRPr>
-            </a:pPr>
-            <a:r>
-              <a:t>ตรวจ 4 ค่า 100 จุด (เฉลี่ย ฿1,750/จุด/ด.)</a:t>
+              <a:defRPr sz="1000">
+                <a:solidFill>
+                  <a:srgbClr val="64748B"/>
+                </a:solidFill>
+              </a:defRPr>
+            </a:pPr>
+            <a:r>
+              <a:t>  ยอดรวม 2.5 – 6 แสนบาท ลูกค้าไม่รู้สึกว่าแพงเกินไปสำหรับระบบ 100 จุด</a:t>
+            </a:r>
+          </a:p>
+          <a:p>
+            <a:pPr>
+              <a:defRPr b="1" sz="1100">
+                <a:solidFill>
+                  <a:srgbClr val="0F172A"/>
+                </a:solidFill>
+              </a:defRPr>
+            </a:pPr>
+            <a:r>
+              <a:t>• จุดที่ต้องระวัง:</a:t>
             </a:r>
           </a:p>
           <a:p>
             <a:pPr>
               <a:spcAft>
-                <a:spcPts val="300"/>
+                <a:spcPts val="600"/>
               </a:spcAft>
-              <a:defRPr sz="900">
+              <a:defRPr sz="1000">
+                <a:solidFill>
+                  <a:srgbClr val="64748B"/>
+                </a:solidFill>
+              </a:defRPr>
+            </a:pPr>
+            <a:r>
+              <a:t>  ซื้อขาดแปลว่าเราต้องแบกค่า Host/Database เองในอนาคต หรือต้องส่งมอบ Source Code ให้ลูกค้ารัน Server เอง</a:t>
+            </a:r>
+          </a:p>
+          <a:p>
+            <a:pPr>
+              <a:defRPr b="1" sz="1100">
                 <a:solidFill>
                   <a:srgbClr val="0F172A"/>
                 </a:solidFill>
               </a:defRPr>
             </a:pPr>
             <a:r>
-              <a:t>✓ ให้ยืมเครื่อง Heavy-Duty SCADA ครบ 100 ชุด</a:t>
+              <a:t>• เงื่อนไขสัญญาป้องกันต้นทุน (MA):</a:t>
             </a:r>
           </a:p>
           <a:p>
             <a:pPr>
               <a:spcAft>
-                <a:spcPts val="300"/>
+                <a:spcPts val="600"/>
               </a:spcAft>
-              <a:defRPr sz="900">
-                <a:solidFill>
-                  <a:srgbClr val="0F172A"/>
-                </a:solidFill>
-              </a:defRPr>
-            </a:pPr>
-            <a:r>
-              <a:t>✓ หัววัดครบ 4 ค่า (pH, Temp, TDS, Cl) 100 จุด</a:t>
-            </a:r>
-          </a:p>
-          <a:p>
-            <a:pPr>
-              <a:spcAft>
-                <a:spcPts val="300"/>
-              </a:spcAft>
-              <a:defRPr sz="900">
-                <a:solidFill>
-                  <a:srgbClr val="0F172A"/>
-                </a:solidFill>
-              </a:defRPr>
-            </a:pPr>
-            <a:r>
-              <a:t>✓ ฟรี Calibrate สอบเทียบหน้างาน 2 ครั้ง/ปี</a:t>
-            </a:r>
-          </a:p>
-          <a:p>
-            <a:pPr>
-              <a:spcAft>
-                <a:spcPts val="300"/>
-              </a:spcAft>
-              <a:defRPr sz="900">
-                <a:solidFill>
-                  <a:srgbClr val="0F172A"/>
-                </a:solidFill>
-              </a:defRPr>
-            </a:pPr>
-            <a:r>
-              <a:t>✓ ฟรีอะไหล่และหัววัดเปลี่ยนใหม่ทันทีตลอดสัญญา</a:t>
-            </a:r>
-          </a:p>
-          <a:p>
-            <a:pPr>
-              <a:spcAft>
-                <a:spcPts val="300"/>
-              </a:spcAft>
-              <a:defRPr sz="900">
-                <a:solidFill>
-                  <a:srgbClr val="0F172A"/>
-                </a:solidFill>
-              </a:defRPr>
-            </a:pPr>
-            <a:r>
-              <a:t>✓ ฟรี Private Cloud Server &amp; White-Label Logo</a:t>
-            </a:r>
-          </a:p>
-          <a:p>
-            <a:pPr>
-              <a:spcAft>
-                <a:spcPts val="300"/>
-              </a:spcAft>
-              <a:defRPr sz="900">
-                <a:solidFill>
-                  <a:srgbClr val="0F172A"/>
-                </a:solidFill>
-              </a:defRPr>
-            </a:pPr>
-            <a:r>
-              <a:t>✓ แถมชุดสำรอง Spare Units 5 ชุด + On-site SLA</a:t>
-            </a:r>
-          </a:p>
-          <a:p>
-            <a:pPr>
-              <a:spcAft>
-                <a:spcPts val="300"/>
-              </a:spcAft>
-              <a:defRPr sz="900">
-                <a:solidFill>
-                  <a:srgbClr val="0F172A"/>
-                </a:solidFill>
-              </a:defRPr>
-            </a:pPr>
-            <a:r>
-              <a:t>✓ ทีมวิศวกร Support ดูแลตลอดสัญญา 24/7</a:t>
-            </a:r>
-          </a:p>
-        </p:txBody>
-      </p:sp>
-      <p:sp>
-        <p:nvSpPr>
-          <p:cNvPr id="11" name="Rounded Rectangle 10"/>
-          <p:cNvSpPr/>
-          <p:nvPr/>
-        </p:nvSpPr>
-        <p:spPr>
-          <a:xfrm>
-            <a:off x="8046720" y="1463040"/>
-            <a:ext cx="3383280" cy="4754880"/>
-          </a:xfrm>
-          <a:prstGeom prst="roundRect">
-            <a:avLst/>
-          </a:prstGeom>
-          <a:solidFill>
-            <a:srgbClr val="FFFFFF"/>
-          </a:solidFill>
-          <a:ln w="19050">
-            <a:solidFill>
-              <a:srgbClr val="059669"/>
-            </a:solidFill>
-          </a:ln>
-        </p:spPr>
-        <p:style>
-          <a:lnRef idx="1">
-            <a:schemeClr val="accent1"/>
-          </a:lnRef>
-          <a:fillRef idx="3">
-            <a:schemeClr val="accent1"/>
-          </a:fillRef>
-          <a:effectRef idx="2">
-            <a:schemeClr val="accent1"/>
-          </a:effectRef>
-          <a:fontRef idx="minor">
-            <a:schemeClr val="lt1"/>
-          </a:fontRef>
-        </p:style>
-        <p:txBody>
-          <a:bodyPr rtlCol="0" anchor="ctr"/>
-          <a:lstStyle/>
-          <a:p>
-            <a:pPr algn="ctr"/>
-          </a:p>
-        </p:txBody>
-      </p:sp>
-      <p:sp>
-        <p:nvSpPr>
-          <p:cNvPr id="12" name="Rounded Rectangle 11"/>
-          <p:cNvSpPr/>
-          <p:nvPr/>
-        </p:nvSpPr>
-        <p:spPr>
-          <a:xfrm>
-            <a:off x="8046720" y="1463040"/>
-            <a:ext cx="3383280" cy="1188720"/>
-          </a:xfrm>
-          <a:prstGeom prst="roundRect">
-            <a:avLst/>
-          </a:prstGeom>
-          <a:solidFill>
-            <a:srgbClr val="059669"/>
-          </a:solidFill>
-          <a:ln>
-            <a:noFill/>
-          </a:ln>
-        </p:spPr>
-        <p:style>
-          <a:lnRef idx="1">
-            <a:schemeClr val="accent1"/>
-          </a:lnRef>
-          <a:fillRef idx="3">
-            <a:schemeClr val="accent1"/>
-          </a:fillRef>
-          <a:effectRef idx="2">
-            <a:schemeClr val="accent1"/>
-          </a:effectRef>
-          <a:fontRef idx="minor">
-            <a:schemeClr val="lt1"/>
-          </a:fontRef>
-        </p:style>
-        <p:txBody>
-          <a:bodyPr rtlCol="0" anchor="ctr"/>
-          <a:lstStyle/>
-          <a:p>
-            <a:pPr algn="ctr"/>
-          </a:p>
-        </p:txBody>
-      </p:sp>
-      <p:sp>
-        <p:nvSpPr>
-          <p:cNvPr id="13" name="TextBox 12"/>
-          <p:cNvSpPr txBox="1"/>
-          <p:nvPr/>
-        </p:nvSpPr>
-        <p:spPr>
-          <a:xfrm>
-            <a:off x="8229600" y="1554480"/>
-            <a:ext cx="3017520" cy="1005840"/>
-          </a:xfrm>
-          <a:prstGeom prst="rect">
-            <a:avLst/>
-          </a:prstGeom>
-          <a:noFill/>
-        </p:spPr>
-        <p:txBody>
-          <a:bodyPr wrap="square">
-            <a:spAutoFit/>
-          </a:bodyPr>
-          <a:lstStyle/>
-          <a:p>
-            <a:pPr>
-              <a:defRPr sz="950" b="1">
-                <a:solidFill>
-                  <a:srgbClr val="FFFFFF"/>
-                </a:solidFill>
-              </a:defRPr>
-            </a:pPr>
-            <a:r>
-              <a:t>Full SLA • 100 สถานี</a:t>
-            </a:r>
-          </a:p>
-          <a:p>
-            <a:pPr>
-              <a:defRPr sz="1350" b="1">
-                <a:solidFill>
-                  <a:srgbClr val="FFFFFF"/>
-                </a:solidFill>
-              </a:defRPr>
-            </a:pPr>
-            <a:r>
-              <a:t>ENTERPRISE CARE LOT 100</a:t>
-            </a:r>
-          </a:p>
-          <a:p>
-            <a:pPr>
-              <a:defRPr sz="2000" b="1">
-                <a:solidFill>
-                  <a:srgbClr val="FFFFFF"/>
-                </a:solidFill>
-              </a:defRPr>
-            </a:pPr>
-            <a:r>
-              <a:t>฿3,450,000 / ปี</a:t>
-            </a:r>
-          </a:p>
-        </p:txBody>
-      </p:sp>
-      <p:sp>
-        <p:nvSpPr>
-          <p:cNvPr id="14" name="TextBox 13"/>
-          <p:cNvSpPr txBox="1"/>
-          <p:nvPr/>
-        </p:nvSpPr>
-        <p:spPr>
-          <a:xfrm>
-            <a:off x="8229600" y="2743200"/>
-            <a:ext cx="3017520" cy="3383280"/>
-          </a:xfrm>
-          <a:prstGeom prst="rect">
-            <a:avLst/>
-          </a:prstGeom>
-          <a:noFill/>
-        </p:spPr>
-        <p:txBody>
-          <a:bodyPr wrap="square">
-            <a:spAutoFit/>
-          </a:bodyPr>
-          <a:lstStyle/>
-          <a:p>
-            <a:pPr>
-              <a:spcAft>
-                <a:spcPts val="800"/>
-              </a:spcAft>
-              <a:defRPr sz="900" b="1">
-                <a:solidFill>
-                  <a:srgbClr val="059669"/>
-                </a:solidFill>
-              </a:defRPr>
-            </a:pPr>
-            <a:r>
-              <a:t>เกรดแล็บ 5 ค่า 100 จุด (เฉลี่ย ฿2,875/จุด/ด.)</a:t>
-            </a:r>
-          </a:p>
-          <a:p>
-            <a:pPr>
-              <a:spcAft>
-                <a:spcPts val="300"/>
-              </a:spcAft>
-              <a:defRPr sz="900">
-                <a:solidFill>
-                  <a:srgbClr val="0F172A"/>
-                </a:solidFill>
-              </a:defRPr>
-            </a:pPr>
-            <a:r>
-              <a:t>✓ ให้ยืมตู้ Master SCADA PLC Hub ครบ 100 ชุด</a:t>
-            </a:r>
-          </a:p>
-          <a:p>
-            <a:pPr>
-              <a:spcAft>
-                <a:spcPts val="300"/>
-              </a:spcAft>
-              <a:defRPr sz="900">
-                <a:solidFill>
-                  <a:srgbClr val="0F172A"/>
-                </a:solidFill>
-              </a:defRPr>
-            </a:pPr>
-            <a:r>
-              <a:t>✓ หัววัด 5 ค่า (+ ORP) + Flow Cell 100 จุด</a:t>
-            </a:r>
-          </a:p>
-          <a:p>
-            <a:pPr>
-              <a:spcAft>
-                <a:spcPts val="300"/>
-              </a:spcAft>
-              <a:defRPr sz="900">
-                <a:solidFill>
-                  <a:srgbClr val="0F172A"/>
-                </a:solidFill>
-              </a:defRPr>
-            </a:pPr>
-            <a:r>
-              <a:t>✓ ฟรี Calibrate 4 ครั้ง/ปี พร้อมใบรับรอง ISO</a:t>
-            </a:r>
-          </a:p>
-          <a:p>
-            <a:pPr>
-              <a:spcAft>
-                <a:spcPts val="300"/>
-              </a:spcAft>
-              <a:defRPr sz="900">
-                <a:solidFill>
-                  <a:srgbClr val="0F172A"/>
-                </a:solidFill>
-              </a:defRPr>
-            </a:pPr>
-            <a:r>
-              <a:t>✓ Cloud Unlimited + Modbus TCP / ERP API</a:t>
-            </a:r>
-          </a:p>
-          <a:p>
-            <a:pPr>
-              <a:spcAft>
-                <a:spcPts val="300"/>
-              </a:spcAft>
-              <a:defRPr sz="900">
-                <a:solidFill>
-                  <a:srgbClr val="0F172A"/>
-                </a:solidFill>
-              </a:defRPr>
-            </a:pPr>
-            <a:r>
-              <a:t>✓ เครื่องสำรองประจำไซต์ 5 ชุด + เคลมใน 24 ชม.</a:t>
-            </a:r>
-          </a:p>
-          <a:p>
-            <a:pPr>
-              <a:spcAft>
-                <a:spcPts val="300"/>
-              </a:spcAft>
-              <a:defRPr sz="900">
-                <a:solidFill>
-                  <a:srgbClr val="0F172A"/>
-                </a:solidFill>
-              </a:defRPr>
-            </a:pPr>
-            <a:r>
-              <a:t>✓ สัญญาบริการระดับ Priority 24/7 SLA</a:t>
-            </a:r>
-          </a:p>
-          <a:p>
-            <a:pPr>
-              <a:spcAft>
-                <a:spcPts val="300"/>
-              </a:spcAft>
-              <a:defRPr sz="900">
-                <a:solidFill>
-                  <a:srgbClr val="0F172A"/>
-                </a:solidFill>
-              </a:defRPr>
-            </a:pPr>
-            <a:r>
-              <a:t>✓ ทีมวิศวกรประจำโครงการดูแลเฉพาะองค์กร</a:t>
+              <a:defRPr sz="1000">
+                <a:solidFill>
+                  <a:srgbClr val="64748B"/>
+                </a:solidFill>
+              </a:defRPr>
+            </a:pPr>
+            <a:r>
+              <a:t>  ควรกำหนดในสัญญาว่า ฟรี Support/แก้บั๊ก 1 ปีแรกเท่านั้น ปีถัดไปคิดสัญญา MA แยก 10–15% ต่อปี</a:t>
             </a:r>
           </a:p>
         </p:txBody>
@@ -6982,19 +5700,19 @@
               </a:defRPr>
             </a:pPr>
             <a:r>
-              <a:t>NCT WATER NEXUS PRO | 100-NODE PROJECT SOLUTION</a:t>
-            </a:r>
-          </a:p>
-          <a:p>
-            <a:pPr>
-              <a:defRPr sz="2300" b="1">
+              <a:t>โครงการระบบวัดคุณภาพน้ำอัจฉริยะ 100 จุด (NCT WATER NEXUS)</a:t>
+            </a:r>
+          </a:p>
+          <a:p>
+            <a:pPr>
+              <a:defRPr sz="2200" b="1">
                 <a:solidFill>
                   <a:srgbClr val="0F172A"/>
                 </a:solidFill>
               </a:defRPr>
             </a:pPr>
             <a:r>
-              <a:t>สเปกเซนเซอร์ตรวจวัดคุณภาพน้ำ (High-Precision Sensor Probes)</a:t>
+              <a:t>ระบบแดชบอร์ด SCADA และ Mobile Companion App (Software Platform)</a:t>
             </a:r>
           </a:p>
         </p:txBody>
@@ -7008,7 +5726,7 @@
         <p:spPr>
           <a:xfrm>
             <a:off x="731520" y="1463040"/>
-            <a:ext cx="2468880" cy="2926080"/>
+            <a:ext cx="5120640" cy="4754880"/>
           </a:xfrm>
           <a:prstGeom prst="roundRect">
             <a:avLst/>
@@ -7018,7 +5736,7 @@
           </a:solidFill>
           <a:ln w="19050">
             <a:solidFill>
-              <a:srgbClr val="D97706"/>
+              <a:srgbClr val="CBD5E1"/>
             </a:solidFill>
           </a:ln>
         </p:spPr>
@@ -7052,8 +5770,8 @@
         </p:nvSpPr>
         <p:spPr>
           <a:xfrm>
-            <a:off x="868680" y="1600200"/>
-            <a:ext cx="2194560" cy="2651760"/>
+            <a:off x="1005840" y="1691640"/>
+            <a:ext cx="4572000" cy="4297680"/>
           </a:xfrm>
           <a:prstGeom prst="rect">
             <a:avLst/>
@@ -7067,29 +5785,29 @@
           <a:lstStyle/>
           <a:p>
             <a:pPr>
-              <a:defRPr sz="1000" b="1">
-                <a:solidFill>
-                  <a:srgbClr val="D97706"/>
-                </a:solidFill>
-              </a:defRPr>
-            </a:pPr>
-            <a:r>
-              <a:t>SENSOR 01</a:t>
-            </a:r>
-          </a:p>
-          <a:p>
-            <a:pPr>
               <a:spcAft>
-                <a:spcPts val="400"/>
+                <a:spcPts val="1000"/>
               </a:spcAft>
-              <a:defRPr sz="1300" b="1">
+              <a:defRPr sz="1400" b="1">
+                <a:solidFill>
+                  <a:srgbClr val="0284C7"/>
+                </a:solidFill>
+              </a:defRPr>
+            </a:pPr>
+            <a:r>
+              <a:t>💻 1. Centralized SCADA Widescreen View</a:t>
+            </a:r>
+          </a:p>
+          <a:p>
+            <a:pPr>
+              <a:defRPr b="1" sz="1100">
                 <a:solidFill>
                   <a:srgbClr val="0F172A"/>
                 </a:solidFill>
               </a:defRPr>
             </a:pPr>
             <a:r>
-              <a:t>อุณหภูมิน้ำ (Water Temp)</a:t>
+              <a:t>• GIS Map &amp; 100-Node Grid Overview:</a:t>
             </a:r>
           </a:p>
           <a:p>
@@ -7097,34 +5815,95 @@
               <a:spcAft>
                 <a:spcPts val="600"/>
               </a:spcAft>
-              <a:defRPr sz="1050" b="1">
-                <a:solidFill>
-                  <a:srgbClr val="D97706"/>
-                </a:solidFill>
-              </a:defRPr>
-            </a:pPr>
-            <a:r>
-              <a:t>หัววัด: PT1000 Platinum RTD</a:t>
-            </a:r>
-          </a:p>
-          <a:p>
-            <a:pPr>
-              <a:defRPr sz="950">
+              <a:defRPr sz="1000">
                 <a:solidFill>
                   <a:srgbClr val="64748B"/>
                 </a:solidFill>
               </a:defRPr>
             </a:pPr>
             <a:r>
-              <a:t>ช่วงวัด: 0.0 - 50.0°C</a:t>
-            </a:r>
-            <a:br/>
-            <a:r>
-              <a:t>ความละเอียด: ±0.1°C</a:t>
-            </a:r>
-            <a:br/>
-            <a:r>
-              <a:t>ฟังก์ชัน: ระบบชดเชยอุณหภูมิอัตโนมัติ (ATC Compensation) เพื่อความเที่ยงตรงสูงสุดของค่า pH &amp; TDS</a:t>
+              <a:t>  แสดงตำแหน่งและสถานะของทั้ง 100 สถานีบนแผนที่ GIS ตรวจเช็คจุดผิดปกติได้ทันที</a:t>
+            </a:r>
+          </a:p>
+          <a:p>
+            <a:pPr>
+              <a:defRPr b="1" sz="1100">
+                <a:solidFill>
+                  <a:srgbClr val="0F172A"/>
+                </a:solidFill>
+              </a:defRPr>
+            </a:pPr>
+            <a:r>
+              <a:t>• High-Frequency Telemetry Trends:</a:t>
+            </a:r>
+          </a:p>
+          <a:p>
+            <a:pPr>
+              <a:spcAft>
+                <a:spcPts val="600"/>
+              </a:spcAft>
+              <a:defRPr sz="1000">
+                <a:solidFill>
+                  <a:srgbClr val="64748B"/>
+                </a:solidFill>
+              </a:defRPr>
+            </a:pPr>
+            <a:r>
+              <a:t>  กราฟ Real-Time Dynamic Charts วิเคราะห์แนวโน้มคุณภาพน้ำของแต่ละสถานี 24 ชม.</a:t>
+            </a:r>
+          </a:p>
+          <a:p>
+            <a:pPr>
+              <a:defRPr b="1" sz="1100">
+                <a:solidFill>
+                  <a:srgbClr val="0F172A"/>
+                </a:solidFill>
+              </a:defRPr>
+            </a:pPr>
+            <a:r>
+              <a:t>• Zone Alert Management:</a:t>
+            </a:r>
+          </a:p>
+          <a:p>
+            <a:pPr>
+              <a:spcAft>
+                <a:spcPts val="600"/>
+              </a:spcAft>
+              <a:defRPr sz="1000">
+                <a:solidFill>
+                  <a:srgbClr val="64748B"/>
+                </a:solidFill>
+              </a:defRPr>
+            </a:pPr>
+            <a:r>
+              <a:t>  ระบบแยกกลุ่มโซนการแจ้งเตือนตามพื้นที่ (เช่น โซนอาคาร A, โซนโรงงาน 1-4)</a:t>
+            </a:r>
+          </a:p>
+          <a:p>
+            <a:pPr>
+              <a:defRPr b="1" sz="1100">
+                <a:solidFill>
+                  <a:srgbClr val="0F172A"/>
+                </a:solidFill>
+              </a:defRPr>
+            </a:pPr>
+            <a:r>
+              <a:t>• Automated Compliance Reports:</a:t>
+            </a:r>
+          </a:p>
+          <a:p>
+            <a:pPr>
+              <a:spcAft>
+                <a:spcPts val="600"/>
+              </a:spcAft>
+              <a:defRPr sz="1000">
+                <a:solidFill>
+                  <a:srgbClr val="64748B"/>
+                </a:solidFill>
+              </a:defRPr>
+            </a:pPr>
+            <a:r>
+              <a:t>  สร้างรายงานสรุปเปรียบเทียบ 100 จุดอัตโนมัติ ส่งออกเป็น Excel / PDF ในคลิกเดียว</a:t>
             </a:r>
           </a:p>
         </p:txBody>
@@ -7137,8 +5916,8 @@
         </p:nvSpPr>
         <p:spPr>
           <a:xfrm>
-            <a:off x="3474720" y="1463040"/>
-            <a:ext cx="2468880" cy="2926080"/>
+            <a:off x="6309360" y="1463040"/>
+            <a:ext cx="5120640" cy="4754880"/>
           </a:xfrm>
           <a:prstGeom prst="roundRect">
             <a:avLst/>
@@ -7148,7 +5927,7 @@
           </a:solidFill>
           <a:ln w="19050">
             <a:solidFill>
-              <a:srgbClr val="0284C7"/>
+              <a:srgbClr val="CBD5E1"/>
             </a:solidFill>
           </a:ln>
         </p:spPr>
@@ -7182,8 +5961,8 @@
         </p:nvSpPr>
         <p:spPr>
           <a:xfrm>
-            <a:off x="3611880" y="1600200"/>
-            <a:ext cx="2194560" cy="2651760"/>
+            <a:off x="6583680" y="1691640"/>
+            <a:ext cx="4572000" cy="4297680"/>
           </a:xfrm>
           <a:prstGeom prst="rect">
             <a:avLst/>
@@ -7197,29 +5976,29 @@
           <a:lstStyle/>
           <a:p>
             <a:pPr>
-              <a:defRPr sz="1000" b="1">
-                <a:solidFill>
-                  <a:srgbClr val="0284C7"/>
-                </a:solidFill>
-              </a:defRPr>
-            </a:pPr>
-            <a:r>
-              <a:t>SENSOR 02</a:t>
-            </a:r>
-          </a:p>
-          <a:p>
-            <a:pPr>
               <a:spcAft>
-                <a:spcPts val="400"/>
+                <a:spcPts val="1000"/>
               </a:spcAft>
-              <a:defRPr sz="1300" b="1">
+              <a:defRPr sz="1400" b="1">
+                <a:solidFill>
+                  <a:srgbClr val="059669"/>
+                </a:solidFill>
+              </a:defRPr>
+            </a:pPr>
+            <a:r>
+              <a:t>📱 2. Multi-Station Mobile Companion App</a:t>
+            </a:r>
+          </a:p>
+          <a:p>
+            <a:pPr>
+              <a:defRPr b="1" sz="1100">
                 <a:solidFill>
                   <a:srgbClr val="0F172A"/>
                 </a:solidFill>
               </a:defRPr>
             </a:pPr>
             <a:r>
-              <a:t>ความเป็นกรด-ด่าง (pH)</a:t>
+              <a:t>• 100-Device Hub Selector:</a:t>
             </a:r>
           </a:p>
           <a:p>
@@ -7227,133 +6006,26 @@
               <a:spcAft>
                 <a:spcPts val="600"/>
               </a:spcAft>
-              <a:defRPr sz="1050" b="1">
-                <a:solidFill>
-                  <a:srgbClr val="0284C7"/>
-                </a:solidFill>
-              </a:defRPr>
-            </a:pPr>
-            <a:r>
-              <a:t>หัววัด: Industrial Glass Electrode</a:t>
-            </a:r>
-          </a:p>
-          <a:p>
-            <a:pPr>
-              <a:defRPr sz="950">
+              <a:defRPr sz="1000">
                 <a:solidFill>
                   <a:srgbClr val="64748B"/>
                 </a:solidFill>
               </a:defRPr>
             </a:pPr>
             <a:r>
-              <a:t>ช่วงวัด: 0.00 - 14.00 pH</a:t>
-            </a:r>
-            <a:br/>
-            <a:r>
-              <a:t>ความแม่นยำ: ±0.01 pH</a:t>
-            </a:r>
-            <a:br/>
-            <a:r>
-              <a:t>เกณฑ์มาตรฐาน: 6.50 - 8.50 pH</a:t>
-            </a:r>
-            <a:br/>
-            <a:r>
-              <a:t>รองรับการสอบเทียบดิจิทัล (Buffer 4.01, 7.00, 10.01)</a:t>
-            </a:r>
-          </a:p>
-        </p:txBody>
-      </p:sp>
-      <p:sp>
-        <p:nvSpPr>
-          <p:cNvPr id="7" name="Rounded Rectangle 6"/>
-          <p:cNvSpPr/>
-          <p:nvPr/>
-        </p:nvSpPr>
-        <p:spPr>
-          <a:xfrm>
-            <a:off x="6217920" y="1463040"/>
-            <a:ext cx="2468880" cy="2926080"/>
-          </a:xfrm>
-          <a:prstGeom prst="roundRect">
-            <a:avLst/>
-          </a:prstGeom>
-          <a:solidFill>
-            <a:srgbClr val="FFFFFF"/>
-          </a:solidFill>
-          <a:ln w="19050">
-            <a:solidFill>
-              <a:srgbClr val="059669"/>
-            </a:solidFill>
-          </a:ln>
-        </p:spPr>
-        <p:style>
-          <a:lnRef idx="1">
-            <a:schemeClr val="accent1"/>
-          </a:lnRef>
-          <a:fillRef idx="3">
-            <a:schemeClr val="accent1"/>
-          </a:fillRef>
-          <a:effectRef idx="2">
-            <a:schemeClr val="accent1"/>
-          </a:effectRef>
-          <a:fontRef idx="minor">
-            <a:schemeClr val="lt1"/>
-          </a:fontRef>
-        </p:style>
-        <p:txBody>
-          <a:bodyPr rtlCol="0" anchor="ctr"/>
-          <a:lstStyle/>
-          <a:p>
-            <a:pPr algn="ctr"/>
-          </a:p>
-        </p:txBody>
-      </p:sp>
-      <p:sp>
-        <p:nvSpPr>
-          <p:cNvPr id="8" name="TextBox 7"/>
-          <p:cNvSpPr txBox="1"/>
-          <p:nvPr/>
-        </p:nvSpPr>
-        <p:spPr>
-          <a:xfrm>
-            <a:off x="6355080" y="1600200"/>
-            <a:ext cx="2194560" cy="2651760"/>
-          </a:xfrm>
-          <a:prstGeom prst="rect">
-            <a:avLst/>
-          </a:prstGeom>
-          <a:noFill/>
-        </p:spPr>
-        <p:txBody>
-          <a:bodyPr wrap="square">
-            <a:spAutoFit/>
-          </a:bodyPr>
-          <a:lstStyle/>
-          <a:p>
-            <a:pPr>
-              <a:defRPr sz="1000" b="1">
-                <a:solidFill>
-                  <a:srgbClr val="059669"/>
-                </a:solidFill>
-              </a:defRPr>
-            </a:pPr>
-            <a:r>
-              <a:t>SENSOR 03</a:t>
-            </a:r>
-          </a:p>
-          <a:p>
-            <a:pPr>
-              <a:spcAft>
-                <a:spcPts val="400"/>
-              </a:spcAft>
-              <a:defRPr sz="1300" b="1">
+              <a:t>  สลับดูข้อมูลสถานีตรวจวัดน้ำทั้ง 100 จุดได้ง่ายดายในแอปเดียว (ค้นหาตามชื่อ/โซน)</a:t>
+            </a:r>
+          </a:p>
+          <a:p>
+            <a:pPr>
+              <a:defRPr b="1" sz="1100">
                 <a:solidFill>
                   <a:srgbClr val="0F172A"/>
                 </a:solidFill>
               </a:defRPr>
             </a:pPr>
             <a:r>
-              <a:t>สารละลายรวม (TDS / EC)</a:t>
+              <a:t>• Instant Push Notification &amp; Line Alert:</a:t>
             </a:r>
           </a:p>
           <a:p>
@@ -7361,133 +6033,26 @@
               <a:spcAft>
                 <a:spcPts val="600"/>
               </a:spcAft>
-              <a:defRPr sz="1050" b="1">
-                <a:solidFill>
-                  <a:srgbClr val="059669"/>
-                </a:solidFill>
-              </a:defRPr>
-            </a:pPr>
-            <a:r>
-              <a:t>หัววัด: Titanium Alloy 2-Pole</a:t>
-            </a:r>
-          </a:p>
-          <a:p>
-            <a:pPr>
-              <a:defRPr sz="950">
+              <a:defRPr sz="1000">
                 <a:solidFill>
                   <a:srgbClr val="64748B"/>
                 </a:solidFill>
               </a:defRPr>
             </a:pPr>
             <a:r>
-              <a:t>ช่วงวัด: 0 - 2,000 ppm (mg/L)</a:t>
-            </a:r>
-            <a:br/>
-            <a:r>
-              <a:t>ความแม่นยำ: ±2% F.S.</a:t>
-            </a:r>
-            <a:br/>
-            <a:r>
-              <a:t>เกณฑ์มาตรฐาน: &lt; 500 ppm</a:t>
-            </a:r>
-            <a:br/>
-            <a:r>
-              <a:t>ตรวจจับปริมาณสารแขวนลอยและแร่ธาตุในน้ำ</a:t>
-            </a:r>
-          </a:p>
-        </p:txBody>
-      </p:sp>
-      <p:sp>
-        <p:nvSpPr>
-          <p:cNvPr id="9" name="Rounded Rectangle 8"/>
-          <p:cNvSpPr/>
-          <p:nvPr/>
-        </p:nvSpPr>
-        <p:spPr>
-          <a:xfrm>
-            <a:off x="8961120" y="1463040"/>
-            <a:ext cx="2468880" cy="2926080"/>
-          </a:xfrm>
-          <a:prstGeom prst="roundRect">
-            <a:avLst/>
-          </a:prstGeom>
-          <a:solidFill>
-            <a:srgbClr val="FFFFFF"/>
-          </a:solidFill>
-          <a:ln w="19050">
-            <a:solidFill>
-              <a:srgbClr val="0284C7"/>
-            </a:solidFill>
-          </a:ln>
-        </p:spPr>
-        <p:style>
-          <a:lnRef idx="1">
-            <a:schemeClr val="accent1"/>
-          </a:lnRef>
-          <a:fillRef idx="3">
-            <a:schemeClr val="accent1"/>
-          </a:fillRef>
-          <a:effectRef idx="2">
-            <a:schemeClr val="accent1"/>
-          </a:effectRef>
-          <a:fontRef idx="minor">
-            <a:schemeClr val="lt1"/>
-          </a:fontRef>
-        </p:style>
-        <p:txBody>
-          <a:bodyPr rtlCol="0" anchor="ctr"/>
-          <a:lstStyle/>
-          <a:p>
-            <a:pPr algn="ctr"/>
-          </a:p>
-        </p:txBody>
-      </p:sp>
-      <p:sp>
-        <p:nvSpPr>
-          <p:cNvPr id="10" name="TextBox 9"/>
-          <p:cNvSpPr txBox="1"/>
-          <p:nvPr/>
-        </p:nvSpPr>
-        <p:spPr>
-          <a:xfrm>
-            <a:off x="9098280" y="1600200"/>
-            <a:ext cx="2194560" cy="2651760"/>
-          </a:xfrm>
-          <a:prstGeom prst="rect">
-            <a:avLst/>
-          </a:prstGeom>
-          <a:noFill/>
-        </p:spPr>
-        <p:txBody>
-          <a:bodyPr wrap="square">
-            <a:spAutoFit/>
-          </a:bodyPr>
-          <a:lstStyle/>
-          <a:p>
-            <a:pPr>
-              <a:defRPr sz="1000" b="1">
-                <a:solidFill>
-                  <a:srgbClr val="0284C7"/>
-                </a:solidFill>
-              </a:defRPr>
-            </a:pPr>
-            <a:r>
-              <a:t>SENSOR 04</a:t>
-            </a:r>
-          </a:p>
-          <a:p>
-            <a:pPr>
-              <a:spcAft>
-                <a:spcPts val="400"/>
-              </a:spcAft>
-              <a:defRPr sz="1300" b="1">
+              <a:t>  แจ้งเตือนข้อความฉุกเฉินทันทีเมื่อมีจุดใดจุดหนึ่งใน 100 จุดหลุดเกณฑ์มาตรฐาน</a:t>
+            </a:r>
+          </a:p>
+          <a:p>
+            <a:pPr>
+              <a:defRPr b="1" sz="1100">
                 <a:solidFill>
                   <a:srgbClr val="0F172A"/>
                 </a:solidFill>
               </a:defRPr>
             </a:pPr>
             <a:r>
-              <a:t>คลอรีนคงเหลือ (Residual Cl)</a:t>
+              <a:t>• Color-Coded Status Cards:</a:t>
             </a:r>
           </a:p>
           <a:p>
@@ -7495,141 +6060,41 @@
               <a:spcAft>
                 <a:spcPts val="600"/>
               </a:spcAft>
-              <a:defRPr sz="1050" b="1">
-                <a:solidFill>
-                  <a:srgbClr val="0284C7"/>
-                </a:solidFill>
-              </a:defRPr>
-            </a:pPr>
-            <a:r>
-              <a:t>หัววัด: Amperometric Probe</a:t>
-            </a:r>
-          </a:p>
-          <a:p>
-            <a:pPr>
-              <a:defRPr sz="950">
+              <a:defRPr sz="1000">
                 <a:solidFill>
                   <a:srgbClr val="64748B"/>
                 </a:solidFill>
               </a:defRPr>
             </a:pPr>
             <a:r>
-              <a:t>ช่วงวัด: 0.00 - 5.00 mg/L (ppm)</a:t>
-            </a:r>
-            <a:br/>
-            <a:r>
-              <a:t>ความแม่นยำ: ±0.05 mg/L</a:t>
-            </a:r>
-            <a:br/>
-            <a:r>
-              <a:t>เกณฑ์มาตรฐาน: 0.20 - 2.00 mg/L</a:t>
-            </a:r>
-            <a:br/>
-            <a:r>
-              <a:t>ตรวจเช็คประสิทธิภาพการฆ่าเชื้อโรค 100%</a:t>
-            </a:r>
-          </a:p>
-        </p:txBody>
-      </p:sp>
-      <p:sp>
-        <p:nvSpPr>
-          <p:cNvPr id="11" name="Rounded Rectangle 10"/>
-          <p:cNvSpPr/>
-          <p:nvPr/>
-        </p:nvSpPr>
-        <p:spPr>
-          <a:xfrm>
-            <a:off x="731520" y="4663440"/>
-            <a:ext cx="10728655" cy="1645920"/>
-          </a:xfrm>
-          <a:prstGeom prst="roundRect">
-            <a:avLst/>
-          </a:prstGeom>
-          <a:solidFill>
-            <a:srgbClr val="0F172A"/>
-          </a:solidFill>
-          <a:ln w="19050">
-            <a:solidFill>
-              <a:srgbClr val="0284C7"/>
-            </a:solidFill>
-          </a:ln>
-        </p:spPr>
-        <p:style>
-          <a:lnRef idx="1">
-            <a:schemeClr val="accent1"/>
-          </a:lnRef>
-          <a:fillRef idx="3">
-            <a:schemeClr val="accent1"/>
-          </a:fillRef>
-          <a:effectRef idx="2">
-            <a:schemeClr val="accent1"/>
-          </a:effectRef>
-          <a:fontRef idx="minor">
-            <a:schemeClr val="lt1"/>
-          </a:fontRef>
-        </p:style>
-        <p:txBody>
-          <a:bodyPr rtlCol="0" anchor="ctr"/>
-          <a:lstStyle/>
-          <a:p>
-            <a:pPr algn="ctr"/>
-          </a:p>
-        </p:txBody>
-      </p:sp>
-      <p:sp>
-        <p:nvSpPr>
-          <p:cNvPr id="12" name="TextBox 11"/>
-          <p:cNvSpPr txBox="1"/>
-          <p:nvPr/>
-        </p:nvSpPr>
-        <p:spPr>
-          <a:xfrm>
-            <a:off x="1005840" y="4800600"/>
-            <a:ext cx="10149840" cy="1371600"/>
-          </a:xfrm>
-          <a:prstGeom prst="rect">
-            <a:avLst/>
-          </a:prstGeom>
-          <a:noFill/>
-        </p:spPr>
-        <p:txBody>
-          <a:bodyPr wrap="square">
-            <a:spAutoFit/>
-          </a:bodyPr>
-          <a:lstStyle/>
+              <a:t>  แสดงสถานะด้วยสีเขียว/เหลือง/แดง ชัดเจน รู้ทันทีว่าจุดไหนปกติดีหรือต้องตรวจเช็ค</a:t>
+            </a:r>
+          </a:p>
+          <a:p>
+            <a:pPr>
+              <a:defRPr b="1" sz="1100">
+                <a:solidFill>
+                  <a:srgbClr val="0F172A"/>
+                </a:solidFill>
+              </a:defRPr>
+            </a:pPr>
+            <a:r>
+              <a:t>• Offline Battery &amp; Link Monitor:</a:t>
+            </a:r>
+          </a:p>
           <a:p>
             <a:pPr>
               <a:spcAft>
-                <a:spcPts val="400"/>
+                <a:spcPts val="600"/>
               </a:spcAft>
-              <a:defRPr sz="1300" b="1">
-                <a:solidFill>
-                  <a:srgbClr val="2DD4BF"/>
-                </a:solidFill>
-              </a:defRPr>
-            </a:pPr>
-            <a:r>
-              <a:t>🎛️ SMART INDUSTRIAL CONTROLLER NODE &amp; TELEMETRY</a:t>
-            </a:r>
-          </a:p>
-          <a:p>
-            <a:pPr>
-              <a:defRPr sz="1050">
-                <a:solidFill>
-                  <a:srgbClr val="E2E8F0"/>
-                </a:solidFill>
-              </a:defRPr>
-            </a:pPr>
-            <a:r>
-              <a:t>• Telemetry Multi-Link: ส่งสัญญาณผ่าน WiFi 2.4GHz, 4G LTE Cellular และ Modbus RS-485 สู่ระบบ Cloud SCADA ตลอด 24 ชม.</a:t>
-            </a:r>
-            <a:br/>
-            <a:r>
-              <a:t>• ระบบสำรองไฟอัจฉริยะ (LiFePO4 Battery Backup): ใช้งานต่อเนื่องแม้ยามไฟดับ พร้อมระบบตรวจสอบระดับแบตเตอรี่ Real-time</a:t>
-            </a:r>
-            <a:br/>
-            <a:r>
-              <a:t>• Alarm Output Relay: พอร์ต Dry Contact สำหรับต่อไซเรนเตือนภัยภายนอก หรือส่งสัญญาณต่อไปยังระบบ SCADA / PLC เดิมของโรงงาน</a:t>
+              <a:defRPr sz="1000">
+                <a:solidFill>
+                  <a:srgbClr val="64748B"/>
+                </a:solidFill>
+              </a:defRPr>
+            </a:pPr>
+            <a:r>
+              <a:t>  ตรวจสอบสัญญาณ WiFi/4G และระดับแบตเตอรี่สำรองของทุกตู้ได้จากระยะไกล</a:t>
             </a:r>
           </a:p>
         </p:txBody>
@@ -7693,19 +6158,19 @@
               </a:defRPr>
             </a:pPr>
             <a:r>
-              <a:t>NCT WATER NEXUS PRO | 100-NODE PROJECT SOLUTION</a:t>
-            </a:r>
-          </a:p>
-          <a:p>
-            <a:pPr>
-              <a:defRPr sz="2300" b="1">
+              <a:t>โครงการระบบวัดคุณภาพน้ำอัจฉริยะ 100 จุด (NCT WATER NEXUS)</a:t>
+            </a:r>
+          </a:p>
+          <a:p>
+            <a:pPr>
+              <a:defRPr sz="2200" b="1">
                 <a:solidFill>
                   <a:srgbClr val="0F172A"/>
                 </a:solidFill>
               </a:defRPr>
             </a:pPr>
             <a:r>
-              <a:t>ระบบแดชบอร์ดรวมศูนย์ 100 จุด (Centralized 100-Node Dashboard)</a:t>
+              <a:t>ข้อกำหนดสัญญาและการบริการหลังการขาย (SLA &amp; MA Agreement)</a:t>
             </a:r>
           </a:p>
         </p:txBody>
@@ -7729,7 +6194,7 @@
           </a:solidFill>
           <a:ln w="19050">
             <a:solidFill>
-              <a:srgbClr val="CBD5E1"/>
+              <a:srgbClr val="059669"/>
             </a:solidFill>
           </a:ln>
         </p:spPr>
@@ -7757,14 +6222,57 @@
       </p:sp>
       <p:sp>
         <p:nvSpPr>
-          <p:cNvPr id="4" name="TextBox 3"/>
+          <p:cNvPr id="4" name="Rounded Rectangle 3"/>
+          <p:cNvSpPr/>
+          <p:nvPr/>
+        </p:nvSpPr>
+        <p:spPr>
+          <a:xfrm>
+            <a:off x="731520" y="1463040"/>
+            <a:ext cx="5120640" cy="1188720"/>
+          </a:xfrm>
+          <a:prstGeom prst="roundRect">
+            <a:avLst/>
+          </a:prstGeom>
+          <a:solidFill>
+            <a:srgbClr val="059669"/>
+          </a:solidFill>
+          <a:ln>
+            <a:noFill/>
+          </a:ln>
+        </p:spPr>
+        <p:style>
+          <a:lnRef idx="1">
+            <a:schemeClr val="accent1"/>
+          </a:lnRef>
+          <a:fillRef idx="3">
+            <a:schemeClr val="accent1"/>
+          </a:fillRef>
+          <a:effectRef idx="2">
+            <a:schemeClr val="accent1"/>
+          </a:effectRef>
+          <a:fontRef idx="minor">
+            <a:schemeClr val="lt1"/>
+          </a:fontRef>
+        </p:style>
+        <p:txBody>
+          <a:bodyPr rtlCol="0" anchor="ctr"/>
+          <a:lstStyle/>
+          <a:p>
+            <a:pPr algn="ctr"/>
+          </a:p>
+        </p:txBody>
+      </p:sp>
+      <p:sp>
+        <p:nvSpPr>
+          <p:cNvPr id="5" name="TextBox 4"/>
           <p:cNvSpPr txBox="1"/>
           <p:nvPr/>
         </p:nvSpPr>
         <p:spPr>
           <a:xfrm>
-            <a:off x="1005840" y="1691640"/>
-            <a:ext cx="4572000" cy="4297680"/>
+            <a:off x="914400" y="1554480"/>
+            <a:ext cx="4754880" cy="1005840"/>
           </a:xfrm>
           <a:prstGeom prst="rect">
             <a:avLst/>
@@ -7778,138 +6286,86 @@
           <a:lstStyle/>
           <a:p>
             <a:pPr>
-              <a:spcAft>
-                <a:spcPts val="1000"/>
-              </a:spcAft>
+              <a:defRPr sz="950" b="1">
+                <a:solidFill>
+                  <a:srgbClr val="FFFFFF"/>
+                </a:solidFill>
+              </a:defRPr>
+            </a:pPr>
+            <a:r>
+              <a:t>รวมทุกอย่างครบวงจร (ALL-INCLUSIVE)</a:t>
+            </a:r>
+          </a:p>
+          <a:p>
+            <a:pPr>
               <a:defRPr sz="1400" b="1">
                 <a:solidFill>
-                  <a:srgbClr val="0284C7"/>
-                </a:solidFill>
-              </a:defRPr>
-            </a:pPr>
-            <a:r>
-              <a:t>💻 1. Centralized SCADA Widescreen View</a:t>
-            </a:r>
-          </a:p>
-          <a:p>
-            <a:pPr>
-              <a:defRPr b="1" sz="1100">
+                  <a:srgbClr val="FFFFFF"/>
+                </a:solidFill>
+              </a:defRPr>
+            </a:pPr>
+            <a:r>
+              <a:t>สัญญาแบบรายปี (Subscription Model)</a:t>
+            </a:r>
+          </a:p>
+        </p:txBody>
+      </p:sp>
+      <p:sp>
+        <p:nvSpPr>
+          <p:cNvPr id="6" name="TextBox 5"/>
+          <p:cNvSpPr txBox="1"/>
+          <p:nvPr/>
+        </p:nvSpPr>
+        <p:spPr>
+          <a:xfrm>
+            <a:off x="914400" y="2834640"/>
+            <a:ext cx="4754880" cy="3200400"/>
+          </a:xfrm>
+          <a:prstGeom prst="rect">
+            <a:avLst/>
+          </a:prstGeom>
+          <a:noFill/>
+        </p:spPr>
+        <p:txBody>
+          <a:bodyPr wrap="square">
+            <a:spAutoFit/>
+          </a:bodyPr>
+          <a:lstStyle/>
+          <a:p>
+            <a:pPr>
+              <a:defRPr sz="1100">
                 <a:solidFill>
                   <a:srgbClr val="0F172A"/>
                 </a:solidFill>
               </a:defRPr>
             </a:pPr>
             <a:r>
-              <a:t>• GIS Map &amp; 100-Node Grid Overview:</a:t>
-            </a:r>
-          </a:p>
-          <a:p>
-            <a:pPr>
-              <a:spcAft>
-                <a:spcPts val="600"/>
-              </a:spcAft>
-              <a:defRPr sz="1000">
-                <a:solidFill>
-                  <a:srgbClr val="64748B"/>
-                </a:solidFill>
-              </a:defRPr>
-            </a:pPr>
-            <a:r>
-              <a:t>  แสดงตำแหน่งและสถานะของทั้ง 100 สถานีบนแผนที่ GIS ตรวจเช็คจุดผิดปกติได้ทันที</a:t>
-            </a:r>
-          </a:p>
-          <a:p>
-            <a:pPr>
-              <a:defRPr b="1" sz="1100">
-                <a:solidFill>
-                  <a:srgbClr val="0F172A"/>
-                </a:solidFill>
-              </a:defRPr>
-            </a:pPr>
-            <a:r>
-              <a:t>• High-Frequency Telemetry Trends:</a:t>
-            </a:r>
-          </a:p>
-          <a:p>
-            <a:pPr>
-              <a:spcAft>
-                <a:spcPts val="600"/>
-              </a:spcAft>
-              <a:defRPr sz="1000">
-                <a:solidFill>
-                  <a:srgbClr val="64748B"/>
-                </a:solidFill>
-              </a:defRPr>
-            </a:pPr>
-            <a:r>
-              <a:t>  กราฟ Real-Time Dynamic Charts วิเคราะห์แนวโน้มคุณภาพน้ำของแต่ละสถานี 24 ชม.</a:t>
-            </a:r>
-          </a:p>
-          <a:p>
-            <a:pPr>
-              <a:defRPr b="1" sz="1100">
-                <a:solidFill>
-                  <a:srgbClr val="0F172A"/>
-                </a:solidFill>
-              </a:defRPr>
-            </a:pPr>
-            <a:r>
-              <a:t>• Zone Alert Management:</a:t>
-            </a:r>
-          </a:p>
-          <a:p>
-            <a:pPr>
-              <a:spcAft>
-                <a:spcPts val="600"/>
-              </a:spcAft>
-              <a:defRPr sz="1000">
-                <a:solidFill>
-                  <a:srgbClr val="64748B"/>
-                </a:solidFill>
-              </a:defRPr>
-            </a:pPr>
-            <a:r>
-              <a:t>  ระบบแยกกลุ่มโซนการแจ้งเตือนตามพื้นที่ (เช่น โซนอาคาร A, โซนโรงงาน 1-4)</a:t>
-            </a:r>
-          </a:p>
-          <a:p>
-            <a:pPr>
-              <a:defRPr b="1" sz="1100">
-                <a:solidFill>
-                  <a:srgbClr val="0F172A"/>
-                </a:solidFill>
-              </a:defRPr>
-            </a:pPr>
-            <a:r>
-              <a:t>• Automated Compliance Reports:</a:t>
-            </a:r>
-          </a:p>
-          <a:p>
-            <a:pPr>
-              <a:spcAft>
-                <a:spcPts val="600"/>
-              </a:spcAft>
-              <a:defRPr sz="1000">
-                <a:solidFill>
-                  <a:srgbClr val="64748B"/>
-                </a:solidFill>
-              </a:defRPr>
-            </a:pPr>
-            <a:r>
-              <a:t>  สร้างรายงานสรุปเปรียบเทียบ 100 จุดอัตโนมัติ ส่งออกเป็น Excel / PDF ในคลิกเดียว</a:t>
-            </a:r>
-          </a:p>
-        </p:txBody>
-      </p:sp>
-      <p:sp>
-        <p:nvSpPr>
-          <p:cNvPr id="5" name="Rounded Rectangle 4"/>
+              <a:t>• รวมค่า Cloud Server, Database &amp; ซิม 4G ตลอดสัญญา</a:t>
+            </a:r>
+            <a:br/>
+            <a:r>
+              <a:t>• ฟรีบริการแก้บั๊ก อัปเดตเฟิร์มแวร์ และปรับปรุงซอฟต์แวร์ใหม่ตลอดเวลา</a:t>
+            </a:r>
+            <a:br/>
+            <a:r>
+              <a:t>• ทีมวิศวกร On-site Support และสอบเทียบ Calibrate ตามรอบ</a:t>
+            </a:r>
+            <a:br/>
+            <a:r>
+              <a:t>• สร้าง Recurring Income ฿120,000 – ฿360,000 / ปี อย่างมั่นคง</a:t>
+            </a:r>
+          </a:p>
+        </p:txBody>
+      </p:sp>
+      <p:sp>
+        <p:nvSpPr>
+          <p:cNvPr id="7" name="Rounded Rectangle 6"/>
           <p:cNvSpPr/>
           <p:nvPr/>
         </p:nvSpPr>
         <p:spPr>
           <a:xfrm>
-            <a:off x="6309360" y="1463040"/>
+            <a:off x="6339535" y="1463040"/>
             <a:ext cx="5120640" cy="4754880"/>
           </a:xfrm>
           <a:prstGeom prst="roundRect">
@@ -7920,7 +6376,7 @@
           </a:solidFill>
           <a:ln w="19050">
             <a:solidFill>
-              <a:srgbClr val="CBD5E1"/>
+              <a:srgbClr val="0284C7"/>
             </a:solidFill>
           </a:ln>
         </p:spPr>
@@ -7948,14 +6404,57 @@
       </p:sp>
       <p:sp>
         <p:nvSpPr>
-          <p:cNvPr id="6" name="TextBox 5"/>
+          <p:cNvPr id="8" name="Rounded Rectangle 7"/>
+          <p:cNvSpPr/>
+          <p:nvPr/>
+        </p:nvSpPr>
+        <p:spPr>
+          <a:xfrm>
+            <a:off x="6339535" y="1463040"/>
+            <a:ext cx="5120640" cy="1188720"/>
+          </a:xfrm>
+          <a:prstGeom prst="roundRect">
+            <a:avLst/>
+          </a:prstGeom>
+          <a:solidFill>
+            <a:srgbClr val="0284C7"/>
+          </a:solidFill>
+          <a:ln>
+            <a:noFill/>
+          </a:ln>
+        </p:spPr>
+        <p:style>
+          <a:lnRef idx="1">
+            <a:schemeClr val="accent1"/>
+          </a:lnRef>
+          <a:fillRef idx="3">
+            <a:schemeClr val="accent1"/>
+          </a:fillRef>
+          <a:effectRef idx="2">
+            <a:schemeClr val="accent1"/>
+          </a:effectRef>
+          <a:fontRef idx="minor">
+            <a:schemeClr val="lt1"/>
+          </a:fontRef>
+        </p:style>
+        <p:txBody>
+          <a:bodyPr rtlCol="0" anchor="ctr"/>
+          <a:lstStyle/>
+          <a:p>
+            <a:pPr algn="ctr"/>
+          </a:p>
+        </p:txBody>
+      </p:sp>
+      <p:sp>
+        <p:nvSpPr>
+          <p:cNvPr id="9" name="TextBox 8"/>
           <p:cNvSpPr txBox="1"/>
           <p:nvPr/>
         </p:nvSpPr>
         <p:spPr>
           <a:xfrm>
-            <a:off x="6583680" y="1691640"/>
-            <a:ext cx="4572000" cy="4297680"/>
+            <a:off x="6522415" y="1554480"/>
+            <a:ext cx="4754880" cy="1005840"/>
           </a:xfrm>
           <a:prstGeom prst="rect">
             <a:avLst/>
@@ -7969,125 +6468,69 @@
           <a:lstStyle/>
           <a:p>
             <a:pPr>
-              <a:spcAft>
-                <a:spcPts val="1000"/>
-              </a:spcAft>
+              <a:defRPr sz="950" b="1">
+                <a:solidFill>
+                  <a:srgbClr val="FFFFFF"/>
+                </a:solidFill>
+              </a:defRPr>
+            </a:pPr>
+            <a:r>
+              <a:t>ล็อคขอบเขต MA ชัดเจนตั้งแต่ปีที่ 2</a:t>
+            </a:r>
+          </a:p>
+          <a:p>
+            <a:pPr>
               <a:defRPr sz="1400" b="1">
                 <a:solidFill>
-                  <a:srgbClr val="059669"/>
-                </a:solidFill>
-              </a:defRPr>
-            </a:pPr>
-            <a:r>
-              <a:t>📱 2. Multi-Station Mobile Companion App</a:t>
-            </a:r>
-          </a:p>
-          <a:p>
-            <a:pPr>
-              <a:defRPr b="1" sz="1100">
+                  <a:srgbClr val="FFFFFF"/>
+                </a:solidFill>
+              </a:defRPr>
+            </a:pPr>
+            <a:r>
+              <a:t>สัญญาแบบซื้อขาด (Outright + MA 10-15%)</a:t>
+            </a:r>
+          </a:p>
+        </p:txBody>
+      </p:sp>
+      <p:sp>
+        <p:nvSpPr>
+          <p:cNvPr id="10" name="TextBox 9"/>
+          <p:cNvSpPr txBox="1"/>
+          <p:nvPr/>
+        </p:nvSpPr>
+        <p:spPr>
+          <a:xfrm>
+            <a:off x="6522415" y="2834640"/>
+            <a:ext cx="4754880" cy="3200400"/>
+          </a:xfrm>
+          <a:prstGeom prst="rect">
+            <a:avLst/>
+          </a:prstGeom>
+          <a:noFill/>
+        </p:spPr>
+        <p:txBody>
+          <a:bodyPr wrap="square">
+            <a:spAutoFit/>
+          </a:bodyPr>
+          <a:lstStyle/>
+          <a:p>
+            <a:pPr>
+              <a:defRPr sz="1100">
                 <a:solidFill>
                   <a:srgbClr val="0F172A"/>
                 </a:solidFill>
               </a:defRPr>
             </a:pPr>
             <a:r>
-              <a:t>• 100-Device Hub Selector:</a:t>
-            </a:r>
-          </a:p>
-          <a:p>
-            <a:pPr>
-              <a:spcAft>
-                <a:spcPts val="600"/>
-              </a:spcAft>
-              <a:defRPr sz="1000">
-                <a:solidFill>
-                  <a:srgbClr val="64748B"/>
-                </a:solidFill>
-              </a:defRPr>
-            </a:pPr>
-            <a:r>
-              <a:t>  สลับดูข้อมูลสถานีตรวจวัดน้ำทั้ง 100 จุดได้ง่ายดายในแอปเดียว (ค้นหาตามชื่อ/โซน)</a:t>
-            </a:r>
-          </a:p>
-          <a:p>
-            <a:pPr>
-              <a:defRPr b="1" sz="1100">
-                <a:solidFill>
-                  <a:srgbClr val="0F172A"/>
-                </a:solidFill>
-              </a:defRPr>
-            </a:pPr>
-            <a:r>
-              <a:t>• Instant Push Notification &amp; Line Alert:</a:t>
-            </a:r>
-          </a:p>
-          <a:p>
-            <a:pPr>
-              <a:spcAft>
-                <a:spcPts val="600"/>
-              </a:spcAft>
-              <a:defRPr sz="1000">
-                <a:solidFill>
-                  <a:srgbClr val="64748B"/>
-                </a:solidFill>
-              </a:defRPr>
-            </a:pPr>
-            <a:r>
-              <a:t>  แจ้งเตือนข้อความฉุกเฉินทันทีเมื่อมีจุดใดจุดหนึ่งใน 100 จุดหลุดเกณฑ์มาตรฐาน</a:t>
-            </a:r>
-          </a:p>
-          <a:p>
-            <a:pPr>
-              <a:defRPr b="1" sz="1100">
-                <a:solidFill>
-                  <a:srgbClr val="0F172A"/>
-                </a:solidFill>
-              </a:defRPr>
-            </a:pPr>
-            <a:r>
-              <a:t>• Color-Coded Status Cards:</a:t>
-            </a:r>
-          </a:p>
-          <a:p>
-            <a:pPr>
-              <a:spcAft>
-                <a:spcPts val="600"/>
-              </a:spcAft>
-              <a:defRPr sz="1000">
-                <a:solidFill>
-                  <a:srgbClr val="64748B"/>
-                </a:solidFill>
-              </a:defRPr>
-            </a:pPr>
-            <a:r>
-              <a:t>  แสดงสถานะด้วยสีเขียว/เหลือง/แดง ชัดเจน รู้ทันทีว่าจุดไหนปกติดีหรือต้องตรวจเช็ค</a:t>
-            </a:r>
-          </a:p>
-          <a:p>
-            <a:pPr>
-              <a:defRPr b="1" sz="1100">
-                <a:solidFill>
-                  <a:srgbClr val="0F172A"/>
-                </a:solidFill>
-              </a:defRPr>
-            </a:pPr>
-            <a:r>
-              <a:t>• Offline Battery &amp; Link Monitor:</a:t>
-            </a:r>
-          </a:p>
-          <a:p>
-            <a:pPr>
-              <a:spcAft>
-                <a:spcPts val="600"/>
-              </a:spcAft>
-              <a:defRPr sz="1000">
-                <a:solidFill>
-                  <a:srgbClr val="64748B"/>
-                </a:solidFill>
-              </a:defRPr>
-            </a:pPr>
-            <a:r>
-              <a:t>  ตรวจสอบสัญญาณ WiFi/4G และระดับแบตเตอรี่สำรองของทุกตู้ได้จากระยะไกล</a:t>
+              <a:t>• ฟรี Support / แก้ไขปัญหา / ดูแลเซิร์ฟเวอร์ 1 ปีแรกเท่านั้น</a:t>
+            </a:r>
+            <a:br/>
+            <a:r>
+              <a:t>• ปีที่ 2 เป็นต้นไป คิดสัญญา MA 10–15% ต่อปี (ประมาณ ฿25,000 – ฿90,000/ปี)</a:t>
+            </a:r>
+            <a:br/>
+            <a:r>
+              <a:t>• ป้องกันภาระค่าโฮสต์และฐานข้อมูลในระยะยาวได้อย่างมีประสิทธิภาพ</a:t>
             </a:r>
           </a:p>
         </p:txBody>
@@ -8196,7 +6639,7 @@
               </a:defRPr>
             </a:pPr>
             <a:r>
-              <a:t>💧 โซลูชันบริหารจัดการคุณภาพน้ำระดับโครงการ 100 สถานี</a:t>
+              <a:t>💧 โครงการระบบตรวจวัดคุณภาพน้ำและแดชบอร์ด 100 จุด</a:t>
             </a:r>
           </a:p>
           <a:p>
@@ -8211,7 +6654,7 @@
               </a:defRPr>
             </a:pPr>
             <a:r>
-              <a:t>NCT WATER NEXUS PRO (LOT OF 100 NODES)</a:t>
+              <a:t>NCT WATER NEXUS PRO</a:t>
             </a:r>
           </a:p>
           <a:p>
@@ -8226,7 +6669,7 @@
               </a:defRPr>
             </a:pPr>
             <a:r>
-              <a:t>พร้อมให้คำปรึกษา ออกแบบระบบ และจัดทำใบเสนอราคาโครงการ 100 จุดโดยทีมวิศวกรผู้เชี่ยวชาญ</a:t>
+              <a:t>พร้อมให้คำปรึกษา ออกแบบระบบ และจัดทำใบเสนอราคาโครงการตามงบประมาณของลูกค้า</a:t>
             </a:r>
           </a:p>
           <a:p>
@@ -8238,7 +6681,7 @@
               </a:defRPr>
             </a:pPr>
             <a:r>
-              <a:t>✨ สรุปข้อเสนอแพ็กเกจโครงการ 100 จุด:</a:t>
+              <a:t>✨ สรุปข้อเสนอโครงการ 100 จุด:</a:t>
             </a:r>
           </a:p>
           <a:p>
@@ -8246,26 +6689,30 @@
               <a:spcAft>
                 <a:spcPts val="2400"/>
               </a:spcAft>
-              <a:defRPr sz="1100">
+              <a:defRPr sz="1050">
                 <a:solidFill>
                   <a:srgbClr val="E2E8F0"/>
                 </a:solidFill>
               </a:defRPr>
             </a:pPr>
             <a:r>
-              <a:t>• ซื้อขาด 100 จุด (Outright Lot): ฿2,190,000 – ฿6,900,000 (เฉลี่ย ฿21,900 – ฿69,000 / จุด)</a:t>
+              <a:t>• ฮาร์ดแวร์ 4 ค่า (pH/TDS/Temp/Cl): ฿21,000/ชุด (รวม 100 จุด = ฿2,100,000)</a:t>
             </a:r>
             <a:br/>
             <a:r>
-              <a:t>• สัญญารายปี 100 จุด (Annual Lot): ฿1,050,000 – ฿3,450,000 / ปี (เฉลี่ย ฿875 – ฿2,875 / จุด / เดือน)</a:t>
+              <a:t>• ซอฟต์แวร์แดชบอร์ด Option 1 (App+Telegram): ซื้อขาด ฿250,000 | รายปี ฿170,000 (ปีถัดไป ฿120,000/ปี)</a:t>
             </a:r>
             <a:br/>
             <a:r>
-              <a:t>• รวมแถมเครื่องสำรอง Spare 5% + Private Cloud + White-label Logo ฟรี</a:t>
+              <a:t>• ซอฟต์แวร์แดชบอร์ด Option 2 (Web+Telegram): ซื้อขาด ฿450,000 | รายปี ฿340,000 (ปีถัดไป ฿240,000/ปี)</a:t>
             </a:r>
             <a:br/>
             <a:r>
-              <a:t>• ทดลองดู Dashboard จำลองออนไลน์ได้ที่: https://woobwarb.github.io/nct-water-nexus/</a:t>
+              <a:t>• ซอฟต์แวร์แดชบอร์ด Option 3 (Web+App+LINE): ซื้อขาด ฿600,000 | รายปี ฿510,000 (ปีถัดไป ฿360,000/ปี)</a:t>
+            </a:r>
+            <a:br/>
+            <a:r>
+              <a:t>• เปิดดูแดชบอร์ดและสไลด์ออนไลน์ได้ที่: https://woobwarb.github.io/nct-water-nexus/</a:t>
             </a:r>
           </a:p>
           <a:p>

--- a/NCT_Water_Nexus_Report_and_Pricing.pptx
+++ b/NCT_Water_Nexus_Report_and_Pricing.pptx
@@ -3181,7 +3181,7 @@
               </a:defRPr>
             </a:pPr>
             <a:r>
-              <a:t>💧 โครงการระบบตรวจวัดคุณภาพน้ำอัจฉริยะและแจ้งเตือนอัตโนมัติ (100 จุด)</a:t>
+              <a:t>💧 โครงการระบบตรวจวัดคุณภาพน้ำอัจฉริยะ 100 ชุด (Modela + Cybertice)</a:t>
             </a:r>
           </a:p>
           <a:p>
@@ -3211,7 +3211,7 @@
               </a:defRPr>
             </a:pPr>
             <a:r>
-              <a:t>สรุปราคาและรูปแบบแจ้งเตือน: ตรวจวัด pH / TDS / อุณหภูมิ / คลอรีนคงเหลือ</a:t>
+              <a:t>สรุปรายการต้นทุน (BOM) และราคาขายโครงการตรวจวัดคุณภาพน้ำ (100 ชุด)</a:t>
             </a:r>
           </a:p>
           <a:p>
@@ -3226,15 +3226,15 @@
               </a:defRPr>
             </a:pPr>
             <a:r>
-              <a:t>• ต้นทุนฮาร์ดแวร์ตู้คอนโทรล 4 ค่า: ฿21,000 / ชุด (รวม 100 จุด = ฿2,100,000)</a:t>
+              <a:t>• ตรวจวัด 4 ค่าหลัก: pH / TDS / อุณหภูมิ / คลอรีนคงเหลือ (Modela One + Cybertice)</a:t>
             </a:r>
             <a:br/>
             <a:r>
-              <a:t>• 3 ออปชันซอฟต์แวร์และระบบแจ้งเตือน (Option 1: App+Telegram | Option 2: Web+Telegram | Option 3: Web+App+LINE OA)</a:t>
+              <a:t>• ต้นทุนฮาร์ดแวร์ตู้คอนโทรล: ฿21,000 / ชุด (โครงการ 100 ชุด = ฿2,100,000)</a:t>
             </a:r>
             <a:br/>
             <a:r>
-              <a:t>• รูปแบบการลงทุน: 【 แบบซื้อขาด (2.5 - 6.0 แสน) 】 vs 【 แบบรายปี (1.2 - 3.6 แสน/ปี Recurring Income) 】</a:t>
+              <a:t>• 2 รูปแบบข้อเสนอราคา: 【 แบบที่ 1 Plug &amp; Play (2.95 - 3.20 ล้าน) 】 vs 【 แบบที่ 2 Turnkey (3.80 - 4.20 ล้าน) 】</a:t>
             </a:r>
           </a:p>
           <a:p>
@@ -3310,7 +3310,7 @@
               </a:defRPr>
             </a:pPr>
             <a:r>
-              <a:t>โครงการระบบวัดคุณภาพน้ำอัจฉริยะ 100 จุด (NCT WATER NEXUS)</a:t>
+              <a:t>โครงการระบบตรวจวัดคุณภาพน้ำ 100 ชุด (NCT WATER NEXUS)</a:t>
             </a:r>
           </a:p>
           <a:p>
@@ -3322,7 +3322,7 @@
               </a:defRPr>
             </a:pPr>
             <a:r>
-              <a:t>1. ต้นทุนฮาร์ดแวร์ตู้คอนโทรลต่อชุดและรวม 100 จุด (Hardware BOM)</a:t>
+              <a:t>1. ตารางต้นทุนฮาร์ดแวร์และอุปกรณ์ต่อชุด (BOM per Unit)</a:t>
             </a:r>
           </a:p>
         </p:txBody>
@@ -3336,7 +3336,7 @@
         <p:spPr>
           <a:xfrm>
             <a:off x="731520" y="1463040"/>
-            <a:ext cx="3383280" cy="3474720"/>
+            <a:ext cx="2468880" cy="3291840"/>
           </a:xfrm>
           <a:prstGeom prst="roundRect">
             <a:avLst/>
@@ -3381,7 +3381,7 @@
         <p:spPr>
           <a:xfrm>
             <a:off x="731520" y="1463040"/>
-            <a:ext cx="3383280" cy="1097280"/>
+            <a:ext cx="2468880" cy="1097280"/>
           </a:xfrm>
           <a:prstGeom prst="roundRect">
             <a:avLst/>
@@ -3423,8 +3423,8 @@
         </p:nvSpPr>
         <p:spPr>
           <a:xfrm>
-            <a:off x="868680" y="1554480"/>
-            <a:ext cx="3108960" cy="914400"/>
+            <a:off x="841248" y="1536192"/>
+            <a:ext cx="2249424" cy="960120"/>
           </a:xfrm>
           <a:prstGeom prst="rect">
             <a:avLst/>
@@ -3438,26 +3438,26 @@
           <a:lstStyle/>
           <a:p>
             <a:pPr>
-              <a:defRPr sz="1150" b="1">
+              <a:defRPr sz="1000" b="1">
                 <a:solidFill>
                   <a:srgbClr val="FFFFFF"/>
                 </a:solidFill>
               </a:defRPr>
             </a:pPr>
             <a:r>
-              <a:t>ชุดเซนเซอร์ 4 ค่า (Modela + คลอรีน)</a:t>
-            </a:r>
-          </a:p>
-          <a:p>
-            <a:pPr>
-              <a:defRPr sz="1400" b="1">
+              <a:t>ชุดเซนเซอร์หลัก (Modela One + pH/TDS/Temp + คลอรีน Cybertice)</a:t>
+            </a:r>
+          </a:p>
+          <a:p>
+            <a:pPr>
+              <a:defRPr sz="1500" b="1">
                 <a:solidFill>
                   <a:srgbClr val="FFFFFF"/>
                 </a:solidFill>
               </a:defRPr>
             </a:pPr>
             <a:r>
-              <a:t>ต้นทุน: ฿17,000 / ชุด</a:t>
+              <a:t>฿17,000</a:t>
             </a:r>
           </a:p>
         </p:txBody>
@@ -3470,8 +3470,8 @@
         </p:nvSpPr>
         <p:spPr>
           <a:xfrm>
-            <a:off x="868680" y="2697480"/>
-            <a:ext cx="3108960" cy="2103120"/>
+            <a:off x="841248" y="2651760"/>
+            <a:ext cx="2249424" cy="2011680"/>
           </a:xfrm>
           <a:prstGeom prst="rect">
             <a:avLst/>
@@ -3485,13 +3485,17 @@
           <a:lstStyle/>
           <a:p>
             <a:pPr>
-              <a:defRPr sz="1000">
+              <a:defRPr sz="880">
                 <a:solidFill>
                   <a:srgbClr val="64748B"/>
                 </a:solidFill>
               </a:defRPr>
             </a:pPr>
             <a:r>
+              <a:t>• บอร์ดควบคุมหลัก Modela One (Modbus RTU/RS-485)</a:t>
+            </a:r>
+            <a:br/>
+            <a:r>
               <a:t>• หัววัด pH แก้วอุตสาหกรรม (±0.01 pH)</a:t>
             </a:r>
             <a:br/>
@@ -3500,11 +3504,11 @@
             </a:r>
             <a:br/>
             <a:r>
-              <a:t>• หัววัดอุณหภูมิน้ำ PT1000 RTD พร้อมระบบ ATC</a:t>
+              <a:t>• หัววัดอุณหภูมิ PT1000 (พร้อม ATC ชดเชยอุณหภูมิ)</a:t>
             </a:r>
             <a:br/>
             <a:r>
-              <a:t>• หัววัดคลอรีนคงเหลือ (Residual Chlorine)</a:t>
+              <a:t>• เซนเซอร์คลอรีนคงเหลือ Cybertice (Residual Chlorine)</a:t>
             </a:r>
           </a:p>
         </p:txBody>
@@ -3517,8 +3521,8 @@
         </p:nvSpPr>
         <p:spPr>
           <a:xfrm>
-            <a:off x="4389120" y="1463040"/>
-            <a:ext cx="3383280" cy="3474720"/>
+            <a:off x="3474720" y="1463040"/>
+            <a:ext cx="2468880" cy="3291840"/>
           </a:xfrm>
           <a:prstGeom prst="roundRect">
             <a:avLst/>
@@ -3562,8 +3566,8 @@
         </p:nvSpPr>
         <p:spPr>
           <a:xfrm>
-            <a:off x="4389120" y="1463040"/>
-            <a:ext cx="3383280" cy="1097280"/>
+            <a:off x="3474720" y="1463040"/>
+            <a:ext cx="2468880" cy="1097280"/>
           </a:xfrm>
           <a:prstGeom prst="roundRect">
             <a:avLst/>
@@ -3605,8 +3609,8 @@
         </p:nvSpPr>
         <p:spPr>
           <a:xfrm>
-            <a:off x="4526280" y="1554480"/>
-            <a:ext cx="3108960" cy="914400"/>
+            <a:off x="3584448" y="1536192"/>
+            <a:ext cx="2249424" cy="960120"/>
           </a:xfrm>
           <a:prstGeom prst="rect">
             <a:avLst/>
@@ -3620,26 +3624,26 @@
           <a:lstStyle/>
           <a:p>
             <a:pPr>
-              <a:defRPr sz="1150" b="1">
+              <a:defRPr sz="1000" b="1">
                 <a:solidFill>
                   <a:srgbClr val="FFFFFF"/>
                 </a:solidFill>
               </a:defRPr>
             </a:pPr>
             <a:r>
-              <a:t>4G Router + ซิมรายปี</a:t>
-            </a:r>
-          </a:p>
-          <a:p>
-            <a:pPr>
-              <a:defRPr sz="1400" b="1">
+              <a:t>4G LTE Router (TP-Link TL-MR100)</a:t>
+            </a:r>
+          </a:p>
+          <a:p>
+            <a:pPr>
+              <a:defRPr sz="1500" b="1">
                 <a:solidFill>
                   <a:srgbClr val="FFFFFF"/>
                 </a:solidFill>
               </a:defRPr>
             </a:pPr>
             <a:r>
-              <a:t>ต้นทุน: ฿2,800 / ชุด</a:t>
+              <a:t>฿1,000</a:t>
             </a:r>
           </a:p>
         </p:txBody>
@@ -3652,8 +3656,8 @@
         </p:nvSpPr>
         <p:spPr>
           <a:xfrm>
-            <a:off x="4526280" y="2697480"/>
-            <a:ext cx="3108960" cy="2103120"/>
+            <a:off x="3584448" y="2651760"/>
+            <a:ext cx="2249424" cy="2011680"/>
           </a:xfrm>
           <a:prstGeom prst="rect">
             <a:avLst/>
@@ -3667,22 +3671,22 @@
           <a:lstStyle/>
           <a:p>
             <a:pPr>
-              <a:defRPr sz="1000">
+              <a:defRPr sz="880">
                 <a:solidFill>
                   <a:srgbClr val="64748B"/>
                 </a:solidFill>
               </a:defRPr>
             </a:pPr>
             <a:r>
-              <a:t>• Industrial 4G LTE Router เสาสัญญาณภายนอก</a:t>
+              <a:t>• เราเตอร์ 4G LTE Wi-Fi ความเร็ว 300 Mbps</a:t>
             </a:r>
             <a:br/>
             <a:r>
-              <a:t>• ซิมอินเทอร์เน็ต IoT รายปี ไม่จำกัดปริมาณข้อมูล</a:t>
+              <a:t>• เสารับสัญญาณภายนอก 2 เสา สัญญาณนิ่งเสถียร</a:t>
             </a:r>
             <a:br/>
             <a:r>
-              <a:t>• ส่งข้อมูล Telemetry สดทุก 1 วินาที สู่คลาวด์</a:t>
+              <a:t>• เชื่อมต่อระบบ Telemetry สดทุก 1 วินาที</a:t>
             </a:r>
           </a:p>
         </p:txBody>
@@ -3695,8 +3699,8 @@
         </p:nvSpPr>
         <p:spPr>
           <a:xfrm>
-            <a:off x="8046720" y="1463040"/>
-            <a:ext cx="3383280" cy="3474720"/>
+            <a:off x="6217920" y="1463040"/>
+            <a:ext cx="2468880" cy="3291840"/>
           </a:xfrm>
           <a:prstGeom prst="roundRect">
             <a:avLst/>
@@ -3740,8 +3744,8 @@
         </p:nvSpPr>
         <p:spPr>
           <a:xfrm>
-            <a:off x="8046720" y="1463040"/>
-            <a:ext cx="3383280" cy="1097280"/>
+            <a:off x="6217920" y="1463040"/>
+            <a:ext cx="2468880" cy="1097280"/>
           </a:xfrm>
           <a:prstGeom prst="roundRect">
             <a:avLst/>
@@ -3783,8 +3787,8 @@
         </p:nvSpPr>
         <p:spPr>
           <a:xfrm>
-            <a:off x="8183880" y="1554480"/>
-            <a:ext cx="3108960" cy="914400"/>
+            <a:off x="6327648" y="1536192"/>
+            <a:ext cx="2249424" cy="960120"/>
           </a:xfrm>
           <a:prstGeom prst="rect">
             <a:avLst/>
@@ -3798,26 +3802,26 @@
           <a:lstStyle/>
           <a:p>
             <a:pPr>
-              <a:defRPr sz="1150" b="1">
+              <a:defRPr sz="1000" b="1">
                 <a:solidFill>
                   <a:srgbClr val="FFFFFF"/>
                 </a:solidFill>
               </a:defRPr>
             </a:pPr>
             <a:r>
-              <a:t>ตู้กันน้ำ IP65 + สวิตชิ่ง + เบรกเกอร์</a:t>
-            </a:r>
-          </a:p>
-          <a:p>
-            <a:pPr>
-              <a:defRPr sz="1400" b="1">
+              <a:t>ซิมการ์ด 4G รายปี (Unlimited 15-20 Mbps)</a:t>
+            </a:r>
+          </a:p>
+          <a:p>
+            <a:pPr>
+              <a:defRPr sz="1500" b="1">
                 <a:solidFill>
                   <a:srgbClr val="FFFFFF"/>
                 </a:solidFill>
               </a:defRPr>
             </a:pPr>
             <a:r>
-              <a:t>ต้นทุน: ฿1,200 / ชุด</a:t>
+              <a:t>฿1,800</a:t>
             </a:r>
           </a:p>
         </p:txBody>
@@ -3830,8 +3834,8 @@
         </p:nvSpPr>
         <p:spPr>
           <a:xfrm>
-            <a:off x="8183880" y="2697480"/>
-            <a:ext cx="3108960" cy="2103120"/>
+            <a:off x="6327648" y="2651760"/>
+            <a:ext cx="2249424" cy="2011680"/>
           </a:xfrm>
           <a:prstGeom prst="rect">
             <a:avLst/>
@@ -3845,22 +3849,22 @@
           <a:lstStyle/>
           <a:p>
             <a:pPr>
-              <a:defRPr sz="1000">
+              <a:defRPr sz="880">
                 <a:solidFill>
                   <a:srgbClr val="64748B"/>
                 </a:solidFill>
               </a:defRPr>
             </a:pPr>
             <a:r>
-              <a:t>• ตู้ควบคุมกันน้ำกันฝุ่นมาตรฐาน IP65</a:t>
+              <a:t>• ซิมเน็ต IoT รายปี ไม่อั้น ไม่ลดสปีด (15-20 Mbps)</a:t>
             </a:r>
             <a:br/>
             <a:r>
-              <a:t>• แหล่งจ่ายไฟ Switching Power Supply 12V/24V</a:t>
+              <a:t>• รวมค่าบริการเครือข่าย 12 เดือนเต็ม</a:t>
             </a:r>
             <a:br/>
             <a:r>
-              <a:t>• เบรกเกอร์ป้องกันไฟกระชากและไฟเกิน (Surge)</a:t>
+              <a:t>• ส่งข้อมูลขึ้นระบบคลาวด์และแจ้งเตือน 24 ชม.</a:t>
             </a:r>
           </a:p>
         </p:txBody>
@@ -3873,8 +3877,186 @@
         </p:nvSpPr>
         <p:spPr>
           <a:xfrm>
-            <a:off x="731520" y="5120640"/>
-            <a:ext cx="10728655" cy="1188720"/>
+            <a:off x="8961120" y="1463040"/>
+            <a:ext cx="2468880" cy="3291840"/>
+          </a:xfrm>
+          <a:prstGeom prst="roundRect">
+            <a:avLst/>
+          </a:prstGeom>
+          <a:solidFill>
+            <a:srgbClr val="FFFFFF"/>
+          </a:solidFill>
+          <a:ln w="19050">
+            <a:solidFill>
+              <a:srgbClr val="1E293B"/>
+            </a:solidFill>
+          </a:ln>
+        </p:spPr>
+        <p:style>
+          <a:lnRef idx="1">
+            <a:schemeClr val="accent1"/>
+          </a:lnRef>
+          <a:fillRef idx="3">
+            <a:schemeClr val="accent1"/>
+          </a:fillRef>
+          <a:effectRef idx="2">
+            <a:schemeClr val="accent1"/>
+          </a:effectRef>
+          <a:fontRef idx="minor">
+            <a:schemeClr val="lt1"/>
+          </a:fontRef>
+        </p:style>
+        <p:txBody>
+          <a:bodyPr rtlCol="0" anchor="ctr"/>
+          <a:lstStyle/>
+          <a:p>
+            <a:pPr algn="ctr"/>
+          </a:p>
+        </p:txBody>
+      </p:sp>
+      <p:sp>
+        <p:nvSpPr>
+          <p:cNvPr id="16" name="Rounded Rectangle 15"/>
+          <p:cNvSpPr/>
+          <p:nvPr/>
+        </p:nvSpPr>
+        <p:spPr>
+          <a:xfrm>
+            <a:off x="8961120" y="1463040"/>
+            <a:ext cx="2468880" cy="1097280"/>
+          </a:xfrm>
+          <a:prstGeom prst="roundRect">
+            <a:avLst/>
+          </a:prstGeom>
+          <a:solidFill>
+            <a:srgbClr val="1E293B"/>
+          </a:solidFill>
+          <a:ln>
+            <a:noFill/>
+          </a:ln>
+        </p:spPr>
+        <p:style>
+          <a:lnRef idx="1">
+            <a:schemeClr val="accent1"/>
+          </a:lnRef>
+          <a:fillRef idx="3">
+            <a:schemeClr val="accent1"/>
+          </a:fillRef>
+          <a:effectRef idx="2">
+            <a:schemeClr val="accent1"/>
+          </a:effectRef>
+          <a:fontRef idx="minor">
+            <a:schemeClr val="lt1"/>
+          </a:fontRef>
+        </p:style>
+        <p:txBody>
+          <a:bodyPr rtlCol="0" anchor="ctr"/>
+          <a:lstStyle/>
+          <a:p>
+            <a:pPr algn="ctr"/>
+          </a:p>
+        </p:txBody>
+      </p:sp>
+      <p:sp>
+        <p:nvSpPr>
+          <p:cNvPr id="17" name="TextBox 16"/>
+          <p:cNvSpPr txBox="1"/>
+          <p:nvPr/>
+        </p:nvSpPr>
+        <p:spPr>
+          <a:xfrm>
+            <a:off x="9070848" y="1536192"/>
+            <a:ext cx="2249424" cy="960120"/>
+          </a:xfrm>
+          <a:prstGeom prst="rect">
+            <a:avLst/>
+          </a:prstGeom>
+          <a:noFill/>
+        </p:spPr>
+        <p:txBody>
+          <a:bodyPr wrap="square">
+            <a:spAutoFit/>
+          </a:bodyPr>
+          <a:lstStyle/>
+          <a:p>
+            <a:pPr>
+              <a:defRPr sz="1000" b="1">
+                <a:solidFill>
+                  <a:srgbClr val="FFFFFF"/>
+                </a:solidFill>
+              </a:defRPr>
+            </a:pPr>
+            <a:r>
+              <a:t>ตู้คอนโทรล IP65 + Switching 24V + Breaker + Wiring</a:t>
+            </a:r>
+          </a:p>
+          <a:p>
+            <a:pPr>
+              <a:defRPr sz="1500" b="1">
+                <a:solidFill>
+                  <a:srgbClr val="FFFFFF"/>
+                </a:solidFill>
+              </a:defRPr>
+            </a:pPr>
+            <a:r>
+              <a:t>฿1,200</a:t>
+            </a:r>
+          </a:p>
+        </p:txBody>
+      </p:sp>
+      <p:sp>
+        <p:nvSpPr>
+          <p:cNvPr id="18" name="TextBox 17"/>
+          <p:cNvSpPr txBox="1"/>
+          <p:nvPr/>
+        </p:nvSpPr>
+        <p:spPr>
+          <a:xfrm>
+            <a:off x="9070848" y="2651760"/>
+            <a:ext cx="2249424" cy="2011680"/>
+          </a:xfrm>
+          <a:prstGeom prst="rect">
+            <a:avLst/>
+          </a:prstGeom>
+          <a:noFill/>
+        </p:spPr>
+        <p:txBody>
+          <a:bodyPr wrap="square">
+            <a:spAutoFit/>
+          </a:bodyPr>
+          <a:lstStyle/>
+          <a:p>
+            <a:pPr>
+              <a:defRPr sz="880">
+                <a:solidFill>
+                  <a:srgbClr val="64748B"/>
+                </a:solidFill>
+              </a:defRPr>
+            </a:pPr>
+            <a:r>
+              <a:t>• ตู้กันน้ำกันฝุ่นมาตรฐาน IP65</a:t>
+            </a:r>
+            <a:br/>
+            <a:r>
+              <a:t>• แหล่งจ่ายไฟ Switching Power Supply 24V</a:t>
+            </a:r>
+            <a:br/>
+            <a:r>
+              <a:t>• Breaker ป้องกันไฟเกิน + Terminal + สายไฟประกอบครบ</a:t>
+            </a:r>
+          </a:p>
+        </p:txBody>
+      </p:sp>
+      <p:sp>
+        <p:nvSpPr>
+          <p:cNvPr id="19" name="Rounded Rectangle 18"/>
+          <p:cNvSpPr/>
+          <p:nvPr/>
+        </p:nvSpPr>
+        <p:spPr>
+          <a:xfrm>
+            <a:off x="731520" y="4937760"/>
+            <a:ext cx="10728655" cy="1371600"/>
           </a:xfrm>
           <a:prstGeom prst="roundRect">
             <a:avLst/>
@@ -3912,14 +4094,14 @@
       </p:sp>
       <p:sp>
         <p:nvSpPr>
-          <p:cNvPr id="16" name="TextBox 15"/>
+          <p:cNvPr id="20" name="TextBox 19"/>
           <p:cNvSpPr txBox="1"/>
           <p:nvPr/>
         </p:nvSpPr>
         <p:spPr>
           <a:xfrm>
-            <a:off x="1005840" y="5257800"/>
-            <a:ext cx="10149840" cy="914400"/>
+            <a:off x="1005840" y="5074920"/>
+            <a:ext cx="10149840" cy="1097280"/>
           </a:xfrm>
           <a:prstGeom prst="rect">
             <a:avLst/>
@@ -3936,26 +4118,26 @@
               <a:spcAft>
                 <a:spcPts val="400"/>
               </a:spcAft>
-              <a:defRPr sz="1500" b="1">
+              <a:defRPr sz="1600" b="1">
                 <a:solidFill>
                   <a:srgbClr val="2DD4BF"/>
                 </a:solidFill>
               </a:defRPr>
             </a:pPr>
             <a:r>
-              <a:t>➡️ รวมต้นทุนฮาร์ดแวร์: ฿21,000 บ./ชุด  |  โครงการ 100 จุด = ฿2,100,000 บาท</a:t>
-            </a:r>
-          </a:p>
-          <a:p>
-            <a:pPr>
-              <a:defRPr sz="1050">
+              <a:t>➡️ รวมต้นทุนต่อชุด: ฿21,000 บาท  |  รวมต้นทุนโครงการ (100 ชุด): ฿2,100,000 บาท</a:t>
+            </a:r>
+          </a:p>
+          <a:p>
+            <a:pPr>
+              <a:defRPr sz="1000">
                 <a:solidFill>
                   <a:srgbClr val="E2E8F0"/>
                 </a:solidFill>
               </a:defRPr>
             </a:pPr>
             <a:r>
-              <a:t>วัดค่าครบ 4 พารามิเตอร์: pH (กรด-ด่าง) • TDS (สารละลายรวม) • อุณหภูมิน้ำ (ATC) • คลอรีนคงเหลือ (Residual Chlorine) พร้อมส่งสัญญาณ 4G เรียบร้อย</a:t>
+              <a:t>ต้นทุนนี้ครอบคลุมชุดหัววัดเซนเซอร์ 4 ค่า (pH / TDS / Temp / Cl) + กล่อง Modela One + เราเตอร์ 4G TP-Link + ซิมรายปี + ตู้ IP65 ประกอบสำเร็จพร้อมใช้งาน</a:t>
             </a:r>
           </a:p>
         </p:txBody>
@@ -4019,7 +4201,7 @@
               </a:defRPr>
             </a:pPr>
             <a:r>
-              <a:t>โครงการระบบวัดคุณภาพน้ำอัจฉริยะ 100 จุด (NCT WATER NEXUS)</a:t>
+              <a:t>โครงการระบบตรวจวัดคุณภาพน้ำ 100 ชุด (NCT WATER NEXUS)</a:t>
             </a:r>
           </a:p>
           <a:p>
@@ -4031,7 +4213,7 @@
               </a:defRPr>
             </a:pPr>
             <a:r>
-              <a:t>2. ราคาซอฟต์แวร์ Dashboard &amp; ระบบแจ้งเตือน (โครงการ 100 จุด)</a:t>
+              <a:t>2. โครงสร้างราคาขายแนะนำ (แพ็กเกจ 100 ชุด รวม App + Web Dashboard)</a:t>
             </a:r>
           </a:p>
         </p:txBody>
@@ -4045,7 +4227,7 @@
         <p:spPr>
           <a:xfrm>
             <a:off x="731520" y="1463040"/>
-            <a:ext cx="3383280" cy="4754880"/>
+            <a:ext cx="5120640" cy="4754880"/>
           </a:xfrm>
           <a:prstGeom prst="roundRect">
             <a:avLst/>
@@ -4090,7 +4272,7 @@
         <p:spPr>
           <a:xfrm>
             <a:off x="731520" y="1463040"/>
-            <a:ext cx="3383280" cy="1280160"/>
+            <a:ext cx="5120640" cy="1188720"/>
           </a:xfrm>
           <a:prstGeom prst="roundRect">
             <a:avLst/>
@@ -4133,7 +4315,7 @@
         <p:spPr>
           <a:xfrm>
             <a:off x="914400" y="1554480"/>
-            <a:ext cx="3017520" cy="1097280"/>
+            <a:ext cx="4754880" cy="1005840"/>
           </a:xfrm>
           <a:prstGeom prst="rect">
             <a:avLst/>
@@ -4147,26 +4329,26 @@
           <a:lstStyle/>
           <a:p>
             <a:pPr>
-              <a:defRPr sz="950" b="1">
+              <a:defRPr sz="1300" b="1">
                 <a:solidFill>
                   <a:srgbClr val="FFFFFF"/>
                 </a:solidFill>
               </a:defRPr>
             </a:pPr>
             <a:r>
-              <a:t>[ Option 1 ] ★ แนะนำ คุ้มค่าสูงสุด</a:t>
-            </a:r>
-          </a:p>
-          <a:p>
-            <a:pPr>
-              <a:defRPr sz="1350" b="1">
+              <a:t>[แบบที่ 1] ส่งมอบอุปกรณ์พร้อมระบบออนไลน์</a:t>
+            </a:r>
+          </a:p>
+          <a:p>
+            <a:pPr>
+              <a:defRPr sz="1100" b="1">
                 <a:solidFill>
                   <a:srgbClr val="FFFFFF"/>
                 </a:solidFill>
               </a:defRPr>
             </a:pPr>
             <a:r>
-              <a:t>แอปมือถือ + Telegram</a:t>
+              <a:t>Plug &amp; Play / Supply Only (ราคา ฿29,500 - ฿32,000 / ชุด)</a:t>
             </a:r>
           </a:p>
         </p:txBody>
@@ -4179,8 +4361,8 @@
         </p:nvSpPr>
         <p:spPr>
           <a:xfrm>
-            <a:off x="914400" y="2834640"/>
-            <a:ext cx="3017520" cy="3291840"/>
+            <a:off x="914400" y="2743200"/>
+            <a:ext cx="4754880" cy="3383280"/>
           </a:xfrm>
           <a:prstGeom prst="rect">
             <a:avLst/>
@@ -4194,48 +4376,17 @@
           <a:lstStyle/>
           <a:p>
             <a:pPr>
-              <a:defRPr b="1" sz="1050">
-                <a:solidFill>
-                  <a:srgbClr val="0284C7"/>
-                </a:solidFill>
-              </a:defRPr>
-            </a:pPr>
-            <a:r>
-              <a:t>• แบบซื้อขาด: ฿250,000 (2,500 บ./จุด)</a:t>
-            </a:r>
-          </a:p>
-          <a:p>
-            <a:pPr>
               <a:spcAft>
-                <a:spcPts val="600"/>
+                <a:spcPts val="400"/>
               </a:spcAft>
-              <a:defRPr b="1" sz="1000">
-                <a:solidFill>
-                  <a:srgbClr val="059669"/>
-                </a:solidFill>
-              </a:defRPr>
-            </a:pPr>
-            <a:r>
-              <a:t>• แบบรายปี: ฿170,000 (ปีแรก)</a:t>
-            </a:r>
-            <a:br/>
-            <a:r>
-              <a:t>  (ปีถัดไป ฿120,000 บ./ปี (1,200 บ./จุด/ปี))</a:t>
-            </a:r>
-          </a:p>
-          <a:p>
-            <a:pPr>
-              <a:spcAft>
-                <a:spcPts val="600"/>
-              </a:spcAft>
-              <a:defRPr sz="900" b="1">
+              <a:defRPr b="1" sz="1100">
                 <a:solidFill>
                   <a:srgbClr val="0F172A"/>
                 </a:solidFill>
               </a:defRPr>
             </a:pPr>
             <a:r>
-              <a:t>💡 จุดเด่น: แจ้งเตือนฟรีตลอดชีพ ไม่มีค่าส่งข้อความ</a:t>
+              <a:t>📋 ขอบเขตงาน (Scope of Work):</a:t>
             </a:r>
           </a:p>
           <a:p>
@@ -4243,14 +4394,14 @@
               <a:spcAft>
                 <a:spcPts val="200"/>
               </a:spcAft>
-              <a:defRPr sz="880">
+              <a:defRPr sz="950">
                 <a:solidFill>
                   <a:srgbClr val="64748B"/>
                 </a:solidFill>
               </a:defRPr>
             </a:pPr>
             <a:r>
-              <a:t>✓ Mobile App (iOS &amp; Android) สลับดู 100 จุด</a:t>
+              <a:t>✔ ประกอบตู้คอนโทรลสำเร็จรูป พร้อมเดินระบบไฟภายใน</a:t>
             </a:r>
           </a:p>
           <a:p>
@@ -4258,14 +4409,14 @@
               <a:spcAft>
                 <a:spcPts val="200"/>
               </a:spcAft>
-              <a:defRPr sz="880">
+              <a:defRPr sz="950">
                 <a:solidFill>
                   <a:srgbClr val="64748B"/>
                 </a:solidFill>
               </a:defRPr>
             </a:pPr>
             <a:r>
-              <a:t>✓ แจ้งเตือนผ่าน Telegram Bot แบบกลุ่ม/เดี่ยว</a:t>
+              <a:t>✔ ใส่ซิมรายปีและตั้งค่าเชื่อมต่อเน็ตเวิร์ก 4G LTE</a:t>
             </a:r>
           </a:p>
           <a:p>
@@ -4273,14 +4424,14 @@
               <a:spcAft>
                 <a:spcPts val="200"/>
               </a:spcAft>
-              <a:defRPr sz="880">
+              <a:defRPr sz="950">
                 <a:solidFill>
                   <a:srgbClr val="64748B"/>
                 </a:solidFill>
               </a:defRPr>
             </a:pPr>
             <a:r>
-              <a:t>✓ ส่งข้อความเตือนฟรี 100% ไม่จำกัดจำนวนครั้ง</a:t>
+              <a:t>✔ เชื่อมต่อ Modbus อ่านค่า pH, TDS, Temp, Chlorine</a:t>
             </a:r>
           </a:p>
           <a:p>
@@ -4288,14 +4439,14 @@
               <a:spcAft>
                 <a:spcPts val="200"/>
               </a:spcAft>
-              <a:defRPr sz="880">
+              <a:defRPr sz="950">
                 <a:solidFill>
                   <a:srgbClr val="64748B"/>
                 </a:solidFill>
               </a:defRPr>
             </a:pPr>
             <a:r>
-              <a:t>✓ ไม่มีต้นทุนแฝง กำไรเต็มเม็ดเต็มหน่วย</a:t>
+              <a:t>✔ ตั้งค่าระบบ Modela App สำหรับดูข้อมูลและแจ้งเตือนผ่านมือถือ</a:t>
             </a:r>
           </a:p>
           <a:p>
@@ -4303,14 +4454,33 @@
               <a:spcAft>
                 <a:spcPts val="200"/>
               </a:spcAft>
-              <a:defRPr sz="880">
+              <a:defRPr sz="950">
                 <a:solidFill>
                   <a:srgbClr val="64748B"/>
                 </a:solidFill>
               </a:defRPr>
             </a:pPr>
             <a:r>
-              <a:t>✓ ฟรี Support / แก้บั๊ก 1 ปีแรก</a:t>
+              <a:t>✔ จัดทำ Web Dashboard กลางรวมข้อมูลทั้ง 100 จุด</a:t>
+            </a:r>
+          </a:p>
+          <a:p>
+            <a:pPr>
+              <a:spcBef>
+                <a:spcPts val="800"/>
+              </a:spcBef>
+              <a:defRPr b="1" sz="1000">
+                <a:solidFill>
+                  <a:srgbClr val="0284C7"/>
+                </a:solidFill>
+              </a:defRPr>
+            </a:pPr>
+            <a:r>
+              <a:t>💰 มูลค่าโครงการรวม (100 ชุด): ฿2,950,000 - ฿3,200,000 บาท</a:t>
+            </a:r>
+            <a:br/>
+            <a:r>
+              <a:t>📈 กำไรขั้นต้นโดยประมาณ: ฿850,000 - ฿1,100,000 บาท (Margin ~29-34%)</a:t>
             </a:r>
           </a:p>
         </p:txBody>
@@ -4323,8 +4493,8 @@
         </p:nvSpPr>
         <p:spPr>
           <a:xfrm>
-            <a:off x="4389120" y="1463040"/>
-            <a:ext cx="3383280" cy="4754880"/>
+            <a:off x="6309360" y="1463040"/>
+            <a:ext cx="5120640" cy="4754880"/>
           </a:xfrm>
           <a:prstGeom prst="roundRect">
             <a:avLst/>
@@ -4368,8 +4538,8 @@
         </p:nvSpPr>
         <p:spPr>
           <a:xfrm>
-            <a:off x="4389120" y="1463040"/>
-            <a:ext cx="3383280" cy="1280160"/>
+            <a:off x="6309360" y="1463040"/>
+            <a:ext cx="5120640" cy="1188720"/>
           </a:xfrm>
           <a:prstGeom prst="roundRect">
             <a:avLst/>
@@ -4411,8 +4581,8 @@
         </p:nvSpPr>
         <p:spPr>
           <a:xfrm>
-            <a:off x="4572000" y="1554480"/>
-            <a:ext cx="3017520" cy="1097280"/>
+            <a:off x="6492240" y="1554480"/>
+            <a:ext cx="4754880" cy="1005840"/>
           </a:xfrm>
           <a:prstGeom prst="rect">
             <a:avLst/>
@@ -4426,26 +4596,26 @@
           <a:lstStyle/>
           <a:p>
             <a:pPr>
-              <a:defRPr sz="950" b="1">
+              <a:defRPr sz="1300" b="1">
                 <a:solidFill>
                   <a:srgbClr val="FFFFFF"/>
                 </a:solidFill>
               </a:defRPr>
             </a:pPr>
             <a:r>
-              <a:t>[ Option 2 ] สำหรับห้องควบคุม SCADA</a:t>
-            </a:r>
-          </a:p>
-          <a:p>
-            <a:pPr>
-              <a:defRPr sz="1350" b="1">
+              <a:t>[แบบที่ 2] แบบครบวงจร รวมติดตั้งหน้างาน + สอบเทียบ</a:t>
+            </a:r>
+          </a:p>
+          <a:p>
+            <a:pPr>
+              <a:defRPr sz="1100" b="1">
                 <a:solidFill>
                   <a:srgbClr val="FFFFFF"/>
                 </a:solidFill>
               </a:defRPr>
             </a:pPr>
             <a:r>
-              <a:t>เว็บกลาง 100 จุด + Telegram</a:t>
+              <a:t>Turnkey Solution (ราคา ฿38,000 - ฿42,000 / ชุด)</a:t>
             </a:r>
           </a:p>
         </p:txBody>
@@ -4458,8 +4628,8 @@
         </p:nvSpPr>
         <p:spPr>
           <a:xfrm>
-            <a:off x="4572000" y="2834640"/>
-            <a:ext cx="3017520" cy="3291840"/>
+            <a:off x="6492240" y="2743200"/>
+            <a:ext cx="4754880" cy="3383280"/>
           </a:xfrm>
           <a:prstGeom prst="rect">
             <a:avLst/>
@@ -4473,48 +4643,17 @@
           <a:lstStyle/>
           <a:p>
             <a:pPr>
-              <a:defRPr b="1" sz="1050">
-                <a:solidFill>
-                  <a:srgbClr val="0284C7"/>
-                </a:solidFill>
-              </a:defRPr>
-            </a:pPr>
-            <a:r>
-              <a:t>• แบบซื้อขาด: ฿450,000 (4,500 บ./จุด)</a:t>
-            </a:r>
-          </a:p>
-          <a:p>
-            <a:pPr>
               <a:spcAft>
-                <a:spcPts val="600"/>
+                <a:spcPts val="400"/>
               </a:spcAft>
-              <a:defRPr b="1" sz="1000">
-                <a:solidFill>
-                  <a:srgbClr val="059669"/>
-                </a:solidFill>
-              </a:defRPr>
-            </a:pPr>
-            <a:r>
-              <a:t>• แบบรายปี: ฿340,000 (ปีแรก)</a:t>
-            </a:r>
-            <a:br/>
-            <a:r>
-              <a:t>  (ปีถัดไป ฿240,000 บ./ปี (2,400 บ./จุด/ปี))</a:t>
-            </a:r>
-          </a:p>
-          <a:p>
-            <a:pPr>
-              <a:spcAft>
-                <a:spcPts val="600"/>
-              </a:spcAft>
-              <a:defRPr sz="900" b="1">
+              <a:defRPr b="1" sz="1100">
                 <a:solidFill>
                   <a:srgbClr val="0F172A"/>
                 </a:solidFill>
               </a:defRPr>
             </a:pPr>
             <a:r>
-              <a:t>💡 จุดเด่น: ดูภาพรวมและตารางสรุปทั้ง 100 จุดในจอเดียว</a:t>
+              <a:t>📋 ขอบเขตงาน (Scope of Work):</a:t>
             </a:r>
           </a:p>
           <a:p>
@@ -4522,14 +4661,14 @@
               <a:spcAft>
                 <a:spcPts val="200"/>
               </a:spcAft>
-              <a:defRPr sz="880">
+              <a:defRPr sz="950">
                 <a:solidFill>
                   <a:srgbClr val="64748B"/>
                 </a:solidFill>
               </a:defRPr>
             </a:pPr>
             <a:r>
-              <a:t>✓ Centralized Web SCADA Dashboard 100 จุด</a:t>
+              <a:t>✔ ทุกอย่างในแบบที่ 1 (ตู้ + ซิม + Modbus + App + Web Dashboard)</a:t>
             </a:r>
           </a:p>
           <a:p>
@@ -4537,14 +4676,14 @@
               <a:spcAft>
                 <a:spcPts val="200"/>
               </a:spcAft>
-              <a:defRPr sz="880">
+              <a:defRPr sz="950">
                 <a:solidFill>
                   <a:srgbClr val="64748B"/>
                 </a:solidFill>
               </a:defRPr>
             </a:pPr>
             <a:r>
-              <a:t>✓ แผนที่ GIS Map &amp; ตารางสรุปสถานะ Real-Time</a:t>
+              <a:t>✔ ค่าแรงและทีมงานเข้าติดตั้งยึดตู้ / เดินท่อบายพาสหน้างาน</a:t>
             </a:r>
           </a:p>
           <a:p>
@@ -4552,14 +4691,14 @@
               <a:spcAft>
                 <a:spcPts val="200"/>
               </a:spcAft>
-              <a:defRPr sz="880">
+              <a:defRPr sz="950">
                 <a:solidFill>
                   <a:srgbClr val="64748B"/>
                 </a:solidFill>
               </a:defRPr>
             </a:pPr>
             <a:r>
-              <a:t>✓ กราฟวิเคราะห์แนวโน้ม Multi-Axis 100 สถานี</a:t>
+              <a:t>✔ สอบเทียบ (Calibration) หัววัด pH / TDS ด้วยน้ำยามาตรฐานหน้างาน</a:t>
             </a:r>
           </a:p>
           <a:p>
@@ -4567,14 +4706,14 @@
               <a:spcAft>
                 <a:spcPts val="200"/>
               </a:spcAft>
-              <a:defRPr sz="880">
+              <a:defRPr sz="950">
                 <a:solidFill>
                   <a:srgbClr val="64748B"/>
                 </a:solidFill>
               </a:defRPr>
             </a:pPr>
             <a:r>
-              <a:t>✓ แจ้งเตือนผ่าน Telegram Bot ทันทีเมื่อผิดปกติ</a:t>
+              <a:t>✔ อบรมการใช้งานระบบและส่งมอบคู่มือการปฏิบัติงาน</a:t>
             </a:r>
           </a:p>
           <a:p>
@@ -4582,191 +4721,21 @@
               <a:spcAft>
                 <a:spcPts val="200"/>
               </a:spcAft>
-              <a:defRPr sz="880">
+              <a:defRPr sz="950">
                 <a:solidFill>
                   <a:srgbClr val="64748B"/>
                 </a:solidFill>
               </a:defRPr>
             </a:pPr>
             <a:r>
-              <a:t>✓ Export รายงาน Excel / PDF ย้อนหลังได้</a:t>
-            </a:r>
-          </a:p>
-        </p:txBody>
-      </p:sp>
-      <p:sp>
-        <p:nvSpPr>
-          <p:cNvPr id="11" name="Rounded Rectangle 10"/>
-          <p:cNvSpPr/>
-          <p:nvPr/>
-        </p:nvSpPr>
-        <p:spPr>
-          <a:xfrm>
-            <a:off x="8046720" y="1463040"/>
-            <a:ext cx="3383280" cy="4754880"/>
-          </a:xfrm>
-          <a:prstGeom prst="roundRect">
-            <a:avLst/>
-          </a:prstGeom>
-          <a:solidFill>
-            <a:srgbClr val="FFFFFF"/>
-          </a:solidFill>
-          <a:ln w="19050">
-            <a:solidFill>
-              <a:srgbClr val="1E293B"/>
-            </a:solidFill>
-          </a:ln>
-        </p:spPr>
-        <p:style>
-          <a:lnRef idx="1">
-            <a:schemeClr val="accent1"/>
-          </a:lnRef>
-          <a:fillRef idx="3">
-            <a:schemeClr val="accent1"/>
-          </a:fillRef>
-          <a:effectRef idx="2">
-            <a:schemeClr val="accent1"/>
-          </a:effectRef>
-          <a:fontRef idx="minor">
-            <a:schemeClr val="lt1"/>
-          </a:fontRef>
-        </p:style>
-        <p:txBody>
-          <a:bodyPr rtlCol="0" anchor="ctr"/>
-          <a:lstStyle/>
-          <a:p>
-            <a:pPr algn="ctr"/>
-          </a:p>
-        </p:txBody>
-      </p:sp>
-      <p:sp>
-        <p:nvSpPr>
-          <p:cNvPr id="12" name="Rounded Rectangle 11"/>
-          <p:cNvSpPr/>
-          <p:nvPr/>
-        </p:nvSpPr>
-        <p:spPr>
-          <a:xfrm>
-            <a:off x="8046720" y="1463040"/>
-            <a:ext cx="3383280" cy="1280160"/>
-          </a:xfrm>
-          <a:prstGeom prst="roundRect">
-            <a:avLst/>
-          </a:prstGeom>
-          <a:solidFill>
-            <a:srgbClr val="1E293B"/>
-          </a:solidFill>
-          <a:ln>
-            <a:noFill/>
-          </a:ln>
-        </p:spPr>
-        <p:style>
-          <a:lnRef idx="1">
-            <a:schemeClr val="accent1"/>
-          </a:lnRef>
-          <a:fillRef idx="3">
-            <a:schemeClr val="accent1"/>
-          </a:fillRef>
-          <a:effectRef idx="2">
-            <a:schemeClr val="accent1"/>
-          </a:effectRef>
-          <a:fontRef idx="minor">
-            <a:schemeClr val="lt1"/>
-          </a:fontRef>
-        </p:style>
-        <p:txBody>
-          <a:bodyPr rtlCol="0" anchor="ctr"/>
-          <a:lstStyle/>
-          <a:p>
-            <a:pPr algn="ctr"/>
-          </a:p>
-        </p:txBody>
-      </p:sp>
-      <p:sp>
-        <p:nvSpPr>
-          <p:cNvPr id="13" name="TextBox 12"/>
-          <p:cNvSpPr txBox="1"/>
-          <p:nvPr/>
-        </p:nvSpPr>
-        <p:spPr>
-          <a:xfrm>
-            <a:off x="8229600" y="1554480"/>
-            <a:ext cx="3017520" cy="1097280"/>
-          </a:xfrm>
-          <a:prstGeom prst="rect">
-            <a:avLst/>
-          </a:prstGeom>
-          <a:noFill/>
-        </p:spPr>
-        <p:txBody>
-          <a:bodyPr wrap="square">
-            <a:spAutoFit/>
-          </a:bodyPr>
-          <a:lstStyle/>
-          <a:p>
-            <a:pPr>
-              <a:defRPr sz="950" b="1">
-                <a:solidFill>
-                  <a:srgbClr val="2DD4BF"/>
-                </a:solidFill>
-              </a:defRPr>
-            </a:pPr>
-            <a:r>
-              <a:t>[ Option 3 ] ครบวงจร + แจ้งเตือน LINE</a:t>
-            </a:r>
-          </a:p>
-          <a:p>
-            <a:pPr>
-              <a:defRPr sz="1350" b="1">
-                <a:solidFill>
-                  <a:srgbClr val="FFFFFF"/>
-                </a:solidFill>
-              </a:defRPr>
-            </a:pPr>
-            <a:r>
-              <a:t>เว็บกลาง + แอป + LINE OA</a:t>
-            </a:r>
-          </a:p>
-        </p:txBody>
-      </p:sp>
-      <p:sp>
-        <p:nvSpPr>
-          <p:cNvPr id="14" name="TextBox 13"/>
-          <p:cNvSpPr txBox="1"/>
-          <p:nvPr/>
-        </p:nvSpPr>
-        <p:spPr>
-          <a:xfrm>
-            <a:off x="8229600" y="2834640"/>
-            <a:ext cx="3017520" cy="3291840"/>
-          </a:xfrm>
-          <a:prstGeom prst="rect">
-            <a:avLst/>
-          </a:prstGeom>
-          <a:noFill/>
-        </p:spPr>
-        <p:txBody>
-          <a:bodyPr wrap="square">
-            <a:spAutoFit/>
-          </a:bodyPr>
-          <a:lstStyle/>
-          <a:p>
-            <a:pPr>
-              <a:defRPr b="1" sz="1050">
-                <a:solidFill>
-                  <a:srgbClr val="0284C7"/>
-                </a:solidFill>
-              </a:defRPr>
-            </a:pPr>
-            <a:r>
-              <a:t>• แบบซื้อขาด: ฿600,000 (6,000 บ./จุด)</a:t>
-            </a:r>
-          </a:p>
-          <a:p>
-            <a:pPr>
-              <a:spcAft>
-                <a:spcPts val="600"/>
-              </a:spcAft>
+              <a:t>✔ รับประกันระบบและบริการ On-site Service ตลอด 1 ปีเต็ม</a:t>
+            </a:r>
+          </a:p>
+          <a:p>
+            <a:pPr>
+              <a:spcBef>
+                <a:spcPts val="800"/>
+              </a:spcBef>
               <a:defRPr b="1" sz="1000">
                 <a:solidFill>
                   <a:srgbClr val="059669"/>
@@ -4774,101 +4743,11 @@
               </a:defRPr>
             </a:pPr>
             <a:r>
-              <a:t>• แบบรายปี: ฿510,000 (ปีแรก)</a:t>
+              <a:t>💰 มูลค่าโครงการรวม (100 ชุด): ฿3,800,000 - ฿4,200,000 บาท</a:t>
             </a:r>
             <a:br/>
             <a:r>
-              <a:t>  (ปีถัดไป ฿360,000 บ./ปี (3,600 บ./จุด/ปี))</a:t>
-            </a:r>
-          </a:p>
-          <a:p>
-            <a:pPr>
-              <a:spcAft>
-                <a:spcPts val="600"/>
-              </a:spcAft>
-              <a:defRPr sz="900" b="1">
-                <a:solidFill>
-                  <a:srgbClr val="0F172A"/>
-                </a:solidFill>
-              </a:defRPr>
-            </a:pPr>
-            <a:r>
-              <a:t>💡 จุดเด่น: LINE มีค่าแพ็กเกจส่งข้อความรายเดือนเพิ่มเติม</a:t>
-            </a:r>
-          </a:p>
-          <a:p>
-            <a:pPr>
-              <a:spcAft>
-                <a:spcPts val="200"/>
-              </a:spcAft>
-              <a:defRPr sz="880">
-                <a:solidFill>
-                  <a:srgbClr val="64748B"/>
-                </a:solidFill>
-              </a:defRPr>
-            </a:pPr>
-            <a:r>
-              <a:t>✓ ได้ทั้ง Web SCADA + Mobile App ครบชุด</a:t>
-            </a:r>
-          </a:p>
-          <a:p>
-            <a:pPr>
-              <a:spcAft>
-                <a:spcPts val="200"/>
-              </a:spcAft>
-              <a:defRPr sz="880">
-                <a:solidFill>
-                  <a:srgbClr val="64748B"/>
-                </a:solidFill>
-              </a:defRPr>
-            </a:pPr>
-            <a:r>
-              <a:t>✓ แจ้งเตือนผ่าน LINE Official Account (LINE OA)</a:t>
-            </a:r>
-          </a:p>
-          <a:p>
-            <a:pPr>
-              <a:spcAft>
-                <a:spcPts val="200"/>
-              </a:spcAft>
-              <a:defRPr sz="880">
-                <a:solidFill>
-                  <a:srgbClr val="64748B"/>
-                </a:solidFill>
-              </a:defRPr>
-            </a:pPr>
-            <a:r>
-              <a:t>✓ ส่งการ์ดแจ้งเตือนพร้อมสีสถานะและปุ่มกดดูสด</a:t>
-            </a:r>
-          </a:p>
-          <a:p>
-            <a:pPr>
-              <a:spcAft>
-                <a:spcPts val="200"/>
-              </a:spcAft>
-              <a:defRPr sz="880">
-                <a:solidFill>
-                  <a:srgbClr val="64748B"/>
-                </a:solidFill>
-              </a:defRPr>
-            </a:pPr>
-            <a:r>
-              <a:t>✓ +฿1,500/จุด เพื่อซัพพอร์ตค่า Broadcast ของ LINE</a:t>
-            </a:r>
-          </a:p>
-          <a:p>
-            <a:pPr>
-              <a:spcAft>
-                <a:spcPts val="200"/>
-              </a:spcAft>
-              <a:defRPr sz="880">
-                <a:solidFill>
-                  <a:srgbClr val="64748B"/>
-                </a:solidFill>
-              </a:defRPr>
-            </a:pPr>
-            <a:r>
-              <a:t>✓ สัญญาบริการระดับพรีเมียม 24/7</a:t>
+              <a:t>📈 กำไรขั้นต้นโดยประมาณ: ฿1,700,000 - ฿2,100,000 บาท (Margin ~45-50%)</a:t>
             </a:r>
           </a:p>
         </p:txBody>
@@ -4932,7 +4811,7 @@
               </a:defRPr>
             </a:pPr>
             <a:r>
-              <a:t>โครงการระบบวัดคุณภาพน้ำอัจฉริยะ 100 จุด (NCT WATER NEXUS)</a:t>
+              <a:t>โครงการระบบตรวจวัดคุณภาพน้ำ 100 ชุด (NCT WATER NEXUS)</a:t>
             </a:r>
           </a:p>
           <a:p>
@@ -4944,7 +4823,7 @@
               </a:defRPr>
             </a:pPr>
             <a:r>
-              <a:t>3. ตัวอย่างข้อความแจ้งเตือนเมื่อพบค่าผิดปกติ (Telegram vs LINE OA)</a:t>
+              <a:t>3. ราคาซอฟต์แวร์ Dashboard &amp; ระบบแจ้งเตือน (3 Option ทางเลือก)</a:t>
             </a:r>
           </a:p>
         </p:txBody>
@@ -4958,7 +4837,7 @@
         <p:spPr>
           <a:xfrm>
             <a:off x="731520" y="1463040"/>
-            <a:ext cx="5120640" cy="4754880"/>
+            <a:ext cx="3383280" cy="4754880"/>
           </a:xfrm>
           <a:prstGeom prst="roundRect">
             <a:avLst/>
@@ -4996,14 +4875,57 @@
       </p:sp>
       <p:sp>
         <p:nvSpPr>
-          <p:cNvPr id="4" name="TextBox 3"/>
+          <p:cNvPr id="4" name="Rounded Rectangle 3"/>
+          <p:cNvSpPr/>
+          <p:nvPr/>
+        </p:nvSpPr>
+        <p:spPr>
+          <a:xfrm>
+            <a:off x="731520" y="1463040"/>
+            <a:ext cx="3383280" cy="1280160"/>
+          </a:xfrm>
+          <a:prstGeom prst="roundRect">
+            <a:avLst/>
+          </a:prstGeom>
+          <a:solidFill>
+            <a:srgbClr val="0284C7"/>
+          </a:solidFill>
+          <a:ln>
+            <a:noFill/>
+          </a:ln>
+        </p:spPr>
+        <p:style>
+          <a:lnRef idx="1">
+            <a:schemeClr val="accent1"/>
+          </a:lnRef>
+          <a:fillRef idx="3">
+            <a:schemeClr val="accent1"/>
+          </a:fillRef>
+          <a:effectRef idx="2">
+            <a:schemeClr val="accent1"/>
+          </a:effectRef>
+          <a:fontRef idx="minor">
+            <a:schemeClr val="lt1"/>
+          </a:fontRef>
+        </p:style>
+        <p:txBody>
+          <a:bodyPr rtlCol="0" anchor="ctr"/>
+          <a:lstStyle/>
+          <a:p>
+            <a:pPr algn="ctr"/>
+          </a:p>
+        </p:txBody>
+      </p:sp>
+      <p:sp>
+        <p:nvSpPr>
+          <p:cNvPr id="5" name="TextBox 4"/>
           <p:cNvSpPr txBox="1"/>
           <p:nvPr/>
         </p:nvSpPr>
         <p:spPr>
           <a:xfrm>
-            <a:off x="1005840" y="1691640"/>
-            <a:ext cx="4572000" cy="4297680"/>
+            <a:off x="914400" y="1554480"/>
+            <a:ext cx="3017520" cy="1097280"/>
           </a:xfrm>
           <a:prstGeom prst="rect">
             <a:avLst/>
@@ -5017,94 +4939,184 @@
           <a:lstStyle/>
           <a:p>
             <a:pPr>
+              <a:defRPr sz="950" b="1">
+                <a:solidFill>
+                  <a:srgbClr val="FFFFFF"/>
+                </a:solidFill>
+              </a:defRPr>
+            </a:pPr>
+            <a:r>
+              <a:t>[ Option 1 ] ★ แนะนำ คุ้มค่าสูงสุด</a:t>
+            </a:r>
+          </a:p>
+          <a:p>
+            <a:pPr>
+              <a:defRPr sz="1350" b="1">
+                <a:solidFill>
+                  <a:srgbClr val="FFFFFF"/>
+                </a:solidFill>
+              </a:defRPr>
+            </a:pPr>
+            <a:r>
+              <a:t>แอปมือถือ + Telegram</a:t>
+            </a:r>
+          </a:p>
+        </p:txBody>
+      </p:sp>
+      <p:sp>
+        <p:nvSpPr>
+          <p:cNvPr id="6" name="TextBox 5"/>
+          <p:cNvSpPr txBox="1"/>
+          <p:nvPr/>
+        </p:nvSpPr>
+        <p:spPr>
+          <a:xfrm>
+            <a:off x="914400" y="2834640"/>
+            <a:ext cx="3017520" cy="3291840"/>
+          </a:xfrm>
+          <a:prstGeom prst="rect">
+            <a:avLst/>
+          </a:prstGeom>
+          <a:noFill/>
+        </p:spPr>
+        <p:txBody>
+          <a:bodyPr wrap="square">
+            <a:spAutoFit/>
+          </a:bodyPr>
+          <a:lstStyle/>
+          <a:p>
+            <a:pPr>
+              <a:defRPr b="1" sz="1050">
+                <a:solidFill>
+                  <a:srgbClr val="0284C7"/>
+                </a:solidFill>
+              </a:defRPr>
+            </a:pPr>
+            <a:r>
+              <a:t>• แบบซื้อขาด: ฿250,000 (2,500 บ./จุด)</a:t>
+            </a:r>
+          </a:p>
+          <a:p>
+            <a:pPr>
               <a:spcAft>
-                <a:spcPts val="1000"/>
+                <a:spcPts val="600"/>
               </a:spcAft>
-              <a:defRPr sz="1400" b="1">
-                <a:solidFill>
-                  <a:srgbClr val="0284C7"/>
-                </a:solidFill>
-              </a:defRPr>
-            </a:pPr>
-            <a:r>
-              <a:t>✈️ รูปแบบ Telegram Alert (ส่งฟรี &amp; ไวมาก)</a:t>
+              <a:defRPr b="1" sz="1000">
+                <a:solidFill>
+                  <a:srgbClr val="059669"/>
+                </a:solidFill>
+              </a:defRPr>
+            </a:pPr>
+            <a:r>
+              <a:t>• แบบรายปี: ฿170,000 (ปีแรก)</a:t>
+            </a:r>
+            <a:br/>
+            <a:r>
+              <a:t>  (ปีถัดไป ฿120,000 บ./ปี (1,200 บ./จุด/ปี))</a:t>
             </a:r>
           </a:p>
           <a:p>
             <a:pPr>
               <a:spcAft>
-                <a:spcPts val="1000"/>
+                <a:spcPts val="600"/>
               </a:spcAft>
-              <a:defRPr sz="1050">
+              <a:defRPr sz="900" b="1">
                 <a:solidFill>
                   <a:srgbClr val="0F172A"/>
                 </a:solidFill>
               </a:defRPr>
             </a:pPr>
             <a:r>
-              <a:t>🚨 แจ้งเตือนคุณภาพน้ำผิดปกติ</a:t>
-            </a:r>
-            <a:br/>
-            <a:r>
-              <a:t>📍 จุดติดตั้ง: บ่อพักน้ำ #04 (ตู้ 1004)</a:t>
-            </a:r>
-            <a:br/>
-            <a:r>
-              <a:t>⏰ เวลา: 14:15 น.</a:t>
-            </a:r>
-            <a:br/>
-            <a:r>
-              <a:t>━━━━━━━━━━━━━━━━━━━━</a:t>
-            </a:r>
-            <a:br/>
-            <a:r>
-              <a:t>• คลอรีน: 0.15 mg/L ❌ (เกณฑ์ 0.20-2.00)</a:t>
-            </a:r>
-            <a:br/>
-            <a:r>
-              <a:t>• pH: 6.4 ❌ (เกณฑ์ 6.5-8.5)</a:t>
-            </a:r>
-            <a:br/>
-            <a:r>
-              <a:t>• TDS: 185 ppm (ปกติ)</a:t>
-            </a:r>
-            <a:br/>
-            <a:r>
-              <a:t>• อุณหภูมิ: 28.5 °C (ปกติ)</a:t>
-            </a:r>
-            <a:br/>
-            <a:r>
-              <a:t>━━━━━━━━━━━━━━━━━━━━</a:t>
-            </a:r>
-            <a:br/>
-            <a:r>
-              <a:t>🔗 ดูกราฟย้อนหลัง: https://water-iot.com/node/1004</a:t>
-            </a:r>
-          </a:p>
-          <a:p>
-            <a:pPr>
-              <a:defRPr sz="950" b="1">
-                <a:solidFill>
-                  <a:srgbClr val="059669"/>
-                </a:solidFill>
-              </a:defRPr>
-            </a:pPr>
-            <a:r>
-              <a:t>✔ จุดเด่น: ส่งฟรี 100% ไม่มีค่า Broadcast รายเดือน กำไรเต็มเม็ดเต็มหน่วย</a:t>
-            </a:r>
-          </a:p>
-        </p:txBody>
-      </p:sp>
-      <p:sp>
-        <p:nvSpPr>
-          <p:cNvPr id="5" name="Rounded Rectangle 4"/>
+              <a:t>💡 จุดเด่น: แจ้งเตือนฟรีตลอดชีพ ไม่มีค่าส่งข้อความ</a:t>
+            </a:r>
+          </a:p>
+          <a:p>
+            <a:pPr>
+              <a:spcAft>
+                <a:spcPts val="200"/>
+              </a:spcAft>
+              <a:defRPr sz="880">
+                <a:solidFill>
+                  <a:srgbClr val="64748B"/>
+                </a:solidFill>
+              </a:defRPr>
+            </a:pPr>
+            <a:r>
+              <a:t>✓ Modela App (iOS &amp; Android) สลับดู 100 จุด</a:t>
+            </a:r>
+          </a:p>
+          <a:p>
+            <a:pPr>
+              <a:spcAft>
+                <a:spcPts val="200"/>
+              </a:spcAft>
+              <a:defRPr sz="880">
+                <a:solidFill>
+                  <a:srgbClr val="64748B"/>
+                </a:solidFill>
+              </a:defRPr>
+            </a:pPr>
+            <a:r>
+              <a:t>✓ แจ้งเตือนผ่าน Telegram Bot แบบกลุ่ม/เดี่ยว</a:t>
+            </a:r>
+          </a:p>
+          <a:p>
+            <a:pPr>
+              <a:spcAft>
+                <a:spcPts val="200"/>
+              </a:spcAft>
+              <a:defRPr sz="880">
+                <a:solidFill>
+                  <a:srgbClr val="64748B"/>
+                </a:solidFill>
+              </a:defRPr>
+            </a:pPr>
+            <a:r>
+              <a:t>✓ ส่งข้อความเตือนฟรี 100% ไม่จำกัดจำนวนครั้ง</a:t>
+            </a:r>
+          </a:p>
+          <a:p>
+            <a:pPr>
+              <a:spcAft>
+                <a:spcPts val="200"/>
+              </a:spcAft>
+              <a:defRPr sz="880">
+                <a:solidFill>
+                  <a:srgbClr val="64748B"/>
+                </a:solidFill>
+              </a:defRPr>
+            </a:pPr>
+            <a:r>
+              <a:t>✓ ไม่มีต้นทุนแฝง กำไรเต็มเม็ดเต็มหน่วย</a:t>
+            </a:r>
+          </a:p>
+          <a:p>
+            <a:pPr>
+              <a:spcAft>
+                <a:spcPts val="200"/>
+              </a:spcAft>
+              <a:defRPr sz="880">
+                <a:solidFill>
+                  <a:srgbClr val="64748B"/>
+                </a:solidFill>
+              </a:defRPr>
+            </a:pPr>
+            <a:r>
+              <a:t>✓ ฟรี Support / แก้บั๊ก 1 ปีแรก</a:t>
+            </a:r>
+          </a:p>
+        </p:txBody>
+      </p:sp>
+      <p:sp>
+        <p:nvSpPr>
+          <p:cNvPr id="7" name="Rounded Rectangle 6"/>
           <p:cNvSpPr/>
           <p:nvPr/>
         </p:nvSpPr>
         <p:spPr>
           <a:xfrm>
-            <a:off x="6309360" y="1463040"/>
-            <a:ext cx="5120640" cy="4754880"/>
+            <a:off x="4389120" y="1463040"/>
+            <a:ext cx="3383280" cy="4754880"/>
           </a:xfrm>
           <a:prstGeom prst="roundRect">
             <a:avLst/>
@@ -5142,14 +5154,57 @@
       </p:sp>
       <p:sp>
         <p:nvSpPr>
-          <p:cNvPr id="6" name="TextBox 5"/>
+          <p:cNvPr id="8" name="Rounded Rectangle 7"/>
+          <p:cNvSpPr/>
+          <p:nvPr/>
+        </p:nvSpPr>
+        <p:spPr>
+          <a:xfrm>
+            <a:off x="4389120" y="1463040"/>
+            <a:ext cx="3383280" cy="1280160"/>
+          </a:xfrm>
+          <a:prstGeom prst="roundRect">
+            <a:avLst/>
+          </a:prstGeom>
+          <a:solidFill>
+            <a:srgbClr val="059669"/>
+          </a:solidFill>
+          <a:ln>
+            <a:noFill/>
+          </a:ln>
+        </p:spPr>
+        <p:style>
+          <a:lnRef idx="1">
+            <a:schemeClr val="accent1"/>
+          </a:lnRef>
+          <a:fillRef idx="3">
+            <a:schemeClr val="accent1"/>
+          </a:fillRef>
+          <a:effectRef idx="2">
+            <a:schemeClr val="accent1"/>
+          </a:effectRef>
+          <a:fontRef idx="minor">
+            <a:schemeClr val="lt1"/>
+          </a:fontRef>
+        </p:style>
+        <p:txBody>
+          <a:bodyPr rtlCol="0" anchor="ctr"/>
+          <a:lstStyle/>
+          <a:p>
+            <a:pPr algn="ctr"/>
+          </a:p>
+        </p:txBody>
+      </p:sp>
+      <p:sp>
+        <p:nvSpPr>
+          <p:cNvPr id="9" name="TextBox 8"/>
           <p:cNvSpPr txBox="1"/>
           <p:nvPr/>
         </p:nvSpPr>
         <p:spPr>
           <a:xfrm>
-            <a:off x="6583680" y="1691640"/>
-            <a:ext cx="4572000" cy="4297680"/>
+            <a:off x="4572000" y="1554480"/>
+            <a:ext cx="3017520" cy="1097280"/>
           </a:xfrm>
           <a:prstGeom prst="rect">
             <a:avLst/>
@@ -5163,76 +5218,449 @@
           <a:lstStyle/>
           <a:p>
             <a:pPr>
+              <a:defRPr sz="950" b="1">
+                <a:solidFill>
+                  <a:srgbClr val="FFFFFF"/>
+                </a:solidFill>
+              </a:defRPr>
+            </a:pPr>
+            <a:r>
+              <a:t>[ Option 2 ] สำหรับห้องควบคุม SCADA</a:t>
+            </a:r>
+          </a:p>
+          <a:p>
+            <a:pPr>
+              <a:defRPr sz="1350" b="1">
+                <a:solidFill>
+                  <a:srgbClr val="FFFFFF"/>
+                </a:solidFill>
+              </a:defRPr>
+            </a:pPr>
+            <a:r>
+              <a:t>เว็บกลาง 100 จุด + Telegram</a:t>
+            </a:r>
+          </a:p>
+        </p:txBody>
+      </p:sp>
+      <p:sp>
+        <p:nvSpPr>
+          <p:cNvPr id="10" name="TextBox 9"/>
+          <p:cNvSpPr txBox="1"/>
+          <p:nvPr/>
+        </p:nvSpPr>
+        <p:spPr>
+          <a:xfrm>
+            <a:off x="4572000" y="2834640"/>
+            <a:ext cx="3017520" cy="3291840"/>
+          </a:xfrm>
+          <a:prstGeom prst="rect">
+            <a:avLst/>
+          </a:prstGeom>
+          <a:noFill/>
+        </p:spPr>
+        <p:txBody>
+          <a:bodyPr wrap="square">
+            <a:spAutoFit/>
+          </a:bodyPr>
+          <a:lstStyle/>
+          <a:p>
+            <a:pPr>
+              <a:defRPr b="1" sz="1050">
+                <a:solidFill>
+                  <a:srgbClr val="0284C7"/>
+                </a:solidFill>
+              </a:defRPr>
+            </a:pPr>
+            <a:r>
+              <a:t>• แบบซื้อขาด: ฿450,000 (4,500 บ./จุด)</a:t>
+            </a:r>
+          </a:p>
+          <a:p>
+            <a:pPr>
               <a:spcAft>
-                <a:spcPts val="1000"/>
+                <a:spcPts val="600"/>
               </a:spcAft>
-              <a:defRPr sz="1400" b="1">
+              <a:defRPr b="1" sz="1000">
                 <a:solidFill>
                   <a:srgbClr val="059669"/>
                 </a:solidFill>
               </a:defRPr>
             </a:pPr>
             <a:r>
-              <a:t>💬 รูปแบบ LINE OA Alert (การ์ดสถานะยอดนิยม)</a:t>
+              <a:t>• แบบรายปี: ฿340,000 (ปีแรก)</a:t>
+            </a:r>
+            <a:br/>
+            <a:r>
+              <a:t>  (ปีถัดไป ฿240,000 บ./ปี (2,400 บ./จุด/ปี))</a:t>
             </a:r>
           </a:p>
           <a:p>
             <a:pPr>
               <a:spcAft>
-                <a:spcPts val="1000"/>
+                <a:spcPts val="600"/>
               </a:spcAft>
-              <a:defRPr sz="1050">
+              <a:defRPr sz="900" b="1">
                 <a:solidFill>
                   <a:srgbClr val="0F172A"/>
                 </a:solidFill>
               </a:defRPr>
             </a:pPr>
             <a:r>
-              <a:t>🚨 [CRITICAL] คุณภาพน้ำหลุดเกณฑ์</a:t>
+              <a:t>💡 จุดเด่น: ดูภาพรวมและตารางสรุปทั้ง 100 จุดในจอเดียว</a:t>
+            </a:r>
+          </a:p>
+          <a:p>
+            <a:pPr>
+              <a:spcAft>
+                <a:spcPts val="200"/>
+              </a:spcAft>
+              <a:defRPr sz="880">
+                <a:solidFill>
+                  <a:srgbClr val="64748B"/>
+                </a:solidFill>
+              </a:defRPr>
+            </a:pPr>
+            <a:r>
+              <a:t>✓ Centralized Web SCADA Dashboard 100 จุด</a:t>
+            </a:r>
+          </a:p>
+          <a:p>
+            <a:pPr>
+              <a:spcAft>
+                <a:spcPts val="200"/>
+              </a:spcAft>
+              <a:defRPr sz="880">
+                <a:solidFill>
+                  <a:srgbClr val="64748B"/>
+                </a:solidFill>
+              </a:defRPr>
+            </a:pPr>
+            <a:r>
+              <a:t>✓ แผนที่ GIS Map &amp; ตารางสรุปสถานะ Real-Time</a:t>
+            </a:r>
+          </a:p>
+          <a:p>
+            <a:pPr>
+              <a:spcAft>
+                <a:spcPts val="200"/>
+              </a:spcAft>
+              <a:defRPr sz="880">
+                <a:solidFill>
+                  <a:srgbClr val="64748B"/>
+                </a:solidFill>
+              </a:defRPr>
+            </a:pPr>
+            <a:r>
+              <a:t>✓ กราฟวิเคราะห์แนวโน้ม Multi-Axis 100 สถานี</a:t>
+            </a:r>
+          </a:p>
+          <a:p>
+            <a:pPr>
+              <a:spcAft>
+                <a:spcPts val="200"/>
+              </a:spcAft>
+              <a:defRPr sz="880">
+                <a:solidFill>
+                  <a:srgbClr val="64748B"/>
+                </a:solidFill>
+              </a:defRPr>
+            </a:pPr>
+            <a:r>
+              <a:t>✓ แจ้งเตือนผ่าน Telegram Bot ทันทีเมื่อผิดปกติ</a:t>
+            </a:r>
+          </a:p>
+          <a:p>
+            <a:pPr>
+              <a:spcAft>
+                <a:spcPts val="200"/>
+              </a:spcAft>
+              <a:defRPr sz="880">
+                <a:solidFill>
+                  <a:srgbClr val="64748B"/>
+                </a:solidFill>
+              </a:defRPr>
+            </a:pPr>
+            <a:r>
+              <a:t>✓ Export รายงาน Excel / PDF ย้อนหลังได้</a:t>
+            </a:r>
+          </a:p>
+        </p:txBody>
+      </p:sp>
+      <p:sp>
+        <p:nvSpPr>
+          <p:cNvPr id="11" name="Rounded Rectangle 10"/>
+          <p:cNvSpPr/>
+          <p:nvPr/>
+        </p:nvSpPr>
+        <p:spPr>
+          <a:xfrm>
+            <a:off x="8046720" y="1463040"/>
+            <a:ext cx="3383280" cy="4754880"/>
+          </a:xfrm>
+          <a:prstGeom prst="roundRect">
+            <a:avLst/>
+          </a:prstGeom>
+          <a:solidFill>
+            <a:srgbClr val="FFFFFF"/>
+          </a:solidFill>
+          <a:ln w="19050">
+            <a:solidFill>
+              <a:srgbClr val="1E293B"/>
+            </a:solidFill>
+          </a:ln>
+        </p:spPr>
+        <p:style>
+          <a:lnRef idx="1">
+            <a:schemeClr val="accent1"/>
+          </a:lnRef>
+          <a:fillRef idx="3">
+            <a:schemeClr val="accent1"/>
+          </a:fillRef>
+          <a:effectRef idx="2">
+            <a:schemeClr val="accent1"/>
+          </a:effectRef>
+          <a:fontRef idx="minor">
+            <a:schemeClr val="lt1"/>
+          </a:fontRef>
+        </p:style>
+        <p:txBody>
+          <a:bodyPr rtlCol="0" anchor="ctr"/>
+          <a:lstStyle/>
+          <a:p>
+            <a:pPr algn="ctr"/>
+          </a:p>
+        </p:txBody>
+      </p:sp>
+      <p:sp>
+        <p:nvSpPr>
+          <p:cNvPr id="12" name="Rounded Rectangle 11"/>
+          <p:cNvSpPr/>
+          <p:nvPr/>
+        </p:nvSpPr>
+        <p:spPr>
+          <a:xfrm>
+            <a:off x="8046720" y="1463040"/>
+            <a:ext cx="3383280" cy="1280160"/>
+          </a:xfrm>
+          <a:prstGeom prst="roundRect">
+            <a:avLst/>
+          </a:prstGeom>
+          <a:solidFill>
+            <a:srgbClr val="1E293B"/>
+          </a:solidFill>
+          <a:ln>
+            <a:noFill/>
+          </a:ln>
+        </p:spPr>
+        <p:style>
+          <a:lnRef idx="1">
+            <a:schemeClr val="accent1"/>
+          </a:lnRef>
+          <a:fillRef idx="3">
+            <a:schemeClr val="accent1"/>
+          </a:fillRef>
+          <a:effectRef idx="2">
+            <a:schemeClr val="accent1"/>
+          </a:effectRef>
+          <a:fontRef idx="minor">
+            <a:schemeClr val="lt1"/>
+          </a:fontRef>
+        </p:style>
+        <p:txBody>
+          <a:bodyPr rtlCol="0" anchor="ctr"/>
+          <a:lstStyle/>
+          <a:p>
+            <a:pPr algn="ctr"/>
+          </a:p>
+        </p:txBody>
+      </p:sp>
+      <p:sp>
+        <p:nvSpPr>
+          <p:cNvPr id="13" name="TextBox 12"/>
+          <p:cNvSpPr txBox="1"/>
+          <p:nvPr/>
+        </p:nvSpPr>
+        <p:spPr>
+          <a:xfrm>
+            <a:off x="8229600" y="1554480"/>
+            <a:ext cx="3017520" cy="1097280"/>
+          </a:xfrm>
+          <a:prstGeom prst="rect">
+            <a:avLst/>
+          </a:prstGeom>
+          <a:noFill/>
+        </p:spPr>
+        <p:txBody>
+          <a:bodyPr wrap="square">
+            <a:spAutoFit/>
+          </a:bodyPr>
+          <a:lstStyle/>
+          <a:p>
+            <a:pPr>
+              <a:defRPr sz="950" b="1">
+                <a:solidFill>
+                  <a:srgbClr val="2DD4BF"/>
+                </a:solidFill>
+              </a:defRPr>
+            </a:pPr>
+            <a:r>
+              <a:t>[ Option 3 ] ครบวงจร + แจ้งเตือน LINE</a:t>
+            </a:r>
+          </a:p>
+          <a:p>
+            <a:pPr>
+              <a:defRPr sz="1350" b="1">
+                <a:solidFill>
+                  <a:srgbClr val="FFFFFF"/>
+                </a:solidFill>
+              </a:defRPr>
+            </a:pPr>
+            <a:r>
+              <a:t>เว็บกลาง + แอป + LINE OA</a:t>
+            </a:r>
+          </a:p>
+        </p:txBody>
+      </p:sp>
+      <p:sp>
+        <p:nvSpPr>
+          <p:cNvPr id="14" name="TextBox 13"/>
+          <p:cNvSpPr txBox="1"/>
+          <p:nvPr/>
+        </p:nvSpPr>
+        <p:spPr>
+          <a:xfrm>
+            <a:off x="8229600" y="2834640"/>
+            <a:ext cx="3017520" cy="3291840"/>
+          </a:xfrm>
+          <a:prstGeom prst="rect">
+            <a:avLst/>
+          </a:prstGeom>
+          <a:noFill/>
+        </p:spPr>
+        <p:txBody>
+          <a:bodyPr wrap="square">
+            <a:spAutoFit/>
+          </a:bodyPr>
+          <a:lstStyle/>
+          <a:p>
+            <a:pPr>
+              <a:defRPr b="1" sz="1050">
+                <a:solidFill>
+                  <a:srgbClr val="0284C7"/>
+                </a:solidFill>
+              </a:defRPr>
+            </a:pPr>
+            <a:r>
+              <a:t>• แบบซื้อขาด: ฿600,000 (6,000 บ./จุด)</a:t>
+            </a:r>
+          </a:p>
+          <a:p>
+            <a:pPr>
+              <a:spcAft>
+                <a:spcPts val="600"/>
+              </a:spcAft>
+              <a:defRPr b="1" sz="1000">
+                <a:solidFill>
+                  <a:srgbClr val="059669"/>
+                </a:solidFill>
+              </a:defRPr>
+            </a:pPr>
+            <a:r>
+              <a:t>• แบบรายปี: ฿510,000 (ปีแรก)</a:t>
             </a:r>
             <a:br/>
             <a:r>
-              <a:t>📍 สถานี: บ่อจ่ายน้ำเขตเหนือ</a:t>
-            </a:r>
-            <a:br/>
-            <a:r>
-              <a:t>━━━━━━━━━━━━━━━━━━━━</a:t>
-            </a:r>
-            <a:br/>
-            <a:r>
-              <a:t>• คลอรีน: 0.12 mg/L ⚠️ (ต่ำกว่าเกณฑ์)</a:t>
-            </a:r>
-            <a:br/>
-            <a:r>
-              <a:t>• ค่า pH: 6.30 ⚠️ (ต่ำกว่าเกณฑ์)</a:t>
-            </a:r>
-            <a:br/>
-            <a:r>
-              <a:t>• ค่า TDS: 190 ppm (ปกติ)</a:t>
-            </a:r>
-            <a:br/>
-            <a:r>
-              <a:t>• อุณหภูมิ: 29.0 °C (ปกติ)</a:t>
-            </a:r>
-            <a:br/>
-            <a:r>
-              <a:t>━━━━━━━━━━━━━━━━━━━━</a:t>
-            </a:r>
-            <a:br/>
-            <a:r>
-              <a:t>👉 [เปิด Dashboard ดูข้อมูลสด]</a:t>
-            </a:r>
-          </a:p>
-          <a:p>
-            <a:pPr>
-              <a:defRPr sz="950" b="1">
-                <a:solidFill>
-                  <a:srgbClr val="0284C7"/>
-                </a:solidFill>
-              </a:defRPr>
-            </a:pPr>
-            <a:r>
-              <a:t>✔ จุดเด่น: ใช้งานง่ายในกลุ่มไลน์ผู้บริหาร (+฿1,500/จุด เพื่อซับพอร์ตค่า Broadcast LINE)</a:t>
+              <a:t>  (ปีถัดไป ฿360,000 บ./ปี (3,600 บ./จุด/ปี))</a:t>
+            </a:r>
+          </a:p>
+          <a:p>
+            <a:pPr>
+              <a:spcAft>
+                <a:spcPts val="600"/>
+              </a:spcAft>
+              <a:defRPr sz="900" b="1">
+                <a:solidFill>
+                  <a:srgbClr val="0F172A"/>
+                </a:solidFill>
+              </a:defRPr>
+            </a:pPr>
+            <a:r>
+              <a:t>💡 จุดเด่น: LINE มีค่าแพ็กเกจส่งข้อความรายเดือนเพิ่มเติม</a:t>
+            </a:r>
+          </a:p>
+          <a:p>
+            <a:pPr>
+              <a:spcAft>
+                <a:spcPts val="200"/>
+              </a:spcAft>
+              <a:defRPr sz="880">
+                <a:solidFill>
+                  <a:srgbClr val="64748B"/>
+                </a:solidFill>
+              </a:defRPr>
+            </a:pPr>
+            <a:r>
+              <a:t>✓ ได้ทั้ง Web SCADA + Modela App ครบชุด</a:t>
+            </a:r>
+          </a:p>
+          <a:p>
+            <a:pPr>
+              <a:spcAft>
+                <a:spcPts val="200"/>
+              </a:spcAft>
+              <a:defRPr sz="880">
+                <a:solidFill>
+                  <a:srgbClr val="64748B"/>
+                </a:solidFill>
+              </a:defRPr>
+            </a:pPr>
+            <a:r>
+              <a:t>✓ แจ้งเตือนผ่าน LINE Official Account (LINE OA)</a:t>
+            </a:r>
+          </a:p>
+          <a:p>
+            <a:pPr>
+              <a:spcAft>
+                <a:spcPts val="200"/>
+              </a:spcAft>
+              <a:defRPr sz="880">
+                <a:solidFill>
+                  <a:srgbClr val="64748B"/>
+                </a:solidFill>
+              </a:defRPr>
+            </a:pPr>
+            <a:r>
+              <a:t>✓ ส่งการ์ดแจ้งเตือนพร้อมสีสถานะและปุ่มกดดูสด</a:t>
+            </a:r>
+          </a:p>
+          <a:p>
+            <a:pPr>
+              <a:spcAft>
+                <a:spcPts val="200"/>
+              </a:spcAft>
+              <a:defRPr sz="880">
+                <a:solidFill>
+                  <a:srgbClr val="64748B"/>
+                </a:solidFill>
+              </a:defRPr>
+            </a:pPr>
+            <a:r>
+              <a:t>✓ +฿1,500/จุด เพื่อซัพพอร์ตค่า Broadcast ของ LINE</a:t>
+            </a:r>
+          </a:p>
+          <a:p>
+            <a:pPr>
+              <a:spcAft>
+                <a:spcPts val="200"/>
+              </a:spcAft>
+              <a:defRPr sz="880">
+                <a:solidFill>
+                  <a:srgbClr val="64748B"/>
+                </a:solidFill>
+              </a:defRPr>
+            </a:pPr>
+            <a:r>
+              <a:t>✓ สัญญาบริการระดับพรีเมียม 24/7</a:t>
             </a:r>
           </a:p>
         </p:txBody>
@@ -5296,7 +5724,7 @@
               </a:defRPr>
             </a:pPr>
             <a:r>
-              <a:t>โครงการระบบวัดคุณภาพน้ำอัจฉริยะ 100 จุด (NCT WATER NEXUS)</a:t>
+              <a:t>โครงการระบบตรวจวัดคุณภาพน้ำ 100 ชุด (NCT WATER NEXUS)</a:t>
             </a:r>
           </a:p>
           <a:p>
@@ -5308,7 +5736,7 @@
               </a:defRPr>
             </a:pPr>
             <a:r>
-              <a:t>วิเคราะห์จุดแข็ง-จุดเสี่ยงโมเดลราคา (Strategic Margin Analysis)</a:t>
+              <a:t>4. ตัวอย่างข้อความแจ้งเตือนเมื่อพบค่าผิดปกติ (Telegram vs LINE OA)</a:t>
             </a:r>
           </a:p>
         </p:txBody>
@@ -5322,6 +5750,152 @@
         <p:spPr>
           <a:xfrm>
             <a:off x="731520" y="1463040"/>
+            <a:ext cx="5120640" cy="4754880"/>
+          </a:xfrm>
+          <a:prstGeom prst="roundRect">
+            <a:avLst/>
+          </a:prstGeom>
+          <a:solidFill>
+            <a:srgbClr val="FFFFFF"/>
+          </a:solidFill>
+          <a:ln w="19050">
+            <a:solidFill>
+              <a:srgbClr val="0284C7"/>
+            </a:solidFill>
+          </a:ln>
+        </p:spPr>
+        <p:style>
+          <a:lnRef idx="1">
+            <a:schemeClr val="accent1"/>
+          </a:lnRef>
+          <a:fillRef idx="3">
+            <a:schemeClr val="accent1"/>
+          </a:fillRef>
+          <a:effectRef idx="2">
+            <a:schemeClr val="accent1"/>
+          </a:effectRef>
+          <a:fontRef idx="minor">
+            <a:schemeClr val="lt1"/>
+          </a:fontRef>
+        </p:style>
+        <p:txBody>
+          <a:bodyPr rtlCol="0" anchor="ctr"/>
+          <a:lstStyle/>
+          <a:p>
+            <a:pPr algn="ctr"/>
+          </a:p>
+        </p:txBody>
+      </p:sp>
+      <p:sp>
+        <p:nvSpPr>
+          <p:cNvPr id="4" name="TextBox 3"/>
+          <p:cNvSpPr txBox="1"/>
+          <p:nvPr/>
+        </p:nvSpPr>
+        <p:spPr>
+          <a:xfrm>
+            <a:off x="1005840" y="1691640"/>
+            <a:ext cx="4572000" cy="4297680"/>
+          </a:xfrm>
+          <a:prstGeom prst="rect">
+            <a:avLst/>
+          </a:prstGeom>
+          <a:noFill/>
+        </p:spPr>
+        <p:txBody>
+          <a:bodyPr wrap="square">
+            <a:spAutoFit/>
+          </a:bodyPr>
+          <a:lstStyle/>
+          <a:p>
+            <a:pPr>
+              <a:spcAft>
+                <a:spcPts val="1000"/>
+              </a:spcAft>
+              <a:defRPr sz="1400" b="1">
+                <a:solidFill>
+                  <a:srgbClr val="0284C7"/>
+                </a:solidFill>
+              </a:defRPr>
+            </a:pPr>
+            <a:r>
+              <a:t>✈️ รูปแบบ Telegram Alert (ส่งฟรี &amp; ไวมาก)</a:t>
+            </a:r>
+          </a:p>
+          <a:p>
+            <a:pPr>
+              <a:spcAft>
+                <a:spcPts val="1000"/>
+              </a:spcAft>
+              <a:defRPr sz="1050">
+                <a:solidFill>
+                  <a:srgbClr val="0F172A"/>
+                </a:solidFill>
+              </a:defRPr>
+            </a:pPr>
+            <a:r>
+              <a:t>🚨 แจ้งเตือนคุณภาพน้ำผิดปกติ</a:t>
+            </a:r>
+            <a:br/>
+            <a:r>
+              <a:t>📍 จุดติดตั้ง: บ่อพักน้ำ #04 (ตู้ 1004)</a:t>
+            </a:r>
+            <a:br/>
+            <a:r>
+              <a:t>⏰ เวลา: 14:15 น.</a:t>
+            </a:r>
+            <a:br/>
+            <a:r>
+              <a:t>━━━━━━━━━━━━━━━━━━━━</a:t>
+            </a:r>
+            <a:br/>
+            <a:r>
+              <a:t>• คลอรีน: 0.15 mg/L ❌ (เกณฑ์ 0.20-2.00)</a:t>
+            </a:r>
+            <a:br/>
+            <a:r>
+              <a:t>• pH: 6.4 ❌ (เกณฑ์ 6.5-8.5)</a:t>
+            </a:r>
+            <a:br/>
+            <a:r>
+              <a:t>• TDS: 185 ppm (ปกติ)</a:t>
+            </a:r>
+            <a:br/>
+            <a:r>
+              <a:t>• อุณหภูมิ: 28.5 °C (ปกติ)</a:t>
+            </a:r>
+            <a:br/>
+            <a:r>
+              <a:t>━━━━━━━━━━━━━━━━━━━━</a:t>
+            </a:r>
+            <a:br/>
+            <a:r>
+              <a:t>🔗 ดูกราฟย้อนหลัง: https://water-iot.com/node/1004</a:t>
+            </a:r>
+          </a:p>
+          <a:p>
+            <a:pPr>
+              <a:defRPr sz="950" b="1">
+                <a:solidFill>
+                  <a:srgbClr val="059669"/>
+                </a:solidFill>
+              </a:defRPr>
+            </a:pPr>
+            <a:r>
+              <a:t>✔ จุดเด่น: ส่งฟรี 100% ไม่มีค่า Broadcast รายเดือน กำไรเต็มเม็ดเต็มหน่วย</a:t>
+            </a:r>
+          </a:p>
+        </p:txBody>
+      </p:sp>
+      <p:sp>
+        <p:nvSpPr>
+          <p:cNvPr id="5" name="Rounded Rectangle 4"/>
+          <p:cNvSpPr/>
+          <p:nvPr/>
+        </p:nvSpPr>
+        <p:spPr>
+          <a:xfrm>
+            <a:off x="6309360" y="1463040"/>
             <a:ext cx="5120640" cy="4754880"/>
           </a:xfrm>
           <a:prstGeom prst="roundRect">
@@ -5360,13 +5934,13 @@
       </p:sp>
       <p:sp>
         <p:nvSpPr>
-          <p:cNvPr id="4" name="TextBox 3"/>
+          <p:cNvPr id="6" name="TextBox 5"/>
           <p:cNvSpPr txBox="1"/>
           <p:nvPr/>
         </p:nvSpPr>
         <p:spPr>
           <a:xfrm>
-            <a:off x="1005840" y="1691640"/>
+            <a:off x="6583680" y="1691640"/>
             <a:ext cx="4572000" cy="4297680"/>
           </a:xfrm>
           <a:prstGeom prst="rect">
@@ -5384,259 +5958,73 @@
               <a:spcAft>
                 <a:spcPts val="1000"/>
               </a:spcAft>
-              <a:defRPr sz="1350" b="1">
+              <a:defRPr sz="1400" b="1">
                 <a:solidFill>
                   <a:srgbClr val="059669"/>
                 </a:solidFill>
               </a:defRPr>
             </a:pPr>
             <a:r>
-              <a:t>🔄 ฝั่งรายปี (ดีมาก แนะนำให้ผลักดันลูกค้ารูปแบบนี้)</a:t>
-            </a:r>
-          </a:p>
-          <a:p>
-            <a:pPr>
-              <a:defRPr b="1" sz="1100">
-                <a:solidFill>
-                  <a:srgbClr val="0F172A"/>
-                </a:solidFill>
-              </a:defRPr>
-            </a:pPr>
-            <a:r>
-              <a:t>• ตัวเลข 1,200 – 3,600 บาท/จุด/ปี:</a:t>
-            </a:r>
-          </a:p>
-          <a:p>
-            <a:pPr>
-              <a:spcAft>
-                <a:spcPts val="600"/>
-              </a:spcAft>
-              <a:defRPr sz="1000">
-                <a:solidFill>
-                  <a:srgbClr val="64748B"/>
-                </a:solidFill>
-              </a:defRPr>
-            </a:pPr>
-            <a:r>
-              <a:t>  ตกเดือนละ 100–300 บาท/ตู้ เป็นราคาที่ลูกค้าองค์กร/โรงงาน/เทศบาล จ่ายได้ง่ายมาก</a:t>
-            </a:r>
-          </a:p>
-          <a:p>
-            <a:pPr>
-              <a:defRPr b="1" sz="1100">
-                <a:solidFill>
-                  <a:srgbClr val="0F172A"/>
-                </a:solidFill>
-              </a:defRPr>
-            </a:pPr>
-            <a:r>
-              <a:t>• Recurring Income ก้อนโตทุกปี:</a:t>
-            </a:r>
-          </a:p>
-          <a:p>
-            <a:pPr>
-              <a:spcAft>
-                <a:spcPts val="600"/>
-              </a:spcAft>
-              <a:defRPr sz="1000">
-                <a:solidFill>
-                  <a:srgbClr val="64748B"/>
-                </a:solidFill>
-              </a:defRPr>
-            </a:pPr>
-            <a:r>
-              <a:t>  มีรายรับสม่ำเสมอ 120,000 – 360,000 บาททุกปี ไว้เป็นค่า Cloud Server, ค่าซ่อมบำรุง และกำไรต่อเนื่อง</a:t>
-            </a:r>
-          </a:p>
-          <a:p>
-            <a:pPr>
-              <a:defRPr b="1" sz="1100">
-                <a:solidFill>
-                  <a:srgbClr val="0F172A"/>
-                </a:solidFill>
-              </a:defRPr>
-            </a:pPr>
-            <a:r>
-              <a:t>• ล็อกฐานลูกค้าได้ยาวนาน:</a:t>
-            </a:r>
-          </a:p>
-          <a:p>
-            <a:pPr>
-              <a:spcAft>
-                <a:spcPts val="600"/>
-              </a:spcAft>
-              <a:defRPr sz="1000">
-                <a:solidFill>
-                  <a:srgbClr val="64748B"/>
-                </a:solidFill>
-              </a:defRPr>
-            </a:pPr>
-            <a:r>
-              <a:t>  ลูกค้าไม่ต้องกังวลเรื่องการดูแล เราดูแลซ่อมบำรุงและอัปเดตระบบให้ 100%</a:t>
-            </a:r>
-          </a:p>
-        </p:txBody>
-      </p:sp>
-      <p:sp>
-        <p:nvSpPr>
-          <p:cNvPr id="5" name="Rounded Rectangle 4"/>
-          <p:cNvSpPr/>
-          <p:nvPr/>
-        </p:nvSpPr>
-        <p:spPr>
-          <a:xfrm>
-            <a:off x="6309360" y="1463040"/>
-            <a:ext cx="5120640" cy="4754880"/>
-          </a:xfrm>
-          <a:prstGeom prst="roundRect">
-            <a:avLst/>
-          </a:prstGeom>
-          <a:solidFill>
-            <a:srgbClr val="FFFFFF"/>
-          </a:solidFill>
-          <a:ln w="19050">
-            <a:solidFill>
-              <a:srgbClr val="0284C7"/>
-            </a:solidFill>
-          </a:ln>
-        </p:spPr>
-        <p:style>
-          <a:lnRef idx="1">
-            <a:schemeClr val="accent1"/>
-          </a:lnRef>
-          <a:fillRef idx="3">
-            <a:schemeClr val="accent1"/>
-          </a:fillRef>
-          <a:effectRef idx="2">
-            <a:schemeClr val="accent1"/>
-          </a:effectRef>
-          <a:fontRef idx="minor">
-            <a:schemeClr val="lt1"/>
-          </a:fontRef>
-        </p:style>
-        <p:txBody>
-          <a:bodyPr rtlCol="0" anchor="ctr"/>
-          <a:lstStyle/>
-          <a:p>
-            <a:pPr algn="ctr"/>
-          </a:p>
-        </p:txBody>
-      </p:sp>
-      <p:sp>
-        <p:nvSpPr>
-          <p:cNvPr id="6" name="TextBox 5"/>
-          <p:cNvSpPr txBox="1"/>
-          <p:nvPr/>
-        </p:nvSpPr>
-        <p:spPr>
-          <a:xfrm>
-            <a:off x="6583680" y="1691640"/>
-            <a:ext cx="4572000" cy="4297680"/>
-          </a:xfrm>
-          <a:prstGeom prst="rect">
-            <a:avLst/>
-          </a:prstGeom>
-          <a:noFill/>
-        </p:spPr>
-        <p:txBody>
-          <a:bodyPr wrap="square">
-            <a:spAutoFit/>
-          </a:bodyPr>
-          <a:lstStyle/>
+              <a:t>💬 รูปแบบ LINE OA Alert (การ์ดสถานะยอดนิยม)</a:t>
+            </a:r>
+          </a:p>
           <a:p>
             <a:pPr>
               <a:spcAft>
                 <a:spcPts val="1000"/>
               </a:spcAft>
-              <a:defRPr sz="1350" b="1">
+              <a:defRPr sz="1050">
+                <a:solidFill>
+                  <a:srgbClr val="0F172A"/>
+                </a:solidFill>
+              </a:defRPr>
+            </a:pPr>
+            <a:r>
+              <a:t>🚨 [CRITICAL] คุณภาพน้ำหลุดเกณฑ์</a:t>
+            </a:r>
+            <a:br/>
+            <a:r>
+              <a:t>📍 สถานี: บ่อจ่ายน้ำเขตเหนือ</a:t>
+            </a:r>
+            <a:br/>
+            <a:r>
+              <a:t>━━━━━━━━━━━━━━━━━━━━</a:t>
+            </a:r>
+            <a:br/>
+            <a:r>
+              <a:t>• คลอรีน: 0.12 mg/L ⚠️ (ต่ำกว่าเกณฑ์)</a:t>
+            </a:r>
+            <a:br/>
+            <a:r>
+              <a:t>• ค่า pH: 6.30 ⚠️ (ต่ำกว่าเกณฑ์)</a:t>
+            </a:r>
+            <a:br/>
+            <a:r>
+              <a:t>• ค่า TDS: 190 ppm (ปกติ)</a:t>
+            </a:r>
+            <a:br/>
+            <a:r>
+              <a:t>• อุณหภูมิ: 29.0 °C (ปกติ)</a:t>
+            </a:r>
+            <a:br/>
+            <a:r>
+              <a:t>━━━━━━━━━━━━━━━━━━━━</a:t>
+            </a:r>
+            <a:br/>
+            <a:r>
+              <a:t>👉 [เปิด Dashboard ดูข้อมูลสด]</a:t>
+            </a:r>
+          </a:p>
+          <a:p>
+            <a:pPr>
+              <a:defRPr sz="950" b="1">
                 <a:solidFill>
                   <a:srgbClr val="0284C7"/>
                 </a:solidFill>
               </a:defRPr>
             </a:pPr>
             <a:r>
-              <a:t>🏷️ ฝั่งซื้อขาด (ตัวเลขผ่าน แต่ต้องล็อคขอบเขตให้ชัด)</a:t>
-            </a:r>
-          </a:p>
-          <a:p>
-            <a:pPr>
-              <a:defRPr b="1" sz="1100">
-                <a:solidFill>
-                  <a:srgbClr val="0F172A"/>
-                </a:solidFill>
-              </a:defRPr>
-            </a:pPr>
-            <a:r>
-              <a:t>• ราคาเฉลี่ย 2,500 – 6,000 บาท/จุด:</a:t>
-            </a:r>
-          </a:p>
-          <a:p>
-            <a:pPr>
-              <a:spcAft>
-                <a:spcPts val="600"/>
-              </a:spcAft>
-              <a:defRPr sz="1000">
-                <a:solidFill>
-                  <a:srgbClr val="64748B"/>
-                </a:solidFill>
-              </a:defRPr>
-            </a:pPr>
-            <a:r>
-              <a:t>  ยอดรวม 2.5 – 6 แสนบาท ลูกค้าไม่รู้สึกว่าแพงเกินไปสำหรับระบบ 100 จุด</a:t>
-            </a:r>
-          </a:p>
-          <a:p>
-            <a:pPr>
-              <a:defRPr b="1" sz="1100">
-                <a:solidFill>
-                  <a:srgbClr val="0F172A"/>
-                </a:solidFill>
-              </a:defRPr>
-            </a:pPr>
-            <a:r>
-              <a:t>• จุดที่ต้องระวัง:</a:t>
-            </a:r>
-          </a:p>
-          <a:p>
-            <a:pPr>
-              <a:spcAft>
-                <a:spcPts val="600"/>
-              </a:spcAft>
-              <a:defRPr sz="1000">
-                <a:solidFill>
-                  <a:srgbClr val="64748B"/>
-                </a:solidFill>
-              </a:defRPr>
-            </a:pPr>
-            <a:r>
-              <a:t>  ซื้อขาดแปลว่าเราต้องแบกค่า Host/Database เองในอนาคต หรือต้องส่งมอบ Source Code ให้ลูกค้ารัน Server เอง</a:t>
-            </a:r>
-          </a:p>
-          <a:p>
-            <a:pPr>
-              <a:defRPr b="1" sz="1100">
-                <a:solidFill>
-                  <a:srgbClr val="0F172A"/>
-                </a:solidFill>
-              </a:defRPr>
-            </a:pPr>
-            <a:r>
-              <a:t>• เงื่อนไขสัญญาป้องกันต้นทุน (MA):</a:t>
-            </a:r>
-          </a:p>
-          <a:p>
-            <a:pPr>
-              <a:spcAft>
-                <a:spcPts val="600"/>
-              </a:spcAft>
-              <a:defRPr sz="1000">
-                <a:solidFill>
-                  <a:srgbClr val="64748B"/>
-                </a:solidFill>
-              </a:defRPr>
-            </a:pPr>
-            <a:r>
-              <a:t>  ควรกำหนดในสัญญาว่า ฟรี Support/แก้บั๊ก 1 ปีแรกเท่านั้น ปีถัดไปคิดสัญญา MA แยก 10–15% ต่อปี</a:t>
+              <a:t>✔ จุดเด่น: ใช้งานง่ายในกลุ่มไลน์ผู้บริหาร (+฿1,500/จุด เพื่อซับพอร์ตค่า Broadcast LINE)</a:t>
             </a:r>
           </a:p>
         </p:txBody>
@@ -5700,7 +6088,7 @@
               </a:defRPr>
             </a:pPr>
             <a:r>
-              <a:t>โครงการระบบวัดคุณภาพน้ำอัจฉริยะ 100 จุด (NCT WATER NEXUS)</a:t>
+              <a:t>โครงการระบบตรวจวัดคุณภาพน้ำ 100 ชุด (NCT WATER NEXUS)</a:t>
             </a:r>
           </a:p>
           <a:p>
@@ -5712,7 +6100,7 @@
               </a:defRPr>
             </a:pPr>
             <a:r>
-              <a:t>ระบบแดชบอร์ด SCADA และ Mobile Companion App (Software Platform)</a:t>
+              <a:t>5. วิเคราะห์จุดแข็ง-จุดเสี่ยงโมเดลราคา (Strategic Margin Analysis)</a:t>
             </a:r>
           </a:p>
         </p:txBody>
@@ -5736,7 +6124,7 @@
           </a:solidFill>
           <a:ln w="19050">
             <a:solidFill>
-              <a:srgbClr val="CBD5E1"/>
+              <a:srgbClr val="059669"/>
             </a:solidFill>
           </a:ln>
         </p:spPr>
@@ -5788,14 +6176,14 @@
               <a:spcAft>
                 <a:spcPts val="1000"/>
               </a:spcAft>
-              <a:defRPr sz="1400" b="1">
-                <a:solidFill>
-                  <a:srgbClr val="0284C7"/>
-                </a:solidFill>
-              </a:defRPr>
-            </a:pPr>
-            <a:r>
-              <a:t>💻 1. Centralized SCADA Widescreen View</a:t>
+              <a:defRPr sz="1350" b="1">
+                <a:solidFill>
+                  <a:srgbClr val="059669"/>
+                </a:solidFill>
+              </a:defRPr>
+            </a:pPr>
+            <a:r>
+              <a:t>🔄 ฝั่งรายปี (ดีมาก แนะนำให้ผลักดันลูกค้ารูปแบบนี้)</a:t>
             </a:r>
           </a:p>
           <a:p>
@@ -5807,7 +6195,7 @@
               </a:defRPr>
             </a:pPr>
             <a:r>
-              <a:t>• GIS Map &amp; 100-Node Grid Overview:</a:t>
+              <a:t>• ตัวเลข 1,200 – 3,600 บาท/จุด/ปี:</a:t>
             </a:r>
           </a:p>
           <a:p>
@@ -5822,7 +6210,7 @@
               </a:defRPr>
             </a:pPr>
             <a:r>
-              <a:t>  แสดงตำแหน่งและสถานะของทั้ง 100 สถานีบนแผนที่ GIS ตรวจเช็คจุดผิดปกติได้ทันที</a:t>
+              <a:t>  ตกเดือนละ 100–300 บาท/ตู้ เป็นราคาที่ลูกค้าองค์กร/โรงงาน/เทศบาล จ่ายได้ง่ายมาก</a:t>
             </a:r>
           </a:p>
           <a:p>
@@ -5834,7 +6222,7 @@
               </a:defRPr>
             </a:pPr>
             <a:r>
-              <a:t>• High-Frequency Telemetry Trends:</a:t>
+              <a:t>• Recurring Income ก้อนโตทุกปี:</a:t>
             </a:r>
           </a:p>
           <a:p>
@@ -5849,7 +6237,7 @@
               </a:defRPr>
             </a:pPr>
             <a:r>
-              <a:t>  กราฟ Real-Time Dynamic Charts วิเคราะห์แนวโน้มคุณภาพน้ำของแต่ละสถานี 24 ชม.</a:t>
+              <a:t>  มีรายรับสม่ำเสมอ 120,000 – 360,000 บาททุกปี ไว้เป็นค่า Cloud Server, ค่าซ่อมบำรุง และกำไรต่อเนื่อง</a:t>
             </a:r>
           </a:p>
           <a:p>
@@ -5861,7 +6249,7 @@
               </a:defRPr>
             </a:pPr>
             <a:r>
-              <a:t>• Zone Alert Management:</a:t>
+              <a:t>• ล็อกฐานลูกค้าได้ยาวนาน:</a:t>
             </a:r>
           </a:p>
           <a:p>
@@ -5876,34 +6264,7 @@
               </a:defRPr>
             </a:pPr>
             <a:r>
-              <a:t>  ระบบแยกกลุ่มโซนการแจ้งเตือนตามพื้นที่ (เช่น โซนอาคาร A, โซนโรงงาน 1-4)</a:t>
-            </a:r>
-          </a:p>
-          <a:p>
-            <a:pPr>
-              <a:defRPr b="1" sz="1100">
-                <a:solidFill>
-                  <a:srgbClr val="0F172A"/>
-                </a:solidFill>
-              </a:defRPr>
-            </a:pPr>
-            <a:r>
-              <a:t>• Automated Compliance Reports:</a:t>
-            </a:r>
-          </a:p>
-          <a:p>
-            <a:pPr>
-              <a:spcAft>
-                <a:spcPts val="600"/>
-              </a:spcAft>
-              <a:defRPr sz="1000">
-                <a:solidFill>
-                  <a:srgbClr val="64748B"/>
-                </a:solidFill>
-              </a:defRPr>
-            </a:pPr>
-            <a:r>
-              <a:t>  สร้างรายงานสรุปเปรียบเทียบ 100 จุดอัตโนมัติ ส่งออกเป็น Excel / PDF ในคลิกเดียว</a:t>
+              <a:t>  ลูกค้าไม่ต้องกังวลเรื่องการดูแล เราดูแลซ่อมบำรุงและอัปเดตระบบให้ 100%</a:t>
             </a:r>
           </a:p>
         </p:txBody>
@@ -5927,7 +6288,7 @@
           </a:solidFill>
           <a:ln w="19050">
             <a:solidFill>
-              <a:srgbClr val="CBD5E1"/>
+              <a:srgbClr val="0284C7"/>
             </a:solidFill>
           </a:ln>
         </p:spPr>
@@ -5979,14 +6340,14 @@
               <a:spcAft>
                 <a:spcPts val="1000"/>
               </a:spcAft>
-              <a:defRPr sz="1400" b="1">
-                <a:solidFill>
-                  <a:srgbClr val="059669"/>
-                </a:solidFill>
-              </a:defRPr>
-            </a:pPr>
-            <a:r>
-              <a:t>📱 2. Multi-Station Mobile Companion App</a:t>
+              <a:defRPr sz="1350" b="1">
+                <a:solidFill>
+                  <a:srgbClr val="0284C7"/>
+                </a:solidFill>
+              </a:defRPr>
+            </a:pPr>
+            <a:r>
+              <a:t>🏷️ ฝั่งซื้อขาด (ตัวเลขผ่าน แต่ต้องล็อคขอบเขตให้ชัด)</a:t>
             </a:r>
           </a:p>
           <a:p>
@@ -5998,7 +6359,7 @@
               </a:defRPr>
             </a:pPr>
             <a:r>
-              <a:t>• 100-Device Hub Selector:</a:t>
+              <a:t>• ราคาเฉลี่ย 2,500 – 6,000 บาท/จุด:</a:t>
             </a:r>
           </a:p>
           <a:p>
@@ -6013,7 +6374,7 @@
               </a:defRPr>
             </a:pPr>
             <a:r>
-              <a:t>  สลับดูข้อมูลสถานีตรวจวัดน้ำทั้ง 100 จุดได้ง่ายดายในแอปเดียว (ค้นหาตามชื่อ/โซน)</a:t>
+              <a:t>  ยอดรวม 2.5 – 6 แสนบาท ลูกค้าไม่รู้สึกว่าแพงเกินไปสำหรับระบบ 100 จุด</a:t>
             </a:r>
           </a:p>
           <a:p>
@@ -6025,7 +6386,7 @@
               </a:defRPr>
             </a:pPr>
             <a:r>
-              <a:t>• Instant Push Notification &amp; Line Alert:</a:t>
+              <a:t>• จุดที่ต้องระวัง:</a:t>
             </a:r>
           </a:p>
           <a:p>
@@ -6040,7 +6401,7 @@
               </a:defRPr>
             </a:pPr>
             <a:r>
-              <a:t>  แจ้งเตือนข้อความฉุกเฉินทันทีเมื่อมีจุดใดจุดหนึ่งใน 100 จุดหลุดเกณฑ์มาตรฐาน</a:t>
+              <a:t>  ซื้อขาดแปลว่าคุณต้องแบกค่า Host/Database เองในอนาคต หรือต้องส่งมอบ Source Code ให้ลูกค้ารัน Server เอง</a:t>
             </a:r>
           </a:p>
           <a:p>
@@ -6052,7 +6413,7 @@
               </a:defRPr>
             </a:pPr>
             <a:r>
-              <a:t>• Color-Coded Status Cards:</a:t>
+              <a:t>• เงื่อนไขสัญญาป้องกันต้นทุน (MA):</a:t>
             </a:r>
           </a:p>
           <a:p>
@@ -6067,34 +6428,7 @@
               </a:defRPr>
             </a:pPr>
             <a:r>
-              <a:t>  แสดงสถานะด้วยสีเขียว/เหลือง/แดง ชัดเจน รู้ทันทีว่าจุดไหนปกติดีหรือต้องตรวจเช็ค</a:t>
-            </a:r>
-          </a:p>
-          <a:p>
-            <a:pPr>
-              <a:defRPr b="1" sz="1100">
-                <a:solidFill>
-                  <a:srgbClr val="0F172A"/>
-                </a:solidFill>
-              </a:defRPr>
-            </a:pPr>
-            <a:r>
-              <a:t>• Offline Battery &amp; Link Monitor:</a:t>
-            </a:r>
-          </a:p>
-          <a:p>
-            <a:pPr>
-              <a:spcAft>
-                <a:spcPts val="600"/>
-              </a:spcAft>
-              <a:defRPr sz="1000">
-                <a:solidFill>
-                  <a:srgbClr val="64748B"/>
-                </a:solidFill>
-              </a:defRPr>
-            </a:pPr>
-            <a:r>
-              <a:t>  ตรวจสอบสัญญาณ WiFi/4G และระดับแบตเตอรี่สำรองของทุกตู้ได้จากระยะไกล</a:t>
+              <a:t>  ควรกำหนดในสัญญาว่า ฟรี Support/แก้บั๊ก 1 ปีแรกเท่านั้น ปีถัดไปคิดสัญญา MA แยก 10–15% ต่อปี</a:t>
             </a:r>
           </a:p>
         </p:txBody>
@@ -6158,7 +6492,7 @@
               </a:defRPr>
             </a:pPr>
             <a:r>
-              <a:t>โครงการระบบวัดคุณภาพน้ำอัจฉริยะ 100 จุด (NCT WATER NEXUS)</a:t>
+              <a:t>โครงการระบบตรวจวัดคุณภาพน้ำ 100 ชุด (NCT WATER NEXUS)</a:t>
             </a:r>
           </a:p>
           <a:p>
@@ -6170,7 +6504,7 @@
               </a:defRPr>
             </a:pPr>
             <a:r>
-              <a:t>ข้อกำหนดสัญญาและการบริการหลังการขาย (SLA &amp; MA Agreement)</a:t>
+              <a:t>6. ระบบแดชบอร์ด SCADA และ Mobile Companion App (Software Platform)</a:t>
             </a:r>
           </a:p>
         </p:txBody>
@@ -6194,7 +6528,7 @@
           </a:solidFill>
           <a:ln w="19050">
             <a:solidFill>
-              <a:srgbClr val="059669"/>
+              <a:srgbClr val="CBD5E1"/>
             </a:solidFill>
           </a:ln>
         </p:spPr>
@@ -6222,57 +6556,14 @@
       </p:sp>
       <p:sp>
         <p:nvSpPr>
-          <p:cNvPr id="4" name="Rounded Rectangle 3"/>
-          <p:cNvSpPr/>
-          <p:nvPr/>
-        </p:nvSpPr>
-        <p:spPr>
-          <a:xfrm>
-            <a:off x="731520" y="1463040"/>
-            <a:ext cx="5120640" cy="1188720"/>
-          </a:xfrm>
-          <a:prstGeom prst="roundRect">
-            <a:avLst/>
-          </a:prstGeom>
-          <a:solidFill>
-            <a:srgbClr val="059669"/>
-          </a:solidFill>
-          <a:ln>
-            <a:noFill/>
-          </a:ln>
-        </p:spPr>
-        <p:style>
-          <a:lnRef idx="1">
-            <a:schemeClr val="accent1"/>
-          </a:lnRef>
-          <a:fillRef idx="3">
-            <a:schemeClr val="accent1"/>
-          </a:fillRef>
-          <a:effectRef idx="2">
-            <a:schemeClr val="accent1"/>
-          </a:effectRef>
-          <a:fontRef idx="minor">
-            <a:schemeClr val="lt1"/>
-          </a:fontRef>
-        </p:style>
-        <p:txBody>
-          <a:bodyPr rtlCol="0" anchor="ctr"/>
-          <a:lstStyle/>
-          <a:p>
-            <a:pPr algn="ctr"/>
-          </a:p>
-        </p:txBody>
-      </p:sp>
-      <p:sp>
-        <p:nvSpPr>
-          <p:cNvPr id="5" name="TextBox 4"/>
+          <p:cNvPr id="4" name="TextBox 3"/>
           <p:cNvSpPr txBox="1"/>
           <p:nvPr/>
         </p:nvSpPr>
         <p:spPr>
           <a:xfrm>
-            <a:off x="914400" y="1554480"/>
-            <a:ext cx="4754880" cy="1005840"/>
+            <a:off x="1005840" y="1691640"/>
+            <a:ext cx="4572000" cy="4297680"/>
           </a:xfrm>
           <a:prstGeom prst="rect">
             <a:avLst/>
@@ -6286,86 +6577,138 @@
           <a:lstStyle/>
           <a:p>
             <a:pPr>
-              <a:defRPr sz="950" b="1">
-                <a:solidFill>
-                  <a:srgbClr val="FFFFFF"/>
-                </a:solidFill>
-              </a:defRPr>
-            </a:pPr>
-            <a:r>
-              <a:t>รวมทุกอย่างครบวงจร (ALL-INCLUSIVE)</a:t>
-            </a:r>
-          </a:p>
-          <a:p>
-            <a:pPr>
+              <a:spcAft>
+                <a:spcPts val="1000"/>
+              </a:spcAft>
               <a:defRPr sz="1400" b="1">
                 <a:solidFill>
-                  <a:srgbClr val="FFFFFF"/>
-                </a:solidFill>
-              </a:defRPr>
-            </a:pPr>
-            <a:r>
-              <a:t>สัญญาแบบรายปี (Subscription Model)</a:t>
-            </a:r>
-          </a:p>
-        </p:txBody>
-      </p:sp>
-      <p:sp>
-        <p:nvSpPr>
-          <p:cNvPr id="6" name="TextBox 5"/>
-          <p:cNvSpPr txBox="1"/>
-          <p:nvPr/>
-        </p:nvSpPr>
-        <p:spPr>
-          <a:xfrm>
-            <a:off x="914400" y="2834640"/>
-            <a:ext cx="4754880" cy="3200400"/>
-          </a:xfrm>
-          <a:prstGeom prst="rect">
-            <a:avLst/>
-          </a:prstGeom>
-          <a:noFill/>
-        </p:spPr>
-        <p:txBody>
-          <a:bodyPr wrap="square">
-            <a:spAutoFit/>
-          </a:bodyPr>
-          <a:lstStyle/>
-          <a:p>
-            <a:pPr>
-              <a:defRPr sz="1100">
+                  <a:srgbClr val="0284C7"/>
+                </a:solidFill>
+              </a:defRPr>
+            </a:pPr>
+            <a:r>
+              <a:t>💻 1. Centralized SCADA Widescreen View</a:t>
+            </a:r>
+          </a:p>
+          <a:p>
+            <a:pPr>
+              <a:defRPr b="1" sz="1100">
                 <a:solidFill>
                   <a:srgbClr val="0F172A"/>
                 </a:solidFill>
               </a:defRPr>
             </a:pPr>
             <a:r>
-              <a:t>• รวมค่า Cloud Server, Database &amp; ซิม 4G ตลอดสัญญา</a:t>
-            </a:r>
-            <a:br/>
-            <a:r>
-              <a:t>• ฟรีบริการแก้บั๊ก อัปเดตเฟิร์มแวร์ และปรับปรุงซอฟต์แวร์ใหม่ตลอดเวลา</a:t>
-            </a:r>
-            <a:br/>
-            <a:r>
-              <a:t>• ทีมวิศวกร On-site Support และสอบเทียบ Calibrate ตามรอบ</a:t>
-            </a:r>
-            <a:br/>
-            <a:r>
-              <a:t>• สร้าง Recurring Income ฿120,000 – ฿360,000 / ปี อย่างมั่นคง</a:t>
-            </a:r>
-          </a:p>
-        </p:txBody>
-      </p:sp>
-      <p:sp>
-        <p:nvSpPr>
-          <p:cNvPr id="7" name="Rounded Rectangle 6"/>
+              <a:t>• GIS Map &amp; 100-Node Grid Overview:</a:t>
+            </a:r>
+          </a:p>
+          <a:p>
+            <a:pPr>
+              <a:spcAft>
+                <a:spcPts val="600"/>
+              </a:spcAft>
+              <a:defRPr sz="1000">
+                <a:solidFill>
+                  <a:srgbClr val="64748B"/>
+                </a:solidFill>
+              </a:defRPr>
+            </a:pPr>
+            <a:r>
+              <a:t>  แสดงตำแหน่งและสถานะของทั้ง 100 สถานีบนแผนที่ GIS ตรวจเช็คจุดผิดปกติได้ทันที</a:t>
+            </a:r>
+          </a:p>
+          <a:p>
+            <a:pPr>
+              <a:defRPr b="1" sz="1100">
+                <a:solidFill>
+                  <a:srgbClr val="0F172A"/>
+                </a:solidFill>
+              </a:defRPr>
+            </a:pPr>
+            <a:r>
+              <a:t>• High-Frequency Telemetry Trends:</a:t>
+            </a:r>
+          </a:p>
+          <a:p>
+            <a:pPr>
+              <a:spcAft>
+                <a:spcPts val="600"/>
+              </a:spcAft>
+              <a:defRPr sz="1000">
+                <a:solidFill>
+                  <a:srgbClr val="64748B"/>
+                </a:solidFill>
+              </a:defRPr>
+            </a:pPr>
+            <a:r>
+              <a:t>  กราฟ Real-Time Dynamic Charts วิเคราะห์แนวโน้มคุณภาพน้ำของแต่ละสถานี 24 ชม.</a:t>
+            </a:r>
+          </a:p>
+          <a:p>
+            <a:pPr>
+              <a:defRPr b="1" sz="1100">
+                <a:solidFill>
+                  <a:srgbClr val="0F172A"/>
+                </a:solidFill>
+              </a:defRPr>
+            </a:pPr>
+            <a:r>
+              <a:t>• Zone Alert Management:</a:t>
+            </a:r>
+          </a:p>
+          <a:p>
+            <a:pPr>
+              <a:spcAft>
+                <a:spcPts val="600"/>
+              </a:spcAft>
+              <a:defRPr sz="1000">
+                <a:solidFill>
+                  <a:srgbClr val="64748B"/>
+                </a:solidFill>
+              </a:defRPr>
+            </a:pPr>
+            <a:r>
+              <a:t>  ระบบแยกกลุ่มโซนการแจ้งเตือนตามพื้นที่ (เช่น โซนอาคาร A, โซนโรงงาน 1-4)</a:t>
+            </a:r>
+          </a:p>
+          <a:p>
+            <a:pPr>
+              <a:defRPr b="1" sz="1100">
+                <a:solidFill>
+                  <a:srgbClr val="0F172A"/>
+                </a:solidFill>
+              </a:defRPr>
+            </a:pPr>
+            <a:r>
+              <a:t>• Automated Compliance Reports:</a:t>
+            </a:r>
+          </a:p>
+          <a:p>
+            <a:pPr>
+              <a:spcAft>
+                <a:spcPts val="600"/>
+              </a:spcAft>
+              <a:defRPr sz="1000">
+                <a:solidFill>
+                  <a:srgbClr val="64748B"/>
+                </a:solidFill>
+              </a:defRPr>
+            </a:pPr>
+            <a:r>
+              <a:t>  สร้างรายงานสรุปเปรียบเทียบ 100 จุดอัตโนมัติ ส่งออกเป็น Excel / PDF ในคลิกเดียว</a:t>
+            </a:r>
+          </a:p>
+        </p:txBody>
+      </p:sp>
+      <p:sp>
+        <p:nvSpPr>
+          <p:cNvPr id="5" name="Rounded Rectangle 4"/>
           <p:cNvSpPr/>
           <p:nvPr/>
         </p:nvSpPr>
         <p:spPr>
           <a:xfrm>
-            <a:off x="6339535" y="1463040"/>
+            <a:off x="6309360" y="1463040"/>
             <a:ext cx="5120640" cy="4754880"/>
           </a:xfrm>
           <a:prstGeom prst="roundRect">
@@ -6376,7 +6719,7 @@
           </a:solidFill>
           <a:ln w="19050">
             <a:solidFill>
-              <a:srgbClr val="0284C7"/>
+              <a:srgbClr val="CBD5E1"/>
             </a:solidFill>
           </a:ln>
         </p:spPr>
@@ -6404,57 +6747,14 @@
       </p:sp>
       <p:sp>
         <p:nvSpPr>
-          <p:cNvPr id="8" name="Rounded Rectangle 7"/>
-          <p:cNvSpPr/>
-          <p:nvPr/>
-        </p:nvSpPr>
-        <p:spPr>
-          <a:xfrm>
-            <a:off x="6339535" y="1463040"/>
-            <a:ext cx="5120640" cy="1188720"/>
-          </a:xfrm>
-          <a:prstGeom prst="roundRect">
-            <a:avLst/>
-          </a:prstGeom>
-          <a:solidFill>
-            <a:srgbClr val="0284C7"/>
-          </a:solidFill>
-          <a:ln>
-            <a:noFill/>
-          </a:ln>
-        </p:spPr>
-        <p:style>
-          <a:lnRef idx="1">
-            <a:schemeClr val="accent1"/>
-          </a:lnRef>
-          <a:fillRef idx="3">
-            <a:schemeClr val="accent1"/>
-          </a:fillRef>
-          <a:effectRef idx="2">
-            <a:schemeClr val="accent1"/>
-          </a:effectRef>
-          <a:fontRef idx="minor">
-            <a:schemeClr val="lt1"/>
-          </a:fontRef>
-        </p:style>
-        <p:txBody>
-          <a:bodyPr rtlCol="0" anchor="ctr"/>
-          <a:lstStyle/>
-          <a:p>
-            <a:pPr algn="ctr"/>
-          </a:p>
-        </p:txBody>
-      </p:sp>
-      <p:sp>
-        <p:nvSpPr>
-          <p:cNvPr id="9" name="TextBox 8"/>
+          <p:cNvPr id="6" name="TextBox 5"/>
           <p:cNvSpPr txBox="1"/>
           <p:nvPr/>
         </p:nvSpPr>
         <p:spPr>
           <a:xfrm>
-            <a:off x="6522415" y="1554480"/>
-            <a:ext cx="4754880" cy="1005840"/>
+            <a:off x="6583680" y="1691640"/>
+            <a:ext cx="4572000" cy="4297680"/>
           </a:xfrm>
           <a:prstGeom prst="rect">
             <a:avLst/>
@@ -6468,69 +6768,125 @@
           <a:lstStyle/>
           <a:p>
             <a:pPr>
-              <a:defRPr sz="950" b="1">
-                <a:solidFill>
-                  <a:srgbClr val="FFFFFF"/>
-                </a:solidFill>
-              </a:defRPr>
-            </a:pPr>
-            <a:r>
-              <a:t>ล็อคขอบเขต MA ชัดเจนตั้งแต่ปีที่ 2</a:t>
-            </a:r>
-          </a:p>
-          <a:p>
-            <a:pPr>
+              <a:spcAft>
+                <a:spcPts val="1000"/>
+              </a:spcAft>
               <a:defRPr sz="1400" b="1">
                 <a:solidFill>
-                  <a:srgbClr val="FFFFFF"/>
-                </a:solidFill>
-              </a:defRPr>
-            </a:pPr>
-            <a:r>
-              <a:t>สัญญาแบบซื้อขาด (Outright + MA 10-15%)</a:t>
-            </a:r>
-          </a:p>
-        </p:txBody>
-      </p:sp>
-      <p:sp>
-        <p:nvSpPr>
-          <p:cNvPr id="10" name="TextBox 9"/>
-          <p:cNvSpPr txBox="1"/>
-          <p:nvPr/>
-        </p:nvSpPr>
-        <p:spPr>
-          <a:xfrm>
-            <a:off x="6522415" y="2834640"/>
-            <a:ext cx="4754880" cy="3200400"/>
-          </a:xfrm>
-          <a:prstGeom prst="rect">
-            <a:avLst/>
-          </a:prstGeom>
-          <a:noFill/>
-        </p:spPr>
-        <p:txBody>
-          <a:bodyPr wrap="square">
-            <a:spAutoFit/>
-          </a:bodyPr>
-          <a:lstStyle/>
-          <a:p>
-            <a:pPr>
-              <a:defRPr sz="1100">
+                  <a:srgbClr val="059669"/>
+                </a:solidFill>
+              </a:defRPr>
+            </a:pPr>
+            <a:r>
+              <a:t>📱 2. Multi-Station Mobile Companion App</a:t>
+            </a:r>
+          </a:p>
+          <a:p>
+            <a:pPr>
+              <a:defRPr b="1" sz="1100">
                 <a:solidFill>
                   <a:srgbClr val="0F172A"/>
                 </a:solidFill>
               </a:defRPr>
             </a:pPr>
             <a:r>
-              <a:t>• ฟรี Support / แก้ไขปัญหา / ดูแลเซิร์ฟเวอร์ 1 ปีแรกเท่านั้น</a:t>
-            </a:r>
-            <a:br/>
-            <a:r>
-              <a:t>• ปีที่ 2 เป็นต้นไป คิดสัญญา MA 10–15% ต่อปี (ประมาณ ฿25,000 – ฿90,000/ปี)</a:t>
-            </a:r>
-            <a:br/>
-            <a:r>
-              <a:t>• ป้องกันภาระค่าโฮสต์และฐานข้อมูลในระยะยาวได้อย่างมีประสิทธิภาพ</a:t>
+              <a:t>• 100-Device Hub Selector:</a:t>
+            </a:r>
+          </a:p>
+          <a:p>
+            <a:pPr>
+              <a:spcAft>
+                <a:spcPts val="600"/>
+              </a:spcAft>
+              <a:defRPr sz="1000">
+                <a:solidFill>
+                  <a:srgbClr val="64748B"/>
+                </a:solidFill>
+              </a:defRPr>
+            </a:pPr>
+            <a:r>
+              <a:t>  สลับดูข้อมูลสถานีตรวจวัดน้ำทั้ง 100 จุดได้ง่ายดายในแอปเดียว (ค้นหาตามชื่อ/โซน)</a:t>
+            </a:r>
+          </a:p>
+          <a:p>
+            <a:pPr>
+              <a:defRPr b="1" sz="1100">
+                <a:solidFill>
+                  <a:srgbClr val="0F172A"/>
+                </a:solidFill>
+              </a:defRPr>
+            </a:pPr>
+            <a:r>
+              <a:t>• Instant Push Notification &amp; Line Alert:</a:t>
+            </a:r>
+          </a:p>
+          <a:p>
+            <a:pPr>
+              <a:spcAft>
+                <a:spcPts val="600"/>
+              </a:spcAft>
+              <a:defRPr sz="1000">
+                <a:solidFill>
+                  <a:srgbClr val="64748B"/>
+                </a:solidFill>
+              </a:defRPr>
+            </a:pPr>
+            <a:r>
+              <a:t>  แจ้งเตือนข้อความฉุกเฉินทันทีเมื่อมีจุดใดจุดหนึ่งใน 100 จุดหลุดเกณฑ์มาตรฐาน</a:t>
+            </a:r>
+          </a:p>
+          <a:p>
+            <a:pPr>
+              <a:defRPr b="1" sz="1100">
+                <a:solidFill>
+                  <a:srgbClr val="0F172A"/>
+                </a:solidFill>
+              </a:defRPr>
+            </a:pPr>
+            <a:r>
+              <a:t>• Color-Coded Status Cards:</a:t>
+            </a:r>
+          </a:p>
+          <a:p>
+            <a:pPr>
+              <a:spcAft>
+                <a:spcPts val="600"/>
+              </a:spcAft>
+              <a:defRPr sz="1000">
+                <a:solidFill>
+                  <a:srgbClr val="64748B"/>
+                </a:solidFill>
+              </a:defRPr>
+            </a:pPr>
+            <a:r>
+              <a:t>  แสดงสถานะด้วยสีเขียว/เหลือง/แดง ชัดเจน รู้ทันทีว่าจุดไหนปกติดีหรือต้องตรวจเช็ค</a:t>
+            </a:r>
+          </a:p>
+          <a:p>
+            <a:pPr>
+              <a:defRPr b="1" sz="1100">
+                <a:solidFill>
+                  <a:srgbClr val="0F172A"/>
+                </a:solidFill>
+              </a:defRPr>
+            </a:pPr>
+            <a:r>
+              <a:t>• Offline Battery &amp; Link Monitor:</a:t>
+            </a:r>
+          </a:p>
+          <a:p>
+            <a:pPr>
+              <a:spcAft>
+                <a:spcPts val="600"/>
+              </a:spcAft>
+              <a:defRPr sz="1000">
+                <a:solidFill>
+                  <a:srgbClr val="64748B"/>
+                </a:solidFill>
+              </a:defRPr>
+            </a:pPr>
+            <a:r>
+              <a:t>  ตรวจสอบสัญญาณ WiFi/4G และระดับแบตเตอรี่สำรองของทุกตู้ได้จากระยะไกล</a:t>
             </a:r>
           </a:p>
         </p:txBody>
@@ -6639,7 +6995,7 @@
               </a:defRPr>
             </a:pPr>
             <a:r>
-              <a:t>💧 โครงการระบบตรวจวัดคุณภาพน้ำและแดชบอร์ด 100 จุด</a:t>
+              <a:t>💧 สรุปภาพรวมข้อเสนอราคาโครงการตรวจวัดคุณภาพน้ำ 100 ชุด</a:t>
             </a:r>
           </a:p>
           <a:p>
@@ -6660,7 +7016,7 @@
           <a:p>
             <a:pPr>
               <a:spcAft>
-                <a:spcPts val="2000"/>
+                <a:spcPts val="1600"/>
               </a:spcAft>
               <a:defRPr sz="1350">
                 <a:solidFill>
@@ -6669,19 +7025,7 @@
               </a:defRPr>
             </a:pPr>
             <a:r>
-              <a:t>พร้อมให้คำปรึกษา ออกแบบระบบ และจัดทำใบเสนอราคาโครงการตามงบประมาณของลูกค้า</a:t>
-            </a:r>
-          </a:p>
-          <a:p>
-            <a:pPr>
-              <a:defRPr b="1" sz="1300">
-                <a:solidFill>
-                  <a:srgbClr val="FFFFFF"/>
-                </a:solidFill>
-              </a:defRPr>
-            </a:pPr>
-            <a:r>
-              <a:t>✨ สรุปข้อเสนอโครงการ 100 จุด:</a:t>
+              <a:t>พร้อมส่งมอบอุปกรณ์และระบบแดชบอร์ดครบวงจรตามขอบเขตที่ลูกค้าเลือก:</a:t>
             </a:r>
           </a:p>
           <a:p>
@@ -6689,30 +7033,26 @@
               <a:spcAft>
                 <a:spcPts val="2400"/>
               </a:spcAft>
-              <a:defRPr sz="1050">
+              <a:defRPr sz="1100">
                 <a:solidFill>
                   <a:srgbClr val="E2E8F0"/>
                 </a:solidFill>
               </a:defRPr>
             </a:pPr>
             <a:r>
-              <a:t>• ฮาร์ดแวร์ 4 ค่า (pH/TDS/Temp/Cl): ฿21,000/ชุด (รวม 100 จุด = ฿2,100,000)</a:t>
+              <a:t>• รวมต้นทุนต่อชุด: 21,000 บาท (100 ชุด = 2,100,000 บาท)</a:t>
             </a:r>
             <a:br/>
             <a:r>
-              <a:t>• ซอฟต์แวร์แดชบอร์ด Option 1 (App+Telegram): ซื้อขาด ฿250,000 | รายปี ฿170,000 (ปีถัดไป ฿120,000/ปี)</a:t>
+              <a:t>• [แบบที่ 1 Plug &amp; Play]: 29,500 - 32,000 บ./ชุด (รวม 2.95 - 3.20 ล้าน | กำไร 8.5 แสน - 1.1 ล้าน)</a:t>
             </a:r>
             <a:br/>
             <a:r>
-              <a:t>• ซอฟต์แวร์แดชบอร์ด Option 2 (Web+Telegram): ซื้อขาด ฿450,000 | รายปี ฿340,000 (ปีถัดไป ฿240,000/ปี)</a:t>
+              <a:t>• [แบบที่ 2 Turnkey]: 38,000 - 42,000 บ./ชุด (รวม 3.80 - 4.20 ล้าน | กำไร 1.7 - 2.1 ล้าน)</a:t>
             </a:r>
             <a:br/>
             <a:r>
-              <a:t>• ซอฟต์แวร์แดชบอร์ด Option 3 (Web+App+LINE): ซื้อขาด ฿600,000 | รายปี ฿510,000 (ปีถัดไป ฿360,000/ปี)</a:t>
-            </a:r>
-            <a:br/>
-            <a:r>
-              <a:t>• เปิดดูแดชบอร์ดและสไลด์ออนไลน์ได้ที่: https://woobwarb.github.io/nct-water-nexus/</a:t>
+              <a:t>• ซอฟต์แวร์แดชบอร์ด 100 จุด: ซื้อขาด 2.5 - 6.0 แสน | รายปี 1.2 - 3.6 แสน/ปี (Recurring Income)</a:t>
             </a:r>
           </a:p>
           <a:p>

--- a/NCT_Water_Nexus_Report_and_Pricing.pptx
+++ b/NCT_Water_Nexus_Report_and_Pricing.pptx
@@ -6100,185 +6100,45 @@
               </a:defRPr>
             </a:pPr>
             <a:r>
-              <a:t>5. วิเคราะห์จุดแข็ง-จุดเสี่ยงโมเดลราคา (Strategic Margin Analysis)</a:t>
-            </a:r>
-          </a:p>
-        </p:txBody>
-      </p:sp>
-      <p:sp>
-        <p:nvSpPr>
-          <p:cNvPr id="3" name="Rounded Rectangle 2"/>
-          <p:cNvSpPr/>
+              <a:t>5. ตัวอย่างหน้าจอ Centralized Web SCADA Dashboard (จอห้องควบคุม 100 จุด)</a:t>
+            </a:r>
+          </a:p>
+        </p:txBody>
+      </p:sp>
+      <p:pic>
+        <p:nvPicPr>
+          <p:cNvPr id="3" name="Picture 2" descr="scada_preview.png"/>
+          <p:cNvPicPr>
+            <a:picLocks noChangeAspect="1"/>
+          </p:cNvPicPr>
           <p:nvPr/>
-        </p:nvSpPr>
+        </p:nvPicPr>
+        <p:blipFill>
+          <a:blip r:embed="rId2"/>
+          <a:stretch>
+            <a:fillRect/>
+          </a:stretch>
+        </p:blipFill>
         <p:spPr>
           <a:xfrm>
             <a:off x="731520" y="1463040"/>
-            <a:ext cx="5120640" cy="4754880"/>
-          </a:xfrm>
-          <a:prstGeom prst="roundRect">
-            <a:avLst/>
-          </a:prstGeom>
-          <a:solidFill>
-            <a:srgbClr val="FFFFFF"/>
-          </a:solidFill>
-          <a:ln w="19050">
-            <a:solidFill>
-              <a:srgbClr val="059669"/>
-            </a:solidFill>
-          </a:ln>
-        </p:spPr>
-        <p:style>
-          <a:lnRef idx="1">
-            <a:schemeClr val="accent1"/>
-          </a:lnRef>
-          <a:fillRef idx="3">
-            <a:schemeClr val="accent1"/>
-          </a:fillRef>
-          <a:effectRef idx="2">
-            <a:schemeClr val="accent1"/>
-          </a:effectRef>
-          <a:fontRef idx="minor">
-            <a:schemeClr val="lt1"/>
-          </a:fontRef>
-        </p:style>
-        <p:txBody>
-          <a:bodyPr rtlCol="0" anchor="ctr"/>
-          <a:lstStyle/>
-          <a:p>
-            <a:pPr algn="ctr"/>
-          </a:p>
-        </p:txBody>
-      </p:sp>
-      <p:sp>
-        <p:nvSpPr>
-          <p:cNvPr id="4" name="TextBox 3"/>
-          <p:cNvSpPr txBox="1"/>
-          <p:nvPr/>
-        </p:nvSpPr>
-        <p:spPr>
-          <a:xfrm>
-            <a:off x="1005840" y="1691640"/>
-            <a:ext cx="4572000" cy="4297680"/>
+            <a:ext cx="6217920" cy="4754880"/>
           </a:xfrm>
           <a:prstGeom prst="rect">
             <a:avLst/>
           </a:prstGeom>
-          <a:noFill/>
-        </p:spPr>
-        <p:txBody>
-          <a:bodyPr wrap="square">
-            <a:spAutoFit/>
-          </a:bodyPr>
-          <a:lstStyle/>
-          <a:p>
-            <a:pPr>
-              <a:spcAft>
-                <a:spcPts val="1000"/>
-              </a:spcAft>
-              <a:defRPr sz="1350" b="1">
-                <a:solidFill>
-                  <a:srgbClr val="059669"/>
-                </a:solidFill>
-              </a:defRPr>
-            </a:pPr>
-            <a:r>
-              <a:t>🔄 ฝั่งรายปี (ดีมาก แนะนำให้ผลักดันลูกค้ารูปแบบนี้)</a:t>
-            </a:r>
-          </a:p>
-          <a:p>
-            <a:pPr>
-              <a:defRPr b="1" sz="1100">
-                <a:solidFill>
-                  <a:srgbClr val="0F172A"/>
-                </a:solidFill>
-              </a:defRPr>
-            </a:pPr>
-            <a:r>
-              <a:t>• ตัวเลข 1,200 – 3,600 บาท/จุด/ปี:</a:t>
-            </a:r>
-          </a:p>
-          <a:p>
-            <a:pPr>
-              <a:spcAft>
-                <a:spcPts val="600"/>
-              </a:spcAft>
-              <a:defRPr sz="1000">
-                <a:solidFill>
-                  <a:srgbClr val="64748B"/>
-                </a:solidFill>
-              </a:defRPr>
-            </a:pPr>
-            <a:r>
-              <a:t>  ตกเดือนละ 100–300 บาท/ตู้ เป็นราคาที่ลูกค้าองค์กร/โรงงาน/เทศบาล จ่ายได้ง่ายมาก</a:t>
-            </a:r>
-          </a:p>
-          <a:p>
-            <a:pPr>
-              <a:defRPr b="1" sz="1100">
-                <a:solidFill>
-                  <a:srgbClr val="0F172A"/>
-                </a:solidFill>
-              </a:defRPr>
-            </a:pPr>
-            <a:r>
-              <a:t>• Recurring Income ก้อนโตทุกปี:</a:t>
-            </a:r>
-          </a:p>
-          <a:p>
-            <a:pPr>
-              <a:spcAft>
-                <a:spcPts val="600"/>
-              </a:spcAft>
-              <a:defRPr sz="1000">
-                <a:solidFill>
-                  <a:srgbClr val="64748B"/>
-                </a:solidFill>
-              </a:defRPr>
-            </a:pPr>
-            <a:r>
-              <a:t>  มีรายรับสม่ำเสมอ 120,000 – 360,000 บาททุกปี ไว้เป็นค่า Cloud Server, ค่าซ่อมบำรุง และกำไรต่อเนื่อง</a:t>
-            </a:r>
-          </a:p>
-          <a:p>
-            <a:pPr>
-              <a:defRPr b="1" sz="1100">
-                <a:solidFill>
-                  <a:srgbClr val="0F172A"/>
-                </a:solidFill>
-              </a:defRPr>
-            </a:pPr>
-            <a:r>
-              <a:t>• ล็อกฐานลูกค้าได้ยาวนาน:</a:t>
-            </a:r>
-          </a:p>
-          <a:p>
-            <a:pPr>
-              <a:spcAft>
-                <a:spcPts val="600"/>
-              </a:spcAft>
-              <a:defRPr sz="1000">
-                <a:solidFill>
-                  <a:srgbClr val="64748B"/>
-                </a:solidFill>
-              </a:defRPr>
-            </a:pPr>
-            <a:r>
-              <a:t>  ลูกค้าไม่ต้องกังวลเรื่องการดูแล เราดูแลซ่อมบำรุงและอัปเดตระบบให้ 100%</a:t>
-            </a:r>
-          </a:p>
-        </p:txBody>
-      </p:sp>
-      <p:sp>
-        <p:nvSpPr>
-          <p:cNvPr id="5" name="Rounded Rectangle 4"/>
+        </p:spPr>
+      </p:pic>
+      <p:sp>
+        <p:nvSpPr>
+          <p:cNvPr id="4" name="Rounded Rectangle 3"/>
           <p:cNvSpPr/>
           <p:nvPr/>
         </p:nvSpPr>
         <p:spPr>
           <a:xfrm>
-            <a:off x="6309360" y="1463040"/>
-            <a:ext cx="5120640" cy="4754880"/>
+            <a:off x="7132320" y="1463040"/>
+            <a:ext cx="4327855" cy="4754880"/>
           </a:xfrm>
           <a:prstGeom prst="roundRect">
             <a:avLst/>
@@ -6316,14 +6176,14 @@
       </p:sp>
       <p:sp>
         <p:nvSpPr>
-          <p:cNvPr id="6" name="TextBox 5"/>
+          <p:cNvPr id="5" name="TextBox 4"/>
           <p:cNvSpPr txBox="1"/>
           <p:nvPr/>
         </p:nvSpPr>
         <p:spPr>
           <a:xfrm>
-            <a:off x="6583680" y="1691640"/>
-            <a:ext cx="4572000" cy="4297680"/>
+            <a:off x="7315200" y="1600200"/>
+            <a:ext cx="3962095" cy="4480560"/>
           </a:xfrm>
           <a:prstGeom prst="rect">
             <a:avLst/>
@@ -6338,97 +6198,106 @@
           <a:p>
             <a:pPr>
               <a:spcAft>
-                <a:spcPts val="1000"/>
+                <a:spcPts val="800"/>
               </a:spcAft>
-              <a:defRPr sz="1350" b="1">
+              <a:defRPr sz="1300" b="1">
                 <a:solidFill>
                   <a:srgbClr val="0284C7"/>
                 </a:solidFill>
               </a:defRPr>
             </a:pPr>
             <a:r>
-              <a:t>🏷️ ฝั่งซื้อขาด (ตัวเลขผ่าน แต่ต้องล็อคขอบเขตให้ชัด)</a:t>
-            </a:r>
-          </a:p>
-          <a:p>
-            <a:pPr>
-              <a:defRPr b="1" sz="1100">
+              <a:t>💻 คำอธิบายฟังก์ชันหน้าจอ SCADA:</a:t>
+            </a:r>
+          </a:p>
+          <a:p>
+            <a:pPr>
+              <a:spcAft>
+                <a:spcPts val="300"/>
+              </a:spcAft>
+              <a:defRPr sz="950">
                 <a:solidFill>
                   <a:srgbClr val="0F172A"/>
                 </a:solidFill>
               </a:defRPr>
             </a:pPr>
             <a:r>
-              <a:t>• ราคาเฉลี่ย 2,500 – 6,000 บาท/จุด:</a:t>
+              <a:t>❶ สถานะระบบ &amp; แบตเตอรี่: แสดงสถานะ Healthy, สัญญาณ 4G/WiFi และแบต LiFePO4 (90%)</a:t>
             </a:r>
           </a:p>
           <a:p>
             <a:pPr>
               <a:spcAft>
-                <a:spcPts val="600"/>
+                <a:spcPts val="300"/>
               </a:spcAft>
-              <a:defRPr sz="1000">
-                <a:solidFill>
-                  <a:srgbClr val="64748B"/>
-                </a:solidFill>
-              </a:defRPr>
-            </a:pPr>
-            <a:r>
-              <a:t>  ยอดรวม 2.5 – 6 แสนบาท ลูกค้าไม่รู้สึกว่าแพงเกินไปสำหรับระบบ 100 จุด</a:t>
-            </a:r>
-          </a:p>
-          <a:p>
-            <a:pPr>
-              <a:defRPr b="1" sz="1100">
+              <a:defRPr sz="950">
                 <a:solidFill>
                   <a:srgbClr val="0F172A"/>
                 </a:solidFill>
               </a:defRPr>
             </a:pPr>
             <a:r>
-              <a:t>• จุดที่ต้องระวัง:</a:t>
+              <a:t>❷ การ์ดตรวจวัด 4 ค่าหลัก: อุณหภูมิน้ำ (ATC), pH (Glass Probe), TDS (ppm), Cl (mg/L)</a:t>
             </a:r>
           </a:p>
           <a:p>
             <a:pPr>
               <a:spcAft>
-                <a:spcPts val="600"/>
+                <a:spcPts val="300"/>
               </a:spcAft>
-              <a:defRPr sz="1000">
-                <a:solidFill>
-                  <a:srgbClr val="64748B"/>
-                </a:solidFill>
-              </a:defRPr>
-            </a:pPr>
-            <a:r>
-              <a:t>  ซื้อขาดแปลว่าคุณต้องแบกค่า Host/Database เองในอนาคต หรือต้องส่งมอบ Source Code ให้ลูกค้ารัน Server เอง</a:t>
-            </a:r>
-          </a:p>
-          <a:p>
-            <a:pPr>
-              <a:defRPr b="1" sz="1100">
+              <a:defRPr sz="950">
                 <a:solidFill>
                   <a:srgbClr val="0F172A"/>
                 </a:solidFill>
               </a:defRPr>
             </a:pPr>
             <a:r>
-              <a:t>• เงื่อนไขสัญญาป้องกันต้นทุน (MA):</a:t>
+              <a:t>❸ กราฟแนวโน้ม Real-Time: พล็อตข้อมูลสด 1 วินาที ติดตามค่าน้ำ 24 ชม. ย้อนหลังได้</a:t>
             </a:r>
           </a:p>
           <a:p>
             <a:pPr>
               <a:spcAft>
-                <a:spcPts val="600"/>
+                <a:spcPts val="300"/>
               </a:spcAft>
-              <a:defRPr sz="1000">
-                <a:solidFill>
-                  <a:srgbClr val="64748B"/>
-                </a:solidFill>
-              </a:defRPr>
-            </a:pPr>
-            <a:r>
-              <a:t>  ควรกำหนดในสัญญาว่า ฟรี Support/แก้บั๊ก 1 ปีแรกเท่านั้น ปีถัดไปคิดสัญญา MA แยก 10–15% ต่อปี</a:t>
+              <a:defRPr sz="950">
+                <a:solidFill>
+                  <a:srgbClr val="0F172A"/>
+                </a:solidFill>
+              </a:defRPr>
+            </a:pPr>
+            <a:r>
+              <a:t>❹ ไดอะแกรมเชื่อมต่อ: ตรวจจับสายสัญญาณ WiFi ➔ Display ➔ Sensor Probes</a:t>
+            </a:r>
+          </a:p>
+          <a:p>
+            <a:pPr>
+              <a:spcAft>
+                <a:spcPts val="300"/>
+              </a:spcAft>
+              <a:defRPr sz="950">
+                <a:solidFill>
+                  <a:srgbClr val="0F172A"/>
+                </a:solidFill>
+              </a:defRPr>
+            </a:pPr>
+            <a:r>
+              <a:t>❺ Digital Calibration: สอบเทียบหัววัด pH 7.00 / 4.01 ผ่านหน้าเว็บในคลิกเดียว</a:t>
+            </a:r>
+          </a:p>
+          <a:p>
+            <a:pPr>
+              <a:spcAft>
+                <a:spcPts val="300"/>
+              </a:spcAft>
+              <a:defRPr sz="950">
+                <a:solidFill>
+                  <a:srgbClr val="0F172A"/>
+                </a:solidFill>
+              </a:defRPr>
+            </a:pPr>
+            <a:r>
+              <a:t>❻ ส่งออกรายงาน: Export ข้อมูลเป็น Excel / PDF สำหรับรายงาน ISO ทันที</a:t>
             </a:r>
           </a:p>
         </p:txBody>
@@ -6504,21 +6373,45 @@
               </a:defRPr>
             </a:pPr>
             <a:r>
-              <a:t>6. ระบบแดชบอร์ด SCADA และ Mobile Companion App (Software Platform)</a:t>
-            </a:r>
-          </a:p>
-        </p:txBody>
-      </p:sp>
-      <p:sp>
-        <p:nvSpPr>
-          <p:cNvPr id="3" name="Rounded Rectangle 2"/>
+              <a:t>6. ตัวอย่างหน้าจอมือถือ (Modela Mobile Companion App) &amp; Mobile Features</a:t>
+            </a:r>
+          </a:p>
+        </p:txBody>
+      </p:sp>
+      <p:pic>
+        <p:nvPicPr>
+          <p:cNvPr id="3" name="Picture 2" descr="mobile_preview.png"/>
+          <p:cNvPicPr>
+            <a:picLocks noChangeAspect="1"/>
+          </p:cNvPicPr>
+          <p:nvPr/>
+        </p:nvPicPr>
+        <p:blipFill>
+          <a:blip r:embed="rId2"/>
+          <a:stretch>
+            <a:fillRect/>
+          </a:stretch>
+        </p:blipFill>
+        <p:spPr>
+          <a:xfrm>
+            <a:off x="731520" y="1463040"/>
+            <a:ext cx="2377440" cy="4754880"/>
+          </a:xfrm>
+          <a:prstGeom prst="rect">
+            <a:avLst/>
+          </a:prstGeom>
+        </p:spPr>
+      </p:pic>
+      <p:sp>
+        <p:nvSpPr>
+          <p:cNvPr id="4" name="Rounded Rectangle 3"/>
           <p:cNvSpPr/>
           <p:nvPr/>
         </p:nvSpPr>
         <p:spPr>
           <a:xfrm>
-            <a:off x="731520" y="1463040"/>
-            <a:ext cx="5120640" cy="4754880"/>
+            <a:off x="3383280" y="1463040"/>
+            <a:ext cx="8076895" cy="4754880"/>
           </a:xfrm>
           <a:prstGeom prst="roundRect">
             <a:avLst/>
@@ -6528,7 +6421,7 @@
           </a:solidFill>
           <a:ln w="19050">
             <a:solidFill>
-              <a:srgbClr val="CBD5E1"/>
+              <a:srgbClr val="059669"/>
             </a:solidFill>
           </a:ln>
         </p:spPr>
@@ -6556,14 +6449,14 @@
       </p:sp>
       <p:sp>
         <p:nvSpPr>
-          <p:cNvPr id="4" name="TextBox 3"/>
+          <p:cNvPr id="5" name="TextBox 4"/>
           <p:cNvSpPr txBox="1"/>
           <p:nvPr/>
         </p:nvSpPr>
         <p:spPr>
           <a:xfrm>
-            <a:off x="1005840" y="1691640"/>
-            <a:ext cx="4572000" cy="4297680"/>
+            <a:off x="3657600" y="1645920"/>
+            <a:ext cx="7498079" cy="4389120"/>
           </a:xfrm>
           <a:prstGeom prst="rect">
             <a:avLst/>
@@ -6580,26 +6473,14 @@
               <a:spcAft>
                 <a:spcPts val="1000"/>
               </a:spcAft>
-              <a:defRPr sz="1400" b="1">
-                <a:solidFill>
-                  <a:srgbClr val="0284C7"/>
-                </a:solidFill>
-              </a:defRPr>
-            </a:pPr>
-            <a:r>
-              <a:t>💻 1. Centralized SCADA Widescreen View</a:t>
-            </a:r>
-          </a:p>
-          <a:p>
-            <a:pPr>
-              <a:defRPr b="1" sz="1100">
-                <a:solidFill>
-                  <a:srgbClr val="0F172A"/>
-                </a:solidFill>
-              </a:defRPr>
-            </a:pPr>
-            <a:r>
-              <a:t>• GIS Map &amp; 100-Node Grid Overview:</a:t>
+              <a:defRPr sz="1300" b="1">
+                <a:solidFill>
+                  <a:srgbClr val="059669"/>
+                </a:solidFill>
+              </a:defRPr>
+            </a:pPr>
+            <a:r>
+              <a:t>📱 คำอธิบายฟังก์ชันแอปพลิเคชันมือถือ (iOS &amp; Android):</a:t>
             </a:r>
           </a:p>
           <a:p>
@@ -6607,26 +6488,14 @@
               <a:spcAft>
                 <a:spcPts val="600"/>
               </a:spcAft>
-              <a:defRPr sz="1000">
-                <a:solidFill>
-                  <a:srgbClr val="64748B"/>
-                </a:solidFill>
-              </a:defRPr>
-            </a:pPr>
-            <a:r>
-              <a:t>  แสดงตำแหน่งและสถานะของทั้ง 100 สถานีบนแผนที่ GIS ตรวจเช็คจุดผิดปกติได้ทันที</a:t>
-            </a:r>
-          </a:p>
-          <a:p>
-            <a:pPr>
-              <a:defRPr b="1" sz="1100">
+              <a:defRPr sz="1050">
                 <a:solidFill>
                   <a:srgbClr val="0F172A"/>
                 </a:solidFill>
               </a:defRPr>
             </a:pPr>
             <a:r>
-              <a:t>• High-Frequency Telemetry Trends:</a:t>
+              <a:t>✔ All Devices Hub (100 จุด): ค้นหาและสลับดูข้อมูลสถานีตรวจวัดคุณภาพน้ำทั้ง 100 จุดได้ง่ายดายในแอปเดียว</a:t>
             </a:r>
           </a:p>
           <a:p>
@@ -6634,26 +6503,14 @@
               <a:spcAft>
                 <a:spcPts val="600"/>
               </a:spcAft>
-              <a:defRPr sz="1000">
-                <a:solidFill>
-                  <a:srgbClr val="64748B"/>
-                </a:solidFill>
-              </a:defRPr>
-            </a:pPr>
-            <a:r>
-              <a:t>  กราฟ Real-Time Dynamic Charts วิเคราะห์แนวโน้มคุณภาพน้ำของแต่ละสถานี 24 ชม.</a:t>
-            </a:r>
-          </a:p>
-          <a:p>
-            <a:pPr>
-              <a:defRPr b="1" sz="1100">
+              <a:defRPr sz="1050">
                 <a:solidFill>
                   <a:srgbClr val="0F172A"/>
                 </a:solidFill>
               </a:defRPr>
             </a:pPr>
             <a:r>
-              <a:t>• Zone Alert Management:</a:t>
+              <a:t>✔ Hero Metric Display: แสดงค่า pH และ คลอรีนคงเหลือ (Cl) ด้วยตัวเลขขนาดใหญ่ สีสันอ่านง่าย รู้ผลทันที</a:t>
             </a:r>
           </a:p>
           <a:p>
@@ -6661,26 +6518,14 @@
               <a:spcAft>
                 <a:spcPts val="600"/>
               </a:spcAft>
-              <a:defRPr sz="1000">
-                <a:solidFill>
-                  <a:srgbClr val="64748B"/>
-                </a:solidFill>
-              </a:defRPr>
-            </a:pPr>
-            <a:r>
-              <a:t>  ระบบแยกกลุ่มโซนการแจ้งเตือนตามพื้นที่ (เช่น โซนอาคาร A, โซนโรงงาน 1-4)</a:t>
-            </a:r>
-          </a:p>
-          <a:p>
-            <a:pPr>
-              <a:defRPr b="1" sz="1100">
+              <a:defRPr sz="1050">
                 <a:solidFill>
                   <a:srgbClr val="0F172A"/>
                 </a:solidFill>
               </a:defRPr>
             </a:pPr>
             <a:r>
-              <a:t>• Automated Compliance Reports:</a:t>
+              <a:t>✔ Ambient &amp; Water Temp: แสดงอุณหภูมิน้ำทั้งหน่วยเซลเซียส (°C) และฟาเรนไฮต์ (°F) พร้อมระบบชดเชยอุณหภูมิ ATC</a:t>
             </a:r>
           </a:p>
           <a:p>
@@ -6688,109 +6533,14 @@
               <a:spcAft>
                 <a:spcPts val="600"/>
               </a:spcAft>
-              <a:defRPr sz="1000">
-                <a:solidFill>
-                  <a:srgbClr val="64748B"/>
-                </a:solidFill>
-              </a:defRPr>
-            </a:pPr>
-            <a:r>
-              <a:t>  สร้างรายงานสรุปเปรียบเทียบ 100 จุดอัตโนมัติ ส่งออกเป็น Excel / PDF ในคลิกเดียว</a:t>
-            </a:r>
-          </a:p>
-        </p:txBody>
-      </p:sp>
-      <p:sp>
-        <p:nvSpPr>
-          <p:cNvPr id="5" name="Rounded Rectangle 4"/>
-          <p:cNvSpPr/>
-          <p:nvPr/>
-        </p:nvSpPr>
-        <p:spPr>
-          <a:xfrm>
-            <a:off x="6309360" y="1463040"/>
-            <a:ext cx="5120640" cy="4754880"/>
-          </a:xfrm>
-          <a:prstGeom prst="roundRect">
-            <a:avLst/>
-          </a:prstGeom>
-          <a:solidFill>
-            <a:srgbClr val="FFFFFF"/>
-          </a:solidFill>
-          <a:ln w="19050">
-            <a:solidFill>
-              <a:srgbClr val="CBD5E1"/>
-            </a:solidFill>
-          </a:ln>
-        </p:spPr>
-        <p:style>
-          <a:lnRef idx="1">
-            <a:schemeClr val="accent1"/>
-          </a:lnRef>
-          <a:fillRef idx="3">
-            <a:schemeClr val="accent1"/>
-          </a:fillRef>
-          <a:effectRef idx="2">
-            <a:schemeClr val="accent1"/>
-          </a:effectRef>
-          <a:fontRef idx="minor">
-            <a:schemeClr val="lt1"/>
-          </a:fontRef>
-        </p:style>
-        <p:txBody>
-          <a:bodyPr rtlCol="0" anchor="ctr"/>
-          <a:lstStyle/>
-          <a:p>
-            <a:pPr algn="ctr"/>
-          </a:p>
-        </p:txBody>
-      </p:sp>
-      <p:sp>
-        <p:nvSpPr>
-          <p:cNvPr id="6" name="TextBox 5"/>
-          <p:cNvSpPr txBox="1"/>
-          <p:nvPr/>
-        </p:nvSpPr>
-        <p:spPr>
-          <a:xfrm>
-            <a:off x="6583680" y="1691640"/>
-            <a:ext cx="4572000" cy="4297680"/>
-          </a:xfrm>
-          <a:prstGeom prst="rect">
-            <a:avLst/>
-          </a:prstGeom>
-          <a:noFill/>
-        </p:spPr>
-        <p:txBody>
-          <a:bodyPr wrap="square">
-            <a:spAutoFit/>
-          </a:bodyPr>
-          <a:lstStyle/>
-          <a:p>
-            <a:pPr>
-              <a:spcAft>
-                <a:spcPts val="1000"/>
-              </a:spcAft>
-              <a:defRPr sz="1400" b="1">
-                <a:solidFill>
-                  <a:srgbClr val="059669"/>
-                </a:solidFill>
-              </a:defRPr>
-            </a:pPr>
-            <a:r>
-              <a:t>📱 2. Multi-Station Mobile Companion App</a:t>
-            </a:r>
-          </a:p>
-          <a:p>
-            <a:pPr>
-              <a:defRPr b="1" sz="1100">
+              <a:defRPr sz="1050">
                 <a:solidFill>
                   <a:srgbClr val="0F172A"/>
                 </a:solidFill>
               </a:defRPr>
             </a:pPr>
             <a:r>
-              <a:t>• 100-Device Hub Selector:</a:t>
+              <a:t>✔ Hardware Link &amp; Battery: ตรวจสอบระดับแบตเตอรี่สำรองและสถานะการเชื่อมต่อของทุกตู้ได้จากระยะไกลตลอด 24 ชม.</a:t>
             </a:r>
           </a:p>
           <a:p>
@@ -6798,95 +6548,14 @@
               <a:spcAft>
                 <a:spcPts val="600"/>
               </a:spcAft>
-              <a:defRPr sz="1000">
-                <a:solidFill>
-                  <a:srgbClr val="64748B"/>
-                </a:solidFill>
-              </a:defRPr>
-            </a:pPr>
-            <a:r>
-              <a:t>  สลับดูข้อมูลสถานีตรวจวัดน้ำทั้ง 100 จุดได้ง่ายดายในแอปเดียว (ค้นหาตามชื่อ/โซน)</a:t>
-            </a:r>
-          </a:p>
-          <a:p>
-            <a:pPr>
-              <a:defRPr b="1" sz="1100">
+              <a:defRPr sz="1050">
                 <a:solidFill>
                   <a:srgbClr val="0F172A"/>
                 </a:solidFill>
               </a:defRPr>
             </a:pPr>
             <a:r>
-              <a:t>• Instant Push Notification &amp; Line Alert:</a:t>
-            </a:r>
-          </a:p>
-          <a:p>
-            <a:pPr>
-              <a:spcAft>
-                <a:spcPts val="600"/>
-              </a:spcAft>
-              <a:defRPr sz="1000">
-                <a:solidFill>
-                  <a:srgbClr val="64748B"/>
-                </a:solidFill>
-              </a:defRPr>
-            </a:pPr>
-            <a:r>
-              <a:t>  แจ้งเตือนข้อความฉุกเฉินทันทีเมื่อมีจุดใดจุดหนึ่งใน 100 จุดหลุดเกณฑ์มาตรฐาน</a:t>
-            </a:r>
-          </a:p>
-          <a:p>
-            <a:pPr>
-              <a:defRPr b="1" sz="1100">
-                <a:solidFill>
-                  <a:srgbClr val="0F172A"/>
-                </a:solidFill>
-              </a:defRPr>
-            </a:pPr>
-            <a:r>
-              <a:t>• Color-Coded Status Cards:</a:t>
-            </a:r>
-          </a:p>
-          <a:p>
-            <a:pPr>
-              <a:spcAft>
-                <a:spcPts val="600"/>
-              </a:spcAft>
-              <a:defRPr sz="1000">
-                <a:solidFill>
-                  <a:srgbClr val="64748B"/>
-                </a:solidFill>
-              </a:defRPr>
-            </a:pPr>
-            <a:r>
-              <a:t>  แสดงสถานะด้วยสีเขียว/เหลือง/แดง ชัดเจน รู้ทันทีว่าจุดไหนปกติดีหรือต้องตรวจเช็ค</a:t>
-            </a:r>
-          </a:p>
-          <a:p>
-            <a:pPr>
-              <a:defRPr b="1" sz="1100">
-                <a:solidFill>
-                  <a:srgbClr val="0F172A"/>
-                </a:solidFill>
-              </a:defRPr>
-            </a:pPr>
-            <a:r>
-              <a:t>• Offline Battery &amp; Link Monitor:</a:t>
-            </a:r>
-          </a:p>
-          <a:p>
-            <a:pPr>
-              <a:spcAft>
-                <a:spcPts val="600"/>
-              </a:spcAft>
-              <a:defRPr sz="1000">
-                <a:solidFill>
-                  <a:srgbClr val="64748B"/>
-                </a:solidFill>
-              </a:defRPr>
-            </a:pPr>
-            <a:r>
-              <a:t>  ตรวจสอบสัญญาณ WiFi/4G และระดับแบตเตอรี่สำรองของทุกตู้ได้จากระยะไกล</a:t>
+              <a:t>✔ Instant Emergency Alerts: ระบบ Push Notification แจ้งเตือนข้อความด่วนเข้ามือถือทันทีเมื่อมีจุดใดผิดปกติ</a:t>
             </a:r>
           </a:p>
         </p:txBody>

--- a/NCT_Water_Nexus_Report_and_Pricing.pptx
+++ b/NCT_Water_Nexus_Report_and_Pricing.pptx
@@ -3204,14 +3204,14 @@
               <a:spcAft>
                 <a:spcPts val="1800"/>
               </a:spcAft>
-              <a:defRPr sz="1800">
+              <a:defRPr sz="1600">
                 <a:solidFill>
                   <a:srgbClr val="CBD5E1"/>
                 </a:solidFill>
               </a:defRPr>
             </a:pPr>
             <a:r>
-              <a:t>สรุปรายการต้นทุน (BOM) และราคาขายโครงการตรวจวัดคุณภาพน้ำ (100 ชุด)</a:t>
+              <a:t>รายงานนำเสนอโซลูชันระบบตรวจวัดคุณภาพน้ำ แดชบอร์ด SCADA และโครงสร้างราคา (100 ชุด)</a:t>
             </a:r>
           </a:p>
           <a:p>
@@ -3226,15 +3226,15 @@
               </a:defRPr>
             </a:pPr>
             <a:r>
-              <a:t>• ตรวจวัด 4 ค่าหลัก: pH / TDS / อุณหภูมิ / คลอรีนคงเหลือ (Modela One + Cybertice)</a:t>
+              <a:t>• 4 พารามิเตอร์คุณภาพน้ำ: pH / TDS / อุณหภูมิน้ำ (ATC) / คลอรีนคงเหลือ (Residual Cl)</a:t>
             </a:r>
             <a:br/>
             <a:r>
-              <a:t>• ต้นทุนฮาร์ดแวร์ตู้คอนโทรล: ฿21,000 / ชุด (โครงการ 100 ชุด = ฿2,100,000)</a:t>
+              <a:t>• ระบบแดชบอร์ดคู่ขนาน: Centralized Web SCADA (จอใหญ่ห้องควบคุม) + Modela Mobile App</a:t>
             </a:r>
             <a:br/>
             <a:r>
-              <a:t>• 2 รูปแบบข้อเสนอราคา: 【 แบบที่ 1 Plug &amp; Play (2.95 - 3.20 ล้าน) 】 vs 【 แบบที่ 2 Turnkey (3.80 - 4.20 ล้าน) 】</a:t>
+              <a:t>• โครงสร้างราคาและข้อเสนอโครงการ: ตารางราคาและแพ็กเกจโครงการ 100 ชุด (หน้า 7-8)</a:t>
             </a:r>
           </a:p>
           <a:p>
@@ -3322,7 +3322,7 @@
               </a:defRPr>
             </a:pPr>
             <a:r>
-              <a:t>1. ตารางต้นทุนฮาร์ดแวร์และอุปกรณ์ต่อชุด (BOM per Unit)</a:t>
+              <a:t>1. ภาพรวมโครงการและข้อกำหนดทางเทคนิค 4 พารามิเตอร์</a:t>
             </a:r>
           </a:p>
         </p:txBody>
@@ -3336,7 +3336,7 @@
         <p:spPr>
           <a:xfrm>
             <a:off x="731520" y="1463040"/>
-            <a:ext cx="2468880" cy="3291840"/>
+            <a:ext cx="2468880" cy="4754880"/>
           </a:xfrm>
           <a:prstGeom prst="roundRect">
             <a:avLst/>
@@ -3423,8 +3423,8 @@
         </p:nvSpPr>
         <p:spPr>
           <a:xfrm>
-            <a:off x="841248" y="1536192"/>
-            <a:ext cx="2249424" cy="960120"/>
+            <a:off x="841248" y="1554480"/>
+            <a:ext cx="2249424" cy="914400"/>
           </a:xfrm>
           <a:prstGeom prst="rect">
             <a:avLst/>
@@ -3438,26 +3438,26 @@
           <a:lstStyle/>
           <a:p>
             <a:pPr>
-              <a:defRPr sz="1000" b="1">
+              <a:defRPr sz="950" b="1">
                 <a:solidFill>
                   <a:srgbClr val="FFFFFF"/>
                 </a:solidFill>
               </a:defRPr>
             </a:pPr>
             <a:r>
-              <a:t>ชุดเซนเซอร์หลัก (Modela One + pH/TDS/Temp + คลอรีน Cybertice)</a:t>
-            </a:r>
-          </a:p>
-          <a:p>
-            <a:pPr>
-              <a:defRPr sz="1500" b="1">
+              <a:t>พารามิเตอร์ #1</a:t>
+            </a:r>
+          </a:p>
+          <a:p>
+            <a:pPr>
+              <a:defRPr sz="1200" b="1">
                 <a:solidFill>
                   <a:srgbClr val="FFFFFF"/>
                 </a:solidFill>
               </a:defRPr>
             </a:pPr>
             <a:r>
-              <a:t>฿17,000</a:t>
+              <a:t>ความเป็นกรด-ด่าง (pH)</a:t>
             </a:r>
           </a:p>
         </p:txBody>
@@ -3470,8 +3470,8 @@
         </p:nvSpPr>
         <p:spPr>
           <a:xfrm>
-            <a:off x="841248" y="2651760"/>
-            <a:ext cx="2249424" cy="2011680"/>
+            <a:off x="868680" y="2743200"/>
+            <a:ext cx="2194560" cy="3200400"/>
           </a:xfrm>
           <a:prstGeom prst="rect">
             <a:avLst/>
@@ -3485,30 +3485,36 @@
           <a:lstStyle/>
           <a:p>
             <a:pPr>
-              <a:defRPr sz="880">
-                <a:solidFill>
-                  <a:srgbClr val="64748B"/>
-                </a:solidFill>
-              </a:defRPr>
-            </a:pPr>
-            <a:r>
-              <a:t>• บอร์ดควบคุมหลัก Modela One (Modbus RTU/RS-485)</a:t>
+              <a:defRPr sz="1000">
+                <a:solidFill>
+                  <a:srgbClr val="0F172A"/>
+                </a:solidFill>
+              </a:defRPr>
+            </a:pPr>
+            <a:r>
+              <a:t>• ช่วงการวัด (Range):</a:t>
             </a:r>
             <a:br/>
             <a:r>
-              <a:t>• หัววัด pH แก้วอุตสาหกรรม (±0.01 pH)</a:t>
+              <a:t>  0.00 – 14.00 pH</a:t>
             </a:r>
             <a:br/>
-            <a:r>
-              <a:t>• หัววัด TDS / EC Titanium Dual-Pole</a:t>
-            </a:r>
             <a:br/>
             <a:r>
-              <a:t>• หัววัดอุณหภูมิ PT1000 (พร้อม ATC ชดเชยอุณหภูมิ)</a:t>
+              <a:t>• ความแม่นยำ (Accuracy):</a:t>
             </a:r>
             <a:br/>
             <a:r>
-              <a:t>• เซนเซอร์คลอรีนคงเหลือ Cybertice (Residual Chlorine)</a:t>
+              <a:t>  ±0.01 pH</a:t>
+            </a:r>
+            <a:br/>
+            <a:br/>
+            <a:r>
+              <a:t>• เทคโนโลยีเซนเซอร์:</a:t>
+            </a:r>
+            <a:br/>
+            <a:r>
+              <a:t>  Industrial Glass Electrode Probe</a:t>
             </a:r>
           </a:p>
         </p:txBody>
@@ -3522,7 +3528,7 @@
         <p:spPr>
           <a:xfrm>
             <a:off x="3474720" y="1463040"/>
-            <a:ext cx="2468880" cy="3291840"/>
+            <a:ext cx="2468880" cy="4754880"/>
           </a:xfrm>
           <a:prstGeom prst="roundRect">
             <a:avLst/>
@@ -3609,8 +3615,8 @@
         </p:nvSpPr>
         <p:spPr>
           <a:xfrm>
-            <a:off x="3584448" y="1536192"/>
-            <a:ext cx="2249424" cy="960120"/>
+            <a:off x="3584448" y="1554480"/>
+            <a:ext cx="2249424" cy="914400"/>
           </a:xfrm>
           <a:prstGeom prst="rect">
             <a:avLst/>
@@ -3624,26 +3630,26 @@
           <a:lstStyle/>
           <a:p>
             <a:pPr>
-              <a:defRPr sz="1000" b="1">
+              <a:defRPr sz="950" b="1">
                 <a:solidFill>
                   <a:srgbClr val="FFFFFF"/>
                 </a:solidFill>
               </a:defRPr>
             </a:pPr>
             <a:r>
-              <a:t>4G LTE Router (TP-Link TL-MR100)</a:t>
-            </a:r>
-          </a:p>
-          <a:p>
-            <a:pPr>
-              <a:defRPr sz="1500" b="1">
+              <a:t>พารามิเตอร์ #2</a:t>
+            </a:r>
+          </a:p>
+          <a:p>
+            <a:pPr>
+              <a:defRPr sz="1200" b="1">
                 <a:solidFill>
                   <a:srgbClr val="FFFFFF"/>
                 </a:solidFill>
               </a:defRPr>
             </a:pPr>
             <a:r>
-              <a:t>฿1,000</a:t>
+              <a:t>สารละลายรวม (TDS)</a:t>
             </a:r>
           </a:p>
         </p:txBody>
@@ -3656,8 +3662,8 @@
         </p:nvSpPr>
         <p:spPr>
           <a:xfrm>
-            <a:off x="3584448" y="2651760"/>
-            <a:ext cx="2249424" cy="2011680"/>
+            <a:off x="3611880" y="2743200"/>
+            <a:ext cx="2194560" cy="3200400"/>
           </a:xfrm>
           <a:prstGeom prst="rect">
             <a:avLst/>
@@ -3671,22 +3677,36 @@
           <a:lstStyle/>
           <a:p>
             <a:pPr>
-              <a:defRPr sz="880">
-                <a:solidFill>
-                  <a:srgbClr val="64748B"/>
-                </a:solidFill>
-              </a:defRPr>
-            </a:pPr>
-            <a:r>
-              <a:t>• เราเตอร์ 4G LTE Wi-Fi ความเร็ว 300 Mbps</a:t>
+              <a:defRPr sz="1000">
+                <a:solidFill>
+                  <a:srgbClr val="0F172A"/>
+                </a:solidFill>
+              </a:defRPr>
+            </a:pPr>
+            <a:r>
+              <a:t>• ช่วงการวัด (Range):</a:t>
             </a:r>
             <a:br/>
             <a:r>
-              <a:t>• เสารับสัญญาณภายนอก 2 เสา สัญญาณนิ่งเสถียร</a:t>
+              <a:t>  0 – 2,000 ppm</a:t>
             </a:r>
             <a:br/>
-            <a:r>
-              <a:t>• เชื่อมต่อระบบ Telemetry สดทุก 1 วินาที</a:t>
+            <a:br/>
+            <a:r>
+              <a:t>• ความแม่นยำ (Accuracy):</a:t>
+            </a:r>
+            <a:br/>
+            <a:r>
+              <a:t>  ±1.5% F.S.</a:t>
+            </a:r>
+            <a:br/>
+            <a:br/>
+            <a:r>
+              <a:t>• เทคโนโลยีเซนเซอร์:</a:t>
+            </a:r>
+            <a:br/>
+            <a:r>
+              <a:t>  Titanium Dual-Pole Sensor</a:t>
             </a:r>
           </a:p>
         </p:txBody>
@@ -3700,7 +3720,7 @@
         <p:spPr>
           <a:xfrm>
             <a:off x="6217920" y="1463040"/>
-            <a:ext cx="2468880" cy="3291840"/>
+            <a:ext cx="2468880" cy="4754880"/>
           </a:xfrm>
           <a:prstGeom prst="roundRect">
             <a:avLst/>
@@ -3787,8 +3807,8 @@
         </p:nvSpPr>
         <p:spPr>
           <a:xfrm>
-            <a:off x="6327648" y="1536192"/>
-            <a:ext cx="2249424" cy="960120"/>
+            <a:off x="6327648" y="1554480"/>
+            <a:ext cx="2249424" cy="914400"/>
           </a:xfrm>
           <a:prstGeom prst="rect">
             <a:avLst/>
@@ -3802,26 +3822,26 @@
           <a:lstStyle/>
           <a:p>
             <a:pPr>
-              <a:defRPr sz="1000" b="1">
+              <a:defRPr sz="950" b="1">
                 <a:solidFill>
                   <a:srgbClr val="FFFFFF"/>
                 </a:solidFill>
               </a:defRPr>
             </a:pPr>
             <a:r>
-              <a:t>ซิมการ์ด 4G รายปี (Unlimited 15-20 Mbps)</a:t>
-            </a:r>
-          </a:p>
-          <a:p>
-            <a:pPr>
-              <a:defRPr sz="1500" b="1">
+              <a:t>พารามิเตอร์ #3</a:t>
+            </a:r>
+          </a:p>
+          <a:p>
+            <a:pPr>
+              <a:defRPr sz="1200" b="1">
                 <a:solidFill>
                   <a:srgbClr val="FFFFFF"/>
                 </a:solidFill>
               </a:defRPr>
             </a:pPr>
             <a:r>
-              <a:t>฿1,800</a:t>
+              <a:t>อุณหภูมิน้ำ (Water Temp)</a:t>
             </a:r>
           </a:p>
         </p:txBody>
@@ -3834,8 +3854,8 @@
         </p:nvSpPr>
         <p:spPr>
           <a:xfrm>
-            <a:off x="6327648" y="2651760"/>
-            <a:ext cx="2249424" cy="2011680"/>
+            <a:off x="6355080" y="2743200"/>
+            <a:ext cx="2194560" cy="3200400"/>
           </a:xfrm>
           <a:prstGeom prst="rect">
             <a:avLst/>
@@ -3849,22 +3869,36 @@
           <a:lstStyle/>
           <a:p>
             <a:pPr>
-              <a:defRPr sz="880">
-                <a:solidFill>
-                  <a:srgbClr val="64748B"/>
-                </a:solidFill>
-              </a:defRPr>
-            </a:pPr>
-            <a:r>
-              <a:t>• ซิมเน็ต IoT รายปี ไม่อั้น ไม่ลดสปีด (15-20 Mbps)</a:t>
+              <a:defRPr sz="1000">
+                <a:solidFill>
+                  <a:srgbClr val="0F172A"/>
+                </a:solidFill>
+              </a:defRPr>
+            </a:pPr>
+            <a:r>
+              <a:t>• ช่วงการวัด (Range):</a:t>
             </a:r>
             <a:br/>
             <a:r>
-              <a:t>• รวมค่าบริการเครือข่าย 12 เดือนเต็ม</a:t>
+              <a:t>  -10.0 – 80.0 °C</a:t>
             </a:r>
             <a:br/>
-            <a:r>
-              <a:t>• ส่งข้อมูลขึ้นระบบคลาวด์และแจ้งเตือน 24 ชม.</a:t>
+            <a:br/>
+            <a:r>
+              <a:t>• ความแม่นยำ (Accuracy):</a:t>
+            </a:r>
+            <a:br/>
+            <a:r>
+              <a:t>  ±0.2 °C</a:t>
+            </a:r>
+            <a:br/>
+            <a:br/>
+            <a:r>
+              <a:t>• เทคโนโลยีเซนเซอร์:</a:t>
+            </a:r>
+            <a:br/>
+            <a:r>
+              <a:t>  PT1000 RTD พร้อมระบบ ATC</a:t>
             </a:r>
           </a:p>
         </p:txBody>
@@ -3878,7 +3912,7 @@
         <p:spPr>
           <a:xfrm>
             <a:off x="8961120" y="1463040"/>
-            <a:ext cx="2468880" cy="3291840"/>
+            <a:ext cx="2468880" cy="4754880"/>
           </a:xfrm>
           <a:prstGeom prst="roundRect">
             <a:avLst/>
@@ -3965,8 +3999,8 @@
         </p:nvSpPr>
         <p:spPr>
           <a:xfrm>
-            <a:off x="9070848" y="1536192"/>
-            <a:ext cx="2249424" cy="960120"/>
+            <a:off x="9070848" y="1554480"/>
+            <a:ext cx="2249424" cy="914400"/>
           </a:xfrm>
           <a:prstGeom prst="rect">
             <a:avLst/>
@@ -3980,26 +4014,26 @@
           <a:lstStyle/>
           <a:p>
             <a:pPr>
-              <a:defRPr sz="1000" b="1">
+              <a:defRPr sz="950" b="1">
                 <a:solidFill>
                   <a:srgbClr val="FFFFFF"/>
                 </a:solidFill>
               </a:defRPr>
             </a:pPr>
             <a:r>
-              <a:t>ตู้คอนโทรล IP65 + Switching 24V + Breaker + Wiring</a:t>
-            </a:r>
-          </a:p>
-          <a:p>
-            <a:pPr>
-              <a:defRPr sz="1500" b="1">
+              <a:t>พารามิเตอร์ #4</a:t>
+            </a:r>
+          </a:p>
+          <a:p>
+            <a:pPr>
+              <a:defRPr sz="1200" b="1">
                 <a:solidFill>
                   <a:srgbClr val="FFFFFF"/>
                 </a:solidFill>
               </a:defRPr>
             </a:pPr>
             <a:r>
-              <a:t>฿1,200</a:t>
+              <a:t>คลอรีนคงเหลือ (Residual Cl)</a:t>
             </a:r>
           </a:p>
         </p:txBody>
@@ -4012,8 +4046,8 @@
         </p:nvSpPr>
         <p:spPr>
           <a:xfrm>
-            <a:off x="9070848" y="2651760"/>
-            <a:ext cx="2249424" cy="2011680"/>
+            <a:off x="9098280" y="2743200"/>
+            <a:ext cx="2194560" cy="3200400"/>
           </a:xfrm>
           <a:prstGeom prst="rect">
             <a:avLst/>
@@ -4027,117 +4061,36 @@
           <a:lstStyle/>
           <a:p>
             <a:pPr>
-              <a:defRPr sz="880">
-                <a:solidFill>
-                  <a:srgbClr val="64748B"/>
-                </a:solidFill>
-              </a:defRPr>
-            </a:pPr>
-            <a:r>
-              <a:t>• ตู้กันน้ำกันฝุ่นมาตรฐาน IP65</a:t>
+              <a:defRPr sz="1000">
+                <a:solidFill>
+                  <a:srgbClr val="0F172A"/>
+                </a:solidFill>
+              </a:defRPr>
+            </a:pPr>
+            <a:r>
+              <a:t>• ช่วงการวัด (Range):</a:t>
             </a:r>
             <a:br/>
             <a:r>
-              <a:t>• แหล่งจ่ายไฟ Switching Power Supply 24V</a:t>
+              <a:t>  0.00 – 5.00 mg/L</a:t>
             </a:r>
             <a:br/>
-            <a:r>
-              <a:t>• Breaker ป้องกันไฟเกิน + Terminal + สายไฟประกอบครบ</a:t>
-            </a:r>
-          </a:p>
-        </p:txBody>
-      </p:sp>
-      <p:sp>
-        <p:nvSpPr>
-          <p:cNvPr id="19" name="Rounded Rectangle 18"/>
-          <p:cNvSpPr/>
-          <p:nvPr/>
-        </p:nvSpPr>
-        <p:spPr>
-          <a:xfrm>
-            <a:off x="731520" y="4937760"/>
-            <a:ext cx="10728655" cy="1371600"/>
-          </a:xfrm>
-          <a:prstGeom prst="roundRect">
-            <a:avLst/>
-          </a:prstGeom>
-          <a:solidFill>
-            <a:srgbClr val="0F172A"/>
-          </a:solidFill>
-          <a:ln w="19050">
-            <a:solidFill>
-              <a:srgbClr val="0284C7"/>
-            </a:solidFill>
-          </a:ln>
-        </p:spPr>
-        <p:style>
-          <a:lnRef idx="1">
-            <a:schemeClr val="accent1"/>
-          </a:lnRef>
-          <a:fillRef idx="3">
-            <a:schemeClr val="accent1"/>
-          </a:fillRef>
-          <a:effectRef idx="2">
-            <a:schemeClr val="accent1"/>
-          </a:effectRef>
-          <a:fontRef idx="minor">
-            <a:schemeClr val="lt1"/>
-          </a:fontRef>
-        </p:style>
-        <p:txBody>
-          <a:bodyPr rtlCol="0" anchor="ctr"/>
-          <a:lstStyle/>
-          <a:p>
-            <a:pPr algn="ctr"/>
-          </a:p>
-        </p:txBody>
-      </p:sp>
-      <p:sp>
-        <p:nvSpPr>
-          <p:cNvPr id="20" name="TextBox 19"/>
-          <p:cNvSpPr txBox="1"/>
-          <p:nvPr/>
-        </p:nvSpPr>
-        <p:spPr>
-          <a:xfrm>
-            <a:off x="1005840" y="5074920"/>
-            <a:ext cx="10149840" cy="1097280"/>
-          </a:xfrm>
-          <a:prstGeom prst="rect">
-            <a:avLst/>
-          </a:prstGeom>
-          <a:noFill/>
-        </p:spPr>
-        <p:txBody>
-          <a:bodyPr wrap="square">
-            <a:spAutoFit/>
-          </a:bodyPr>
-          <a:lstStyle/>
-          <a:p>
-            <a:pPr>
-              <a:spcAft>
-                <a:spcPts val="400"/>
-              </a:spcAft>
-              <a:defRPr sz="1600" b="1">
-                <a:solidFill>
-                  <a:srgbClr val="2DD4BF"/>
-                </a:solidFill>
-              </a:defRPr>
-            </a:pPr>
-            <a:r>
-              <a:t>➡️ รวมต้นทุนต่อชุด: ฿21,000 บาท  |  รวมต้นทุนโครงการ (100 ชุด): ฿2,100,000 บาท</a:t>
-            </a:r>
-          </a:p>
-          <a:p>
-            <a:pPr>
-              <a:defRPr sz="1000">
-                <a:solidFill>
-                  <a:srgbClr val="E2E8F0"/>
-                </a:solidFill>
-              </a:defRPr>
-            </a:pPr>
-            <a:r>
-              <a:t>ต้นทุนนี้ครอบคลุมชุดหัววัดเซนเซอร์ 4 ค่า (pH / TDS / Temp / Cl) + กล่อง Modela One + เราเตอร์ 4G TP-Link + ซิมรายปี + ตู้ IP65 ประกอบสำเร็จพร้อมใช้งาน</a:t>
+            <a:br/>
+            <a:r>
+              <a:t>• ความแม่นยำ (Accuracy):</a:t>
+            </a:r>
+            <a:br/>
+            <a:r>
+              <a:t>  ±0.02 mg/L</a:t>
+            </a:r>
+            <a:br/>
+            <a:br/>
+            <a:r>
+              <a:t>• เทคโนโลยีเซนเซอร์:</a:t>
+            </a:r>
+            <a:br/>
+            <a:r>
+              <a:t>  Amperometric Membrane Sensor</a:t>
             </a:r>
           </a:p>
         </p:txBody>
@@ -4213,21 +4166,45 @@
               </a:defRPr>
             </a:pPr>
             <a:r>
-              <a:t>2. โครงสร้างราคาขายแนะนำ (แพ็กเกจ 100 ชุด รวม App + Web Dashboard)</a:t>
-            </a:r>
-          </a:p>
-        </p:txBody>
-      </p:sp>
-      <p:sp>
-        <p:nvSpPr>
-          <p:cNvPr id="3" name="Rounded Rectangle 2"/>
+              <a:t>2. ตัวอย่างหน้าจอ Centralized Web SCADA Dashboard (จอห้องควบคุม 100 จุด)</a:t>
+            </a:r>
+          </a:p>
+        </p:txBody>
+      </p:sp>
+      <p:pic>
+        <p:nvPicPr>
+          <p:cNvPr id="3" name="Picture 2" descr="scada_hd_preview.png"/>
+          <p:cNvPicPr>
+            <a:picLocks noChangeAspect="1"/>
+          </p:cNvPicPr>
+          <p:nvPr/>
+        </p:nvPicPr>
+        <p:blipFill>
+          <a:blip r:embed="rId2"/>
+          <a:stretch>
+            <a:fillRect/>
+          </a:stretch>
+        </p:blipFill>
+        <p:spPr>
+          <a:xfrm>
+            <a:off x="731520" y="1463040"/>
+            <a:ext cx="6217920" cy="4754880"/>
+          </a:xfrm>
+          <a:prstGeom prst="rect">
+            <a:avLst/>
+          </a:prstGeom>
+        </p:spPr>
+      </p:pic>
+      <p:sp>
+        <p:nvSpPr>
+          <p:cNvPr id="4" name="Rounded Rectangle 3"/>
           <p:cNvSpPr/>
           <p:nvPr/>
         </p:nvSpPr>
         <p:spPr>
           <a:xfrm>
-            <a:off x="731520" y="1463040"/>
-            <a:ext cx="5120640" cy="4754880"/>
+            <a:off x="7132320" y="1463040"/>
+            <a:ext cx="4327855" cy="4754880"/>
           </a:xfrm>
           <a:prstGeom prst="roundRect">
             <a:avLst/>
@@ -4265,57 +4242,14 @@
       </p:sp>
       <p:sp>
         <p:nvSpPr>
-          <p:cNvPr id="4" name="Rounded Rectangle 3"/>
-          <p:cNvSpPr/>
-          <p:nvPr/>
-        </p:nvSpPr>
-        <p:spPr>
-          <a:xfrm>
-            <a:off x="731520" y="1463040"/>
-            <a:ext cx="5120640" cy="1188720"/>
-          </a:xfrm>
-          <a:prstGeom prst="roundRect">
-            <a:avLst/>
-          </a:prstGeom>
-          <a:solidFill>
-            <a:srgbClr val="0284C7"/>
-          </a:solidFill>
-          <a:ln>
-            <a:noFill/>
-          </a:ln>
-        </p:spPr>
-        <p:style>
-          <a:lnRef idx="1">
-            <a:schemeClr val="accent1"/>
-          </a:lnRef>
-          <a:fillRef idx="3">
-            <a:schemeClr val="accent1"/>
-          </a:fillRef>
-          <a:effectRef idx="2">
-            <a:schemeClr val="accent1"/>
-          </a:effectRef>
-          <a:fontRef idx="minor">
-            <a:schemeClr val="lt1"/>
-          </a:fontRef>
-        </p:style>
-        <p:txBody>
-          <a:bodyPr rtlCol="0" anchor="ctr"/>
-          <a:lstStyle/>
-          <a:p>
-            <a:pPr algn="ctr"/>
-          </a:p>
-        </p:txBody>
-      </p:sp>
-      <p:sp>
-        <p:nvSpPr>
           <p:cNvPr id="5" name="TextBox 4"/>
           <p:cNvSpPr txBox="1"/>
           <p:nvPr/>
         </p:nvSpPr>
         <p:spPr>
           <a:xfrm>
-            <a:off x="914400" y="1554480"/>
-            <a:ext cx="4754880" cy="1005840"/>
+            <a:off x="7315200" y="1600200"/>
+            <a:ext cx="3962095" cy="4480560"/>
           </a:xfrm>
           <a:prstGeom prst="rect">
             <a:avLst/>
@@ -4329,425 +4263,107 @@
           <a:lstStyle/>
           <a:p>
             <a:pPr>
+              <a:spcAft>
+                <a:spcPts val="800"/>
+              </a:spcAft>
               <a:defRPr sz="1300" b="1">
                 <a:solidFill>
-                  <a:srgbClr val="FFFFFF"/>
-                </a:solidFill>
-              </a:defRPr>
-            </a:pPr>
-            <a:r>
-              <a:t>[แบบที่ 1] ส่งมอบอุปกรณ์พร้อมระบบออนไลน์</a:t>
-            </a:r>
-          </a:p>
-          <a:p>
-            <a:pPr>
-              <a:defRPr sz="1100" b="1">
-                <a:solidFill>
-                  <a:srgbClr val="FFFFFF"/>
-                </a:solidFill>
-              </a:defRPr>
-            </a:pPr>
-            <a:r>
-              <a:t>Plug &amp; Play / Supply Only (ราคา ฿29,500 - ฿32,000 / ชุด)</a:t>
-            </a:r>
-          </a:p>
-        </p:txBody>
-      </p:sp>
-      <p:sp>
-        <p:nvSpPr>
-          <p:cNvPr id="6" name="TextBox 5"/>
-          <p:cNvSpPr txBox="1"/>
-          <p:nvPr/>
-        </p:nvSpPr>
-        <p:spPr>
-          <a:xfrm>
-            <a:off x="914400" y="2743200"/>
-            <a:ext cx="4754880" cy="3383280"/>
-          </a:xfrm>
-          <a:prstGeom prst="rect">
-            <a:avLst/>
-          </a:prstGeom>
-          <a:noFill/>
-        </p:spPr>
-        <p:txBody>
-          <a:bodyPr wrap="square">
-            <a:spAutoFit/>
-          </a:bodyPr>
-          <a:lstStyle/>
+                  <a:srgbClr val="0284C7"/>
+                </a:solidFill>
+              </a:defRPr>
+            </a:pPr>
+            <a:r>
+              <a:t>💻 คำอธิบายฟังก์ชันหน้าจอ SCADA:</a:t>
+            </a:r>
+          </a:p>
           <a:p>
             <a:pPr>
               <a:spcAft>
-                <a:spcPts val="400"/>
-              </a:spcAft>
-              <a:defRPr b="1" sz="1100">
-                <a:solidFill>
-                  <a:srgbClr val="0F172A"/>
-                </a:solidFill>
-              </a:defRPr>
-            </a:pPr>
-            <a:r>
-              <a:t>📋 ขอบเขตงาน (Scope of Work):</a:t>
-            </a:r>
-          </a:p>
-          <a:p>
-            <a:pPr>
-              <a:spcAft>
-                <a:spcPts val="200"/>
+                <a:spcPts val="300"/>
               </a:spcAft>
               <a:defRPr sz="950">
                 <a:solidFill>
-                  <a:srgbClr val="64748B"/>
-                </a:solidFill>
-              </a:defRPr>
-            </a:pPr>
-            <a:r>
-              <a:t>✔ ประกอบตู้คอนโทรลสำเร็จรูป พร้อมเดินระบบไฟภายใน</a:t>
+                  <a:srgbClr val="0F172A"/>
+                </a:solidFill>
+              </a:defRPr>
+            </a:pPr>
+            <a:r>
+              <a:t>❶ สถานะระบบ &amp; แบตเตอรี่: แสดงสถานะ Healthy, สัญญาณ 4G/WiFi และแบต LiFePO4 (90%)</a:t>
             </a:r>
           </a:p>
           <a:p>
             <a:pPr>
               <a:spcAft>
-                <a:spcPts val="200"/>
+                <a:spcPts val="300"/>
               </a:spcAft>
               <a:defRPr sz="950">
                 <a:solidFill>
-                  <a:srgbClr val="64748B"/>
-                </a:solidFill>
-              </a:defRPr>
-            </a:pPr>
-            <a:r>
-              <a:t>✔ ใส่ซิมรายปีและตั้งค่าเชื่อมต่อเน็ตเวิร์ก 4G LTE</a:t>
+                  <a:srgbClr val="0F172A"/>
+                </a:solidFill>
+              </a:defRPr>
+            </a:pPr>
+            <a:r>
+              <a:t>❷ การ์ดตรวจวัด 4 ค่าหลัก: อุณหภูมิน้ำ (ATC), pH (Glass Probe), TDS (ppm), Cl (mg/L)</a:t>
             </a:r>
           </a:p>
           <a:p>
             <a:pPr>
               <a:spcAft>
-                <a:spcPts val="200"/>
+                <a:spcPts val="300"/>
               </a:spcAft>
               <a:defRPr sz="950">
                 <a:solidFill>
-                  <a:srgbClr val="64748B"/>
-                </a:solidFill>
-              </a:defRPr>
-            </a:pPr>
-            <a:r>
-              <a:t>✔ เชื่อมต่อ Modbus อ่านค่า pH, TDS, Temp, Chlorine</a:t>
+                  <a:srgbClr val="0F172A"/>
+                </a:solidFill>
+              </a:defRPr>
+            </a:pPr>
+            <a:r>
+              <a:t>❸ กราฟแนวโน้ม Real-Time: พล็อตข้อมูลสด 1 วินาที ติดตามค่าน้ำ 24 ชม. พร้อมซูมดูย้อนหลัง</a:t>
             </a:r>
           </a:p>
           <a:p>
             <a:pPr>
               <a:spcAft>
-                <a:spcPts val="200"/>
+                <a:spcPts val="300"/>
               </a:spcAft>
               <a:defRPr sz="950">
                 <a:solidFill>
-                  <a:srgbClr val="64748B"/>
-                </a:solidFill>
-              </a:defRPr>
-            </a:pPr>
-            <a:r>
-              <a:t>✔ ตั้งค่าระบบ Modela App สำหรับดูข้อมูลและแจ้งเตือนผ่านมือถือ</a:t>
+                  <a:srgbClr val="0F172A"/>
+                </a:solidFill>
+              </a:defRPr>
+            </a:pPr>
+            <a:r>
+              <a:t>❹ ไดอะแกรมเชื่อมต่อ: ตรวจจับสายสัญญาณ WiFi ➔ Display ➔ Sensor Probes</a:t>
             </a:r>
           </a:p>
           <a:p>
             <a:pPr>
               <a:spcAft>
-                <a:spcPts val="200"/>
+                <a:spcPts val="300"/>
               </a:spcAft>
               <a:defRPr sz="950">
                 <a:solidFill>
-                  <a:srgbClr val="64748B"/>
-                </a:solidFill>
-              </a:defRPr>
-            </a:pPr>
-            <a:r>
-              <a:t>✔ จัดทำ Web Dashboard กลางรวมข้อมูลทั้ง 100 จุด</a:t>
-            </a:r>
-          </a:p>
-          <a:p>
-            <a:pPr>
-              <a:spcBef>
-                <a:spcPts val="800"/>
-              </a:spcBef>
-              <a:defRPr b="1" sz="1000">
-                <a:solidFill>
-                  <a:srgbClr val="0284C7"/>
-                </a:solidFill>
-              </a:defRPr>
-            </a:pPr>
-            <a:r>
-              <a:t>💰 มูลค่าโครงการรวม (100 ชุด): ฿2,950,000 - ฿3,200,000 บาท</a:t>
-            </a:r>
-            <a:br/>
-            <a:r>
-              <a:t>📈 กำไรขั้นต้นโดยประมาณ: ฿850,000 - ฿1,100,000 บาท (Margin ~29-34%)</a:t>
-            </a:r>
-          </a:p>
-        </p:txBody>
-      </p:sp>
-      <p:sp>
-        <p:nvSpPr>
-          <p:cNvPr id="7" name="Rounded Rectangle 6"/>
-          <p:cNvSpPr/>
-          <p:nvPr/>
-        </p:nvSpPr>
-        <p:spPr>
-          <a:xfrm>
-            <a:off x="6309360" y="1463040"/>
-            <a:ext cx="5120640" cy="4754880"/>
-          </a:xfrm>
-          <a:prstGeom prst="roundRect">
-            <a:avLst/>
-          </a:prstGeom>
-          <a:solidFill>
-            <a:srgbClr val="FFFFFF"/>
-          </a:solidFill>
-          <a:ln w="19050">
-            <a:solidFill>
-              <a:srgbClr val="059669"/>
-            </a:solidFill>
-          </a:ln>
-        </p:spPr>
-        <p:style>
-          <a:lnRef idx="1">
-            <a:schemeClr val="accent1"/>
-          </a:lnRef>
-          <a:fillRef idx="3">
-            <a:schemeClr val="accent1"/>
-          </a:fillRef>
-          <a:effectRef idx="2">
-            <a:schemeClr val="accent1"/>
-          </a:effectRef>
-          <a:fontRef idx="minor">
-            <a:schemeClr val="lt1"/>
-          </a:fontRef>
-        </p:style>
-        <p:txBody>
-          <a:bodyPr rtlCol="0" anchor="ctr"/>
-          <a:lstStyle/>
-          <a:p>
-            <a:pPr algn="ctr"/>
-          </a:p>
-        </p:txBody>
-      </p:sp>
-      <p:sp>
-        <p:nvSpPr>
-          <p:cNvPr id="8" name="Rounded Rectangle 7"/>
-          <p:cNvSpPr/>
-          <p:nvPr/>
-        </p:nvSpPr>
-        <p:spPr>
-          <a:xfrm>
-            <a:off x="6309360" y="1463040"/>
-            <a:ext cx="5120640" cy="1188720"/>
-          </a:xfrm>
-          <a:prstGeom prst="roundRect">
-            <a:avLst/>
-          </a:prstGeom>
-          <a:solidFill>
-            <a:srgbClr val="059669"/>
-          </a:solidFill>
-          <a:ln>
-            <a:noFill/>
-          </a:ln>
-        </p:spPr>
-        <p:style>
-          <a:lnRef idx="1">
-            <a:schemeClr val="accent1"/>
-          </a:lnRef>
-          <a:fillRef idx="3">
-            <a:schemeClr val="accent1"/>
-          </a:fillRef>
-          <a:effectRef idx="2">
-            <a:schemeClr val="accent1"/>
-          </a:effectRef>
-          <a:fontRef idx="minor">
-            <a:schemeClr val="lt1"/>
-          </a:fontRef>
-        </p:style>
-        <p:txBody>
-          <a:bodyPr rtlCol="0" anchor="ctr"/>
-          <a:lstStyle/>
-          <a:p>
-            <a:pPr algn="ctr"/>
-          </a:p>
-        </p:txBody>
-      </p:sp>
-      <p:sp>
-        <p:nvSpPr>
-          <p:cNvPr id="9" name="TextBox 8"/>
-          <p:cNvSpPr txBox="1"/>
-          <p:nvPr/>
-        </p:nvSpPr>
-        <p:spPr>
-          <a:xfrm>
-            <a:off x="6492240" y="1554480"/>
-            <a:ext cx="4754880" cy="1005840"/>
-          </a:xfrm>
-          <a:prstGeom prst="rect">
-            <a:avLst/>
-          </a:prstGeom>
-          <a:noFill/>
-        </p:spPr>
-        <p:txBody>
-          <a:bodyPr wrap="square">
-            <a:spAutoFit/>
-          </a:bodyPr>
-          <a:lstStyle/>
-          <a:p>
-            <a:pPr>
-              <a:defRPr sz="1300" b="1">
-                <a:solidFill>
-                  <a:srgbClr val="FFFFFF"/>
-                </a:solidFill>
-              </a:defRPr>
-            </a:pPr>
-            <a:r>
-              <a:t>[แบบที่ 2] แบบครบวงจร รวมติดตั้งหน้างาน + สอบเทียบ</a:t>
-            </a:r>
-          </a:p>
-          <a:p>
-            <a:pPr>
-              <a:defRPr sz="1100" b="1">
-                <a:solidFill>
-                  <a:srgbClr val="FFFFFF"/>
-                </a:solidFill>
-              </a:defRPr>
-            </a:pPr>
-            <a:r>
-              <a:t>Turnkey Solution (ราคา ฿38,000 - ฿42,000 / ชุด)</a:t>
-            </a:r>
-          </a:p>
-        </p:txBody>
-      </p:sp>
-      <p:sp>
-        <p:nvSpPr>
-          <p:cNvPr id="10" name="TextBox 9"/>
-          <p:cNvSpPr txBox="1"/>
-          <p:nvPr/>
-        </p:nvSpPr>
-        <p:spPr>
-          <a:xfrm>
-            <a:off x="6492240" y="2743200"/>
-            <a:ext cx="4754880" cy="3383280"/>
-          </a:xfrm>
-          <a:prstGeom prst="rect">
-            <a:avLst/>
-          </a:prstGeom>
-          <a:noFill/>
-        </p:spPr>
-        <p:txBody>
-          <a:bodyPr wrap="square">
-            <a:spAutoFit/>
-          </a:bodyPr>
-          <a:lstStyle/>
+                  <a:srgbClr val="0F172A"/>
+                </a:solidFill>
+              </a:defRPr>
+            </a:pPr>
+            <a:r>
+              <a:t>❺ Digital Calibration: สอบเทียบหัววัด pH 7.00 / 4.01 ผ่านหน้าเว็บในคลิกเดียว</a:t>
+            </a:r>
+          </a:p>
           <a:p>
             <a:pPr>
               <a:spcAft>
-                <a:spcPts val="400"/>
-              </a:spcAft>
-              <a:defRPr b="1" sz="1100">
-                <a:solidFill>
-                  <a:srgbClr val="0F172A"/>
-                </a:solidFill>
-              </a:defRPr>
-            </a:pPr>
-            <a:r>
-              <a:t>📋 ขอบเขตงาน (Scope of Work):</a:t>
-            </a:r>
-          </a:p>
-          <a:p>
-            <a:pPr>
-              <a:spcAft>
-                <a:spcPts val="200"/>
+                <a:spcPts val="300"/>
               </a:spcAft>
               <a:defRPr sz="950">
                 <a:solidFill>
-                  <a:srgbClr val="64748B"/>
-                </a:solidFill>
-              </a:defRPr>
-            </a:pPr>
-            <a:r>
-              <a:t>✔ ทุกอย่างในแบบที่ 1 (ตู้ + ซิม + Modbus + App + Web Dashboard)</a:t>
-            </a:r>
-          </a:p>
-          <a:p>
-            <a:pPr>
-              <a:spcAft>
-                <a:spcPts val="200"/>
-              </a:spcAft>
-              <a:defRPr sz="950">
-                <a:solidFill>
-                  <a:srgbClr val="64748B"/>
-                </a:solidFill>
-              </a:defRPr>
-            </a:pPr>
-            <a:r>
-              <a:t>✔ ค่าแรงและทีมงานเข้าติดตั้งยึดตู้ / เดินท่อบายพาสหน้างาน</a:t>
-            </a:r>
-          </a:p>
-          <a:p>
-            <a:pPr>
-              <a:spcAft>
-                <a:spcPts val="200"/>
-              </a:spcAft>
-              <a:defRPr sz="950">
-                <a:solidFill>
-                  <a:srgbClr val="64748B"/>
-                </a:solidFill>
-              </a:defRPr>
-            </a:pPr>
-            <a:r>
-              <a:t>✔ สอบเทียบ (Calibration) หัววัด pH / TDS ด้วยน้ำยามาตรฐานหน้างาน</a:t>
-            </a:r>
-          </a:p>
-          <a:p>
-            <a:pPr>
-              <a:spcAft>
-                <a:spcPts val="200"/>
-              </a:spcAft>
-              <a:defRPr sz="950">
-                <a:solidFill>
-                  <a:srgbClr val="64748B"/>
-                </a:solidFill>
-              </a:defRPr>
-            </a:pPr>
-            <a:r>
-              <a:t>✔ อบรมการใช้งานระบบและส่งมอบคู่มือการปฏิบัติงาน</a:t>
-            </a:r>
-          </a:p>
-          <a:p>
-            <a:pPr>
-              <a:spcAft>
-                <a:spcPts val="200"/>
-              </a:spcAft>
-              <a:defRPr sz="950">
-                <a:solidFill>
-                  <a:srgbClr val="64748B"/>
-                </a:solidFill>
-              </a:defRPr>
-            </a:pPr>
-            <a:r>
-              <a:t>✔ รับประกันระบบและบริการ On-site Service ตลอด 1 ปีเต็ม</a:t>
-            </a:r>
-          </a:p>
-          <a:p>
-            <a:pPr>
-              <a:spcBef>
-                <a:spcPts val="800"/>
-              </a:spcBef>
-              <a:defRPr b="1" sz="1000">
-                <a:solidFill>
-                  <a:srgbClr val="059669"/>
-                </a:solidFill>
-              </a:defRPr>
-            </a:pPr>
-            <a:r>
-              <a:t>💰 มูลค่าโครงการรวม (100 ชุด): ฿3,800,000 - ฿4,200,000 บาท</a:t>
-            </a:r>
-            <a:br/>
-            <a:r>
-              <a:t>📈 กำไรขั้นต้นโดยประมาณ: ฿1,700,000 - ฿2,100,000 บาท (Margin ~45-50%)</a:t>
+                  <a:srgbClr val="0F172A"/>
+                </a:solidFill>
+              </a:defRPr>
+            </a:pPr>
+            <a:r>
+              <a:t>❻ ส่งออกรายงาน: Export ข้อมูลเป็น Excel / PDF สำหรับรายงาน ISO ทันที</a:t>
             </a:r>
           </a:p>
         </p:txBody>
@@ -4823,56 +4439,35 @@
               </a:defRPr>
             </a:pPr>
             <a:r>
-              <a:t>3. ราคาซอฟต์แวร์ Dashboard &amp; ระบบแจ้งเตือน (3 Option ทางเลือก)</a:t>
-            </a:r>
-          </a:p>
-        </p:txBody>
-      </p:sp>
-      <p:sp>
-        <p:nvSpPr>
-          <p:cNvPr id="3" name="Rounded Rectangle 2"/>
-          <p:cNvSpPr/>
+              <a:t>3. ตัวอย่างหน้าจอมือถือ (Modela Mobile Companion App)</a:t>
+            </a:r>
+          </a:p>
+        </p:txBody>
+      </p:sp>
+      <p:pic>
+        <p:nvPicPr>
+          <p:cNvPr id="3" name="Picture 2" descr="mobile_hd_preview.png"/>
+          <p:cNvPicPr>
+            <a:picLocks noChangeAspect="1"/>
+          </p:cNvPicPr>
           <p:nvPr/>
-        </p:nvSpPr>
+        </p:nvPicPr>
+        <p:blipFill>
+          <a:blip r:embed="rId2"/>
+          <a:stretch>
+            <a:fillRect/>
+          </a:stretch>
+        </p:blipFill>
         <p:spPr>
           <a:xfrm>
             <a:off x="731520" y="1463040"/>
-            <a:ext cx="3383280" cy="4754880"/>
-          </a:xfrm>
-          <a:prstGeom prst="roundRect">
+            <a:ext cx="2377440" cy="4754880"/>
+          </a:xfrm>
+          <a:prstGeom prst="rect">
             <a:avLst/>
           </a:prstGeom>
-          <a:solidFill>
-            <a:srgbClr val="FFFFFF"/>
-          </a:solidFill>
-          <a:ln w="19050">
-            <a:solidFill>
-              <a:srgbClr val="0284C7"/>
-            </a:solidFill>
-          </a:ln>
-        </p:spPr>
-        <p:style>
-          <a:lnRef idx="1">
-            <a:schemeClr val="accent1"/>
-          </a:lnRef>
-          <a:fillRef idx="3">
-            <a:schemeClr val="accent1"/>
-          </a:fillRef>
-          <a:effectRef idx="2">
-            <a:schemeClr val="accent1"/>
-          </a:effectRef>
-          <a:fontRef idx="minor">
-            <a:schemeClr val="lt1"/>
-          </a:fontRef>
-        </p:style>
-        <p:txBody>
-          <a:bodyPr rtlCol="0" anchor="ctr"/>
-          <a:lstStyle/>
-          <a:p>
-            <a:pPr algn="ctr"/>
-          </a:p>
-        </p:txBody>
-      </p:sp>
+        </p:spPr>
+      </p:pic>
       <p:sp>
         <p:nvSpPr>
           <p:cNvPr id="4" name="Rounded Rectangle 3"/>
@@ -4881,242 +4476,8 @@
         </p:nvSpPr>
         <p:spPr>
           <a:xfrm>
-            <a:off x="731520" y="1463040"/>
-            <a:ext cx="3383280" cy="1280160"/>
-          </a:xfrm>
-          <a:prstGeom prst="roundRect">
-            <a:avLst/>
-          </a:prstGeom>
-          <a:solidFill>
-            <a:srgbClr val="0284C7"/>
-          </a:solidFill>
-          <a:ln>
-            <a:noFill/>
-          </a:ln>
-        </p:spPr>
-        <p:style>
-          <a:lnRef idx="1">
-            <a:schemeClr val="accent1"/>
-          </a:lnRef>
-          <a:fillRef idx="3">
-            <a:schemeClr val="accent1"/>
-          </a:fillRef>
-          <a:effectRef idx="2">
-            <a:schemeClr val="accent1"/>
-          </a:effectRef>
-          <a:fontRef idx="minor">
-            <a:schemeClr val="lt1"/>
-          </a:fontRef>
-        </p:style>
-        <p:txBody>
-          <a:bodyPr rtlCol="0" anchor="ctr"/>
-          <a:lstStyle/>
-          <a:p>
-            <a:pPr algn="ctr"/>
-          </a:p>
-        </p:txBody>
-      </p:sp>
-      <p:sp>
-        <p:nvSpPr>
-          <p:cNvPr id="5" name="TextBox 4"/>
-          <p:cNvSpPr txBox="1"/>
-          <p:nvPr/>
-        </p:nvSpPr>
-        <p:spPr>
-          <a:xfrm>
-            <a:off x="914400" y="1554480"/>
-            <a:ext cx="3017520" cy="1097280"/>
-          </a:xfrm>
-          <a:prstGeom prst="rect">
-            <a:avLst/>
-          </a:prstGeom>
-          <a:noFill/>
-        </p:spPr>
-        <p:txBody>
-          <a:bodyPr wrap="square">
-            <a:spAutoFit/>
-          </a:bodyPr>
-          <a:lstStyle/>
-          <a:p>
-            <a:pPr>
-              <a:defRPr sz="950" b="1">
-                <a:solidFill>
-                  <a:srgbClr val="FFFFFF"/>
-                </a:solidFill>
-              </a:defRPr>
-            </a:pPr>
-            <a:r>
-              <a:t>[ Option 1 ] ★ แนะนำ คุ้มค่าสูงสุด</a:t>
-            </a:r>
-          </a:p>
-          <a:p>
-            <a:pPr>
-              <a:defRPr sz="1350" b="1">
-                <a:solidFill>
-                  <a:srgbClr val="FFFFFF"/>
-                </a:solidFill>
-              </a:defRPr>
-            </a:pPr>
-            <a:r>
-              <a:t>แอปมือถือ + Telegram</a:t>
-            </a:r>
-          </a:p>
-        </p:txBody>
-      </p:sp>
-      <p:sp>
-        <p:nvSpPr>
-          <p:cNvPr id="6" name="TextBox 5"/>
-          <p:cNvSpPr txBox="1"/>
-          <p:nvPr/>
-        </p:nvSpPr>
-        <p:spPr>
-          <a:xfrm>
-            <a:off x="914400" y="2834640"/>
-            <a:ext cx="3017520" cy="3291840"/>
-          </a:xfrm>
-          <a:prstGeom prst="rect">
-            <a:avLst/>
-          </a:prstGeom>
-          <a:noFill/>
-        </p:spPr>
-        <p:txBody>
-          <a:bodyPr wrap="square">
-            <a:spAutoFit/>
-          </a:bodyPr>
-          <a:lstStyle/>
-          <a:p>
-            <a:pPr>
-              <a:defRPr b="1" sz="1050">
-                <a:solidFill>
-                  <a:srgbClr val="0284C7"/>
-                </a:solidFill>
-              </a:defRPr>
-            </a:pPr>
-            <a:r>
-              <a:t>• แบบซื้อขาด: ฿250,000 (2,500 บ./จุด)</a:t>
-            </a:r>
-          </a:p>
-          <a:p>
-            <a:pPr>
-              <a:spcAft>
-                <a:spcPts val="600"/>
-              </a:spcAft>
-              <a:defRPr b="1" sz="1000">
-                <a:solidFill>
-                  <a:srgbClr val="059669"/>
-                </a:solidFill>
-              </a:defRPr>
-            </a:pPr>
-            <a:r>
-              <a:t>• แบบรายปี: ฿170,000 (ปีแรก)</a:t>
-            </a:r>
-            <a:br/>
-            <a:r>
-              <a:t>  (ปีถัดไป ฿120,000 บ./ปี (1,200 บ./จุด/ปี))</a:t>
-            </a:r>
-          </a:p>
-          <a:p>
-            <a:pPr>
-              <a:spcAft>
-                <a:spcPts val="600"/>
-              </a:spcAft>
-              <a:defRPr sz="900" b="1">
-                <a:solidFill>
-                  <a:srgbClr val="0F172A"/>
-                </a:solidFill>
-              </a:defRPr>
-            </a:pPr>
-            <a:r>
-              <a:t>💡 จุดเด่น: แจ้งเตือนฟรีตลอดชีพ ไม่มีค่าส่งข้อความ</a:t>
-            </a:r>
-          </a:p>
-          <a:p>
-            <a:pPr>
-              <a:spcAft>
-                <a:spcPts val="200"/>
-              </a:spcAft>
-              <a:defRPr sz="880">
-                <a:solidFill>
-                  <a:srgbClr val="64748B"/>
-                </a:solidFill>
-              </a:defRPr>
-            </a:pPr>
-            <a:r>
-              <a:t>✓ Modela App (iOS &amp; Android) สลับดู 100 จุด</a:t>
-            </a:r>
-          </a:p>
-          <a:p>
-            <a:pPr>
-              <a:spcAft>
-                <a:spcPts val="200"/>
-              </a:spcAft>
-              <a:defRPr sz="880">
-                <a:solidFill>
-                  <a:srgbClr val="64748B"/>
-                </a:solidFill>
-              </a:defRPr>
-            </a:pPr>
-            <a:r>
-              <a:t>✓ แจ้งเตือนผ่าน Telegram Bot แบบกลุ่ม/เดี่ยว</a:t>
-            </a:r>
-          </a:p>
-          <a:p>
-            <a:pPr>
-              <a:spcAft>
-                <a:spcPts val="200"/>
-              </a:spcAft>
-              <a:defRPr sz="880">
-                <a:solidFill>
-                  <a:srgbClr val="64748B"/>
-                </a:solidFill>
-              </a:defRPr>
-            </a:pPr>
-            <a:r>
-              <a:t>✓ ส่งข้อความเตือนฟรี 100% ไม่จำกัดจำนวนครั้ง</a:t>
-            </a:r>
-          </a:p>
-          <a:p>
-            <a:pPr>
-              <a:spcAft>
-                <a:spcPts val="200"/>
-              </a:spcAft>
-              <a:defRPr sz="880">
-                <a:solidFill>
-                  <a:srgbClr val="64748B"/>
-                </a:solidFill>
-              </a:defRPr>
-            </a:pPr>
-            <a:r>
-              <a:t>✓ ไม่มีต้นทุนแฝง กำไรเต็มเม็ดเต็มหน่วย</a:t>
-            </a:r>
-          </a:p>
-          <a:p>
-            <a:pPr>
-              <a:spcAft>
-                <a:spcPts val="200"/>
-              </a:spcAft>
-              <a:defRPr sz="880">
-                <a:solidFill>
-                  <a:srgbClr val="64748B"/>
-                </a:solidFill>
-              </a:defRPr>
-            </a:pPr>
-            <a:r>
-              <a:t>✓ ฟรี Support / แก้บั๊ก 1 ปีแรก</a:t>
-            </a:r>
-          </a:p>
-        </p:txBody>
-      </p:sp>
-      <p:sp>
-        <p:nvSpPr>
-          <p:cNvPr id="7" name="Rounded Rectangle 6"/>
-          <p:cNvSpPr/>
-          <p:nvPr/>
-        </p:nvSpPr>
-        <p:spPr>
-          <a:xfrm>
-            <a:off x="4389120" y="1463040"/>
-            <a:ext cx="3383280" cy="4754880"/>
+            <a:off x="3383280" y="1463040"/>
+            <a:ext cx="8076895" cy="4754880"/>
           </a:xfrm>
           <a:prstGeom prst="roundRect">
             <a:avLst/>
@@ -5154,57 +4515,14 @@
       </p:sp>
       <p:sp>
         <p:nvSpPr>
-          <p:cNvPr id="8" name="Rounded Rectangle 7"/>
-          <p:cNvSpPr/>
-          <p:nvPr/>
-        </p:nvSpPr>
-        <p:spPr>
-          <a:xfrm>
-            <a:off x="4389120" y="1463040"/>
-            <a:ext cx="3383280" cy="1280160"/>
-          </a:xfrm>
-          <a:prstGeom prst="roundRect">
-            <a:avLst/>
-          </a:prstGeom>
-          <a:solidFill>
-            <a:srgbClr val="059669"/>
-          </a:solidFill>
-          <a:ln>
-            <a:noFill/>
-          </a:ln>
-        </p:spPr>
-        <p:style>
-          <a:lnRef idx="1">
-            <a:schemeClr val="accent1"/>
-          </a:lnRef>
-          <a:fillRef idx="3">
-            <a:schemeClr val="accent1"/>
-          </a:fillRef>
-          <a:effectRef idx="2">
-            <a:schemeClr val="accent1"/>
-          </a:effectRef>
-          <a:fontRef idx="minor">
-            <a:schemeClr val="lt1"/>
-          </a:fontRef>
-        </p:style>
-        <p:txBody>
-          <a:bodyPr rtlCol="0" anchor="ctr"/>
-          <a:lstStyle/>
-          <a:p>
-            <a:pPr algn="ctr"/>
-          </a:p>
-        </p:txBody>
-      </p:sp>
-      <p:sp>
-        <p:nvSpPr>
-          <p:cNvPr id="9" name="TextBox 8"/>
+          <p:cNvPr id="5" name="TextBox 4"/>
           <p:cNvSpPr txBox="1"/>
           <p:nvPr/>
         </p:nvSpPr>
         <p:spPr>
           <a:xfrm>
-            <a:off x="4572000" y="1554480"/>
-            <a:ext cx="3017520" cy="1097280"/>
+            <a:off x="3657600" y="1645920"/>
+            <a:ext cx="7498079" cy="4389120"/>
           </a:xfrm>
           <a:prstGeom prst="rect">
             <a:avLst/>
@@ -5218,61 +4536,17 @@
           <a:lstStyle/>
           <a:p>
             <a:pPr>
-              <a:defRPr sz="950" b="1">
-                <a:solidFill>
-                  <a:srgbClr val="FFFFFF"/>
-                </a:solidFill>
-              </a:defRPr>
-            </a:pPr>
-            <a:r>
-              <a:t>[ Option 2 ] สำหรับห้องควบคุม SCADA</a:t>
-            </a:r>
-          </a:p>
-          <a:p>
-            <a:pPr>
-              <a:defRPr sz="1350" b="1">
-                <a:solidFill>
-                  <a:srgbClr val="FFFFFF"/>
-                </a:solidFill>
-              </a:defRPr>
-            </a:pPr>
-            <a:r>
-              <a:t>เว็บกลาง 100 จุด + Telegram</a:t>
-            </a:r>
-          </a:p>
-        </p:txBody>
-      </p:sp>
-      <p:sp>
-        <p:nvSpPr>
-          <p:cNvPr id="10" name="TextBox 9"/>
-          <p:cNvSpPr txBox="1"/>
-          <p:nvPr/>
-        </p:nvSpPr>
-        <p:spPr>
-          <a:xfrm>
-            <a:off x="4572000" y="2834640"/>
-            <a:ext cx="3017520" cy="3291840"/>
-          </a:xfrm>
-          <a:prstGeom prst="rect">
-            <a:avLst/>
-          </a:prstGeom>
-          <a:noFill/>
-        </p:spPr>
-        <p:txBody>
-          <a:bodyPr wrap="square">
-            <a:spAutoFit/>
-          </a:bodyPr>
-          <a:lstStyle/>
-          <a:p>
-            <a:pPr>
-              <a:defRPr b="1" sz="1050">
-                <a:solidFill>
-                  <a:srgbClr val="0284C7"/>
-                </a:solidFill>
-              </a:defRPr>
-            </a:pPr>
-            <a:r>
-              <a:t>• แบบซื้อขาด: ฿450,000 (4,500 บ./จุด)</a:t>
+              <a:spcAft>
+                <a:spcPts val="1000"/>
+              </a:spcAft>
+              <a:defRPr sz="1300" b="1">
+                <a:solidFill>
+                  <a:srgbClr val="059669"/>
+                </a:solidFill>
+              </a:defRPr>
+            </a:pPr>
+            <a:r>
+              <a:t>📱 คำอธิบายฟังก์ชันแอปพลิเคชันมือถือ (iOS &amp; Android):</a:t>
             </a:r>
           </a:p>
           <a:p>
@@ -5280,18 +4554,14 @@
               <a:spcAft>
                 <a:spcPts val="600"/>
               </a:spcAft>
-              <a:defRPr b="1" sz="1000">
-                <a:solidFill>
-                  <a:srgbClr val="059669"/>
-                </a:solidFill>
-              </a:defRPr>
-            </a:pPr>
-            <a:r>
-              <a:t>• แบบรายปี: ฿340,000 (ปีแรก)</a:t>
-            </a:r>
-            <a:br/>
-            <a:r>
-              <a:t>  (ปีถัดไป ฿240,000 บ./ปี (2,400 บ./จุด/ปี))</a:t>
+              <a:defRPr sz="1050">
+                <a:solidFill>
+                  <a:srgbClr val="0F172A"/>
+                </a:solidFill>
+              </a:defRPr>
+            </a:pPr>
+            <a:r>
+              <a:t>✔ All Devices Hub (100 จุด): ค้นหาและสลับดูข้อมูลสถานีตรวจวัดคุณภาพน้ำทั้ง 100 จุดได้ง่ายดายในแอปเดียว</a:t>
             </a:r>
           </a:p>
           <a:p>
@@ -5299,259 +4569,14 @@
               <a:spcAft>
                 <a:spcPts val="600"/>
               </a:spcAft>
-              <a:defRPr sz="900" b="1">
+              <a:defRPr sz="1050">
                 <a:solidFill>
                   <a:srgbClr val="0F172A"/>
                 </a:solidFill>
               </a:defRPr>
             </a:pPr>
             <a:r>
-              <a:t>💡 จุดเด่น: ดูภาพรวมและตารางสรุปทั้ง 100 จุดในจอเดียว</a:t>
-            </a:r>
-          </a:p>
-          <a:p>
-            <a:pPr>
-              <a:spcAft>
-                <a:spcPts val="200"/>
-              </a:spcAft>
-              <a:defRPr sz="880">
-                <a:solidFill>
-                  <a:srgbClr val="64748B"/>
-                </a:solidFill>
-              </a:defRPr>
-            </a:pPr>
-            <a:r>
-              <a:t>✓ Centralized Web SCADA Dashboard 100 จุด</a:t>
-            </a:r>
-          </a:p>
-          <a:p>
-            <a:pPr>
-              <a:spcAft>
-                <a:spcPts val="200"/>
-              </a:spcAft>
-              <a:defRPr sz="880">
-                <a:solidFill>
-                  <a:srgbClr val="64748B"/>
-                </a:solidFill>
-              </a:defRPr>
-            </a:pPr>
-            <a:r>
-              <a:t>✓ แผนที่ GIS Map &amp; ตารางสรุปสถานะ Real-Time</a:t>
-            </a:r>
-          </a:p>
-          <a:p>
-            <a:pPr>
-              <a:spcAft>
-                <a:spcPts val="200"/>
-              </a:spcAft>
-              <a:defRPr sz="880">
-                <a:solidFill>
-                  <a:srgbClr val="64748B"/>
-                </a:solidFill>
-              </a:defRPr>
-            </a:pPr>
-            <a:r>
-              <a:t>✓ กราฟวิเคราะห์แนวโน้ม Multi-Axis 100 สถานี</a:t>
-            </a:r>
-          </a:p>
-          <a:p>
-            <a:pPr>
-              <a:spcAft>
-                <a:spcPts val="200"/>
-              </a:spcAft>
-              <a:defRPr sz="880">
-                <a:solidFill>
-                  <a:srgbClr val="64748B"/>
-                </a:solidFill>
-              </a:defRPr>
-            </a:pPr>
-            <a:r>
-              <a:t>✓ แจ้งเตือนผ่าน Telegram Bot ทันทีเมื่อผิดปกติ</a:t>
-            </a:r>
-          </a:p>
-          <a:p>
-            <a:pPr>
-              <a:spcAft>
-                <a:spcPts val="200"/>
-              </a:spcAft>
-              <a:defRPr sz="880">
-                <a:solidFill>
-                  <a:srgbClr val="64748B"/>
-                </a:solidFill>
-              </a:defRPr>
-            </a:pPr>
-            <a:r>
-              <a:t>✓ Export รายงาน Excel / PDF ย้อนหลังได้</a:t>
-            </a:r>
-          </a:p>
-        </p:txBody>
-      </p:sp>
-      <p:sp>
-        <p:nvSpPr>
-          <p:cNvPr id="11" name="Rounded Rectangle 10"/>
-          <p:cNvSpPr/>
-          <p:nvPr/>
-        </p:nvSpPr>
-        <p:spPr>
-          <a:xfrm>
-            <a:off x="8046720" y="1463040"/>
-            <a:ext cx="3383280" cy="4754880"/>
-          </a:xfrm>
-          <a:prstGeom prst="roundRect">
-            <a:avLst/>
-          </a:prstGeom>
-          <a:solidFill>
-            <a:srgbClr val="FFFFFF"/>
-          </a:solidFill>
-          <a:ln w="19050">
-            <a:solidFill>
-              <a:srgbClr val="1E293B"/>
-            </a:solidFill>
-          </a:ln>
-        </p:spPr>
-        <p:style>
-          <a:lnRef idx="1">
-            <a:schemeClr val="accent1"/>
-          </a:lnRef>
-          <a:fillRef idx="3">
-            <a:schemeClr val="accent1"/>
-          </a:fillRef>
-          <a:effectRef idx="2">
-            <a:schemeClr val="accent1"/>
-          </a:effectRef>
-          <a:fontRef idx="minor">
-            <a:schemeClr val="lt1"/>
-          </a:fontRef>
-        </p:style>
-        <p:txBody>
-          <a:bodyPr rtlCol="0" anchor="ctr"/>
-          <a:lstStyle/>
-          <a:p>
-            <a:pPr algn="ctr"/>
-          </a:p>
-        </p:txBody>
-      </p:sp>
-      <p:sp>
-        <p:nvSpPr>
-          <p:cNvPr id="12" name="Rounded Rectangle 11"/>
-          <p:cNvSpPr/>
-          <p:nvPr/>
-        </p:nvSpPr>
-        <p:spPr>
-          <a:xfrm>
-            <a:off x="8046720" y="1463040"/>
-            <a:ext cx="3383280" cy="1280160"/>
-          </a:xfrm>
-          <a:prstGeom prst="roundRect">
-            <a:avLst/>
-          </a:prstGeom>
-          <a:solidFill>
-            <a:srgbClr val="1E293B"/>
-          </a:solidFill>
-          <a:ln>
-            <a:noFill/>
-          </a:ln>
-        </p:spPr>
-        <p:style>
-          <a:lnRef idx="1">
-            <a:schemeClr val="accent1"/>
-          </a:lnRef>
-          <a:fillRef idx="3">
-            <a:schemeClr val="accent1"/>
-          </a:fillRef>
-          <a:effectRef idx="2">
-            <a:schemeClr val="accent1"/>
-          </a:effectRef>
-          <a:fontRef idx="minor">
-            <a:schemeClr val="lt1"/>
-          </a:fontRef>
-        </p:style>
-        <p:txBody>
-          <a:bodyPr rtlCol="0" anchor="ctr"/>
-          <a:lstStyle/>
-          <a:p>
-            <a:pPr algn="ctr"/>
-          </a:p>
-        </p:txBody>
-      </p:sp>
-      <p:sp>
-        <p:nvSpPr>
-          <p:cNvPr id="13" name="TextBox 12"/>
-          <p:cNvSpPr txBox="1"/>
-          <p:nvPr/>
-        </p:nvSpPr>
-        <p:spPr>
-          <a:xfrm>
-            <a:off x="8229600" y="1554480"/>
-            <a:ext cx="3017520" cy="1097280"/>
-          </a:xfrm>
-          <a:prstGeom prst="rect">
-            <a:avLst/>
-          </a:prstGeom>
-          <a:noFill/>
-        </p:spPr>
-        <p:txBody>
-          <a:bodyPr wrap="square">
-            <a:spAutoFit/>
-          </a:bodyPr>
-          <a:lstStyle/>
-          <a:p>
-            <a:pPr>
-              <a:defRPr sz="950" b="1">
-                <a:solidFill>
-                  <a:srgbClr val="2DD4BF"/>
-                </a:solidFill>
-              </a:defRPr>
-            </a:pPr>
-            <a:r>
-              <a:t>[ Option 3 ] ครบวงจร + แจ้งเตือน LINE</a:t>
-            </a:r>
-          </a:p>
-          <a:p>
-            <a:pPr>
-              <a:defRPr sz="1350" b="1">
-                <a:solidFill>
-                  <a:srgbClr val="FFFFFF"/>
-                </a:solidFill>
-              </a:defRPr>
-            </a:pPr>
-            <a:r>
-              <a:t>เว็บกลาง + แอป + LINE OA</a:t>
-            </a:r>
-          </a:p>
-        </p:txBody>
-      </p:sp>
-      <p:sp>
-        <p:nvSpPr>
-          <p:cNvPr id="14" name="TextBox 13"/>
-          <p:cNvSpPr txBox="1"/>
-          <p:nvPr/>
-        </p:nvSpPr>
-        <p:spPr>
-          <a:xfrm>
-            <a:off x="8229600" y="2834640"/>
-            <a:ext cx="3017520" cy="3291840"/>
-          </a:xfrm>
-          <a:prstGeom prst="rect">
-            <a:avLst/>
-          </a:prstGeom>
-          <a:noFill/>
-        </p:spPr>
-        <p:txBody>
-          <a:bodyPr wrap="square">
-            <a:spAutoFit/>
-          </a:bodyPr>
-          <a:lstStyle/>
-          <a:p>
-            <a:pPr>
-              <a:defRPr b="1" sz="1050">
-                <a:solidFill>
-                  <a:srgbClr val="0284C7"/>
-                </a:solidFill>
-              </a:defRPr>
-            </a:pPr>
-            <a:r>
-              <a:t>• แบบซื้อขาด: ฿600,000 (6,000 บ./จุด)</a:t>
+              <a:t>✔ Hero Metric Display: แสดงค่า pH และ คลอรีนคงเหลือ (Cl) ด้วยตัวเลขขนาดใหญ่ สีสันอ่านง่าย รู้ผลทันที</a:t>
             </a:r>
           </a:p>
           <a:p>
@@ -5559,18 +4584,14 @@
               <a:spcAft>
                 <a:spcPts val="600"/>
               </a:spcAft>
-              <a:defRPr b="1" sz="1000">
-                <a:solidFill>
-                  <a:srgbClr val="059669"/>
-                </a:solidFill>
-              </a:defRPr>
-            </a:pPr>
-            <a:r>
-              <a:t>• แบบรายปี: ฿510,000 (ปีแรก)</a:t>
-            </a:r>
-            <a:br/>
-            <a:r>
-              <a:t>  (ปีถัดไป ฿360,000 บ./ปี (3,600 บ./จุด/ปี))</a:t>
+              <a:defRPr sz="1050">
+                <a:solidFill>
+                  <a:srgbClr val="0F172A"/>
+                </a:solidFill>
+              </a:defRPr>
+            </a:pPr>
+            <a:r>
+              <a:t>✔ Ambient &amp; Water Temp: แสดงอุณหภูมิน้ำทั้งหน่วยเซลเซียส (°C) และฟาเรนไฮต์ (°F) พร้อมระบบชดเชยอุณหภูมิ ATC</a:t>
             </a:r>
           </a:p>
           <a:p>
@@ -5578,89 +4599,29 @@
               <a:spcAft>
                 <a:spcPts val="600"/>
               </a:spcAft>
-              <a:defRPr sz="900" b="1">
+              <a:defRPr sz="1050">
                 <a:solidFill>
                   <a:srgbClr val="0F172A"/>
                 </a:solidFill>
               </a:defRPr>
             </a:pPr>
             <a:r>
-              <a:t>💡 จุดเด่น: LINE มีค่าแพ็กเกจส่งข้อความรายเดือนเพิ่มเติม</a:t>
+              <a:t>✔ Hardware Link &amp; Battery: ตรวจสอบระดับแบตเตอรี่สำรองและสถานะการเชื่อมต่อของทุกตู้ได้จากระยะไกลตลอด 24 ชม.</a:t>
             </a:r>
           </a:p>
           <a:p>
             <a:pPr>
               <a:spcAft>
-                <a:spcPts val="200"/>
+                <a:spcPts val="600"/>
               </a:spcAft>
-              <a:defRPr sz="880">
-                <a:solidFill>
-                  <a:srgbClr val="64748B"/>
-                </a:solidFill>
-              </a:defRPr>
-            </a:pPr>
-            <a:r>
-              <a:t>✓ ได้ทั้ง Web SCADA + Modela App ครบชุด</a:t>
-            </a:r>
-          </a:p>
-          <a:p>
-            <a:pPr>
-              <a:spcAft>
-                <a:spcPts val="200"/>
-              </a:spcAft>
-              <a:defRPr sz="880">
-                <a:solidFill>
-                  <a:srgbClr val="64748B"/>
-                </a:solidFill>
-              </a:defRPr>
-            </a:pPr>
-            <a:r>
-              <a:t>✓ แจ้งเตือนผ่าน LINE Official Account (LINE OA)</a:t>
-            </a:r>
-          </a:p>
-          <a:p>
-            <a:pPr>
-              <a:spcAft>
-                <a:spcPts val="200"/>
-              </a:spcAft>
-              <a:defRPr sz="880">
-                <a:solidFill>
-                  <a:srgbClr val="64748B"/>
-                </a:solidFill>
-              </a:defRPr>
-            </a:pPr>
-            <a:r>
-              <a:t>✓ ส่งการ์ดแจ้งเตือนพร้อมสีสถานะและปุ่มกดดูสด</a:t>
-            </a:r>
-          </a:p>
-          <a:p>
-            <a:pPr>
-              <a:spcAft>
-                <a:spcPts val="200"/>
-              </a:spcAft>
-              <a:defRPr sz="880">
-                <a:solidFill>
-                  <a:srgbClr val="64748B"/>
-                </a:solidFill>
-              </a:defRPr>
-            </a:pPr>
-            <a:r>
-              <a:t>✓ +฿1,500/จุด เพื่อซัพพอร์ตค่า Broadcast ของ LINE</a:t>
-            </a:r>
-          </a:p>
-          <a:p>
-            <a:pPr>
-              <a:spcAft>
-                <a:spcPts val="200"/>
-              </a:spcAft>
-              <a:defRPr sz="880">
-                <a:solidFill>
-                  <a:srgbClr val="64748B"/>
-                </a:solidFill>
-              </a:defRPr>
-            </a:pPr>
-            <a:r>
-              <a:t>✓ สัญญาบริการระดับพรีเมียม 24/7</a:t>
+              <a:defRPr sz="1050">
+                <a:solidFill>
+                  <a:srgbClr val="0F172A"/>
+                </a:solidFill>
+              </a:defRPr>
+            </a:pPr>
+            <a:r>
+              <a:t>✔ Instant Emergency Alerts: ระบบ Push Notification แจ้งเตือนข้อความด่วนเข้ามือถือทันทีเมื่อมีจุดใดผิดปกติ</a:t>
             </a:r>
           </a:p>
         </p:txBody>
@@ -6100,45 +5061,21 @@
               </a:defRPr>
             </a:pPr>
             <a:r>
-              <a:t>5. ตัวอย่างหน้าจอ Centralized Web SCADA Dashboard (จอห้องควบคุม 100 จุด)</a:t>
-            </a:r>
-          </a:p>
-        </p:txBody>
-      </p:sp>
-      <p:pic>
-        <p:nvPicPr>
-          <p:cNvPr id="3" name="Picture 2" descr="scada_preview.png"/>
-          <p:cNvPicPr>
-            <a:picLocks noChangeAspect="1"/>
-          </p:cNvPicPr>
-          <p:nvPr/>
-        </p:nvPicPr>
-        <p:blipFill>
-          <a:blip r:embed="rId2"/>
-          <a:stretch>
-            <a:fillRect/>
-          </a:stretch>
-        </p:blipFill>
-        <p:spPr>
-          <a:xfrm>
-            <a:off x="731520" y="1463040"/>
-            <a:ext cx="6217920" cy="4754880"/>
-          </a:xfrm>
-          <a:prstGeom prst="rect">
-            <a:avLst/>
-          </a:prstGeom>
-        </p:spPr>
-      </p:pic>
-      <p:sp>
-        <p:nvSpPr>
-          <p:cNvPr id="4" name="Rounded Rectangle 3"/>
+              <a:t>5. ตารางต้นทุนฮาร์ดแวร์และอุปกรณ์ต่อชุด (Hardware BOM per Unit)</a:t>
+            </a:r>
+          </a:p>
+        </p:txBody>
+      </p:sp>
+      <p:sp>
+        <p:nvSpPr>
+          <p:cNvPr id="3" name="Rounded Rectangle 2"/>
           <p:cNvSpPr/>
           <p:nvPr/>
         </p:nvSpPr>
         <p:spPr>
           <a:xfrm>
-            <a:off x="7132320" y="1463040"/>
-            <a:ext cx="4327855" cy="4754880"/>
+            <a:off x="731520" y="1463040"/>
+            <a:ext cx="2468880" cy="3291840"/>
           </a:xfrm>
           <a:prstGeom prst="roundRect">
             <a:avLst/>
@@ -6176,14 +5113,57 @@
       </p:sp>
       <p:sp>
         <p:nvSpPr>
+          <p:cNvPr id="4" name="Rounded Rectangle 3"/>
+          <p:cNvSpPr/>
+          <p:nvPr/>
+        </p:nvSpPr>
+        <p:spPr>
+          <a:xfrm>
+            <a:off x="731520" y="1463040"/>
+            <a:ext cx="2468880" cy="1097280"/>
+          </a:xfrm>
+          <a:prstGeom prst="roundRect">
+            <a:avLst/>
+          </a:prstGeom>
+          <a:solidFill>
+            <a:srgbClr val="0284C7"/>
+          </a:solidFill>
+          <a:ln>
+            <a:noFill/>
+          </a:ln>
+        </p:spPr>
+        <p:style>
+          <a:lnRef idx="1">
+            <a:schemeClr val="accent1"/>
+          </a:lnRef>
+          <a:fillRef idx="3">
+            <a:schemeClr val="accent1"/>
+          </a:fillRef>
+          <a:effectRef idx="2">
+            <a:schemeClr val="accent1"/>
+          </a:effectRef>
+          <a:fontRef idx="minor">
+            <a:schemeClr val="lt1"/>
+          </a:fontRef>
+        </p:style>
+        <p:txBody>
+          <a:bodyPr rtlCol="0" anchor="ctr"/>
+          <a:lstStyle/>
+          <a:p>
+            <a:pPr algn="ctr"/>
+          </a:p>
+        </p:txBody>
+      </p:sp>
+      <p:sp>
+        <p:nvSpPr>
           <p:cNvPr id="5" name="TextBox 4"/>
           <p:cNvSpPr txBox="1"/>
           <p:nvPr/>
         </p:nvSpPr>
         <p:spPr>
           <a:xfrm>
-            <a:off x="7315200" y="1600200"/>
-            <a:ext cx="3962095" cy="4480560"/>
+            <a:off x="841248" y="1536192"/>
+            <a:ext cx="2249424" cy="960120"/>
           </a:xfrm>
           <a:prstGeom prst="rect">
             <a:avLst/>
@@ -6197,107 +5177,706 @@
           <a:lstStyle/>
           <a:p>
             <a:pPr>
+              <a:defRPr sz="1000" b="1">
+                <a:solidFill>
+                  <a:srgbClr val="FFFFFF"/>
+                </a:solidFill>
+              </a:defRPr>
+            </a:pPr>
+            <a:r>
+              <a:t>ชุดเซนเซอร์หลัก (Modela One + pH/TDS/Temp + คลอรีน Cybertice)</a:t>
+            </a:r>
+          </a:p>
+          <a:p>
+            <a:pPr>
+              <a:defRPr sz="1500" b="1">
+                <a:solidFill>
+                  <a:srgbClr val="FFFFFF"/>
+                </a:solidFill>
+              </a:defRPr>
+            </a:pPr>
+            <a:r>
+              <a:t>฿17,000</a:t>
+            </a:r>
+          </a:p>
+        </p:txBody>
+      </p:sp>
+      <p:sp>
+        <p:nvSpPr>
+          <p:cNvPr id="6" name="TextBox 5"/>
+          <p:cNvSpPr txBox="1"/>
+          <p:nvPr/>
+        </p:nvSpPr>
+        <p:spPr>
+          <a:xfrm>
+            <a:off x="841248" y="2651760"/>
+            <a:ext cx="2249424" cy="2011680"/>
+          </a:xfrm>
+          <a:prstGeom prst="rect">
+            <a:avLst/>
+          </a:prstGeom>
+          <a:noFill/>
+        </p:spPr>
+        <p:txBody>
+          <a:bodyPr wrap="square">
+            <a:spAutoFit/>
+          </a:bodyPr>
+          <a:lstStyle/>
+          <a:p>
+            <a:pPr>
+              <a:defRPr sz="880">
+                <a:solidFill>
+                  <a:srgbClr val="64748B"/>
+                </a:solidFill>
+              </a:defRPr>
+            </a:pPr>
+            <a:r>
+              <a:t>• บอร์ดควบคุมหลัก Modela One (Modbus RTU/RS-485)</a:t>
+            </a:r>
+            <a:br/>
+            <a:r>
+              <a:t>• หัววัด pH แก้วอุตสาหกรรม (±0.01 pH)</a:t>
+            </a:r>
+            <a:br/>
+            <a:r>
+              <a:t>• หัววัด TDS / EC Titanium Dual-Pole</a:t>
+            </a:r>
+            <a:br/>
+            <a:r>
+              <a:t>• หัววัดอุณหภูมิ PT1000 (พร้อม ATC ชดเชยอุณหภูมิ)</a:t>
+            </a:r>
+            <a:br/>
+            <a:r>
+              <a:t>• เซนเซอร์คลอรีนคงเหลือ Cybertice (Residual Chlorine)</a:t>
+            </a:r>
+          </a:p>
+        </p:txBody>
+      </p:sp>
+      <p:sp>
+        <p:nvSpPr>
+          <p:cNvPr id="7" name="Rounded Rectangle 6"/>
+          <p:cNvSpPr/>
+          <p:nvPr/>
+        </p:nvSpPr>
+        <p:spPr>
+          <a:xfrm>
+            <a:off x="3474720" y="1463040"/>
+            <a:ext cx="2468880" cy="3291840"/>
+          </a:xfrm>
+          <a:prstGeom prst="roundRect">
+            <a:avLst/>
+          </a:prstGeom>
+          <a:solidFill>
+            <a:srgbClr val="FFFFFF"/>
+          </a:solidFill>
+          <a:ln w="19050">
+            <a:solidFill>
+              <a:srgbClr val="059669"/>
+            </a:solidFill>
+          </a:ln>
+        </p:spPr>
+        <p:style>
+          <a:lnRef idx="1">
+            <a:schemeClr val="accent1"/>
+          </a:lnRef>
+          <a:fillRef idx="3">
+            <a:schemeClr val="accent1"/>
+          </a:fillRef>
+          <a:effectRef idx="2">
+            <a:schemeClr val="accent1"/>
+          </a:effectRef>
+          <a:fontRef idx="minor">
+            <a:schemeClr val="lt1"/>
+          </a:fontRef>
+        </p:style>
+        <p:txBody>
+          <a:bodyPr rtlCol="0" anchor="ctr"/>
+          <a:lstStyle/>
+          <a:p>
+            <a:pPr algn="ctr"/>
+          </a:p>
+        </p:txBody>
+      </p:sp>
+      <p:sp>
+        <p:nvSpPr>
+          <p:cNvPr id="8" name="Rounded Rectangle 7"/>
+          <p:cNvSpPr/>
+          <p:nvPr/>
+        </p:nvSpPr>
+        <p:spPr>
+          <a:xfrm>
+            <a:off x="3474720" y="1463040"/>
+            <a:ext cx="2468880" cy="1097280"/>
+          </a:xfrm>
+          <a:prstGeom prst="roundRect">
+            <a:avLst/>
+          </a:prstGeom>
+          <a:solidFill>
+            <a:srgbClr val="059669"/>
+          </a:solidFill>
+          <a:ln>
+            <a:noFill/>
+          </a:ln>
+        </p:spPr>
+        <p:style>
+          <a:lnRef idx="1">
+            <a:schemeClr val="accent1"/>
+          </a:lnRef>
+          <a:fillRef idx="3">
+            <a:schemeClr val="accent1"/>
+          </a:fillRef>
+          <a:effectRef idx="2">
+            <a:schemeClr val="accent1"/>
+          </a:effectRef>
+          <a:fontRef idx="minor">
+            <a:schemeClr val="lt1"/>
+          </a:fontRef>
+        </p:style>
+        <p:txBody>
+          <a:bodyPr rtlCol="0" anchor="ctr"/>
+          <a:lstStyle/>
+          <a:p>
+            <a:pPr algn="ctr"/>
+          </a:p>
+        </p:txBody>
+      </p:sp>
+      <p:sp>
+        <p:nvSpPr>
+          <p:cNvPr id="9" name="TextBox 8"/>
+          <p:cNvSpPr txBox="1"/>
+          <p:nvPr/>
+        </p:nvSpPr>
+        <p:spPr>
+          <a:xfrm>
+            <a:off x="3584448" y="1536192"/>
+            <a:ext cx="2249424" cy="960120"/>
+          </a:xfrm>
+          <a:prstGeom prst="rect">
+            <a:avLst/>
+          </a:prstGeom>
+          <a:noFill/>
+        </p:spPr>
+        <p:txBody>
+          <a:bodyPr wrap="square">
+            <a:spAutoFit/>
+          </a:bodyPr>
+          <a:lstStyle/>
+          <a:p>
+            <a:pPr>
+              <a:defRPr sz="1000" b="1">
+                <a:solidFill>
+                  <a:srgbClr val="FFFFFF"/>
+                </a:solidFill>
+              </a:defRPr>
+            </a:pPr>
+            <a:r>
+              <a:t>4G LTE Router (TP-Link TL-MR100)</a:t>
+            </a:r>
+          </a:p>
+          <a:p>
+            <a:pPr>
+              <a:defRPr sz="1500" b="1">
+                <a:solidFill>
+                  <a:srgbClr val="FFFFFF"/>
+                </a:solidFill>
+              </a:defRPr>
+            </a:pPr>
+            <a:r>
+              <a:t>฿1,000</a:t>
+            </a:r>
+          </a:p>
+        </p:txBody>
+      </p:sp>
+      <p:sp>
+        <p:nvSpPr>
+          <p:cNvPr id="10" name="TextBox 9"/>
+          <p:cNvSpPr txBox="1"/>
+          <p:nvPr/>
+        </p:nvSpPr>
+        <p:spPr>
+          <a:xfrm>
+            <a:off x="3584448" y="2651760"/>
+            <a:ext cx="2249424" cy="2011680"/>
+          </a:xfrm>
+          <a:prstGeom prst="rect">
+            <a:avLst/>
+          </a:prstGeom>
+          <a:noFill/>
+        </p:spPr>
+        <p:txBody>
+          <a:bodyPr wrap="square">
+            <a:spAutoFit/>
+          </a:bodyPr>
+          <a:lstStyle/>
+          <a:p>
+            <a:pPr>
+              <a:defRPr sz="880">
+                <a:solidFill>
+                  <a:srgbClr val="64748B"/>
+                </a:solidFill>
+              </a:defRPr>
+            </a:pPr>
+            <a:r>
+              <a:t>• เราเตอร์ 4G LTE Wi-Fi ความเร็ว 300 Mbps</a:t>
+            </a:r>
+            <a:br/>
+            <a:r>
+              <a:t>• เสารับสัญญาณภายนอก 2 เสา สัญญาณนิ่งเสถียร</a:t>
+            </a:r>
+            <a:br/>
+            <a:r>
+              <a:t>• เชื่อมต่อระบบ Telemetry สดทุก 1 วินาที</a:t>
+            </a:r>
+          </a:p>
+        </p:txBody>
+      </p:sp>
+      <p:sp>
+        <p:nvSpPr>
+          <p:cNvPr id="11" name="Rounded Rectangle 10"/>
+          <p:cNvSpPr/>
+          <p:nvPr/>
+        </p:nvSpPr>
+        <p:spPr>
+          <a:xfrm>
+            <a:off x="6217920" y="1463040"/>
+            <a:ext cx="2468880" cy="3291840"/>
+          </a:xfrm>
+          <a:prstGeom prst="roundRect">
+            <a:avLst/>
+          </a:prstGeom>
+          <a:solidFill>
+            <a:srgbClr val="FFFFFF"/>
+          </a:solidFill>
+          <a:ln w="19050">
+            <a:solidFill>
+              <a:srgbClr val="D97706"/>
+            </a:solidFill>
+          </a:ln>
+        </p:spPr>
+        <p:style>
+          <a:lnRef idx="1">
+            <a:schemeClr val="accent1"/>
+          </a:lnRef>
+          <a:fillRef idx="3">
+            <a:schemeClr val="accent1"/>
+          </a:fillRef>
+          <a:effectRef idx="2">
+            <a:schemeClr val="accent1"/>
+          </a:effectRef>
+          <a:fontRef idx="minor">
+            <a:schemeClr val="lt1"/>
+          </a:fontRef>
+        </p:style>
+        <p:txBody>
+          <a:bodyPr rtlCol="0" anchor="ctr"/>
+          <a:lstStyle/>
+          <a:p>
+            <a:pPr algn="ctr"/>
+          </a:p>
+        </p:txBody>
+      </p:sp>
+      <p:sp>
+        <p:nvSpPr>
+          <p:cNvPr id="12" name="Rounded Rectangle 11"/>
+          <p:cNvSpPr/>
+          <p:nvPr/>
+        </p:nvSpPr>
+        <p:spPr>
+          <a:xfrm>
+            <a:off x="6217920" y="1463040"/>
+            <a:ext cx="2468880" cy="1097280"/>
+          </a:xfrm>
+          <a:prstGeom prst="roundRect">
+            <a:avLst/>
+          </a:prstGeom>
+          <a:solidFill>
+            <a:srgbClr val="D97706"/>
+          </a:solidFill>
+          <a:ln>
+            <a:noFill/>
+          </a:ln>
+        </p:spPr>
+        <p:style>
+          <a:lnRef idx="1">
+            <a:schemeClr val="accent1"/>
+          </a:lnRef>
+          <a:fillRef idx="3">
+            <a:schemeClr val="accent1"/>
+          </a:fillRef>
+          <a:effectRef idx="2">
+            <a:schemeClr val="accent1"/>
+          </a:effectRef>
+          <a:fontRef idx="minor">
+            <a:schemeClr val="lt1"/>
+          </a:fontRef>
+        </p:style>
+        <p:txBody>
+          <a:bodyPr rtlCol="0" anchor="ctr"/>
+          <a:lstStyle/>
+          <a:p>
+            <a:pPr algn="ctr"/>
+          </a:p>
+        </p:txBody>
+      </p:sp>
+      <p:sp>
+        <p:nvSpPr>
+          <p:cNvPr id="13" name="TextBox 12"/>
+          <p:cNvSpPr txBox="1"/>
+          <p:nvPr/>
+        </p:nvSpPr>
+        <p:spPr>
+          <a:xfrm>
+            <a:off x="6327648" y="1536192"/>
+            <a:ext cx="2249424" cy="960120"/>
+          </a:xfrm>
+          <a:prstGeom prst="rect">
+            <a:avLst/>
+          </a:prstGeom>
+          <a:noFill/>
+        </p:spPr>
+        <p:txBody>
+          <a:bodyPr wrap="square">
+            <a:spAutoFit/>
+          </a:bodyPr>
+          <a:lstStyle/>
+          <a:p>
+            <a:pPr>
+              <a:defRPr sz="1000" b="1">
+                <a:solidFill>
+                  <a:srgbClr val="FFFFFF"/>
+                </a:solidFill>
+              </a:defRPr>
+            </a:pPr>
+            <a:r>
+              <a:t>ซิมการ์ด 4G รายปี (Unlimited 15-20 Mbps)</a:t>
+            </a:r>
+          </a:p>
+          <a:p>
+            <a:pPr>
+              <a:defRPr sz="1500" b="1">
+                <a:solidFill>
+                  <a:srgbClr val="FFFFFF"/>
+                </a:solidFill>
+              </a:defRPr>
+            </a:pPr>
+            <a:r>
+              <a:t>฿1,800</a:t>
+            </a:r>
+          </a:p>
+        </p:txBody>
+      </p:sp>
+      <p:sp>
+        <p:nvSpPr>
+          <p:cNvPr id="14" name="TextBox 13"/>
+          <p:cNvSpPr txBox="1"/>
+          <p:nvPr/>
+        </p:nvSpPr>
+        <p:spPr>
+          <a:xfrm>
+            <a:off x="6327648" y="2651760"/>
+            <a:ext cx="2249424" cy="2011680"/>
+          </a:xfrm>
+          <a:prstGeom prst="rect">
+            <a:avLst/>
+          </a:prstGeom>
+          <a:noFill/>
+        </p:spPr>
+        <p:txBody>
+          <a:bodyPr wrap="square">
+            <a:spAutoFit/>
+          </a:bodyPr>
+          <a:lstStyle/>
+          <a:p>
+            <a:pPr>
+              <a:defRPr sz="880">
+                <a:solidFill>
+                  <a:srgbClr val="64748B"/>
+                </a:solidFill>
+              </a:defRPr>
+            </a:pPr>
+            <a:r>
+              <a:t>• ซิมเน็ต IoT รายปี ไม่อั้น ไม่ลดสปีด (15-20 Mbps)</a:t>
+            </a:r>
+            <a:br/>
+            <a:r>
+              <a:t>• รวมค่าบริการเครือข่าย 12 เดือนเต็ม</a:t>
+            </a:r>
+            <a:br/>
+            <a:r>
+              <a:t>• ส่งข้อมูลขึ้นระบบคลาวด์และแจ้งเตือน 24 ชม.</a:t>
+            </a:r>
+          </a:p>
+        </p:txBody>
+      </p:sp>
+      <p:sp>
+        <p:nvSpPr>
+          <p:cNvPr id="15" name="Rounded Rectangle 14"/>
+          <p:cNvSpPr/>
+          <p:nvPr/>
+        </p:nvSpPr>
+        <p:spPr>
+          <a:xfrm>
+            <a:off x="8961120" y="1463040"/>
+            <a:ext cx="2468880" cy="3291840"/>
+          </a:xfrm>
+          <a:prstGeom prst="roundRect">
+            <a:avLst/>
+          </a:prstGeom>
+          <a:solidFill>
+            <a:srgbClr val="FFFFFF"/>
+          </a:solidFill>
+          <a:ln w="19050">
+            <a:solidFill>
+              <a:srgbClr val="1E293B"/>
+            </a:solidFill>
+          </a:ln>
+        </p:spPr>
+        <p:style>
+          <a:lnRef idx="1">
+            <a:schemeClr val="accent1"/>
+          </a:lnRef>
+          <a:fillRef idx="3">
+            <a:schemeClr val="accent1"/>
+          </a:fillRef>
+          <a:effectRef idx="2">
+            <a:schemeClr val="accent1"/>
+          </a:effectRef>
+          <a:fontRef idx="minor">
+            <a:schemeClr val="lt1"/>
+          </a:fontRef>
+        </p:style>
+        <p:txBody>
+          <a:bodyPr rtlCol="0" anchor="ctr"/>
+          <a:lstStyle/>
+          <a:p>
+            <a:pPr algn="ctr"/>
+          </a:p>
+        </p:txBody>
+      </p:sp>
+      <p:sp>
+        <p:nvSpPr>
+          <p:cNvPr id="16" name="Rounded Rectangle 15"/>
+          <p:cNvSpPr/>
+          <p:nvPr/>
+        </p:nvSpPr>
+        <p:spPr>
+          <a:xfrm>
+            <a:off x="8961120" y="1463040"/>
+            <a:ext cx="2468880" cy="1097280"/>
+          </a:xfrm>
+          <a:prstGeom prst="roundRect">
+            <a:avLst/>
+          </a:prstGeom>
+          <a:solidFill>
+            <a:srgbClr val="1E293B"/>
+          </a:solidFill>
+          <a:ln>
+            <a:noFill/>
+          </a:ln>
+        </p:spPr>
+        <p:style>
+          <a:lnRef idx="1">
+            <a:schemeClr val="accent1"/>
+          </a:lnRef>
+          <a:fillRef idx="3">
+            <a:schemeClr val="accent1"/>
+          </a:fillRef>
+          <a:effectRef idx="2">
+            <a:schemeClr val="accent1"/>
+          </a:effectRef>
+          <a:fontRef idx="minor">
+            <a:schemeClr val="lt1"/>
+          </a:fontRef>
+        </p:style>
+        <p:txBody>
+          <a:bodyPr rtlCol="0" anchor="ctr"/>
+          <a:lstStyle/>
+          <a:p>
+            <a:pPr algn="ctr"/>
+          </a:p>
+        </p:txBody>
+      </p:sp>
+      <p:sp>
+        <p:nvSpPr>
+          <p:cNvPr id="17" name="TextBox 16"/>
+          <p:cNvSpPr txBox="1"/>
+          <p:nvPr/>
+        </p:nvSpPr>
+        <p:spPr>
+          <a:xfrm>
+            <a:off x="9070848" y="1536192"/>
+            <a:ext cx="2249424" cy="960120"/>
+          </a:xfrm>
+          <a:prstGeom prst="rect">
+            <a:avLst/>
+          </a:prstGeom>
+          <a:noFill/>
+        </p:spPr>
+        <p:txBody>
+          <a:bodyPr wrap="square">
+            <a:spAutoFit/>
+          </a:bodyPr>
+          <a:lstStyle/>
+          <a:p>
+            <a:pPr>
+              <a:defRPr sz="1000" b="1">
+                <a:solidFill>
+                  <a:srgbClr val="FFFFFF"/>
+                </a:solidFill>
+              </a:defRPr>
+            </a:pPr>
+            <a:r>
+              <a:t>ตู้คอนโทรล IP65 + Switching 24V + Breaker + Wiring</a:t>
+            </a:r>
+          </a:p>
+          <a:p>
+            <a:pPr>
+              <a:defRPr sz="1500" b="1">
+                <a:solidFill>
+                  <a:srgbClr val="FFFFFF"/>
+                </a:solidFill>
+              </a:defRPr>
+            </a:pPr>
+            <a:r>
+              <a:t>฿1,200</a:t>
+            </a:r>
+          </a:p>
+        </p:txBody>
+      </p:sp>
+      <p:sp>
+        <p:nvSpPr>
+          <p:cNvPr id="18" name="TextBox 17"/>
+          <p:cNvSpPr txBox="1"/>
+          <p:nvPr/>
+        </p:nvSpPr>
+        <p:spPr>
+          <a:xfrm>
+            <a:off x="9070848" y="2651760"/>
+            <a:ext cx="2249424" cy="2011680"/>
+          </a:xfrm>
+          <a:prstGeom prst="rect">
+            <a:avLst/>
+          </a:prstGeom>
+          <a:noFill/>
+        </p:spPr>
+        <p:txBody>
+          <a:bodyPr wrap="square">
+            <a:spAutoFit/>
+          </a:bodyPr>
+          <a:lstStyle/>
+          <a:p>
+            <a:pPr>
+              <a:defRPr sz="880">
+                <a:solidFill>
+                  <a:srgbClr val="64748B"/>
+                </a:solidFill>
+              </a:defRPr>
+            </a:pPr>
+            <a:r>
+              <a:t>• ตู้กันน้ำกันฝุ่นมาตรฐาน IP65</a:t>
+            </a:r>
+            <a:br/>
+            <a:r>
+              <a:t>• แหล่งจ่ายไฟ Switching Power Supply 24V</a:t>
+            </a:r>
+            <a:br/>
+            <a:r>
+              <a:t>• Breaker ป้องกันไฟเกิน + Terminal + สายไฟประกอบครบ</a:t>
+            </a:r>
+          </a:p>
+        </p:txBody>
+      </p:sp>
+      <p:sp>
+        <p:nvSpPr>
+          <p:cNvPr id="19" name="Rounded Rectangle 18"/>
+          <p:cNvSpPr/>
+          <p:nvPr/>
+        </p:nvSpPr>
+        <p:spPr>
+          <a:xfrm>
+            <a:off x="731520" y="4937760"/>
+            <a:ext cx="10728655" cy="1371600"/>
+          </a:xfrm>
+          <a:prstGeom prst="roundRect">
+            <a:avLst/>
+          </a:prstGeom>
+          <a:solidFill>
+            <a:srgbClr val="0F172A"/>
+          </a:solidFill>
+          <a:ln w="19050">
+            <a:solidFill>
+              <a:srgbClr val="0284C7"/>
+            </a:solidFill>
+          </a:ln>
+        </p:spPr>
+        <p:style>
+          <a:lnRef idx="1">
+            <a:schemeClr val="accent1"/>
+          </a:lnRef>
+          <a:fillRef idx="3">
+            <a:schemeClr val="accent1"/>
+          </a:fillRef>
+          <a:effectRef idx="2">
+            <a:schemeClr val="accent1"/>
+          </a:effectRef>
+          <a:fontRef idx="minor">
+            <a:schemeClr val="lt1"/>
+          </a:fontRef>
+        </p:style>
+        <p:txBody>
+          <a:bodyPr rtlCol="0" anchor="ctr"/>
+          <a:lstStyle/>
+          <a:p>
+            <a:pPr algn="ctr"/>
+          </a:p>
+        </p:txBody>
+      </p:sp>
+      <p:sp>
+        <p:nvSpPr>
+          <p:cNvPr id="20" name="TextBox 19"/>
+          <p:cNvSpPr txBox="1"/>
+          <p:nvPr/>
+        </p:nvSpPr>
+        <p:spPr>
+          <a:xfrm>
+            <a:off x="1005840" y="5074920"/>
+            <a:ext cx="10149840" cy="1097280"/>
+          </a:xfrm>
+          <a:prstGeom prst="rect">
+            <a:avLst/>
+          </a:prstGeom>
+          <a:noFill/>
+        </p:spPr>
+        <p:txBody>
+          <a:bodyPr wrap="square">
+            <a:spAutoFit/>
+          </a:bodyPr>
+          <a:lstStyle/>
+          <a:p>
+            <a:pPr>
               <a:spcAft>
-                <a:spcPts val="800"/>
+                <a:spcPts val="400"/>
               </a:spcAft>
-              <a:defRPr sz="1300" b="1">
-                <a:solidFill>
-                  <a:srgbClr val="0284C7"/>
-                </a:solidFill>
-              </a:defRPr>
-            </a:pPr>
-            <a:r>
-              <a:t>💻 คำอธิบายฟังก์ชันหน้าจอ SCADA:</a:t>
-            </a:r>
-          </a:p>
-          <a:p>
-            <a:pPr>
-              <a:spcAft>
-                <a:spcPts val="300"/>
-              </a:spcAft>
-              <a:defRPr sz="950">
-                <a:solidFill>
-                  <a:srgbClr val="0F172A"/>
-                </a:solidFill>
-              </a:defRPr>
-            </a:pPr>
-            <a:r>
-              <a:t>❶ สถานะระบบ &amp; แบตเตอรี่: แสดงสถานะ Healthy, สัญญาณ 4G/WiFi และแบต LiFePO4 (90%)</a:t>
-            </a:r>
-          </a:p>
-          <a:p>
-            <a:pPr>
-              <a:spcAft>
-                <a:spcPts val="300"/>
-              </a:spcAft>
-              <a:defRPr sz="950">
-                <a:solidFill>
-                  <a:srgbClr val="0F172A"/>
-                </a:solidFill>
-              </a:defRPr>
-            </a:pPr>
-            <a:r>
-              <a:t>❷ การ์ดตรวจวัด 4 ค่าหลัก: อุณหภูมิน้ำ (ATC), pH (Glass Probe), TDS (ppm), Cl (mg/L)</a:t>
-            </a:r>
-          </a:p>
-          <a:p>
-            <a:pPr>
-              <a:spcAft>
-                <a:spcPts val="300"/>
-              </a:spcAft>
-              <a:defRPr sz="950">
-                <a:solidFill>
-                  <a:srgbClr val="0F172A"/>
-                </a:solidFill>
-              </a:defRPr>
-            </a:pPr>
-            <a:r>
-              <a:t>❸ กราฟแนวโน้ม Real-Time: พล็อตข้อมูลสด 1 วินาที ติดตามค่าน้ำ 24 ชม. ย้อนหลังได้</a:t>
-            </a:r>
-          </a:p>
-          <a:p>
-            <a:pPr>
-              <a:spcAft>
-                <a:spcPts val="300"/>
-              </a:spcAft>
-              <a:defRPr sz="950">
-                <a:solidFill>
-                  <a:srgbClr val="0F172A"/>
-                </a:solidFill>
-              </a:defRPr>
-            </a:pPr>
-            <a:r>
-              <a:t>❹ ไดอะแกรมเชื่อมต่อ: ตรวจจับสายสัญญาณ WiFi ➔ Display ➔ Sensor Probes</a:t>
-            </a:r>
-          </a:p>
-          <a:p>
-            <a:pPr>
-              <a:spcAft>
-                <a:spcPts val="300"/>
-              </a:spcAft>
-              <a:defRPr sz="950">
-                <a:solidFill>
-                  <a:srgbClr val="0F172A"/>
-                </a:solidFill>
-              </a:defRPr>
-            </a:pPr>
-            <a:r>
-              <a:t>❺ Digital Calibration: สอบเทียบหัววัด pH 7.00 / 4.01 ผ่านหน้าเว็บในคลิกเดียว</a:t>
-            </a:r>
-          </a:p>
-          <a:p>
-            <a:pPr>
-              <a:spcAft>
-                <a:spcPts val="300"/>
-              </a:spcAft>
-              <a:defRPr sz="950">
-                <a:solidFill>
-                  <a:srgbClr val="0F172A"/>
-                </a:solidFill>
-              </a:defRPr>
-            </a:pPr>
-            <a:r>
-              <a:t>❻ ส่งออกรายงาน: Export ข้อมูลเป็น Excel / PDF สำหรับรายงาน ISO ทันที</a:t>
+              <a:defRPr sz="1600" b="1">
+                <a:solidFill>
+                  <a:srgbClr val="2DD4BF"/>
+                </a:solidFill>
+              </a:defRPr>
+            </a:pPr>
+            <a:r>
+              <a:t>➡️ รวมต้นทุนต่อชุด: ฿21,000 บาท  |  รวมต้นทุนโครงการ (100 ชุด): ฿2,100,000 บาท</a:t>
+            </a:r>
+          </a:p>
+          <a:p>
+            <a:pPr>
+              <a:defRPr sz="1000">
+                <a:solidFill>
+                  <a:srgbClr val="E2E8F0"/>
+                </a:solidFill>
+              </a:defRPr>
+            </a:pPr>
+            <a:r>
+              <a:t>ต้นทุนนี้ครอบคลุมชุดหัววัดเซนเซอร์ 4 ค่า (pH / TDS / Temp / Cl) + กล่อง Modela One + เราเตอร์ 4G TP-Link + ซิมรายปี + ตู้ IP65 ประกอบสำเร็จพร้อมใช้งาน</a:t>
             </a:r>
           </a:p>
         </p:txBody>
@@ -6373,45 +5952,288 @@
               </a:defRPr>
             </a:pPr>
             <a:r>
-              <a:t>6. ตัวอย่างหน้าจอมือถือ (Modela Mobile Companion App) &amp; Mobile Features</a:t>
-            </a:r>
-          </a:p>
-        </p:txBody>
-      </p:sp>
-      <p:pic>
-        <p:nvPicPr>
-          <p:cNvPr id="3" name="Picture 2" descr="mobile_preview.png"/>
-          <p:cNvPicPr>
-            <a:picLocks noChangeAspect="1"/>
-          </p:cNvPicPr>
+              <a:t>6. โครงสร้างราคาขายแนะนำ (แพ็กเกจโครงการ 100 ชุด)</a:t>
+            </a:r>
+          </a:p>
+        </p:txBody>
+      </p:sp>
+      <p:sp>
+        <p:nvSpPr>
+          <p:cNvPr id="3" name="Rounded Rectangle 2"/>
+          <p:cNvSpPr/>
           <p:nvPr/>
-        </p:nvPicPr>
-        <p:blipFill>
-          <a:blip r:embed="rId2"/>
-          <a:stretch>
-            <a:fillRect/>
-          </a:stretch>
-        </p:blipFill>
+        </p:nvSpPr>
         <p:spPr>
           <a:xfrm>
             <a:off x="731520" y="1463040"/>
-            <a:ext cx="2377440" cy="4754880"/>
+            <a:ext cx="5120640" cy="4754880"/>
+          </a:xfrm>
+          <a:prstGeom prst="roundRect">
+            <a:avLst/>
+          </a:prstGeom>
+          <a:solidFill>
+            <a:srgbClr val="FFFFFF"/>
+          </a:solidFill>
+          <a:ln w="19050">
+            <a:solidFill>
+              <a:srgbClr val="0284C7"/>
+            </a:solidFill>
+          </a:ln>
+        </p:spPr>
+        <p:style>
+          <a:lnRef idx="1">
+            <a:schemeClr val="accent1"/>
+          </a:lnRef>
+          <a:fillRef idx="3">
+            <a:schemeClr val="accent1"/>
+          </a:fillRef>
+          <a:effectRef idx="2">
+            <a:schemeClr val="accent1"/>
+          </a:effectRef>
+          <a:fontRef idx="minor">
+            <a:schemeClr val="lt1"/>
+          </a:fontRef>
+        </p:style>
+        <p:txBody>
+          <a:bodyPr rtlCol="0" anchor="ctr"/>
+          <a:lstStyle/>
+          <a:p>
+            <a:pPr algn="ctr"/>
+          </a:p>
+        </p:txBody>
+      </p:sp>
+      <p:sp>
+        <p:nvSpPr>
+          <p:cNvPr id="4" name="Rounded Rectangle 3"/>
+          <p:cNvSpPr/>
+          <p:nvPr/>
+        </p:nvSpPr>
+        <p:spPr>
+          <a:xfrm>
+            <a:off x="731520" y="1463040"/>
+            <a:ext cx="5120640" cy="1188720"/>
+          </a:xfrm>
+          <a:prstGeom prst="roundRect">
+            <a:avLst/>
+          </a:prstGeom>
+          <a:solidFill>
+            <a:srgbClr val="0284C7"/>
+          </a:solidFill>
+          <a:ln>
+            <a:noFill/>
+          </a:ln>
+        </p:spPr>
+        <p:style>
+          <a:lnRef idx="1">
+            <a:schemeClr val="accent1"/>
+          </a:lnRef>
+          <a:fillRef idx="3">
+            <a:schemeClr val="accent1"/>
+          </a:fillRef>
+          <a:effectRef idx="2">
+            <a:schemeClr val="accent1"/>
+          </a:effectRef>
+          <a:fontRef idx="minor">
+            <a:schemeClr val="lt1"/>
+          </a:fontRef>
+        </p:style>
+        <p:txBody>
+          <a:bodyPr rtlCol="0" anchor="ctr"/>
+          <a:lstStyle/>
+          <a:p>
+            <a:pPr algn="ctr"/>
+          </a:p>
+        </p:txBody>
+      </p:sp>
+      <p:sp>
+        <p:nvSpPr>
+          <p:cNvPr id="5" name="TextBox 4"/>
+          <p:cNvSpPr txBox="1"/>
+          <p:nvPr/>
+        </p:nvSpPr>
+        <p:spPr>
+          <a:xfrm>
+            <a:off x="914400" y="1554480"/>
+            <a:ext cx="4754880" cy="1005840"/>
           </a:xfrm>
           <a:prstGeom prst="rect">
             <a:avLst/>
           </a:prstGeom>
-        </p:spPr>
-      </p:pic>
-      <p:sp>
-        <p:nvSpPr>
-          <p:cNvPr id="4" name="Rounded Rectangle 3"/>
+          <a:noFill/>
+        </p:spPr>
+        <p:txBody>
+          <a:bodyPr wrap="square">
+            <a:spAutoFit/>
+          </a:bodyPr>
+          <a:lstStyle/>
+          <a:p>
+            <a:pPr>
+              <a:defRPr sz="1300" b="1">
+                <a:solidFill>
+                  <a:srgbClr val="FFFFFF"/>
+                </a:solidFill>
+              </a:defRPr>
+            </a:pPr>
+            <a:r>
+              <a:t>[แบบที่ 1] ส่งมอบอุปกรณ์พร้อมระบบออนไลน์</a:t>
+            </a:r>
+          </a:p>
+          <a:p>
+            <a:pPr>
+              <a:defRPr sz="1100" b="1">
+                <a:solidFill>
+                  <a:srgbClr val="FFFFFF"/>
+                </a:solidFill>
+              </a:defRPr>
+            </a:pPr>
+            <a:r>
+              <a:t>Plug &amp; Play / Supply Only (ราคา ฿29,500 - ฿32,000 / ชุด)</a:t>
+            </a:r>
+          </a:p>
+        </p:txBody>
+      </p:sp>
+      <p:sp>
+        <p:nvSpPr>
+          <p:cNvPr id="6" name="TextBox 5"/>
+          <p:cNvSpPr txBox="1"/>
+          <p:nvPr/>
+        </p:nvSpPr>
+        <p:spPr>
+          <a:xfrm>
+            <a:off x="914400" y="2743200"/>
+            <a:ext cx="4754880" cy="3383280"/>
+          </a:xfrm>
+          <a:prstGeom prst="rect">
+            <a:avLst/>
+          </a:prstGeom>
+          <a:noFill/>
+        </p:spPr>
+        <p:txBody>
+          <a:bodyPr wrap="square">
+            <a:spAutoFit/>
+          </a:bodyPr>
+          <a:lstStyle/>
+          <a:p>
+            <a:pPr>
+              <a:spcAft>
+                <a:spcPts val="400"/>
+              </a:spcAft>
+              <a:defRPr b="1" sz="1100">
+                <a:solidFill>
+                  <a:srgbClr val="0F172A"/>
+                </a:solidFill>
+              </a:defRPr>
+            </a:pPr>
+            <a:r>
+              <a:t>📋 ขอบเขตงาน (Scope of Work):</a:t>
+            </a:r>
+          </a:p>
+          <a:p>
+            <a:pPr>
+              <a:spcAft>
+                <a:spcPts val="200"/>
+              </a:spcAft>
+              <a:defRPr sz="950">
+                <a:solidFill>
+                  <a:srgbClr val="64748B"/>
+                </a:solidFill>
+              </a:defRPr>
+            </a:pPr>
+            <a:r>
+              <a:t>✔ ประกอบตู้คอนโทรลสำเร็จรูป พร้อมเดินระบบไฟภายใน</a:t>
+            </a:r>
+          </a:p>
+          <a:p>
+            <a:pPr>
+              <a:spcAft>
+                <a:spcPts val="200"/>
+              </a:spcAft>
+              <a:defRPr sz="950">
+                <a:solidFill>
+                  <a:srgbClr val="64748B"/>
+                </a:solidFill>
+              </a:defRPr>
+            </a:pPr>
+            <a:r>
+              <a:t>✔ ใส่ซิมรายปีและตั้งค่าเชื่อมต่อเน็ตเวิร์ก 4G LTE</a:t>
+            </a:r>
+          </a:p>
+          <a:p>
+            <a:pPr>
+              <a:spcAft>
+                <a:spcPts val="200"/>
+              </a:spcAft>
+              <a:defRPr sz="950">
+                <a:solidFill>
+                  <a:srgbClr val="64748B"/>
+                </a:solidFill>
+              </a:defRPr>
+            </a:pPr>
+            <a:r>
+              <a:t>✔ เชื่อมต่อ Modbus อ่านค่า pH, TDS, Temp, Chlorine</a:t>
+            </a:r>
+          </a:p>
+          <a:p>
+            <a:pPr>
+              <a:spcAft>
+                <a:spcPts val="200"/>
+              </a:spcAft>
+              <a:defRPr sz="950">
+                <a:solidFill>
+                  <a:srgbClr val="64748B"/>
+                </a:solidFill>
+              </a:defRPr>
+            </a:pPr>
+            <a:r>
+              <a:t>✔ ตั้งค่าระบบ Modela App สำหรับดูข้อมูลและแจ้งเตือนผ่านมือถือ</a:t>
+            </a:r>
+          </a:p>
+          <a:p>
+            <a:pPr>
+              <a:spcAft>
+                <a:spcPts val="200"/>
+              </a:spcAft>
+              <a:defRPr sz="950">
+                <a:solidFill>
+                  <a:srgbClr val="64748B"/>
+                </a:solidFill>
+              </a:defRPr>
+            </a:pPr>
+            <a:r>
+              <a:t>✔ จัดทำ Web Dashboard กลางรวมข้อมูลทั้ง 100 จุด</a:t>
+            </a:r>
+          </a:p>
+          <a:p>
+            <a:pPr>
+              <a:spcBef>
+                <a:spcPts val="800"/>
+              </a:spcBef>
+              <a:defRPr b="1" sz="1000">
+                <a:solidFill>
+                  <a:srgbClr val="0284C7"/>
+                </a:solidFill>
+              </a:defRPr>
+            </a:pPr>
+            <a:r>
+              <a:t>💰 มูลค่าโครงการรวม (100 ชุด): ฿2,950,000 - ฿3,200,000 บาท</a:t>
+            </a:r>
+            <a:br/>
+            <a:r>
+              <a:t>📈 กำไรขั้นต้นโดยประมาณ: ฿850,000 - ฿1,100,000 บาท (Margin ~29-34%)</a:t>
+            </a:r>
+          </a:p>
+        </p:txBody>
+      </p:sp>
+      <p:sp>
+        <p:nvSpPr>
+          <p:cNvPr id="7" name="Rounded Rectangle 6"/>
           <p:cNvSpPr/>
           <p:nvPr/>
         </p:nvSpPr>
         <p:spPr>
           <a:xfrm>
-            <a:off x="3383280" y="1463040"/>
-            <a:ext cx="8076895" cy="4754880"/>
+            <a:off x="6309360" y="1463040"/>
+            <a:ext cx="5120640" cy="4754880"/>
           </a:xfrm>
           <a:prstGeom prst="roundRect">
             <a:avLst/>
@@ -6449,14 +6271,57 @@
       </p:sp>
       <p:sp>
         <p:nvSpPr>
-          <p:cNvPr id="5" name="TextBox 4"/>
+          <p:cNvPr id="8" name="Rounded Rectangle 7"/>
+          <p:cNvSpPr/>
+          <p:nvPr/>
+        </p:nvSpPr>
+        <p:spPr>
+          <a:xfrm>
+            <a:off x="6309360" y="1463040"/>
+            <a:ext cx="5120640" cy="1188720"/>
+          </a:xfrm>
+          <a:prstGeom prst="roundRect">
+            <a:avLst/>
+          </a:prstGeom>
+          <a:solidFill>
+            <a:srgbClr val="059669"/>
+          </a:solidFill>
+          <a:ln>
+            <a:noFill/>
+          </a:ln>
+        </p:spPr>
+        <p:style>
+          <a:lnRef idx="1">
+            <a:schemeClr val="accent1"/>
+          </a:lnRef>
+          <a:fillRef idx="3">
+            <a:schemeClr val="accent1"/>
+          </a:fillRef>
+          <a:effectRef idx="2">
+            <a:schemeClr val="accent1"/>
+          </a:effectRef>
+          <a:fontRef idx="minor">
+            <a:schemeClr val="lt1"/>
+          </a:fontRef>
+        </p:style>
+        <p:txBody>
+          <a:bodyPr rtlCol="0" anchor="ctr"/>
+          <a:lstStyle/>
+          <a:p>
+            <a:pPr algn="ctr"/>
+          </a:p>
+        </p:txBody>
+      </p:sp>
+      <p:sp>
+        <p:nvSpPr>
+          <p:cNvPr id="9" name="TextBox 8"/>
           <p:cNvSpPr txBox="1"/>
           <p:nvPr/>
         </p:nvSpPr>
         <p:spPr>
           <a:xfrm>
-            <a:off x="3657600" y="1645920"/>
-            <a:ext cx="7498079" cy="4389120"/>
+            <a:off x="6492240" y="1554480"/>
+            <a:ext cx="4754880" cy="1005840"/>
           </a:xfrm>
           <a:prstGeom prst="rect">
             <a:avLst/>
@@ -6470,92 +6335,158 @@
           <a:lstStyle/>
           <a:p>
             <a:pPr>
+              <a:defRPr sz="1300" b="1">
+                <a:solidFill>
+                  <a:srgbClr val="FFFFFF"/>
+                </a:solidFill>
+              </a:defRPr>
+            </a:pPr>
+            <a:r>
+              <a:t>[แบบที่ 2] แบบครบวงจร รวมติดตั้งหน้างาน + สอบเทียบ</a:t>
+            </a:r>
+          </a:p>
+          <a:p>
+            <a:pPr>
+              <a:defRPr sz="1100" b="1">
+                <a:solidFill>
+                  <a:srgbClr val="FFFFFF"/>
+                </a:solidFill>
+              </a:defRPr>
+            </a:pPr>
+            <a:r>
+              <a:t>Turnkey Solution (ราคา ฿38,000 - ฿42,000 / ชุด)</a:t>
+            </a:r>
+          </a:p>
+        </p:txBody>
+      </p:sp>
+      <p:sp>
+        <p:nvSpPr>
+          <p:cNvPr id="10" name="TextBox 9"/>
+          <p:cNvSpPr txBox="1"/>
+          <p:nvPr/>
+        </p:nvSpPr>
+        <p:spPr>
+          <a:xfrm>
+            <a:off x="6492240" y="2743200"/>
+            <a:ext cx="4754880" cy="3383280"/>
+          </a:xfrm>
+          <a:prstGeom prst="rect">
+            <a:avLst/>
+          </a:prstGeom>
+          <a:noFill/>
+        </p:spPr>
+        <p:txBody>
+          <a:bodyPr wrap="square">
+            <a:spAutoFit/>
+          </a:bodyPr>
+          <a:lstStyle/>
+          <a:p>
+            <a:pPr>
               <a:spcAft>
-                <a:spcPts val="1000"/>
+                <a:spcPts val="400"/>
               </a:spcAft>
-              <a:defRPr sz="1300" b="1">
+              <a:defRPr b="1" sz="1100">
+                <a:solidFill>
+                  <a:srgbClr val="0F172A"/>
+                </a:solidFill>
+              </a:defRPr>
+            </a:pPr>
+            <a:r>
+              <a:t>📋 ขอบเขตงาน (Scope of Work):</a:t>
+            </a:r>
+          </a:p>
+          <a:p>
+            <a:pPr>
+              <a:spcAft>
+                <a:spcPts val="200"/>
+              </a:spcAft>
+              <a:defRPr sz="950">
+                <a:solidFill>
+                  <a:srgbClr val="64748B"/>
+                </a:solidFill>
+              </a:defRPr>
+            </a:pPr>
+            <a:r>
+              <a:t>✔ ทุกอย่างในแบบที่ 1 (ตู้ + ซิม + Modbus + App + Web Dashboard)</a:t>
+            </a:r>
+          </a:p>
+          <a:p>
+            <a:pPr>
+              <a:spcAft>
+                <a:spcPts val="200"/>
+              </a:spcAft>
+              <a:defRPr sz="950">
+                <a:solidFill>
+                  <a:srgbClr val="64748B"/>
+                </a:solidFill>
+              </a:defRPr>
+            </a:pPr>
+            <a:r>
+              <a:t>✔ ค่าแรงและทีมงานเข้าติดตั้งยึดตู้ / เดินท่อบายพาสหน้างาน</a:t>
+            </a:r>
+          </a:p>
+          <a:p>
+            <a:pPr>
+              <a:spcAft>
+                <a:spcPts val="200"/>
+              </a:spcAft>
+              <a:defRPr sz="950">
+                <a:solidFill>
+                  <a:srgbClr val="64748B"/>
+                </a:solidFill>
+              </a:defRPr>
+            </a:pPr>
+            <a:r>
+              <a:t>✔ สอบเทียบ (Calibration) หัววัด pH / TDS ด้วยน้ำยามาตรฐานหน้างาน</a:t>
+            </a:r>
+          </a:p>
+          <a:p>
+            <a:pPr>
+              <a:spcAft>
+                <a:spcPts val="200"/>
+              </a:spcAft>
+              <a:defRPr sz="950">
+                <a:solidFill>
+                  <a:srgbClr val="64748B"/>
+                </a:solidFill>
+              </a:defRPr>
+            </a:pPr>
+            <a:r>
+              <a:t>✔ อบรมการใช้งานระบบและส่งมอบคู่มือการปฏิบัติงาน</a:t>
+            </a:r>
+          </a:p>
+          <a:p>
+            <a:pPr>
+              <a:spcAft>
+                <a:spcPts val="200"/>
+              </a:spcAft>
+              <a:defRPr sz="950">
+                <a:solidFill>
+                  <a:srgbClr val="64748B"/>
+                </a:solidFill>
+              </a:defRPr>
+            </a:pPr>
+            <a:r>
+              <a:t>✔ รับประกันระบบและบริการ On-site Service ตลอด 1 ปีเต็ม</a:t>
+            </a:r>
+          </a:p>
+          <a:p>
+            <a:pPr>
+              <a:spcBef>
+                <a:spcPts val="800"/>
+              </a:spcBef>
+              <a:defRPr b="1" sz="1000">
                 <a:solidFill>
                   <a:srgbClr val="059669"/>
                 </a:solidFill>
               </a:defRPr>
             </a:pPr>
             <a:r>
-              <a:t>📱 คำอธิบายฟังก์ชันแอปพลิเคชันมือถือ (iOS &amp; Android):</a:t>
-            </a:r>
-          </a:p>
-          <a:p>
-            <a:pPr>
-              <a:spcAft>
-                <a:spcPts val="600"/>
-              </a:spcAft>
-              <a:defRPr sz="1050">
-                <a:solidFill>
-                  <a:srgbClr val="0F172A"/>
-                </a:solidFill>
-              </a:defRPr>
-            </a:pPr>
-            <a:r>
-              <a:t>✔ All Devices Hub (100 จุด): ค้นหาและสลับดูข้อมูลสถานีตรวจวัดคุณภาพน้ำทั้ง 100 จุดได้ง่ายดายในแอปเดียว</a:t>
-            </a:r>
-          </a:p>
-          <a:p>
-            <a:pPr>
-              <a:spcAft>
-                <a:spcPts val="600"/>
-              </a:spcAft>
-              <a:defRPr sz="1050">
-                <a:solidFill>
-                  <a:srgbClr val="0F172A"/>
-                </a:solidFill>
-              </a:defRPr>
-            </a:pPr>
-            <a:r>
-              <a:t>✔ Hero Metric Display: แสดงค่า pH และ คลอรีนคงเหลือ (Cl) ด้วยตัวเลขขนาดใหญ่ สีสันอ่านง่าย รู้ผลทันที</a:t>
-            </a:r>
-          </a:p>
-          <a:p>
-            <a:pPr>
-              <a:spcAft>
-                <a:spcPts val="600"/>
-              </a:spcAft>
-              <a:defRPr sz="1050">
-                <a:solidFill>
-                  <a:srgbClr val="0F172A"/>
-                </a:solidFill>
-              </a:defRPr>
-            </a:pPr>
-            <a:r>
-              <a:t>✔ Ambient &amp; Water Temp: แสดงอุณหภูมิน้ำทั้งหน่วยเซลเซียส (°C) และฟาเรนไฮต์ (°F) พร้อมระบบชดเชยอุณหภูมิ ATC</a:t>
-            </a:r>
-          </a:p>
-          <a:p>
-            <a:pPr>
-              <a:spcAft>
-                <a:spcPts val="600"/>
-              </a:spcAft>
-              <a:defRPr sz="1050">
-                <a:solidFill>
-                  <a:srgbClr val="0F172A"/>
-                </a:solidFill>
-              </a:defRPr>
-            </a:pPr>
-            <a:r>
-              <a:t>✔ Hardware Link &amp; Battery: ตรวจสอบระดับแบตเตอรี่สำรองและสถานะการเชื่อมต่อของทุกตู้ได้จากระยะไกลตลอด 24 ชม.</a:t>
-            </a:r>
-          </a:p>
-          <a:p>
-            <a:pPr>
-              <a:spcAft>
-                <a:spcPts val="600"/>
-              </a:spcAft>
-              <a:defRPr sz="1050">
-                <a:solidFill>
-                  <a:srgbClr val="0F172A"/>
-                </a:solidFill>
-              </a:defRPr>
-            </a:pPr>
-            <a:r>
-              <a:t>✔ Instant Emergency Alerts: ระบบ Push Notification แจ้งเตือนข้อความด่วนเข้ามือถือทันทีเมื่อมีจุดใดผิดปกติ</a:t>
+              <a:t>💰 มูลค่าโครงการรวม (100 ชุด): ฿3,800,000 - ฿4,200,000 บาท</a:t>
+            </a:r>
+            <a:br/>
+            <a:r>
+              <a:t>📈 กำไรขั้นต้นโดยประมาณ: ฿1,700,000 - ฿2,100,000 บาท (Margin ~45-50%)</a:t>
             </a:r>
           </a:p>
         </p:txBody>
@@ -6664,7 +6595,7 @@
               </a:defRPr>
             </a:pPr>
             <a:r>
-              <a:t>💧 สรุปภาพรวมข้อเสนอราคาโครงการตรวจวัดคุณภาพน้ำ 100 ชุด</a:t>
+              <a:t>💧 สรุปภาพรวมข้อเสนอราคาและเงื่อนไขสัญญา (100 ชุด)</a:t>
             </a:r>
           </a:p>
           <a:p>
@@ -6709,19 +6640,19 @@
               </a:defRPr>
             </a:pPr>
             <a:r>
-              <a:t>• รวมต้นทุนต่อชุด: 21,000 บาท (100 ชุด = 2,100,000 บาท)</a:t>
+              <a:t>• รวมต้นทุนฮาร์ดแวร์ต่อชุด: ฿21,000 บาท (100 ชุด = ฿2,100,000 บาท)</a:t>
             </a:r>
             <a:br/>
             <a:r>
-              <a:t>• [แบบที่ 1 Plug &amp; Play]: 29,500 - 32,000 บ./ชุด (รวม 2.95 - 3.20 ล้าน | กำไร 8.5 แสน - 1.1 ล้าน)</a:t>
+              <a:t>• [แบบที่ 1 Plug &amp; Play]: ฿29,500 - ฿32,000 บ./ชุด (รวม ฿2.95M - ฿3.20M | กำไร ฿8.5 แสน - ฿1.1 ล้าน)</a:t>
             </a:r>
             <a:br/>
             <a:r>
-              <a:t>• [แบบที่ 2 Turnkey]: 38,000 - 42,000 บ./ชุด (รวม 3.80 - 4.20 ล้าน | กำไร 1.7 - 2.1 ล้าน)</a:t>
+              <a:t>• [แบบที่ 2 Turnkey]: ฿38,000 - ฿42,000 บ./ชุด (รวม ฿3.80M - ฿4.20M | กำไร ฿1.7 - ฿2.1 ล้าน)</a:t>
             </a:r>
             <a:br/>
             <a:r>
-              <a:t>• ซอฟต์แวร์แดชบอร์ด 100 จุด: ซื้อขาด 2.5 - 6.0 แสน | รายปี 1.2 - 3.6 แสน/ปี (Recurring Income)</a:t>
+              <a:t>• ซอฟต์แวร์แดชบอร์ด 100 จุด: ซื้อขาด ฿2.5 - ฿6.0 แสน | รายปี ฿1.2 - ฿3.6 แสน/ปี (Recurring Income)</a:t>
             </a:r>
           </a:p>
           <a:p>

--- a/NCT_Water_Nexus_Report_and_Pricing.pptx
+++ b/NCT_Water_Nexus_Report_and_Pricing.pptx
@@ -3234,7 +3234,7 @@
             </a:r>
             <a:br/>
             <a:r>
-              <a:t>• โครงสร้างราคาและข้อเสนอโครงการ: ตารางราคาและแพ็กเกจโครงการ 100 ชุด (หน้า 7-8)</a:t>
+              <a:t>• โครงสร้างราคาและใบเสนอราคาโครงการ 100 ชุด สรุปไว้ท้ายสุด (สไลด์ 6-8)</a:t>
             </a:r>
           </a:p>
           <a:p>
@@ -4166,14 +4166,14 @@
               </a:defRPr>
             </a:pPr>
             <a:r>
-              <a:t>2. ตัวอย่างหน้าจอ Centralized Web SCADA Dashboard (จอห้องควบคุม 100 จุด)</a:t>
+              <a:t>2. ภาพแคปหน้าจอระบบ Web SCADA Dashboard จริง (index.html)</a:t>
             </a:r>
           </a:p>
         </p:txBody>
       </p:sp>
       <p:pic>
         <p:nvPicPr>
-          <p:cNvPr id="3" name="Picture 2" descr="scada_hd_preview.png"/>
+          <p:cNvPr id="3" name="Picture 2" descr="scada_web_capture.png"/>
           <p:cNvPicPr>
             <a:picLocks noChangeAspect="1"/>
           </p:cNvPicPr>
@@ -4439,14 +4439,14 @@
               </a:defRPr>
             </a:pPr>
             <a:r>
-              <a:t>3. ตัวอย่างหน้าจอมือถือ (Modela Mobile Companion App)</a:t>
+              <a:t>3. ภาพแคปหน้าจอแอปมือถือจริง (Modela Mobile Companion App)</a:t>
             </a:r>
           </a:p>
         </p:txBody>
       </p:sp>
       <p:pic>
         <p:nvPicPr>
-          <p:cNvPr id="3" name="Picture 2" descr="mobile_hd_preview.png"/>
+          <p:cNvPr id="3" name="Picture 2" descr="mobile_app_exact.png"/>
           <p:cNvPicPr>
             <a:picLocks noChangeAspect="1"/>
           </p:cNvPicPr>
@@ -4461,7 +4461,7 @@
         <p:spPr>
           <a:xfrm>
             <a:off x="731520" y="1463040"/>
-            <a:ext cx="2377440" cy="4754880"/>
+            <a:ext cx="2468880" cy="4754880"/>
           </a:xfrm>
           <a:prstGeom prst="rect">
             <a:avLst/>
@@ -4476,8 +4476,8 @@
         </p:nvSpPr>
         <p:spPr>
           <a:xfrm>
-            <a:off x="3383280" y="1463040"/>
-            <a:ext cx="8076895" cy="4754880"/>
+            <a:off x="3474720" y="1463040"/>
+            <a:ext cx="7985455" cy="4754880"/>
           </a:xfrm>
           <a:prstGeom prst="roundRect">
             <a:avLst/>
@@ -4521,8 +4521,8 @@
         </p:nvSpPr>
         <p:spPr>
           <a:xfrm>
-            <a:off x="3657600" y="1645920"/>
-            <a:ext cx="7498079" cy="4389120"/>
+            <a:off x="3749039" y="1645920"/>
+            <a:ext cx="7406640" cy="4389120"/>
           </a:xfrm>
           <a:prstGeom prst="rect">
             <a:avLst/>
@@ -4576,7 +4576,7 @@
               </a:defRPr>
             </a:pPr>
             <a:r>
-              <a:t>✔ Hero Metric Display: แสดงค่า pH และ คลอรีนคงเหลือ (Cl) ด้วยตัวเลขขนาดใหญ่ สีสันอ่านง่าย รู้ผลทันที</a:t>
+              <a:t>✔ Hero Metric Display: แสดงค่า pH (7.29) และ คลอรีนคงเหลือ (0.85 mg/L) ตัวเลขขนาดใหญ่ อ่านค่าง่ายทันที</a:t>
             </a:r>
           </a:p>
           <a:p>
@@ -4591,7 +4591,7 @@
               </a:defRPr>
             </a:pPr>
             <a:r>
-              <a:t>✔ Ambient &amp; Water Temp: แสดงอุณหภูมิน้ำทั้งหน่วยเซลเซียส (°C) และฟาเรนไฮต์ (°F) พร้อมระบบชดเชยอุณหภูมิ ATC</a:t>
+              <a:t>✔ Sub-Metrics Display: แสดงค่าสารละลาย TDS (210 ppm) และค่าโออาร์พี ORP REDOX (725 mV)</a:t>
             </a:r>
           </a:p>
           <a:p>
@@ -4606,7 +4606,7 @@
               </a:defRPr>
             </a:pPr>
             <a:r>
-              <a:t>✔ Hardware Link &amp; Battery: ตรวจสอบระดับแบตเตอรี่สำรองและสถานะการเชื่อมต่อของทุกตู้ได้จากระยะไกลตลอด 24 ชม.</a:t>
+              <a:t>✔ Ambient &amp; Water Temp: แสดงอุณหภูมิน้ำทั้งหน่วยเซลเซียส (17.3°C) และฟาเรนไฮต์ (63.1°F) พร้อมระบบชดเชย ATC</a:t>
             </a:r>
           </a:p>
           <a:p>
@@ -4621,7 +4621,7 @@
               </a:defRPr>
             </a:pPr>
             <a:r>
-              <a:t>✔ Instant Emergency Alerts: ระบบ Push Notification แจ้งเตือนข้อความด่วนเข้ามือถือทันทีเมื่อมีจุดใดผิดปกติ</a:t>
+              <a:t>✔ Hardware Link &amp; Battery: ตรวจสอบระดับแบตเตอรี่สำรอง (90%) และสถานะการเชื่อมต่อ 5G/4G ได้ตลอด 24 ชม.</a:t>
             </a:r>
           </a:p>
         </p:txBody>

--- a/NCT_Water_Nexus_Report_and_Pricing.pptx
+++ b/NCT_Water_Nexus_Report_and_Pricing.pptx
@@ -3230,7 +3230,7 @@
             </a:r>
             <a:br/>
             <a:r>
-              <a:t>• ระบบแดชบอร์ดคู่ขนาน: Centralized Web SCADA (จอใหญ่ห้องควบคุม) + Modela Mobile App</a:t>
+              <a:t>• ระบบแดชบอร์ดคู่ขนาน: Centralized Web SCADA (จอใหญ่ห้องควบคุม) + Modela Mobile App (5 หน้าเมนู)</a:t>
             </a:r>
             <a:br/>
             <a:r>
@@ -4173,7 +4173,7 @@
       </p:sp>
       <p:pic>
         <p:nvPicPr>
-          <p:cNvPr id="3" name="Picture 2" descr="scada_web_capture.png"/>
+          <p:cNvPr id="3" name="Picture 2" descr="scada_perfect.png"/>
           <p:cNvPicPr>
             <a:picLocks noChangeAspect="1"/>
           </p:cNvPicPr>
@@ -4439,14 +4439,59 @@
               </a:defRPr>
             </a:pPr>
             <a:r>
-              <a:t>3. ภาพแคปหน้าจอแอปมือถือจริง (Modela Mobile Companion App)</a:t>
-            </a:r>
+              <a:t>3. ภาพแคปหน้าจอแอปมือถือจริงครบทุกแท็บเมนู (Modela Mobile Multi-Screen)</a:t>
+            </a:r>
+          </a:p>
+        </p:txBody>
+      </p:sp>
+      <p:sp>
+        <p:nvSpPr>
+          <p:cNvPr id="3" name="Rounded Rectangle 2"/>
+          <p:cNvSpPr/>
+          <p:nvPr/>
+        </p:nvSpPr>
+        <p:spPr>
+          <a:xfrm>
+            <a:off x="731520" y="1463040"/>
+            <a:ext cx="2468880" cy="4754880"/>
+          </a:xfrm>
+          <a:prstGeom prst="roundRect">
+            <a:avLst/>
+          </a:prstGeom>
+          <a:solidFill>
+            <a:srgbClr val="FFFFFF"/>
+          </a:solidFill>
+          <a:ln w="19050">
+            <a:solidFill>
+              <a:srgbClr val="0284C7"/>
+            </a:solidFill>
+          </a:ln>
+        </p:spPr>
+        <p:style>
+          <a:lnRef idx="1">
+            <a:schemeClr val="accent1"/>
+          </a:lnRef>
+          <a:fillRef idx="3">
+            <a:schemeClr val="accent1"/>
+          </a:fillRef>
+          <a:effectRef idx="2">
+            <a:schemeClr val="accent1"/>
+          </a:effectRef>
+          <a:fontRef idx="minor">
+            <a:schemeClr val="lt1"/>
+          </a:fontRef>
+        </p:style>
+        <p:txBody>
+          <a:bodyPr rtlCol="0" anchor="ctr"/>
+          <a:lstStyle/>
+          <a:p>
+            <a:pPr algn="ctr"/>
           </a:p>
         </p:txBody>
       </p:sp>
       <p:pic>
         <p:nvPicPr>
-          <p:cNvPr id="3" name="Picture 2" descr="mobile_app_exact.png"/>
+          <p:cNvPr id="4" name="Picture 3" descr="mob_screen_1_home.png"/>
           <p:cNvPicPr>
             <a:picLocks noChangeAspect="1"/>
           </p:cNvPicPr>
@@ -4460,8 +4505,8 @@
         </p:blipFill>
         <p:spPr>
           <a:xfrm>
-            <a:off x="731520" y="1463040"/>
-            <a:ext cx="2468880" cy="4754880"/>
+            <a:off x="868680" y="1600200"/>
+            <a:ext cx="2194560" cy="3749039"/>
           </a:xfrm>
           <a:prstGeom prst="rect">
             <a:avLst/>
@@ -4470,14 +4515,61 @@
       </p:pic>
       <p:sp>
         <p:nvSpPr>
-          <p:cNvPr id="4" name="Rounded Rectangle 3"/>
+          <p:cNvPr id="5" name="TextBox 4"/>
+          <p:cNvSpPr txBox="1"/>
+          <p:nvPr/>
+        </p:nvSpPr>
+        <p:spPr>
+          <a:xfrm>
+            <a:off x="822960" y="5440680"/>
+            <a:ext cx="2286000" cy="685800"/>
+          </a:xfrm>
+          <a:prstGeom prst="rect">
+            <a:avLst/>
+          </a:prstGeom>
+          <a:noFill/>
+        </p:spPr>
+        <p:txBody>
+          <a:bodyPr wrap="square">
+            <a:spAutoFit/>
+          </a:bodyPr>
+          <a:lstStyle/>
+          <a:p>
+            <a:pPr algn="ctr">
+              <a:defRPr sz="950" b="1">
+                <a:solidFill>
+                  <a:srgbClr val="0F172A"/>
+                </a:solidFill>
+              </a:defRPr>
+            </a:pPr>
+            <a:r>
+              <a:t>1. หน้าแดชบอร์ดหลัก (Home)</a:t>
+            </a:r>
+          </a:p>
+          <a:p>
+            <a:pPr algn="ctr">
+              <a:defRPr sz="780">
+                <a:solidFill>
+                  <a:srgbClr val="64748B"/>
+                </a:solidFill>
+              </a:defRPr>
+            </a:pPr>
+            <a:r>
+              <a:t>Hero pH, Cl, Temp, TDS, Battery</a:t>
+            </a:r>
+          </a:p>
+        </p:txBody>
+      </p:sp>
+      <p:sp>
+        <p:nvSpPr>
+          <p:cNvPr id="6" name="Rounded Rectangle 5"/>
           <p:cNvSpPr/>
           <p:nvPr/>
         </p:nvSpPr>
         <p:spPr>
           <a:xfrm>
             <a:off x="3474720" y="1463040"/>
-            <a:ext cx="7985455" cy="4754880"/>
+            <a:ext cx="2468880" cy="4754880"/>
           </a:xfrm>
           <a:prstGeom prst="roundRect">
             <a:avLst/>
@@ -4487,7 +4579,7 @@
           </a:solidFill>
           <a:ln w="19050">
             <a:solidFill>
-              <a:srgbClr val="059669"/>
+              <a:srgbClr val="0284C7"/>
             </a:solidFill>
           </a:ln>
         </p:spPr>
@@ -4513,16 +4605,40 @@
           </a:p>
         </p:txBody>
       </p:sp>
-      <p:sp>
-        <p:nvSpPr>
-          <p:cNvPr id="5" name="TextBox 4"/>
+      <p:pic>
+        <p:nvPicPr>
+          <p:cNvPr id="7" name="Picture 6" descr="mob_screen_2_history.png"/>
+          <p:cNvPicPr>
+            <a:picLocks noChangeAspect="1"/>
+          </p:cNvPicPr>
+          <p:nvPr/>
+        </p:nvPicPr>
+        <p:blipFill>
+          <a:blip r:embed="rId3"/>
+          <a:stretch>
+            <a:fillRect/>
+          </a:stretch>
+        </p:blipFill>
+        <p:spPr>
+          <a:xfrm>
+            <a:off x="3611880" y="1600200"/>
+            <a:ext cx="2194560" cy="3749039"/>
+          </a:xfrm>
+          <a:prstGeom prst="rect">
+            <a:avLst/>
+          </a:prstGeom>
+        </p:spPr>
+      </p:pic>
+      <p:sp>
+        <p:nvSpPr>
+          <p:cNvPr id="8" name="TextBox 7"/>
           <p:cNvSpPr txBox="1"/>
           <p:nvPr/>
         </p:nvSpPr>
         <p:spPr>
           <a:xfrm>
-            <a:off x="3749039" y="1645920"/>
-            <a:ext cx="7406640" cy="4389120"/>
+            <a:off x="3566160" y="5440680"/>
+            <a:ext cx="2286000" cy="685800"/>
           </a:xfrm>
           <a:prstGeom prst="rect">
             <a:avLst/>
@@ -4535,93 +4651,259 @@
           </a:bodyPr>
           <a:lstStyle/>
           <a:p>
-            <a:pPr>
-              <a:spcAft>
-                <a:spcPts val="1000"/>
-              </a:spcAft>
-              <a:defRPr sz="1300" b="1">
-                <a:solidFill>
-                  <a:srgbClr val="059669"/>
-                </a:solidFill>
-              </a:defRPr>
-            </a:pPr>
-            <a:r>
-              <a:t>📱 คำอธิบายฟังก์ชันแอปพลิเคชันมือถือ (iOS &amp; Android):</a:t>
-            </a:r>
-          </a:p>
-          <a:p>
-            <a:pPr>
-              <a:spcAft>
-                <a:spcPts val="600"/>
-              </a:spcAft>
-              <a:defRPr sz="1050">
+            <a:pPr algn="ctr">
+              <a:defRPr sz="950" b="1">
                 <a:solidFill>
                   <a:srgbClr val="0F172A"/>
                 </a:solidFill>
               </a:defRPr>
             </a:pPr>
             <a:r>
-              <a:t>✔ All Devices Hub (100 จุด): ค้นหาและสลับดูข้อมูลสถานีตรวจวัดคุณภาพน้ำทั้ง 100 จุดได้ง่ายดายในแอปเดียว</a:t>
-            </a:r>
-          </a:p>
-          <a:p>
-            <a:pPr>
-              <a:spcAft>
-                <a:spcPts val="600"/>
-              </a:spcAft>
-              <a:defRPr sz="1050">
+              <a:t>2. กราฟย้อนหลัง (History)</a:t>
+            </a:r>
+          </a:p>
+          <a:p>
+            <a:pPr algn="ctr">
+              <a:defRPr sz="780">
+                <a:solidFill>
+                  <a:srgbClr val="64748B"/>
+                </a:solidFill>
+              </a:defRPr>
+            </a:pPr>
+            <a:r>
+              <a:t>กราฟแนวโน้มสด &amp; ตารางสถิติ Avg</a:t>
+            </a:r>
+          </a:p>
+        </p:txBody>
+      </p:sp>
+      <p:sp>
+        <p:nvSpPr>
+          <p:cNvPr id="9" name="Rounded Rectangle 8"/>
+          <p:cNvSpPr/>
+          <p:nvPr/>
+        </p:nvSpPr>
+        <p:spPr>
+          <a:xfrm>
+            <a:off x="6217920" y="1463040"/>
+            <a:ext cx="2468880" cy="4754880"/>
+          </a:xfrm>
+          <a:prstGeom prst="roundRect">
+            <a:avLst/>
+          </a:prstGeom>
+          <a:solidFill>
+            <a:srgbClr val="FFFFFF"/>
+          </a:solidFill>
+          <a:ln w="19050">
+            <a:solidFill>
+              <a:srgbClr val="0284C7"/>
+            </a:solidFill>
+          </a:ln>
+        </p:spPr>
+        <p:style>
+          <a:lnRef idx="1">
+            <a:schemeClr val="accent1"/>
+          </a:lnRef>
+          <a:fillRef idx="3">
+            <a:schemeClr val="accent1"/>
+          </a:fillRef>
+          <a:effectRef idx="2">
+            <a:schemeClr val="accent1"/>
+          </a:effectRef>
+          <a:fontRef idx="minor">
+            <a:schemeClr val="lt1"/>
+          </a:fontRef>
+        </p:style>
+        <p:txBody>
+          <a:bodyPr rtlCol="0" anchor="ctr"/>
+          <a:lstStyle/>
+          <a:p>
+            <a:pPr algn="ctr"/>
+          </a:p>
+        </p:txBody>
+      </p:sp>
+      <p:pic>
+        <p:nvPicPr>
+          <p:cNvPr id="10" name="Picture 9" descr="mob_screen_3_devices.png"/>
+          <p:cNvPicPr>
+            <a:picLocks noChangeAspect="1"/>
+          </p:cNvPicPr>
+          <p:nvPr/>
+        </p:nvPicPr>
+        <p:blipFill>
+          <a:blip r:embed="rId4"/>
+          <a:stretch>
+            <a:fillRect/>
+          </a:stretch>
+        </p:blipFill>
+        <p:spPr>
+          <a:xfrm>
+            <a:off x="6355080" y="1600200"/>
+            <a:ext cx="2194560" cy="3749039"/>
+          </a:xfrm>
+          <a:prstGeom prst="rect">
+            <a:avLst/>
+          </a:prstGeom>
+        </p:spPr>
+      </p:pic>
+      <p:sp>
+        <p:nvSpPr>
+          <p:cNvPr id="11" name="TextBox 10"/>
+          <p:cNvSpPr txBox="1"/>
+          <p:nvPr/>
+        </p:nvSpPr>
+        <p:spPr>
+          <a:xfrm>
+            <a:off x="6309360" y="5440680"/>
+            <a:ext cx="2286000" cy="685800"/>
+          </a:xfrm>
+          <a:prstGeom prst="rect">
+            <a:avLst/>
+          </a:prstGeom>
+          <a:noFill/>
+        </p:spPr>
+        <p:txBody>
+          <a:bodyPr wrap="square">
+            <a:spAutoFit/>
+          </a:bodyPr>
+          <a:lstStyle/>
+          <a:p>
+            <a:pPr algn="ctr">
+              <a:defRPr sz="950" b="1">
                 <a:solidFill>
                   <a:srgbClr val="0F172A"/>
                 </a:solidFill>
               </a:defRPr>
             </a:pPr>
             <a:r>
-              <a:t>✔ Hero Metric Display: แสดงค่า pH (7.29) และ คลอรีนคงเหลือ (0.85 mg/L) ตัวเลขขนาดใหญ่ อ่านค่าง่ายทันที</a:t>
-            </a:r>
-          </a:p>
-          <a:p>
-            <a:pPr>
-              <a:spcAft>
-                <a:spcPts val="600"/>
-              </a:spcAft>
-              <a:defRPr sz="1050">
+              <a:t>3. รวม 100 สถานี (Devices)</a:t>
+            </a:r>
+          </a:p>
+          <a:p>
+            <a:pPr algn="ctr">
+              <a:defRPr sz="780">
+                <a:solidFill>
+                  <a:srgbClr val="64748B"/>
+                </a:solidFill>
+              </a:defRPr>
+            </a:pPr>
+            <a:r>
+              <a:t>สลับดูสถานี #01 ถึง #100 Online/Alert</a:t>
+            </a:r>
+          </a:p>
+        </p:txBody>
+      </p:sp>
+      <p:sp>
+        <p:nvSpPr>
+          <p:cNvPr id="12" name="Rounded Rectangle 11"/>
+          <p:cNvSpPr/>
+          <p:nvPr/>
+        </p:nvSpPr>
+        <p:spPr>
+          <a:xfrm>
+            <a:off x="8961120" y="1463040"/>
+            <a:ext cx="2468880" cy="4754880"/>
+          </a:xfrm>
+          <a:prstGeom prst="roundRect">
+            <a:avLst/>
+          </a:prstGeom>
+          <a:solidFill>
+            <a:srgbClr val="FFFFFF"/>
+          </a:solidFill>
+          <a:ln w="19050">
+            <a:solidFill>
+              <a:srgbClr val="0284C7"/>
+            </a:solidFill>
+          </a:ln>
+        </p:spPr>
+        <p:style>
+          <a:lnRef idx="1">
+            <a:schemeClr val="accent1"/>
+          </a:lnRef>
+          <a:fillRef idx="3">
+            <a:schemeClr val="accent1"/>
+          </a:fillRef>
+          <a:effectRef idx="2">
+            <a:schemeClr val="accent1"/>
+          </a:effectRef>
+          <a:fontRef idx="minor">
+            <a:schemeClr val="lt1"/>
+          </a:fontRef>
+        </p:style>
+        <p:txBody>
+          <a:bodyPr rtlCol="0" anchor="ctr"/>
+          <a:lstStyle/>
+          <a:p>
+            <a:pPr algn="ctr"/>
+          </a:p>
+        </p:txBody>
+      </p:sp>
+      <p:pic>
+        <p:nvPicPr>
+          <p:cNvPr id="13" name="Picture 12" descr="mob_screen_4_calib.png"/>
+          <p:cNvPicPr>
+            <a:picLocks noChangeAspect="1"/>
+          </p:cNvPicPr>
+          <p:nvPr/>
+        </p:nvPicPr>
+        <p:blipFill>
+          <a:blip r:embed="rId5"/>
+          <a:stretch>
+            <a:fillRect/>
+          </a:stretch>
+        </p:blipFill>
+        <p:spPr>
+          <a:xfrm>
+            <a:off x="9098280" y="1600200"/>
+            <a:ext cx="2194560" cy="3749039"/>
+          </a:xfrm>
+          <a:prstGeom prst="rect">
+            <a:avLst/>
+          </a:prstGeom>
+        </p:spPr>
+      </p:pic>
+      <p:sp>
+        <p:nvSpPr>
+          <p:cNvPr id="14" name="TextBox 13"/>
+          <p:cNvSpPr txBox="1"/>
+          <p:nvPr/>
+        </p:nvSpPr>
+        <p:spPr>
+          <a:xfrm>
+            <a:off x="9052560" y="5440680"/>
+            <a:ext cx="2286000" cy="685800"/>
+          </a:xfrm>
+          <a:prstGeom prst="rect">
+            <a:avLst/>
+          </a:prstGeom>
+          <a:noFill/>
+        </p:spPr>
+        <p:txBody>
+          <a:bodyPr wrap="square">
+            <a:spAutoFit/>
+          </a:bodyPr>
+          <a:lstStyle/>
+          <a:p>
+            <a:pPr algn="ctr">
+              <a:defRPr sz="950" b="1">
                 <a:solidFill>
                   <a:srgbClr val="0F172A"/>
                 </a:solidFill>
               </a:defRPr>
             </a:pPr>
             <a:r>
-              <a:t>✔ Sub-Metrics Display: แสดงค่าสารละลาย TDS (210 ppm) และค่าโออาร์พี ORP REDOX (725 mV)</a:t>
-            </a:r>
-          </a:p>
-          <a:p>
-            <a:pPr>
-              <a:spcAft>
-                <a:spcPts val="600"/>
-              </a:spcAft>
-              <a:defRPr sz="1050">
-                <a:solidFill>
-                  <a:srgbClr val="0F172A"/>
-                </a:solidFill>
-              </a:defRPr>
-            </a:pPr>
-            <a:r>
-              <a:t>✔ Ambient &amp; Water Temp: แสดงอุณหภูมิน้ำทั้งหน่วยเซลเซียส (17.3°C) และฟาเรนไฮต์ (63.1°F) พร้อมระบบชดเชย ATC</a:t>
-            </a:r>
-          </a:p>
-          <a:p>
-            <a:pPr>
-              <a:spcAft>
-                <a:spcPts val="600"/>
-              </a:spcAft>
-              <a:defRPr sz="1050">
-                <a:solidFill>
-                  <a:srgbClr val="0F172A"/>
-                </a:solidFill>
-              </a:defRPr>
-            </a:pPr>
-            <a:r>
-              <a:t>✔ Hardware Link &amp; Battery: ตรวจสอบระดับแบตเตอรี่สำรอง (90%) และสถานะการเชื่อมต่อ 5G/4G ได้ตลอด 24 ชม.</a:t>
+              <a:t>4. สอบเทียบหัววัด (Calib)</a:t>
+            </a:r>
+          </a:p>
+          <a:p>
+            <a:pPr algn="ctr">
+              <a:defRPr sz="780">
+                <a:solidFill>
+                  <a:srgbClr val="64748B"/>
+                </a:solidFill>
+              </a:defRPr>
+            </a:pPr>
+            <a:r>
+              <a:t>pH 7.00, pH 4.01, TDS &amp; Cl Zero</a:t>
             </a:r>
           </a:p>
         </p:txBody>

--- a/NCT_Water_Nexus_Report_and_Pricing.pptx
+++ b/NCT_Water_Nexus_Report_and_Pricing.pptx
@@ -3211,7 +3211,7 @@
               </a:defRPr>
             </a:pPr>
             <a:r>
-              <a:t>รายงานนำเสนอโซลูชันระบบตรวจวัดคุณภาพน้ำ แดชบอร์ด SCADA และโครงสร้างราคา (100 ชุด)</a:t>
+              <a:t>รายงานนำเสนอโซลูชันระบบตรวจวัดคุณภาพน้ำ แดชบอร์ดควบคุม และใบเสนอราคาทางการ (100 ชุด)</a:t>
             </a:r>
           </a:p>
           <a:p>
@@ -3230,11 +3230,11 @@
             </a:r>
             <a:br/>
             <a:r>
-              <a:t>• ระบบแดชบอร์ดคู่ขนาน: Centralized Web SCADA (จอใหญ่ห้องควบคุม) + Modela Mobile App (5 หน้าเมนู)</a:t>
+              <a:t>• ระบบแดชบอร์ดคู่ขนาน: Centralized Web Dashboard (จอใหญ่ห้องควบคุม) + Modela Mobile App (5 หน้าเมนู)</a:t>
             </a:r>
             <a:br/>
             <a:r>
-              <a:t>• โครงสร้างราคาและใบเสนอราคาโครงการ 100 ชุด สรุปไว้ท้ายสุด (สไลด์ 6-8)</a:t>
+              <a:t>• ข้อเสนอราคาโครงการ 100 ชุด (ไม่รวมติดตั้ง): ฿31,500 / ชุด (มูลค่ารวม ฿3,150,000 บาท) สรุปไว้ท้ายสุด (สไลด์ 6-8)</a:t>
             </a:r>
           </a:p>
           <a:p>
@@ -4166,7 +4166,7 @@
               </a:defRPr>
             </a:pPr>
             <a:r>
-              <a:t>2. ภาพแคปหน้าจอระบบ Web SCADA Dashboard จริง (index.html)</a:t>
+              <a:t>2. ภาพแคปหน้าจอระบบ Centralized Web Dashboard จริง (index.html)</a:t>
             </a:r>
           </a:p>
         </p:txBody>
@@ -4273,7 +4273,7 @@
               </a:defRPr>
             </a:pPr>
             <a:r>
-              <a:t>💻 คำอธิบายฟังก์ชันหน้าจอ SCADA:</a:t>
+              <a:t>💻 คำอธิบายฟังก์ชันหน้าจอ Web Dashboard:</a:t>
             </a:r>
           </a:p>
           <a:p>
@@ -5125,7 +5125,7 @@
               </a:defRPr>
             </a:pPr>
             <a:r>
-              <a:t>✔ จุดเด่น: ส่งฟรี 100% ไม่มีค่า Broadcast รายเดือน กำไรเต็มเม็ดเต็มหน่วย</a:t>
+              <a:t>✔ จุดเด่น: ส่งฟรี 100% ไม่มีค่า Broadcast รายเดือน ประหยัดงบประมาณสูงสุด</a:t>
             </a:r>
           </a:p>
         </p:txBody>
@@ -5208,7 +5208,7 @@
               </a:defRPr>
             </a:pPr>
             <a:r>
-              <a:t>💬 รูปแบบ LINE OA Alert (การ์ดสถานะยอดนิยม)</a:t>
+              <a:t>💬 รูปแบบ LINE OA Alert (การ์ดสถานะในกลุ่มไลน์)</a:t>
             </a:r>
           </a:p>
           <a:p>
@@ -5267,7 +5267,7 @@
               </a:defRPr>
             </a:pPr>
             <a:r>
-              <a:t>✔ จุดเด่น: ใช้งานง่ายในกลุ่มไลน์ผู้บริหาร (+฿1,500/จุด เพื่อซับพอร์ตค่า Broadcast LINE)</a:t>
+              <a:t>✔ จุดเด่น: แจ้งเตือนเป็นการ์ดสถานะในกลุ่ม LINE สะดวกสำหรับผู้บริหาร</a:t>
             </a:r>
           </a:p>
         </p:txBody>
@@ -5343,7 +5343,7 @@
               </a:defRPr>
             </a:pPr>
             <a:r>
-              <a:t>5. ตารางต้นทุนฮาร์ดแวร์และอุปกรณ์ต่อชุด (Hardware BOM per Unit)</a:t>
+              <a:t>5. รายการอุปกรณ์ฮาร์ดแวร์ตู้คอนโทรลมาตรฐาน 4 ค่า (Hardware Specs)</a:t>
             </a:r>
           </a:p>
         </p:txBody>
@@ -5466,19 +5466,19 @@
               </a:defRPr>
             </a:pPr>
             <a:r>
-              <a:t>ชุดเซนเซอร์หลัก (Modela One + pH/TDS/Temp + คลอรีน Cybertice)</a:t>
-            </a:r>
-          </a:p>
-          <a:p>
-            <a:pPr>
-              <a:defRPr sz="1500" b="1">
+              <a:t>ชุดเซนเซอร์หลัก (Modela One + 4 ค่า)</a:t>
+            </a:r>
+          </a:p>
+          <a:p>
+            <a:pPr>
+              <a:defRPr sz="1400" b="1">
                 <a:solidFill>
                   <a:srgbClr val="FFFFFF"/>
                 </a:solidFill>
               </a:defRPr>
             </a:pPr>
             <a:r>
-              <a:t>฿17,000</a:t>
+              <a:t>Modbus RTU</a:t>
             </a:r>
           </a:p>
         </p:txBody>
@@ -5513,7 +5513,7 @@
               </a:defRPr>
             </a:pPr>
             <a:r>
-              <a:t>• บอร์ดควบคุมหลัก Modela One (Modbus RTU/RS-485)</a:t>
+              <a:t>• บอร์ดควบคุมหลัก Modela One (RS-485)</a:t>
             </a:r>
             <a:br/>
             <a:r>
@@ -5521,15 +5521,15 @@
             </a:r>
             <a:br/>
             <a:r>
-              <a:t>• หัววัด TDS / EC Titanium Dual-Pole</a:t>
+              <a:t>• หัววัด TDS Titanium Dual-Pole</a:t>
             </a:r>
             <a:br/>
             <a:r>
-              <a:t>• หัววัดอุณหภูมิ PT1000 (พร้อม ATC ชดเชยอุณหภูมิ)</a:t>
+              <a:t>• หัววัดอุณหภูมิ PT1000 RTD (ATC)</a:t>
             </a:r>
             <a:br/>
             <a:r>
-              <a:t>• เซนเซอร์คลอรีนคงเหลือ Cybertice (Residual Chlorine)</a:t>
+              <a:t>• เซนเซอร์คลอรีนคงเหลือ Cybertice</a:t>
             </a:r>
           </a:p>
         </p:txBody>
@@ -5657,14 +5657,14 @@
           </a:p>
           <a:p>
             <a:pPr>
-              <a:defRPr sz="1500" b="1">
+              <a:defRPr sz="1400" b="1">
                 <a:solidFill>
                   <a:srgbClr val="FFFFFF"/>
                 </a:solidFill>
               </a:defRPr>
             </a:pPr>
             <a:r>
-              <a:t>฿1,000</a:t>
+              <a:t>300 Mbps Wi-Fi</a:t>
             </a:r>
           </a:p>
         </p:txBody>
@@ -5830,19 +5830,19 @@
               </a:defRPr>
             </a:pPr>
             <a:r>
-              <a:t>ซิมการ์ด 4G รายปี (Unlimited 15-20 Mbps)</a:t>
-            </a:r>
-          </a:p>
-          <a:p>
-            <a:pPr>
-              <a:defRPr sz="1500" b="1">
+              <a:t>ซิมการ์ด 4G รายปี (Unlimited)</a:t>
+            </a:r>
+          </a:p>
+          <a:p>
+            <a:pPr>
+              <a:defRPr sz="1400" b="1">
                 <a:solidFill>
                   <a:srgbClr val="FFFFFF"/>
                 </a:solidFill>
               </a:defRPr>
             </a:pPr>
             <a:r>
-              <a:t>฿1,800</a:t>
+              <a:t>15-20 Mbps</a:t>
             </a:r>
           </a:p>
         </p:txBody>
@@ -5877,7 +5877,7 @@
               </a:defRPr>
             </a:pPr>
             <a:r>
-              <a:t>• ซิมเน็ต IoT รายปี ไม่อั้น ไม่ลดสปีด (15-20 Mbps)</a:t>
+              <a:t>• ซิมเน็ต IoT รายปี ไม่อั้น ไม่ลดสปีด</a:t>
             </a:r>
             <a:br/>
             <a:r>
@@ -5885,7 +5885,7 @@
             </a:r>
             <a:br/>
             <a:r>
-              <a:t>• ส่งข้อมูลขึ้นระบบคลาวด์และแจ้งเตือน 24 ชม.</a:t>
+              <a:t>• ส่งข้อมูลขึ้นระบบคลาวด์ตลอด 24 ชม.</a:t>
             </a:r>
           </a:p>
         </p:txBody>
@@ -6008,19 +6008,19 @@
               </a:defRPr>
             </a:pPr>
             <a:r>
-              <a:t>ตู้คอนโทรล IP65 + Switching 24V + Breaker + Wiring</a:t>
-            </a:r>
-          </a:p>
-          <a:p>
-            <a:pPr>
-              <a:defRPr sz="1500" b="1">
+              <a:t>ตู้คอนโทรล IP65 + Switching 24V</a:t>
+            </a:r>
+          </a:p>
+          <a:p>
+            <a:pPr>
+              <a:defRPr sz="1400" b="1">
                 <a:solidFill>
                   <a:srgbClr val="FFFFFF"/>
                 </a:solidFill>
               </a:defRPr>
             </a:pPr>
             <a:r>
-              <a:t>฿1,200</a:t>
+              <a:t>IP65 Waterproof</a:t>
             </a:r>
           </a:p>
         </p:txBody>
@@ -6063,7 +6063,7 @@
             </a:r>
             <a:br/>
             <a:r>
-              <a:t>• Breaker ป้องกันไฟเกิน + Terminal + สายไฟประกอบครบ</a:t>
+              <a:t>• Breaker ป้องกันไฟเกิน + Terminal + Wiring ครบ</a:t>
             </a:r>
           </a:p>
         </p:txBody>
@@ -6139,14 +6139,14 @@
               <a:spcAft>
                 <a:spcPts val="400"/>
               </a:spcAft>
-              <a:defRPr sz="1600" b="1">
+              <a:defRPr sz="1500" b="1">
                 <a:solidFill>
                   <a:srgbClr val="2DD4BF"/>
                 </a:solidFill>
               </a:defRPr>
             </a:pPr>
             <a:r>
-              <a:t>➡️ รวมต้นทุนต่อชุด: ฿21,000 บาท  |  รวมต้นทุนโครงการ (100 ชุด): ฿2,100,000 บาท</a:t>
+              <a:t>➡️ มาตรฐานชุดอุปกรณ์: สำเร็จรูปพร้อมติดตั้ง 100 จุด สื่อสาร 4G LTE และ Cloud Dashboard ครบวงจร</a:t>
             </a:r>
           </a:p>
           <a:p>
@@ -6158,7 +6158,7 @@
               </a:defRPr>
             </a:pPr>
             <a:r>
-              <a:t>ต้นทุนนี้ครอบคลุมชุดหัววัดเซนเซอร์ 4 ค่า (pH / TDS / Temp / Cl) + กล่อง Modela One + เราเตอร์ 4G TP-Link + ซิมรายปี + ตู้ IP65 ประกอบสำเร็จพร้อมใช้งาน</a:t>
+              <a:t>ชุดอุปกรณ์ประกอบสำเร็จรูป ตรวจสอบระบบไฟฟ้า และทดสอบสัญญาณเชื่อมต่อออนไลน์ 100% ก่อนส่งมอบหน้างาน</a:t>
             </a:r>
           </a:p>
         </p:txBody>
@@ -6234,7 +6234,7 @@
               </a:defRPr>
             </a:pPr>
             <a:r>
-              <a:t>6. โครงสร้างราคาขายแนะนำ (แพ็กเกจโครงการ 100 ชุด)</a:t>
+              <a:t>6. โครงสร้างราคาขายทางการ (ไม่รวมติดตั้งหน้างาน - 100 ชุด)</a:t>
             </a:r>
           </a:p>
         </p:txBody>
@@ -6248,7 +6248,7 @@
         <p:spPr>
           <a:xfrm>
             <a:off x="731520" y="1463040"/>
-            <a:ext cx="5120640" cy="4754880"/>
+            <a:ext cx="6949440" cy="4754880"/>
           </a:xfrm>
           <a:prstGeom prst="roundRect">
             <a:avLst/>
@@ -6293,7 +6293,7 @@
         <p:spPr>
           <a:xfrm>
             <a:off x="731520" y="1463040"/>
-            <a:ext cx="5120640" cy="1188720"/>
+            <a:ext cx="6949440" cy="1188720"/>
           </a:xfrm>
           <a:prstGeom prst="roundRect">
             <a:avLst/>
@@ -6335,8 +6335,8 @@
         </p:nvSpPr>
         <p:spPr>
           <a:xfrm>
-            <a:off x="914400" y="1554480"/>
-            <a:ext cx="4754880" cy="1005840"/>
+            <a:off x="1005840" y="1554480"/>
+            <a:ext cx="6400800" cy="1005840"/>
           </a:xfrm>
           <a:prstGeom prst="rect">
             <a:avLst/>
@@ -6350,14 +6350,14 @@
           <a:lstStyle/>
           <a:p>
             <a:pPr>
-              <a:defRPr sz="1300" b="1">
+              <a:defRPr sz="1400" b="1">
                 <a:solidFill>
                   <a:srgbClr val="FFFFFF"/>
                 </a:solidFill>
               </a:defRPr>
             </a:pPr>
             <a:r>
-              <a:t>[แบบที่ 1] ส่งมอบอุปกรณ์พร้อมระบบออนไลน์</a:t>
+              <a:t>ชุดอุปกรณ์ตรวจวัดคุณภาพน้ำสำเร็จรูปพร้อมออนไลน์ (ไม่รวมติดตั้ง)</a:t>
             </a:r>
           </a:p>
           <a:p>
@@ -6369,7 +6369,7 @@
               </a:defRPr>
             </a:pPr>
             <a:r>
-              <a:t>Plug &amp; Play / Supply Only (ราคา ฿29,500 - ฿32,000 / ชุด)</a:t>
+              <a:t>Plug &amp; Play / Supply Only (ราคา ฿31,500 บาท / ชุด)</a:t>
             </a:r>
           </a:p>
         </p:txBody>
@@ -6382,8 +6382,8 @@
         </p:nvSpPr>
         <p:spPr>
           <a:xfrm>
-            <a:off x="914400" y="2743200"/>
-            <a:ext cx="4754880" cy="3383280"/>
+            <a:off x="1005840" y="2743200"/>
+            <a:ext cx="6400800" cy="3383280"/>
           </a:xfrm>
           <a:prstGeom prst="rect">
             <a:avLst/>
@@ -6407,7 +6407,7 @@
               </a:defRPr>
             </a:pPr>
             <a:r>
-              <a:t>📋 ขอบเขตงาน (Scope of Work):</a:t>
+              <a:t>📋 ขอบเขตงานและรายการส่งมอบ (Scope of Deliverables):</a:t>
             </a:r>
           </a:p>
           <a:p>
@@ -6422,7 +6422,7 @@
               </a:defRPr>
             </a:pPr>
             <a:r>
-              <a:t>✔ ประกอบตู้คอนโทรลสำเร็จรูป พร้อมเดินระบบไฟภายใน</a:t>
+              <a:t>✔ ประกอบตู้คอนโทรลสำเร็จรูป IP65 พร้อมระบบไฟ Switching 24V และ Surge Protection</a:t>
             </a:r>
           </a:p>
           <a:p>
@@ -6437,7 +6437,7 @@
               </a:defRPr>
             </a:pPr>
             <a:r>
-              <a:t>✔ ใส่ซิมรายปีและตั้งค่าเชื่อมต่อเน็ตเวิร์ก 4G LTE</a:t>
+              <a:t>✔ ชุดเซนเซอร์ 4 ค่า (Modela One + pH แก้ว + TDS Titanium + PT1000 + คลอรีน Cybertice)</a:t>
             </a:r>
           </a:p>
           <a:p>
@@ -6452,7 +6452,7 @@
               </a:defRPr>
             </a:pPr>
             <a:r>
-              <a:t>✔ เชื่อมต่อ Modbus อ่านค่า pH, TDS, Temp, Chlorine</a:t>
+              <a:t>✔ เราเตอร์ 4G LTE (TP-Link TL-MR100) พร้อมซิมการ์ด IoT Unlimited Data 12 เดือนเต็ม</a:t>
             </a:r>
           </a:p>
           <a:p>
@@ -6467,7 +6467,7 @@
               </a:defRPr>
             </a:pPr>
             <a:r>
-              <a:t>✔ ตั้งค่าระบบ Modela App สำหรับดูข้อมูลและแจ้งเตือนผ่านมือถือ</a:t>
+              <a:t>✔ ตั้งค่าระบบ Modela Mobile App และ Centralized Web Dashboard 100 จุด</a:t>
             </a:r>
           </a:p>
           <a:p>
@@ -6482,7 +6482,22 @@
               </a:defRPr>
             </a:pPr>
             <a:r>
-              <a:t>✔ จัดทำ Web Dashboard กลางรวมข้อมูลทั้ง 100 จุด</a:t>
+              <a:t>✔ จัดส่งอุปกรณ์สำเร็จรูปถึงหน้างาน พร้อมคู่มือและแบบแปลนการต่อท่อบายพาส</a:t>
+            </a:r>
+          </a:p>
+          <a:p>
+            <a:pPr>
+              <a:spcAft>
+                <a:spcPts val="200"/>
+              </a:spcAft>
+              <a:defRPr sz="950">
+                <a:solidFill>
+                  <a:srgbClr val="64748B"/>
+                </a:solidFill>
+              </a:defRPr>
+            </a:pPr>
+            <a:r>
+              <a:t>✔ รับประกันอุปกรณ์ฮาร์ดแวร์และหัววัดเซนเซอร์ตลอด 1 ปีเต็ม (ลูกค้าติดตั้งยึดตู้เอง)</a:t>
             </a:r>
           </a:p>
           <a:p>
@@ -6490,18 +6505,14 @@
               <a:spcBef>
                 <a:spcPts val="800"/>
               </a:spcBef>
-              <a:defRPr b="1" sz="1000">
+              <a:defRPr b="1" sz="1200">
                 <a:solidFill>
                   <a:srgbClr val="0284C7"/>
                 </a:solidFill>
               </a:defRPr>
             </a:pPr>
             <a:r>
-              <a:t>💰 มูลค่าโครงการรวม (100 ชุด): ฿2,950,000 - ฿3,200,000 บาท</a:t>
-            </a:r>
-            <a:br/>
-            <a:r>
-              <a:t>📈 กำไรขั้นต้นโดยประมาณ: ฿850,000 - ฿1,100,000 บาท (Margin ~29-34%)</a:t>
+              <a:t>💰 ราคาต่อชุด: ฿31,500 บาท  |  มูลค่าโครงการรวม (100 ชุด): ฿3,150,000 บาท</a:t>
             </a:r>
           </a:p>
         </p:txBody>
@@ -6514,8 +6525,8 @@
         </p:nvSpPr>
         <p:spPr>
           <a:xfrm>
-            <a:off x="6309360" y="1463040"/>
-            <a:ext cx="5120640" cy="4754880"/>
+            <a:off x="7955279" y="1463040"/>
+            <a:ext cx="3504895" cy="4754880"/>
           </a:xfrm>
           <a:prstGeom prst="roundRect">
             <a:avLst/>
@@ -6553,57 +6564,14 @@
       </p:sp>
       <p:sp>
         <p:nvSpPr>
-          <p:cNvPr id="8" name="Rounded Rectangle 7"/>
-          <p:cNvSpPr/>
-          <p:nvPr/>
-        </p:nvSpPr>
-        <p:spPr>
-          <a:xfrm>
-            <a:off x="6309360" y="1463040"/>
-            <a:ext cx="5120640" cy="1188720"/>
-          </a:xfrm>
-          <a:prstGeom prst="roundRect">
-            <a:avLst/>
-          </a:prstGeom>
-          <a:solidFill>
-            <a:srgbClr val="059669"/>
-          </a:solidFill>
-          <a:ln>
-            <a:noFill/>
-          </a:ln>
-        </p:spPr>
-        <p:style>
-          <a:lnRef idx="1">
-            <a:schemeClr val="accent1"/>
-          </a:lnRef>
-          <a:fillRef idx="3">
-            <a:schemeClr val="accent1"/>
-          </a:fillRef>
-          <a:effectRef idx="2">
-            <a:schemeClr val="accent1"/>
-          </a:effectRef>
-          <a:fontRef idx="minor">
-            <a:schemeClr val="lt1"/>
-          </a:fontRef>
-        </p:style>
-        <p:txBody>
-          <a:bodyPr rtlCol="0" anchor="ctr"/>
-          <a:lstStyle/>
-          <a:p>
-            <a:pPr algn="ctr"/>
-          </a:p>
-        </p:txBody>
-      </p:sp>
-      <p:sp>
-        <p:nvSpPr>
-          <p:cNvPr id="9" name="TextBox 8"/>
+          <p:cNvPr id="8" name="TextBox 7"/>
           <p:cNvSpPr txBox="1"/>
           <p:nvPr/>
         </p:nvSpPr>
         <p:spPr>
           <a:xfrm>
-            <a:off x="6492240" y="1554480"/>
-            <a:ext cx="4754880" cy="1005840"/>
+            <a:off x="8138160" y="1645920"/>
+            <a:ext cx="3139135" cy="4389120"/>
           </a:xfrm>
           <a:prstGeom prst="rect">
             <a:avLst/>
@@ -6617,64 +6585,51 @@
           <a:lstStyle/>
           <a:p>
             <a:pPr>
-              <a:defRPr sz="1300" b="1">
-                <a:solidFill>
-                  <a:srgbClr val="FFFFFF"/>
-                </a:solidFill>
-              </a:defRPr>
-            </a:pPr>
-            <a:r>
-              <a:t>[แบบที่ 2] แบบครบวงจร รวมติดตั้งหน้างาน + สอบเทียบ</a:t>
-            </a:r>
-          </a:p>
-          <a:p>
-            <a:pPr>
-              <a:defRPr sz="1100" b="1">
-                <a:solidFill>
-                  <a:srgbClr val="FFFFFF"/>
-                </a:solidFill>
-              </a:defRPr>
-            </a:pPr>
-            <a:r>
-              <a:t>Turnkey Solution (ราคา ฿38,000 - ฿42,000 / ชุด)</a:t>
-            </a:r>
-          </a:p>
-        </p:txBody>
-      </p:sp>
-      <p:sp>
-        <p:nvSpPr>
-          <p:cNvPr id="10" name="TextBox 9"/>
-          <p:cNvSpPr txBox="1"/>
-          <p:nvPr/>
-        </p:nvSpPr>
-        <p:spPr>
-          <a:xfrm>
-            <a:off x="6492240" y="2743200"/>
-            <a:ext cx="4754880" cy="3383280"/>
-          </a:xfrm>
-          <a:prstGeom prst="rect">
-            <a:avLst/>
-          </a:prstGeom>
-          <a:noFill/>
-        </p:spPr>
-        <p:txBody>
-          <a:bodyPr wrap="square">
-            <a:spAutoFit/>
-          </a:bodyPr>
-          <a:lstStyle/>
+              <a:spcAft>
+                <a:spcPts val="600"/>
+              </a:spcAft>
+              <a:defRPr sz="1200" b="1">
+                <a:solidFill>
+                  <a:srgbClr val="059669"/>
+                </a:solidFill>
+              </a:defRPr>
+            </a:pPr>
+            <a:r>
+              <a:t>★ บริการเสริมพิเศษ (Add-on):</a:t>
+            </a:r>
+          </a:p>
+          <a:p>
+            <a:pPr>
+              <a:spcAft>
+                <a:spcPts val="1400"/>
+              </a:spcAft>
+              <a:defRPr sz="919">
+                <a:solidFill>
+                  <a:srgbClr val="0F172A"/>
+                </a:solidFill>
+              </a:defRPr>
+            </a:pPr>
+            <a:r>
+              <a:t>หากต้องการให้ทีมวิศวกรเข้าติดตั้ง ยึดตู้ เดินท่อบายพาส และสอบเทียบหัววัดหน้างาน 100 จุด:</a:t>
+            </a:r>
+            <a:br/>
+            <a:r>
+              <a:t>➡️ +฿8,000 / จุด (รวม +฿800,000)</a:t>
+            </a:r>
+          </a:p>
           <a:p>
             <a:pPr>
               <a:spcAft>
                 <a:spcPts val="400"/>
               </a:spcAft>
-              <a:defRPr b="1" sz="1100">
-                <a:solidFill>
-                  <a:srgbClr val="0F172A"/>
-                </a:solidFill>
-              </a:defRPr>
-            </a:pPr>
-            <a:r>
-              <a:t>📋 ขอบเขตงาน (Scope of Work):</a:t>
+              <a:defRPr sz="1100" b="1">
+                <a:solidFill>
+                  <a:srgbClr val="0284C7"/>
+                </a:solidFill>
+              </a:defRPr>
+            </a:pPr>
+            <a:r>
+              <a:t>💻 ทางเลือกซอฟต์แวร์ (100 จุด):</a:t>
             </a:r>
           </a:p>
           <a:p>
@@ -6682,14 +6637,14 @@
               <a:spcAft>
                 <a:spcPts val="200"/>
               </a:spcAft>
-              <a:defRPr sz="950">
+              <a:defRPr sz="850">
                 <a:solidFill>
                   <a:srgbClr val="64748B"/>
                 </a:solidFill>
               </a:defRPr>
             </a:pPr>
             <a:r>
-              <a:t>✔ ทุกอย่างในแบบที่ 1 (ตู้ + ซิม + Modbus + App + Web Dashboard)</a:t>
+              <a:t>• Option 1 (App+Telegram): ซื้อขาด ฿250k | รายปี ฿120k/ปี (แนะนำ)</a:t>
             </a:r>
           </a:p>
           <a:p>
@@ -6697,14 +6652,14 @@
               <a:spcAft>
                 <a:spcPts val="200"/>
               </a:spcAft>
-              <a:defRPr sz="950">
+              <a:defRPr sz="850">
                 <a:solidFill>
                   <a:srgbClr val="64748B"/>
                 </a:solidFill>
               </a:defRPr>
             </a:pPr>
             <a:r>
-              <a:t>✔ ค่าแรงและทีมงานเข้าติดตั้งยึดตู้ / เดินท่อบายพาสหน้างาน</a:t>
+              <a:t>• Option 2 (Web กลาง 100 จุด): ซื้อขาด ฿450k | รายปี ฿240k/ปี</a:t>
             </a:r>
           </a:p>
           <a:p>
@@ -6712,63 +6667,14 @@
               <a:spcAft>
                 <a:spcPts val="200"/>
               </a:spcAft>
-              <a:defRPr sz="950">
+              <a:defRPr sz="850">
                 <a:solidFill>
                   <a:srgbClr val="64748B"/>
                 </a:solidFill>
               </a:defRPr>
             </a:pPr>
             <a:r>
-              <a:t>✔ สอบเทียบ (Calibration) หัววัด pH / TDS ด้วยน้ำยามาตรฐานหน้างาน</a:t>
-            </a:r>
-          </a:p>
-          <a:p>
-            <a:pPr>
-              <a:spcAft>
-                <a:spcPts val="200"/>
-              </a:spcAft>
-              <a:defRPr sz="950">
-                <a:solidFill>
-                  <a:srgbClr val="64748B"/>
-                </a:solidFill>
-              </a:defRPr>
-            </a:pPr>
-            <a:r>
-              <a:t>✔ อบรมการใช้งานระบบและส่งมอบคู่มือการปฏิบัติงาน</a:t>
-            </a:r>
-          </a:p>
-          <a:p>
-            <a:pPr>
-              <a:spcAft>
-                <a:spcPts val="200"/>
-              </a:spcAft>
-              <a:defRPr sz="950">
-                <a:solidFill>
-                  <a:srgbClr val="64748B"/>
-                </a:solidFill>
-              </a:defRPr>
-            </a:pPr>
-            <a:r>
-              <a:t>✔ รับประกันระบบและบริการ On-site Service ตลอด 1 ปีเต็ม</a:t>
-            </a:r>
-          </a:p>
-          <a:p>
-            <a:pPr>
-              <a:spcBef>
-                <a:spcPts val="800"/>
-              </a:spcBef>
-              <a:defRPr b="1" sz="1000">
-                <a:solidFill>
-                  <a:srgbClr val="059669"/>
-                </a:solidFill>
-              </a:defRPr>
-            </a:pPr>
-            <a:r>
-              <a:t>💰 มูลค่าโครงการรวม (100 ชุด): ฿3,800,000 - ฿4,200,000 บาท</a:t>
-            </a:r>
-            <a:br/>
-            <a:r>
-              <a:t>📈 กำไรขั้นต้นโดยประมาณ: ฿1,700,000 - ฿2,100,000 บาท (Margin ~45-50%)</a:t>
+              <a:t>• Option 3 (LINE OA): ซื้อขาด ฿600k | รายปี ฿360k/ปี</a:t>
             </a:r>
           </a:p>
         </p:txBody>
@@ -6877,7 +6783,7 @@
               </a:defRPr>
             </a:pPr>
             <a:r>
-              <a:t>💧 สรุปภาพรวมข้อเสนอราคาและเงื่อนไขสัญญา (100 ชุด)</a:t>
+              <a:t>💧 สรุปภาพรวมข้อเสนอราคาทางการ (100 ชุด)</a:t>
             </a:r>
           </a:p>
           <a:p>
@@ -6907,7 +6813,7 @@
               </a:defRPr>
             </a:pPr>
             <a:r>
-              <a:t>พร้อมส่งมอบอุปกรณ์และระบบแดชบอร์ดครบวงจรตามขอบเขตที่ลูกค้าเลือก:</a:t>
+              <a:t>พร้อมส่งมอบอุปกรณ์สำเร็จรูปและระบบแดชบอร์ดครบวงจร (ไม่รวมติดตั้ง):</a:t>
             </a:r>
           </a:p>
           <a:p>
@@ -6922,19 +6828,19 @@
               </a:defRPr>
             </a:pPr>
             <a:r>
-              <a:t>• รวมต้นทุนฮาร์ดแวร์ต่อชุด: ฿21,000 บาท (100 ชุด = ฿2,100,000 บาท)</a:t>
+              <a:t>• ราคาเสนอขายต่อชุด (Supply Only): ฿31,500 บาท / ชุด</a:t>
             </a:r>
             <a:br/>
             <a:r>
-              <a:t>• [แบบที่ 1 Plug &amp; Play]: ฿29,500 - ฿32,000 บ./ชุด (รวม ฿2.95M - ฿3.20M | กำไร ฿8.5 แสน - ฿1.1 ล้าน)</a:t>
+              <a:t>• มูลค่าโครงการรวม (100 ชุด): ฿3,150,000 บาท (สามล้านหนึ่งแสนห้าหมื่นบาทถ้วน)</a:t>
             </a:r>
             <a:br/>
             <a:r>
-              <a:t>• [แบบที่ 2 Turnkey]: ฿38,000 - ฿42,000 บ./ชุด (รวม ฿3.80M - ฿4.20M | กำไร ฿1.7 - ฿2.1 ล้าน)</a:t>
+              <a:t>• บริการเสริมติดตั้ง &amp; สอบเทียบหน้างาน (Optional Add-on): +฿8,000 บาท/จุด (รวม +฿800,000 บาท)</a:t>
             </a:r>
             <a:br/>
             <a:r>
-              <a:t>• ซอฟต์แวร์แดชบอร์ด 100 จุด: ซื้อขาด ฿2.5 - ฿6.0 แสน | รายปี ฿1.2 - ฿3.6 แสน/ปี (Recurring Income)</a:t>
+              <a:t>• ซอฟต์แวร์แดชบอร์ด 100 จุด: Option 1 (App+Telegram) ฿250k | Option 2 (Web กลาง 100 จุด) ฿450k | Option 3 (LINE OA) ฿600k</a:t>
             </a:r>
           </a:p>
           <a:p>

--- a/NCT_Water_Nexus_Report_and_Pricing.pptx
+++ b/NCT_Water_Nexus_Report_and_Pricing.pptx
@@ -3234,7 +3234,7 @@
             </a:r>
             <a:br/>
             <a:r>
-              <a:t>• ข้อเสนอราคาโครงการ 100 ชุด (ไม่รวมติดตั้ง): ฿31,500 / ชุด (มูลค่ารวม ฿3,150,000 บาท) สรุปไว้ท้ายสุด (สไลด์ 6-8)</a:t>
+              <a:t>• [แบบที่ 1] Plug &amp; Play (ตู้สำเร็จรูป + Web 100 จุด + Cloud 1 ปี): ฿36,000 / ชุด (มูลค่ารวม ฿3,600,000 บาท)</a:t>
             </a:r>
           </a:p>
           <a:p>
@@ -6234,7 +6234,7 @@
               </a:defRPr>
             </a:pPr>
             <a:r>
-              <a:t>6. โครงสร้างราคาขายทางการ (ไม่รวมติดตั้งหน้างาน - 100 ชุด)</a:t>
+              <a:t>6. ข้อเสนอราคาโครงการทางการ (ส่งมอบตู้สำเร็จรูป + Web 100 จุด + Cloud 1 ปี)</a:t>
             </a:r>
           </a:p>
         </p:txBody>
@@ -6350,26 +6350,26 @@
           <a:lstStyle/>
           <a:p>
             <a:pPr>
-              <a:defRPr sz="1400" b="1">
+              <a:defRPr sz="1300" b="1">
                 <a:solidFill>
                   <a:srgbClr val="FFFFFF"/>
                 </a:solidFill>
               </a:defRPr>
             </a:pPr>
             <a:r>
-              <a:t>ชุดอุปกรณ์ตรวจวัดคุณภาพน้ำสำเร็จรูปพร้อมออนไลน์ (ไม่รวมติดตั้ง)</a:t>
-            </a:r>
-          </a:p>
-          <a:p>
-            <a:pPr>
-              <a:defRPr sz="1100" b="1">
+              <a:t>[แบบที่ 1] Plug &amp; Play (ส่งมอบตู้สำเร็จรูป + Web 100 จุด + Cloud 1 ปี)</a:t>
+            </a:r>
+          </a:p>
+          <a:p>
+            <a:pPr>
+              <a:defRPr sz="1050" b="1">
                 <a:solidFill>
                   <a:srgbClr val="FFFFFF"/>
                 </a:solidFill>
               </a:defRPr>
             </a:pPr>
             <a:r>
-              <a:t>Plug &amp; Play / Supply Only (ราคา ฿31,500 บาท / ชุด)</a:t>
+              <a:t>All-in-One IoT Solution (ราคา ฿36,000 บาท / ชุด | รวม 100 ชุด = ฿3,600,000 บาท)</a:t>
             </a:r>
           </a:p>
         </p:txBody>
@@ -6400,37 +6400,37 @@
               <a:spcAft>
                 <a:spcPts val="400"/>
               </a:spcAft>
-              <a:defRPr b="1" sz="1100">
+              <a:defRPr b="1" sz="1050">
                 <a:solidFill>
                   <a:srgbClr val="0F172A"/>
                 </a:solidFill>
               </a:defRPr>
             </a:pPr>
             <a:r>
-              <a:t>📋 ขอบเขตงานและรายการส่งมอบ (Scope of Deliverables):</a:t>
+              <a:t>📋 ขอบเขตงานและรายการส่งมอบครบวงจร (Scope of Deliverables):</a:t>
             </a:r>
           </a:p>
           <a:p>
             <a:pPr>
               <a:spcAft>
-                <a:spcPts val="200"/>
+                <a:spcPts val="100"/>
               </a:spcAft>
-              <a:defRPr sz="950">
+              <a:defRPr sz="880">
                 <a:solidFill>
                   <a:srgbClr val="64748B"/>
                 </a:solidFill>
               </a:defRPr>
             </a:pPr>
             <a:r>
-              <a:t>✔ ประกอบตู้คอนโทรลสำเร็จรูป IP65 พร้อมระบบไฟ Switching 24V และ Surge Protection</a:t>
+              <a:t>✔ ประกอบตู้คอนโทรลสำเร็จรูป IP65 พร้อม Switching 24V &amp; Surge Protection</a:t>
             </a:r>
           </a:p>
           <a:p>
             <a:pPr>
               <a:spcAft>
-                <a:spcPts val="200"/>
+                <a:spcPts val="100"/>
               </a:spcAft>
-              <a:defRPr sz="950">
+              <a:defRPr sz="880">
                 <a:solidFill>
                   <a:srgbClr val="64748B"/>
                 </a:solidFill>
@@ -6443,9 +6443,9 @@
           <a:p>
             <a:pPr>
               <a:spcAft>
-                <a:spcPts val="200"/>
+                <a:spcPts val="100"/>
               </a:spcAft>
-              <a:defRPr sz="950">
+              <a:defRPr sz="880">
                 <a:solidFill>
                   <a:srgbClr val="64748B"/>
                 </a:solidFill>
@@ -6458,52 +6458,82 @@
           <a:p>
             <a:pPr>
               <a:spcAft>
-                <a:spcPts val="200"/>
+                <a:spcPts val="100"/>
               </a:spcAft>
-              <a:defRPr sz="950">
+              <a:defRPr sz="880">
                 <a:solidFill>
                   <a:srgbClr val="64748B"/>
                 </a:solidFill>
               </a:defRPr>
             </a:pPr>
             <a:r>
-              <a:t>✔ ตั้งค่าระบบ Modela Mobile App และ Centralized Web Dashboard 100 จุด</a:t>
+              <a:t>✔ รวมระบบ Centralized Web Dashboard 100 จุด + Cloud Server License ฟรี 1 ปีแรก</a:t>
             </a:r>
           </a:p>
           <a:p>
             <a:pPr>
               <a:spcAft>
-                <a:spcPts val="200"/>
+                <a:spcPts val="100"/>
               </a:spcAft>
-              <a:defRPr sz="950">
+              <a:defRPr sz="880">
                 <a:solidFill>
                   <a:srgbClr val="64748B"/>
                 </a:solidFill>
               </a:defRPr>
             </a:pPr>
             <a:r>
-              <a:t>✔ จัดส่งอุปกรณ์สำเร็จรูปถึงหน้างาน พร้อมคู่มือและแบบแปลนการต่อท่อบายพาส</a:t>
+              <a:t>✔ Modela Mobile Companion App 5 หน้าเมนู (Home/History/100 Devices/Calib/Settings)</a:t>
             </a:r>
           </a:p>
           <a:p>
             <a:pPr>
               <a:spcAft>
-                <a:spcPts val="200"/>
+                <a:spcPts val="100"/>
               </a:spcAft>
-              <a:defRPr sz="950">
+              <a:defRPr sz="880">
                 <a:solidFill>
                   <a:srgbClr val="64748B"/>
                 </a:solidFill>
               </a:defRPr>
             </a:pPr>
             <a:r>
-              <a:t>✔ รับประกันอุปกรณ์ฮาร์ดแวร์และหัววัดเซนเซอร์ตลอด 1 ปีเต็ม (ลูกค้าติดตั้งยึดตู้เอง)</a:t>
+              <a:t>✔ ระบบแจ้งเตือน Real-time อัตโนมัติ 24 ชม. ผ่าน Telegram (ฟรีตลอดชีพ) และ LINE OA</a:t>
+            </a:r>
+          </a:p>
+          <a:p>
+            <a:pPr>
+              <a:spcAft>
+                <a:spcPts val="100"/>
+              </a:spcAft>
+              <a:defRPr sz="880">
+                <a:solidFill>
+                  <a:srgbClr val="64748B"/>
+                </a:solidFill>
+              </a:defRPr>
+            </a:pPr>
+            <a:r>
+              <a:t>✔ จัดส่งอุปกรณ์สำเร็จรูปถึงหน้างาน พร้อมคู่มือและแบบแปลนการต่อท่อบายพาส (ลูกค้าติดตั้งเอง)</a:t>
+            </a:r>
+          </a:p>
+          <a:p>
+            <a:pPr>
+              <a:spcAft>
+                <a:spcPts val="100"/>
+              </a:spcAft>
+              <a:defRPr sz="880">
+                <a:solidFill>
+                  <a:srgbClr val="64748B"/>
+                </a:solidFill>
+              </a:defRPr>
+            </a:pPr>
+            <a:r>
+              <a:t>✔ รับประกันอุปกรณ์ฮาร์ดแวร์และเซนเซอร์ตลอด 1 ปีเต็ม</a:t>
             </a:r>
           </a:p>
           <a:p>
             <a:pPr>
               <a:spcBef>
-                <a:spcPts val="800"/>
+                <a:spcPts val="600"/>
               </a:spcBef>
               <a:defRPr b="1" sz="1200">
                 <a:solidFill>
@@ -6512,7 +6542,7 @@
               </a:defRPr>
             </a:pPr>
             <a:r>
-              <a:t>💰 ราคาต่อชุด: ฿31,500 บาท  |  มูลค่าโครงการรวม (100 ชุด): ฿3,150,000 บาท</a:t>
+              <a:t>💰 ราคาต่อชุด: ฿36,000 บาท  |  มูลค่าโครงการรวม (100 ชุด): ฿3,600,000 บาท</a:t>
             </a:r>
           </a:p>
         </p:txBody>
@@ -6629,7 +6659,7 @@
               </a:defRPr>
             </a:pPr>
             <a:r>
-              <a:t>💻 ทางเลือกซอฟต์แวร์ (100 จุด):</a:t>
+              <a:t>🔄 การต่อสัญญาปีถัดไป (Year 2+):</a:t>
             </a:r>
           </a:p>
           <a:p>
@@ -6644,7 +6674,7 @@
               </a:defRPr>
             </a:pPr>
             <a:r>
-              <a:t>• Option 1 (App+Telegram): ซื้อขาด ฿250k | รายปี ฿120k/ปี (แนะนำ)</a:t>
+              <a:t>• ปีที่ 1: ฟรี Cloud &amp; Dashboard ตลอด 12 เดือน</a:t>
             </a:r>
           </a:p>
           <a:p>
@@ -6659,7 +6689,7 @@
               </a:defRPr>
             </a:pPr>
             <a:r>
-              <a:t>• Option 2 (Web กลาง 100 จุด): ซื้อขาด ฿450k | รายปี ฿240k/ปี</a:t>
+              <a:t>• ปีที่ 2 เป็นต้นไป: ค่าบริการ Cloud Server License &amp; Software MA เพียงปีละ 120,000 บาท (1,200 บ./จุด/ปี)</a:t>
             </a:r>
           </a:p>
           <a:p>
@@ -6674,7 +6704,7 @@
               </a:defRPr>
             </a:pPr>
             <a:r>
-              <a:t>• Option 3 (LINE OA): ซื้อขาด ฿600k | รายปี ฿360k/ปี</a:t>
+              <a:t>• รวมการอัปเดตระบบ สำรองฐานข้อมูล และดูแลความปลอดภัย 24 ชม.</a:t>
             </a:r>
           </a:p>
         </p:txBody>
@@ -6813,7 +6843,7 @@
               </a:defRPr>
             </a:pPr>
             <a:r>
-              <a:t>พร้อมส่งมอบอุปกรณ์สำเร็จรูปและระบบแดชบอร์ดครบวงจร (ไม่รวมติดตั้ง):</a:t>
+              <a:t>[แบบที่ 1] Plug &amp; Play (ส่งมอบตู้สำเร็จรูป + Web 100 จุด + Cloud 1 ปี):</a:t>
             </a:r>
           </a:p>
           <a:p>
@@ -6828,19 +6858,23 @@
               </a:defRPr>
             </a:pPr>
             <a:r>
-              <a:t>• ราคาเสนอขายต่อชุด (Supply Only): ฿31,500 บาท / ชุด</a:t>
+              <a:t>• ราคาเสนอขายต่อชุด: ฿36,000 บาท / ชุด</a:t>
             </a:r>
             <a:br/>
             <a:r>
-              <a:t>• มูลค่าโครงการรวม (100 ชุด): ฿3,150,000 บาท (สามล้านหนึ่งแสนห้าหมื่นบาทถ้วน)</a:t>
+              <a:t>• มูลค่าโครงการรวม (100 ชุด): ฿3,600,000 บาท (สามล้านหกแสนบาทถ้วน)</a:t>
             </a:r>
             <a:br/>
             <a:r>
+              <a:t>• รวมครบ: ตู้ IP65 + 4 เซนเซอร์ + ซิม 4G + Web Dashboard 100 จุด + Mobile App + Cloud 1 ปี</a:t>
+            </a:r>
+            <a:br/>
+            <a:r>
               <a:t>• บริการเสริมติดตั้ง &amp; สอบเทียบหน้างาน (Optional Add-on): +฿8,000 บาท/จุด (รวม +฿800,000 บาท)</a:t>
             </a:r>
             <a:br/>
             <a:r>
-              <a:t>• ซอฟต์แวร์แดชบอร์ด 100 จุด: Option 1 (App+Telegram) ฿250k | Option 2 (Web กลาง 100 จุด) ฿450k | Option 3 (LINE OA) ฿600k</a:t>
+              <a:t>• ปีที่ 2 เป็นต้นไป: ค่าบริการ Cloud Server &amp; Software MA ปีละ 120,000 บาท/ปี</a:t>
             </a:r>
           </a:p>
           <a:p>

--- a/NCT_Water_Nexus_Report_and_Pricing.pptx
+++ b/NCT_Water_Nexus_Report_and_Pricing.pptx
@@ -4288,7 +4288,7 @@
               </a:defRPr>
             </a:pPr>
             <a:r>
-              <a:t>❶ สถานะระบบ &amp; แบตเตอรี่: แสดงสถานะ Healthy, สัญญาณ 4G/WiFi และแบต LiFePO4 (90%)</a:t>
+              <a:t>❶ สถานะระบบ &amp; ไฟเลี้ยง 24V: แสดงสถานะ Healthy, สัญญาณ 4G/WiFi และระบบไฟ Switching 24V ปกติ</a:t>
             </a:r>
           </a:p>
           <a:p>
@@ -4555,7 +4555,7 @@
               </a:defRPr>
             </a:pPr>
             <a:r>
-              <a:t>Hero pH, Cl, Temp, TDS, Battery</a:t>
+              <a:t>Hero pH, Cl, Temp, TDS, Power 24V</a:t>
             </a:r>
           </a:p>
         </p:txBody>

--- a/NCT_Water_Nexus_Report_and_Pricing.pptx
+++ b/NCT_Water_Nexus_Report_and_Pricing.pptx
@@ -3181,7 +3181,7 @@
               </a:defRPr>
             </a:pPr>
             <a:r>
-              <a:t>💧 โครงการระบบตรวจวัดคุณภาพน้ำอัจฉริยะ 100 ชุด (Modela + Cybertice)</a:t>
+              <a:t>💧 ชุดอุปกรณ์ตรวจวัดคุณภาพน้ำอัจฉริยะสำเร็จรูป (Modela + Cybertice)</a:t>
             </a:r>
           </a:p>
           <a:p>
@@ -3211,7 +3211,7 @@
               </a:defRPr>
             </a:pPr>
             <a:r>
-              <a:t>รายงานนำเสนอโซลูชันระบบตรวจวัดคุณภาพน้ำ แดชบอร์ดควบคุม และใบเสนอราคาทางการ (100 ชุด)</a:t>
+              <a:t>รายงานนำเสนอโซลูชันระบบตรวจวัดคุณภาพน้ำ แดชบอร์ดควบคุม และใบเสนอราคามาตรฐาน (1 ชุด)</a:t>
             </a:r>
           </a:p>
           <a:p>
@@ -3234,7 +3234,7 @@
             </a:r>
             <a:br/>
             <a:r>
-              <a:t>• [แบบที่ 1] Plug &amp; Play (ตู้สำเร็จรูป + Web 100 จุด + Cloud 1 ปี): ฿36,000 / ชุด (มูลค่ารวม ฿3,600,000 บาท)</a:t>
+              <a:t>• ราคาเสนอขายมาตรฐาน: ฿45,000 / ชุด (พร้อมเงื่อนไขส่วนลดพิเศษเมื่อสั่งซื้อ 100 ชุดขึ้นไป เหลือ ฿36,000 / ชุด)</a:t>
             </a:r>
           </a:p>
           <a:p>
@@ -3310,7 +3310,7 @@
               </a:defRPr>
             </a:pPr>
             <a:r>
-              <a:t>โครงการระบบตรวจวัดคุณภาพน้ำ 100 ชุด (NCT WATER NEXUS)</a:t>
+              <a:t>ชุดอุปกรณ์ตรวจวัดคุณภาพน้ำสำเร็จรูป (NCT WATER NEXUS)</a:t>
             </a:r>
           </a:p>
           <a:p>
@@ -3322,7 +3322,7 @@
               </a:defRPr>
             </a:pPr>
             <a:r>
-              <a:t>1. ภาพรวมโครงการและข้อกำหนดทางเทคนิค 4 พารามิเตอร์</a:t>
+              <a:t>1. ข้อมูลผลิตภัณฑ์และข้อกำหนดทางเทคนิค 4 พารามิเตอร์</a:t>
             </a:r>
           </a:p>
         </p:txBody>
@@ -4154,7 +4154,7 @@
               </a:defRPr>
             </a:pPr>
             <a:r>
-              <a:t>โครงการระบบตรวจวัดคุณภาพน้ำ 100 ชุด (NCT WATER NEXUS)</a:t>
+              <a:t>ชุดอุปกรณ์ตรวจวัดคุณภาพน้ำสำเร็จรูป (NCT WATER NEXUS)</a:t>
             </a:r>
           </a:p>
           <a:p>
@@ -4427,7 +4427,7 @@
               </a:defRPr>
             </a:pPr>
             <a:r>
-              <a:t>โครงการระบบตรวจวัดคุณภาพน้ำ 100 ชุด (NCT WATER NEXUS)</a:t>
+              <a:t>ชุดอุปกรณ์ตรวจวัดคุณภาพน้ำสำเร็จรูป (NCT WATER NEXUS)</a:t>
             </a:r>
           </a:p>
           <a:p>
@@ -4775,7 +4775,7 @@
               </a:defRPr>
             </a:pPr>
             <a:r>
-              <a:t>3. รวม 100 สถานี (Devices)</a:t>
+              <a:t>3. รวมสถานีทั้งหมด (Devices)</a:t>
             </a:r>
           </a:p>
           <a:p>
@@ -4967,7 +4967,7 @@
               </a:defRPr>
             </a:pPr>
             <a:r>
-              <a:t>โครงการระบบตรวจวัดคุณภาพน้ำ 100 ชุด (NCT WATER NEXUS)</a:t>
+              <a:t>ชุดอุปกรณ์ตรวจวัดคุณภาพน้ำสำเร็จรูป (NCT WATER NEXUS)</a:t>
             </a:r>
           </a:p>
           <a:p>
@@ -5331,7 +5331,7 @@
               </a:defRPr>
             </a:pPr>
             <a:r>
-              <a:t>โครงการระบบตรวจวัดคุณภาพน้ำ 100 ชุด (NCT WATER NEXUS)</a:t>
+              <a:t>ชุดอุปกรณ์ตรวจวัดคุณภาพน้ำสำเร็จรูป (NCT WATER NEXUS)</a:t>
             </a:r>
           </a:p>
           <a:p>
@@ -5343,7 +5343,7 @@
               </a:defRPr>
             </a:pPr>
             <a:r>
-              <a:t>5. รายการอุปกรณ์ฮาร์ดแวร์ตู้คอนโทรลมาตรฐาน 4 ค่า (Hardware Specs)</a:t>
+              <a:t>5. รายการอุปกรณ์ฮาร์ดแวร์ตู้คอนโทรลมาตรฐานต่อชุด (Hardware Specs)</a:t>
             </a:r>
           </a:p>
         </p:txBody>
@@ -6146,7 +6146,7 @@
               </a:defRPr>
             </a:pPr>
             <a:r>
-              <a:t>➡️ มาตรฐานชุดอุปกรณ์: สำเร็จรูปพร้อมติดตั้ง 100 จุด สื่อสาร 4G LTE และ Cloud Dashboard ครบวงจร</a:t>
+              <a:t>➡️ มาตรฐานชุดอุปกรณ์: สำเร็จรูปพร้อมติดตั้ง สื่อสาร 4G LTE และ Cloud Dashboard ครบวงจร</a:t>
             </a:r>
           </a:p>
           <a:p>
@@ -6222,7 +6222,7 @@
               </a:defRPr>
             </a:pPr>
             <a:r>
-              <a:t>โครงการระบบตรวจวัดคุณภาพน้ำ 100 ชุด (NCT WATER NEXUS)</a:t>
+              <a:t>ชุดอุปกรณ์ตรวจวัดคุณภาพน้ำสำเร็จรูป (NCT WATER NEXUS)</a:t>
             </a:r>
           </a:p>
           <a:p>
@@ -6234,7 +6234,7 @@
               </a:defRPr>
             </a:pPr>
             <a:r>
-              <a:t>6. ข้อเสนอราคาโครงการทางการ (ส่งมอบตู้สำเร็จรูป + Web 100 จุด + Cloud 1 ปี)</a:t>
+              <a:t>6. ใบเสนอราคาทางการ (ราคามาตรฐานต่อ 1 ชุด + ส่วนลดโครงการ &gt;100 ชุด)</a:t>
             </a:r>
           </a:p>
         </p:txBody>
@@ -6357,7 +6357,7 @@
               </a:defRPr>
             </a:pPr>
             <a:r>
-              <a:t>[แบบที่ 1] Plug &amp; Play (ส่งมอบตู้สำเร็จรูป + Web 100 จุด + Cloud 1 ปี)</a:t>
+              <a:t>ชุดอุปกรณ์ตรวจวัดคุณภาพน้ำสำเร็จรูปพร้อมระบบออนไลน์ (1 ชุด)</a:t>
             </a:r>
           </a:p>
           <a:p>
@@ -6369,7 +6369,7 @@
               </a:defRPr>
             </a:pPr>
             <a:r>
-              <a:t>All-in-One IoT Solution (ราคา ฿36,000 บาท / ชุด | รวม 100 ชุด = ฿3,600,000 บาท)</a:t>
+              <a:t>All-in-One IoT Solution (ราคาเสนอขายมาตรฐาน ฿45,000 บาท / ชุด)</a:t>
             </a:r>
           </a:p>
         </p:txBody>
@@ -6407,7 +6407,7 @@
               </a:defRPr>
             </a:pPr>
             <a:r>
-              <a:t>📋 ขอบเขตงานและรายการส่งมอบครบวงจร (Scope of Deliverables):</a:t>
+              <a:t>📋 ขอบเขตงานและรายการส่งมอบครบวงจรใน 1 ชุด:</a:t>
             </a:r>
           </a:p>
           <a:p>
@@ -6467,7 +6467,7 @@
               </a:defRPr>
             </a:pPr>
             <a:r>
-              <a:t>✔ รวมระบบ Centralized Web Dashboard 100 จุด + Cloud Server License ฟรี 1 ปีแรก</a:t>
+              <a:t>✔ รวมระบบ Centralized Web Dashboard + Cloud Server License ฟรี 1 ปีแรก</a:t>
             </a:r>
           </a:p>
           <a:p>
@@ -6482,7 +6482,7 @@
               </a:defRPr>
             </a:pPr>
             <a:r>
-              <a:t>✔ Modela Mobile Companion App 5 หน้าเมนู (Home/History/100 Devices/Calib/Settings)</a:t>
+              <a:t>✔ Modela Mobile Companion App 5 หน้าเมนู (Home/History/Devices/Calib/Settings)</a:t>
             </a:r>
           </a:p>
           <a:p>
@@ -6542,7 +6542,7 @@
               </a:defRPr>
             </a:pPr>
             <a:r>
-              <a:t>💰 ราคาต่อชุด: ฿36,000 บาท  |  มูลค่าโครงการรวม (100 ชุด): ฿3,600,000 บาท</a:t>
+              <a:t>💰 ราคาเสนอขายมาตรฐาน: ฿45,000 บาท / ชุด (สี่หมื่นห้าพันบาทถ้วน)</a:t>
             </a:r>
           </a:p>
         </p:txBody>
@@ -6618,41 +6618,64 @@
               <a:spcAft>
                 <a:spcPts val="600"/>
               </a:spcAft>
-              <a:defRPr sz="1200" b="1">
+              <a:defRPr sz="1150" b="1">
                 <a:solidFill>
                   <a:srgbClr val="059669"/>
                 </a:solidFill>
               </a:defRPr>
             </a:pPr>
             <a:r>
-              <a:t>★ บริการเสริมพิเศษ (Add-on):</a:t>
+              <a:t>🌟 ส่วนลดพิเศษระดับโครงการ (&gt;100 ชุด):</a:t>
             </a:r>
           </a:p>
           <a:p>
             <a:pPr>
               <a:spcAft>
-                <a:spcPts val="1400"/>
+                <a:spcPts val="1200"/>
               </a:spcAft>
-              <a:defRPr sz="919">
+              <a:defRPr sz="919" b="1">
                 <a:solidFill>
                   <a:srgbClr val="0F172A"/>
                 </a:solidFill>
               </a:defRPr>
             </a:pPr>
             <a:r>
-              <a:t>หากต้องการให้ทีมวิศวกรเข้าติดตั้ง ยึดตู้ เดินท่อบายพาส และสอบเทียบหัววัดหน้างาน 100 จุด:</a:t>
+              <a:t>กรณีสั่งซื้อตั้งแต่ 100 ชุดขึ้นไป:</a:t>
             </a:r>
             <a:br/>
             <a:r>
-              <a:t>➡️ +฿8,000 / จุด (รวม +฿800,000)</a:t>
+              <a:t>➡️ เหลือเพียง ฿36,000 บาท / ชุด</a:t>
+            </a:r>
+            <a:br/>
+            <a:r>
+              <a:t>(รวม 100 ชุด = ฿3,600,000 บาท ประหยัดทันที ฿900,000)</a:t>
             </a:r>
           </a:p>
           <a:p>
             <a:pPr>
               <a:spcAft>
-                <a:spcPts val="400"/>
+                <a:spcPts val="1200"/>
               </a:spcAft>
-              <a:defRPr sz="1100" b="1">
+              <a:defRPr sz="850">
+                <a:solidFill>
+                  <a:srgbClr val="64748B"/>
+                </a:solidFill>
+              </a:defRPr>
+            </a:pPr>
+            <a:r>
+              <a:t>★ บริการเสริมติดตั้งหน้างาน (Add-on):</a:t>
+            </a:r>
+            <a:br/>
+            <a:r>
+              <a:t>+฿8,000 / จุด (ทีมวิศวกรเข้าติดตั้งและสอบเทียบ)</a:t>
+            </a:r>
+          </a:p>
+          <a:p>
+            <a:pPr>
+              <a:spcAft>
+                <a:spcPts val="300"/>
+              </a:spcAft>
+              <a:defRPr sz="1000" b="1">
                 <a:solidFill>
                   <a:srgbClr val="0284C7"/>
                 </a:solidFill>
@@ -6667,7 +6690,7 @@
               <a:spcAft>
                 <a:spcPts val="200"/>
               </a:spcAft>
-              <a:defRPr sz="850">
+              <a:defRPr sz="819">
                 <a:solidFill>
                   <a:srgbClr val="64748B"/>
                 </a:solidFill>
@@ -6682,29 +6705,14 @@
               <a:spcAft>
                 <a:spcPts val="200"/>
               </a:spcAft>
-              <a:defRPr sz="850">
+              <a:defRPr sz="819">
                 <a:solidFill>
                   <a:srgbClr val="64748B"/>
                 </a:solidFill>
               </a:defRPr>
             </a:pPr>
             <a:r>
-              <a:t>• ปีที่ 2 เป็นต้นไป: ค่าบริการ Cloud Server License &amp; Software MA เพียงปีละ 120,000 บาท (1,200 บ./จุด/ปี)</a:t>
-            </a:r>
-          </a:p>
-          <a:p>
-            <a:pPr>
-              <a:spcAft>
-                <a:spcPts val="200"/>
-              </a:spcAft>
-              <a:defRPr sz="850">
-                <a:solidFill>
-                  <a:srgbClr val="64748B"/>
-                </a:solidFill>
-              </a:defRPr>
-            </a:pPr>
-            <a:r>
-              <a:t>• รวมการอัปเดตระบบ สำรองฐานข้อมูล และดูแลความปลอดภัย 24 ชม.</a:t>
+              <a:t>• ปีที่ 2 เป็นต้นไป: ค่าบริการ Cloud Server License &amp; Software MA เพียงปีละ 1,200 บาท/ชุด/ปี (100 บ./เดือน)</a:t>
             </a:r>
           </a:p>
         </p:txBody>
@@ -6813,7 +6821,7 @@
               </a:defRPr>
             </a:pPr>
             <a:r>
-              <a:t>💧 สรุปภาพรวมข้อเสนอราคาทางการ (100 ชุด)</a:t>
+              <a:t>💧 สรุปภาพรวมข้อเสนอราคาทางการ</a:t>
             </a:r>
           </a:p>
           <a:p>
@@ -6843,7 +6851,7 @@
               </a:defRPr>
             </a:pPr>
             <a:r>
-              <a:t>[แบบที่ 1] Plug &amp; Play (ส่งมอบตู้สำเร็จรูป + Web 100 จุด + Cloud 1 ปี):</a:t>
+              <a:t>ชุดอุปกรณ์ตรวจวัดคุณภาพน้ำสำเร็จรูปพร้อมระบบออนไลน์ (1 ชุดมาตรฐาน):</a:t>
             </a:r>
           </a:p>
           <a:p>
@@ -6858,23 +6866,23 @@
               </a:defRPr>
             </a:pPr>
             <a:r>
-              <a:t>• ราคาเสนอขายต่อชุด: ฿36,000 บาท / ชุด</a:t>
+              <a:t>• ราคาเสนอขายมาตรฐาน (1 ชุด): ฿45,000 บาท / ชุด</a:t>
             </a:r>
             <a:br/>
             <a:r>
-              <a:t>• มูลค่าโครงการรวม (100 ชุด): ฿3,600,000 บาท (สามล้านหกแสนบาทถ้วน)</a:t>
+              <a:t>• ส่วนลดพิเศษระดับโครงการ (สั่งซื้อตั้งแต่ 100 ชุดขึ้นไป): ฿36,000 บาท / ชุด (มูลค่ารวม ฿3,600,000 บาท)</a:t>
             </a:r>
             <a:br/>
             <a:r>
-              <a:t>• รวมครบ: ตู้ IP65 + 4 เซนเซอร์ + ซิม 4G + Web Dashboard 100 จุด + Mobile App + Cloud 1 ปี</a:t>
+              <a:t>• รวมครบ: ตู้ IP65 + 4 เซนเซอร์ + ซิม 4G + Web Dashboard + Mobile App + Cloud 1 ปี</a:t>
             </a:r>
             <a:br/>
             <a:r>
-              <a:t>• บริการเสริมติดตั้ง &amp; สอบเทียบหน้างาน (Optional Add-on): +฿8,000 บาท/จุด (รวม +฿800,000 บาท)</a:t>
+              <a:t>• บริการเสริมติดตั้ง &amp; สอบเทียบหน้างาน (Optional Add-on): +฿8,000 บาท/จุด</a:t>
             </a:r>
             <a:br/>
             <a:r>
-              <a:t>• ปีที่ 2 เป็นต้นไป: ค่าบริการ Cloud Server &amp; Software MA ปีละ 120,000 บาท/ปี</a:t>
+              <a:t>• ปีที่ 2 เป็นต้นไป: ค่าบริการ Cloud Server &amp; Software MA เพียง 1,200 บาท/ชุด/ปี</a:t>
             </a:r>
           </a:p>
           <a:p>

--- a/NCT_Water_Nexus_Report_and_Pricing.pptx
+++ b/NCT_Water_Nexus_Report_and_Pricing.pptx
@@ -3211,7 +3211,7 @@
               </a:defRPr>
             </a:pPr>
             <a:r>
-              <a:t>รายงานนำเสนอโซลูชันระบบตรวจวัดคุณภาพน้ำ แดชบอร์ดควบคุม และใบเสนอราคามาตรฐาน (1 ชุด)</a:t>
+              <a:t>รายงานนำเสนอโซลูชันระบบตรวจวัดคุณภาพน้ำ แดชบอร์ดควบคุม และใบเสนอราคามาตรฐานต่อชุด</a:t>
             </a:r>
           </a:p>
           <a:p>
@@ -3219,7 +3219,7 @@
               <a:spcAft>
                 <a:spcPts val="2800"/>
               </a:spcAft>
-              <a:defRPr sz="1200">
+              <a:defRPr sz="1150">
                 <a:solidFill>
                   <a:srgbClr val="94A3B8"/>
                 </a:solidFill>
@@ -3230,11 +3230,15 @@
             </a:r>
             <a:br/>
             <a:r>
-              <a:t>• ระบบแดชบอร์ดคู่ขนาน: Centralized Web Dashboard (จอใหญ่ห้องควบคุม) + Modela Mobile App (5 หน้าเมนู)</a:t>
+              <a:t>• ระบบแดชบอร์ดคู่ขนาน: Centralized Web Dashboard + Modela Mobile App (5 หน้าเมนู)</a:t>
             </a:r>
             <a:br/>
             <a:r>
-              <a:t>• ราคาเสนอขายมาตรฐาน: ฿45,000 / ชุด (พร้อมเงื่อนไขส่วนลดพิเศษเมื่อสั่งซื้อ 100 ชุดขึ้นไป เหลือ ฿36,000 / ชุด)</a:t>
+              <a:t>• ราคาเสนอขายต่อชุด: ฿36,000 / ชุด (ผูกสิทธิ์ Web Dashboard รองรับสูงสุด 100 จุด • สั่งปลีก ฿45,000 / ชุด)</a:t>
+            </a:r>
+            <a:br/>
+            <a:r>
+              <a:t>• กรณีขยายระบบเกิน 100 จุด: มีค่าบริหารจัดการระบบและขยาย Server โหนดเพิ่มเติมตามขนาดโครงการ</a:t>
             </a:r>
           </a:p>
           <a:p>
@@ -4166,7 +4170,7 @@
               </a:defRPr>
             </a:pPr>
             <a:r>
-              <a:t>2. ภาพแคปหน้าจอระบบ Centralized Web Dashboard จริง (index.html)</a:t>
+              <a:t>2. ภาพแคปหน้าจอระบบ Centralized Web Dashboard จริง (ผูกสิทธิ์ 100 จุด)</a:t>
             </a:r>
           </a:p>
         </p:txBody>
@@ -4266,14 +4270,14 @@
               <a:spcAft>
                 <a:spcPts val="800"/>
               </a:spcAft>
-              <a:defRPr sz="1300" b="1">
+              <a:defRPr sz="1250" b="1">
                 <a:solidFill>
                   <a:srgbClr val="0284C7"/>
                 </a:solidFill>
               </a:defRPr>
             </a:pPr>
             <a:r>
-              <a:t>💻 คำอธิบายฟังก์ชันหน้าจอ Web Dashboard:</a:t>
+              <a:t>💻 ฟังก์ชันหน้าจอ Web Dashboard (ความจุ 100 จุด):</a:t>
             </a:r>
           </a:p>
           <a:p>
@@ -4281,7 +4285,7 @@
               <a:spcAft>
                 <a:spcPts val="300"/>
               </a:spcAft>
-              <a:defRPr sz="950">
+              <a:defRPr sz="919">
                 <a:solidFill>
                   <a:srgbClr val="0F172A"/>
                 </a:solidFill>
@@ -4296,7 +4300,7 @@
               <a:spcAft>
                 <a:spcPts val="300"/>
               </a:spcAft>
-              <a:defRPr sz="950">
+              <a:defRPr sz="919">
                 <a:solidFill>
                   <a:srgbClr val="0F172A"/>
                 </a:solidFill>
@@ -4311,7 +4315,7 @@
               <a:spcAft>
                 <a:spcPts val="300"/>
               </a:spcAft>
-              <a:defRPr sz="950">
+              <a:defRPr sz="919">
                 <a:solidFill>
                   <a:srgbClr val="0F172A"/>
                 </a:solidFill>
@@ -4326,14 +4330,14 @@
               <a:spcAft>
                 <a:spcPts val="300"/>
               </a:spcAft>
-              <a:defRPr sz="950">
+              <a:defRPr sz="919">
                 <a:solidFill>
                   <a:srgbClr val="0F172A"/>
                 </a:solidFill>
               </a:defRPr>
             </a:pPr>
             <a:r>
-              <a:t>❹ ไดอะแกรมเชื่อมต่อ: ตรวจจับสายสัญญาณ WiFi ➔ Display ➔ Sensor Probes</a:t>
+              <a:t>❹ ผูกสิทธิ์รองรับสูงสุด 100 จุด: ระบบจัดการโหนดกลางรองรับได้ถึง 100 สถานีในแพ็กเกจเดียว</a:t>
             </a:r>
           </a:p>
           <a:p>
@@ -4341,7 +4345,7 @@
               <a:spcAft>
                 <a:spcPts val="300"/>
               </a:spcAft>
-              <a:defRPr sz="950">
+              <a:defRPr sz="919">
                 <a:solidFill>
                   <a:srgbClr val="0F172A"/>
                 </a:solidFill>
@@ -4356,7 +4360,7 @@
               <a:spcAft>
                 <a:spcPts val="300"/>
               </a:spcAft>
-              <a:defRPr sz="950">
+              <a:defRPr sz="919">
                 <a:solidFill>
                   <a:srgbClr val="0F172A"/>
                 </a:solidFill>
@@ -6234,7 +6238,7 @@
               </a:defRPr>
             </a:pPr>
             <a:r>
-              <a:t>6. ใบเสนอราคาทางการ (ราคามาตรฐานต่อ 1 ชุด + ส่วนลดโครงการ &gt;100 ชุด)</a:t>
+              <a:t>6. ใบเสนอราคาทางการ (ราคาต่อชุด + สิทธิ์ Web 100 จุด + เงื่อนไขเกิน 100 จุด)</a:t>
             </a:r>
           </a:p>
         </p:txBody>
@@ -6357,7 +6361,7 @@
               </a:defRPr>
             </a:pPr>
             <a:r>
-              <a:t>ชุดอุปกรณ์ตรวจวัดคุณภาพน้ำสำเร็จรูปพร้อมระบบออนไลน์ (1 ชุด)</a:t>
+              <a:t>ชุดอุปกรณ์ตรวจวัดคุณภาพน้ำสำเร็จรูปพร้อมระบบออนไลน์ (ราคาต่อชุด)</a:t>
             </a:r>
           </a:p>
           <a:p>
@@ -6369,7 +6373,7 @@
               </a:defRPr>
             </a:pPr>
             <a:r>
-              <a:t>All-in-One IoT Solution (ราคาเสนอขายมาตรฐาน ฿45,000 บาท / ชุด)</a:t>
+              <a:t>NCT Water Nexus Pro - Plug &amp; Play (ผูกสิทธิ์ Web Dashboard รองรับสูงสุด 100 จุด)</a:t>
             </a:r>
           </a:p>
         </p:txBody>
@@ -6467,7 +6471,7 @@
               </a:defRPr>
             </a:pPr>
             <a:r>
-              <a:t>✔ รวมระบบ Centralized Web Dashboard + Cloud Server License ฟรี 1 ปีแรก</a:t>
+              <a:t>✔ รวมระบบ Centralized Web Dashboard + Cloud Server รองรับสูงสุด 100 จุด ฟรี 1 ปีแรก</a:t>
             </a:r>
           </a:p>
           <a:p>
@@ -6535,14 +6539,14 @@
               <a:spcBef>
                 <a:spcPts val="600"/>
               </a:spcBef>
-              <a:defRPr b="1" sz="1200">
+              <a:defRPr b="1" sz="1150">
                 <a:solidFill>
                   <a:srgbClr val="0284C7"/>
                 </a:solidFill>
               </a:defRPr>
             </a:pPr>
             <a:r>
-              <a:t>💰 ราคาเสนอขายมาตรฐาน: ฿45,000 บาท / ชุด (สี่หมื่นห้าพันบาทถ้วน)</a:t>
+              <a:t>💰 ราคาเสนอขายต่อชุด: ฿36,000 บาท / ชุด  (สั่งซื้อชุดเดี่ยวปลีก: ฿45,000 บาท/ชุด)</a:t>
             </a:r>
           </a:p>
         </p:txBody>
@@ -6566,7 +6570,7 @@
           </a:solidFill>
           <a:ln w="19050">
             <a:solidFill>
-              <a:srgbClr val="059669"/>
+              <a:srgbClr val="D97706"/>
             </a:solidFill>
           </a:ln>
         </p:spPr>
@@ -6616,45 +6620,41 @@
           <a:p>
             <a:pPr>
               <a:spcAft>
-                <a:spcPts val="600"/>
+                <a:spcPts val="400"/>
               </a:spcAft>
-              <a:defRPr sz="1150" b="1">
-                <a:solidFill>
-                  <a:srgbClr val="059669"/>
-                </a:solidFill>
-              </a:defRPr>
-            </a:pPr>
-            <a:r>
-              <a:t>🌟 ส่วนลดพิเศษระดับโครงการ (&gt;100 ชุด):</a:t>
+              <a:defRPr sz="1100" b="1">
+                <a:solidFill>
+                  <a:srgbClr val="D97706"/>
+                </a:solidFill>
+              </a:defRPr>
+            </a:pPr>
+            <a:r>
+              <a:t>⚠️ เงื่อนไขกรณีขยายเกิน 100 จุด:</a:t>
             </a:r>
           </a:p>
           <a:p>
             <a:pPr>
               <a:spcAft>
-                <a:spcPts val="1200"/>
+                <a:spcPts val="1000"/>
               </a:spcAft>
-              <a:defRPr sz="919" b="1">
+              <a:defRPr sz="850">
                 <a:solidFill>
                   <a:srgbClr val="0F172A"/>
                 </a:solidFill>
               </a:defRPr>
             </a:pPr>
             <a:r>
-              <a:t>กรณีสั่งซื้อตั้งแต่ 100 ชุดขึ้นไป:</a:t>
+              <a:t>• ระบบ Web &amp; Cloud ในราคานี้ผูกสิทธิ์รองรับสูงสุด 100 จุด</a:t>
             </a:r>
             <a:br/>
             <a:r>
-              <a:t>➡️ เหลือเพียง ฿36,000 บาท / ชุด</a:t>
-            </a:r>
-            <a:br/>
-            <a:r>
-              <a:t>(รวม 100 ชุด = ฿3,600,000 บาท ประหยัดทันที ฿900,000)</a:t>
+              <a:t>• กรณีสั่งซื้อหรือขยายระบบ เกินกว่า 100 จุดขึ้นไป จะมีค่าบริหารจัดการระบบและขยาย Server โหนดเพิ่มเติมตามขนาดโครงการ</a:t>
             </a:r>
           </a:p>
           <a:p>
             <a:pPr>
               <a:spcAft>
-                <a:spcPts val="1200"/>
+                <a:spcPts val="1000"/>
               </a:spcAft>
               <a:defRPr sz="850">
                 <a:solidFill>
@@ -6697,7 +6697,7 @@
               </a:defRPr>
             </a:pPr>
             <a:r>
-              <a:t>• ปีที่ 1: ฟรี Cloud &amp; Dashboard ตลอด 12 เดือน</a:t>
+              <a:t>• ปีที่ 1: ฟรี Cloud &amp; Dashboard ตลอด 12 เดือน (สูงสุด 100 จุด)</a:t>
             </a:r>
           </a:p>
           <a:p>
@@ -6712,7 +6712,7 @@
               </a:defRPr>
             </a:pPr>
             <a:r>
-              <a:t>• ปีที่ 2 เป็นต้นไป: ค่าบริการ Cloud Server License &amp; Software MA เพียงปีละ 1,200 บาท/ชุด/ปี (100 บ./เดือน)</a:t>
+              <a:t>• ปีที่ 2 เป็นต้นไป: ค่าบริการ Cloud Server License &amp; Software MA ปีละ 120,000 บาท/ปี (1.2k/จุด/ปี)</a:t>
             </a:r>
           </a:p>
         </p:txBody>
@@ -6851,7 +6851,7 @@
               </a:defRPr>
             </a:pPr>
             <a:r>
-              <a:t>ชุดอุปกรณ์ตรวจวัดคุณภาพน้ำสำเร็จรูปพร้อมระบบออนไลน์ (1 ชุดมาตรฐาน):</a:t>
+              <a:t>ชุดอุปกรณ์ตรวจวัดคุณภาพน้ำสำเร็จรูปพร้อมระบบออนไลน์ (ราคาต่อชุด):</a:t>
             </a:r>
           </a:p>
           <a:p>
@@ -6866,15 +6866,15 @@
               </a:defRPr>
             </a:pPr>
             <a:r>
-              <a:t>• ราคาเสนอขายมาตรฐาน (1 ชุด): ฿45,000 บาท / ชุด</a:t>
+              <a:t>• ราคาเสนอขายต่อชุด: ฿36,000 บาท / ชุด (ผูกสิทธิ์ Web Dashboard รองรับสูงสุด 100 จุด)</a:t>
             </a:r>
             <a:br/>
             <a:r>
-              <a:t>• ส่วนลดพิเศษระดับโครงการ (สั่งซื้อตั้งแต่ 100 ชุดขึ้นไป): ฿36,000 บาท / ชุด (มูลค่ารวม ฿3,600,000 บาท)</a:t>
+              <a:t>• สั่งซื้อชุดเดี่ยวปลีก (Standalone): ฿45,000 บาท / ชุด</a:t>
             </a:r>
             <a:br/>
             <a:r>
-              <a:t>• รวมครบ: ตู้ IP65 + 4 เซนเซอร์ + ซิม 4G + Web Dashboard + Mobile App + Cloud 1 ปี</a:t>
+              <a:t>• กรณีขยายระบบเกิน 100 จุดขึ้นไป: คิดค่าบริหารจัดการระบบและขยาย Server โหนดเพิ่มเติมตามขนาดโครงการ</a:t>
             </a:r>
             <a:br/>
             <a:r>
@@ -6882,7 +6882,7 @@
             </a:r>
             <a:br/>
             <a:r>
-              <a:t>• ปีที่ 2 เป็นต้นไป: ค่าบริการ Cloud Server &amp; Software MA เพียง 1,200 บาท/ชุด/ปี</a:t>
+              <a:t>• ปีที่ 2 เป็นต้นไป: ค่าบริการ Cloud Server &amp; Software MA เพียง 120,000 บาท/ปี (1,200 บ./จุด/ปี)</a:t>
             </a:r>
           </a:p>
           <a:p>

--- a/NCT_Water_Nexus_Report_and_Pricing.pptx
+++ b/NCT_Water_Nexus_Report_and_Pricing.pptx
@@ -3230,15 +3230,19 @@
             </a:r>
             <a:br/>
             <a:r>
-              <a:t>• ระบบแดชบอร์ดคู่ขนาน: Centralized Web Dashboard + Modela Mobile App (5 หน้าเมนู)</a:t>
+              <a:t>• 4.1 รุ่น 4G LTE Plug &amp; Play: ฿36,000 / ชุด (มีเราเตอร์ + ซิม Unlimited ฟรีปีแรก • สั่งปลีก ฿45,000 / ชุด)</a:t>
             </a:r>
             <a:br/>
             <a:r>
-              <a:t>• ราคาเสนอขายต่อชุด: ฿36,000 / ชุด (ผูกสิทธิ์ Web Dashboard รองรับสูงสุด 100 จุด • สั่งปลีก ฿45,000 / ชุด)</a:t>
+              <a:t>• 4.2 รุ่น Wi-Fi Direct: ฿32,000 / ชุด (ตัดเราเตอร์และซิมออก ต่อ Wi-Fi หน้างานตรง • สั่งปลีก ฿40,000 / ชุด)</a:t>
             </a:r>
             <a:br/>
             <a:r>
-              <a:t>• กรณีขยายระบบเกิน 100 จุด: มีค่าบริหารจัดการระบบและขยาย Server โหนดเพิ่มเติมตามขนาดโครงการ</a:t>
+              <a:t>• ปีที่ 2 เป็นต้นไป: ค่าบริการ Cloud Server &amp; Software MA เดือนละ 300 บาท/จุด (เน็ตฟรีเฉพาะปีแรก)</a:t>
+            </a:r>
+            <a:br/>
+            <a:r>
+              <a:t>• ทั้งสองรุ่นผูกสิทธิ์ Web Dashboard และ Cloud ฟรีปีแรก รองรับสูงสุด 100 จุด (เกิน 100 จุดมีค่าบริหารจัดการเพิ่ม)</a:t>
             </a:r>
           </a:p>
           <a:p>
@@ -3250,7 +3254,7 @@
               </a:defRPr>
             </a:pPr>
             <a:r>
-              <a:t>NCT Water Solutions  •  System Version 2.5 Pro  •  August 2026</a:t>
+              <a:t>NCT Water Solutions  •  System Version 2.6 Pro  •  September 2026</a:t>
             </a:r>
           </a:p>
         </p:txBody>
@@ -5711,7 +5715,7 @@
             </a:r>
             <a:br/>
             <a:r>
-              <a:t>• เชื่อมต่อระบบ Telemetry สดทุก 1 วินาที</a:t>
+              <a:t>• (สำหรับรุ่น 4.1 เท่านั้น)</a:t>
             </a:r>
           </a:p>
         </p:txBody>
@@ -5834,7 +5838,7 @@
               </a:defRPr>
             </a:pPr>
             <a:r>
-              <a:t>ซิมการ์ด 4G รายปี (Unlimited)</a:t>
+              <a:t>ซิมการ์ด 4G IoT (Unlimited)</a:t>
             </a:r>
           </a:p>
           <a:p>
@@ -5846,7 +5850,7 @@
               </a:defRPr>
             </a:pPr>
             <a:r>
-              <a:t>15-20 Mbps</a:t>
+              <a:t>ฟรีเฉพาะปีแรก</a:t>
             </a:r>
           </a:p>
         </p:txBody>
@@ -5885,11 +5889,11 @@
             </a:r>
             <a:br/>
             <a:r>
-              <a:t>• รวมค่าบริการเครือข่าย 12 เดือนเต็ม</a:t>
+              <a:t>• รวมค่าบริการเครือข่าย 12 เดือนแรก</a:t>
             </a:r>
             <a:br/>
             <a:r>
-              <a:t>• ส่งข้อมูลขึ้นระบบคลาวด์ตลอด 24 ชม.</a:t>
+              <a:t>• ปีที่ 2 ลูกค้ารับผิดชอบค่าเน็ตเอง</a:t>
             </a:r>
           </a:p>
         </p:txBody>
@@ -6150,7 +6154,7 @@
               </a:defRPr>
             </a:pPr>
             <a:r>
-              <a:t>➡️ มาตรฐานชุดอุปกรณ์: สำเร็จรูปพร้อมติดตั้ง สื่อสาร 4G LTE และ Cloud Dashboard ครบวงจร</a:t>
+              <a:t>➡️ ทางเลือกการสื่อสาร: รุ่น 4G LTE (มีเราเตอร์+ซิม) vs รุ่น Wi-Fi (ตัดเราเตอร์และซิมออก ประหยัด ฿4,000/ชุด)</a:t>
             </a:r>
           </a:p>
           <a:p>
@@ -6162,7 +6166,7 @@
               </a:defRPr>
             </a:pPr>
             <a:r>
-              <a:t>ชุดอุปกรณ์ประกอบสำเร็จรูป ตรวจสอบระบบไฟฟ้า และทดสอบสัญญาณเชื่อมต่อออนไลน์ 100% ก่อนส่งมอบหน้างาน</a:t>
+              <a:t>อุปกรณ์ประกอบสำเร็จรูป ตรวจสอบระบบไฟฟ้า และทดสอบออนไลน์ 100% ก่อนส่งมอบหน้างาน | รุ่น Wi-Fi ต่อเน็ตโรงงานโดยตรง</a:t>
             </a:r>
           </a:p>
         </p:txBody>
@@ -6238,7 +6242,7 @@
               </a:defRPr>
             </a:pPr>
             <a:r>
-              <a:t>6. ใบเสนอราคาทางการ (ราคาต่อชุด + สิทธิ์ Web 100 จุด + เงื่อนไขเกิน 100 จุด)</a:t>
+              <a:t>6. ใบเสนอราคาทางการ (เปรียบเทียบรุ่น 4G LTE vs รุ่น Wi-Fi)</a:t>
             </a:r>
           </a:p>
         </p:txBody>
@@ -6252,7 +6256,7 @@
         <p:spPr>
           <a:xfrm>
             <a:off x="731520" y="1463040"/>
-            <a:ext cx="6949440" cy="4754880"/>
+            <a:ext cx="5120640" cy="4754880"/>
           </a:xfrm>
           <a:prstGeom prst="roundRect">
             <a:avLst/>
@@ -6297,7 +6301,7 @@
         <p:spPr>
           <a:xfrm>
             <a:off x="731520" y="1463040"/>
-            <a:ext cx="6949440" cy="1188720"/>
+            <a:ext cx="5120640" cy="1005840"/>
           </a:xfrm>
           <a:prstGeom prst="roundRect">
             <a:avLst/>
@@ -6339,8 +6343,8 @@
         </p:nvSpPr>
         <p:spPr>
           <a:xfrm>
-            <a:off x="1005840" y="1554480"/>
-            <a:ext cx="6400800" cy="1005840"/>
+            <a:off x="914400" y="1554480"/>
+            <a:ext cx="4754880" cy="822960"/>
           </a:xfrm>
           <a:prstGeom prst="rect">
             <a:avLst/>
@@ -6361,19 +6365,19 @@
               </a:defRPr>
             </a:pPr>
             <a:r>
-              <a:t>ชุดอุปกรณ์ตรวจวัดคุณภาพน้ำสำเร็จรูปพร้อมระบบออนไลน์ (ราคาต่อชุด)</a:t>
-            </a:r>
-          </a:p>
-          <a:p>
-            <a:pPr>
-              <a:defRPr sz="1050" b="1">
+              <a:t>4.1 รุ่น 4G LTE Plug &amp; Play</a:t>
+            </a:r>
+          </a:p>
+          <a:p>
+            <a:pPr>
+              <a:defRPr sz="1100" b="1">
                 <a:solidFill>
                   <a:srgbClr val="FFFFFF"/>
                 </a:solidFill>
               </a:defRPr>
             </a:pPr>
             <a:r>
-              <a:t>NCT Water Nexus Pro - Plug &amp; Play (ผูกสิทธิ์ Web Dashboard รองรับสูงสุด 100 จุด)</a:t>
+              <a:t>฿36,000 บาท / ชุด  (สั่งซื้อเดี่ยว: ฿45,000 บาท/ชุด)</a:t>
             </a:r>
           </a:p>
         </p:txBody>
@@ -6386,8 +6390,8 @@
         </p:nvSpPr>
         <p:spPr>
           <a:xfrm>
-            <a:off x="1005840" y="2743200"/>
-            <a:ext cx="6400800" cy="3383280"/>
+            <a:off x="914400" y="2560320"/>
+            <a:ext cx="4754880" cy="3474720"/>
           </a:xfrm>
           <a:prstGeom prst="rect">
             <a:avLst/>
@@ -6399,154 +6403,110 @@
             <a:spAutoFit/>
           </a:bodyPr>
           <a:lstStyle/>
+          <a:p/>
           <a:p>
             <a:pPr>
               <a:spcAft>
-                <a:spcPts val="400"/>
+                <a:spcPts val="200"/>
               </a:spcAft>
-              <a:defRPr b="1" sz="1050">
+              <a:defRPr sz="850">
                 <a:solidFill>
                   <a:srgbClr val="0F172A"/>
                 </a:solidFill>
               </a:defRPr>
             </a:pPr>
             <a:r>
-              <a:t>📋 ขอบเขตงานและรายการส่งมอบครบวงจรใน 1 ชุด:</a:t>
+              <a:t>✔ ตู้ IP65 + Switching 24V + Modela One + 4 เซนเซอร์</a:t>
             </a:r>
           </a:p>
           <a:p>
             <a:pPr>
               <a:spcAft>
-                <a:spcPts val="100"/>
+                <a:spcPts val="200"/>
               </a:spcAft>
-              <a:defRPr sz="880">
-                <a:solidFill>
-                  <a:srgbClr val="64748B"/>
-                </a:solidFill>
-              </a:defRPr>
-            </a:pPr>
-            <a:r>
-              <a:t>✔ ประกอบตู้คอนโทรลสำเร็จรูป IP65 พร้อม Switching 24V &amp; Surge Protection</a:t>
+              <a:defRPr sz="850">
+                <a:solidFill>
+                  <a:srgbClr val="0F172A"/>
+                </a:solidFill>
+              </a:defRPr>
+            </a:pPr>
+            <a:r>
+              <a:t>✔ เราเตอร์ 4G LTE อุตสาหกรรม (TP-Link TL-MR100)</a:t>
             </a:r>
           </a:p>
           <a:p>
             <a:pPr>
               <a:spcAft>
-                <a:spcPts val="100"/>
+                <a:spcPts val="200"/>
               </a:spcAft>
-              <a:defRPr sz="880">
-                <a:solidFill>
-                  <a:srgbClr val="64748B"/>
-                </a:solidFill>
-              </a:defRPr>
-            </a:pPr>
-            <a:r>
-              <a:t>✔ ชุดเซนเซอร์ 4 ค่า (Modela One + pH แก้ว + TDS Titanium + PT1000 + คลอรีน Cybertice)</a:t>
+              <a:defRPr sz="850">
+                <a:solidFill>
+                  <a:srgbClr val="0F172A"/>
+                </a:solidFill>
+              </a:defRPr>
+            </a:pPr>
+            <a:r>
+              <a:t>✔ ซิมเน็ต IoT 4G Unlimited Data (ฟรีเฉพาะปีแรก)</a:t>
             </a:r>
           </a:p>
           <a:p>
             <a:pPr>
               <a:spcAft>
-                <a:spcPts val="100"/>
+                <a:spcPts val="200"/>
               </a:spcAft>
-              <a:defRPr sz="880">
-                <a:solidFill>
-                  <a:srgbClr val="64748B"/>
-                </a:solidFill>
-              </a:defRPr>
-            </a:pPr>
-            <a:r>
-              <a:t>✔ เราเตอร์ 4G LTE (TP-Link TL-MR100) พร้อมซิมการ์ด IoT Unlimited Data 12 เดือนเต็ม</a:t>
+              <a:defRPr sz="850">
+                <a:solidFill>
+                  <a:srgbClr val="0F172A"/>
+                </a:solidFill>
+              </a:defRPr>
+            </a:pPr>
+            <a:r>
+              <a:t>✔ รวมระบบ Web Dashboard &amp; App รองรับ 100 จุด (ฟรี 1 ปี)</a:t>
             </a:r>
           </a:p>
           <a:p>
             <a:pPr>
               <a:spcAft>
-                <a:spcPts val="100"/>
+                <a:spcPts val="200"/>
               </a:spcAft>
-              <a:defRPr sz="880">
-                <a:solidFill>
-                  <a:srgbClr val="64748B"/>
-                </a:solidFill>
-              </a:defRPr>
-            </a:pPr>
-            <a:r>
-              <a:t>✔ รวมระบบ Centralized Web Dashboard + Cloud Server รองรับสูงสุด 100 จุด ฟรี 1 ปีแรก</a:t>
+              <a:defRPr sz="850">
+                <a:solidFill>
+                  <a:srgbClr val="0F172A"/>
+                </a:solidFill>
+              </a:defRPr>
+            </a:pPr>
+            <a:r>
+              <a:t>✔ แจ้งเตือนอัตโนมัติ 24 ชม. ผ่าน Telegram (ฟรี) &amp; LINE OA</a:t>
             </a:r>
           </a:p>
           <a:p>
             <a:pPr>
               <a:spcAft>
-                <a:spcPts val="100"/>
+                <a:spcPts val="200"/>
               </a:spcAft>
-              <a:defRPr sz="880">
-                <a:solidFill>
-                  <a:srgbClr val="64748B"/>
-                </a:solidFill>
-              </a:defRPr>
-            </a:pPr>
-            <a:r>
-              <a:t>✔ Modela Mobile Companion App 5 หน้าเมนู (Home/History/Devices/Calib/Settings)</a:t>
+              <a:defRPr sz="850">
+                <a:solidFill>
+                  <a:srgbClr val="0F172A"/>
+                </a:solidFill>
+              </a:defRPr>
+            </a:pPr>
+            <a:r>
+              <a:t>✔ จัดส่งสำเร็จรูปพร้อมคู่มือ (ลูกค้าติดตั้งเอง) ประกัน 1 ปี</a:t>
             </a:r>
           </a:p>
           <a:p>
             <a:pPr>
               <a:spcAft>
-                <a:spcPts val="100"/>
+                <a:spcPts val="200"/>
               </a:spcAft>
-              <a:defRPr sz="880">
-                <a:solidFill>
-                  <a:srgbClr val="64748B"/>
-                </a:solidFill>
-              </a:defRPr>
-            </a:pPr>
-            <a:r>
-              <a:t>✔ ระบบแจ้งเตือน Real-time อัตโนมัติ 24 ชม. ผ่าน Telegram (ฟรีตลอดชีพ) และ LINE OA</a:t>
-            </a:r>
-          </a:p>
-          <a:p>
-            <a:pPr>
-              <a:spcAft>
-                <a:spcPts val="100"/>
-              </a:spcAft>
-              <a:defRPr sz="880">
-                <a:solidFill>
-                  <a:srgbClr val="64748B"/>
-                </a:solidFill>
-              </a:defRPr>
-            </a:pPr>
-            <a:r>
-              <a:t>✔ จัดส่งอุปกรณ์สำเร็จรูปถึงหน้างาน พร้อมคู่มือและแบบแปลนการต่อท่อบายพาส (ลูกค้าติดตั้งเอง)</a:t>
-            </a:r>
-          </a:p>
-          <a:p>
-            <a:pPr>
-              <a:spcAft>
-                <a:spcPts val="100"/>
-              </a:spcAft>
-              <a:defRPr sz="880">
-                <a:solidFill>
-                  <a:srgbClr val="64748B"/>
-                </a:solidFill>
-              </a:defRPr>
-            </a:pPr>
-            <a:r>
-              <a:t>✔ รับประกันอุปกรณ์ฮาร์ดแวร์และเซนเซอร์ตลอด 1 ปีเต็ม</a:t>
-            </a:r>
-          </a:p>
-          <a:p>
-            <a:pPr>
-              <a:spcBef>
-                <a:spcPts val="600"/>
-              </a:spcBef>
-              <a:defRPr b="1" sz="1150">
+              <a:defRPr sz="850" b="1">
                 <a:solidFill>
                   <a:srgbClr val="0284C7"/>
                 </a:solidFill>
               </a:defRPr>
             </a:pPr>
             <a:r>
-              <a:t>💰 ราคาเสนอขายต่อชุด: ฿36,000 บาท / ชุด  (สั่งซื้อชุดเดี่ยวปลีก: ฿45,000 บาท/ชุด)</a:t>
+              <a:t>✔ ★ ปีที่ 2: ค่าบริการ Cloud MA เดือนละ 300 บ./จุด (3,600 บ./จุด/ปี หรือ 360k/ปี สำหรับ 100 จุด) • เน็ตฟรีแค่ปีแรก ปีถัดไปลูกค้าดูแลค่าซิมเอง</a:t>
             </a:r>
           </a:p>
         </p:txBody>
@@ -6559,8 +6519,8 @@
         </p:nvSpPr>
         <p:spPr>
           <a:xfrm>
-            <a:off x="7955279" y="1463040"/>
-            <a:ext cx="3504895" cy="4754880"/>
+            <a:off x="6309360" y="1463040"/>
+            <a:ext cx="5120640" cy="4754880"/>
           </a:xfrm>
           <a:prstGeom prst="roundRect">
             <a:avLst/>
@@ -6570,7 +6530,7 @@
           </a:solidFill>
           <a:ln w="19050">
             <a:solidFill>
-              <a:srgbClr val="D97706"/>
+              <a:srgbClr val="059669"/>
             </a:solidFill>
           </a:ln>
         </p:spPr>
@@ -6598,14 +6558,57 @@
       </p:sp>
       <p:sp>
         <p:nvSpPr>
-          <p:cNvPr id="8" name="TextBox 7"/>
+          <p:cNvPr id="8" name="Rounded Rectangle 7"/>
+          <p:cNvSpPr/>
+          <p:nvPr/>
+        </p:nvSpPr>
+        <p:spPr>
+          <a:xfrm>
+            <a:off x="6309360" y="1463040"/>
+            <a:ext cx="5120640" cy="1005840"/>
+          </a:xfrm>
+          <a:prstGeom prst="roundRect">
+            <a:avLst/>
+          </a:prstGeom>
+          <a:solidFill>
+            <a:srgbClr val="059669"/>
+          </a:solidFill>
+          <a:ln>
+            <a:noFill/>
+          </a:ln>
+        </p:spPr>
+        <p:style>
+          <a:lnRef idx="1">
+            <a:schemeClr val="accent1"/>
+          </a:lnRef>
+          <a:fillRef idx="3">
+            <a:schemeClr val="accent1"/>
+          </a:fillRef>
+          <a:effectRef idx="2">
+            <a:schemeClr val="accent1"/>
+          </a:effectRef>
+          <a:fontRef idx="minor">
+            <a:schemeClr val="lt1"/>
+          </a:fontRef>
+        </p:style>
+        <p:txBody>
+          <a:bodyPr rtlCol="0" anchor="ctr"/>
+          <a:lstStyle/>
+          <a:p>
+            <a:pPr algn="ctr"/>
+          </a:p>
+        </p:txBody>
+      </p:sp>
+      <p:sp>
+        <p:nvSpPr>
+          <p:cNvPr id="9" name="TextBox 8"/>
           <p:cNvSpPr txBox="1"/>
           <p:nvPr/>
         </p:nvSpPr>
         <p:spPr>
           <a:xfrm>
-            <a:off x="8138160" y="1645920"/>
-            <a:ext cx="3139135" cy="4389120"/>
+            <a:off x="6492240" y="1554480"/>
+            <a:ext cx="4754880" cy="822960"/>
           </a:xfrm>
           <a:prstGeom prst="rect">
             <a:avLst/>
@@ -6619,85 +6622,65 @@
           <a:lstStyle/>
           <a:p>
             <a:pPr>
-              <a:spcAft>
-                <a:spcPts val="400"/>
-              </a:spcAft>
+              <a:defRPr sz="1300" b="1">
+                <a:solidFill>
+                  <a:srgbClr val="FFFFFF"/>
+                </a:solidFill>
+              </a:defRPr>
+            </a:pPr>
+            <a:r>
+              <a:t>4.2 รุ่น Wi-Fi (ตัดเราเตอร์และซิมออก)</a:t>
+            </a:r>
+          </a:p>
+          <a:p>
+            <a:pPr>
               <a:defRPr sz="1100" b="1">
                 <a:solidFill>
-                  <a:srgbClr val="D97706"/>
-                </a:solidFill>
-              </a:defRPr>
-            </a:pPr>
-            <a:r>
-              <a:t>⚠️ เงื่อนไขกรณีขยายเกิน 100 จุด:</a:t>
-            </a:r>
-          </a:p>
-          <a:p>
-            <a:pPr>
-              <a:spcAft>
-                <a:spcPts val="1000"/>
-              </a:spcAft>
-              <a:defRPr sz="850">
-                <a:solidFill>
-                  <a:srgbClr val="0F172A"/>
-                </a:solidFill>
-              </a:defRPr>
-            </a:pPr>
-            <a:r>
-              <a:t>• ระบบ Web &amp; Cloud ในราคานี้ผูกสิทธิ์รองรับสูงสุด 100 จุด</a:t>
-            </a:r>
-            <a:br/>
-            <a:r>
-              <a:t>• กรณีสั่งซื้อหรือขยายระบบ เกินกว่า 100 จุดขึ้นไป จะมีค่าบริหารจัดการระบบและขยาย Server โหนดเพิ่มเติมตามขนาดโครงการ</a:t>
-            </a:r>
-          </a:p>
-          <a:p>
-            <a:pPr>
-              <a:spcAft>
-                <a:spcPts val="1000"/>
-              </a:spcAft>
-              <a:defRPr sz="850">
-                <a:solidFill>
-                  <a:srgbClr val="64748B"/>
-                </a:solidFill>
-              </a:defRPr>
-            </a:pPr>
-            <a:r>
-              <a:t>★ บริการเสริมติดตั้งหน้างาน (Add-on):</a:t>
-            </a:r>
-            <a:br/>
-            <a:r>
-              <a:t>+฿8,000 / จุด (ทีมวิศวกรเข้าติดตั้งและสอบเทียบ)</a:t>
-            </a:r>
-          </a:p>
-          <a:p>
-            <a:pPr>
-              <a:spcAft>
-                <a:spcPts val="300"/>
-              </a:spcAft>
-              <a:defRPr sz="1000" b="1">
-                <a:solidFill>
-                  <a:srgbClr val="0284C7"/>
-                </a:solidFill>
-              </a:defRPr>
-            </a:pPr>
-            <a:r>
-              <a:t>🔄 การต่อสัญญาปีถัดไป (Year 2+):</a:t>
-            </a:r>
-          </a:p>
+                  <a:srgbClr val="FFFFFF"/>
+                </a:solidFill>
+              </a:defRPr>
+            </a:pPr>
+            <a:r>
+              <a:t>฿32,000 บาท / ชุด  (สั่งซื้อเดี่ยว: ฿40,000 บาท/ชุด)</a:t>
+            </a:r>
+          </a:p>
+        </p:txBody>
+      </p:sp>
+      <p:sp>
+        <p:nvSpPr>
+          <p:cNvPr id="10" name="TextBox 9"/>
+          <p:cNvSpPr txBox="1"/>
+          <p:nvPr/>
+        </p:nvSpPr>
+        <p:spPr>
+          <a:xfrm>
+            <a:off x="6492240" y="2560320"/>
+            <a:ext cx="4754880" cy="3474720"/>
+          </a:xfrm>
+          <a:prstGeom prst="rect">
+            <a:avLst/>
+          </a:prstGeom>
+          <a:noFill/>
+        </p:spPr>
+        <p:txBody>
+          <a:bodyPr wrap="square">
+            <a:spAutoFit/>
+          </a:bodyPr>
+          <a:lstStyle/>
+          <a:p/>
           <a:p>
             <a:pPr>
               <a:spcAft>
                 <a:spcPts val="200"/>
               </a:spcAft>
-              <a:defRPr sz="819">
-                <a:solidFill>
-                  <a:srgbClr val="64748B"/>
-                </a:solidFill>
-              </a:defRPr>
-            </a:pPr>
-            <a:r>
-              <a:t>• ปีที่ 1: ฟรี Cloud &amp; Dashboard ตลอด 12 เดือน (สูงสุด 100 จุด)</a:t>
+              <a:defRPr sz="850">
+                <a:solidFill>
+                  <a:srgbClr val="0F172A"/>
+                </a:solidFill>
+              </a:defRPr>
+            </a:pPr>
+            <a:r>
+              <a:t>✔ ตู้ IP65 + Switching 24V + Modela One + 4 เซนเซอร์</a:t>
             </a:r>
           </a:p>
           <a:p>
@@ -6705,14 +6688,89 @@
               <a:spcAft>
                 <a:spcPts val="200"/>
               </a:spcAft>
-              <a:defRPr sz="819">
-                <a:solidFill>
-                  <a:srgbClr val="64748B"/>
-                </a:solidFill>
-              </a:defRPr>
-            </a:pPr>
-            <a:r>
-              <a:t>• ปีที่ 2 เป็นต้นไป: ค่าบริการ Cloud Server License &amp; Software MA ปีละ 120,000 บาท/ปี (1.2k/จุด/ปี)</a:t>
+              <a:defRPr sz="850">
+                <a:solidFill>
+                  <a:srgbClr val="0F172A"/>
+                </a:solidFill>
+              </a:defRPr>
+            </a:pPr>
+            <a:r>
+              <a:t>✔ ตัดเราเตอร์ 4G LTE และซิมการ์ดออก (ประหยัดทันที ฿4,000)</a:t>
+            </a:r>
+          </a:p>
+          <a:p>
+            <a:pPr>
+              <a:spcAft>
+                <a:spcPts val="200"/>
+              </a:spcAft>
+              <a:defRPr sz="850">
+                <a:solidFill>
+                  <a:srgbClr val="0F172A"/>
+                </a:solidFill>
+              </a:defRPr>
+            </a:pPr>
+            <a:r>
+              <a:t>✔ เชื่อมต่อสัญญาณ Wi-Fi 2.4 GHz หน้างานโดยตรง</a:t>
+            </a:r>
+          </a:p>
+          <a:p>
+            <a:pPr>
+              <a:spcAft>
+                <a:spcPts val="200"/>
+              </a:spcAft>
+              <a:defRPr sz="850">
+                <a:solidFill>
+                  <a:srgbClr val="0F172A"/>
+                </a:solidFill>
+              </a:defRPr>
+            </a:pPr>
+            <a:r>
+              <a:t>✔ รวมระบบ Web Dashboard &amp; App รองรับ 100 จุด (ฟรี 1 ปี)</a:t>
+            </a:r>
+          </a:p>
+          <a:p>
+            <a:pPr>
+              <a:spcAft>
+                <a:spcPts val="200"/>
+              </a:spcAft>
+              <a:defRPr sz="850">
+                <a:solidFill>
+                  <a:srgbClr val="0F172A"/>
+                </a:solidFill>
+              </a:defRPr>
+            </a:pPr>
+            <a:r>
+              <a:t>✔ แจ้งเตือนอัตโนมัติ 24 ชม. ผ่าน Telegram (ฟรี) &amp; LINE OA</a:t>
+            </a:r>
+          </a:p>
+          <a:p>
+            <a:pPr>
+              <a:spcAft>
+                <a:spcPts val="200"/>
+              </a:spcAft>
+              <a:defRPr sz="850">
+                <a:solidFill>
+                  <a:srgbClr val="0F172A"/>
+                </a:solidFill>
+              </a:defRPr>
+            </a:pPr>
+            <a:r>
+              <a:t>✔ จัดส่งสำเร็จรูปพร้อมคู่มือ (ลูกค้าติดตั้งเอง) ประกัน 1 ปี</a:t>
+            </a:r>
+          </a:p>
+          <a:p>
+            <a:pPr>
+              <a:spcAft>
+                <a:spcPts val="200"/>
+              </a:spcAft>
+              <a:defRPr sz="850" b="1">
+                <a:solidFill>
+                  <a:srgbClr val="059669"/>
+                </a:solidFill>
+              </a:defRPr>
+            </a:pPr>
+            <a:r>
+              <a:t>✔ ★ ปีที่ 2: ค่าบริการ Cloud MA เดือนละ 300 บ./จุด (3,600 บ./จุด/ปี หรือ 360k/ปี สำหรับ 100 จุด) • ไม่มีภาระค่าบริการซิม 4G</a:t>
             </a:r>
           </a:p>
         </p:txBody>
@@ -6859,30 +6917,30 @@
               <a:spcAft>
                 <a:spcPts val="2400"/>
               </a:spcAft>
-              <a:defRPr sz="1100">
+              <a:defRPr sz="1080">
                 <a:solidFill>
                   <a:srgbClr val="E2E8F0"/>
                 </a:solidFill>
               </a:defRPr>
             </a:pPr>
             <a:r>
-              <a:t>• ราคาเสนอขายต่อชุด: ฿36,000 บาท / ชุด (ผูกสิทธิ์ Web Dashboard รองรับสูงสุด 100 จุด)</a:t>
+              <a:t>• 4.1 รุ่น 4G LTE Plug &amp; Play: ฿36,000 บาท/ชุด (สั่งเดี่ยว ฿45,000) มีเราเตอร์ + ซิม Unlimited ฟรีปีแรก</a:t>
             </a:r>
             <a:br/>
             <a:r>
-              <a:t>• สั่งซื้อชุดเดี่ยวปลีก (Standalone): ฿45,000 บาท / ชุด</a:t>
+              <a:t>• 4.2 รุ่น Wi-Fi Direct: ฿32,000 บาท/ชุด (สั่งเดี่ยว ฿40,000) ตัดเราเตอร์และซิมออก ประหยัดทันที ฿4,000/ชุด</a:t>
             </a:r>
             <a:br/>
             <a:r>
-              <a:t>• กรณีขยายระบบเกิน 100 จุดขึ้นไป: คิดค่าบริหารจัดการระบบและขยาย Server โหนดเพิ่มเติมตามขนาดโครงการ</a:t>
+              <a:t>• ปีที่ 2 เป็นต้นไป: ค่าบริการ Cloud Server License &amp; Software MA เดือนละ 300 บาท/จุด (เน็ตฟรีแค่ปีแรก)</a:t>
             </a:r>
             <a:br/>
             <a:r>
-              <a:t>• บริการเสริมติดตั้ง &amp; สอบเทียบหน้างาน (Optional Add-on): +฿8,000 บาท/จุด</a:t>
+              <a:t>• เงื่อนไขขยายเกิน 100 จุด: คิดค่าบริหารจัดการระบบและขยาย Server โหนดเพิ่มเติมตามขนาดโครงการ</a:t>
             </a:r>
             <a:br/>
             <a:r>
-              <a:t>• ปีที่ 2 เป็นต้นไป: ค่าบริการ Cloud Server &amp; Software MA เพียง 120,000 บาท/ปี (1,200 บ./จุด/ปี)</a:t>
+              <a:t>• บริการเสริมติดตั้ง &amp; สอบเทียบหน้างาน (Add-on): +฿8,000 บาท/จุด</a:t>
             </a:r>
           </a:p>
           <a:p>

--- a/NCT_Water_Nexus_Report_and_Pricing.pptx
+++ b/NCT_Water_Nexus_Report_and_Pricing.pptx
@@ -3254,7 +3254,7 @@
               </a:defRPr>
             </a:pPr>
             <a:r>
-              <a:t>NCT Water Solutions  •  System Version 2.6 Pro  •  September 2026</a:t>
+              <a:t>NCT PROSPERA TECH SOLUTIONS CO., LTD.  •  System Version 2.6 Pro  •  September 2026</a:t>
             </a:r>
           </a:p>
         </p:txBody>
@@ -3318,7 +3318,7 @@
               </a:defRPr>
             </a:pPr>
             <a:r>
-              <a:t>ชุดอุปกรณ์ตรวจวัดคุณภาพน้ำสำเร็จรูป (NCT WATER NEXUS)</a:t>
+              <a:t>NCT PROSPERA TECH SOLUTIONS CO., LTD. • WATER QUALITY MONITORING</a:t>
             </a:r>
           </a:p>
           <a:p>
@@ -4162,7 +4162,7 @@
               </a:defRPr>
             </a:pPr>
             <a:r>
-              <a:t>ชุดอุปกรณ์ตรวจวัดคุณภาพน้ำสำเร็จรูป (NCT WATER NEXUS)</a:t>
+              <a:t>NCT PROSPERA TECH SOLUTIONS CO., LTD. • WATER QUALITY MONITORING</a:t>
             </a:r>
           </a:p>
           <a:p>
@@ -4435,7 +4435,7 @@
               </a:defRPr>
             </a:pPr>
             <a:r>
-              <a:t>ชุดอุปกรณ์ตรวจวัดคุณภาพน้ำสำเร็จรูป (NCT WATER NEXUS)</a:t>
+              <a:t>NCT PROSPERA TECH SOLUTIONS CO., LTD. • WATER QUALITY MONITORING</a:t>
             </a:r>
           </a:p>
           <a:p>
@@ -4975,7 +4975,7 @@
               </a:defRPr>
             </a:pPr>
             <a:r>
-              <a:t>ชุดอุปกรณ์ตรวจวัดคุณภาพน้ำสำเร็จรูป (NCT WATER NEXUS)</a:t>
+              <a:t>NCT PROSPERA TECH SOLUTIONS CO., LTD. • WATER QUALITY MONITORING</a:t>
             </a:r>
           </a:p>
           <a:p>
@@ -5339,7 +5339,7 @@
               </a:defRPr>
             </a:pPr>
             <a:r>
-              <a:t>ชุดอุปกรณ์ตรวจวัดคุณภาพน้ำสำเร็จรูป (NCT WATER NEXUS)</a:t>
+              <a:t>NCT PROSPERA TECH SOLUTIONS CO., LTD. • WATER QUALITY MONITORING</a:t>
             </a:r>
           </a:p>
           <a:p>
@@ -6230,7 +6230,7 @@
               </a:defRPr>
             </a:pPr>
             <a:r>
-              <a:t>ชุดอุปกรณ์ตรวจวัดคุณภาพน้ำสำเร็จรูป (NCT WATER NEXUS)</a:t>
+              <a:t>NCT PROSPERA TECH SOLUTIONS CO., LTD. • WATER QUALITY MONITORING</a:t>
             </a:r>
           </a:p>
           <a:p>
@@ -6909,7 +6909,7 @@
               </a:defRPr>
             </a:pPr>
             <a:r>
-              <a:t>ชุดอุปกรณ์ตรวจวัดคุณภาพน้ำสำเร็จรูปพร้อมระบบออนไลน์ (ราคาต่อชุด):</a:t>
+              <a:t>NCT PROSPERA TECH SOLUTIONS CO., LTD.</a:t>
             </a:r>
           </a:p>
           <a:p>

--- a/NCT_Water_Nexus_Report_and_Pricing.pptx
+++ b/NCT_Water_Nexus_Report_and_Pricing.pptx
@@ -6461,7 +6461,7 @@
               </a:defRPr>
             </a:pPr>
             <a:r>
-              <a:t>✔ รวมระบบ Web Dashboard &amp; App รองรับ 100 จุด (ฟรี 1 ปี)</a:t>
+              <a:t>✔ รวมระบบ Web Dashboard &amp; App รองรับ 100 จุด (Admin 5 / Viewers 100 ฟรี 1 ปี)</a:t>
             </a:r>
           </a:p>
           <a:p>
@@ -6725,7 +6725,7 @@
               </a:defRPr>
             </a:pPr>
             <a:r>
-              <a:t>✔ รวมระบบ Web Dashboard &amp; App รองรับ 100 จุด (ฟรี 1 ปี)</a:t>
+              <a:t>✔ รวมระบบ Web Dashboard &amp; App รองรับ 100 จุด (Admin 5 / Viewers 100 ฟรี 1 ปี)</a:t>
             </a:r>
           </a:p>
           <a:p>
@@ -6929,6 +6929,10 @@
             <a:br/>
             <a:r>
               <a:t>• 4.2 รุ่น Wi-Fi Direct: ฿32,000 บาท/ชุด (สั่งเดี่ยว ฿40,000) ตัดเราเตอร์และซิมออก ประหยัดทันที ฿4,000/ชุด</a:t>
+            </a:r>
+            <a:br/>
+            <a:r>
+              <a:t>• สิทธิ์การใช้งานระบบ: รองรับ Admin 5 บัญชี และ Viewers 100 บัญชี</a:t>
             </a:r>
             <a:br/>
             <a:r>

--- a/NCT_Water_Nexus_Report_and_Pricing.pptx
+++ b/NCT_Water_Nexus_Report_and_Pricing.pptx
@@ -3230,11 +3230,11 @@
             </a:r>
             <a:br/>
             <a:r>
-              <a:t>• 4.1 รุ่น 4G LTE Plug &amp; Play: ฿36,000 / ชุด (มีเราเตอร์ + ซิม Unlimited ฟรีปีแรก • สั่งปลีก ฿45,000 / ชุด)</a:t>
+              <a:t>• 4.1 รุ่น 4G LTE Plug &amp; Play: ฿36,000 / ชุด (มีเราเตอร์ + ซิม Unlimited ฟรีปีแรก • สั่งปลีก ฿39,500 / ชุด)</a:t>
             </a:r>
             <a:br/>
             <a:r>
-              <a:t>• 4.2 รุ่น Wi-Fi Direct: ฿32,000 / ชุด (ตัดเราเตอร์และซิมออก ต่อ Wi-Fi หน้างานตรง • สั่งปลีก ฿40,000 / ชุด)</a:t>
+              <a:t>• 4.2 รุ่น Wi-Fi Direct: ฿32,000 / ชุด (ตัดเราเตอร์และซิมออก ต่อ Wi-Fi หน้างานตรง • สั่งปลีก ฿35,500 / ชุด)</a:t>
             </a:r>
             <a:br/>
             <a:r>
@@ -6377,7 +6377,7 @@
               </a:defRPr>
             </a:pPr>
             <a:r>
-              <a:t>฿36,000 บาท / ชุด  (สั่งซื้อเดี่ยว: ฿45,000 บาท/ชุด)</a:t>
+              <a:t>฿36,000 บาท / ชุด  (สั่งซื้อเดี่ยว: ฿39,500 บาท/ชุด)</a:t>
             </a:r>
           </a:p>
         </p:txBody>
@@ -6641,7 +6641,7 @@
               </a:defRPr>
             </a:pPr>
             <a:r>
-              <a:t>฿32,000 บาท / ชุด  (สั่งซื้อเดี่ยว: ฿40,000 บาท/ชุด)</a:t>
+              <a:t>฿32,000 บาท / ชุด  (สั่งซื้อเดี่ยว: ฿35,500 บาท/ชุด)</a:t>
             </a:r>
           </a:p>
         </p:txBody>
@@ -6924,11 +6924,11 @@
               </a:defRPr>
             </a:pPr>
             <a:r>
-              <a:t>• 4.1 รุ่น 4G LTE Plug &amp; Play: ฿36,000 บาท/ชุด (สั่งเดี่ยว ฿45,000) มีเราเตอร์ + ซิม Unlimited ฟรีปีแรก</a:t>
+              <a:t>• 4.1 รุ่น 4G LTE Plug &amp; Play: ฿36,000 บาท/ชุด (สั่งเดี่ยว ฿39,500) มีเราเตอร์ + ซิม Unlimited ฟรีปีแรก</a:t>
             </a:r>
             <a:br/>
             <a:r>
-              <a:t>• 4.2 รุ่น Wi-Fi Direct: ฿32,000 บาท/ชุด (สั่งเดี่ยว ฿40,000) ตัดเราเตอร์และซิมออก ประหยัดทันที ฿4,000/ชุด</a:t>
+              <a:t>• 4.2 รุ่น Wi-Fi Direct: ฿32,000 บาท/ชุด (สั่งเดี่ยว ฿35,500) ตัดเราเตอร์และซิมออก ประหยัดทันที ฿4,000/ชุด</a:t>
             </a:r>
             <a:br/>
             <a:r>

--- a/NCT_Water_Nexus_Report_and_Pricing.pptx
+++ b/NCT_Water_Nexus_Report_and_Pricing.pptx
@@ -6461,7 +6461,7 @@
               </a:defRPr>
             </a:pPr>
             <a:r>
-              <a:t>✔ รวมระบบ Web Dashboard &amp; App รองรับ 100 จุด (Admin 5 / Viewers 100 ฟรี 1 ปี)</a:t>
+              <a:t>✔ รวมระบบ Web Dashboard &amp; App รองรับ 100 จุด (Admin 5 / ฟรี 100 Users แรก ฟรี 1 ปี)</a:t>
             </a:r>
           </a:p>
           <a:p>
@@ -6725,7 +6725,7 @@
               </a:defRPr>
             </a:pPr>
             <a:r>
-              <a:t>✔ รวมระบบ Web Dashboard &amp; App รองรับ 100 จุด (Admin 5 / Viewers 100 ฟรี 1 ปี)</a:t>
+              <a:t>✔ รวมระบบ Web Dashboard &amp; App รองรับ 100 จุด (Admin 5 / ฟรี 100 Users แรก ฟรี 1 ปี)</a:t>
             </a:r>
           </a:p>
           <a:p>
